--- a/reference/archie/presentations/NPQG Assemblies - Early Life.pptx
+++ b/reference/archie/presentations/NPQG Assemblies - Early Life.pptx
@@ -3,25 +3,16 @@
 <p:presentation xmlns:a="http://schemas.openxmlformats.org/drawingml/2006/main" xmlns:r="http://schemas.openxmlformats.org/officeDocument/2006/relationships" xmlns:p="http://schemas.openxmlformats.org/presentationml/2006/main" saveSubsetFonts="1" autoCompressPictures="0">
   <p:sldMasterIdLst>
     <p:sldMasterId id="2147483655" r:id="rId1"/>
-    <p:sldMasterId id="2147483667" r:id="rId2"/>
   </p:sldMasterIdLst>
   <p:notesMasterIdLst>
-    <p:notesMasterId r:id="rId16"/>
+    <p:notesMasterId r:id="rId7"/>
   </p:notesMasterIdLst>
   <p:sldIdLst>
-    <p:sldId id="807" r:id="rId3"/>
-    <p:sldId id="853" r:id="rId4"/>
-    <p:sldId id="812" r:id="rId5"/>
-    <p:sldId id="851" r:id="rId6"/>
-    <p:sldId id="852" r:id="rId7"/>
-    <p:sldId id="856" r:id="rId8"/>
-    <p:sldId id="854" r:id="rId9"/>
-    <p:sldId id="808" r:id="rId10"/>
-    <p:sldId id="814" r:id="rId11"/>
-    <p:sldId id="855" r:id="rId12"/>
-    <p:sldId id="809" r:id="rId13"/>
-    <p:sldId id="815" r:id="rId14"/>
-    <p:sldId id="382" r:id="rId15"/>
+    <p:sldId id="856" r:id="rId2"/>
+    <p:sldId id="808" r:id="rId3"/>
+    <p:sldId id="855" r:id="rId4"/>
+    <p:sldId id="809" r:id="rId5"/>
+    <p:sldId id="815" r:id="rId6"/>
   </p:sldIdLst>
   <p:sldSz cx="12192000" cy="6858000"/>
   <p:notesSz cx="6858000" cy="9144000"/>
@@ -3507,7 +3498,7 @@
           <a:p>
             <a:fld id="{37505754-C48E-DF4E-9B84-E7B6A3B19E2D}" type="datetimeFigureOut">
               <a:rPr lang="en-US" smtClean="0"/>
-              <a:t>10/14/24</a:t>
+              <a:t>7/3/26</a:t>
             </a:fld>
             <a:endParaRPr lang="en-US"/>
           </a:p>
@@ -3779,7 +3770,13 @@
   <p:cSld>
     <p:spTree>
       <p:nvGrpSpPr>
-        <p:cNvPr id="1" name=""/>
+        <p:cNvPr id="1" name="">
+          <a:extLst>
+            <a:ext uri="{FF2B5EF4-FFF2-40B4-BE49-F238E27FC236}">
+              <a16:creationId xmlns:a16="http://schemas.microsoft.com/office/drawing/2014/main" id="{5403BC77-BAF6-CD28-FA7D-D59C5525AA57}"/>
+            </a:ext>
+          </a:extLst>
+        </p:cNvPr>
         <p:cNvGrpSpPr/>
         <p:nvPr/>
       </p:nvGrpSpPr>
@@ -3793,7 +3790,13 @@
       </p:grpSpPr>
       <p:sp>
         <p:nvSpPr>
-          <p:cNvPr id="2" name="Slide Image Placeholder 1"/>
+          <p:cNvPr id="2" name="Slide Image Placeholder 1">
+            <a:extLst>
+              <a:ext uri="{FF2B5EF4-FFF2-40B4-BE49-F238E27FC236}">
+                <a16:creationId xmlns:a16="http://schemas.microsoft.com/office/drawing/2014/main" id="{91FFD670-1CEC-D74C-4A05-51A82D90E23C}"/>
+              </a:ext>
+            </a:extLst>
+          </p:cNvPr>
           <p:cNvSpPr>
             <a:spLocks noGrp="1" noRot="1" noChangeAspect="1"/>
           </p:cNvSpPr>
@@ -3805,7 +3808,13 @@
       </p:sp>
       <p:sp>
         <p:nvSpPr>
-          <p:cNvPr id="3" name="Notes Placeholder 2"/>
+          <p:cNvPr id="3" name="Notes Placeholder 2">
+            <a:extLst>
+              <a:ext uri="{FF2B5EF4-FFF2-40B4-BE49-F238E27FC236}">
+                <a16:creationId xmlns:a16="http://schemas.microsoft.com/office/drawing/2014/main" id="{01E84B4A-6795-02D7-673A-BCCB278BA2B5}"/>
+              </a:ext>
+            </a:extLst>
+          </p:cNvPr>
           <p:cNvSpPr>
             <a:spLocks noGrp="1"/>
           </p:cNvSpPr>
@@ -3878,7 +3887,13 @@
       </p:sp>
       <p:sp>
         <p:nvSpPr>
-          <p:cNvPr id="4" name="Slide Number Placeholder 3"/>
+          <p:cNvPr id="4" name="Slide Number Placeholder 3">
+            <a:extLst>
+              <a:ext uri="{FF2B5EF4-FFF2-40B4-BE49-F238E27FC236}">
+                <a16:creationId xmlns:a16="http://schemas.microsoft.com/office/drawing/2014/main" id="{7F7994F9-2BF6-D957-AB37-2EBE65B4076B}"/>
+              </a:ext>
+            </a:extLst>
+          </p:cNvPr>
           <p:cNvSpPr>
             <a:spLocks noGrp="1"/>
           </p:cNvSpPr>
@@ -3962,7 +3977,7 @@
     </p:spTree>
     <p:extLst>
       <p:ext uri="{BB962C8B-B14F-4D97-AF65-F5344CB8AC3E}">
-        <p14:creationId xmlns:p14="http://schemas.microsoft.com/office/powerpoint/2010/main" val="11801368"/>
+        <p14:creationId xmlns:p14="http://schemas.microsoft.com/office/powerpoint/2010/main" val="4002358058"/>
       </p:ext>
     </p:extLst>
   </p:cSld>
@@ -3973,450 +3988,6 @@
 </file>
 
 <file path=ppt/notesSlides/notesSlide2.xml><?xml version="1.0" encoding="utf-8"?>
-<p:notes xmlns:a="http://schemas.openxmlformats.org/drawingml/2006/main" xmlns:r="http://schemas.openxmlformats.org/officeDocument/2006/relationships" xmlns:p="http://schemas.openxmlformats.org/presentationml/2006/main">
-  <p:cSld>
-    <p:spTree>
-      <p:nvGrpSpPr>
-        <p:cNvPr id="1" name="">
-          <a:extLst>
-            <a:ext uri="{FF2B5EF4-FFF2-40B4-BE49-F238E27FC236}">
-              <a16:creationId xmlns:a16="http://schemas.microsoft.com/office/drawing/2014/main" id="{5403BC77-BAF6-CD28-FA7D-D59C5525AA57}"/>
-            </a:ext>
-          </a:extLst>
-        </p:cNvPr>
-        <p:cNvGrpSpPr/>
-        <p:nvPr/>
-      </p:nvGrpSpPr>
-      <p:grpSpPr>
-        <a:xfrm>
-          <a:off x="0" y="0"/>
-          <a:ext cx="0" cy="0"/>
-          <a:chOff x="0" y="0"/>
-          <a:chExt cx="0" cy="0"/>
-        </a:xfrm>
-      </p:grpSpPr>
-      <p:sp>
-        <p:nvSpPr>
-          <p:cNvPr id="2" name="Slide Image Placeholder 1">
-            <a:extLst>
-              <a:ext uri="{FF2B5EF4-FFF2-40B4-BE49-F238E27FC236}">
-                <a16:creationId xmlns:a16="http://schemas.microsoft.com/office/drawing/2014/main" id="{91FFD670-1CEC-D74C-4A05-51A82D90E23C}"/>
-              </a:ext>
-            </a:extLst>
-          </p:cNvPr>
-          <p:cNvSpPr>
-            <a:spLocks noGrp="1" noRot="1" noChangeAspect="1"/>
-          </p:cNvSpPr>
-          <p:nvPr>
-            <p:ph type="sldImg"/>
-          </p:nvPr>
-        </p:nvSpPr>
-        <p:spPr/>
-      </p:sp>
-      <p:sp>
-        <p:nvSpPr>
-          <p:cNvPr id="3" name="Notes Placeholder 2">
-            <a:extLst>
-              <a:ext uri="{FF2B5EF4-FFF2-40B4-BE49-F238E27FC236}">
-                <a16:creationId xmlns:a16="http://schemas.microsoft.com/office/drawing/2014/main" id="{01E84B4A-6795-02D7-673A-BCCB278BA2B5}"/>
-              </a:ext>
-            </a:extLst>
-          </p:cNvPr>
-          <p:cNvSpPr>
-            <a:spLocks noGrp="1"/>
-          </p:cNvSpPr>
-          <p:nvPr>
-            <p:ph type="body" idx="1"/>
-          </p:nvPr>
-        </p:nvSpPr>
-        <p:spPr/>
-        <p:txBody>
-          <a:bodyPr/>
-          <a:lstStyle/>
-          <a:p>
-            <a:r>
-              <a:rPr lang="en-US" dirty="0"/>
-              <a:t>Hi. Welcome to this episode of Emergent Nature. </a:t>
-            </a:r>
-          </a:p>
-          <a:p>
-            <a:endParaRPr lang="en-US" dirty="0"/>
-          </a:p>
-          <a:p>
-            <a:r>
-              <a:rPr lang="en-US" dirty="0"/>
-              <a:t>My name is J Mark Morris. I go by Mark.</a:t>
-            </a:r>
-          </a:p>
-          <a:p>
-            <a:endParaRPr lang="en-US" dirty="0"/>
-          </a:p>
-          <a:p>
-            <a:r>
-              <a:rPr lang="en-US" dirty="0"/>
-              <a:t>In this episode I’ll discuss the error that caused science to go off track into general relativity and quantum mechanics.</a:t>
-            </a:r>
-          </a:p>
-          <a:p>
-            <a:endParaRPr lang="en-US" dirty="0"/>
-          </a:p>
-          <a:p>
-            <a:r>
-              <a:rPr lang="en-US" dirty="0"/>
-              <a:t>That may seem like an unusual thing to say, since general relativity and quantum theory are generally considered to be successful effective theories.</a:t>
-            </a:r>
-          </a:p>
-          <a:p>
-            <a:endParaRPr lang="en-US" dirty="0"/>
-          </a:p>
-          <a:p>
-            <a:r>
-              <a:rPr lang="en-US" dirty="0"/>
-              <a:t>However, as we will see, an error circa 1900 threw science off track.</a:t>
-            </a:r>
-          </a:p>
-          <a:p>
-            <a:endParaRPr lang="en-US" dirty="0"/>
-          </a:p>
-          <a:p>
-            <a:r>
-              <a:rPr lang="en-US" dirty="0"/>
-              <a:t>There is a parsimonious solution to nature.</a:t>
-            </a:r>
-          </a:p>
-          <a:p>
-            <a:endParaRPr lang="en-US" dirty="0"/>
-          </a:p>
-          <a:p>
-            <a:endParaRPr lang="en-US" dirty="0"/>
-          </a:p>
-        </p:txBody>
-      </p:sp>
-      <p:sp>
-        <p:nvSpPr>
-          <p:cNvPr id="4" name="Slide Number Placeholder 3">
-            <a:extLst>
-              <a:ext uri="{FF2B5EF4-FFF2-40B4-BE49-F238E27FC236}">
-                <a16:creationId xmlns:a16="http://schemas.microsoft.com/office/drawing/2014/main" id="{7F7994F9-2BF6-D957-AB37-2EBE65B4076B}"/>
-              </a:ext>
-            </a:extLst>
-          </p:cNvPr>
-          <p:cNvSpPr>
-            <a:spLocks noGrp="1"/>
-          </p:cNvSpPr>
-          <p:nvPr>
-            <p:ph type="sldNum" sz="quarter" idx="5"/>
-          </p:nvPr>
-        </p:nvSpPr>
-        <p:spPr/>
-        <p:txBody>
-          <a:bodyPr/>
-          <a:lstStyle/>
-          <a:p>
-            <a:pPr marL="0" marR="0" lvl="0" indent="0" algn="r" defTabSz="914400" rtl="0" eaLnBrk="1" fontAlgn="auto" latinLnBrk="0" hangingPunct="1">
-              <a:lnSpc>
-                <a:spcPct val="100000"/>
-              </a:lnSpc>
-              <a:spcBef>
-                <a:spcPts val="0"/>
-              </a:spcBef>
-              <a:spcAft>
-                <a:spcPts val="0"/>
-              </a:spcAft>
-              <a:buClrTx/>
-              <a:buSzTx/>
-              <a:buFontTx/>
-              <a:buNone/>
-              <a:tabLst/>
-              <a:defRPr/>
-            </a:pPr>
-            <a:fld id="{4DC398A3-AF21-A342-B6A8-6929C36BB1BF}" type="slidenum">
-              <a:rPr kumimoji="0" lang="en-US" sz="1200" b="0" i="0" u="none" strike="noStrike" kern="1200" cap="none" spc="0" normalizeH="0" baseline="0" noProof="0" smtClean="0">
-                <a:ln>
-                  <a:noFill/>
-                </a:ln>
-                <a:solidFill>
-                  <a:prstClr val="black"/>
-                </a:solidFill>
-                <a:effectLst/>
-                <a:uLnTx/>
-                <a:uFillTx/>
-                <a:latin typeface="Calibri" panose="020F0502020204030204"/>
-                <a:ea typeface="+mn-ea"/>
-                <a:cs typeface="+mn-cs"/>
-              </a:rPr>
-              <a:pPr marL="0" marR="0" lvl="0" indent="0" algn="r" defTabSz="914400" rtl="0" eaLnBrk="1" fontAlgn="auto" latinLnBrk="0" hangingPunct="1">
-                <a:lnSpc>
-                  <a:spcPct val="100000"/>
-                </a:lnSpc>
-                <a:spcBef>
-                  <a:spcPts val="0"/>
-                </a:spcBef>
-                <a:spcAft>
-                  <a:spcPts val="0"/>
-                </a:spcAft>
-                <a:buClrTx/>
-                <a:buSzTx/>
-                <a:buFontTx/>
-                <a:buNone/>
-                <a:tabLst/>
-                <a:defRPr/>
-              </a:pPr>
-              <a:t>6</a:t>
-            </a:fld>
-            <a:endParaRPr kumimoji="0" lang="en-US" sz="1200" b="0" i="0" u="none" strike="noStrike" kern="1200" cap="none" spc="0" normalizeH="0" baseline="0" noProof="0">
-              <a:ln>
-                <a:noFill/>
-              </a:ln>
-              <a:solidFill>
-                <a:prstClr val="black"/>
-              </a:solidFill>
-              <a:effectLst/>
-              <a:uLnTx/>
-              <a:uFillTx/>
-              <a:latin typeface="Calibri" panose="020F0502020204030204"/>
-              <a:ea typeface="+mn-ea"/>
-              <a:cs typeface="+mn-cs"/>
-            </a:endParaRPr>
-          </a:p>
-        </p:txBody>
-      </p:sp>
-    </p:spTree>
-    <p:extLst>
-      <p:ext uri="{BB962C8B-B14F-4D97-AF65-F5344CB8AC3E}">
-        <p14:creationId xmlns:p14="http://schemas.microsoft.com/office/powerpoint/2010/main" val="4002358058"/>
-      </p:ext>
-    </p:extLst>
-  </p:cSld>
-  <p:clrMapOvr>
-    <a:masterClrMapping/>
-  </p:clrMapOvr>
-</p:notes>
-</file>
-
-<file path=ppt/notesSlides/notesSlide3.xml><?xml version="1.0" encoding="utf-8"?>
-<p:notes xmlns:a="http://schemas.openxmlformats.org/drawingml/2006/main" xmlns:r="http://schemas.openxmlformats.org/officeDocument/2006/relationships" xmlns:p="http://schemas.openxmlformats.org/presentationml/2006/main">
-  <p:cSld>
-    <p:spTree>
-      <p:nvGrpSpPr>
-        <p:cNvPr id="1" name="">
-          <a:extLst>
-            <a:ext uri="{FF2B5EF4-FFF2-40B4-BE49-F238E27FC236}">
-              <a16:creationId xmlns:a16="http://schemas.microsoft.com/office/drawing/2014/main" id="{2C26A51F-C473-BEB1-7F16-0CD4AECE5CF2}"/>
-            </a:ext>
-          </a:extLst>
-        </p:cNvPr>
-        <p:cNvGrpSpPr/>
-        <p:nvPr/>
-      </p:nvGrpSpPr>
-      <p:grpSpPr>
-        <a:xfrm>
-          <a:off x="0" y="0"/>
-          <a:ext cx="0" cy="0"/>
-          <a:chOff x="0" y="0"/>
-          <a:chExt cx="0" cy="0"/>
-        </a:xfrm>
-      </p:grpSpPr>
-      <p:sp>
-        <p:nvSpPr>
-          <p:cNvPr id="2" name="Slide Image Placeholder 1">
-            <a:extLst>
-              <a:ext uri="{FF2B5EF4-FFF2-40B4-BE49-F238E27FC236}">
-                <a16:creationId xmlns:a16="http://schemas.microsoft.com/office/drawing/2014/main" id="{F3878337-2DEA-70F6-EBA6-80E966CEE408}"/>
-              </a:ext>
-            </a:extLst>
-          </p:cNvPr>
-          <p:cNvSpPr>
-            <a:spLocks noGrp="1" noRot="1" noChangeAspect="1"/>
-          </p:cNvSpPr>
-          <p:nvPr>
-            <p:ph type="sldImg"/>
-          </p:nvPr>
-        </p:nvSpPr>
-        <p:spPr/>
-      </p:sp>
-      <p:sp>
-        <p:nvSpPr>
-          <p:cNvPr id="3" name="Notes Placeholder 2">
-            <a:extLst>
-              <a:ext uri="{FF2B5EF4-FFF2-40B4-BE49-F238E27FC236}">
-                <a16:creationId xmlns:a16="http://schemas.microsoft.com/office/drawing/2014/main" id="{FA644BCC-ECDA-D95F-9830-46F4F2EC7872}"/>
-              </a:ext>
-            </a:extLst>
-          </p:cNvPr>
-          <p:cNvSpPr>
-            <a:spLocks noGrp="1"/>
-          </p:cNvSpPr>
-          <p:nvPr>
-            <p:ph type="body" idx="1"/>
-          </p:nvPr>
-        </p:nvSpPr>
-        <p:spPr/>
-        <p:txBody>
-          <a:bodyPr/>
-          <a:lstStyle/>
-          <a:p>
-            <a:r>
-              <a:rPr lang="en-US" dirty="0"/>
-              <a:t>Hi. Welcome to this episode of Emergent Nature. </a:t>
-            </a:r>
-          </a:p>
-          <a:p>
-            <a:endParaRPr lang="en-US" dirty="0"/>
-          </a:p>
-          <a:p>
-            <a:r>
-              <a:rPr lang="en-US" dirty="0"/>
-              <a:t>My name is J Mark Morris. I go by Mark.</a:t>
-            </a:r>
-          </a:p>
-          <a:p>
-            <a:endParaRPr lang="en-US" dirty="0"/>
-          </a:p>
-          <a:p>
-            <a:r>
-              <a:rPr lang="en-US" dirty="0"/>
-              <a:t>In this episode I’ll discuss the error that caused science to go off track into general relativity and quantum mechanics.</a:t>
-            </a:r>
-          </a:p>
-          <a:p>
-            <a:endParaRPr lang="en-US" dirty="0"/>
-          </a:p>
-          <a:p>
-            <a:r>
-              <a:rPr lang="en-US" dirty="0"/>
-              <a:t>That may seem like an unusual thing to say, since general relativity and quantum theory are generally considered to be successful effective theories.</a:t>
-            </a:r>
-          </a:p>
-          <a:p>
-            <a:endParaRPr lang="en-US" dirty="0"/>
-          </a:p>
-          <a:p>
-            <a:r>
-              <a:rPr lang="en-US" dirty="0"/>
-              <a:t>However, as we will see, an error circa 1900 threw science off track.</a:t>
-            </a:r>
-          </a:p>
-          <a:p>
-            <a:endParaRPr lang="en-US" dirty="0"/>
-          </a:p>
-          <a:p>
-            <a:r>
-              <a:rPr lang="en-US" dirty="0"/>
-              <a:t>There is a parsimonious solution to nature.</a:t>
-            </a:r>
-          </a:p>
-          <a:p>
-            <a:endParaRPr lang="en-US" dirty="0"/>
-          </a:p>
-          <a:p>
-            <a:endParaRPr lang="en-US" dirty="0"/>
-          </a:p>
-        </p:txBody>
-      </p:sp>
-      <p:sp>
-        <p:nvSpPr>
-          <p:cNvPr id="4" name="Slide Number Placeholder 3">
-            <a:extLst>
-              <a:ext uri="{FF2B5EF4-FFF2-40B4-BE49-F238E27FC236}">
-                <a16:creationId xmlns:a16="http://schemas.microsoft.com/office/drawing/2014/main" id="{AEC3111B-1A98-632A-1261-807AD674565C}"/>
-              </a:ext>
-            </a:extLst>
-          </p:cNvPr>
-          <p:cNvSpPr>
-            <a:spLocks noGrp="1"/>
-          </p:cNvSpPr>
-          <p:nvPr>
-            <p:ph type="sldNum" sz="quarter" idx="5"/>
-          </p:nvPr>
-        </p:nvSpPr>
-        <p:spPr/>
-        <p:txBody>
-          <a:bodyPr/>
-          <a:lstStyle/>
-          <a:p>
-            <a:pPr marL="0" marR="0" lvl="0" indent="0" algn="r" defTabSz="914400" rtl="0" eaLnBrk="1" fontAlgn="auto" latinLnBrk="0" hangingPunct="1">
-              <a:lnSpc>
-                <a:spcPct val="100000"/>
-              </a:lnSpc>
-              <a:spcBef>
-                <a:spcPts val="0"/>
-              </a:spcBef>
-              <a:spcAft>
-                <a:spcPts val="0"/>
-              </a:spcAft>
-              <a:buClrTx/>
-              <a:buSzTx/>
-              <a:buFontTx/>
-              <a:buNone/>
-              <a:tabLst/>
-              <a:defRPr/>
-            </a:pPr>
-            <a:fld id="{4DC398A3-AF21-A342-B6A8-6929C36BB1BF}" type="slidenum">
-              <a:rPr kumimoji="0" lang="en-US" sz="1200" b="0" i="0" u="none" strike="noStrike" kern="1200" cap="none" spc="0" normalizeH="0" baseline="0" noProof="0" smtClean="0">
-                <a:ln>
-                  <a:noFill/>
-                </a:ln>
-                <a:solidFill>
-                  <a:prstClr val="black"/>
-                </a:solidFill>
-                <a:effectLst/>
-                <a:uLnTx/>
-                <a:uFillTx/>
-                <a:latin typeface="Calibri" panose="020F0502020204030204"/>
-                <a:ea typeface="+mn-ea"/>
-                <a:cs typeface="+mn-cs"/>
-              </a:rPr>
-              <a:pPr marL="0" marR="0" lvl="0" indent="0" algn="r" defTabSz="914400" rtl="0" eaLnBrk="1" fontAlgn="auto" latinLnBrk="0" hangingPunct="1">
-                <a:lnSpc>
-                  <a:spcPct val="100000"/>
-                </a:lnSpc>
-                <a:spcBef>
-                  <a:spcPts val="0"/>
-                </a:spcBef>
-                <a:spcAft>
-                  <a:spcPts val="0"/>
-                </a:spcAft>
-                <a:buClrTx/>
-                <a:buSzTx/>
-                <a:buFontTx/>
-                <a:buNone/>
-                <a:tabLst/>
-                <a:defRPr/>
-              </a:pPr>
-              <a:t>7</a:t>
-            </a:fld>
-            <a:endParaRPr kumimoji="0" lang="en-US" sz="1200" b="0" i="0" u="none" strike="noStrike" kern="1200" cap="none" spc="0" normalizeH="0" baseline="0" noProof="0">
-              <a:ln>
-                <a:noFill/>
-              </a:ln>
-              <a:solidFill>
-                <a:prstClr val="black"/>
-              </a:solidFill>
-              <a:effectLst/>
-              <a:uLnTx/>
-              <a:uFillTx/>
-              <a:latin typeface="Calibri" panose="020F0502020204030204"/>
-              <a:ea typeface="+mn-ea"/>
-              <a:cs typeface="+mn-cs"/>
-            </a:endParaRPr>
-          </a:p>
-        </p:txBody>
-      </p:sp>
-    </p:spTree>
-    <p:extLst>
-      <p:ext uri="{BB962C8B-B14F-4D97-AF65-F5344CB8AC3E}">
-        <p14:creationId xmlns:p14="http://schemas.microsoft.com/office/powerpoint/2010/main" val="3303015494"/>
-      </p:ext>
-    </p:extLst>
-  </p:cSld>
-  <p:clrMapOvr>
-    <a:masterClrMapping/>
-  </p:clrMapOvr>
-</p:notes>
-</file>
-
-<file path=ppt/notesSlides/notesSlide4.xml><?xml version="1.0" encoding="utf-8"?>
 <p:notes xmlns:a="http://schemas.openxmlformats.org/drawingml/2006/main" xmlns:r="http://schemas.openxmlformats.org/officeDocument/2006/relationships" xmlns:p="http://schemas.openxmlformats.org/presentationml/2006/main">
   <p:cSld>
     <p:spTree>
@@ -4606,7 +4177,7 @@
                 <a:tabLst/>
                 <a:defRPr/>
               </a:pPr>
-              <a:t>8</a:t>
+              <a:t>2</a:t>
             </a:fld>
             <a:endParaRPr kumimoji="0" lang="en-US" sz="1200" b="0" i="0" u="none" strike="noStrike" kern="1200" cap="none" spc="0" normalizeH="0" baseline="0" noProof="0">
               <a:ln>
@@ -4638,229 +4209,7 @@
 </p:notes>
 </file>
 
-<file path=ppt/notesSlides/notesSlide5.xml><?xml version="1.0" encoding="utf-8"?>
-<p:notes xmlns:a="http://schemas.openxmlformats.org/drawingml/2006/main" xmlns:r="http://schemas.openxmlformats.org/officeDocument/2006/relationships" xmlns:p="http://schemas.openxmlformats.org/presentationml/2006/main">
-  <p:cSld>
-    <p:spTree>
-      <p:nvGrpSpPr>
-        <p:cNvPr id="1" name="">
-          <a:extLst>
-            <a:ext uri="{FF2B5EF4-FFF2-40B4-BE49-F238E27FC236}">
-              <a16:creationId xmlns:a16="http://schemas.microsoft.com/office/drawing/2014/main" id="{A111E76E-E5AE-CC4A-F87E-612828AF379C}"/>
-            </a:ext>
-          </a:extLst>
-        </p:cNvPr>
-        <p:cNvGrpSpPr/>
-        <p:nvPr/>
-      </p:nvGrpSpPr>
-      <p:grpSpPr>
-        <a:xfrm>
-          <a:off x="0" y="0"/>
-          <a:ext cx="0" cy="0"/>
-          <a:chOff x="0" y="0"/>
-          <a:chExt cx="0" cy="0"/>
-        </a:xfrm>
-      </p:grpSpPr>
-      <p:sp>
-        <p:nvSpPr>
-          <p:cNvPr id="2" name="Slide Image Placeholder 1">
-            <a:extLst>
-              <a:ext uri="{FF2B5EF4-FFF2-40B4-BE49-F238E27FC236}">
-                <a16:creationId xmlns:a16="http://schemas.microsoft.com/office/drawing/2014/main" id="{9BC42B81-8D6E-575C-1D87-DFAF8B5748E9}"/>
-              </a:ext>
-            </a:extLst>
-          </p:cNvPr>
-          <p:cNvSpPr>
-            <a:spLocks noGrp="1" noRot="1" noChangeAspect="1"/>
-          </p:cNvSpPr>
-          <p:nvPr>
-            <p:ph type="sldImg"/>
-          </p:nvPr>
-        </p:nvSpPr>
-        <p:spPr/>
-      </p:sp>
-      <p:sp>
-        <p:nvSpPr>
-          <p:cNvPr id="3" name="Notes Placeholder 2">
-            <a:extLst>
-              <a:ext uri="{FF2B5EF4-FFF2-40B4-BE49-F238E27FC236}">
-                <a16:creationId xmlns:a16="http://schemas.microsoft.com/office/drawing/2014/main" id="{58133B77-2A2C-FF41-F3FF-B20248E2DD2F}"/>
-              </a:ext>
-            </a:extLst>
-          </p:cNvPr>
-          <p:cNvSpPr>
-            <a:spLocks noGrp="1"/>
-          </p:cNvSpPr>
-          <p:nvPr>
-            <p:ph type="body" idx="1"/>
-          </p:nvPr>
-        </p:nvSpPr>
-        <p:spPr/>
-        <p:txBody>
-          <a:bodyPr/>
-          <a:lstStyle/>
-          <a:p>
-            <a:r>
-              <a:rPr lang="en-US" dirty="0"/>
-              <a:t>Hi. Welcome to this episode of Emergent Nature. </a:t>
-            </a:r>
-          </a:p>
-          <a:p>
-            <a:endParaRPr lang="en-US" dirty="0"/>
-          </a:p>
-          <a:p>
-            <a:r>
-              <a:rPr lang="en-US" dirty="0"/>
-              <a:t>My name is J Mark Morris. I go by Mark.</a:t>
-            </a:r>
-          </a:p>
-          <a:p>
-            <a:endParaRPr lang="en-US" dirty="0"/>
-          </a:p>
-          <a:p>
-            <a:r>
-              <a:rPr lang="en-US" dirty="0"/>
-              <a:t>In this episode I’ll discuss the error that caused science to go off track into general relativity and quantum mechanics.</a:t>
-            </a:r>
-          </a:p>
-          <a:p>
-            <a:endParaRPr lang="en-US" dirty="0"/>
-          </a:p>
-          <a:p>
-            <a:r>
-              <a:rPr lang="en-US" dirty="0"/>
-              <a:t>That may seem like an unusual thing to say, since general relativity and quantum theory are generally considered to be successful effective theories.</a:t>
-            </a:r>
-          </a:p>
-          <a:p>
-            <a:endParaRPr lang="en-US" dirty="0"/>
-          </a:p>
-          <a:p>
-            <a:r>
-              <a:rPr lang="en-US" dirty="0"/>
-              <a:t>However, as we will see, an error circa 1900 threw science off track.</a:t>
-            </a:r>
-          </a:p>
-          <a:p>
-            <a:endParaRPr lang="en-US" dirty="0"/>
-          </a:p>
-          <a:p>
-            <a:r>
-              <a:rPr lang="en-US" dirty="0"/>
-              <a:t>There is a parsimonious solution to nature.</a:t>
-            </a:r>
-          </a:p>
-          <a:p>
-            <a:endParaRPr lang="en-US" dirty="0"/>
-          </a:p>
-          <a:p>
-            <a:endParaRPr lang="en-US" dirty="0"/>
-          </a:p>
-        </p:txBody>
-      </p:sp>
-      <p:sp>
-        <p:nvSpPr>
-          <p:cNvPr id="4" name="Slide Number Placeholder 3">
-            <a:extLst>
-              <a:ext uri="{FF2B5EF4-FFF2-40B4-BE49-F238E27FC236}">
-                <a16:creationId xmlns:a16="http://schemas.microsoft.com/office/drawing/2014/main" id="{8070CC9A-C03C-43E5-C3EB-4D265667CB30}"/>
-              </a:ext>
-            </a:extLst>
-          </p:cNvPr>
-          <p:cNvSpPr>
-            <a:spLocks noGrp="1"/>
-          </p:cNvSpPr>
-          <p:nvPr>
-            <p:ph type="sldNum" sz="quarter" idx="5"/>
-          </p:nvPr>
-        </p:nvSpPr>
-        <p:spPr/>
-        <p:txBody>
-          <a:bodyPr/>
-          <a:lstStyle/>
-          <a:p>
-            <a:pPr marL="0" marR="0" lvl="0" indent="0" algn="r" defTabSz="914400" rtl="0" eaLnBrk="1" fontAlgn="auto" latinLnBrk="0" hangingPunct="1">
-              <a:lnSpc>
-                <a:spcPct val="100000"/>
-              </a:lnSpc>
-              <a:spcBef>
-                <a:spcPts val="0"/>
-              </a:spcBef>
-              <a:spcAft>
-                <a:spcPts val="0"/>
-              </a:spcAft>
-              <a:buClrTx/>
-              <a:buSzTx/>
-              <a:buFontTx/>
-              <a:buNone/>
-              <a:tabLst/>
-              <a:defRPr/>
-            </a:pPr>
-            <a:fld id="{4DC398A3-AF21-A342-B6A8-6929C36BB1BF}" type="slidenum">
-              <a:rPr kumimoji="0" lang="en-US" sz="1200" b="0" i="0" u="none" strike="noStrike" kern="1200" cap="none" spc="0" normalizeH="0" baseline="0" noProof="0" smtClean="0">
-                <a:ln>
-                  <a:noFill/>
-                </a:ln>
-                <a:solidFill>
-                  <a:prstClr val="black"/>
-                </a:solidFill>
-                <a:effectLst/>
-                <a:uLnTx/>
-                <a:uFillTx/>
-                <a:latin typeface="Calibri" panose="020F0502020204030204"/>
-                <a:ea typeface="+mn-ea"/>
-                <a:cs typeface="+mn-cs"/>
-              </a:rPr>
-              <a:pPr marL="0" marR="0" lvl="0" indent="0" algn="r" defTabSz="914400" rtl="0" eaLnBrk="1" fontAlgn="auto" latinLnBrk="0" hangingPunct="1">
-                <a:lnSpc>
-                  <a:spcPct val="100000"/>
-                </a:lnSpc>
-                <a:spcBef>
-                  <a:spcPts val="0"/>
-                </a:spcBef>
-                <a:spcAft>
-                  <a:spcPts val="0"/>
-                </a:spcAft>
-                <a:buClrTx/>
-                <a:buSzTx/>
-                <a:buFontTx/>
-                <a:buNone/>
-                <a:tabLst/>
-                <a:defRPr/>
-              </a:pPr>
-              <a:t>9</a:t>
-            </a:fld>
-            <a:endParaRPr kumimoji="0" lang="en-US" sz="1200" b="0" i="0" u="none" strike="noStrike" kern="1200" cap="none" spc="0" normalizeH="0" baseline="0" noProof="0">
-              <a:ln>
-                <a:noFill/>
-              </a:ln>
-              <a:solidFill>
-                <a:prstClr val="black"/>
-              </a:solidFill>
-              <a:effectLst/>
-              <a:uLnTx/>
-              <a:uFillTx/>
-              <a:latin typeface="Calibri" panose="020F0502020204030204"/>
-              <a:ea typeface="+mn-ea"/>
-              <a:cs typeface="+mn-cs"/>
-            </a:endParaRPr>
-          </a:p>
-        </p:txBody>
-      </p:sp>
-    </p:spTree>
-    <p:extLst>
-      <p:ext uri="{BB962C8B-B14F-4D97-AF65-F5344CB8AC3E}">
-        <p14:creationId xmlns:p14="http://schemas.microsoft.com/office/powerpoint/2010/main" val="661989735"/>
-      </p:ext>
-    </p:extLst>
-  </p:cSld>
-  <p:clrMapOvr>
-    <a:masterClrMapping/>
-  </p:clrMapOvr>
-</p:notes>
-</file>
-
-<file path=ppt/notesSlides/notesSlide6.xml><?xml version="1.0" encoding="utf-8"?>
+<file path=ppt/notesSlides/notesSlide3.xml><?xml version="1.0" encoding="utf-8"?>
 <p:notes xmlns:a="http://schemas.openxmlformats.org/drawingml/2006/main" xmlns:r="http://schemas.openxmlformats.org/officeDocument/2006/relationships" xmlns:p="http://schemas.openxmlformats.org/presentationml/2006/main">
   <p:cSld>
     <p:spTree>
@@ -5050,7 +4399,7 @@
                 <a:tabLst/>
                 <a:defRPr/>
               </a:pPr>
-              <a:t>10</a:t>
+              <a:t>3</a:t>
             </a:fld>
             <a:endParaRPr kumimoji="0" lang="en-US" sz="1200" b="0" i="0" u="none" strike="noStrike" kern="1200" cap="none" spc="0" normalizeH="0" baseline="0" noProof="0">
               <a:ln>
@@ -5082,7 +4431,7 @@
 </p:notes>
 </file>
 
-<file path=ppt/notesSlides/notesSlide7.xml><?xml version="1.0" encoding="utf-8"?>
+<file path=ppt/notesSlides/notesSlide4.xml><?xml version="1.0" encoding="utf-8"?>
 <p:notes xmlns:a="http://schemas.openxmlformats.org/drawingml/2006/main" xmlns:r="http://schemas.openxmlformats.org/officeDocument/2006/relationships" xmlns:p="http://schemas.openxmlformats.org/presentationml/2006/main">
   <p:cSld>
     <p:spTree>
@@ -5272,7 +4621,7 @@
                 <a:tabLst/>
                 <a:defRPr/>
               </a:pPr>
-              <a:t>11</a:t>
+              <a:t>4</a:t>
             </a:fld>
             <a:endParaRPr kumimoji="0" lang="en-US" sz="1200" b="0" i="0" u="none" strike="noStrike" kern="1200" cap="none" spc="0" normalizeH="0" baseline="0" noProof="0">
               <a:ln>
@@ -5304,7 +4653,7 @@
 </p:notes>
 </file>
 
-<file path=ppt/notesSlides/notesSlide8.xml><?xml version="1.0" encoding="utf-8"?>
+<file path=ppt/notesSlides/notesSlide5.xml><?xml version="1.0" encoding="utf-8"?>
 <p:notes xmlns:a="http://schemas.openxmlformats.org/drawingml/2006/main" xmlns:r="http://schemas.openxmlformats.org/officeDocument/2006/relationships" xmlns:p="http://schemas.openxmlformats.org/presentationml/2006/main">
   <p:cSld>
     <p:spTree>
@@ -5494,7 +4843,7 @@
                 <a:tabLst/>
                 <a:defRPr/>
               </a:pPr>
-              <a:t>12</a:t>
+              <a:t>5</a:t>
             </a:fld>
             <a:endParaRPr kumimoji="0" lang="en-US" sz="1200" b="0" i="0" u="none" strike="noStrike" kern="1200" cap="none" spc="0" normalizeH="0" baseline="0" noProof="0">
               <a:ln>
@@ -5673,7 +5022,7 @@
           <a:p>
             <a:fld id="{E3E42ED2-DF18-DB41-BB39-D7AA7F2F2082}" type="datetimeFigureOut">
               <a:rPr lang="en-US" smtClean="0"/>
-              <a:t>10/14/24</a:t>
+              <a:t>7/3/26</a:t>
             </a:fld>
             <a:endParaRPr lang="en-US"/>
           </a:p>
@@ -5871,7 +5220,7 @@
           <a:p>
             <a:fld id="{E3E42ED2-DF18-DB41-BB39-D7AA7F2F2082}" type="datetimeFigureOut">
               <a:rPr lang="en-US" smtClean="0"/>
-              <a:t>10/14/24</a:t>
+              <a:t>7/3/26</a:t>
             </a:fld>
             <a:endParaRPr lang="en-US"/>
           </a:p>
@@ -6079,7 +5428,7 @@
           <a:p>
             <a:fld id="{E3E42ED2-DF18-DB41-BB39-D7AA7F2F2082}" type="datetimeFigureOut">
               <a:rPr lang="en-US" smtClean="0"/>
-              <a:t>10/14/24</a:t>
+              <a:t>7/3/26</a:t>
             </a:fld>
             <a:endParaRPr lang="en-US"/>
           </a:p>
@@ -6143,597 +5492,6 @@
     <p:extLst>
       <p:ext uri="{BB962C8B-B14F-4D97-AF65-F5344CB8AC3E}">
         <p14:creationId xmlns:p14="http://schemas.microsoft.com/office/powerpoint/2010/main" val="2806732090"/>
-      </p:ext>
-    </p:extLst>
-  </p:cSld>
-  <p:clrMapOvr>
-    <a:masterClrMapping/>
-  </p:clrMapOvr>
-</p:sldLayout>
-</file>
-
-<file path=ppt/slideLayouts/slideLayout12.xml><?xml version="1.0" encoding="utf-8"?>
-<p:sldLayout xmlns:a="http://schemas.openxmlformats.org/drawingml/2006/main" xmlns:r="http://schemas.openxmlformats.org/officeDocument/2006/relationships" xmlns:p="http://schemas.openxmlformats.org/presentationml/2006/main" type="title" preserve="1">
-  <p:cSld name="Title Slide">
-    <p:spTree>
-      <p:nvGrpSpPr>
-        <p:cNvPr id="1" name=""/>
-        <p:cNvGrpSpPr/>
-        <p:nvPr/>
-      </p:nvGrpSpPr>
-      <p:grpSpPr>
-        <a:xfrm>
-          <a:off x="0" y="0"/>
-          <a:ext cx="0" cy="0"/>
-          <a:chOff x="0" y="0"/>
-          <a:chExt cx="0" cy="0"/>
-        </a:xfrm>
-      </p:grpSpPr>
-      <p:sp>
-        <p:nvSpPr>
-          <p:cNvPr id="2" name="Title 1">
-            <a:extLst>
-              <a:ext uri="{FF2B5EF4-FFF2-40B4-BE49-F238E27FC236}">
-                <a16:creationId xmlns:a16="http://schemas.microsoft.com/office/drawing/2014/main" id="{08FC2668-EBEB-AE41-BF76-89062B014B13}"/>
-              </a:ext>
-            </a:extLst>
-          </p:cNvPr>
-          <p:cNvSpPr>
-            <a:spLocks noGrp="1"/>
-          </p:cNvSpPr>
-          <p:nvPr>
-            <p:ph type="ctrTitle"/>
-          </p:nvPr>
-        </p:nvSpPr>
-        <p:spPr>
-          <a:xfrm>
-            <a:off x="1524000" y="1122363"/>
-            <a:ext cx="9144000" cy="2387600"/>
-          </a:xfrm>
-        </p:spPr>
-        <p:txBody>
-          <a:bodyPr anchor="b"/>
-          <a:lstStyle>
-            <a:lvl1pPr algn="ctr">
-              <a:defRPr sz="6000"/>
-            </a:lvl1pPr>
-          </a:lstStyle>
-          <a:p>
-            <a:r>
-              <a:rPr lang="en-US" dirty="0"/>
-              <a:t>Click to edit Master title style</a:t>
-            </a:r>
-          </a:p>
-        </p:txBody>
-      </p:sp>
-      <p:sp>
-        <p:nvSpPr>
-          <p:cNvPr id="3" name="Subtitle 2">
-            <a:extLst>
-              <a:ext uri="{FF2B5EF4-FFF2-40B4-BE49-F238E27FC236}">
-                <a16:creationId xmlns:a16="http://schemas.microsoft.com/office/drawing/2014/main" id="{C8C28A4C-0805-8E44-B54E-3B6F671F8D01}"/>
-              </a:ext>
-            </a:extLst>
-          </p:cNvPr>
-          <p:cNvSpPr>
-            <a:spLocks noGrp="1"/>
-          </p:cNvSpPr>
-          <p:nvPr>
-            <p:ph type="subTitle" idx="1"/>
-          </p:nvPr>
-        </p:nvSpPr>
-        <p:spPr>
-          <a:xfrm>
-            <a:off x="1524000" y="3602038"/>
-            <a:ext cx="9144000" cy="1655762"/>
-          </a:xfrm>
-        </p:spPr>
-        <p:txBody>
-          <a:bodyPr/>
-          <a:lstStyle>
-            <a:lvl1pPr marL="0" indent="0" algn="ctr">
-              <a:buNone/>
-              <a:defRPr sz="2400"/>
-            </a:lvl1pPr>
-            <a:lvl2pPr marL="457200" indent="0" algn="ctr">
-              <a:buNone/>
-              <a:defRPr sz="2000"/>
-            </a:lvl2pPr>
-            <a:lvl3pPr marL="914400" indent="0" algn="ctr">
-              <a:buNone/>
-              <a:defRPr sz="1800"/>
-            </a:lvl3pPr>
-            <a:lvl4pPr marL="1371600" indent="0" algn="ctr">
-              <a:buNone/>
-              <a:defRPr sz="1600"/>
-            </a:lvl4pPr>
-            <a:lvl5pPr marL="1828800" indent="0" algn="ctr">
-              <a:buNone/>
-              <a:defRPr sz="1600"/>
-            </a:lvl5pPr>
-            <a:lvl6pPr marL="2286000" indent="0" algn="ctr">
-              <a:buNone/>
-              <a:defRPr sz="1600"/>
-            </a:lvl6pPr>
-            <a:lvl7pPr marL="2743200" indent="0" algn="ctr">
-              <a:buNone/>
-              <a:defRPr sz="1600"/>
-            </a:lvl7pPr>
-            <a:lvl8pPr marL="3200400" indent="0" algn="ctr">
-              <a:buNone/>
-              <a:defRPr sz="1600"/>
-            </a:lvl8pPr>
-            <a:lvl9pPr marL="3657600" indent="0" algn="ctr">
-              <a:buNone/>
-              <a:defRPr sz="1600"/>
-            </a:lvl9pPr>
-          </a:lstStyle>
-          <a:p>
-            <a:r>
-              <a:rPr lang="en-US"/>
-              <a:t>Click to edit Master subtitle style</a:t>
-            </a:r>
-          </a:p>
-        </p:txBody>
-      </p:sp>
-      <p:sp>
-        <p:nvSpPr>
-          <p:cNvPr id="4" name="Date Placeholder 3">
-            <a:extLst>
-              <a:ext uri="{FF2B5EF4-FFF2-40B4-BE49-F238E27FC236}">
-                <a16:creationId xmlns:a16="http://schemas.microsoft.com/office/drawing/2014/main" id="{293B74C2-6265-7F41-BB8F-D8A0A0C89A63}"/>
-              </a:ext>
-            </a:extLst>
-          </p:cNvPr>
-          <p:cNvSpPr>
-            <a:spLocks noGrp="1"/>
-          </p:cNvSpPr>
-          <p:nvPr>
-            <p:ph type="dt" sz="half" idx="10"/>
-          </p:nvPr>
-        </p:nvSpPr>
-        <p:spPr/>
-        <p:txBody>
-          <a:bodyPr/>
-          <a:lstStyle/>
-          <a:p>
-            <a:fld id="{B1CFC895-F8E0-4049-8BEE-E5499394E46C}" type="datetime1">
-              <a:rPr lang="en-US" smtClean="0"/>
-              <a:t>10/14/24</a:t>
-            </a:fld>
-            <a:endParaRPr lang="en-US"/>
-          </a:p>
-        </p:txBody>
-      </p:sp>
-      <p:sp>
-        <p:nvSpPr>
-          <p:cNvPr id="5" name="Footer Placeholder 4">
-            <a:extLst>
-              <a:ext uri="{FF2B5EF4-FFF2-40B4-BE49-F238E27FC236}">
-                <a16:creationId xmlns:a16="http://schemas.microsoft.com/office/drawing/2014/main" id="{74C53590-4180-6C42-A6BF-707655C15A1D}"/>
-              </a:ext>
-            </a:extLst>
-          </p:cNvPr>
-          <p:cNvSpPr>
-            <a:spLocks noGrp="1"/>
-          </p:cNvSpPr>
-          <p:nvPr>
-            <p:ph type="ftr" sz="quarter" idx="11"/>
-          </p:nvPr>
-        </p:nvSpPr>
-        <p:spPr/>
-        <p:txBody>
-          <a:bodyPr/>
-          <a:lstStyle>
-            <a:lvl1pPr>
-              <a:defRPr/>
-            </a:lvl1pPr>
-          </a:lstStyle>
-          <a:p>
-            <a:r>
-              <a:rPr lang="en-US"/>
-              <a:t>J Mark Morris - Model of Nature - April 2019</a:t>
-            </a:r>
-          </a:p>
-        </p:txBody>
-      </p:sp>
-      <p:sp>
-        <p:nvSpPr>
-          <p:cNvPr id="6" name="Slide Number Placeholder 5">
-            <a:extLst>
-              <a:ext uri="{FF2B5EF4-FFF2-40B4-BE49-F238E27FC236}">
-                <a16:creationId xmlns:a16="http://schemas.microsoft.com/office/drawing/2014/main" id="{93A81401-8545-2D4E-A7FB-31AFC7A8DB71}"/>
-              </a:ext>
-            </a:extLst>
-          </p:cNvPr>
-          <p:cNvSpPr>
-            <a:spLocks noGrp="1"/>
-          </p:cNvSpPr>
-          <p:nvPr>
-            <p:ph type="sldNum" sz="quarter" idx="12"/>
-          </p:nvPr>
-        </p:nvSpPr>
-        <p:spPr/>
-        <p:txBody>
-          <a:bodyPr/>
-          <a:lstStyle/>
-          <a:p>
-            <a:fld id="{D73D4D4B-2FF7-BE46-958C-B004BD45EF6F}" type="slidenum">
-              <a:rPr lang="en-US" smtClean="0"/>
-              <a:t>‹#›</a:t>
-            </a:fld>
-            <a:endParaRPr lang="en-US"/>
-          </a:p>
-        </p:txBody>
-      </p:sp>
-    </p:spTree>
-    <p:extLst>
-      <p:ext uri="{BB962C8B-B14F-4D97-AF65-F5344CB8AC3E}">
-        <p14:creationId xmlns:p14="http://schemas.microsoft.com/office/powerpoint/2010/main" val="250131866"/>
-      </p:ext>
-    </p:extLst>
-  </p:cSld>
-  <p:clrMapOvr>
-    <a:masterClrMapping/>
-  </p:clrMapOvr>
-</p:sldLayout>
-</file>
-
-<file path=ppt/slideLayouts/slideLayout13.xml><?xml version="1.0" encoding="utf-8"?>
-<p:sldLayout xmlns:a="http://schemas.openxmlformats.org/drawingml/2006/main" xmlns:r="http://schemas.openxmlformats.org/officeDocument/2006/relationships" xmlns:p="http://schemas.openxmlformats.org/presentationml/2006/main" type="obj" preserve="1">
-  <p:cSld name="Title and Content">
-    <p:spTree>
-      <p:nvGrpSpPr>
-        <p:cNvPr id="1" name=""/>
-        <p:cNvGrpSpPr/>
-        <p:nvPr/>
-      </p:nvGrpSpPr>
-      <p:grpSpPr>
-        <a:xfrm>
-          <a:off x="0" y="0"/>
-          <a:ext cx="0" cy="0"/>
-          <a:chOff x="0" y="0"/>
-          <a:chExt cx="0" cy="0"/>
-        </a:xfrm>
-      </p:grpSpPr>
-      <p:sp>
-        <p:nvSpPr>
-          <p:cNvPr id="2" name="Title 1">
-            <a:extLst>
-              <a:ext uri="{FF2B5EF4-FFF2-40B4-BE49-F238E27FC236}">
-                <a16:creationId xmlns:a16="http://schemas.microsoft.com/office/drawing/2014/main" id="{EDF560F9-C770-5C4C-9C93-102EC332DBA4}"/>
-              </a:ext>
-            </a:extLst>
-          </p:cNvPr>
-          <p:cNvSpPr>
-            <a:spLocks noGrp="1"/>
-          </p:cNvSpPr>
-          <p:nvPr>
-            <p:ph type="title"/>
-          </p:nvPr>
-        </p:nvSpPr>
-        <p:spPr>
-          <a:xfrm>
-            <a:off x="838200" y="365125"/>
-            <a:ext cx="10515600" cy="777875"/>
-          </a:xfrm>
-        </p:spPr>
-        <p:txBody>
-          <a:bodyPr/>
-          <a:lstStyle/>
-          <a:p>
-            <a:r>
-              <a:rPr lang="en-US" dirty="0"/>
-              <a:t>Click to edit Master title style</a:t>
-            </a:r>
-          </a:p>
-        </p:txBody>
-      </p:sp>
-      <p:sp>
-        <p:nvSpPr>
-          <p:cNvPr id="3" name="Content Placeholder 2">
-            <a:extLst>
-              <a:ext uri="{FF2B5EF4-FFF2-40B4-BE49-F238E27FC236}">
-                <a16:creationId xmlns:a16="http://schemas.microsoft.com/office/drawing/2014/main" id="{80D38EDA-56F1-1C40-B81E-28B921C4E99F}"/>
-              </a:ext>
-            </a:extLst>
-          </p:cNvPr>
-          <p:cNvSpPr>
-            <a:spLocks noGrp="1"/>
-          </p:cNvSpPr>
-          <p:nvPr>
-            <p:ph idx="1"/>
-          </p:nvPr>
-        </p:nvSpPr>
-        <p:spPr>
-          <a:xfrm>
-            <a:off x="838200" y="1295400"/>
-            <a:ext cx="10515600" cy="4881563"/>
-          </a:xfrm>
-        </p:spPr>
-        <p:txBody>
-          <a:bodyPr/>
-          <a:lstStyle/>
-          <a:p>
-            <a:pPr lvl="0"/>
-            <a:r>
-              <a:rPr lang="en-US" dirty="0"/>
-              <a:t>Edit Master text styles</a:t>
-            </a:r>
-          </a:p>
-          <a:p>
-            <a:pPr lvl="1"/>
-            <a:r>
-              <a:rPr lang="en-US" dirty="0"/>
-              <a:t>Second level</a:t>
-            </a:r>
-          </a:p>
-          <a:p>
-            <a:pPr lvl="2"/>
-            <a:r>
-              <a:rPr lang="en-US" dirty="0"/>
-              <a:t>Third level</a:t>
-            </a:r>
-          </a:p>
-          <a:p>
-            <a:pPr lvl="3"/>
-            <a:r>
-              <a:rPr lang="en-US" dirty="0"/>
-              <a:t>Fourth level</a:t>
-            </a:r>
-          </a:p>
-          <a:p>
-            <a:pPr lvl="4"/>
-            <a:r>
-              <a:rPr lang="en-US" dirty="0"/>
-              <a:t>Fifth level</a:t>
-            </a:r>
-          </a:p>
-        </p:txBody>
-      </p:sp>
-      <p:sp>
-        <p:nvSpPr>
-          <p:cNvPr id="4" name="Date Placeholder 3">
-            <a:extLst>
-              <a:ext uri="{FF2B5EF4-FFF2-40B4-BE49-F238E27FC236}">
-                <a16:creationId xmlns:a16="http://schemas.microsoft.com/office/drawing/2014/main" id="{0AD42772-5D80-F641-A1BB-6048573C4E88}"/>
-              </a:ext>
-            </a:extLst>
-          </p:cNvPr>
-          <p:cNvSpPr>
-            <a:spLocks noGrp="1"/>
-          </p:cNvSpPr>
-          <p:nvPr>
-            <p:ph type="dt" sz="half" idx="10"/>
-          </p:nvPr>
-        </p:nvSpPr>
-        <p:spPr/>
-        <p:txBody>
-          <a:bodyPr/>
-          <a:lstStyle/>
-          <a:p>
-            <a:fld id="{A91F55E2-A889-F24B-B1FE-1E878178F308}" type="datetime1">
-              <a:rPr lang="en-US" smtClean="0"/>
-              <a:t>10/14/24</a:t>
-            </a:fld>
-            <a:endParaRPr lang="en-US"/>
-          </a:p>
-        </p:txBody>
-      </p:sp>
-      <p:sp>
-        <p:nvSpPr>
-          <p:cNvPr id="5" name="Footer Placeholder 4">
-            <a:extLst>
-              <a:ext uri="{FF2B5EF4-FFF2-40B4-BE49-F238E27FC236}">
-                <a16:creationId xmlns:a16="http://schemas.microsoft.com/office/drawing/2014/main" id="{C68FC4AF-90CF-484C-B6C7-5CE1A016FB49}"/>
-              </a:ext>
-            </a:extLst>
-          </p:cNvPr>
-          <p:cNvSpPr>
-            <a:spLocks noGrp="1"/>
-          </p:cNvSpPr>
-          <p:nvPr>
-            <p:ph type="ftr" sz="quarter" idx="11"/>
-          </p:nvPr>
-        </p:nvSpPr>
-        <p:spPr/>
-        <p:txBody>
-          <a:bodyPr/>
-          <a:lstStyle/>
-          <a:p>
-            <a:r>
-              <a:rPr lang="en-US"/>
-              <a:t>J Mark Morris - Model of Nature - April 2019</a:t>
-            </a:r>
-          </a:p>
-        </p:txBody>
-      </p:sp>
-      <p:sp>
-        <p:nvSpPr>
-          <p:cNvPr id="6" name="Slide Number Placeholder 5">
-            <a:extLst>
-              <a:ext uri="{FF2B5EF4-FFF2-40B4-BE49-F238E27FC236}">
-                <a16:creationId xmlns:a16="http://schemas.microsoft.com/office/drawing/2014/main" id="{8169AF1E-33D8-3041-A601-1384C718A8B5}"/>
-              </a:ext>
-            </a:extLst>
-          </p:cNvPr>
-          <p:cNvSpPr>
-            <a:spLocks noGrp="1"/>
-          </p:cNvSpPr>
-          <p:nvPr>
-            <p:ph type="sldNum" sz="quarter" idx="12"/>
-          </p:nvPr>
-        </p:nvSpPr>
-        <p:spPr/>
-        <p:txBody>
-          <a:bodyPr/>
-          <a:lstStyle/>
-          <a:p>
-            <a:fld id="{D73D4D4B-2FF7-BE46-958C-B004BD45EF6F}" type="slidenum">
-              <a:rPr lang="en-US" smtClean="0"/>
-              <a:t>‹#›</a:t>
-            </a:fld>
-            <a:endParaRPr lang="en-US"/>
-          </a:p>
-        </p:txBody>
-      </p:sp>
-    </p:spTree>
-    <p:extLst>
-      <p:ext uri="{BB962C8B-B14F-4D97-AF65-F5344CB8AC3E}">
-        <p14:creationId xmlns:p14="http://schemas.microsoft.com/office/powerpoint/2010/main" val="3112984417"/>
-      </p:ext>
-    </p:extLst>
-  </p:cSld>
-  <p:clrMapOvr>
-    <a:masterClrMapping/>
-  </p:clrMapOvr>
-</p:sldLayout>
-</file>
-
-<file path=ppt/slideLayouts/slideLayout14.xml><?xml version="1.0" encoding="utf-8"?>
-<p:sldLayout xmlns:a="http://schemas.openxmlformats.org/drawingml/2006/main" xmlns:r="http://schemas.openxmlformats.org/officeDocument/2006/relationships" xmlns:p="http://schemas.openxmlformats.org/presentationml/2006/main" type="titleOnly" preserve="1">
-  <p:cSld name="Title Only">
-    <p:spTree>
-      <p:nvGrpSpPr>
-        <p:cNvPr id="1" name=""/>
-        <p:cNvGrpSpPr/>
-        <p:nvPr/>
-      </p:nvGrpSpPr>
-      <p:grpSpPr>
-        <a:xfrm>
-          <a:off x="0" y="0"/>
-          <a:ext cx="0" cy="0"/>
-          <a:chOff x="0" y="0"/>
-          <a:chExt cx="0" cy="0"/>
-        </a:xfrm>
-      </p:grpSpPr>
-      <p:sp>
-        <p:nvSpPr>
-          <p:cNvPr id="2" name="Title 1">
-            <a:extLst>
-              <a:ext uri="{FF2B5EF4-FFF2-40B4-BE49-F238E27FC236}">
-                <a16:creationId xmlns:a16="http://schemas.microsoft.com/office/drawing/2014/main" id="{5821822D-6D7A-1342-98EF-890C6F2DA174}"/>
-              </a:ext>
-            </a:extLst>
-          </p:cNvPr>
-          <p:cNvSpPr>
-            <a:spLocks noGrp="1"/>
-          </p:cNvSpPr>
-          <p:nvPr>
-            <p:ph type="title"/>
-          </p:nvPr>
-        </p:nvSpPr>
-        <p:spPr>
-          <a:xfrm>
-            <a:off x="838200" y="365125"/>
-            <a:ext cx="10515600" cy="777875"/>
-          </a:xfrm>
-        </p:spPr>
-        <p:txBody>
-          <a:bodyPr/>
-          <a:lstStyle/>
-          <a:p>
-            <a:r>
-              <a:rPr lang="en-US"/>
-              <a:t>Click to edit Master title style</a:t>
-            </a:r>
-          </a:p>
-        </p:txBody>
-      </p:sp>
-      <p:sp>
-        <p:nvSpPr>
-          <p:cNvPr id="3" name="Date Placeholder 2">
-            <a:extLst>
-              <a:ext uri="{FF2B5EF4-FFF2-40B4-BE49-F238E27FC236}">
-                <a16:creationId xmlns:a16="http://schemas.microsoft.com/office/drawing/2014/main" id="{74CF19EA-9170-5B4B-814F-7425C8E22823}"/>
-              </a:ext>
-            </a:extLst>
-          </p:cNvPr>
-          <p:cNvSpPr>
-            <a:spLocks noGrp="1"/>
-          </p:cNvSpPr>
-          <p:nvPr>
-            <p:ph type="dt" sz="half" idx="10"/>
-          </p:nvPr>
-        </p:nvSpPr>
-        <p:spPr/>
-        <p:txBody>
-          <a:bodyPr/>
-          <a:lstStyle/>
-          <a:p>
-            <a:fld id="{C6E8461C-3391-334C-9885-001B32D724C4}" type="datetime1">
-              <a:rPr lang="en-US" smtClean="0"/>
-              <a:t>10/14/24</a:t>
-            </a:fld>
-            <a:endParaRPr lang="en-US"/>
-          </a:p>
-        </p:txBody>
-      </p:sp>
-      <p:sp>
-        <p:nvSpPr>
-          <p:cNvPr id="4" name="Footer Placeholder 3">
-            <a:extLst>
-              <a:ext uri="{FF2B5EF4-FFF2-40B4-BE49-F238E27FC236}">
-                <a16:creationId xmlns:a16="http://schemas.microsoft.com/office/drawing/2014/main" id="{5882B1FB-ECDF-AD43-9020-0267ED91C04E}"/>
-              </a:ext>
-            </a:extLst>
-          </p:cNvPr>
-          <p:cNvSpPr>
-            <a:spLocks noGrp="1"/>
-          </p:cNvSpPr>
-          <p:nvPr>
-            <p:ph type="ftr" sz="quarter" idx="11"/>
-          </p:nvPr>
-        </p:nvSpPr>
-        <p:spPr/>
-        <p:txBody>
-          <a:bodyPr/>
-          <a:lstStyle>
-            <a:lvl1pPr>
-              <a:defRPr/>
-            </a:lvl1pPr>
-          </a:lstStyle>
-          <a:p>
-            <a:r>
-              <a:rPr lang="en-US"/>
-              <a:t>J Mark Morris - Model of Nature - April 2019</a:t>
-            </a:r>
-          </a:p>
-        </p:txBody>
-      </p:sp>
-      <p:sp>
-        <p:nvSpPr>
-          <p:cNvPr id="5" name="Slide Number Placeholder 4">
-            <a:extLst>
-              <a:ext uri="{FF2B5EF4-FFF2-40B4-BE49-F238E27FC236}">
-                <a16:creationId xmlns:a16="http://schemas.microsoft.com/office/drawing/2014/main" id="{D949C470-5AF0-5246-81E7-95EAEE5639EF}"/>
-              </a:ext>
-            </a:extLst>
-          </p:cNvPr>
-          <p:cNvSpPr>
-            <a:spLocks noGrp="1"/>
-          </p:cNvSpPr>
-          <p:nvPr>
-            <p:ph type="sldNum" sz="quarter" idx="12"/>
-          </p:nvPr>
-        </p:nvSpPr>
-        <p:spPr/>
-        <p:txBody>
-          <a:bodyPr/>
-          <a:lstStyle/>
-          <a:p>
-            <a:fld id="{D73D4D4B-2FF7-BE46-958C-B004BD45EF6F}" type="slidenum">
-              <a:rPr lang="en-US" smtClean="0"/>
-              <a:t>‹#›</a:t>
-            </a:fld>
-            <a:endParaRPr lang="en-US"/>
-          </a:p>
-        </p:txBody>
-      </p:sp>
-    </p:spTree>
-    <p:extLst>
-      <p:ext uri="{BB962C8B-B14F-4D97-AF65-F5344CB8AC3E}">
-        <p14:creationId xmlns:p14="http://schemas.microsoft.com/office/powerpoint/2010/main" val="825638112"/>
       </p:ext>
     </p:extLst>
   </p:cSld>
@@ -6868,7 +5626,7 @@
           <a:p>
             <a:fld id="{E3E42ED2-DF18-DB41-BB39-D7AA7F2F2082}" type="datetimeFigureOut">
               <a:rPr lang="en-US" smtClean="0"/>
-              <a:t>10/14/24</a:t>
+              <a:t>7/3/26</a:t>
             </a:fld>
             <a:endParaRPr lang="en-US"/>
           </a:p>
@@ -7143,7 +5901,7 @@
           <a:p>
             <a:fld id="{E3E42ED2-DF18-DB41-BB39-D7AA7F2F2082}" type="datetimeFigureOut">
               <a:rPr lang="en-US" smtClean="0"/>
-              <a:t>10/14/24</a:t>
+              <a:t>7/3/26</a:t>
             </a:fld>
             <a:endParaRPr lang="en-US"/>
           </a:p>
@@ -7408,7 +6166,7 @@
           <a:p>
             <a:fld id="{E3E42ED2-DF18-DB41-BB39-D7AA7F2F2082}" type="datetimeFigureOut">
               <a:rPr lang="en-US" smtClean="0"/>
-              <a:t>10/14/24</a:t>
+              <a:t>7/3/26</a:t>
             </a:fld>
             <a:endParaRPr lang="en-US"/>
           </a:p>
@@ -7820,7 +6578,7 @@
           <a:p>
             <a:fld id="{E3E42ED2-DF18-DB41-BB39-D7AA7F2F2082}" type="datetimeFigureOut">
               <a:rPr lang="en-US" smtClean="0"/>
-              <a:t>10/14/24</a:t>
+              <a:t>7/3/26</a:t>
             </a:fld>
             <a:endParaRPr lang="en-US"/>
           </a:p>
@@ -7961,7 +6719,7 @@
           <a:p>
             <a:fld id="{E3E42ED2-DF18-DB41-BB39-D7AA7F2F2082}" type="datetimeFigureOut">
               <a:rPr lang="en-US" smtClean="0"/>
-              <a:t>10/14/24</a:t>
+              <a:t>7/3/26</a:t>
             </a:fld>
             <a:endParaRPr lang="en-US"/>
           </a:p>
@@ -8074,7 +6832,7 @@
           <a:p>
             <a:fld id="{E3E42ED2-DF18-DB41-BB39-D7AA7F2F2082}" type="datetimeFigureOut">
               <a:rPr lang="en-US" smtClean="0"/>
-              <a:t>10/14/24</a:t>
+              <a:t>7/3/26</a:t>
             </a:fld>
             <a:endParaRPr lang="en-US"/>
           </a:p>
@@ -8385,7 +7143,7 @@
           <a:p>
             <a:fld id="{E3E42ED2-DF18-DB41-BB39-D7AA7F2F2082}" type="datetimeFigureOut">
               <a:rPr lang="en-US" smtClean="0"/>
-              <a:t>10/14/24</a:t>
+              <a:t>7/3/26</a:t>
             </a:fld>
             <a:endParaRPr lang="en-US"/>
           </a:p>
@@ -8673,7 +7431,7 @@
           <a:p>
             <a:fld id="{E3E42ED2-DF18-DB41-BB39-D7AA7F2F2082}" type="datetimeFigureOut">
               <a:rPr lang="en-US" smtClean="0"/>
-              <a:t>10/14/24</a:t>
+              <a:t>7/3/26</a:t>
             </a:fld>
             <a:endParaRPr lang="en-US"/>
           </a:p>
@@ -8914,7 +7672,7 @@
           <a:p>
             <a:fld id="{E3E42ED2-DF18-DB41-BB39-D7AA7F2F2082}" type="datetimeFigureOut">
               <a:rPr lang="en-US" smtClean="0"/>
-              <a:t>10/14/24</a:t>
+              <a:t>7/3/26</a:t>
             </a:fld>
             <a:endParaRPr lang="en-US"/>
           </a:p>
@@ -9314,580 +8072,6 @@
 </p:sldMaster>
 </file>
 
-<file path=ppt/slideMasters/slideMaster2.xml><?xml version="1.0" encoding="utf-8"?>
-<p:sldMaster xmlns:a="http://schemas.openxmlformats.org/drawingml/2006/main" xmlns:r="http://schemas.openxmlformats.org/officeDocument/2006/relationships" xmlns:p="http://schemas.openxmlformats.org/presentationml/2006/main">
-  <p:cSld>
-    <p:bg>
-      <p:bgRef idx="1001">
-        <a:schemeClr val="bg1"/>
-      </p:bgRef>
-    </p:bg>
-    <p:spTree>
-      <p:nvGrpSpPr>
-        <p:cNvPr id="1" name=""/>
-        <p:cNvGrpSpPr/>
-        <p:nvPr/>
-      </p:nvGrpSpPr>
-      <p:grpSpPr>
-        <a:xfrm>
-          <a:off x="0" y="0"/>
-          <a:ext cx="0" cy="0"/>
-          <a:chOff x="0" y="0"/>
-          <a:chExt cx="0" cy="0"/>
-        </a:xfrm>
-      </p:grpSpPr>
-      <p:sp>
-        <p:nvSpPr>
-          <p:cNvPr id="2" name="Title Placeholder 1">
-            <a:extLst>
-              <a:ext uri="{FF2B5EF4-FFF2-40B4-BE49-F238E27FC236}">
-                <a16:creationId xmlns:a16="http://schemas.microsoft.com/office/drawing/2014/main" id="{4C79A1DB-155B-0846-9CED-8B75F56E0E58}"/>
-              </a:ext>
-            </a:extLst>
-          </p:cNvPr>
-          <p:cNvSpPr>
-            <a:spLocks noGrp="1"/>
-          </p:cNvSpPr>
-          <p:nvPr>
-            <p:ph type="title"/>
-          </p:nvPr>
-        </p:nvSpPr>
-        <p:spPr>
-          <a:xfrm>
-            <a:off x="838200" y="365125"/>
-            <a:ext cx="10515600" cy="1325563"/>
-          </a:xfrm>
-          <a:prstGeom prst="rect">
-            <a:avLst/>
-          </a:prstGeom>
-        </p:spPr>
-        <p:txBody>
-          <a:bodyPr vert="horz" lIns="91440" tIns="45720" rIns="91440" bIns="45720" rtlCol="0" anchor="ctr">
-            <a:normAutofit/>
-          </a:bodyPr>
-          <a:lstStyle/>
-          <a:p>
-            <a:r>
-              <a:rPr lang="en-US" dirty="0"/>
-              <a:t>Click to edit Master title style</a:t>
-            </a:r>
-          </a:p>
-        </p:txBody>
-      </p:sp>
-      <p:sp>
-        <p:nvSpPr>
-          <p:cNvPr id="3" name="Text Placeholder 2">
-            <a:extLst>
-              <a:ext uri="{FF2B5EF4-FFF2-40B4-BE49-F238E27FC236}">
-                <a16:creationId xmlns:a16="http://schemas.microsoft.com/office/drawing/2014/main" id="{FD69736F-08D5-7643-A656-ABAEB9457A7A}"/>
-              </a:ext>
-            </a:extLst>
-          </p:cNvPr>
-          <p:cNvSpPr>
-            <a:spLocks noGrp="1"/>
-          </p:cNvSpPr>
-          <p:nvPr>
-            <p:ph type="body" idx="1"/>
-          </p:nvPr>
-        </p:nvSpPr>
-        <p:spPr>
-          <a:xfrm>
-            <a:off x="838200" y="1825625"/>
-            <a:ext cx="10515600" cy="4351338"/>
-          </a:xfrm>
-          <a:prstGeom prst="rect">
-            <a:avLst/>
-          </a:prstGeom>
-        </p:spPr>
-        <p:txBody>
-          <a:bodyPr vert="horz" lIns="91440" tIns="45720" rIns="91440" bIns="45720" rtlCol="0">
-            <a:normAutofit/>
-          </a:bodyPr>
-          <a:lstStyle/>
-          <a:p>
-            <a:pPr lvl="0"/>
-            <a:r>
-              <a:rPr lang="en-US"/>
-              <a:t>Edit Master text styles</a:t>
-            </a:r>
-          </a:p>
-          <a:p>
-            <a:pPr lvl="1"/>
-            <a:r>
-              <a:rPr lang="en-US"/>
-              <a:t>Second level</a:t>
-            </a:r>
-          </a:p>
-          <a:p>
-            <a:pPr lvl="2"/>
-            <a:r>
-              <a:rPr lang="en-US"/>
-              <a:t>Third level</a:t>
-            </a:r>
-          </a:p>
-          <a:p>
-            <a:pPr lvl="3"/>
-            <a:r>
-              <a:rPr lang="en-US"/>
-              <a:t>Fourth level</a:t>
-            </a:r>
-          </a:p>
-          <a:p>
-            <a:pPr lvl="4"/>
-            <a:r>
-              <a:rPr lang="en-US"/>
-              <a:t>Fifth level</a:t>
-            </a:r>
-          </a:p>
-        </p:txBody>
-      </p:sp>
-      <p:sp>
-        <p:nvSpPr>
-          <p:cNvPr id="4" name="Date Placeholder 3">
-            <a:extLst>
-              <a:ext uri="{FF2B5EF4-FFF2-40B4-BE49-F238E27FC236}">
-                <a16:creationId xmlns:a16="http://schemas.microsoft.com/office/drawing/2014/main" id="{C0433D04-66F5-D74B-8EEA-459FDC00D1E4}"/>
-              </a:ext>
-            </a:extLst>
-          </p:cNvPr>
-          <p:cNvSpPr>
-            <a:spLocks noGrp="1"/>
-          </p:cNvSpPr>
-          <p:nvPr>
-            <p:ph type="dt" sz="half" idx="2"/>
-          </p:nvPr>
-        </p:nvSpPr>
-        <p:spPr>
-          <a:xfrm>
-            <a:off x="838200" y="6356350"/>
-            <a:ext cx="2743200" cy="365125"/>
-          </a:xfrm>
-          <a:prstGeom prst="rect">
-            <a:avLst/>
-          </a:prstGeom>
-        </p:spPr>
-        <p:txBody>
-          <a:bodyPr vert="horz" lIns="91440" tIns="45720" rIns="91440" bIns="45720" rtlCol="0" anchor="ctr"/>
-          <a:lstStyle>
-            <a:lvl1pPr algn="l">
-              <a:defRPr sz="1200">
-                <a:solidFill>
-                  <a:schemeClr val="tx1">
-                    <a:tint val="75000"/>
-                  </a:schemeClr>
-                </a:solidFill>
-                <a:latin typeface="Helvetica Neue" panose="02000503000000020004" pitchFamily="2" charset="0"/>
-                <a:ea typeface="Helvetica Neue" panose="02000503000000020004" pitchFamily="2" charset="0"/>
-                <a:cs typeface="Helvetica Neue" panose="02000503000000020004" pitchFamily="2" charset="0"/>
-              </a:defRPr>
-            </a:lvl1pPr>
-          </a:lstStyle>
-          <a:p>
-            <a:fld id="{2005EE61-3907-C44D-8624-D47E09E871DB}" type="datetime1">
-              <a:rPr lang="en-US" smtClean="0"/>
-              <a:t>10/14/24</a:t>
-            </a:fld>
-            <a:endParaRPr lang="en-US"/>
-          </a:p>
-        </p:txBody>
-      </p:sp>
-      <p:sp>
-        <p:nvSpPr>
-          <p:cNvPr id="5" name="Footer Placeholder 4">
-            <a:extLst>
-              <a:ext uri="{FF2B5EF4-FFF2-40B4-BE49-F238E27FC236}">
-                <a16:creationId xmlns:a16="http://schemas.microsoft.com/office/drawing/2014/main" id="{9FDE6E67-6F97-E149-8437-635D11E7ED43}"/>
-              </a:ext>
-            </a:extLst>
-          </p:cNvPr>
-          <p:cNvSpPr>
-            <a:spLocks noGrp="1"/>
-          </p:cNvSpPr>
-          <p:nvPr>
-            <p:ph type="ftr" sz="quarter" idx="3"/>
-          </p:nvPr>
-        </p:nvSpPr>
-        <p:spPr>
-          <a:xfrm>
-            <a:off x="4038600" y="6356350"/>
-            <a:ext cx="4114800" cy="365125"/>
-          </a:xfrm>
-          <a:prstGeom prst="rect">
-            <a:avLst/>
-          </a:prstGeom>
-        </p:spPr>
-        <p:txBody>
-          <a:bodyPr vert="horz" lIns="91440" tIns="45720" rIns="91440" bIns="45720" rtlCol="0" anchor="ctr"/>
-          <a:lstStyle>
-            <a:lvl1pPr algn="ctr">
-              <a:defRPr sz="1200">
-                <a:solidFill>
-                  <a:schemeClr val="tx1">
-                    <a:tint val="75000"/>
-                  </a:schemeClr>
-                </a:solidFill>
-                <a:latin typeface="Helvetica Neue" panose="02000503000000020004" pitchFamily="2" charset="0"/>
-                <a:ea typeface="Helvetica Neue" panose="02000503000000020004" pitchFamily="2" charset="0"/>
-                <a:cs typeface="Helvetica Neue" panose="02000503000000020004" pitchFamily="2" charset="0"/>
-              </a:defRPr>
-            </a:lvl1pPr>
-          </a:lstStyle>
-          <a:p>
-            <a:r>
-              <a:rPr lang="en-US"/>
-              <a:t>J Mark Morris - Model of Nature - April 2019</a:t>
-            </a:r>
-          </a:p>
-        </p:txBody>
-      </p:sp>
-      <p:sp>
-        <p:nvSpPr>
-          <p:cNvPr id="6" name="Slide Number Placeholder 5">
-            <a:extLst>
-              <a:ext uri="{FF2B5EF4-FFF2-40B4-BE49-F238E27FC236}">
-                <a16:creationId xmlns:a16="http://schemas.microsoft.com/office/drawing/2014/main" id="{D585CC1E-0AB1-F34A-83C6-0956BF9B4AF3}"/>
-              </a:ext>
-            </a:extLst>
-          </p:cNvPr>
-          <p:cNvSpPr>
-            <a:spLocks noGrp="1"/>
-          </p:cNvSpPr>
-          <p:nvPr>
-            <p:ph type="sldNum" sz="quarter" idx="4"/>
-          </p:nvPr>
-        </p:nvSpPr>
-        <p:spPr>
-          <a:xfrm>
-            <a:off x="8610600" y="6356350"/>
-            <a:ext cx="2743200" cy="365125"/>
-          </a:xfrm>
-          <a:prstGeom prst="rect">
-            <a:avLst/>
-          </a:prstGeom>
-        </p:spPr>
-        <p:txBody>
-          <a:bodyPr vert="horz" lIns="91440" tIns="45720" rIns="91440" bIns="45720" rtlCol="0" anchor="ctr"/>
-          <a:lstStyle>
-            <a:lvl1pPr algn="r">
-              <a:defRPr sz="1200">
-                <a:solidFill>
-                  <a:schemeClr val="tx1">
-                    <a:tint val="75000"/>
-                  </a:schemeClr>
-                </a:solidFill>
-                <a:latin typeface="Helvetica Neue" panose="02000503000000020004" pitchFamily="2" charset="0"/>
-                <a:ea typeface="Helvetica Neue" panose="02000503000000020004" pitchFamily="2" charset="0"/>
-                <a:cs typeface="Helvetica Neue" panose="02000503000000020004" pitchFamily="2" charset="0"/>
-              </a:defRPr>
-            </a:lvl1pPr>
-          </a:lstStyle>
-          <a:p>
-            <a:fld id="{D73D4D4B-2FF7-BE46-958C-B004BD45EF6F}" type="slidenum">
-              <a:rPr lang="en-US" smtClean="0"/>
-              <a:pPr/>
-              <a:t>‹#›</a:t>
-            </a:fld>
-            <a:endParaRPr lang="en-US"/>
-          </a:p>
-        </p:txBody>
-      </p:sp>
-    </p:spTree>
-    <p:extLst>
-      <p:ext uri="{BB962C8B-B14F-4D97-AF65-F5344CB8AC3E}">
-        <p14:creationId xmlns:p14="http://schemas.microsoft.com/office/powerpoint/2010/main" val="3141916996"/>
-      </p:ext>
-    </p:extLst>
-  </p:cSld>
-  <p:clrMap bg1="lt1" tx1="dk1" bg2="lt2" tx2="dk2" accent1="accent1" accent2="accent2" accent3="accent3" accent4="accent4" accent5="accent5" accent6="accent6" hlink="hlink" folHlink="folHlink"/>
-  <p:sldLayoutIdLst>
-    <p:sldLayoutId id="2147483668" r:id="rId1"/>
-    <p:sldLayoutId id="2147483669" r:id="rId2"/>
-    <p:sldLayoutId id="2147483670" r:id="rId3"/>
-  </p:sldLayoutIdLst>
-  <p:hf sldNum="0" hdr="0" dt="0"/>
-  <p:txStyles>
-    <p:titleStyle>
-      <a:lvl1pPr algn="l" defTabSz="914400" rtl="0" eaLnBrk="1" latinLnBrk="0" hangingPunct="1">
-        <a:lnSpc>
-          <a:spcPct val="90000"/>
-        </a:lnSpc>
-        <a:spcBef>
-          <a:spcPct val="0"/>
-        </a:spcBef>
-        <a:buNone/>
-        <a:defRPr sz="4400" kern="1200">
-          <a:solidFill>
-            <a:schemeClr val="tx1"/>
-          </a:solidFill>
-          <a:latin typeface="Helvetica Neue" panose="02000503000000020004" pitchFamily="2" charset="0"/>
-          <a:ea typeface="Helvetica Neue" panose="02000503000000020004" pitchFamily="2" charset="0"/>
-          <a:cs typeface="Helvetica Neue" panose="02000503000000020004" pitchFamily="2" charset="0"/>
-        </a:defRPr>
-      </a:lvl1pPr>
-    </p:titleStyle>
-    <p:bodyStyle>
-      <a:lvl1pPr marL="228600" indent="-228600" algn="l" defTabSz="914400" rtl="0" eaLnBrk="1" latinLnBrk="0" hangingPunct="1">
-        <a:lnSpc>
-          <a:spcPct val="90000"/>
-        </a:lnSpc>
-        <a:spcBef>
-          <a:spcPts val="1000"/>
-        </a:spcBef>
-        <a:buFont typeface="Arial" panose="020B0604020202020204" pitchFamily="34" charset="0"/>
-        <a:buChar char="•"/>
-        <a:defRPr sz="2800" kern="1200">
-          <a:solidFill>
-            <a:schemeClr val="tx1"/>
-          </a:solidFill>
-          <a:latin typeface="Helvetica Neue" panose="02000503000000020004" pitchFamily="2" charset="0"/>
-          <a:ea typeface="Helvetica Neue" panose="02000503000000020004" pitchFamily="2" charset="0"/>
-          <a:cs typeface="Helvetica Neue" panose="02000503000000020004" pitchFamily="2" charset="0"/>
-        </a:defRPr>
-      </a:lvl1pPr>
-      <a:lvl2pPr marL="685800" indent="-228600" algn="l" defTabSz="914400" rtl="0" eaLnBrk="1" latinLnBrk="0" hangingPunct="1">
-        <a:lnSpc>
-          <a:spcPct val="90000"/>
-        </a:lnSpc>
-        <a:spcBef>
-          <a:spcPts val="500"/>
-        </a:spcBef>
-        <a:buFont typeface="Arial" panose="020B0604020202020204" pitchFamily="34" charset="0"/>
-        <a:buChar char="•"/>
-        <a:defRPr sz="2400" kern="1200">
-          <a:solidFill>
-            <a:schemeClr val="tx1"/>
-          </a:solidFill>
-          <a:latin typeface="Helvetica Neue" panose="02000503000000020004" pitchFamily="2" charset="0"/>
-          <a:ea typeface="Helvetica Neue" panose="02000503000000020004" pitchFamily="2" charset="0"/>
-          <a:cs typeface="Helvetica Neue" panose="02000503000000020004" pitchFamily="2" charset="0"/>
-        </a:defRPr>
-      </a:lvl2pPr>
-      <a:lvl3pPr marL="1143000" indent="-228600" algn="l" defTabSz="914400" rtl="0" eaLnBrk="1" latinLnBrk="0" hangingPunct="1">
-        <a:lnSpc>
-          <a:spcPct val="90000"/>
-        </a:lnSpc>
-        <a:spcBef>
-          <a:spcPts val="500"/>
-        </a:spcBef>
-        <a:buFont typeface="Arial" panose="020B0604020202020204" pitchFamily="34" charset="0"/>
-        <a:buChar char="•"/>
-        <a:defRPr sz="2000" kern="1200">
-          <a:solidFill>
-            <a:schemeClr val="tx1"/>
-          </a:solidFill>
-          <a:latin typeface="Helvetica Neue" panose="02000503000000020004" pitchFamily="2" charset="0"/>
-          <a:ea typeface="Helvetica Neue" panose="02000503000000020004" pitchFamily="2" charset="0"/>
-          <a:cs typeface="Helvetica Neue" panose="02000503000000020004" pitchFamily="2" charset="0"/>
-        </a:defRPr>
-      </a:lvl3pPr>
-      <a:lvl4pPr marL="1600200" indent="-228600" algn="l" defTabSz="914400" rtl="0" eaLnBrk="1" latinLnBrk="0" hangingPunct="1">
-        <a:lnSpc>
-          <a:spcPct val="90000"/>
-        </a:lnSpc>
-        <a:spcBef>
-          <a:spcPts val="500"/>
-        </a:spcBef>
-        <a:buFont typeface="Arial" panose="020B0604020202020204" pitchFamily="34" charset="0"/>
-        <a:buChar char="•"/>
-        <a:defRPr sz="1800" kern="1200">
-          <a:solidFill>
-            <a:schemeClr val="tx1"/>
-          </a:solidFill>
-          <a:latin typeface="Helvetica Neue" panose="02000503000000020004" pitchFamily="2" charset="0"/>
-          <a:ea typeface="Helvetica Neue" panose="02000503000000020004" pitchFamily="2" charset="0"/>
-          <a:cs typeface="Helvetica Neue" panose="02000503000000020004" pitchFamily="2" charset="0"/>
-        </a:defRPr>
-      </a:lvl4pPr>
-      <a:lvl5pPr marL="2057400" indent="-228600" algn="l" defTabSz="914400" rtl="0" eaLnBrk="1" latinLnBrk="0" hangingPunct="1">
-        <a:lnSpc>
-          <a:spcPct val="90000"/>
-        </a:lnSpc>
-        <a:spcBef>
-          <a:spcPts val="500"/>
-        </a:spcBef>
-        <a:buFont typeface="Arial" panose="020B0604020202020204" pitchFamily="34" charset="0"/>
-        <a:buChar char="•"/>
-        <a:defRPr sz="1800" kern="1200">
-          <a:solidFill>
-            <a:schemeClr val="tx1"/>
-          </a:solidFill>
-          <a:latin typeface="Helvetica Neue" panose="02000503000000020004" pitchFamily="2" charset="0"/>
-          <a:ea typeface="Helvetica Neue" panose="02000503000000020004" pitchFamily="2" charset="0"/>
-          <a:cs typeface="Helvetica Neue" panose="02000503000000020004" pitchFamily="2" charset="0"/>
-        </a:defRPr>
-      </a:lvl5pPr>
-      <a:lvl6pPr marL="2514600" indent="-228600" algn="l" defTabSz="914400" rtl="0" eaLnBrk="1" latinLnBrk="0" hangingPunct="1">
-        <a:lnSpc>
-          <a:spcPct val="90000"/>
-        </a:lnSpc>
-        <a:spcBef>
-          <a:spcPts val="500"/>
-        </a:spcBef>
-        <a:buFont typeface="Arial" panose="020B0604020202020204" pitchFamily="34" charset="0"/>
-        <a:buChar char="•"/>
-        <a:defRPr sz="1800" kern="1200">
-          <a:solidFill>
-            <a:schemeClr val="tx1"/>
-          </a:solidFill>
-          <a:latin typeface="+mn-lt"/>
-          <a:ea typeface="+mn-ea"/>
-          <a:cs typeface="+mn-cs"/>
-        </a:defRPr>
-      </a:lvl6pPr>
-      <a:lvl7pPr marL="2971800" indent="-228600" algn="l" defTabSz="914400" rtl="0" eaLnBrk="1" latinLnBrk="0" hangingPunct="1">
-        <a:lnSpc>
-          <a:spcPct val="90000"/>
-        </a:lnSpc>
-        <a:spcBef>
-          <a:spcPts val="500"/>
-        </a:spcBef>
-        <a:buFont typeface="Arial" panose="020B0604020202020204" pitchFamily="34" charset="0"/>
-        <a:buChar char="•"/>
-        <a:defRPr sz="1800" kern="1200">
-          <a:solidFill>
-            <a:schemeClr val="tx1"/>
-          </a:solidFill>
-          <a:latin typeface="+mn-lt"/>
-          <a:ea typeface="+mn-ea"/>
-          <a:cs typeface="+mn-cs"/>
-        </a:defRPr>
-      </a:lvl7pPr>
-      <a:lvl8pPr marL="3429000" indent="-228600" algn="l" defTabSz="914400" rtl="0" eaLnBrk="1" latinLnBrk="0" hangingPunct="1">
-        <a:lnSpc>
-          <a:spcPct val="90000"/>
-        </a:lnSpc>
-        <a:spcBef>
-          <a:spcPts val="500"/>
-        </a:spcBef>
-        <a:buFont typeface="Arial" panose="020B0604020202020204" pitchFamily="34" charset="0"/>
-        <a:buChar char="•"/>
-        <a:defRPr sz="1800" kern="1200">
-          <a:solidFill>
-            <a:schemeClr val="tx1"/>
-          </a:solidFill>
-          <a:latin typeface="+mn-lt"/>
-          <a:ea typeface="+mn-ea"/>
-          <a:cs typeface="+mn-cs"/>
-        </a:defRPr>
-      </a:lvl8pPr>
-      <a:lvl9pPr marL="3886200" indent="-228600" algn="l" defTabSz="914400" rtl="0" eaLnBrk="1" latinLnBrk="0" hangingPunct="1">
-        <a:lnSpc>
-          <a:spcPct val="90000"/>
-        </a:lnSpc>
-        <a:spcBef>
-          <a:spcPts val="500"/>
-        </a:spcBef>
-        <a:buFont typeface="Arial" panose="020B0604020202020204" pitchFamily="34" charset="0"/>
-        <a:buChar char="•"/>
-        <a:defRPr sz="1800" kern="1200">
-          <a:solidFill>
-            <a:schemeClr val="tx1"/>
-          </a:solidFill>
-          <a:latin typeface="+mn-lt"/>
-          <a:ea typeface="+mn-ea"/>
-          <a:cs typeface="+mn-cs"/>
-        </a:defRPr>
-      </a:lvl9pPr>
-    </p:bodyStyle>
-    <p:otherStyle>
-      <a:defPPr>
-        <a:defRPr lang="en-US"/>
-      </a:defPPr>
-      <a:lvl1pPr marL="0" algn="l" defTabSz="914400" rtl="0" eaLnBrk="1" latinLnBrk="0" hangingPunct="1">
-        <a:defRPr sz="1800" kern="1200">
-          <a:solidFill>
-            <a:schemeClr val="tx1"/>
-          </a:solidFill>
-          <a:latin typeface="+mn-lt"/>
-          <a:ea typeface="+mn-ea"/>
-          <a:cs typeface="+mn-cs"/>
-        </a:defRPr>
-      </a:lvl1pPr>
-      <a:lvl2pPr marL="457200" algn="l" defTabSz="914400" rtl="0" eaLnBrk="1" latinLnBrk="0" hangingPunct="1">
-        <a:defRPr sz="1800" kern="1200">
-          <a:solidFill>
-            <a:schemeClr val="tx1"/>
-          </a:solidFill>
-          <a:latin typeface="+mn-lt"/>
-          <a:ea typeface="+mn-ea"/>
-          <a:cs typeface="+mn-cs"/>
-        </a:defRPr>
-      </a:lvl2pPr>
-      <a:lvl3pPr marL="914400" algn="l" defTabSz="914400" rtl="0" eaLnBrk="1" latinLnBrk="0" hangingPunct="1">
-        <a:defRPr sz="1800" kern="1200">
-          <a:solidFill>
-            <a:schemeClr val="tx1"/>
-          </a:solidFill>
-          <a:latin typeface="+mn-lt"/>
-          <a:ea typeface="+mn-ea"/>
-          <a:cs typeface="+mn-cs"/>
-        </a:defRPr>
-      </a:lvl3pPr>
-      <a:lvl4pPr marL="1371600" algn="l" defTabSz="914400" rtl="0" eaLnBrk="1" latinLnBrk="0" hangingPunct="1">
-        <a:defRPr sz="1800" kern="1200">
-          <a:solidFill>
-            <a:schemeClr val="tx1"/>
-          </a:solidFill>
-          <a:latin typeface="+mn-lt"/>
-          <a:ea typeface="+mn-ea"/>
-          <a:cs typeface="+mn-cs"/>
-        </a:defRPr>
-      </a:lvl4pPr>
-      <a:lvl5pPr marL="1828800" algn="l" defTabSz="914400" rtl="0" eaLnBrk="1" latinLnBrk="0" hangingPunct="1">
-        <a:defRPr sz="1800" kern="1200">
-          <a:solidFill>
-            <a:schemeClr val="tx1"/>
-          </a:solidFill>
-          <a:latin typeface="+mn-lt"/>
-          <a:ea typeface="+mn-ea"/>
-          <a:cs typeface="+mn-cs"/>
-        </a:defRPr>
-      </a:lvl5pPr>
-      <a:lvl6pPr marL="2286000" algn="l" defTabSz="914400" rtl="0" eaLnBrk="1" latinLnBrk="0" hangingPunct="1">
-        <a:defRPr sz="1800" kern="1200">
-          <a:solidFill>
-            <a:schemeClr val="tx1"/>
-          </a:solidFill>
-          <a:latin typeface="+mn-lt"/>
-          <a:ea typeface="+mn-ea"/>
-          <a:cs typeface="+mn-cs"/>
-        </a:defRPr>
-      </a:lvl6pPr>
-      <a:lvl7pPr marL="2743200" algn="l" defTabSz="914400" rtl="0" eaLnBrk="1" latinLnBrk="0" hangingPunct="1">
-        <a:defRPr sz="1800" kern="1200">
-          <a:solidFill>
-            <a:schemeClr val="tx1"/>
-          </a:solidFill>
-          <a:latin typeface="+mn-lt"/>
-          <a:ea typeface="+mn-ea"/>
-          <a:cs typeface="+mn-cs"/>
-        </a:defRPr>
-      </a:lvl7pPr>
-      <a:lvl8pPr marL="3200400" algn="l" defTabSz="914400" rtl="0" eaLnBrk="1" latinLnBrk="0" hangingPunct="1">
-        <a:defRPr sz="1800" kern="1200">
-          <a:solidFill>
-            <a:schemeClr val="tx1"/>
-          </a:solidFill>
-          <a:latin typeface="+mn-lt"/>
-          <a:ea typeface="+mn-ea"/>
-          <a:cs typeface="+mn-cs"/>
-        </a:defRPr>
-      </a:lvl8pPr>
-      <a:lvl9pPr marL="3657600" algn="l" defTabSz="914400" rtl="0" eaLnBrk="1" latinLnBrk="0" hangingPunct="1">
-        <a:defRPr sz="1800" kern="1200">
-          <a:solidFill>
-            <a:schemeClr val="tx1"/>
-          </a:solidFill>
-          <a:latin typeface="+mn-lt"/>
-          <a:ea typeface="+mn-ea"/>
-          <a:cs typeface="+mn-cs"/>
-        </a:defRPr>
-      </a:lvl9pPr>
-    </p:otherStyle>
-  </p:txStyles>
-</p:sldMaster>
-</file>
-
 <file path=ppt/slides/slide1.xml><?xml version="1.0" encoding="utf-8"?>
 <p:sld xmlns:a="http://schemas.openxmlformats.org/drawingml/2006/main" xmlns:r="http://schemas.openxmlformats.org/officeDocument/2006/relationships" xmlns:p="http://schemas.openxmlformats.org/presentationml/2006/main">
   <p:cSld>
@@ -9901,7 +8085,13 @@
     </p:bg>
     <p:spTree>
       <p:nvGrpSpPr>
-        <p:cNvPr id="1" name=""/>
+        <p:cNvPr id="1" name="">
+          <a:extLst>
+            <a:ext uri="{FF2B5EF4-FFF2-40B4-BE49-F238E27FC236}">
+              <a16:creationId xmlns:a16="http://schemas.microsoft.com/office/drawing/2014/main" id="{A95AD505-148F-7C13-EC73-22518E14F4FC}"/>
+            </a:ext>
+          </a:extLst>
+        </p:cNvPr>
         <p:cNvGrpSpPr/>
         <p:nvPr/>
       </p:nvGrpSpPr>
@@ -9918,7 +8108,7 @@
           <p:cNvPr id="2" name="TextBox 1">
             <a:extLst>
               <a:ext uri="{FF2B5EF4-FFF2-40B4-BE49-F238E27FC236}">
-                <a16:creationId xmlns:a16="http://schemas.microsoft.com/office/drawing/2014/main" id="{1D77ACA5-3691-8FEB-0266-8D47BBCCF4C6}"/>
+                <a16:creationId xmlns:a16="http://schemas.microsoft.com/office/drawing/2014/main" id="{B3C53938-22FE-22BD-E59A-97F76192783B}"/>
               </a:ext>
             </a:extLst>
           </p:cNvPr>
@@ -9928,7 +8118,7 @@
         <p:spPr>
           <a:xfrm>
             <a:off x="0" y="186247"/>
-            <a:ext cx="12191999" cy="4067780"/>
+            <a:ext cx="12191999" cy="3953968"/>
           </a:xfrm>
           <a:prstGeom prst="rect">
             <a:avLst/>
@@ -9940,42 +8130,6 @@
             <a:spAutoFit/>
           </a:bodyPr>
           <a:lstStyle/>
-          <a:p>
-            <a:pPr marL="0" marR="0" lvl="0" indent="0" algn="ctr" defTabSz="914400" rtl="0" eaLnBrk="1" fontAlgn="auto" latinLnBrk="0" hangingPunct="1">
-              <a:lnSpc>
-                <a:spcPts val="11000"/>
-              </a:lnSpc>
-              <a:spcBef>
-                <a:spcPts val="0"/>
-              </a:spcBef>
-              <a:spcAft>
-                <a:spcPts val="0"/>
-              </a:spcAft>
-              <a:buClrTx/>
-              <a:buSzTx/>
-              <a:buFontTx/>
-              <a:buNone/>
-              <a:tabLst/>
-              <a:defRPr/>
-            </a:pPr>
-            <a:r>
-              <a:rPr kumimoji="0" lang="en-US" sz="11500" b="0" i="0" u="none" strike="noStrike" kern="1200" cap="none" spc="0" normalizeH="0" baseline="0" noProof="0" dirty="0">
-                <a:ln>
-                  <a:noFill/>
-                </a:ln>
-                <a:solidFill>
-                  <a:prstClr val="white"/>
-                </a:solidFill>
-                <a:effectLst/>
-                <a:uLnTx/>
-                <a:uFillTx/>
-                <a:latin typeface="Helvetica Neue UltraLight" panose="02000206000000020004" pitchFamily="2" charset="0"/>
-                <a:ea typeface="Helvetica Neue UltraLight" panose="02000206000000020004" pitchFamily="2" charset="0"/>
-                <a:cs typeface="Helvetica Neue" panose="02000503000000020004" pitchFamily="2" charset="0"/>
-              </a:rPr>
-              <a:t>neoclassical.ai</a:t>
-            </a:r>
-          </a:p>
           <a:p>
             <a:pPr marL="0" marR="0" lvl="0" indent="0" algn="ctr" defTabSz="914400" rtl="0" eaLnBrk="1" fontAlgn="auto" latinLnBrk="0" hangingPunct="1">
               <a:lnSpc>
@@ -10009,7 +8163,76 @@
                 <a:ea typeface="Helvetica Neue Condensed Black" panose="02000503000000020004" pitchFamily="2" charset="0"/>
                 <a:cs typeface="Helvetica Neue Condensed Black" panose="02000503000000020004" pitchFamily="2" charset="0"/>
               </a:rPr>
-              <a:t>Life Related Assemblies</a:t>
+              <a:t>What Life Form </a:t>
+            </a:r>
+            <a:br>
+              <a:rPr kumimoji="0" lang="en-US" sz="11500" b="1" i="0" u="none" strike="noStrike" kern="1200" cap="none" spc="0" normalizeH="0" baseline="0" noProof="0" dirty="0">
+                <a:ln>
+                  <a:noFill/>
+                </a:ln>
+                <a:solidFill>
+                  <a:srgbClr val="FFC000"/>
+                </a:solidFill>
+                <a:effectLst/>
+                <a:uLnTx/>
+                <a:uFillTx/>
+                <a:latin typeface="Helvetica Neue Condensed Black" panose="02000503000000020004" pitchFamily="2" charset="0"/>
+                <a:ea typeface="Helvetica Neue Condensed Black" panose="02000503000000020004" pitchFamily="2" charset="0"/>
+                <a:cs typeface="Helvetica Neue Condensed Black" panose="02000503000000020004" pitchFamily="2" charset="0"/>
+              </a:rPr>
+            </a:br>
+            <a:r>
+              <a:rPr kumimoji="0" lang="en-US" sz="11500" b="1" i="0" u="none" strike="noStrike" kern="1200" cap="none" spc="0" normalizeH="0" baseline="0" noProof="0" dirty="0">
+                <a:ln>
+                  <a:noFill/>
+                </a:ln>
+                <a:solidFill>
+                  <a:srgbClr val="FFC000"/>
+                </a:solidFill>
+                <a:effectLst/>
+                <a:uLnTx/>
+                <a:uFillTx/>
+                <a:latin typeface="Helvetica Neue Condensed Black" panose="02000503000000020004" pitchFamily="2" charset="0"/>
+                <a:ea typeface="Helvetica Neue Condensed Black" panose="02000503000000020004" pitchFamily="2" charset="0"/>
+                <a:cs typeface="Helvetica Neue Condensed Black" panose="02000503000000020004" pitchFamily="2" charset="0"/>
+              </a:rPr>
+              <a:t>has the Fewest </a:t>
+            </a:r>
+          </a:p>
+          <a:p>
+            <a:pPr marL="0" marR="0" lvl="0" indent="0" algn="ctr" defTabSz="914400" rtl="0" eaLnBrk="1" fontAlgn="auto" latinLnBrk="0" hangingPunct="1">
+              <a:lnSpc>
+                <a:spcPts val="10000"/>
+              </a:lnSpc>
+              <a:spcBef>
+                <a:spcPts val="0"/>
+              </a:spcBef>
+              <a:spcAft>
+                <a:spcPts val="0"/>
+              </a:spcAft>
+              <a:buClrTx/>
+              <a:buSzTx/>
+              <a:buFontTx/>
+              <a:buNone/>
+              <a:tabLst/>
+              <a:defRPr/>
+            </a:pPr>
+            <a:r>
+              <a:rPr kumimoji="0" lang="en-US" sz="11500" b="1" i="0" u="none" strike="noStrike" kern="1200" cap="none" spc="0" normalizeH="0" baseline="0" noProof="0" dirty="0">
+                <a:ln>
+                  <a:noFill/>
+                </a:ln>
+                <a:solidFill>
+                  <a:srgbClr val="FFC000"/>
+                </a:solidFill>
+                <a:effectLst/>
+                <a:uLnTx/>
+                <a:uFillTx/>
+                <a:latin typeface="Helvetica Neue Condensed Black" panose="02000503000000020004" pitchFamily="2" charset="0"/>
+                <a:ea typeface="Helvetica Neue Condensed Black" panose="02000503000000020004" pitchFamily="2" charset="0"/>
+                <a:cs typeface="Helvetica Neue Condensed Black" panose="02000503000000020004" pitchFamily="2" charset="0"/>
+              </a:rPr>
+              <a:t>Point Potentials?</a:t>
             </a:r>
             <a:endParaRPr kumimoji="0" lang="en-US" sz="11500" b="1" i="0" u="none" strike="noStrike" kern="1200" cap="none" spc="0" normalizeH="0" baseline="0" noProof="0" dirty="0">
               <a:ln>
@@ -10031,7 +8254,7 @@
     </p:spTree>
     <p:extLst>
       <p:ext uri="{BB962C8B-B14F-4D97-AF65-F5344CB8AC3E}">
-        <p14:creationId xmlns:p14="http://schemas.microsoft.com/office/powerpoint/2010/main" val="2348934641"/>
+        <p14:creationId xmlns:p14="http://schemas.microsoft.com/office/powerpoint/2010/main" val="3311713244"/>
       </p:ext>
     </p:extLst>
   </p:cSld>
@@ -10041,7 +8264,700 @@
 </p:sld>
 </file>
 
-<file path=ppt/slides/slide10.xml><?xml version="1.0" encoding="utf-8"?>
+<file path=ppt/slides/slide2.xml><?xml version="1.0" encoding="utf-8"?>
+<p:sld xmlns:a="http://schemas.openxmlformats.org/drawingml/2006/main" xmlns:r="http://schemas.openxmlformats.org/officeDocument/2006/relationships" xmlns:p="http://schemas.openxmlformats.org/presentationml/2006/main">
+  <p:cSld>
+    <p:bg>
+      <p:bgPr>
+        <a:solidFill>
+          <a:srgbClr val="7030A0"/>
+        </a:solidFill>
+        <a:effectLst/>
+      </p:bgPr>
+    </p:bg>
+    <p:spTree>
+      <p:nvGrpSpPr>
+        <p:cNvPr id="1" name="">
+          <a:extLst>
+            <a:ext uri="{FF2B5EF4-FFF2-40B4-BE49-F238E27FC236}">
+              <a16:creationId xmlns:a16="http://schemas.microsoft.com/office/drawing/2014/main" id="{365CF149-638E-D4FE-A688-5F738F294DCE}"/>
+            </a:ext>
+          </a:extLst>
+        </p:cNvPr>
+        <p:cNvGrpSpPr/>
+        <p:nvPr/>
+      </p:nvGrpSpPr>
+      <p:grpSpPr>
+        <a:xfrm>
+          <a:off x="0" y="0"/>
+          <a:ext cx="0" cy="0"/>
+          <a:chOff x="0" y="0"/>
+          <a:chExt cx="0" cy="0"/>
+        </a:xfrm>
+      </p:grpSpPr>
+      <p:sp>
+        <p:nvSpPr>
+          <p:cNvPr id="2" name="TextBox 1">
+            <a:extLst>
+              <a:ext uri="{FF2B5EF4-FFF2-40B4-BE49-F238E27FC236}">
+                <a16:creationId xmlns:a16="http://schemas.microsoft.com/office/drawing/2014/main" id="{CA22E71C-3B43-3887-6804-C1009A7A1619}"/>
+              </a:ext>
+            </a:extLst>
+          </p:cNvPr>
+          <p:cNvSpPr txBox="1"/>
+          <p:nvPr/>
+        </p:nvSpPr>
+        <p:spPr>
+          <a:xfrm>
+            <a:off x="0" y="186247"/>
+            <a:ext cx="12191999" cy="1374735"/>
+          </a:xfrm>
+          <a:prstGeom prst="rect">
+            <a:avLst/>
+          </a:prstGeom>
+          <a:noFill/>
+        </p:spPr>
+        <p:txBody>
+          <a:bodyPr wrap="square" rtlCol="0">
+            <a:spAutoFit/>
+          </a:bodyPr>
+          <a:lstStyle/>
+          <a:p>
+            <a:pPr algn="ctr">
+              <a:lnSpc>
+                <a:spcPts val="10000"/>
+              </a:lnSpc>
+              <a:defRPr/>
+            </a:pPr>
+            <a:r>
+              <a:rPr kumimoji="0" lang="en-US" sz="8800" b="1" i="0" u="none" strike="noStrike" kern="1200" cap="none" spc="0" normalizeH="0" baseline="0" noProof="0" dirty="0" err="1">
+                <a:ln>
+                  <a:noFill/>
+                </a:ln>
+                <a:solidFill>
+                  <a:srgbClr val="FFC000"/>
+                </a:solidFill>
+                <a:effectLst/>
+                <a:uLnTx/>
+                <a:uFillTx/>
+                <a:latin typeface="Helvetica Neue Condensed Black" panose="02000503000000020004" pitchFamily="2" charset="0"/>
+                <a:ea typeface="Helvetica Neue Condensed Black" panose="02000503000000020004" pitchFamily="2" charset="0"/>
+                <a:cs typeface="Helvetica Neue Condensed Black" panose="02000503000000020004" pitchFamily="2" charset="0"/>
+              </a:rPr>
+              <a:t>Nanoarchaeum</a:t>
+            </a:r>
+            <a:r>
+              <a:rPr kumimoji="0" lang="en-US" sz="8800" b="1" i="0" u="none" strike="noStrike" kern="1200" cap="none" spc="0" normalizeH="0" baseline="0" noProof="0" dirty="0">
+                <a:ln>
+                  <a:noFill/>
+                </a:ln>
+                <a:solidFill>
+                  <a:srgbClr val="FFC000"/>
+                </a:solidFill>
+                <a:effectLst/>
+                <a:uLnTx/>
+                <a:uFillTx/>
+                <a:latin typeface="Helvetica Neue Condensed Black" panose="02000503000000020004" pitchFamily="2" charset="0"/>
+                <a:ea typeface="Helvetica Neue Condensed Black" panose="02000503000000020004" pitchFamily="2" charset="0"/>
+                <a:cs typeface="Helvetica Neue Condensed Black" panose="02000503000000020004" pitchFamily="2" charset="0"/>
+              </a:rPr>
+              <a:t> </a:t>
+            </a:r>
+            <a:r>
+              <a:rPr kumimoji="0" lang="en-US" sz="8800" b="1" i="0" u="none" strike="noStrike" kern="1200" cap="none" spc="0" normalizeH="0" baseline="0" noProof="0" dirty="0" err="1">
+                <a:ln>
+                  <a:noFill/>
+                </a:ln>
+                <a:solidFill>
+                  <a:srgbClr val="FFC000"/>
+                </a:solidFill>
+                <a:effectLst/>
+                <a:uLnTx/>
+                <a:uFillTx/>
+                <a:latin typeface="Helvetica Neue Condensed Black" panose="02000503000000020004" pitchFamily="2" charset="0"/>
+                <a:ea typeface="Helvetica Neue Condensed Black" panose="02000503000000020004" pitchFamily="2" charset="0"/>
+                <a:cs typeface="Helvetica Neue Condensed Black" panose="02000503000000020004" pitchFamily="2" charset="0"/>
+              </a:rPr>
+              <a:t>equitans</a:t>
+            </a:r>
+            <a:endParaRPr kumimoji="0" lang="en-US" sz="8800" b="1" i="0" u="none" strike="noStrike" kern="1200" cap="none" spc="0" normalizeH="0" baseline="0" noProof="0" dirty="0">
+              <a:ln>
+                <a:noFill/>
+              </a:ln>
+              <a:solidFill>
+                <a:srgbClr val="FFC000"/>
+              </a:solidFill>
+              <a:effectLst/>
+              <a:uLnTx/>
+              <a:uFillTx/>
+              <a:latin typeface="Helvetica Neue Condensed Black" panose="02000503000000020004" pitchFamily="2" charset="0"/>
+              <a:ea typeface="Helvetica Neue Condensed Black" panose="02000503000000020004" pitchFamily="2" charset="0"/>
+              <a:cs typeface="Helvetica Neue Condensed Black" panose="02000503000000020004" pitchFamily="2" charset="0"/>
+            </a:endParaRPr>
+          </a:p>
+        </p:txBody>
+      </p:sp>
+      <p:sp>
+        <p:nvSpPr>
+          <p:cNvPr id="5" name="TextBox 4">
+            <a:extLst>
+              <a:ext uri="{FF2B5EF4-FFF2-40B4-BE49-F238E27FC236}">
+                <a16:creationId xmlns:a16="http://schemas.microsoft.com/office/drawing/2014/main" id="{9FD60923-3051-E75C-EBA1-5F01B55BA37A}"/>
+              </a:ext>
+            </a:extLst>
+          </p:cNvPr>
+          <p:cNvSpPr txBox="1"/>
+          <p:nvPr/>
+        </p:nvSpPr>
+        <p:spPr>
+          <a:xfrm>
+            <a:off x="0" y="1568935"/>
+            <a:ext cx="12191999" cy="4816234"/>
+          </a:xfrm>
+          <a:prstGeom prst="rect">
+            <a:avLst/>
+          </a:prstGeom>
+          <a:noFill/>
+        </p:spPr>
+        <p:txBody>
+          <a:bodyPr wrap="square" rtlCol="0">
+            <a:noAutofit/>
+          </a:bodyPr>
+          <a:lstStyle/>
+          <a:p>
+            <a:pPr marL="285750" indent="-285750">
+              <a:buFont typeface="Arial" panose="020B0604020202020204" pitchFamily="34" charset="0"/>
+              <a:buChar char="•"/>
+              <a:defRPr/>
+            </a:pPr>
+            <a:endParaRPr kumimoji="0" lang="en-US" sz="2000" b="0" u="none" strike="noStrike" kern="1200" cap="none" spc="0" normalizeH="0" baseline="0" noProof="0" dirty="0">
+              <a:ln>
+                <a:noFill/>
+              </a:ln>
+              <a:solidFill>
+                <a:schemeClr val="bg1"/>
+              </a:solidFill>
+              <a:effectLst/>
+              <a:uLnTx/>
+              <a:uFillTx/>
+              <a:latin typeface="Helvetica Neue" panose="02000503000000020004" pitchFamily="2" charset="0"/>
+              <a:ea typeface="Helvetica Neue" panose="02000503000000020004" pitchFamily="2" charset="0"/>
+              <a:cs typeface="Helvetica Neue" panose="02000503000000020004" pitchFamily="2" charset="0"/>
+            </a:endParaRPr>
+          </a:p>
+          <a:p>
+            <a:pPr marL="742950" lvl="1" indent="-285750">
+              <a:buFont typeface="Arial" panose="020B0604020202020204" pitchFamily="34" charset="0"/>
+              <a:buChar char="•"/>
+              <a:defRPr/>
+            </a:pPr>
+            <a:r>
+              <a:rPr lang="en-US" sz="2000" b="1" dirty="0">
+                <a:solidFill>
+                  <a:schemeClr val="bg1"/>
+                </a:solidFill>
+                <a:latin typeface="Helvetica Neue" panose="02000503000000020004" pitchFamily="2" charset="0"/>
+                <a:ea typeface="Helvetica Neue" panose="02000503000000020004" pitchFamily="2" charset="0"/>
+                <a:cs typeface="Helvetica Neue" panose="02000503000000020004" pitchFamily="2" charset="0"/>
+              </a:rPr>
+              <a:t>The smallest living organism recognized by scientists is </a:t>
+            </a:r>
+            <a:r>
+              <a:rPr lang="en-US" sz="2000" b="1" dirty="0" err="1">
+                <a:solidFill>
+                  <a:schemeClr val="bg1"/>
+                </a:solidFill>
+                <a:latin typeface="Helvetica Neue" panose="02000503000000020004" pitchFamily="2" charset="0"/>
+                <a:ea typeface="Helvetica Neue" panose="02000503000000020004" pitchFamily="2" charset="0"/>
+                <a:cs typeface="Helvetica Neue" panose="02000503000000020004" pitchFamily="2" charset="0"/>
+              </a:rPr>
+              <a:t>Nanoarchaeum</a:t>
+            </a:r>
+            <a:r>
+              <a:rPr lang="en-US" sz="2000" b="1" dirty="0">
+                <a:solidFill>
+                  <a:schemeClr val="bg1"/>
+                </a:solidFill>
+                <a:latin typeface="Helvetica Neue" panose="02000503000000020004" pitchFamily="2" charset="0"/>
+                <a:ea typeface="Helvetica Neue" panose="02000503000000020004" pitchFamily="2" charset="0"/>
+                <a:cs typeface="Helvetica Neue" panose="02000503000000020004" pitchFamily="2" charset="0"/>
+              </a:rPr>
+              <a:t> </a:t>
+            </a:r>
+            <a:r>
+              <a:rPr lang="en-US" sz="2000" b="1" dirty="0" err="1">
+                <a:solidFill>
+                  <a:schemeClr val="bg1"/>
+                </a:solidFill>
+                <a:latin typeface="Helvetica Neue" panose="02000503000000020004" pitchFamily="2" charset="0"/>
+                <a:ea typeface="Helvetica Neue" panose="02000503000000020004" pitchFamily="2" charset="0"/>
+                <a:cs typeface="Helvetica Neue" panose="02000503000000020004" pitchFamily="2" charset="0"/>
+              </a:rPr>
+              <a:t>equitans</a:t>
+            </a:r>
+            <a:r>
+              <a:rPr lang="en-US" sz="2000" b="1" dirty="0">
+                <a:solidFill>
+                  <a:schemeClr val="bg1"/>
+                </a:solidFill>
+                <a:latin typeface="Helvetica Neue" panose="02000503000000020004" pitchFamily="2" charset="0"/>
+                <a:ea typeface="Helvetica Neue" panose="02000503000000020004" pitchFamily="2" charset="0"/>
+                <a:cs typeface="Helvetica Neue" panose="02000503000000020004" pitchFamily="2" charset="0"/>
+              </a:rPr>
+              <a:t>. </a:t>
+            </a:r>
+          </a:p>
+          <a:p>
+            <a:pPr marL="742950" lvl="1" indent="-285750">
+              <a:buFont typeface="Arial" panose="020B0604020202020204" pitchFamily="34" charset="0"/>
+              <a:buChar char="•"/>
+              <a:defRPr/>
+            </a:pPr>
+            <a:r>
+              <a:rPr lang="en-US" sz="2000" b="1" dirty="0">
+                <a:solidFill>
+                  <a:schemeClr val="bg1"/>
+                </a:solidFill>
+                <a:latin typeface="Helvetica Neue" panose="02000503000000020004" pitchFamily="2" charset="0"/>
+                <a:ea typeface="Helvetica Neue" panose="02000503000000020004" pitchFamily="2" charset="0"/>
+                <a:cs typeface="Helvetica Neue" panose="02000503000000020004" pitchFamily="2" charset="0"/>
+              </a:rPr>
+              <a:t>This microbe was discovered in 2002 in a hydrothermal vent off the coast of Iceland. </a:t>
+            </a:r>
+          </a:p>
+          <a:p>
+            <a:pPr marL="742950" lvl="1" indent="-285750">
+              <a:buFont typeface="Arial" panose="020B0604020202020204" pitchFamily="34" charset="0"/>
+              <a:buChar char="•"/>
+              <a:defRPr/>
+            </a:pPr>
+            <a:r>
+              <a:rPr lang="en-US" sz="2000" b="1" dirty="0">
+                <a:solidFill>
+                  <a:schemeClr val="bg1"/>
+                </a:solidFill>
+                <a:latin typeface="Helvetica Neue" panose="02000503000000020004" pitchFamily="2" charset="0"/>
+                <a:ea typeface="Helvetica Neue" panose="02000503000000020004" pitchFamily="2" charset="0"/>
+                <a:cs typeface="Helvetica Neue" panose="02000503000000020004" pitchFamily="2" charset="0"/>
+              </a:rPr>
+              <a:t>Its cells are only about 400 nanometers in diameter.</a:t>
+            </a:r>
+          </a:p>
+          <a:p>
+            <a:pPr marL="742950" lvl="1" indent="-285750">
+              <a:buFont typeface="Arial" panose="020B0604020202020204" pitchFamily="34" charset="0"/>
+              <a:buChar char="•"/>
+              <a:defRPr/>
+            </a:pPr>
+            <a:r>
+              <a:rPr lang="en-US" sz="2000" b="1" dirty="0">
+                <a:solidFill>
+                  <a:schemeClr val="bg1"/>
+                </a:solidFill>
+                <a:latin typeface="Helvetica Neue" panose="02000503000000020004" pitchFamily="2" charset="0"/>
+                <a:ea typeface="Helvetica Neue" panose="02000503000000020004" pitchFamily="2" charset="0"/>
+                <a:cs typeface="Helvetica Neue" panose="02000503000000020004" pitchFamily="2" charset="0"/>
+              </a:rPr>
+              <a:t>It has one of the smallest genomes of any sequenced microbe, with only 490,885 base pairs.</a:t>
+            </a:r>
+          </a:p>
+          <a:p>
+            <a:pPr marL="742950" lvl="1" indent="-285750">
+              <a:buFont typeface="Arial" panose="020B0604020202020204" pitchFamily="34" charset="0"/>
+              <a:buChar char="•"/>
+              <a:defRPr/>
+            </a:pPr>
+            <a:r>
+              <a:rPr lang="en-US" sz="2000" b="1" dirty="0">
+                <a:solidFill>
+                  <a:schemeClr val="bg1"/>
+                </a:solidFill>
+                <a:latin typeface="Helvetica Neue" panose="02000503000000020004" pitchFamily="2" charset="0"/>
+                <a:ea typeface="Helvetica Neue" panose="02000503000000020004" pitchFamily="2" charset="0"/>
+                <a:cs typeface="Helvetica Neue" panose="02000503000000020004" pitchFamily="2" charset="0"/>
+              </a:rPr>
+              <a:t>Its small size and minimal genome suggest it contains a relatively low number of atoms compared to larger organisms.</a:t>
+            </a:r>
+          </a:p>
+          <a:p>
+            <a:pPr marL="742950" lvl="1" indent="-285750">
+              <a:buFont typeface="Arial" panose="020B0604020202020204" pitchFamily="34" charset="0"/>
+              <a:buChar char="•"/>
+              <a:defRPr/>
+            </a:pPr>
+            <a:r>
+              <a:rPr lang="en-US" sz="2000" b="1" dirty="0">
+                <a:solidFill>
+                  <a:schemeClr val="bg1"/>
+                </a:solidFill>
+                <a:latin typeface="Helvetica Neue" panose="02000503000000020004" pitchFamily="2" charset="0"/>
+                <a:ea typeface="Helvetica Neue" panose="02000503000000020004" pitchFamily="2" charset="0"/>
+                <a:cs typeface="Helvetica Neue" panose="02000503000000020004" pitchFamily="2" charset="0"/>
+              </a:rPr>
+              <a:t>We know that RNA molecules </a:t>
+            </a:r>
+            <a:r>
+              <a:rPr lang="en-US" sz="2000" b="1" dirty="0" err="1">
+                <a:solidFill>
+                  <a:schemeClr val="bg1"/>
+                </a:solidFill>
+                <a:latin typeface="Helvetica Neue" panose="02000503000000020004" pitchFamily="2" charset="0"/>
+                <a:ea typeface="Helvetica Neue" panose="02000503000000020004" pitchFamily="2" charset="0"/>
+                <a:cs typeface="Helvetica Neue" panose="02000503000000020004" pitchFamily="2" charset="0"/>
+              </a:rPr>
+              <a:t>cantain</a:t>
+            </a:r>
+            <a:r>
+              <a:rPr lang="en-US" sz="2000" b="1" dirty="0">
+                <a:solidFill>
+                  <a:schemeClr val="bg1"/>
+                </a:solidFill>
+                <a:latin typeface="Helvetica Neue" panose="02000503000000020004" pitchFamily="2" charset="0"/>
+                <a:ea typeface="Helvetica Neue" panose="02000503000000020004" pitchFamily="2" charset="0"/>
+                <a:cs typeface="Helvetica Neue" panose="02000503000000020004" pitchFamily="2" charset="0"/>
+              </a:rPr>
+              <a:t> 4K-6K point potentials.</a:t>
+            </a:r>
+          </a:p>
+          <a:p>
+            <a:pPr marL="742950" lvl="1" indent="-285750">
+              <a:buFont typeface="Arial" panose="020B0604020202020204" pitchFamily="34" charset="0"/>
+              <a:buChar char="•"/>
+              <a:defRPr/>
+            </a:pPr>
+            <a:r>
+              <a:rPr lang="en-US" sz="2000" b="1" dirty="0">
+                <a:solidFill>
+                  <a:schemeClr val="bg1"/>
+                </a:solidFill>
+                <a:latin typeface="Helvetica Neue" panose="02000503000000020004" pitchFamily="2" charset="0"/>
+                <a:ea typeface="Helvetica Neue" panose="02000503000000020004" pitchFamily="2" charset="0"/>
+                <a:cs typeface="Helvetica Neue" panose="02000503000000020004" pitchFamily="2" charset="0"/>
+              </a:rPr>
+              <a:t>The genome therefore contains 500K x 10K ~= 5B point potentials.</a:t>
+            </a:r>
+          </a:p>
+          <a:p>
+            <a:pPr marL="742950" lvl="1" indent="-285750">
+              <a:buFont typeface="Arial" panose="020B0604020202020204" pitchFamily="34" charset="0"/>
+              <a:buChar char="•"/>
+              <a:defRPr/>
+            </a:pPr>
+            <a:endParaRPr lang="en-US" sz="2000" dirty="0">
+              <a:solidFill>
+                <a:schemeClr val="bg1"/>
+              </a:solidFill>
+              <a:latin typeface="Helvetica Neue" panose="02000503000000020004" pitchFamily="2" charset="0"/>
+              <a:ea typeface="Helvetica Neue" panose="02000503000000020004" pitchFamily="2" charset="0"/>
+              <a:cs typeface="Helvetica Neue" panose="02000503000000020004" pitchFamily="2" charset="0"/>
+            </a:endParaRPr>
+          </a:p>
+          <a:p>
+            <a:pPr marL="742950" lvl="1" indent="-285750">
+              <a:buFont typeface="Arial" panose="020B0604020202020204" pitchFamily="34" charset="0"/>
+              <a:buChar char="•"/>
+              <a:defRPr/>
+            </a:pPr>
+            <a:r>
+              <a:rPr kumimoji="0" lang="en-US" sz="2000" i="1" u="none" strike="noStrike" kern="1200" cap="none" spc="0" normalizeH="0" baseline="0" noProof="0" dirty="0">
+                <a:ln>
+                  <a:noFill/>
+                </a:ln>
+                <a:solidFill>
+                  <a:schemeClr val="bg1"/>
+                </a:solidFill>
+                <a:effectLst/>
+                <a:uLnTx/>
+                <a:uFillTx/>
+                <a:latin typeface="Helvetica Neue" panose="02000503000000020004" pitchFamily="2" charset="0"/>
+                <a:ea typeface="Helvetica Neue" panose="02000503000000020004" pitchFamily="2" charset="0"/>
+                <a:cs typeface="Helvetica Neue" panose="02000503000000020004" pitchFamily="2" charset="0"/>
+              </a:rPr>
+              <a:t>h/t CoPilot and Wikipedia</a:t>
+            </a:r>
+          </a:p>
+          <a:p>
+            <a:pPr marL="742950" lvl="1" indent="-285750">
+              <a:buFont typeface="Arial" panose="020B0604020202020204" pitchFamily="34" charset="0"/>
+              <a:buChar char="•"/>
+              <a:defRPr/>
+            </a:pPr>
+            <a:endParaRPr kumimoji="0" lang="en-US" sz="2000" b="0" u="none" strike="noStrike" kern="1200" cap="none" spc="0" normalizeH="0" baseline="0" noProof="0" dirty="0">
+              <a:ln>
+                <a:noFill/>
+              </a:ln>
+              <a:solidFill>
+                <a:schemeClr val="bg1"/>
+              </a:solidFill>
+              <a:effectLst/>
+              <a:uLnTx/>
+              <a:uFillTx/>
+              <a:latin typeface="Helvetica Neue" panose="02000503000000020004" pitchFamily="2" charset="0"/>
+              <a:ea typeface="Helvetica Neue" panose="02000503000000020004" pitchFamily="2" charset="0"/>
+              <a:cs typeface="Helvetica Neue" panose="02000503000000020004" pitchFamily="2" charset="0"/>
+            </a:endParaRPr>
+          </a:p>
+          <a:p>
+            <a:pPr marL="285750" marR="0" lvl="0" indent="-285750" algn="l" defTabSz="914400" rtl="0" eaLnBrk="1" fontAlgn="auto" latinLnBrk="0" hangingPunct="1">
+              <a:lnSpc>
+                <a:spcPct val="100000"/>
+              </a:lnSpc>
+              <a:spcBef>
+                <a:spcPts val="0"/>
+              </a:spcBef>
+              <a:spcAft>
+                <a:spcPts val="0"/>
+              </a:spcAft>
+              <a:buClrTx/>
+              <a:buSzTx/>
+              <a:buFont typeface="Arial" panose="020B0604020202020204" pitchFamily="34" charset="0"/>
+              <a:buChar char="•"/>
+              <a:tabLst/>
+              <a:defRPr/>
+            </a:pPr>
+            <a:endParaRPr kumimoji="0" lang="en-US" sz="2000" b="0" u="none" strike="noStrike" kern="1200" cap="none" spc="0" normalizeH="0" baseline="0" noProof="0" dirty="0">
+              <a:ln>
+                <a:noFill/>
+              </a:ln>
+              <a:solidFill>
+                <a:schemeClr val="bg1"/>
+              </a:solidFill>
+              <a:effectLst/>
+              <a:uLnTx/>
+              <a:uFillTx/>
+              <a:latin typeface="Helvetica Neue" panose="02000503000000020004" pitchFamily="2" charset="0"/>
+              <a:ea typeface="Helvetica Neue" panose="02000503000000020004" pitchFamily="2" charset="0"/>
+              <a:cs typeface="Helvetica Neue" panose="02000503000000020004" pitchFamily="2" charset="0"/>
+            </a:endParaRPr>
+          </a:p>
+          <a:p>
+            <a:pPr marL="0" marR="0" lvl="0" indent="0" algn="l" defTabSz="914400" rtl="0" eaLnBrk="1" fontAlgn="auto" latinLnBrk="0" hangingPunct="1">
+              <a:lnSpc>
+                <a:spcPct val="100000"/>
+              </a:lnSpc>
+              <a:spcBef>
+                <a:spcPts val="0"/>
+              </a:spcBef>
+              <a:spcAft>
+                <a:spcPts val="0"/>
+              </a:spcAft>
+              <a:buClrTx/>
+              <a:buSzTx/>
+              <a:buFontTx/>
+              <a:buNone/>
+              <a:tabLst/>
+              <a:defRPr/>
+            </a:pPr>
+            <a:endParaRPr kumimoji="0" lang="en-US" sz="2000" b="0" u="none" strike="noStrike" kern="1200" cap="none" spc="0" normalizeH="0" baseline="0" noProof="0" dirty="0">
+              <a:ln>
+                <a:noFill/>
+              </a:ln>
+              <a:solidFill>
+                <a:schemeClr val="bg1"/>
+              </a:solidFill>
+              <a:effectLst/>
+              <a:uLnTx/>
+              <a:uFillTx/>
+              <a:latin typeface="Helvetica Neue" panose="02000503000000020004" pitchFamily="2" charset="0"/>
+              <a:ea typeface="Helvetica Neue" panose="02000503000000020004" pitchFamily="2" charset="0"/>
+              <a:cs typeface="Helvetica Neue" panose="02000503000000020004" pitchFamily="2" charset="0"/>
+            </a:endParaRPr>
+          </a:p>
+          <a:p>
+            <a:pPr marL="285750" marR="0" lvl="0" indent="-285750" algn="l" defTabSz="914400" rtl="0" eaLnBrk="1" fontAlgn="auto" latinLnBrk="0" hangingPunct="1">
+              <a:lnSpc>
+                <a:spcPct val="100000"/>
+              </a:lnSpc>
+              <a:spcBef>
+                <a:spcPts val="0"/>
+              </a:spcBef>
+              <a:spcAft>
+                <a:spcPts val="0"/>
+              </a:spcAft>
+              <a:buClrTx/>
+              <a:buSzTx/>
+              <a:buFont typeface="Arial" panose="020B0604020202020204" pitchFamily="34" charset="0"/>
+              <a:buChar char="•"/>
+              <a:tabLst/>
+              <a:defRPr/>
+            </a:pPr>
+            <a:endParaRPr kumimoji="0" lang="en-US" sz="2000" b="0" u="none" strike="noStrike" kern="1200" cap="none" spc="0" normalizeH="0" baseline="0" noProof="0" dirty="0">
+              <a:ln>
+                <a:noFill/>
+              </a:ln>
+              <a:solidFill>
+                <a:schemeClr val="bg1"/>
+              </a:solidFill>
+              <a:effectLst/>
+              <a:uLnTx/>
+              <a:uFillTx/>
+              <a:latin typeface="Helvetica Neue" panose="02000503000000020004" pitchFamily="2" charset="0"/>
+              <a:ea typeface="Helvetica Neue" panose="02000503000000020004" pitchFamily="2" charset="0"/>
+              <a:cs typeface="Helvetica Neue" panose="02000503000000020004" pitchFamily="2" charset="0"/>
+            </a:endParaRPr>
+          </a:p>
+          <a:p>
+            <a:pPr marL="285750" marR="0" lvl="0" indent="-285750" algn="l" defTabSz="914400" rtl="0" eaLnBrk="1" fontAlgn="auto" latinLnBrk="0" hangingPunct="1">
+              <a:lnSpc>
+                <a:spcPct val="100000"/>
+              </a:lnSpc>
+              <a:spcBef>
+                <a:spcPts val="0"/>
+              </a:spcBef>
+              <a:spcAft>
+                <a:spcPts val="0"/>
+              </a:spcAft>
+              <a:buClrTx/>
+              <a:buSzTx/>
+              <a:buFont typeface="Arial" panose="020B0604020202020204" pitchFamily="34" charset="0"/>
+              <a:buChar char="•"/>
+              <a:tabLst/>
+              <a:defRPr/>
+            </a:pPr>
+            <a:endParaRPr kumimoji="0" lang="en-US" sz="2000" b="0" u="none" strike="noStrike" kern="1200" cap="none" spc="0" normalizeH="0" baseline="0" noProof="0" dirty="0">
+              <a:ln>
+                <a:noFill/>
+              </a:ln>
+              <a:solidFill>
+                <a:schemeClr val="bg1"/>
+              </a:solidFill>
+              <a:effectLst/>
+              <a:uLnTx/>
+              <a:uFillTx/>
+              <a:latin typeface="Helvetica Neue" panose="02000503000000020004" pitchFamily="2" charset="0"/>
+              <a:ea typeface="Helvetica Neue" panose="02000503000000020004" pitchFamily="2" charset="0"/>
+              <a:cs typeface="Helvetica Neue" panose="02000503000000020004" pitchFamily="2" charset="0"/>
+            </a:endParaRPr>
+          </a:p>
+          <a:p>
+            <a:pPr marL="285750" marR="0" lvl="0" indent="-285750" algn="l" defTabSz="914400" rtl="0" eaLnBrk="1" fontAlgn="auto" latinLnBrk="0" hangingPunct="1">
+              <a:lnSpc>
+                <a:spcPct val="100000"/>
+              </a:lnSpc>
+              <a:spcBef>
+                <a:spcPts val="0"/>
+              </a:spcBef>
+              <a:spcAft>
+                <a:spcPts val="0"/>
+              </a:spcAft>
+              <a:buClrTx/>
+              <a:buSzTx/>
+              <a:buFont typeface="Arial" panose="020B0604020202020204" pitchFamily="34" charset="0"/>
+              <a:buChar char="•"/>
+              <a:tabLst/>
+              <a:defRPr/>
+            </a:pPr>
+            <a:endParaRPr kumimoji="0" lang="en-US" sz="2000" b="0" u="none" strike="noStrike" kern="1200" cap="none" spc="0" normalizeH="0" baseline="0" noProof="0" dirty="0">
+              <a:ln>
+                <a:noFill/>
+              </a:ln>
+              <a:solidFill>
+                <a:schemeClr val="bg1"/>
+              </a:solidFill>
+              <a:effectLst/>
+              <a:uLnTx/>
+              <a:uFillTx/>
+              <a:latin typeface="Helvetica Neue" panose="02000503000000020004" pitchFamily="2" charset="0"/>
+              <a:ea typeface="Helvetica Neue" panose="02000503000000020004" pitchFamily="2" charset="0"/>
+              <a:cs typeface="Helvetica Neue" panose="02000503000000020004" pitchFamily="2" charset="0"/>
+            </a:endParaRPr>
+          </a:p>
+          <a:p>
+            <a:pPr marL="0" marR="0" lvl="0" indent="0" algn="l" defTabSz="914400" rtl="0" eaLnBrk="1" fontAlgn="auto" latinLnBrk="0" hangingPunct="1">
+              <a:lnSpc>
+                <a:spcPct val="100000"/>
+              </a:lnSpc>
+              <a:spcBef>
+                <a:spcPts val="0"/>
+              </a:spcBef>
+              <a:spcAft>
+                <a:spcPts val="0"/>
+              </a:spcAft>
+              <a:buClrTx/>
+              <a:buSzTx/>
+              <a:buFontTx/>
+              <a:buNone/>
+              <a:tabLst/>
+              <a:defRPr/>
+            </a:pPr>
+            <a:endParaRPr kumimoji="0" lang="en-US" sz="1400" b="0" u="none" strike="noStrike" kern="1200" cap="none" spc="0" normalizeH="0" baseline="0" noProof="0" dirty="0">
+              <a:ln>
+                <a:noFill/>
+              </a:ln>
+              <a:solidFill>
+                <a:schemeClr val="bg1"/>
+              </a:solidFill>
+              <a:effectLst/>
+              <a:uLnTx/>
+              <a:uFillTx/>
+              <a:latin typeface="Helvetica Neue" panose="02000503000000020004" pitchFamily="2" charset="0"/>
+              <a:ea typeface="Helvetica Neue" panose="02000503000000020004" pitchFamily="2" charset="0"/>
+              <a:cs typeface="Helvetica Neue" panose="02000503000000020004" pitchFamily="2" charset="0"/>
+            </a:endParaRPr>
+          </a:p>
+        </p:txBody>
+      </p:sp>
+      <p:pic>
+        <p:nvPicPr>
+          <p:cNvPr id="3074" name="Picture 2" descr="undefined">
+            <a:extLst>
+              <a:ext uri="{FF2B5EF4-FFF2-40B4-BE49-F238E27FC236}">
+                <a16:creationId xmlns:a16="http://schemas.microsoft.com/office/drawing/2014/main" id="{446818C8-F552-491F-947A-ACEDA4EBAFB1}"/>
+              </a:ext>
+            </a:extLst>
+          </p:cNvPr>
+          <p:cNvPicPr>
+            <a:picLocks noChangeAspect="1" noChangeArrowheads="1"/>
+          </p:cNvPicPr>
+          <p:nvPr/>
+        </p:nvPicPr>
+        <p:blipFill>
+          <a:blip r:embed="rId3">
+            <a:extLst>
+              <a:ext uri="{28A0092B-C50C-407E-A947-70E740481C1C}">
+                <a14:useLocalDpi xmlns:a14="http://schemas.microsoft.com/office/drawing/2010/main" val="0"/>
+              </a:ext>
+            </a:extLst>
+          </a:blip>
+          <a:srcRect/>
+          <a:stretch>
+            <a:fillRect/>
+          </a:stretch>
+        </p:blipFill>
+        <p:spPr bwMode="auto">
+          <a:xfrm>
+            <a:off x="8924158" y="3977052"/>
+            <a:ext cx="2794000" cy="2336800"/>
+          </a:xfrm>
+          <a:prstGeom prst="rect">
+            <a:avLst/>
+          </a:prstGeom>
+          <a:noFill/>
+          <a:extLst>
+            <a:ext uri="{909E8E84-426E-40DD-AFC4-6F175D3DCCD1}">
+              <a14:hiddenFill xmlns:a14="http://schemas.microsoft.com/office/drawing/2010/main">
+                <a:solidFill>
+                  <a:srgbClr val="FFFFFF"/>
+                </a:solidFill>
+              </a14:hiddenFill>
+            </a:ext>
+          </a:extLst>
+        </p:spPr>
+      </p:pic>
+    </p:spTree>
+    <p:extLst>
+      <p:ext uri="{BB962C8B-B14F-4D97-AF65-F5344CB8AC3E}">
+        <p14:creationId xmlns:p14="http://schemas.microsoft.com/office/powerpoint/2010/main" val="3325331473"/>
+      </p:ext>
+    </p:extLst>
+  </p:cSld>
+  <p:clrMapOvr>
+    <a:masterClrMapping/>
+  </p:clrMapOvr>
+</p:sld>
+</file>
+
+<file path=ppt/slides/slide3.xml><?xml version="1.0" encoding="utf-8"?>
 <p:sld xmlns:a="http://schemas.openxmlformats.org/drawingml/2006/main" xmlns:r="http://schemas.openxmlformats.org/officeDocument/2006/relationships" xmlns:p="http://schemas.openxmlformats.org/presentationml/2006/main">
   <p:cSld>
     <p:bg>
@@ -10986,7 +9902,7 @@
 </p:sld>
 </file>
 
-<file path=ppt/slides/slide11.xml><?xml version="1.0" encoding="utf-8"?>
+<file path=ppt/slides/slide4.xml><?xml version="1.0" encoding="utf-8"?>
 <p:sld xmlns:a="http://schemas.openxmlformats.org/drawingml/2006/main" xmlns:r="http://schemas.openxmlformats.org/officeDocument/2006/relationships" xmlns:p="http://schemas.openxmlformats.org/presentationml/2006/main">
   <p:cSld>
     <p:bg>
@@ -12046,7 +10962,7 @@
 </p:sld>
 </file>
 
-<file path=ppt/slides/slide12.xml><?xml version="1.0" encoding="utf-8"?>
+<file path=ppt/slides/slide5.xml><?xml version="1.0" encoding="utf-8"?>
 <p:sld xmlns:a="http://schemas.openxmlformats.org/drawingml/2006/main" xmlns:r="http://schemas.openxmlformats.org/officeDocument/2006/relationships" xmlns:p="http://schemas.openxmlformats.org/presentationml/2006/main">
   <p:cSld>
     <p:bg>
@@ -12330,4243 +11246,6 @@
     <p:extLst>
       <p:ext uri="{BB962C8B-B14F-4D97-AF65-F5344CB8AC3E}">
         <p14:creationId xmlns:p14="http://schemas.microsoft.com/office/powerpoint/2010/main" val="213017330"/>
-      </p:ext>
-    </p:extLst>
-  </p:cSld>
-  <p:clrMapOvr>
-    <a:masterClrMapping/>
-  </p:clrMapOvr>
-</p:sld>
-</file>
-
-<file path=ppt/slides/slide13.xml><?xml version="1.0" encoding="utf-8"?>
-<p:sld xmlns:a="http://schemas.openxmlformats.org/drawingml/2006/main" xmlns:r="http://schemas.openxmlformats.org/officeDocument/2006/relationships" xmlns:p="http://schemas.openxmlformats.org/presentationml/2006/main">
-  <p:cSld>
-    <p:bg>
-      <p:bgPr>
-        <a:solidFill>
-          <a:schemeClr val="tx1"/>
-        </a:solidFill>
-        <a:effectLst/>
-      </p:bgPr>
-    </p:bg>
-    <p:spTree>
-      <p:nvGrpSpPr>
-        <p:cNvPr id="1" name=""/>
-        <p:cNvGrpSpPr/>
-        <p:nvPr/>
-      </p:nvGrpSpPr>
-      <p:grpSpPr>
-        <a:xfrm>
-          <a:off x="0" y="0"/>
-          <a:ext cx="0" cy="0"/>
-          <a:chOff x="0" y="0"/>
-          <a:chExt cx="0" cy="0"/>
-        </a:xfrm>
-      </p:grpSpPr>
-      <p:sp>
-        <p:nvSpPr>
-          <p:cNvPr id="9" name="Rectangle 8">
-            <a:extLst>
-              <a:ext uri="{FF2B5EF4-FFF2-40B4-BE49-F238E27FC236}">
-                <a16:creationId xmlns:a16="http://schemas.microsoft.com/office/drawing/2014/main" id="{2A8AA5BC-4F7A-4226-8F99-6D824B226A97}"/>
-              </a:ext>
-              <a:ext uri="{C183D7F6-B498-43B3-948B-1728B52AA6E4}">
-                <adec:decorative xmlns:adec="http://schemas.microsoft.com/office/drawing/2017/decorative" val="1"/>
-              </a:ext>
-            </a:extLst>
-          </p:cNvPr>
-          <p:cNvSpPr>
-            <a:spLocks noGrp="1" noRot="1" noChangeAspect="1" noMove="1" noResize="1" noEditPoints="1" noAdjustHandles="1" noChangeArrowheads="1" noChangeShapeType="1" noTextEdit="1"/>
-          </p:cNvSpPr>
-          <p:nvPr>
-            <p:extLst>
-              <p:ext uri="{386F3935-93C4-4BCD-93E2-E3B085C9AB24}">
-                <p16:designElem xmlns:p16="http://schemas.microsoft.com/office/powerpoint/2015/main" val="1"/>
-              </p:ext>
-            </p:extLst>
-          </p:nvPr>
-        </p:nvSpPr>
-        <p:spPr>
-          <a:xfrm>
-            <a:off x="0" y="-3324"/>
-            <a:ext cx="12192000" cy="6861324"/>
-          </a:xfrm>
-          <a:prstGeom prst="rect">
-            <a:avLst/>
-          </a:prstGeom>
-          <a:solidFill>
-            <a:schemeClr val="tx1"/>
-          </a:solidFill>
-          <a:ln>
-            <a:noFill/>
-          </a:ln>
-        </p:spPr>
-        <p:style>
-          <a:lnRef idx="2">
-            <a:schemeClr val="accent1">
-              <a:shade val="50000"/>
-            </a:schemeClr>
-          </a:lnRef>
-          <a:fillRef idx="1">
-            <a:schemeClr val="accent1"/>
-          </a:fillRef>
-          <a:effectRef idx="0">
-            <a:schemeClr val="accent1"/>
-          </a:effectRef>
-          <a:fontRef idx="minor">
-            <a:schemeClr val="lt1"/>
-          </a:fontRef>
-        </p:style>
-        <p:txBody>
-          <a:bodyPr rtlCol="0" anchor="ctr"/>
-          <a:lstStyle/>
-          <a:p>
-            <a:pPr marL="0" marR="0" lvl="0" indent="0" algn="ctr" defTabSz="914400" rtl="0" eaLnBrk="1" fontAlgn="auto" latinLnBrk="0" hangingPunct="1">
-              <a:lnSpc>
-                <a:spcPct val="100000"/>
-              </a:lnSpc>
-              <a:spcBef>
-                <a:spcPts val="0"/>
-              </a:spcBef>
-              <a:spcAft>
-                <a:spcPts val="0"/>
-              </a:spcAft>
-              <a:buClrTx/>
-              <a:buSzTx/>
-              <a:buFontTx/>
-              <a:buNone/>
-              <a:tabLst/>
-              <a:defRPr/>
-            </a:pPr>
-            <a:endParaRPr kumimoji="0" lang="en-US" sz="1800" b="0" i="0" u="none" strike="noStrike" kern="1200" cap="none" spc="0" normalizeH="0" baseline="0" noProof="0">
-              <a:ln>
-                <a:noFill/>
-              </a:ln>
-              <a:solidFill>
-                <a:prstClr val="white"/>
-              </a:solidFill>
-              <a:effectLst/>
-              <a:uLnTx/>
-              <a:uFillTx/>
-              <a:latin typeface="Calibri" panose="020F0502020204030204"/>
-              <a:ea typeface="+mn-ea"/>
-              <a:cs typeface="+mn-cs"/>
-            </a:endParaRPr>
-          </a:p>
-        </p:txBody>
-      </p:sp>
-      <p:sp>
-        <p:nvSpPr>
-          <p:cNvPr id="11" name="Rectangle 10">
-            <a:extLst>
-              <a:ext uri="{FF2B5EF4-FFF2-40B4-BE49-F238E27FC236}">
-                <a16:creationId xmlns:a16="http://schemas.microsoft.com/office/drawing/2014/main" id="{3E5445C6-DD42-4979-86FF-03730E8C6DB0}"/>
-              </a:ext>
-              <a:ext uri="{C183D7F6-B498-43B3-948B-1728B52AA6E4}">
-                <adec:decorative xmlns:adec="http://schemas.microsoft.com/office/drawing/2017/decorative" val="1"/>
-              </a:ext>
-            </a:extLst>
-          </p:cNvPr>
-          <p:cNvSpPr>
-            <a:spLocks noGrp="1" noRot="1" noChangeAspect="1" noMove="1" noResize="1" noEditPoints="1" noAdjustHandles="1" noChangeArrowheads="1" noChangeShapeType="1" noTextEdit="1"/>
-          </p:cNvSpPr>
-          <p:nvPr>
-            <p:extLst>
-              <p:ext uri="{386F3935-93C4-4BCD-93E2-E3B085C9AB24}">
-                <p16:designElem xmlns:p16="http://schemas.microsoft.com/office/powerpoint/2015/main" val="1"/>
-              </p:ext>
-            </p:extLst>
-          </p:nvPr>
-        </p:nvSpPr>
-        <p:spPr bwMode="ltGray">
-          <a:xfrm>
-            <a:off x="321734" y="321733"/>
-            <a:ext cx="11573488" cy="6214534"/>
-          </a:xfrm>
-          <a:prstGeom prst="rect">
-            <a:avLst/>
-          </a:prstGeom>
-          <a:solidFill>
-            <a:schemeClr val="bg1">
-              <a:lumMod val="75000"/>
-              <a:lumOff val="25000"/>
-            </a:schemeClr>
-          </a:solidFill>
-          <a:ln w="127000" cap="sq" cmpd="thinThick">
-            <a:solidFill>
-              <a:schemeClr val="bg1">
-                <a:lumMod val="75000"/>
-                <a:lumOff val="25000"/>
-              </a:schemeClr>
-            </a:solidFill>
-          </a:ln>
-        </p:spPr>
-        <p:style>
-          <a:lnRef idx="2">
-            <a:schemeClr val="accent1">
-              <a:shade val="50000"/>
-            </a:schemeClr>
-          </a:lnRef>
-          <a:fillRef idx="1">
-            <a:schemeClr val="accent1"/>
-          </a:fillRef>
-          <a:effectRef idx="0">
-            <a:schemeClr val="accent1"/>
-          </a:effectRef>
-          <a:fontRef idx="minor">
-            <a:schemeClr val="lt1"/>
-          </a:fontRef>
-        </p:style>
-        <p:txBody>
-          <a:bodyPr rtlCol="0" anchor="ctr"/>
-          <a:lstStyle/>
-          <a:p>
-            <a:pPr marL="0" marR="0" lvl="0" indent="0" algn="ctr" defTabSz="914400" rtl="0" eaLnBrk="1" fontAlgn="auto" latinLnBrk="0" hangingPunct="1">
-              <a:lnSpc>
-                <a:spcPct val="100000"/>
-              </a:lnSpc>
-              <a:spcBef>
-                <a:spcPts val="0"/>
-              </a:spcBef>
-              <a:spcAft>
-                <a:spcPts val="0"/>
-              </a:spcAft>
-              <a:buClrTx/>
-              <a:buSzTx/>
-              <a:buFontTx/>
-              <a:buNone/>
-              <a:tabLst/>
-              <a:defRPr/>
-            </a:pPr>
-            <a:endParaRPr kumimoji="0" lang="en-US" sz="1800" b="0" i="0" u="none" strike="noStrike" kern="1200" cap="none" spc="0" normalizeH="0" baseline="0" noProof="0">
-              <a:ln>
-                <a:noFill/>
-              </a:ln>
-              <a:solidFill>
-                <a:prstClr val="white"/>
-              </a:solidFill>
-              <a:effectLst/>
-              <a:uLnTx/>
-              <a:uFillTx/>
-              <a:latin typeface="Calibri" panose="020F0502020204030204"/>
-              <a:ea typeface="+mn-ea"/>
-              <a:cs typeface="+mn-cs"/>
-            </a:endParaRPr>
-          </a:p>
-        </p:txBody>
-      </p:sp>
-      <p:sp>
-        <p:nvSpPr>
-          <p:cNvPr id="2" name="Title 1">
-            <a:extLst>
-              <a:ext uri="{FF2B5EF4-FFF2-40B4-BE49-F238E27FC236}">
-                <a16:creationId xmlns:a16="http://schemas.microsoft.com/office/drawing/2014/main" id="{7710B119-EC53-BA46-BAA3-CB758CDEDAF5}"/>
-              </a:ext>
-            </a:extLst>
-          </p:cNvPr>
-          <p:cNvSpPr>
-            <a:spLocks noGrp="1"/>
-          </p:cNvSpPr>
-          <p:nvPr>
-            <p:ph type="ctrTitle"/>
-          </p:nvPr>
-        </p:nvSpPr>
-        <p:spPr>
-          <a:xfrm>
-            <a:off x="1524000" y="1122362"/>
-            <a:ext cx="9144000" cy="2840037"/>
-          </a:xfrm>
-        </p:spPr>
-        <p:txBody>
-          <a:bodyPr>
-            <a:normAutofit/>
-          </a:bodyPr>
-          <a:lstStyle/>
-          <a:p>
-            <a:r>
-              <a:rPr lang="en-US" sz="5800" dirty="0"/>
-              <a:t>Thank You</a:t>
-            </a:r>
-          </a:p>
-        </p:txBody>
-      </p:sp>
-      <p:sp>
-        <p:nvSpPr>
-          <p:cNvPr id="3" name="Subtitle 2">
-            <a:extLst>
-              <a:ext uri="{FF2B5EF4-FFF2-40B4-BE49-F238E27FC236}">
-                <a16:creationId xmlns:a16="http://schemas.microsoft.com/office/drawing/2014/main" id="{44E6BC0E-0DB7-C346-A0CC-E3CB36C29A54}"/>
-              </a:ext>
-            </a:extLst>
-          </p:cNvPr>
-          <p:cNvSpPr>
-            <a:spLocks noGrp="1"/>
-          </p:cNvSpPr>
-          <p:nvPr>
-            <p:ph type="subTitle" idx="1"/>
-          </p:nvPr>
-        </p:nvSpPr>
-        <p:spPr>
-          <a:xfrm>
-            <a:off x="1524000" y="4256436"/>
-            <a:ext cx="9144000" cy="1600818"/>
-          </a:xfrm>
-        </p:spPr>
-        <p:txBody>
-          <a:bodyPr>
-            <a:normAutofit/>
-          </a:bodyPr>
-          <a:lstStyle/>
-          <a:p>
-            <a:r>
-              <a:rPr lang="en-US" dirty="0"/>
-              <a:t>Questions?</a:t>
-            </a:r>
-          </a:p>
-        </p:txBody>
-      </p:sp>
-      <p:cxnSp>
-        <p:nvCxnSpPr>
-          <p:cNvPr id="13" name="Straight Connector 12">
-            <a:extLst>
-              <a:ext uri="{FF2B5EF4-FFF2-40B4-BE49-F238E27FC236}">
-                <a16:creationId xmlns:a16="http://schemas.microsoft.com/office/drawing/2014/main" id="{45000665-DFC7-417E-8FD7-516A0F15C975}"/>
-              </a:ext>
-              <a:ext uri="{C183D7F6-B498-43B3-948B-1728B52AA6E4}">
-                <adec:decorative xmlns:adec="http://schemas.microsoft.com/office/drawing/2017/decorative" val="1"/>
-              </a:ext>
-            </a:extLst>
-          </p:cNvPr>
-          <p:cNvCxnSpPr>
-            <a:cxnSpLocks noGrp="1" noRot="1" noChangeAspect="1" noMove="1" noResize="1" noEditPoints="1" noAdjustHandles="1" noChangeArrowheads="1" noChangeShapeType="1"/>
-          </p:cNvCxnSpPr>
-          <p:nvPr>
-            <p:extLst>
-              <p:ext uri="{386F3935-93C4-4BCD-93E2-E3B085C9AB24}">
-                <p16:designElem xmlns:p16="http://schemas.microsoft.com/office/powerpoint/2015/main" val="1"/>
-              </p:ext>
-            </p:extLst>
-          </p:nvPr>
-        </p:nvCxnSpPr>
-        <p:spPr>
-          <a:xfrm>
-            <a:off x="4724400" y="4109417"/>
-            <a:ext cx="2743200" cy="0"/>
-          </a:xfrm>
-          <a:prstGeom prst="line">
-            <a:avLst/>
-          </a:prstGeom>
-          <a:ln w="12700">
-            <a:solidFill>
-              <a:schemeClr val="tx1">
-                <a:lumMod val="85000"/>
-              </a:schemeClr>
-            </a:solidFill>
-          </a:ln>
-        </p:spPr>
-        <p:style>
-          <a:lnRef idx="1">
-            <a:schemeClr val="accent1"/>
-          </a:lnRef>
-          <a:fillRef idx="0">
-            <a:schemeClr val="accent1"/>
-          </a:fillRef>
-          <a:effectRef idx="0">
-            <a:schemeClr val="accent1"/>
-          </a:effectRef>
-          <a:fontRef idx="minor">
-            <a:schemeClr val="tx1"/>
-          </a:fontRef>
-        </p:style>
-      </p:cxnSp>
-      <p:sp>
-        <p:nvSpPr>
-          <p:cNvPr id="4" name="Footer Placeholder 3">
-            <a:extLst>
-              <a:ext uri="{FF2B5EF4-FFF2-40B4-BE49-F238E27FC236}">
-                <a16:creationId xmlns:a16="http://schemas.microsoft.com/office/drawing/2014/main" id="{9E726E67-7B90-B642-8D26-6DDF890C4785}"/>
-              </a:ext>
-            </a:extLst>
-          </p:cNvPr>
-          <p:cNvSpPr>
-            <a:spLocks noGrp="1"/>
-          </p:cNvSpPr>
-          <p:nvPr>
-            <p:ph type="ftr" sz="quarter" idx="11"/>
-          </p:nvPr>
-        </p:nvSpPr>
-        <p:spPr>
-          <a:xfrm>
-            <a:off x="4038600" y="6159710"/>
-            <a:ext cx="4114800" cy="365125"/>
-          </a:xfrm>
-        </p:spPr>
-        <p:txBody>
-          <a:bodyPr>
-            <a:normAutofit/>
-          </a:bodyPr>
-          <a:lstStyle/>
-          <a:p>
-            <a:pPr marL="0" marR="0" lvl="0" indent="0" algn="ctr" defTabSz="914400" rtl="0" eaLnBrk="1" fontAlgn="auto" latinLnBrk="0" hangingPunct="1">
-              <a:lnSpc>
-                <a:spcPct val="100000"/>
-              </a:lnSpc>
-              <a:spcBef>
-                <a:spcPts val="0"/>
-              </a:spcBef>
-              <a:spcAft>
-                <a:spcPts val="600"/>
-              </a:spcAft>
-              <a:buClrTx/>
-              <a:buSzTx/>
-              <a:buFontTx/>
-              <a:buNone/>
-              <a:tabLst/>
-              <a:defRPr/>
-            </a:pPr>
-            <a:r>
-              <a:rPr kumimoji="0" lang="en-US" sz="1200" b="0" i="0" u="none" strike="noStrike" kern="1200" cap="none" spc="0" normalizeH="0" baseline="0" noProof="0" dirty="0">
-                <a:ln>
-                  <a:noFill/>
-                </a:ln>
-                <a:solidFill>
-                  <a:prstClr val="white">
-                    <a:tint val="75000"/>
-                  </a:prstClr>
-                </a:solidFill>
-                <a:effectLst/>
-                <a:uLnTx/>
-                <a:uFillTx/>
-                <a:latin typeface="Helvetica Neue" panose="02000503000000020004" pitchFamily="2" charset="0"/>
-                <a:ea typeface="Helvetica Neue" panose="02000503000000020004" pitchFamily="2" charset="0"/>
-                <a:cs typeface="Helvetica Neue" panose="02000503000000020004" pitchFamily="2" charset="0"/>
-              </a:rPr>
-              <a:t>J Mark Morris - Model of Nature</a:t>
-            </a:r>
-          </a:p>
-        </p:txBody>
-      </p:sp>
-    </p:spTree>
-    <p:extLst>
-      <p:ext uri="{BB962C8B-B14F-4D97-AF65-F5344CB8AC3E}">
-        <p14:creationId xmlns:p14="http://schemas.microsoft.com/office/powerpoint/2010/main" val="3747833275"/>
-      </p:ext>
-    </p:extLst>
-  </p:cSld>
-  <p:clrMapOvr>
-    <a:overrideClrMapping bg1="dk1" tx1="lt1" bg2="dk2" tx2="lt2" accent1="accent1" accent2="accent2" accent3="accent3" accent4="accent4" accent5="accent5" accent6="accent6" hlink="hlink" folHlink="folHlink"/>
-  </p:clrMapOvr>
-</p:sld>
-</file>
-
-<file path=ppt/slides/slide2.xml><?xml version="1.0" encoding="utf-8"?>
-<p:sld xmlns:a="http://schemas.openxmlformats.org/drawingml/2006/main" xmlns:r="http://schemas.openxmlformats.org/officeDocument/2006/relationships" xmlns:p="http://schemas.openxmlformats.org/presentationml/2006/main">
-  <p:cSld>
-    <p:bg>
-      <p:bgPr>
-        <a:solidFill>
-          <a:srgbClr val="7030A0"/>
-        </a:solidFill>
-        <a:effectLst/>
-      </p:bgPr>
-    </p:bg>
-    <p:spTree>
-      <p:nvGrpSpPr>
-        <p:cNvPr id="1" name="">
-          <a:extLst>
-            <a:ext uri="{FF2B5EF4-FFF2-40B4-BE49-F238E27FC236}">
-              <a16:creationId xmlns:a16="http://schemas.microsoft.com/office/drawing/2014/main" id="{3175AA51-29DC-6620-9669-F7FDE0E9674D}"/>
-            </a:ext>
-          </a:extLst>
-        </p:cNvPr>
-        <p:cNvGrpSpPr/>
-        <p:nvPr/>
-      </p:nvGrpSpPr>
-      <p:grpSpPr>
-        <a:xfrm>
-          <a:off x="0" y="0"/>
-          <a:ext cx="0" cy="0"/>
-          <a:chOff x="0" y="0"/>
-          <a:chExt cx="0" cy="0"/>
-        </a:xfrm>
-      </p:grpSpPr>
-      <p:sp>
-        <p:nvSpPr>
-          <p:cNvPr id="5" name="Footer Placeholder 3">
-            <a:extLst>
-              <a:ext uri="{FF2B5EF4-FFF2-40B4-BE49-F238E27FC236}">
-                <a16:creationId xmlns:a16="http://schemas.microsoft.com/office/drawing/2014/main" id="{30FF862E-5EBD-95F6-4785-4B3E43867223}"/>
-              </a:ext>
-            </a:extLst>
-          </p:cNvPr>
-          <p:cNvSpPr txBox="1">
-            <a:spLocks/>
-          </p:cNvSpPr>
-          <p:nvPr/>
-        </p:nvSpPr>
-        <p:spPr>
-          <a:xfrm>
-            <a:off x="10924248" y="6388602"/>
-            <a:ext cx="1142262" cy="365125"/>
-          </a:xfrm>
-          <a:prstGeom prst="rect">
-            <a:avLst/>
-          </a:prstGeom>
-        </p:spPr>
-        <p:txBody>
-          <a:bodyPr vert="horz" lIns="91440" tIns="45720" rIns="91440" bIns="45720" rtlCol="0" anchor="ctr"/>
-          <a:lstStyle>
-            <a:defPPr>
-              <a:defRPr lang="en-US"/>
-            </a:defPPr>
-            <a:lvl1pPr marL="0" algn="ctr" defTabSz="914400" rtl="0" eaLnBrk="1" latinLnBrk="0" hangingPunct="1">
-              <a:defRPr sz="1200" kern="1200">
-                <a:solidFill>
-                  <a:schemeClr val="tx1">
-                    <a:tint val="75000"/>
-                  </a:schemeClr>
-                </a:solidFill>
-                <a:latin typeface="+mn-lt"/>
-                <a:ea typeface="+mn-ea"/>
-                <a:cs typeface="+mn-cs"/>
-              </a:defRPr>
-            </a:lvl1pPr>
-            <a:lvl2pPr marL="457200" algn="l" defTabSz="914400" rtl="0" eaLnBrk="1" latinLnBrk="0" hangingPunct="1">
-              <a:defRPr sz="1800" kern="1200">
-                <a:solidFill>
-                  <a:schemeClr val="tx1"/>
-                </a:solidFill>
-                <a:latin typeface="+mn-lt"/>
-                <a:ea typeface="+mn-ea"/>
-                <a:cs typeface="+mn-cs"/>
-              </a:defRPr>
-            </a:lvl2pPr>
-            <a:lvl3pPr marL="914400" algn="l" defTabSz="914400" rtl="0" eaLnBrk="1" latinLnBrk="0" hangingPunct="1">
-              <a:defRPr sz="1800" kern="1200">
-                <a:solidFill>
-                  <a:schemeClr val="tx1"/>
-                </a:solidFill>
-                <a:latin typeface="+mn-lt"/>
-                <a:ea typeface="+mn-ea"/>
-                <a:cs typeface="+mn-cs"/>
-              </a:defRPr>
-            </a:lvl3pPr>
-            <a:lvl4pPr marL="1371600" algn="l" defTabSz="914400" rtl="0" eaLnBrk="1" latinLnBrk="0" hangingPunct="1">
-              <a:defRPr sz="1800" kern="1200">
-                <a:solidFill>
-                  <a:schemeClr val="tx1"/>
-                </a:solidFill>
-                <a:latin typeface="+mn-lt"/>
-                <a:ea typeface="+mn-ea"/>
-                <a:cs typeface="+mn-cs"/>
-              </a:defRPr>
-            </a:lvl4pPr>
-            <a:lvl5pPr marL="1828800" algn="l" defTabSz="914400" rtl="0" eaLnBrk="1" latinLnBrk="0" hangingPunct="1">
-              <a:defRPr sz="1800" kern="1200">
-                <a:solidFill>
-                  <a:schemeClr val="tx1"/>
-                </a:solidFill>
-                <a:latin typeface="+mn-lt"/>
-                <a:ea typeface="+mn-ea"/>
-                <a:cs typeface="+mn-cs"/>
-              </a:defRPr>
-            </a:lvl5pPr>
-            <a:lvl6pPr marL="2286000" algn="l" defTabSz="914400" rtl="0" eaLnBrk="1" latinLnBrk="0" hangingPunct="1">
-              <a:defRPr sz="1800" kern="1200">
-                <a:solidFill>
-                  <a:schemeClr val="tx1"/>
-                </a:solidFill>
-                <a:latin typeface="+mn-lt"/>
-                <a:ea typeface="+mn-ea"/>
-                <a:cs typeface="+mn-cs"/>
-              </a:defRPr>
-            </a:lvl6pPr>
-            <a:lvl7pPr marL="2743200" algn="l" defTabSz="914400" rtl="0" eaLnBrk="1" latinLnBrk="0" hangingPunct="1">
-              <a:defRPr sz="1800" kern="1200">
-                <a:solidFill>
-                  <a:schemeClr val="tx1"/>
-                </a:solidFill>
-                <a:latin typeface="+mn-lt"/>
-                <a:ea typeface="+mn-ea"/>
-                <a:cs typeface="+mn-cs"/>
-              </a:defRPr>
-            </a:lvl7pPr>
-            <a:lvl8pPr marL="3200400" algn="l" defTabSz="914400" rtl="0" eaLnBrk="1" latinLnBrk="0" hangingPunct="1">
-              <a:defRPr sz="1800" kern="1200">
-                <a:solidFill>
-                  <a:schemeClr val="tx1"/>
-                </a:solidFill>
-                <a:latin typeface="+mn-lt"/>
-                <a:ea typeface="+mn-ea"/>
-                <a:cs typeface="+mn-cs"/>
-              </a:defRPr>
-            </a:lvl8pPr>
-            <a:lvl9pPr marL="3657600" algn="l" defTabSz="914400" rtl="0" eaLnBrk="1" latinLnBrk="0" hangingPunct="1">
-              <a:defRPr sz="1800" kern="1200">
-                <a:solidFill>
-                  <a:schemeClr val="tx1"/>
-                </a:solidFill>
-                <a:latin typeface="+mn-lt"/>
-                <a:ea typeface="+mn-ea"/>
-                <a:cs typeface="+mn-cs"/>
-              </a:defRPr>
-            </a:lvl9pPr>
-          </a:lstStyle>
-          <a:p>
-            <a:pPr marL="0" marR="0" lvl="0" indent="0" algn="ctr" defTabSz="914400" rtl="0" eaLnBrk="1" fontAlgn="auto" latinLnBrk="0" hangingPunct="1">
-              <a:lnSpc>
-                <a:spcPct val="100000"/>
-              </a:lnSpc>
-              <a:spcBef>
-                <a:spcPts val="0"/>
-              </a:spcBef>
-              <a:spcAft>
-                <a:spcPts val="0"/>
-              </a:spcAft>
-              <a:buClrTx/>
-              <a:buSzTx/>
-              <a:buFontTx/>
-              <a:buNone/>
-              <a:tabLst/>
-              <a:defRPr/>
-            </a:pPr>
-            <a:r>
-              <a:rPr kumimoji="0" lang="en-US" sz="1200" b="0" i="0" u="none" strike="noStrike" kern="1200" cap="none" spc="0" normalizeH="0" baseline="0" noProof="0" dirty="0">
-                <a:ln>
-                  <a:noFill/>
-                </a:ln>
-                <a:solidFill>
-                  <a:prstClr val="black">
-                    <a:tint val="75000"/>
-                  </a:prstClr>
-                </a:solidFill>
-                <a:effectLst/>
-                <a:uLnTx/>
-                <a:uFillTx/>
-                <a:latin typeface="Helvetica Neue" panose="02000503000000020004" pitchFamily="2" charset="0"/>
-                <a:ea typeface="Helvetica Neue" panose="02000503000000020004" pitchFamily="2" charset="0"/>
-                <a:cs typeface="Helvetica Neue" panose="02000503000000020004" pitchFamily="2" charset="0"/>
-              </a:rPr>
-              <a:t>J Mark Morris</a:t>
-            </a:r>
-          </a:p>
-        </p:txBody>
-      </p:sp>
-      <p:sp>
-        <p:nvSpPr>
-          <p:cNvPr id="19" name="Rectangle 18">
-            <a:extLst>
-              <a:ext uri="{FF2B5EF4-FFF2-40B4-BE49-F238E27FC236}">
-                <a16:creationId xmlns:a16="http://schemas.microsoft.com/office/drawing/2014/main" id="{408FA82E-49B5-9997-5FAA-AA23B523E07F}"/>
-              </a:ext>
-            </a:extLst>
-          </p:cNvPr>
-          <p:cNvSpPr/>
-          <p:nvPr/>
-        </p:nvSpPr>
-        <p:spPr>
-          <a:xfrm>
-            <a:off x="567833" y="207788"/>
-            <a:ext cx="11056360" cy="523220"/>
-          </a:xfrm>
-          <a:prstGeom prst="rect">
-            <a:avLst/>
-          </a:prstGeom>
-          <a:noFill/>
-        </p:spPr>
-        <p:txBody>
-          <a:bodyPr wrap="none">
-            <a:spAutoFit/>
-          </a:bodyPr>
-          <a:lstStyle/>
-          <a:p>
-            <a:pPr marL="0" marR="0" lvl="0" indent="0" algn="ctr" defTabSz="914400" rtl="0" eaLnBrk="1" fontAlgn="auto" latinLnBrk="0" hangingPunct="1">
-              <a:lnSpc>
-                <a:spcPct val="100000"/>
-              </a:lnSpc>
-              <a:spcBef>
-                <a:spcPts val="0"/>
-              </a:spcBef>
-              <a:spcAft>
-                <a:spcPts val="0"/>
-              </a:spcAft>
-              <a:buClrTx/>
-              <a:buSzTx/>
-              <a:buFontTx/>
-              <a:buNone/>
-              <a:tabLst/>
-              <a:defRPr/>
-            </a:pPr>
-            <a:r>
-              <a:rPr kumimoji="0" lang="en-US" sz="2800" b="1" i="0" u="none" strike="noStrike" kern="1200" cap="none" spc="0" normalizeH="0" baseline="0" noProof="0" dirty="0">
-                <a:ln>
-                  <a:noFill/>
-                </a:ln>
-                <a:solidFill>
-                  <a:prstClr val="white"/>
-                </a:solidFill>
-                <a:effectLst/>
-                <a:uLnTx/>
-                <a:uFillTx/>
-                <a:latin typeface="Helvetica Neue" panose="02000503000000020004" pitchFamily="2" charset="0"/>
-                <a:ea typeface="Helvetica Neue" panose="02000503000000020004" pitchFamily="2" charset="0"/>
-                <a:cs typeface="Helvetica Neue" panose="02000503000000020004" pitchFamily="2" charset="0"/>
-              </a:rPr>
-              <a:t>Testosterone C</a:t>
-            </a:r>
-            <a:r>
-              <a:rPr kumimoji="0" lang="en-US" sz="2800" b="1" i="0" u="none" strike="noStrike" kern="1200" cap="none" spc="0" normalizeH="0" baseline="-25000" noProof="0" dirty="0">
-                <a:ln>
-                  <a:noFill/>
-                </a:ln>
-                <a:solidFill>
-                  <a:prstClr val="white"/>
-                </a:solidFill>
-                <a:effectLst/>
-                <a:uLnTx/>
-                <a:uFillTx/>
-                <a:latin typeface="Helvetica Neue" panose="02000503000000020004" pitchFamily="2" charset="0"/>
-                <a:ea typeface="Helvetica Neue" panose="02000503000000020004" pitchFamily="2" charset="0"/>
-                <a:cs typeface="Helvetica Neue" panose="02000503000000020004" pitchFamily="2" charset="0"/>
-              </a:rPr>
-              <a:t>19</a:t>
-            </a:r>
-            <a:r>
-              <a:rPr kumimoji="0" lang="en-US" sz="2800" b="1" i="0" u="none" strike="noStrike" kern="1200" cap="none" spc="0" normalizeH="0" baseline="0" noProof="0" dirty="0">
-                <a:ln>
-                  <a:noFill/>
-                </a:ln>
-                <a:solidFill>
-                  <a:prstClr val="white"/>
-                </a:solidFill>
-                <a:effectLst/>
-                <a:uLnTx/>
-                <a:uFillTx/>
-                <a:latin typeface="Helvetica Neue" panose="02000503000000020004" pitchFamily="2" charset="0"/>
-                <a:ea typeface="Helvetica Neue" panose="02000503000000020004" pitchFamily="2" charset="0"/>
-                <a:cs typeface="Helvetica Neue" panose="02000503000000020004" pitchFamily="2" charset="0"/>
-              </a:rPr>
-              <a:t>H</a:t>
-            </a:r>
-            <a:r>
-              <a:rPr kumimoji="0" lang="en-US" sz="2800" b="1" i="0" u="none" strike="noStrike" kern="1200" cap="none" spc="0" normalizeH="0" baseline="-25000" noProof="0" dirty="0">
-                <a:ln>
-                  <a:noFill/>
-                </a:ln>
-                <a:solidFill>
-                  <a:prstClr val="white"/>
-                </a:solidFill>
-                <a:effectLst/>
-                <a:uLnTx/>
-                <a:uFillTx/>
-                <a:latin typeface="Helvetica Neue" panose="02000503000000020004" pitchFamily="2" charset="0"/>
-                <a:ea typeface="Helvetica Neue" panose="02000503000000020004" pitchFamily="2" charset="0"/>
-                <a:cs typeface="Helvetica Neue" panose="02000503000000020004" pitchFamily="2" charset="0"/>
-              </a:rPr>
-              <a:t>28</a:t>
-            </a:r>
-            <a:r>
-              <a:rPr kumimoji="0" lang="en-US" sz="2800" b="1" i="0" u="none" strike="noStrike" kern="1200" cap="none" spc="0" normalizeH="0" baseline="0" noProof="0" dirty="0">
-                <a:ln>
-                  <a:noFill/>
-                </a:ln>
-                <a:solidFill>
-                  <a:prstClr val="white"/>
-                </a:solidFill>
-                <a:effectLst/>
-                <a:uLnTx/>
-                <a:uFillTx/>
-                <a:latin typeface="Helvetica Neue" panose="02000503000000020004" pitchFamily="2" charset="0"/>
-                <a:ea typeface="Helvetica Neue" panose="02000503000000020004" pitchFamily="2" charset="0"/>
-                <a:cs typeface="Helvetica Neue" panose="02000503000000020004" pitchFamily="2" charset="0"/>
-              </a:rPr>
-              <a:t>O</a:t>
-            </a:r>
-            <a:r>
-              <a:rPr kumimoji="0" lang="en-US" sz="2800" b="1" i="0" u="none" strike="noStrike" kern="1200" cap="none" spc="0" normalizeH="0" baseline="-25000" noProof="0" dirty="0">
-                <a:ln>
-                  <a:noFill/>
-                </a:ln>
-                <a:solidFill>
-                  <a:prstClr val="white"/>
-                </a:solidFill>
-                <a:effectLst/>
-                <a:uLnTx/>
-                <a:uFillTx/>
-                <a:latin typeface="Helvetica Neue" panose="02000503000000020004" pitchFamily="2" charset="0"/>
-                <a:ea typeface="Helvetica Neue" panose="02000503000000020004" pitchFamily="2" charset="0"/>
-                <a:cs typeface="Helvetica Neue" panose="02000503000000020004" pitchFamily="2" charset="0"/>
-              </a:rPr>
-              <a:t>2</a:t>
-            </a:r>
-            <a:r>
-              <a:rPr kumimoji="0" lang="en-US" sz="2800" b="1" i="0" u="none" strike="noStrike" kern="1200" cap="none" spc="0" normalizeH="0" baseline="0" noProof="0" dirty="0">
-                <a:ln>
-                  <a:noFill/>
-                </a:ln>
-                <a:solidFill>
-                  <a:prstClr val="white"/>
-                </a:solidFill>
-                <a:effectLst/>
-                <a:uLnTx/>
-                <a:uFillTx/>
-                <a:latin typeface="Helvetica Neue" panose="02000503000000020004" pitchFamily="2" charset="0"/>
-                <a:ea typeface="Helvetica Neue" panose="02000503000000020004" pitchFamily="2" charset="0"/>
-                <a:cs typeface="Helvetica Neue" panose="02000503000000020004" pitchFamily="2" charset="0"/>
-              </a:rPr>
-              <a:t> is an assembly of 12264 Point Potentials </a:t>
-            </a:r>
-          </a:p>
-        </p:txBody>
-      </p:sp>
-      <p:sp>
-        <p:nvSpPr>
-          <p:cNvPr id="2" name="TextBox 1">
-            <a:extLst>
-              <a:ext uri="{FF2B5EF4-FFF2-40B4-BE49-F238E27FC236}">
-                <a16:creationId xmlns:a16="http://schemas.microsoft.com/office/drawing/2014/main" id="{FC3DF262-4725-E728-70B8-D423FB0711CD}"/>
-              </a:ext>
-            </a:extLst>
-          </p:cNvPr>
-          <p:cNvSpPr txBox="1"/>
-          <p:nvPr/>
-        </p:nvSpPr>
-        <p:spPr>
-          <a:xfrm>
-            <a:off x="412586" y="922975"/>
-            <a:ext cx="11874641" cy="1200329"/>
-          </a:xfrm>
-          <a:prstGeom prst="rect">
-            <a:avLst/>
-          </a:prstGeom>
-          <a:noFill/>
-        </p:spPr>
-        <p:txBody>
-          <a:bodyPr wrap="square" rtlCol="0">
-            <a:spAutoFit/>
-          </a:bodyPr>
-          <a:lstStyle/>
-          <a:p>
-            <a:pPr marL="457200" marR="0" lvl="0" indent="-457200" algn="l" defTabSz="914400" rtl="0" eaLnBrk="1" fontAlgn="auto" latinLnBrk="0" hangingPunct="1">
-              <a:lnSpc>
-                <a:spcPct val="100000"/>
-              </a:lnSpc>
-              <a:spcBef>
-                <a:spcPts val="0"/>
-              </a:spcBef>
-              <a:spcAft>
-                <a:spcPts val="0"/>
-              </a:spcAft>
-              <a:buClrTx/>
-              <a:buSzTx/>
-              <a:buFont typeface="Arial" panose="020B0604020202020204" pitchFamily="34" charset="0"/>
-              <a:buChar char="•"/>
-              <a:tabLst/>
-              <a:defRPr/>
-            </a:pPr>
-            <a:endParaRPr kumimoji="0" lang="en-US" sz="2400" b="0" i="0" u="none" strike="noStrike" kern="1200" cap="none" spc="0" normalizeH="0" baseline="0" noProof="0" dirty="0">
-              <a:ln>
-                <a:noFill/>
-              </a:ln>
-              <a:solidFill>
-                <a:prstClr val="white"/>
-              </a:solidFill>
-              <a:effectLst/>
-              <a:uLnTx/>
-              <a:uFillTx/>
-              <a:latin typeface="Helvetica Neue" panose="02000503000000020004" pitchFamily="2" charset="0"/>
-              <a:ea typeface="Helvetica Neue" panose="02000503000000020004" pitchFamily="2" charset="0"/>
-              <a:cs typeface="Helvetica Neue" panose="02000503000000020004" pitchFamily="2" charset="0"/>
-            </a:endParaRPr>
-          </a:p>
-          <a:p>
-            <a:pPr marL="457200" marR="0" lvl="0" indent="-457200" algn="l" defTabSz="914400" rtl="0" eaLnBrk="1" fontAlgn="auto" latinLnBrk="0" hangingPunct="1">
-              <a:lnSpc>
-                <a:spcPct val="100000"/>
-              </a:lnSpc>
-              <a:spcBef>
-                <a:spcPts val="0"/>
-              </a:spcBef>
-              <a:spcAft>
-                <a:spcPts val="0"/>
-              </a:spcAft>
-              <a:buClrTx/>
-              <a:buSzTx/>
-              <a:buFont typeface="Arial" panose="020B0604020202020204" pitchFamily="34" charset="0"/>
-              <a:buChar char="•"/>
-              <a:tabLst/>
-              <a:defRPr/>
-            </a:pPr>
-            <a:endParaRPr kumimoji="0" lang="en-US" sz="2400" b="0" i="0" u="none" strike="noStrike" kern="1200" cap="none" spc="0" normalizeH="0" baseline="0" noProof="0" dirty="0">
-              <a:ln>
-                <a:noFill/>
-              </a:ln>
-              <a:solidFill>
-                <a:prstClr val="white"/>
-              </a:solidFill>
-              <a:effectLst/>
-              <a:uLnTx/>
-              <a:uFillTx/>
-              <a:latin typeface="Helvetica Neue" panose="02000503000000020004" pitchFamily="2" charset="0"/>
-              <a:ea typeface="Helvetica Neue" panose="02000503000000020004" pitchFamily="2" charset="0"/>
-              <a:cs typeface="Helvetica Neue" panose="02000503000000020004" pitchFamily="2" charset="0"/>
-            </a:endParaRPr>
-          </a:p>
-          <a:p>
-            <a:pPr marL="457200" marR="0" lvl="0" indent="-457200" algn="l" defTabSz="914400" rtl="0" eaLnBrk="1" fontAlgn="auto" latinLnBrk="0" hangingPunct="1">
-              <a:lnSpc>
-                <a:spcPct val="100000"/>
-              </a:lnSpc>
-              <a:spcBef>
-                <a:spcPts val="0"/>
-              </a:spcBef>
-              <a:spcAft>
-                <a:spcPts val="0"/>
-              </a:spcAft>
-              <a:buClrTx/>
-              <a:buSzTx/>
-              <a:buFont typeface="Arial" panose="020B0604020202020204" pitchFamily="34" charset="0"/>
-              <a:buChar char="•"/>
-              <a:tabLst/>
-              <a:defRPr/>
-            </a:pPr>
-            <a:endParaRPr kumimoji="0" lang="en-US" sz="2400" b="0" i="0" u="none" strike="noStrike" kern="1200" cap="none" spc="0" normalizeH="0" baseline="0" noProof="0" dirty="0">
-              <a:ln>
-                <a:noFill/>
-              </a:ln>
-              <a:solidFill>
-                <a:prstClr val="white"/>
-              </a:solidFill>
-              <a:effectLst/>
-              <a:uLnTx/>
-              <a:uFillTx/>
-              <a:latin typeface="Helvetica Neue" panose="02000503000000020004" pitchFamily="2" charset="0"/>
-              <a:ea typeface="Helvetica Neue" panose="02000503000000020004" pitchFamily="2" charset="0"/>
-              <a:cs typeface="Helvetica Neue" panose="02000503000000020004" pitchFamily="2" charset="0"/>
-            </a:endParaRPr>
-          </a:p>
-        </p:txBody>
-      </p:sp>
-      <p:pic>
-        <p:nvPicPr>
-          <p:cNvPr id="3" name="Picture 2">
-            <a:extLst>
-              <a:ext uri="{FF2B5EF4-FFF2-40B4-BE49-F238E27FC236}">
-                <a16:creationId xmlns:a16="http://schemas.microsoft.com/office/drawing/2014/main" id="{A3332769-C6F5-DFEB-8CDA-03D4CB57B63A}"/>
-              </a:ext>
-            </a:extLst>
-          </p:cNvPr>
-          <p:cNvPicPr>
-            <a:picLocks noChangeAspect="1"/>
-          </p:cNvPicPr>
-          <p:nvPr/>
-        </p:nvPicPr>
-        <p:blipFill>
-          <a:blip r:embed="rId2"/>
-          <a:stretch>
-            <a:fillRect/>
-          </a:stretch>
-        </p:blipFill>
-        <p:spPr>
-          <a:xfrm>
-            <a:off x="1999593" y="3028790"/>
-            <a:ext cx="8100848" cy="3501792"/>
-          </a:xfrm>
-          <a:prstGeom prst="rect">
-            <a:avLst/>
-          </a:prstGeom>
-        </p:spPr>
-      </p:pic>
-      <p:sp>
-        <p:nvSpPr>
-          <p:cNvPr id="4" name="Content Placeholder 2">
-            <a:extLst>
-              <a:ext uri="{FF2B5EF4-FFF2-40B4-BE49-F238E27FC236}">
-                <a16:creationId xmlns:a16="http://schemas.microsoft.com/office/drawing/2014/main" id="{D619C85F-5F5A-871C-0155-028F272E159A}"/>
-              </a:ext>
-            </a:extLst>
-          </p:cNvPr>
-          <p:cNvSpPr txBox="1">
-            <a:spLocks/>
-          </p:cNvSpPr>
-          <p:nvPr/>
-        </p:nvSpPr>
-        <p:spPr>
-          <a:xfrm>
-            <a:off x="365554" y="922975"/>
-            <a:ext cx="11700956" cy="4552316"/>
-          </a:xfrm>
-          <a:prstGeom prst="rect">
-            <a:avLst/>
-          </a:prstGeom>
-        </p:spPr>
-        <p:txBody>
-          <a:bodyPr>
-            <a:noAutofit/>
-          </a:bodyPr>
-          <a:lstStyle>
-            <a:lvl1pPr marL="228600" indent="-228600" algn="l" defTabSz="914400" rtl="0" eaLnBrk="1" latinLnBrk="0" hangingPunct="1">
-              <a:lnSpc>
-                <a:spcPct val="90000"/>
-              </a:lnSpc>
-              <a:spcBef>
-                <a:spcPts val="1000"/>
-              </a:spcBef>
-              <a:buFont typeface="Arial" panose="020B0604020202020204" pitchFamily="34" charset="0"/>
-              <a:buChar char="•"/>
-              <a:defRPr sz="2800" kern="1200">
-                <a:solidFill>
-                  <a:schemeClr val="tx1"/>
-                </a:solidFill>
-                <a:latin typeface="+mn-lt"/>
-                <a:ea typeface="+mn-ea"/>
-                <a:cs typeface="+mn-cs"/>
-              </a:defRPr>
-            </a:lvl1pPr>
-            <a:lvl2pPr marL="685800" indent="-228600" algn="l" defTabSz="914400" rtl="0" eaLnBrk="1" latinLnBrk="0" hangingPunct="1">
-              <a:lnSpc>
-                <a:spcPct val="90000"/>
-              </a:lnSpc>
-              <a:spcBef>
-                <a:spcPts val="500"/>
-              </a:spcBef>
-              <a:buFont typeface="Arial" panose="020B0604020202020204" pitchFamily="34" charset="0"/>
-              <a:buChar char="•"/>
-              <a:defRPr sz="2400" kern="1200">
-                <a:solidFill>
-                  <a:schemeClr val="tx1"/>
-                </a:solidFill>
-                <a:latin typeface="+mn-lt"/>
-                <a:ea typeface="+mn-ea"/>
-                <a:cs typeface="+mn-cs"/>
-              </a:defRPr>
-            </a:lvl2pPr>
-            <a:lvl3pPr marL="1143000" indent="-228600" algn="l" defTabSz="914400" rtl="0" eaLnBrk="1" latinLnBrk="0" hangingPunct="1">
-              <a:lnSpc>
-                <a:spcPct val="90000"/>
-              </a:lnSpc>
-              <a:spcBef>
-                <a:spcPts val="500"/>
-              </a:spcBef>
-              <a:buFont typeface="Arial" panose="020B0604020202020204" pitchFamily="34" charset="0"/>
-              <a:buChar char="•"/>
-              <a:defRPr sz="2000" kern="1200">
-                <a:solidFill>
-                  <a:schemeClr val="tx1"/>
-                </a:solidFill>
-                <a:latin typeface="+mn-lt"/>
-                <a:ea typeface="+mn-ea"/>
-                <a:cs typeface="+mn-cs"/>
-              </a:defRPr>
-            </a:lvl3pPr>
-            <a:lvl4pPr marL="1600200" indent="-228600" algn="l" defTabSz="914400" rtl="0" eaLnBrk="1" latinLnBrk="0" hangingPunct="1">
-              <a:lnSpc>
-                <a:spcPct val="90000"/>
-              </a:lnSpc>
-              <a:spcBef>
-                <a:spcPts val="500"/>
-              </a:spcBef>
-              <a:buFont typeface="Arial" panose="020B0604020202020204" pitchFamily="34" charset="0"/>
-              <a:buChar char="•"/>
-              <a:defRPr sz="1800" kern="1200">
-                <a:solidFill>
-                  <a:schemeClr val="tx1"/>
-                </a:solidFill>
-                <a:latin typeface="+mn-lt"/>
-                <a:ea typeface="+mn-ea"/>
-                <a:cs typeface="+mn-cs"/>
-              </a:defRPr>
-            </a:lvl4pPr>
-            <a:lvl5pPr marL="2057400" indent="-228600" algn="l" defTabSz="914400" rtl="0" eaLnBrk="1" latinLnBrk="0" hangingPunct="1">
-              <a:lnSpc>
-                <a:spcPct val="90000"/>
-              </a:lnSpc>
-              <a:spcBef>
-                <a:spcPts val="500"/>
-              </a:spcBef>
-              <a:buFont typeface="Arial" panose="020B0604020202020204" pitchFamily="34" charset="0"/>
-              <a:buChar char="•"/>
-              <a:defRPr sz="1800" kern="1200">
-                <a:solidFill>
-                  <a:schemeClr val="tx1"/>
-                </a:solidFill>
-                <a:latin typeface="+mn-lt"/>
-                <a:ea typeface="+mn-ea"/>
-                <a:cs typeface="+mn-cs"/>
-              </a:defRPr>
-            </a:lvl5pPr>
-            <a:lvl6pPr marL="2514600" indent="-228600" algn="l" defTabSz="914400" rtl="0" eaLnBrk="1" latinLnBrk="0" hangingPunct="1">
-              <a:lnSpc>
-                <a:spcPct val="90000"/>
-              </a:lnSpc>
-              <a:spcBef>
-                <a:spcPts val="500"/>
-              </a:spcBef>
-              <a:buFont typeface="Arial" panose="020B0604020202020204" pitchFamily="34" charset="0"/>
-              <a:buChar char="•"/>
-              <a:defRPr sz="1800" kern="1200">
-                <a:solidFill>
-                  <a:schemeClr val="tx1"/>
-                </a:solidFill>
-                <a:latin typeface="+mn-lt"/>
-                <a:ea typeface="+mn-ea"/>
-                <a:cs typeface="+mn-cs"/>
-              </a:defRPr>
-            </a:lvl6pPr>
-            <a:lvl7pPr marL="2971800" indent="-228600" algn="l" defTabSz="914400" rtl="0" eaLnBrk="1" latinLnBrk="0" hangingPunct="1">
-              <a:lnSpc>
-                <a:spcPct val="90000"/>
-              </a:lnSpc>
-              <a:spcBef>
-                <a:spcPts val="500"/>
-              </a:spcBef>
-              <a:buFont typeface="Arial" panose="020B0604020202020204" pitchFamily="34" charset="0"/>
-              <a:buChar char="•"/>
-              <a:defRPr sz="1800" kern="1200">
-                <a:solidFill>
-                  <a:schemeClr val="tx1"/>
-                </a:solidFill>
-                <a:latin typeface="+mn-lt"/>
-                <a:ea typeface="+mn-ea"/>
-                <a:cs typeface="+mn-cs"/>
-              </a:defRPr>
-            </a:lvl7pPr>
-            <a:lvl8pPr marL="3429000" indent="-228600" algn="l" defTabSz="914400" rtl="0" eaLnBrk="1" latinLnBrk="0" hangingPunct="1">
-              <a:lnSpc>
-                <a:spcPct val="90000"/>
-              </a:lnSpc>
-              <a:spcBef>
-                <a:spcPts val="500"/>
-              </a:spcBef>
-              <a:buFont typeface="Arial" panose="020B0604020202020204" pitchFamily="34" charset="0"/>
-              <a:buChar char="•"/>
-              <a:defRPr sz="1800" kern="1200">
-                <a:solidFill>
-                  <a:schemeClr val="tx1"/>
-                </a:solidFill>
-                <a:latin typeface="+mn-lt"/>
-                <a:ea typeface="+mn-ea"/>
-                <a:cs typeface="+mn-cs"/>
-              </a:defRPr>
-            </a:lvl8pPr>
-            <a:lvl9pPr marL="3886200" indent="-228600" algn="l" defTabSz="914400" rtl="0" eaLnBrk="1" latinLnBrk="0" hangingPunct="1">
-              <a:lnSpc>
-                <a:spcPct val="90000"/>
-              </a:lnSpc>
-              <a:spcBef>
-                <a:spcPts val="500"/>
-              </a:spcBef>
-              <a:buFont typeface="Arial" panose="020B0604020202020204" pitchFamily="34" charset="0"/>
-              <a:buChar char="•"/>
-              <a:defRPr sz="1800" kern="1200">
-                <a:solidFill>
-                  <a:schemeClr val="tx1"/>
-                </a:solidFill>
-                <a:latin typeface="+mn-lt"/>
-                <a:ea typeface="+mn-ea"/>
-                <a:cs typeface="+mn-cs"/>
-              </a:defRPr>
-            </a:lvl9pPr>
-          </a:lstStyle>
-          <a:p>
-            <a:pPr>
-              <a:lnSpc>
-                <a:spcPct val="80000"/>
-              </a:lnSpc>
-            </a:pPr>
-            <a:r>
-              <a:rPr lang="en-US" dirty="0">
-                <a:solidFill>
-                  <a:schemeClr val="bg1"/>
-                </a:solidFill>
-                <a:latin typeface="Helvetica Neue" panose="02000503000000020004" pitchFamily="2" charset="0"/>
-                <a:ea typeface="Helvetica Neue" panose="02000503000000020004" pitchFamily="2" charset="0"/>
-                <a:cs typeface="Helvetica Neue" panose="02000503000000020004" pitchFamily="2" charset="0"/>
-              </a:rPr>
-              <a:t>Consider this testosterone molecule assembly. C</a:t>
-            </a:r>
-            <a:r>
-              <a:rPr lang="en-US" baseline="-25000" dirty="0">
-                <a:solidFill>
-                  <a:schemeClr val="bg1"/>
-                </a:solidFill>
-                <a:latin typeface="Helvetica Neue" panose="02000503000000020004" pitchFamily="2" charset="0"/>
-                <a:ea typeface="Helvetica Neue" panose="02000503000000020004" pitchFamily="2" charset="0"/>
-                <a:cs typeface="Helvetica Neue" panose="02000503000000020004" pitchFamily="2" charset="0"/>
-              </a:rPr>
-              <a:t>19</a:t>
-            </a:r>
-            <a:r>
-              <a:rPr lang="en-US" dirty="0">
-                <a:solidFill>
-                  <a:schemeClr val="bg1"/>
-                </a:solidFill>
-                <a:latin typeface="Helvetica Neue" panose="02000503000000020004" pitchFamily="2" charset="0"/>
-                <a:ea typeface="Helvetica Neue" panose="02000503000000020004" pitchFamily="2" charset="0"/>
-                <a:cs typeface="Helvetica Neue" panose="02000503000000020004" pitchFamily="2" charset="0"/>
-              </a:rPr>
-              <a:t>H</a:t>
-            </a:r>
-            <a:r>
-              <a:rPr lang="en-US" baseline="-25000" dirty="0">
-                <a:solidFill>
-                  <a:schemeClr val="bg1"/>
-                </a:solidFill>
-                <a:latin typeface="Helvetica Neue" panose="02000503000000020004" pitchFamily="2" charset="0"/>
-                <a:ea typeface="Helvetica Neue" panose="02000503000000020004" pitchFamily="2" charset="0"/>
-                <a:cs typeface="Helvetica Neue" panose="02000503000000020004" pitchFamily="2" charset="0"/>
-              </a:rPr>
-              <a:t>28</a:t>
-            </a:r>
-            <a:r>
-              <a:rPr lang="en-US" dirty="0">
-                <a:solidFill>
-                  <a:schemeClr val="bg1"/>
-                </a:solidFill>
-                <a:latin typeface="Helvetica Neue" panose="02000503000000020004" pitchFamily="2" charset="0"/>
-                <a:ea typeface="Helvetica Neue" panose="02000503000000020004" pitchFamily="2" charset="0"/>
-                <a:cs typeface="Helvetica Neue" panose="02000503000000020004" pitchFamily="2" charset="0"/>
-              </a:rPr>
-              <a:t>0</a:t>
-            </a:r>
-            <a:r>
-              <a:rPr lang="en-US" baseline="-25000" dirty="0">
-                <a:solidFill>
-                  <a:schemeClr val="bg1"/>
-                </a:solidFill>
-                <a:latin typeface="Helvetica Neue" panose="02000503000000020004" pitchFamily="2" charset="0"/>
-                <a:ea typeface="Helvetica Neue" panose="02000503000000020004" pitchFamily="2" charset="0"/>
-                <a:cs typeface="Helvetica Neue" panose="02000503000000020004" pitchFamily="2" charset="0"/>
-              </a:rPr>
-              <a:t>2</a:t>
-            </a:r>
-          </a:p>
-          <a:p>
-            <a:pPr>
-              <a:lnSpc>
-                <a:spcPct val="80000"/>
-              </a:lnSpc>
-            </a:pPr>
-            <a:r>
-              <a:rPr lang="en-US" dirty="0">
-                <a:solidFill>
-                  <a:schemeClr val="bg1"/>
-                </a:solidFill>
-                <a:latin typeface="Helvetica Neue" panose="02000503000000020004" pitchFamily="2" charset="0"/>
-                <a:ea typeface="Helvetica Neue" panose="02000503000000020004" pitchFamily="2" charset="0"/>
-                <a:cs typeface="Helvetica Neue" panose="02000503000000020004" pitchFamily="2" charset="0"/>
-              </a:rPr>
-              <a:t>Each atom contains many protons, neutrons, and electrons.</a:t>
-            </a:r>
-          </a:p>
-          <a:p>
-            <a:pPr>
-              <a:lnSpc>
-                <a:spcPct val="80000"/>
-              </a:lnSpc>
-            </a:pPr>
-            <a:r>
-              <a:rPr lang="en-US" dirty="0">
-                <a:solidFill>
-                  <a:schemeClr val="bg1"/>
-                </a:solidFill>
-                <a:latin typeface="Helvetica Neue" panose="02000503000000020004" pitchFamily="2" charset="0"/>
-                <a:ea typeface="Helvetica Neue" panose="02000503000000020004" pitchFamily="2" charset="0"/>
-                <a:cs typeface="Helvetica Neue" panose="02000503000000020004" pitchFamily="2" charset="0"/>
-              </a:rPr>
-              <a:t>Protons and neutrons consist of quarks.</a:t>
-            </a:r>
-          </a:p>
-          <a:p>
-            <a:pPr>
-              <a:lnSpc>
-                <a:spcPct val="80000"/>
-              </a:lnSpc>
-            </a:pPr>
-            <a:r>
-              <a:rPr lang="en-US" dirty="0">
-                <a:solidFill>
-                  <a:schemeClr val="bg1"/>
-                </a:solidFill>
-                <a:latin typeface="Helvetica Neue" panose="02000503000000020004" pitchFamily="2" charset="0"/>
-                <a:ea typeface="Helvetica Neue" panose="02000503000000020004" pitchFamily="2" charset="0"/>
-                <a:cs typeface="Helvetica Neue" panose="02000503000000020004" pitchFamily="2" charset="0"/>
-              </a:rPr>
-              <a:t>All of the above are sub-assemblies of point potentials</a:t>
-            </a:r>
-          </a:p>
-          <a:p>
-            <a:pPr>
-              <a:lnSpc>
-                <a:spcPct val="80000"/>
-              </a:lnSpc>
-            </a:pPr>
-            <a:endParaRPr lang="en-US" sz="2400" dirty="0">
-              <a:solidFill>
-                <a:schemeClr val="bg1"/>
-              </a:solidFill>
-            </a:endParaRPr>
-          </a:p>
-          <a:p>
-            <a:pPr>
-              <a:lnSpc>
-                <a:spcPct val="80000"/>
-              </a:lnSpc>
-            </a:pPr>
-            <a:endParaRPr lang="en-US" sz="2400" dirty="0">
-              <a:solidFill>
-                <a:schemeClr val="bg1"/>
-              </a:solidFill>
-              <a:latin typeface="Helvetica Neue" panose="02000503000000020004" pitchFamily="2" charset="0"/>
-              <a:ea typeface="Helvetica Neue" panose="02000503000000020004" pitchFamily="2" charset="0"/>
-              <a:cs typeface="Helvetica Neue" panose="02000503000000020004" pitchFamily="2" charset="0"/>
-            </a:endParaRPr>
-          </a:p>
-          <a:p>
-            <a:endParaRPr lang="en-US" sz="2400" dirty="0"/>
-          </a:p>
-        </p:txBody>
-      </p:sp>
-    </p:spTree>
-    <p:extLst>
-      <p:ext uri="{BB962C8B-B14F-4D97-AF65-F5344CB8AC3E}">
-        <p14:creationId xmlns:p14="http://schemas.microsoft.com/office/powerpoint/2010/main" val="4023428361"/>
-      </p:ext>
-    </p:extLst>
-  </p:cSld>
-  <p:clrMapOvr>
-    <a:masterClrMapping/>
-  </p:clrMapOvr>
-</p:sld>
-</file>
-
-<file path=ppt/slides/slide3.xml><?xml version="1.0" encoding="utf-8"?>
-<p:sld xmlns:a="http://schemas.openxmlformats.org/drawingml/2006/main" xmlns:r="http://schemas.openxmlformats.org/officeDocument/2006/relationships" xmlns:p="http://schemas.openxmlformats.org/presentationml/2006/main">
-  <p:cSld>
-    <p:bg>
-      <p:bgPr>
-        <a:solidFill>
-          <a:srgbClr val="7030A0"/>
-        </a:solidFill>
-        <a:effectLst/>
-      </p:bgPr>
-    </p:bg>
-    <p:spTree>
-      <p:nvGrpSpPr>
-        <p:cNvPr id="1" name=""/>
-        <p:cNvGrpSpPr/>
-        <p:nvPr/>
-      </p:nvGrpSpPr>
-      <p:grpSpPr>
-        <a:xfrm>
-          <a:off x="0" y="0"/>
-          <a:ext cx="0" cy="0"/>
-          <a:chOff x="0" y="0"/>
-          <a:chExt cx="0" cy="0"/>
-        </a:xfrm>
-      </p:grpSpPr>
-      <p:pic>
-        <p:nvPicPr>
-          <p:cNvPr id="1026" name="Picture 2">
-            <a:extLst>
-              <a:ext uri="{FF2B5EF4-FFF2-40B4-BE49-F238E27FC236}">
-                <a16:creationId xmlns:a16="http://schemas.microsoft.com/office/drawing/2014/main" id="{619E8318-451A-0369-0F28-7B2A1C47FEF5}"/>
-              </a:ext>
-            </a:extLst>
-          </p:cNvPr>
-          <p:cNvPicPr>
-            <a:picLocks noChangeAspect="1" noChangeArrowheads="1"/>
-          </p:cNvPicPr>
-          <p:nvPr/>
-        </p:nvPicPr>
-        <p:blipFill>
-          <a:blip r:embed="rId2">
-            <a:extLst>
-              <a:ext uri="{28A0092B-C50C-407E-A947-70E740481C1C}">
-                <a14:useLocalDpi xmlns:a14="http://schemas.microsoft.com/office/drawing/2010/main" val="0"/>
-              </a:ext>
-            </a:extLst>
-          </a:blip>
-          <a:srcRect/>
-          <a:stretch>
-            <a:fillRect/>
-          </a:stretch>
-        </p:blipFill>
-        <p:spPr bwMode="auto">
-          <a:xfrm flipV="1">
-            <a:off x="5843671" y="985536"/>
-            <a:ext cx="6472822" cy="4440621"/>
-          </a:xfrm>
-          <a:prstGeom prst="rect">
-            <a:avLst/>
-          </a:prstGeom>
-          <a:noFill/>
-          <a:extLst>
-            <a:ext uri="{909E8E84-426E-40DD-AFC4-6F175D3DCCD1}">
-              <a14:hiddenFill xmlns:a14="http://schemas.microsoft.com/office/drawing/2010/main">
-                <a:solidFill>
-                  <a:srgbClr val="FFFFFF"/>
-                </a:solidFill>
-              </a14:hiddenFill>
-            </a:ext>
-          </a:extLst>
-        </p:spPr>
-      </p:pic>
-      <p:sp>
-        <p:nvSpPr>
-          <p:cNvPr id="4" name="Footer Placeholder 3">
-            <a:extLst>
-              <a:ext uri="{FF2B5EF4-FFF2-40B4-BE49-F238E27FC236}">
-                <a16:creationId xmlns:a16="http://schemas.microsoft.com/office/drawing/2014/main" id="{C805A60C-6AD8-E010-19DC-69929BDAF83E}"/>
-              </a:ext>
-            </a:extLst>
-          </p:cNvPr>
-          <p:cNvSpPr>
-            <a:spLocks noGrp="1"/>
-          </p:cNvSpPr>
-          <p:nvPr>
-            <p:ph type="ftr" sz="quarter" idx="11"/>
-          </p:nvPr>
-        </p:nvSpPr>
-        <p:spPr>
-          <a:xfrm>
-            <a:off x="-1192427" y="6356350"/>
-            <a:ext cx="4114800" cy="365125"/>
-          </a:xfrm>
-        </p:spPr>
-        <p:txBody>
-          <a:bodyPr/>
-          <a:lstStyle/>
-          <a:p>
-            <a:pPr marL="0" marR="0" lvl="0" indent="0" algn="ctr" defTabSz="914400" rtl="0" eaLnBrk="1" fontAlgn="auto" latinLnBrk="0" hangingPunct="1">
-              <a:lnSpc>
-                <a:spcPct val="100000"/>
-              </a:lnSpc>
-              <a:spcBef>
-                <a:spcPts val="0"/>
-              </a:spcBef>
-              <a:spcAft>
-                <a:spcPts val="0"/>
-              </a:spcAft>
-              <a:buClrTx/>
-              <a:buSzTx/>
-              <a:buFontTx/>
-              <a:buNone/>
-              <a:tabLst/>
-              <a:defRPr/>
-            </a:pPr>
-            <a:r>
-              <a:rPr kumimoji="0" lang="en-US" sz="1200" b="0" i="0" u="none" strike="noStrike" kern="1200" cap="none" spc="0" normalizeH="0" baseline="0" noProof="0" dirty="0">
-                <a:ln>
-                  <a:noFill/>
-                </a:ln>
-                <a:solidFill>
-                  <a:prstClr val="black">
-                    <a:tint val="75000"/>
-                  </a:prstClr>
-                </a:solidFill>
-                <a:effectLst/>
-                <a:uLnTx/>
-                <a:uFillTx/>
-                <a:latin typeface="Helvetica Neue" panose="02000503000000020004" pitchFamily="2" charset="0"/>
-                <a:ea typeface="Helvetica Neue" panose="02000503000000020004" pitchFamily="2" charset="0"/>
-                <a:cs typeface="Helvetica Neue" panose="02000503000000020004" pitchFamily="2" charset="0"/>
-              </a:rPr>
-              <a:t>J Mark Morris</a:t>
-            </a:r>
-          </a:p>
-        </p:txBody>
-      </p:sp>
-      <p:cxnSp>
-        <p:nvCxnSpPr>
-          <p:cNvPr id="15" name="Straight Arrow Connector 14">
-            <a:extLst>
-              <a:ext uri="{FF2B5EF4-FFF2-40B4-BE49-F238E27FC236}">
-                <a16:creationId xmlns:a16="http://schemas.microsoft.com/office/drawing/2014/main" id="{D674725B-5E1E-77B0-62B5-B838B04E3C41}"/>
-              </a:ext>
-            </a:extLst>
-          </p:cNvPr>
-          <p:cNvCxnSpPr>
-            <a:cxnSpLocks/>
-          </p:cNvCxnSpPr>
-          <p:nvPr/>
-        </p:nvCxnSpPr>
-        <p:spPr>
-          <a:xfrm flipV="1">
-            <a:off x="7816383" y="4374292"/>
-            <a:ext cx="100179" cy="821033"/>
-          </a:xfrm>
-          <a:prstGeom prst="straightConnector1">
-            <a:avLst/>
-          </a:prstGeom>
-          <a:ln w="76200">
-            <a:solidFill>
-              <a:schemeClr val="bg1"/>
-            </a:solidFill>
-            <a:tailEnd type="triangle"/>
-          </a:ln>
-        </p:spPr>
-        <p:style>
-          <a:lnRef idx="1">
-            <a:schemeClr val="accent1"/>
-          </a:lnRef>
-          <a:fillRef idx="0">
-            <a:schemeClr val="accent1"/>
-          </a:fillRef>
-          <a:effectRef idx="0">
-            <a:schemeClr val="accent1"/>
-          </a:effectRef>
-          <a:fontRef idx="minor">
-            <a:schemeClr val="tx1"/>
-          </a:fontRef>
-        </p:style>
-      </p:cxnSp>
-      <p:sp>
-        <p:nvSpPr>
-          <p:cNvPr id="23" name="Rectangle 22">
-            <a:extLst>
-              <a:ext uri="{FF2B5EF4-FFF2-40B4-BE49-F238E27FC236}">
-                <a16:creationId xmlns:a16="http://schemas.microsoft.com/office/drawing/2014/main" id="{DA1AFF6B-BF9C-8366-1528-7ABB14140F85}"/>
-              </a:ext>
-            </a:extLst>
-          </p:cNvPr>
-          <p:cNvSpPr/>
-          <p:nvPr/>
-        </p:nvSpPr>
-        <p:spPr>
-          <a:xfrm>
-            <a:off x="6096000" y="5205360"/>
-            <a:ext cx="2929905" cy="461665"/>
-          </a:xfrm>
-          <a:prstGeom prst="rect">
-            <a:avLst/>
-          </a:prstGeom>
-          <a:ln w="63500">
-            <a:solidFill>
-              <a:schemeClr val="bg1"/>
-            </a:solidFill>
-          </a:ln>
-        </p:spPr>
-        <p:txBody>
-          <a:bodyPr wrap="none" rtlCol="0" anchor="ctr">
-            <a:spAutoFit/>
-          </a:bodyPr>
-          <a:lstStyle/>
-          <a:p>
-            <a:pPr marL="0" marR="0" lvl="0" indent="0" algn="l" defTabSz="914400" rtl="0" eaLnBrk="1" fontAlgn="auto" latinLnBrk="0" hangingPunct="1">
-              <a:lnSpc>
-                <a:spcPct val="100000"/>
-              </a:lnSpc>
-              <a:spcBef>
-                <a:spcPts val="0"/>
-              </a:spcBef>
-              <a:spcAft>
-                <a:spcPts val="0"/>
-              </a:spcAft>
-              <a:buClrTx/>
-              <a:buSzTx/>
-              <a:buFontTx/>
-              <a:buNone/>
-              <a:tabLst/>
-              <a:defRPr/>
-            </a:pPr>
-            <a:r>
-              <a:rPr kumimoji="0" lang="en-US" sz="2400" b="1" i="0" u="none" strike="noStrike" kern="1200" cap="none" spc="0" normalizeH="0" baseline="0" noProof="0" dirty="0">
-                <a:ln>
-                  <a:noFill/>
-                </a:ln>
-                <a:solidFill>
-                  <a:prstClr val="white"/>
-                </a:solidFill>
-                <a:effectLst/>
-                <a:uLnTx/>
-                <a:uFillTx/>
-                <a:latin typeface="Helvetica Neue" panose="02000503000000020004" pitchFamily="2" charset="0"/>
-                <a:ea typeface="Helvetica Neue" panose="02000503000000020004" pitchFamily="2" charset="0"/>
-                <a:cs typeface="Helvetica Neue" panose="02000503000000020004" pitchFamily="2" charset="0"/>
-              </a:rPr>
-              <a:t>Hydrogen H, White</a:t>
-            </a:r>
-          </a:p>
-        </p:txBody>
-      </p:sp>
-      <p:sp>
-        <p:nvSpPr>
-          <p:cNvPr id="24" name="Rectangle 23">
-            <a:extLst>
-              <a:ext uri="{FF2B5EF4-FFF2-40B4-BE49-F238E27FC236}">
-                <a16:creationId xmlns:a16="http://schemas.microsoft.com/office/drawing/2014/main" id="{0493695D-D94C-B9F8-ECFF-EECE8BEC1C0A}"/>
-              </a:ext>
-            </a:extLst>
-          </p:cNvPr>
-          <p:cNvSpPr/>
-          <p:nvPr/>
-        </p:nvSpPr>
-        <p:spPr>
-          <a:xfrm>
-            <a:off x="9609712" y="5667025"/>
-            <a:ext cx="2460930" cy="387798"/>
-          </a:xfrm>
-          <a:prstGeom prst="rect">
-            <a:avLst/>
-          </a:prstGeom>
-          <a:solidFill>
-            <a:schemeClr val="bg1"/>
-          </a:solidFill>
-          <a:ln w="63500">
-            <a:solidFill>
-              <a:srgbClr val="FF0000"/>
-            </a:solidFill>
-          </a:ln>
-        </p:spPr>
-        <p:txBody>
-          <a:bodyPr wrap="none" rtlCol="0" anchor="ctr">
-            <a:spAutoFit/>
-          </a:bodyPr>
-          <a:lstStyle/>
-          <a:p>
-            <a:pPr marL="0" marR="0" lvl="0" indent="0" algn="l" defTabSz="914400" rtl="0" eaLnBrk="1" fontAlgn="auto" latinLnBrk="0" hangingPunct="1">
-              <a:lnSpc>
-                <a:spcPct val="80000"/>
-              </a:lnSpc>
-              <a:spcBef>
-                <a:spcPts val="0"/>
-              </a:spcBef>
-              <a:spcAft>
-                <a:spcPts val="0"/>
-              </a:spcAft>
-              <a:buClrTx/>
-              <a:buSzTx/>
-              <a:buFontTx/>
-              <a:buNone/>
-              <a:tabLst/>
-              <a:defRPr/>
-            </a:pPr>
-            <a:r>
-              <a:rPr kumimoji="0" lang="en-US" sz="2400" b="1" i="0" u="none" strike="noStrike" kern="1200" cap="none" spc="0" normalizeH="0" baseline="0" noProof="0" dirty="0">
-                <a:ln>
-                  <a:noFill/>
-                </a:ln>
-                <a:solidFill>
-                  <a:srgbClr val="FF0000"/>
-                </a:solidFill>
-                <a:effectLst/>
-                <a:uLnTx/>
-                <a:uFillTx/>
-                <a:latin typeface="Helvetica Neue" panose="02000503000000020004" pitchFamily="2" charset="0"/>
-                <a:ea typeface="Helvetica Neue" panose="02000503000000020004" pitchFamily="2" charset="0"/>
-                <a:cs typeface="Helvetica Neue" panose="02000503000000020004" pitchFamily="2" charset="0"/>
-              </a:rPr>
-              <a:t>Oxygen, O: Red</a:t>
-            </a:r>
-          </a:p>
-        </p:txBody>
-      </p:sp>
-      <p:sp>
-        <p:nvSpPr>
-          <p:cNvPr id="25" name="Rectangle 24">
-            <a:extLst>
-              <a:ext uri="{FF2B5EF4-FFF2-40B4-BE49-F238E27FC236}">
-                <a16:creationId xmlns:a16="http://schemas.microsoft.com/office/drawing/2014/main" id="{DA84227C-7E63-0A67-E314-66FE77F9E1B6}"/>
-              </a:ext>
-            </a:extLst>
-          </p:cNvPr>
-          <p:cNvSpPr/>
-          <p:nvPr/>
-        </p:nvSpPr>
-        <p:spPr>
-          <a:xfrm>
-            <a:off x="9495898" y="814677"/>
-            <a:ext cx="2574744" cy="461665"/>
-          </a:xfrm>
-          <a:prstGeom prst="rect">
-            <a:avLst/>
-          </a:prstGeom>
-          <a:solidFill>
-            <a:schemeClr val="bg1"/>
-          </a:solidFill>
-          <a:ln w="63500">
-            <a:solidFill>
-              <a:schemeClr val="tx1"/>
-            </a:solidFill>
-          </a:ln>
-        </p:spPr>
-        <p:txBody>
-          <a:bodyPr wrap="none" rtlCol="0" anchor="ctr">
-            <a:spAutoFit/>
-          </a:bodyPr>
-          <a:lstStyle/>
-          <a:p>
-            <a:pPr marL="0" marR="0" lvl="0" indent="0" algn="l" defTabSz="914400" rtl="0" eaLnBrk="1" fontAlgn="auto" latinLnBrk="0" hangingPunct="1">
-              <a:lnSpc>
-                <a:spcPct val="100000"/>
-              </a:lnSpc>
-              <a:spcBef>
-                <a:spcPts val="0"/>
-              </a:spcBef>
-              <a:spcAft>
-                <a:spcPts val="0"/>
-              </a:spcAft>
-              <a:buClrTx/>
-              <a:buSzTx/>
-              <a:buFontTx/>
-              <a:buNone/>
-              <a:tabLst/>
-              <a:defRPr/>
-            </a:pPr>
-            <a:r>
-              <a:rPr kumimoji="0" lang="en-US" sz="2400" b="1" i="0" u="none" strike="noStrike" kern="1200" cap="none" spc="0" normalizeH="0" baseline="0" noProof="0" dirty="0">
-                <a:ln>
-                  <a:solidFill>
-                    <a:prstClr val="black"/>
-                  </a:solidFill>
-                </a:ln>
-                <a:solidFill>
-                  <a:prstClr val="black"/>
-                </a:solidFill>
-                <a:effectLst/>
-                <a:uLnTx/>
-                <a:uFillTx/>
-                <a:latin typeface="Helvetica Neue" panose="02000503000000020004" pitchFamily="2" charset="0"/>
-                <a:ea typeface="Helvetica Neue" panose="02000503000000020004" pitchFamily="2" charset="0"/>
-                <a:cs typeface="Helvetica Neue" panose="02000503000000020004" pitchFamily="2" charset="0"/>
-              </a:rPr>
-              <a:t>Carbon C, Black</a:t>
-            </a:r>
-          </a:p>
-        </p:txBody>
-      </p:sp>
-      <p:cxnSp>
-        <p:nvCxnSpPr>
-          <p:cNvPr id="12" name="Straight Arrow Connector 11">
-            <a:extLst>
-              <a:ext uri="{FF2B5EF4-FFF2-40B4-BE49-F238E27FC236}">
-                <a16:creationId xmlns:a16="http://schemas.microsoft.com/office/drawing/2014/main" id="{98F35A25-A480-BDA6-8936-F9B7C514F1B6}"/>
-              </a:ext>
-            </a:extLst>
-          </p:cNvPr>
-          <p:cNvCxnSpPr>
-            <a:cxnSpLocks/>
-          </p:cNvCxnSpPr>
-          <p:nvPr/>
-        </p:nvCxnSpPr>
-        <p:spPr>
-          <a:xfrm flipH="1">
-            <a:off x="9721183" y="1185333"/>
-            <a:ext cx="977297" cy="1613708"/>
-          </a:xfrm>
-          <a:prstGeom prst="straightConnector1">
-            <a:avLst/>
-          </a:prstGeom>
-          <a:ln w="76200">
-            <a:solidFill>
-              <a:schemeClr val="bg1"/>
-            </a:solidFill>
-            <a:tailEnd type="triangle"/>
-          </a:ln>
-        </p:spPr>
-        <p:style>
-          <a:lnRef idx="1">
-            <a:schemeClr val="accent1"/>
-          </a:lnRef>
-          <a:fillRef idx="0">
-            <a:schemeClr val="accent1"/>
-          </a:fillRef>
-          <a:effectRef idx="0">
-            <a:schemeClr val="accent1"/>
-          </a:effectRef>
-          <a:fontRef idx="minor">
-            <a:schemeClr val="tx1"/>
-          </a:fontRef>
-        </p:style>
-      </p:cxnSp>
-      <p:cxnSp>
-        <p:nvCxnSpPr>
-          <p:cNvPr id="30" name="Straight Arrow Connector 29">
-            <a:extLst>
-              <a:ext uri="{FF2B5EF4-FFF2-40B4-BE49-F238E27FC236}">
-                <a16:creationId xmlns:a16="http://schemas.microsoft.com/office/drawing/2014/main" id="{AC1A8B37-E523-D796-E99C-C5982ED35A8A}"/>
-              </a:ext>
-            </a:extLst>
-          </p:cNvPr>
-          <p:cNvCxnSpPr>
-            <a:cxnSpLocks/>
-          </p:cNvCxnSpPr>
-          <p:nvPr/>
-        </p:nvCxnSpPr>
-        <p:spPr>
-          <a:xfrm flipV="1">
-            <a:off x="11080750" y="4918075"/>
-            <a:ext cx="142875" cy="748950"/>
-          </a:xfrm>
-          <a:prstGeom prst="straightConnector1">
-            <a:avLst/>
-          </a:prstGeom>
-          <a:ln w="76200">
-            <a:solidFill>
-              <a:srgbClr val="FF0000"/>
-            </a:solidFill>
-            <a:tailEnd type="triangle"/>
-          </a:ln>
-        </p:spPr>
-        <p:style>
-          <a:lnRef idx="1">
-            <a:schemeClr val="accent1"/>
-          </a:lnRef>
-          <a:fillRef idx="0">
-            <a:schemeClr val="accent1"/>
-          </a:fillRef>
-          <a:effectRef idx="0">
-            <a:schemeClr val="accent1"/>
-          </a:effectRef>
-          <a:fontRef idx="minor">
-            <a:schemeClr val="tx1"/>
-          </a:fontRef>
-        </p:style>
-      </p:cxnSp>
-      <p:pic>
-        <p:nvPicPr>
-          <p:cNvPr id="3" name="Picture 4" descr="Testosterone and Diabetes - Role, Diabetes Link in Men &amp; Women">
-            <a:extLst>
-              <a:ext uri="{FF2B5EF4-FFF2-40B4-BE49-F238E27FC236}">
-                <a16:creationId xmlns:a16="http://schemas.microsoft.com/office/drawing/2014/main" id="{5866CE16-B018-B13A-69C5-20FDCBB8E663}"/>
-              </a:ext>
-            </a:extLst>
-          </p:cNvPr>
-          <p:cNvPicPr>
-            <a:picLocks noChangeAspect="1" noChangeArrowheads="1"/>
-          </p:cNvPicPr>
-          <p:nvPr/>
-        </p:nvPicPr>
-        <p:blipFill>
-          <a:blip r:embed="rId3">
-            <a:extLst>
-              <a:ext uri="{28A0092B-C50C-407E-A947-70E740481C1C}">
-                <a14:useLocalDpi xmlns:a14="http://schemas.microsoft.com/office/drawing/2010/main" val="0"/>
-              </a:ext>
-            </a:extLst>
-          </a:blip>
-          <a:srcRect/>
-          <a:stretch>
-            <a:fillRect/>
-          </a:stretch>
-        </p:blipFill>
-        <p:spPr bwMode="auto">
-          <a:xfrm>
-            <a:off x="201811" y="761574"/>
-            <a:ext cx="5682505" cy="3612718"/>
-          </a:xfrm>
-          <a:prstGeom prst="rect">
-            <a:avLst/>
-          </a:prstGeom>
-          <a:noFill/>
-          <a:extLst>
-            <a:ext uri="{909E8E84-426E-40DD-AFC4-6F175D3DCCD1}">
-              <a14:hiddenFill xmlns:a14="http://schemas.microsoft.com/office/drawing/2010/main">
-                <a:solidFill>
-                  <a:srgbClr val="FFFFFF"/>
-                </a:solidFill>
-              </a14:hiddenFill>
-            </a:ext>
-          </a:extLst>
-        </p:spPr>
-      </p:pic>
-    </p:spTree>
-    <p:extLst>
-      <p:ext uri="{BB962C8B-B14F-4D97-AF65-F5344CB8AC3E}">
-        <p14:creationId xmlns:p14="http://schemas.microsoft.com/office/powerpoint/2010/main" val="2593301601"/>
-      </p:ext>
-    </p:extLst>
-  </p:cSld>
-  <p:clrMapOvr>
-    <a:masterClrMapping/>
-  </p:clrMapOvr>
-</p:sld>
-</file>
-
-<file path=ppt/slides/slide4.xml><?xml version="1.0" encoding="utf-8"?>
-<p:sld xmlns:a="http://schemas.openxmlformats.org/drawingml/2006/main" xmlns:r="http://schemas.openxmlformats.org/officeDocument/2006/relationships" xmlns:p="http://schemas.openxmlformats.org/presentationml/2006/main">
-  <p:cSld>
-    <p:bg>
-      <p:bgPr>
-        <a:solidFill>
-          <a:srgbClr val="7030A0"/>
-        </a:solidFill>
-        <a:effectLst/>
-      </p:bgPr>
-    </p:bg>
-    <p:spTree>
-      <p:nvGrpSpPr>
-        <p:cNvPr id="1" name="">
-          <a:extLst>
-            <a:ext uri="{FF2B5EF4-FFF2-40B4-BE49-F238E27FC236}">
-              <a16:creationId xmlns:a16="http://schemas.microsoft.com/office/drawing/2014/main" id="{2E9A1F71-C5BD-4F4C-E241-BD8756E4CC68}"/>
-            </a:ext>
-          </a:extLst>
-        </p:cNvPr>
-        <p:cNvGrpSpPr/>
-        <p:nvPr/>
-      </p:nvGrpSpPr>
-      <p:grpSpPr>
-        <a:xfrm>
-          <a:off x="0" y="0"/>
-          <a:ext cx="0" cy="0"/>
-          <a:chOff x="0" y="0"/>
-          <a:chExt cx="0" cy="0"/>
-        </a:xfrm>
-      </p:grpSpPr>
-      <p:sp>
-        <p:nvSpPr>
-          <p:cNvPr id="5" name="Footer Placeholder 3">
-            <a:extLst>
-              <a:ext uri="{FF2B5EF4-FFF2-40B4-BE49-F238E27FC236}">
-                <a16:creationId xmlns:a16="http://schemas.microsoft.com/office/drawing/2014/main" id="{AFD16751-BDC1-80A5-167A-4E70B590830B}"/>
-              </a:ext>
-            </a:extLst>
-          </p:cNvPr>
-          <p:cNvSpPr txBox="1">
-            <a:spLocks/>
-          </p:cNvSpPr>
-          <p:nvPr/>
-        </p:nvSpPr>
-        <p:spPr>
-          <a:xfrm>
-            <a:off x="10924248" y="6388602"/>
-            <a:ext cx="1142262" cy="365125"/>
-          </a:xfrm>
-          <a:prstGeom prst="rect">
-            <a:avLst/>
-          </a:prstGeom>
-        </p:spPr>
-        <p:txBody>
-          <a:bodyPr vert="horz" lIns="91440" tIns="45720" rIns="91440" bIns="45720" rtlCol="0" anchor="ctr"/>
-          <a:lstStyle>
-            <a:defPPr>
-              <a:defRPr lang="en-US"/>
-            </a:defPPr>
-            <a:lvl1pPr marL="0" algn="ctr" defTabSz="914400" rtl="0" eaLnBrk="1" latinLnBrk="0" hangingPunct="1">
-              <a:defRPr sz="1200" kern="1200">
-                <a:solidFill>
-                  <a:schemeClr val="tx1">
-                    <a:tint val="75000"/>
-                  </a:schemeClr>
-                </a:solidFill>
-                <a:latin typeface="+mn-lt"/>
-                <a:ea typeface="+mn-ea"/>
-                <a:cs typeface="+mn-cs"/>
-              </a:defRPr>
-            </a:lvl1pPr>
-            <a:lvl2pPr marL="457200" algn="l" defTabSz="914400" rtl="0" eaLnBrk="1" latinLnBrk="0" hangingPunct="1">
-              <a:defRPr sz="1800" kern="1200">
-                <a:solidFill>
-                  <a:schemeClr val="tx1"/>
-                </a:solidFill>
-                <a:latin typeface="+mn-lt"/>
-                <a:ea typeface="+mn-ea"/>
-                <a:cs typeface="+mn-cs"/>
-              </a:defRPr>
-            </a:lvl2pPr>
-            <a:lvl3pPr marL="914400" algn="l" defTabSz="914400" rtl="0" eaLnBrk="1" latinLnBrk="0" hangingPunct="1">
-              <a:defRPr sz="1800" kern="1200">
-                <a:solidFill>
-                  <a:schemeClr val="tx1"/>
-                </a:solidFill>
-                <a:latin typeface="+mn-lt"/>
-                <a:ea typeface="+mn-ea"/>
-                <a:cs typeface="+mn-cs"/>
-              </a:defRPr>
-            </a:lvl3pPr>
-            <a:lvl4pPr marL="1371600" algn="l" defTabSz="914400" rtl="0" eaLnBrk="1" latinLnBrk="0" hangingPunct="1">
-              <a:defRPr sz="1800" kern="1200">
-                <a:solidFill>
-                  <a:schemeClr val="tx1"/>
-                </a:solidFill>
-                <a:latin typeface="+mn-lt"/>
-                <a:ea typeface="+mn-ea"/>
-                <a:cs typeface="+mn-cs"/>
-              </a:defRPr>
-            </a:lvl4pPr>
-            <a:lvl5pPr marL="1828800" algn="l" defTabSz="914400" rtl="0" eaLnBrk="1" latinLnBrk="0" hangingPunct="1">
-              <a:defRPr sz="1800" kern="1200">
-                <a:solidFill>
-                  <a:schemeClr val="tx1"/>
-                </a:solidFill>
-                <a:latin typeface="+mn-lt"/>
-                <a:ea typeface="+mn-ea"/>
-                <a:cs typeface="+mn-cs"/>
-              </a:defRPr>
-            </a:lvl5pPr>
-            <a:lvl6pPr marL="2286000" algn="l" defTabSz="914400" rtl="0" eaLnBrk="1" latinLnBrk="0" hangingPunct="1">
-              <a:defRPr sz="1800" kern="1200">
-                <a:solidFill>
-                  <a:schemeClr val="tx1"/>
-                </a:solidFill>
-                <a:latin typeface="+mn-lt"/>
-                <a:ea typeface="+mn-ea"/>
-                <a:cs typeface="+mn-cs"/>
-              </a:defRPr>
-            </a:lvl6pPr>
-            <a:lvl7pPr marL="2743200" algn="l" defTabSz="914400" rtl="0" eaLnBrk="1" latinLnBrk="0" hangingPunct="1">
-              <a:defRPr sz="1800" kern="1200">
-                <a:solidFill>
-                  <a:schemeClr val="tx1"/>
-                </a:solidFill>
-                <a:latin typeface="+mn-lt"/>
-                <a:ea typeface="+mn-ea"/>
-                <a:cs typeface="+mn-cs"/>
-              </a:defRPr>
-            </a:lvl7pPr>
-            <a:lvl8pPr marL="3200400" algn="l" defTabSz="914400" rtl="0" eaLnBrk="1" latinLnBrk="0" hangingPunct="1">
-              <a:defRPr sz="1800" kern="1200">
-                <a:solidFill>
-                  <a:schemeClr val="tx1"/>
-                </a:solidFill>
-                <a:latin typeface="+mn-lt"/>
-                <a:ea typeface="+mn-ea"/>
-                <a:cs typeface="+mn-cs"/>
-              </a:defRPr>
-            </a:lvl8pPr>
-            <a:lvl9pPr marL="3657600" algn="l" defTabSz="914400" rtl="0" eaLnBrk="1" latinLnBrk="0" hangingPunct="1">
-              <a:defRPr sz="1800" kern="1200">
-                <a:solidFill>
-                  <a:schemeClr val="tx1"/>
-                </a:solidFill>
-                <a:latin typeface="+mn-lt"/>
-                <a:ea typeface="+mn-ea"/>
-                <a:cs typeface="+mn-cs"/>
-              </a:defRPr>
-            </a:lvl9pPr>
-          </a:lstStyle>
-          <a:p>
-            <a:pPr marL="0" marR="0" lvl="0" indent="0" algn="ctr" defTabSz="914400" rtl="0" eaLnBrk="1" fontAlgn="auto" latinLnBrk="0" hangingPunct="1">
-              <a:lnSpc>
-                <a:spcPct val="100000"/>
-              </a:lnSpc>
-              <a:spcBef>
-                <a:spcPts val="0"/>
-              </a:spcBef>
-              <a:spcAft>
-                <a:spcPts val="0"/>
-              </a:spcAft>
-              <a:buClrTx/>
-              <a:buSzTx/>
-              <a:buFontTx/>
-              <a:buNone/>
-              <a:tabLst/>
-              <a:defRPr/>
-            </a:pPr>
-            <a:r>
-              <a:rPr kumimoji="0" lang="en-US" sz="1200" b="0" i="0" u="none" strike="noStrike" kern="1200" cap="none" spc="0" normalizeH="0" baseline="0" noProof="0" dirty="0">
-                <a:ln>
-                  <a:noFill/>
-                </a:ln>
-                <a:solidFill>
-                  <a:prstClr val="black">
-                    <a:tint val="75000"/>
-                  </a:prstClr>
-                </a:solidFill>
-                <a:effectLst/>
-                <a:uLnTx/>
-                <a:uFillTx/>
-                <a:latin typeface="Helvetica Neue" panose="02000503000000020004" pitchFamily="2" charset="0"/>
-                <a:ea typeface="Helvetica Neue" panose="02000503000000020004" pitchFamily="2" charset="0"/>
-                <a:cs typeface="Helvetica Neue" panose="02000503000000020004" pitchFamily="2" charset="0"/>
-              </a:rPr>
-              <a:t>J Mark Morris</a:t>
-            </a:r>
-          </a:p>
-        </p:txBody>
-      </p:sp>
-      <p:sp>
-        <p:nvSpPr>
-          <p:cNvPr id="19" name="Rectangle 18">
-            <a:extLst>
-              <a:ext uri="{FF2B5EF4-FFF2-40B4-BE49-F238E27FC236}">
-                <a16:creationId xmlns:a16="http://schemas.microsoft.com/office/drawing/2014/main" id="{16FB1C8D-3967-327A-9D97-FA6A9120452F}"/>
-              </a:ext>
-            </a:extLst>
-          </p:cNvPr>
-          <p:cNvSpPr/>
-          <p:nvPr/>
-        </p:nvSpPr>
-        <p:spPr>
-          <a:xfrm>
-            <a:off x="1290848" y="207788"/>
-            <a:ext cx="9610323" cy="523220"/>
-          </a:xfrm>
-          <a:prstGeom prst="rect">
-            <a:avLst/>
-          </a:prstGeom>
-          <a:noFill/>
-        </p:spPr>
-        <p:txBody>
-          <a:bodyPr wrap="none">
-            <a:spAutoFit/>
-          </a:bodyPr>
-          <a:lstStyle/>
-          <a:p>
-            <a:pPr marL="0" marR="0" lvl="0" indent="0" algn="ctr" defTabSz="914400" rtl="0" eaLnBrk="1" fontAlgn="auto" latinLnBrk="0" hangingPunct="1">
-              <a:lnSpc>
-                <a:spcPct val="100000"/>
-              </a:lnSpc>
-              <a:spcBef>
-                <a:spcPts val="0"/>
-              </a:spcBef>
-              <a:spcAft>
-                <a:spcPts val="0"/>
-              </a:spcAft>
-              <a:buClrTx/>
-              <a:buSzTx/>
-              <a:buFontTx/>
-              <a:buNone/>
-              <a:tabLst/>
-              <a:defRPr/>
-            </a:pPr>
-            <a:r>
-              <a:rPr kumimoji="0" lang="en-US" sz="2800" b="1" i="0" u="none" strike="noStrike" kern="1200" cap="none" spc="0" normalizeH="0" baseline="0" noProof="0" dirty="0">
-                <a:ln>
-                  <a:noFill/>
-                </a:ln>
-                <a:solidFill>
-                  <a:prstClr val="white"/>
-                </a:solidFill>
-                <a:effectLst/>
-                <a:uLnTx/>
-                <a:uFillTx/>
-                <a:latin typeface="Helvetica Neue" panose="02000503000000020004" pitchFamily="2" charset="0"/>
-                <a:ea typeface="Helvetica Neue" panose="02000503000000020004" pitchFamily="2" charset="0"/>
-                <a:cs typeface="Helvetica Neue" panose="02000503000000020004" pitchFamily="2" charset="0"/>
-              </a:rPr>
-              <a:t>Pyridine C</a:t>
-            </a:r>
-            <a:r>
-              <a:rPr kumimoji="0" lang="en-US" sz="2800" b="1" i="0" u="none" strike="noStrike" kern="1200" cap="none" spc="0" normalizeH="0" baseline="-25000" noProof="0" dirty="0">
-                <a:ln>
-                  <a:noFill/>
-                </a:ln>
-                <a:solidFill>
-                  <a:prstClr val="white"/>
-                </a:solidFill>
-                <a:effectLst/>
-                <a:uLnTx/>
-                <a:uFillTx/>
-                <a:latin typeface="Helvetica Neue" panose="02000503000000020004" pitchFamily="2" charset="0"/>
-                <a:ea typeface="Helvetica Neue" panose="02000503000000020004" pitchFamily="2" charset="0"/>
-                <a:cs typeface="Helvetica Neue" panose="02000503000000020004" pitchFamily="2" charset="0"/>
-              </a:rPr>
-              <a:t>5</a:t>
-            </a:r>
-            <a:r>
-              <a:rPr kumimoji="0" lang="en-US" sz="2800" b="1" i="0" u="none" strike="noStrike" kern="1200" cap="none" spc="0" normalizeH="0" baseline="0" noProof="0" dirty="0">
-                <a:ln>
-                  <a:noFill/>
-                </a:ln>
-                <a:solidFill>
-                  <a:prstClr val="white"/>
-                </a:solidFill>
-                <a:effectLst/>
-                <a:uLnTx/>
-                <a:uFillTx/>
-                <a:latin typeface="Helvetica Neue" panose="02000503000000020004" pitchFamily="2" charset="0"/>
-                <a:ea typeface="Helvetica Neue" panose="02000503000000020004" pitchFamily="2" charset="0"/>
-                <a:cs typeface="Helvetica Neue" panose="02000503000000020004" pitchFamily="2" charset="0"/>
-              </a:rPr>
-              <a:t>H</a:t>
-            </a:r>
-            <a:r>
-              <a:rPr kumimoji="0" lang="en-US" sz="2800" b="1" i="0" u="none" strike="noStrike" kern="1200" cap="none" spc="0" normalizeH="0" baseline="-25000" noProof="0" dirty="0">
-                <a:ln>
-                  <a:noFill/>
-                </a:ln>
-                <a:solidFill>
-                  <a:prstClr val="white"/>
-                </a:solidFill>
-                <a:effectLst/>
-                <a:uLnTx/>
-                <a:uFillTx/>
-                <a:latin typeface="Helvetica Neue" panose="02000503000000020004" pitchFamily="2" charset="0"/>
-                <a:ea typeface="Helvetica Neue" panose="02000503000000020004" pitchFamily="2" charset="0"/>
-                <a:cs typeface="Helvetica Neue" panose="02000503000000020004" pitchFamily="2" charset="0"/>
-              </a:rPr>
-              <a:t>5</a:t>
-            </a:r>
-            <a:r>
-              <a:rPr kumimoji="0" lang="en-US" sz="2800" b="1" i="0" u="none" strike="noStrike" kern="1200" cap="none" spc="0" normalizeH="0" baseline="0" noProof="0" dirty="0">
-                <a:ln>
-                  <a:noFill/>
-                </a:ln>
-                <a:solidFill>
-                  <a:prstClr val="white"/>
-                </a:solidFill>
-                <a:effectLst/>
-                <a:uLnTx/>
-                <a:uFillTx/>
-                <a:latin typeface="Helvetica Neue" panose="02000503000000020004" pitchFamily="2" charset="0"/>
-                <a:ea typeface="Helvetica Neue" panose="02000503000000020004" pitchFamily="2" charset="0"/>
-                <a:cs typeface="Helvetica Neue" panose="02000503000000020004" pitchFamily="2" charset="0"/>
-              </a:rPr>
-              <a:t>N is an assembly of 3348 Point Potentials </a:t>
-            </a:r>
-          </a:p>
-        </p:txBody>
-      </p:sp>
-      <p:sp>
-        <p:nvSpPr>
-          <p:cNvPr id="2" name="TextBox 1">
-            <a:extLst>
-              <a:ext uri="{FF2B5EF4-FFF2-40B4-BE49-F238E27FC236}">
-                <a16:creationId xmlns:a16="http://schemas.microsoft.com/office/drawing/2014/main" id="{1AFD95C8-FD16-1D5D-3B0F-CF12891B65E8}"/>
-              </a:ext>
-            </a:extLst>
-          </p:cNvPr>
-          <p:cNvSpPr txBox="1"/>
-          <p:nvPr/>
-        </p:nvSpPr>
-        <p:spPr>
-          <a:xfrm>
-            <a:off x="412586" y="922975"/>
-            <a:ext cx="11874641" cy="1938992"/>
-          </a:xfrm>
-          <a:prstGeom prst="rect">
-            <a:avLst/>
-          </a:prstGeom>
-          <a:noFill/>
-        </p:spPr>
-        <p:txBody>
-          <a:bodyPr wrap="square" rtlCol="0">
-            <a:spAutoFit/>
-          </a:bodyPr>
-          <a:lstStyle/>
-          <a:p>
-            <a:pPr marL="457200" marR="0" lvl="0" indent="-457200" algn="l" defTabSz="914400" rtl="0" eaLnBrk="1" fontAlgn="auto" latinLnBrk="0" hangingPunct="1">
-              <a:lnSpc>
-                <a:spcPct val="100000"/>
-              </a:lnSpc>
-              <a:spcBef>
-                <a:spcPts val="0"/>
-              </a:spcBef>
-              <a:spcAft>
-                <a:spcPts val="0"/>
-              </a:spcAft>
-              <a:buClrTx/>
-              <a:buSzTx/>
-              <a:buFont typeface="Arial" panose="020B0604020202020204" pitchFamily="34" charset="0"/>
-              <a:buChar char="•"/>
-              <a:tabLst/>
-              <a:defRPr/>
-            </a:pPr>
-            <a:r>
-              <a:rPr kumimoji="0" lang="en-US" sz="2400" b="0" i="0" u="none" strike="noStrike" kern="1200" cap="none" spc="0" normalizeH="0" baseline="0" noProof="0" dirty="0">
-                <a:ln>
-                  <a:noFill/>
-                </a:ln>
-                <a:solidFill>
-                  <a:prstClr val="white"/>
-                </a:solidFill>
-                <a:effectLst/>
-                <a:uLnTx/>
-                <a:uFillTx/>
-                <a:latin typeface="Helvetica Neue" panose="02000503000000020004" pitchFamily="2" charset="0"/>
-                <a:ea typeface="Helvetica Neue" panose="02000503000000020004" pitchFamily="2" charset="0"/>
-                <a:cs typeface="Helvetica Neue" panose="02000503000000020004" pitchFamily="2" charset="0"/>
-              </a:rPr>
-              <a:t>Pyridine is a basic heterocyclic organic compound with the formula C₅H₅N. </a:t>
-            </a:r>
-          </a:p>
-          <a:p>
-            <a:pPr marL="457200" marR="0" lvl="0" indent="-457200" algn="l" defTabSz="914400" rtl="0" eaLnBrk="1" fontAlgn="auto" latinLnBrk="0" hangingPunct="1">
-              <a:lnSpc>
-                <a:spcPct val="100000"/>
-              </a:lnSpc>
-              <a:spcBef>
-                <a:spcPts val="0"/>
-              </a:spcBef>
-              <a:spcAft>
-                <a:spcPts val="0"/>
-              </a:spcAft>
-              <a:buClrTx/>
-              <a:buSzTx/>
-              <a:buFont typeface="Arial" panose="020B0604020202020204" pitchFamily="34" charset="0"/>
-              <a:buChar char="•"/>
-              <a:tabLst/>
-              <a:defRPr/>
-            </a:pPr>
-            <a:r>
-              <a:rPr kumimoji="0" lang="en-US" sz="2400" b="0" i="0" u="none" strike="noStrike" kern="1200" cap="none" spc="0" normalizeH="0" baseline="0" noProof="0" dirty="0">
-                <a:ln>
-                  <a:noFill/>
-                </a:ln>
-                <a:solidFill>
-                  <a:prstClr val="white"/>
-                </a:solidFill>
-                <a:effectLst/>
-                <a:uLnTx/>
-                <a:uFillTx/>
-                <a:latin typeface="Helvetica Neue" panose="02000503000000020004" pitchFamily="2" charset="0"/>
-                <a:ea typeface="Helvetica Neue" panose="02000503000000020004" pitchFamily="2" charset="0"/>
-                <a:cs typeface="Helvetica Neue" panose="02000503000000020004" pitchFamily="2" charset="0"/>
-              </a:rPr>
-              <a:t>Pyridine forms the basis for the amino acids tryptophan and niacin. </a:t>
-            </a:r>
-          </a:p>
-          <a:p>
-            <a:pPr marL="457200" marR="0" lvl="0" indent="-457200" algn="l" defTabSz="914400" rtl="0" eaLnBrk="1" fontAlgn="auto" latinLnBrk="0" hangingPunct="1">
-              <a:lnSpc>
-                <a:spcPct val="100000"/>
-              </a:lnSpc>
-              <a:spcBef>
-                <a:spcPts val="0"/>
-              </a:spcBef>
-              <a:spcAft>
-                <a:spcPts val="0"/>
-              </a:spcAft>
-              <a:buClrTx/>
-              <a:buSzTx/>
-              <a:buFont typeface="Arial" panose="020B0604020202020204" pitchFamily="34" charset="0"/>
-              <a:buChar char="•"/>
-              <a:tabLst/>
-              <a:defRPr/>
-            </a:pPr>
-            <a:endParaRPr kumimoji="0" lang="en-US" sz="2400" b="0" i="0" u="none" strike="noStrike" kern="1200" cap="none" spc="0" normalizeH="0" baseline="0" noProof="0" dirty="0">
-              <a:ln>
-                <a:noFill/>
-              </a:ln>
-              <a:solidFill>
-                <a:prstClr val="white"/>
-              </a:solidFill>
-              <a:effectLst/>
-              <a:uLnTx/>
-              <a:uFillTx/>
-              <a:latin typeface="Helvetica Neue" panose="02000503000000020004" pitchFamily="2" charset="0"/>
-              <a:ea typeface="Helvetica Neue" panose="02000503000000020004" pitchFamily="2" charset="0"/>
-              <a:cs typeface="Helvetica Neue" panose="02000503000000020004" pitchFamily="2" charset="0"/>
-            </a:endParaRPr>
-          </a:p>
-          <a:p>
-            <a:pPr marL="457200" marR="0" lvl="0" indent="-457200" algn="l" defTabSz="914400" rtl="0" eaLnBrk="1" fontAlgn="auto" latinLnBrk="0" hangingPunct="1">
-              <a:lnSpc>
-                <a:spcPct val="100000"/>
-              </a:lnSpc>
-              <a:spcBef>
-                <a:spcPts val="0"/>
-              </a:spcBef>
-              <a:spcAft>
-                <a:spcPts val="0"/>
-              </a:spcAft>
-              <a:buClrTx/>
-              <a:buSzTx/>
-              <a:buFont typeface="Arial" panose="020B0604020202020204" pitchFamily="34" charset="0"/>
-              <a:buChar char="•"/>
-              <a:tabLst/>
-              <a:defRPr/>
-            </a:pPr>
-            <a:endParaRPr kumimoji="0" lang="en-US" sz="2400" b="0" i="0" u="none" strike="noStrike" kern="1200" cap="none" spc="0" normalizeH="0" baseline="0" noProof="0" dirty="0">
-              <a:ln>
-                <a:noFill/>
-              </a:ln>
-              <a:solidFill>
-                <a:prstClr val="white"/>
-              </a:solidFill>
-              <a:effectLst/>
-              <a:uLnTx/>
-              <a:uFillTx/>
-              <a:latin typeface="Helvetica Neue" panose="02000503000000020004" pitchFamily="2" charset="0"/>
-              <a:ea typeface="Helvetica Neue" panose="02000503000000020004" pitchFamily="2" charset="0"/>
-              <a:cs typeface="Helvetica Neue" panose="02000503000000020004" pitchFamily="2" charset="0"/>
-            </a:endParaRPr>
-          </a:p>
-          <a:p>
-            <a:pPr marL="457200" marR="0" lvl="0" indent="-457200" algn="l" defTabSz="914400" rtl="0" eaLnBrk="1" fontAlgn="auto" latinLnBrk="0" hangingPunct="1">
-              <a:lnSpc>
-                <a:spcPct val="100000"/>
-              </a:lnSpc>
-              <a:spcBef>
-                <a:spcPts val="0"/>
-              </a:spcBef>
-              <a:spcAft>
-                <a:spcPts val="0"/>
-              </a:spcAft>
-              <a:buClrTx/>
-              <a:buSzTx/>
-              <a:buFont typeface="Arial" panose="020B0604020202020204" pitchFamily="34" charset="0"/>
-              <a:buChar char="•"/>
-              <a:tabLst/>
-              <a:defRPr/>
-            </a:pPr>
-            <a:endParaRPr kumimoji="0" lang="en-US" sz="2400" b="0" i="0" u="none" strike="noStrike" kern="1200" cap="none" spc="0" normalizeH="0" baseline="0" noProof="0" dirty="0">
-              <a:ln>
-                <a:noFill/>
-              </a:ln>
-              <a:solidFill>
-                <a:prstClr val="white"/>
-              </a:solidFill>
-              <a:effectLst/>
-              <a:uLnTx/>
-              <a:uFillTx/>
-              <a:latin typeface="Helvetica Neue" panose="02000503000000020004" pitchFamily="2" charset="0"/>
-              <a:ea typeface="Helvetica Neue" panose="02000503000000020004" pitchFamily="2" charset="0"/>
-              <a:cs typeface="Helvetica Neue" panose="02000503000000020004" pitchFamily="2" charset="0"/>
-            </a:endParaRPr>
-          </a:p>
-        </p:txBody>
-      </p:sp>
-      <p:pic>
-        <p:nvPicPr>
-          <p:cNvPr id="4" name="Picture 3">
-            <a:extLst>
-              <a:ext uri="{FF2B5EF4-FFF2-40B4-BE49-F238E27FC236}">
-                <a16:creationId xmlns:a16="http://schemas.microsoft.com/office/drawing/2014/main" id="{2CEA214A-CCEB-32C9-6F9B-73E5CE1FE8D3}"/>
-              </a:ext>
-            </a:extLst>
-          </p:cNvPr>
-          <p:cNvPicPr>
-            <a:picLocks noChangeAspect="1"/>
-          </p:cNvPicPr>
-          <p:nvPr/>
-        </p:nvPicPr>
-        <p:blipFill>
-          <a:blip r:embed="rId2"/>
-          <a:stretch>
-            <a:fillRect/>
-          </a:stretch>
-        </p:blipFill>
-        <p:spPr>
-          <a:xfrm>
-            <a:off x="1164724" y="2154620"/>
-            <a:ext cx="10153024" cy="4149899"/>
-          </a:xfrm>
-          <a:prstGeom prst="rect">
-            <a:avLst/>
-          </a:prstGeom>
-        </p:spPr>
-      </p:pic>
-    </p:spTree>
-    <p:extLst>
-      <p:ext uri="{BB962C8B-B14F-4D97-AF65-F5344CB8AC3E}">
-        <p14:creationId xmlns:p14="http://schemas.microsoft.com/office/powerpoint/2010/main" val="1783847399"/>
-      </p:ext>
-    </p:extLst>
-  </p:cSld>
-  <p:clrMapOvr>
-    <a:masterClrMapping/>
-  </p:clrMapOvr>
-</p:sld>
-</file>
-
-<file path=ppt/slides/slide5.xml><?xml version="1.0" encoding="utf-8"?>
-<p:sld xmlns:a="http://schemas.openxmlformats.org/drawingml/2006/main" xmlns:r="http://schemas.openxmlformats.org/officeDocument/2006/relationships" xmlns:p="http://schemas.openxmlformats.org/presentationml/2006/main">
-  <p:cSld>
-    <p:bg>
-      <p:bgPr>
-        <a:solidFill>
-          <a:srgbClr val="7030A0"/>
-        </a:solidFill>
-        <a:effectLst/>
-      </p:bgPr>
-    </p:bg>
-    <p:spTree>
-      <p:nvGrpSpPr>
-        <p:cNvPr id="1" name="">
-          <a:extLst>
-            <a:ext uri="{FF2B5EF4-FFF2-40B4-BE49-F238E27FC236}">
-              <a16:creationId xmlns:a16="http://schemas.microsoft.com/office/drawing/2014/main" id="{BCDA3861-4FE9-86FE-F0C3-063365F389FD}"/>
-            </a:ext>
-          </a:extLst>
-        </p:cNvPr>
-        <p:cNvGrpSpPr/>
-        <p:nvPr/>
-      </p:nvGrpSpPr>
-      <p:grpSpPr>
-        <a:xfrm>
-          <a:off x="0" y="0"/>
-          <a:ext cx="0" cy="0"/>
-          <a:chOff x="0" y="0"/>
-          <a:chExt cx="0" cy="0"/>
-        </a:xfrm>
-      </p:grpSpPr>
-      <p:sp>
-        <p:nvSpPr>
-          <p:cNvPr id="5" name="Footer Placeholder 3">
-            <a:extLst>
-              <a:ext uri="{FF2B5EF4-FFF2-40B4-BE49-F238E27FC236}">
-                <a16:creationId xmlns:a16="http://schemas.microsoft.com/office/drawing/2014/main" id="{A5E4DEEF-0EFF-52E2-B792-26216E48BC3B}"/>
-              </a:ext>
-            </a:extLst>
-          </p:cNvPr>
-          <p:cNvSpPr txBox="1">
-            <a:spLocks/>
-          </p:cNvSpPr>
-          <p:nvPr/>
-        </p:nvSpPr>
-        <p:spPr>
-          <a:xfrm>
-            <a:off x="10864049" y="6492875"/>
-            <a:ext cx="1142262" cy="365125"/>
-          </a:xfrm>
-          <a:prstGeom prst="rect">
-            <a:avLst/>
-          </a:prstGeom>
-        </p:spPr>
-        <p:txBody>
-          <a:bodyPr vert="horz" lIns="91440" tIns="45720" rIns="91440" bIns="45720" rtlCol="0" anchor="ctr"/>
-          <a:lstStyle>
-            <a:defPPr>
-              <a:defRPr lang="en-US"/>
-            </a:defPPr>
-            <a:lvl1pPr marL="0" algn="ctr" defTabSz="914400" rtl="0" eaLnBrk="1" latinLnBrk="0" hangingPunct="1">
-              <a:defRPr sz="1200" kern="1200">
-                <a:solidFill>
-                  <a:schemeClr val="tx1">
-                    <a:tint val="75000"/>
-                  </a:schemeClr>
-                </a:solidFill>
-                <a:latin typeface="+mn-lt"/>
-                <a:ea typeface="+mn-ea"/>
-                <a:cs typeface="+mn-cs"/>
-              </a:defRPr>
-            </a:lvl1pPr>
-            <a:lvl2pPr marL="457200" algn="l" defTabSz="914400" rtl="0" eaLnBrk="1" latinLnBrk="0" hangingPunct="1">
-              <a:defRPr sz="1800" kern="1200">
-                <a:solidFill>
-                  <a:schemeClr val="tx1"/>
-                </a:solidFill>
-                <a:latin typeface="+mn-lt"/>
-                <a:ea typeface="+mn-ea"/>
-                <a:cs typeface="+mn-cs"/>
-              </a:defRPr>
-            </a:lvl2pPr>
-            <a:lvl3pPr marL="914400" algn="l" defTabSz="914400" rtl="0" eaLnBrk="1" latinLnBrk="0" hangingPunct="1">
-              <a:defRPr sz="1800" kern="1200">
-                <a:solidFill>
-                  <a:schemeClr val="tx1"/>
-                </a:solidFill>
-                <a:latin typeface="+mn-lt"/>
-                <a:ea typeface="+mn-ea"/>
-                <a:cs typeface="+mn-cs"/>
-              </a:defRPr>
-            </a:lvl3pPr>
-            <a:lvl4pPr marL="1371600" algn="l" defTabSz="914400" rtl="0" eaLnBrk="1" latinLnBrk="0" hangingPunct="1">
-              <a:defRPr sz="1800" kern="1200">
-                <a:solidFill>
-                  <a:schemeClr val="tx1"/>
-                </a:solidFill>
-                <a:latin typeface="+mn-lt"/>
-                <a:ea typeface="+mn-ea"/>
-                <a:cs typeface="+mn-cs"/>
-              </a:defRPr>
-            </a:lvl4pPr>
-            <a:lvl5pPr marL="1828800" algn="l" defTabSz="914400" rtl="0" eaLnBrk="1" latinLnBrk="0" hangingPunct="1">
-              <a:defRPr sz="1800" kern="1200">
-                <a:solidFill>
-                  <a:schemeClr val="tx1"/>
-                </a:solidFill>
-                <a:latin typeface="+mn-lt"/>
-                <a:ea typeface="+mn-ea"/>
-                <a:cs typeface="+mn-cs"/>
-              </a:defRPr>
-            </a:lvl5pPr>
-            <a:lvl6pPr marL="2286000" algn="l" defTabSz="914400" rtl="0" eaLnBrk="1" latinLnBrk="0" hangingPunct="1">
-              <a:defRPr sz="1800" kern="1200">
-                <a:solidFill>
-                  <a:schemeClr val="tx1"/>
-                </a:solidFill>
-                <a:latin typeface="+mn-lt"/>
-                <a:ea typeface="+mn-ea"/>
-                <a:cs typeface="+mn-cs"/>
-              </a:defRPr>
-            </a:lvl6pPr>
-            <a:lvl7pPr marL="2743200" algn="l" defTabSz="914400" rtl="0" eaLnBrk="1" latinLnBrk="0" hangingPunct="1">
-              <a:defRPr sz="1800" kern="1200">
-                <a:solidFill>
-                  <a:schemeClr val="tx1"/>
-                </a:solidFill>
-                <a:latin typeface="+mn-lt"/>
-                <a:ea typeface="+mn-ea"/>
-                <a:cs typeface="+mn-cs"/>
-              </a:defRPr>
-            </a:lvl7pPr>
-            <a:lvl8pPr marL="3200400" algn="l" defTabSz="914400" rtl="0" eaLnBrk="1" latinLnBrk="0" hangingPunct="1">
-              <a:defRPr sz="1800" kern="1200">
-                <a:solidFill>
-                  <a:schemeClr val="tx1"/>
-                </a:solidFill>
-                <a:latin typeface="+mn-lt"/>
-                <a:ea typeface="+mn-ea"/>
-                <a:cs typeface="+mn-cs"/>
-              </a:defRPr>
-            </a:lvl8pPr>
-            <a:lvl9pPr marL="3657600" algn="l" defTabSz="914400" rtl="0" eaLnBrk="1" latinLnBrk="0" hangingPunct="1">
-              <a:defRPr sz="1800" kern="1200">
-                <a:solidFill>
-                  <a:schemeClr val="tx1"/>
-                </a:solidFill>
-                <a:latin typeface="+mn-lt"/>
-                <a:ea typeface="+mn-ea"/>
-                <a:cs typeface="+mn-cs"/>
-              </a:defRPr>
-            </a:lvl9pPr>
-          </a:lstStyle>
-          <a:p>
-            <a:pPr marL="0" marR="0" lvl="0" indent="0" algn="ctr" defTabSz="914400" rtl="0" eaLnBrk="1" fontAlgn="auto" latinLnBrk="0" hangingPunct="1">
-              <a:lnSpc>
-                <a:spcPct val="100000"/>
-              </a:lnSpc>
-              <a:spcBef>
-                <a:spcPts val="0"/>
-              </a:spcBef>
-              <a:spcAft>
-                <a:spcPts val="0"/>
-              </a:spcAft>
-              <a:buClrTx/>
-              <a:buSzTx/>
-              <a:buFontTx/>
-              <a:buNone/>
-              <a:tabLst/>
-              <a:defRPr/>
-            </a:pPr>
-            <a:r>
-              <a:rPr kumimoji="0" lang="en-US" sz="1200" b="0" i="0" u="none" strike="noStrike" kern="1200" cap="none" spc="0" normalizeH="0" baseline="0" noProof="0" dirty="0">
-                <a:ln>
-                  <a:noFill/>
-                </a:ln>
-                <a:solidFill>
-                  <a:prstClr val="black">
-                    <a:tint val="75000"/>
-                  </a:prstClr>
-                </a:solidFill>
-                <a:effectLst/>
-                <a:uLnTx/>
-                <a:uFillTx/>
-                <a:latin typeface="Helvetica Neue" panose="02000503000000020004" pitchFamily="2" charset="0"/>
-                <a:ea typeface="Helvetica Neue" panose="02000503000000020004" pitchFamily="2" charset="0"/>
-                <a:cs typeface="Helvetica Neue" panose="02000503000000020004" pitchFamily="2" charset="0"/>
-              </a:rPr>
-              <a:t>J Mark Morris</a:t>
-            </a:r>
-          </a:p>
-        </p:txBody>
-      </p:sp>
-      <p:sp>
-        <p:nvSpPr>
-          <p:cNvPr id="19" name="Rectangle 18">
-            <a:extLst>
-              <a:ext uri="{FF2B5EF4-FFF2-40B4-BE49-F238E27FC236}">
-                <a16:creationId xmlns:a16="http://schemas.microsoft.com/office/drawing/2014/main" id="{0211C0BE-6F40-CD61-1A26-331851C6FBC0}"/>
-              </a:ext>
-            </a:extLst>
-          </p:cNvPr>
-          <p:cNvSpPr/>
-          <p:nvPr/>
-        </p:nvSpPr>
-        <p:spPr>
-          <a:xfrm>
-            <a:off x="18117" y="207788"/>
-            <a:ext cx="12155828" cy="523220"/>
-          </a:xfrm>
-          <a:prstGeom prst="rect">
-            <a:avLst/>
-          </a:prstGeom>
-          <a:noFill/>
-        </p:spPr>
-        <p:txBody>
-          <a:bodyPr wrap="none">
-            <a:spAutoFit/>
-          </a:bodyPr>
-          <a:lstStyle/>
-          <a:p>
-            <a:pPr marL="0" marR="0" lvl="0" indent="0" algn="ctr" defTabSz="914400" rtl="0" eaLnBrk="1" fontAlgn="auto" latinLnBrk="0" hangingPunct="1">
-              <a:lnSpc>
-                <a:spcPct val="100000"/>
-              </a:lnSpc>
-              <a:spcBef>
-                <a:spcPts val="0"/>
-              </a:spcBef>
-              <a:spcAft>
-                <a:spcPts val="0"/>
-              </a:spcAft>
-              <a:buClrTx/>
-              <a:buSzTx/>
-              <a:buFontTx/>
-              <a:buNone/>
-              <a:tabLst/>
-              <a:defRPr/>
-            </a:pPr>
-            <a:r>
-              <a:rPr kumimoji="0" lang="en-US" sz="2800" b="1" i="0" u="none" strike="noStrike" kern="1200" cap="none" spc="0" normalizeH="0" baseline="0" noProof="0" dirty="0">
-                <a:ln>
-                  <a:noFill/>
-                </a:ln>
-                <a:solidFill>
-                  <a:prstClr val="white"/>
-                </a:solidFill>
-                <a:effectLst/>
-                <a:uLnTx/>
-                <a:uFillTx/>
-                <a:latin typeface="Helvetica Neue" panose="02000503000000020004" pitchFamily="2" charset="0"/>
-                <a:ea typeface="Helvetica Neue" panose="02000503000000020004" pitchFamily="2" charset="0"/>
-                <a:cs typeface="Helvetica Neue" panose="02000503000000020004" pitchFamily="2" charset="0"/>
-              </a:rPr>
-              <a:t>RNA Molecular Assemblies Range from 4728 to 6372 Point Potentials </a:t>
-            </a:r>
-          </a:p>
-        </p:txBody>
-      </p:sp>
-      <p:sp>
-        <p:nvSpPr>
-          <p:cNvPr id="2" name="TextBox 1">
-            <a:extLst>
-              <a:ext uri="{FF2B5EF4-FFF2-40B4-BE49-F238E27FC236}">
-                <a16:creationId xmlns:a16="http://schemas.microsoft.com/office/drawing/2014/main" id="{FBB0DF08-2107-122C-3F4F-9D80D91823FB}"/>
-              </a:ext>
-            </a:extLst>
-          </p:cNvPr>
-          <p:cNvSpPr txBox="1"/>
-          <p:nvPr/>
-        </p:nvSpPr>
-        <p:spPr>
-          <a:xfrm>
-            <a:off x="496669" y="751344"/>
-            <a:ext cx="11569841" cy="2677656"/>
-          </a:xfrm>
-          <a:prstGeom prst="rect">
-            <a:avLst/>
-          </a:prstGeom>
-          <a:noFill/>
-        </p:spPr>
-        <p:txBody>
-          <a:bodyPr wrap="square" rtlCol="0">
-            <a:spAutoFit/>
-          </a:bodyPr>
-          <a:lstStyle/>
-          <a:p>
-            <a:pPr marL="457200" marR="0" lvl="0" indent="-457200" algn="l" defTabSz="914400" rtl="0" eaLnBrk="1" fontAlgn="auto" latinLnBrk="0" hangingPunct="1">
-              <a:lnSpc>
-                <a:spcPct val="100000"/>
-              </a:lnSpc>
-              <a:spcBef>
-                <a:spcPts val="0"/>
-              </a:spcBef>
-              <a:spcAft>
-                <a:spcPts val="0"/>
-              </a:spcAft>
-              <a:buClrTx/>
-              <a:buSzTx/>
-              <a:buFont typeface="Arial" panose="020B0604020202020204" pitchFamily="34" charset="0"/>
-              <a:buChar char="•"/>
-              <a:tabLst/>
-              <a:defRPr/>
-            </a:pPr>
-            <a:r>
-              <a:rPr kumimoji="0" lang="en-US" sz="2400" b="0" i="0" u="none" strike="noStrike" kern="1200" cap="none" spc="0" normalizeH="0" baseline="0" noProof="0" dirty="0">
-                <a:ln>
-                  <a:noFill/>
-                </a:ln>
-                <a:solidFill>
-                  <a:prstClr val="white"/>
-                </a:solidFill>
-                <a:effectLst/>
-                <a:uLnTx/>
-                <a:uFillTx/>
-                <a:latin typeface="Helvetica Neue" panose="02000503000000020004" pitchFamily="2" charset="0"/>
-                <a:ea typeface="Helvetica Neue" panose="02000503000000020004" pitchFamily="2" charset="0"/>
-                <a:cs typeface="Helvetica Neue" panose="02000503000000020004" pitchFamily="2" charset="0"/>
-              </a:rPr>
-              <a:t>RNA (ribonucleic acid) molecules are essential for various biological functions, including the processes of protein synthesis and gene regulation. </a:t>
-            </a:r>
-          </a:p>
-          <a:p>
-            <a:pPr marL="457200" marR="0" lvl="0" indent="-457200" algn="l" defTabSz="914400" rtl="0" eaLnBrk="1" fontAlgn="auto" latinLnBrk="0" hangingPunct="1">
-              <a:lnSpc>
-                <a:spcPct val="100000"/>
-              </a:lnSpc>
-              <a:spcBef>
-                <a:spcPts val="0"/>
-              </a:spcBef>
-              <a:spcAft>
-                <a:spcPts val="0"/>
-              </a:spcAft>
-              <a:buClrTx/>
-              <a:buSzTx/>
-              <a:buFont typeface="Arial" panose="020B0604020202020204" pitchFamily="34" charset="0"/>
-              <a:buChar char="•"/>
-              <a:tabLst/>
-              <a:defRPr/>
-            </a:pPr>
-            <a:r>
-              <a:rPr kumimoji="0" lang="en-US" sz="2400" b="0" i="0" u="none" strike="noStrike" kern="1200" cap="none" spc="0" normalizeH="0" baseline="0" noProof="0" dirty="0">
-                <a:ln>
-                  <a:noFill/>
-                </a:ln>
-                <a:solidFill>
-                  <a:prstClr val="white"/>
-                </a:solidFill>
-                <a:effectLst/>
-                <a:uLnTx/>
-                <a:uFillTx/>
-                <a:latin typeface="Helvetica Neue" panose="02000503000000020004" pitchFamily="2" charset="0"/>
-                <a:ea typeface="Helvetica Neue" panose="02000503000000020004" pitchFamily="2" charset="0"/>
-                <a:cs typeface="Helvetica Neue" panose="02000503000000020004" pitchFamily="2" charset="0"/>
-              </a:rPr>
-              <a:t>Structure: RNA is typically single-stranded, whereas DNA is double-stranded. </a:t>
-            </a:r>
-          </a:p>
-          <a:p>
-            <a:pPr marL="457200" marR="0" lvl="0" indent="-457200" algn="l" defTabSz="914400" rtl="0" eaLnBrk="1" fontAlgn="auto" latinLnBrk="0" hangingPunct="1">
-              <a:lnSpc>
-                <a:spcPct val="100000"/>
-              </a:lnSpc>
-              <a:spcBef>
-                <a:spcPts val="0"/>
-              </a:spcBef>
-              <a:spcAft>
-                <a:spcPts val="0"/>
-              </a:spcAft>
-              <a:buClrTx/>
-              <a:buSzTx/>
-              <a:buFont typeface="Arial" panose="020B0604020202020204" pitchFamily="34" charset="0"/>
-              <a:buChar char="•"/>
-              <a:tabLst/>
-              <a:defRPr/>
-            </a:pPr>
-            <a:r>
-              <a:rPr kumimoji="0" lang="en-US" sz="2400" b="0" i="0" u="none" strike="noStrike" kern="1200" cap="none" spc="0" normalizeH="0" baseline="0" noProof="0" dirty="0">
-                <a:ln>
-                  <a:noFill/>
-                </a:ln>
-                <a:solidFill>
-                  <a:prstClr val="white"/>
-                </a:solidFill>
-                <a:effectLst/>
-                <a:uLnTx/>
-                <a:uFillTx/>
-                <a:latin typeface="Helvetica Neue" panose="02000503000000020004" pitchFamily="2" charset="0"/>
-                <a:ea typeface="Helvetica Neue" panose="02000503000000020004" pitchFamily="2" charset="0"/>
-                <a:cs typeface="Helvetica Neue" panose="02000503000000020004" pitchFamily="2" charset="0"/>
-              </a:rPr>
-              <a:t>RNA has a backbone made of ribose sugar, while DNA has deoxyribose.</a:t>
-            </a:r>
-          </a:p>
-          <a:p>
-            <a:pPr marL="0" marR="0" lvl="0" indent="0" algn="l" defTabSz="914400" rtl="0" eaLnBrk="1" fontAlgn="auto" latinLnBrk="0" hangingPunct="1">
-              <a:lnSpc>
-                <a:spcPct val="100000"/>
-              </a:lnSpc>
-              <a:spcBef>
-                <a:spcPts val="0"/>
-              </a:spcBef>
-              <a:spcAft>
-                <a:spcPts val="0"/>
-              </a:spcAft>
-              <a:buClrTx/>
-              <a:buSzTx/>
-              <a:buFontTx/>
-              <a:buNone/>
-              <a:tabLst/>
-              <a:defRPr/>
-            </a:pPr>
-            <a:endParaRPr kumimoji="0" lang="en-US" sz="2400" b="0" i="0" u="none" strike="noStrike" kern="1200" cap="none" spc="0" normalizeH="0" baseline="0" noProof="0" dirty="0">
-              <a:ln>
-                <a:noFill/>
-              </a:ln>
-              <a:solidFill>
-                <a:prstClr val="white"/>
-              </a:solidFill>
-              <a:effectLst/>
-              <a:uLnTx/>
-              <a:uFillTx/>
-              <a:latin typeface="Helvetica Neue" panose="02000503000000020004" pitchFamily="2" charset="0"/>
-              <a:ea typeface="Helvetica Neue" panose="02000503000000020004" pitchFamily="2" charset="0"/>
-              <a:cs typeface="Helvetica Neue" panose="02000503000000020004" pitchFamily="2" charset="0"/>
-            </a:endParaRPr>
-          </a:p>
-          <a:p>
-            <a:pPr marL="457200" marR="0" lvl="0" indent="-457200" algn="l" defTabSz="914400" rtl="0" eaLnBrk="1" fontAlgn="auto" latinLnBrk="0" hangingPunct="1">
-              <a:lnSpc>
-                <a:spcPct val="100000"/>
-              </a:lnSpc>
-              <a:spcBef>
-                <a:spcPts val="0"/>
-              </a:spcBef>
-              <a:spcAft>
-                <a:spcPts val="0"/>
-              </a:spcAft>
-              <a:buClrTx/>
-              <a:buSzTx/>
-              <a:buFont typeface="Arial" panose="020B0604020202020204" pitchFamily="34" charset="0"/>
-              <a:buChar char="•"/>
-              <a:tabLst/>
-              <a:defRPr/>
-            </a:pPr>
-            <a:endParaRPr kumimoji="0" lang="en-US" sz="2400" b="0" i="0" u="none" strike="noStrike" kern="1200" cap="none" spc="0" normalizeH="0" baseline="0" noProof="0" dirty="0">
-              <a:ln>
-                <a:noFill/>
-              </a:ln>
-              <a:solidFill>
-                <a:prstClr val="white"/>
-              </a:solidFill>
-              <a:effectLst/>
-              <a:uLnTx/>
-              <a:uFillTx/>
-              <a:latin typeface="Helvetica Neue" panose="02000503000000020004" pitchFamily="2" charset="0"/>
-              <a:ea typeface="Helvetica Neue" panose="02000503000000020004" pitchFamily="2" charset="0"/>
-              <a:cs typeface="Helvetica Neue" panose="02000503000000020004" pitchFamily="2" charset="0"/>
-            </a:endParaRPr>
-          </a:p>
-          <a:p>
-            <a:pPr marL="457200" marR="0" lvl="0" indent="-457200" algn="l" defTabSz="914400" rtl="0" eaLnBrk="1" fontAlgn="auto" latinLnBrk="0" hangingPunct="1">
-              <a:lnSpc>
-                <a:spcPct val="100000"/>
-              </a:lnSpc>
-              <a:spcBef>
-                <a:spcPts val="0"/>
-              </a:spcBef>
-              <a:spcAft>
-                <a:spcPts val="0"/>
-              </a:spcAft>
-              <a:buClrTx/>
-              <a:buSzTx/>
-              <a:buFont typeface="Arial" panose="020B0604020202020204" pitchFamily="34" charset="0"/>
-              <a:buChar char="•"/>
-              <a:tabLst/>
-              <a:defRPr/>
-            </a:pPr>
-            <a:endParaRPr kumimoji="0" lang="en-US" sz="2400" b="0" i="0" u="none" strike="noStrike" kern="1200" cap="none" spc="0" normalizeH="0" baseline="0" noProof="0" dirty="0">
-              <a:ln>
-                <a:noFill/>
-              </a:ln>
-              <a:solidFill>
-                <a:prstClr val="white"/>
-              </a:solidFill>
-              <a:effectLst/>
-              <a:uLnTx/>
-              <a:uFillTx/>
-              <a:latin typeface="Helvetica Neue" panose="02000503000000020004" pitchFamily="2" charset="0"/>
-              <a:ea typeface="Helvetica Neue" panose="02000503000000020004" pitchFamily="2" charset="0"/>
-              <a:cs typeface="Helvetica Neue" panose="02000503000000020004" pitchFamily="2" charset="0"/>
-            </a:endParaRPr>
-          </a:p>
-        </p:txBody>
-      </p:sp>
-      <p:pic>
-        <p:nvPicPr>
-          <p:cNvPr id="6" name="Picture 5">
-            <a:extLst>
-              <a:ext uri="{FF2B5EF4-FFF2-40B4-BE49-F238E27FC236}">
-                <a16:creationId xmlns:a16="http://schemas.microsoft.com/office/drawing/2014/main" id="{0C8B13EF-A2CF-EB1F-6D45-ABABB115EAF9}"/>
-              </a:ext>
-            </a:extLst>
-          </p:cNvPr>
-          <p:cNvPicPr>
-            <a:picLocks noChangeAspect="1"/>
-          </p:cNvPicPr>
-          <p:nvPr/>
-        </p:nvPicPr>
-        <p:blipFill>
-          <a:blip r:embed="rId2"/>
-          <a:stretch>
-            <a:fillRect/>
-          </a:stretch>
-        </p:blipFill>
-        <p:spPr>
-          <a:xfrm>
-            <a:off x="811923" y="2470249"/>
-            <a:ext cx="10623257" cy="4022626"/>
-          </a:xfrm>
-          <a:prstGeom prst="rect">
-            <a:avLst/>
-          </a:prstGeom>
-        </p:spPr>
-      </p:pic>
-    </p:spTree>
-    <p:extLst>
-      <p:ext uri="{BB962C8B-B14F-4D97-AF65-F5344CB8AC3E}">
-        <p14:creationId xmlns:p14="http://schemas.microsoft.com/office/powerpoint/2010/main" val="2951717672"/>
-      </p:ext>
-    </p:extLst>
-  </p:cSld>
-  <p:clrMapOvr>
-    <a:masterClrMapping/>
-  </p:clrMapOvr>
-</p:sld>
-</file>
-
-<file path=ppt/slides/slide6.xml><?xml version="1.0" encoding="utf-8"?>
-<p:sld xmlns:a="http://schemas.openxmlformats.org/drawingml/2006/main" xmlns:r="http://schemas.openxmlformats.org/officeDocument/2006/relationships" xmlns:p="http://schemas.openxmlformats.org/presentationml/2006/main">
-  <p:cSld>
-    <p:bg>
-      <p:bgPr>
-        <a:solidFill>
-          <a:srgbClr val="7030A0"/>
-        </a:solidFill>
-        <a:effectLst/>
-      </p:bgPr>
-    </p:bg>
-    <p:spTree>
-      <p:nvGrpSpPr>
-        <p:cNvPr id="1" name="">
-          <a:extLst>
-            <a:ext uri="{FF2B5EF4-FFF2-40B4-BE49-F238E27FC236}">
-              <a16:creationId xmlns:a16="http://schemas.microsoft.com/office/drawing/2014/main" id="{A95AD505-148F-7C13-EC73-22518E14F4FC}"/>
-            </a:ext>
-          </a:extLst>
-        </p:cNvPr>
-        <p:cNvGrpSpPr/>
-        <p:nvPr/>
-      </p:nvGrpSpPr>
-      <p:grpSpPr>
-        <a:xfrm>
-          <a:off x="0" y="0"/>
-          <a:ext cx="0" cy="0"/>
-          <a:chOff x="0" y="0"/>
-          <a:chExt cx="0" cy="0"/>
-        </a:xfrm>
-      </p:grpSpPr>
-      <p:sp>
-        <p:nvSpPr>
-          <p:cNvPr id="2" name="TextBox 1">
-            <a:extLst>
-              <a:ext uri="{FF2B5EF4-FFF2-40B4-BE49-F238E27FC236}">
-                <a16:creationId xmlns:a16="http://schemas.microsoft.com/office/drawing/2014/main" id="{B3C53938-22FE-22BD-E59A-97F76192783B}"/>
-              </a:ext>
-            </a:extLst>
-          </p:cNvPr>
-          <p:cNvSpPr txBox="1"/>
-          <p:nvPr/>
-        </p:nvSpPr>
-        <p:spPr>
-          <a:xfrm>
-            <a:off x="0" y="186247"/>
-            <a:ext cx="12191999" cy="5364610"/>
-          </a:xfrm>
-          <a:prstGeom prst="rect">
-            <a:avLst/>
-          </a:prstGeom>
-          <a:noFill/>
-        </p:spPr>
-        <p:txBody>
-          <a:bodyPr wrap="square" rtlCol="0">
-            <a:spAutoFit/>
-          </a:bodyPr>
-          <a:lstStyle/>
-          <a:p>
-            <a:pPr marL="0" marR="0" lvl="0" indent="0" algn="ctr" defTabSz="914400" rtl="0" eaLnBrk="1" fontAlgn="auto" latinLnBrk="0" hangingPunct="1">
-              <a:lnSpc>
-                <a:spcPts val="11000"/>
-              </a:lnSpc>
-              <a:spcBef>
-                <a:spcPts val="0"/>
-              </a:spcBef>
-              <a:spcAft>
-                <a:spcPts val="0"/>
-              </a:spcAft>
-              <a:buClrTx/>
-              <a:buSzTx/>
-              <a:buFontTx/>
-              <a:buNone/>
-              <a:tabLst/>
-              <a:defRPr/>
-            </a:pPr>
-            <a:r>
-              <a:rPr kumimoji="0" lang="en-US" sz="11500" b="0" i="0" u="none" strike="noStrike" kern="1200" cap="none" spc="0" normalizeH="0" baseline="0" noProof="0" dirty="0">
-                <a:ln>
-                  <a:noFill/>
-                </a:ln>
-                <a:solidFill>
-                  <a:prstClr val="white"/>
-                </a:solidFill>
-                <a:effectLst/>
-                <a:uLnTx/>
-                <a:uFillTx/>
-                <a:latin typeface="Helvetica Neue UltraLight" panose="02000206000000020004" pitchFamily="2" charset="0"/>
-                <a:ea typeface="Helvetica Neue UltraLight" panose="02000206000000020004" pitchFamily="2" charset="0"/>
-                <a:cs typeface="Helvetica Neue" panose="02000503000000020004" pitchFamily="2" charset="0"/>
-              </a:rPr>
-              <a:t>neoclassical.ai</a:t>
-            </a:r>
-          </a:p>
-          <a:p>
-            <a:pPr marL="0" marR="0" lvl="0" indent="0" algn="ctr" defTabSz="914400" rtl="0" eaLnBrk="1" fontAlgn="auto" latinLnBrk="0" hangingPunct="1">
-              <a:lnSpc>
-                <a:spcPts val="10000"/>
-              </a:lnSpc>
-              <a:spcBef>
-                <a:spcPts val="0"/>
-              </a:spcBef>
-              <a:spcAft>
-                <a:spcPts val="0"/>
-              </a:spcAft>
-              <a:buClrTx/>
-              <a:buSzTx/>
-              <a:buFontTx/>
-              <a:buNone/>
-              <a:tabLst/>
-              <a:defRPr/>
-            </a:pPr>
-            <a:r>
-              <a:rPr kumimoji="0" lang="en-US" sz="11500" b="1" i="0" u="none" strike="noStrike" kern="1200" cap="none" spc="0" normalizeH="0" baseline="0" noProof="0" dirty="0">
-                <a:ln>
-                  <a:noFill/>
-                </a:ln>
-                <a:solidFill>
-                  <a:srgbClr val="FFC000"/>
-                </a:solidFill>
-                <a:effectLst/>
-                <a:uLnTx/>
-                <a:uFillTx/>
-                <a:latin typeface="Helvetica Neue Condensed Black" panose="02000503000000020004" pitchFamily="2" charset="0"/>
-                <a:ea typeface="Helvetica Neue Condensed Black" panose="02000503000000020004" pitchFamily="2" charset="0"/>
-                <a:cs typeface="Helvetica Neue Condensed Black" panose="02000503000000020004" pitchFamily="2" charset="0"/>
-              </a:rPr>
-              <a:t>What Life Form </a:t>
-            </a:r>
-            <a:br>
-              <a:rPr kumimoji="0" lang="en-US" sz="11500" b="1" i="0" u="none" strike="noStrike" kern="1200" cap="none" spc="0" normalizeH="0" baseline="0" noProof="0" dirty="0">
-                <a:ln>
-                  <a:noFill/>
-                </a:ln>
-                <a:solidFill>
-                  <a:srgbClr val="FFC000"/>
-                </a:solidFill>
-                <a:effectLst/>
-                <a:uLnTx/>
-                <a:uFillTx/>
-                <a:latin typeface="Helvetica Neue Condensed Black" panose="02000503000000020004" pitchFamily="2" charset="0"/>
-                <a:ea typeface="Helvetica Neue Condensed Black" panose="02000503000000020004" pitchFamily="2" charset="0"/>
-                <a:cs typeface="Helvetica Neue Condensed Black" panose="02000503000000020004" pitchFamily="2" charset="0"/>
-              </a:rPr>
-            </a:br>
-            <a:r>
-              <a:rPr kumimoji="0" lang="en-US" sz="11500" b="1" i="0" u="none" strike="noStrike" kern="1200" cap="none" spc="0" normalizeH="0" baseline="0" noProof="0" dirty="0">
-                <a:ln>
-                  <a:noFill/>
-                </a:ln>
-                <a:solidFill>
-                  <a:srgbClr val="FFC000"/>
-                </a:solidFill>
-                <a:effectLst/>
-                <a:uLnTx/>
-                <a:uFillTx/>
-                <a:latin typeface="Helvetica Neue Condensed Black" panose="02000503000000020004" pitchFamily="2" charset="0"/>
-                <a:ea typeface="Helvetica Neue Condensed Black" panose="02000503000000020004" pitchFamily="2" charset="0"/>
-                <a:cs typeface="Helvetica Neue Condensed Black" panose="02000503000000020004" pitchFamily="2" charset="0"/>
-              </a:rPr>
-              <a:t>has the Fewest </a:t>
-            </a:r>
-          </a:p>
-          <a:p>
-            <a:pPr marL="0" marR="0" lvl="0" indent="0" algn="ctr" defTabSz="914400" rtl="0" eaLnBrk="1" fontAlgn="auto" latinLnBrk="0" hangingPunct="1">
-              <a:lnSpc>
-                <a:spcPts val="10000"/>
-              </a:lnSpc>
-              <a:spcBef>
-                <a:spcPts val="0"/>
-              </a:spcBef>
-              <a:spcAft>
-                <a:spcPts val="0"/>
-              </a:spcAft>
-              <a:buClrTx/>
-              <a:buSzTx/>
-              <a:buFontTx/>
-              <a:buNone/>
-              <a:tabLst/>
-              <a:defRPr/>
-            </a:pPr>
-            <a:r>
-              <a:rPr kumimoji="0" lang="en-US" sz="11500" b="1" i="0" u="none" strike="noStrike" kern="1200" cap="none" spc="0" normalizeH="0" baseline="0" noProof="0" dirty="0">
-                <a:ln>
-                  <a:noFill/>
-                </a:ln>
-                <a:solidFill>
-                  <a:srgbClr val="FFC000"/>
-                </a:solidFill>
-                <a:effectLst/>
-                <a:uLnTx/>
-                <a:uFillTx/>
-                <a:latin typeface="Helvetica Neue Condensed Black" panose="02000503000000020004" pitchFamily="2" charset="0"/>
-                <a:ea typeface="Helvetica Neue Condensed Black" panose="02000503000000020004" pitchFamily="2" charset="0"/>
-                <a:cs typeface="Helvetica Neue Condensed Black" panose="02000503000000020004" pitchFamily="2" charset="0"/>
-              </a:rPr>
-              <a:t>Point Potentials?</a:t>
-            </a:r>
-            <a:endParaRPr kumimoji="0" lang="en-US" sz="11500" b="1" i="0" u="none" strike="noStrike" kern="1200" cap="none" spc="0" normalizeH="0" baseline="0" noProof="0" dirty="0">
-              <a:ln>
-                <a:noFill/>
-              </a:ln>
-              <a:solidFill>
-                <a:srgbClr val="FF8AD8"/>
-              </a:solidFill>
-              <a:effectLst/>
-              <a:uLnTx/>
-              <a:uFillTx/>
-              <a:latin typeface="Helvetica Neue Condensed Black" panose="02000503000000020004" pitchFamily="2" charset="0"/>
-              <a:ea typeface="Helvetica Neue Condensed Black" panose="02000503000000020004" pitchFamily="2" charset="0"/>
-              <a:cs typeface="Helvetica Neue Condensed Black" panose="02000503000000020004" pitchFamily="2" charset="0"/>
-            </a:endParaRPr>
-          </a:p>
-        </p:txBody>
-      </p:sp>
-    </p:spTree>
-    <p:extLst>
-      <p:ext uri="{BB962C8B-B14F-4D97-AF65-F5344CB8AC3E}">
-        <p14:creationId xmlns:p14="http://schemas.microsoft.com/office/powerpoint/2010/main" val="3311713244"/>
-      </p:ext>
-    </p:extLst>
-  </p:cSld>
-  <p:clrMapOvr>
-    <a:masterClrMapping/>
-  </p:clrMapOvr>
-</p:sld>
-</file>
-
-<file path=ppt/slides/slide7.xml><?xml version="1.0" encoding="utf-8"?>
-<p:sld xmlns:a="http://schemas.openxmlformats.org/drawingml/2006/main" xmlns:r="http://schemas.openxmlformats.org/officeDocument/2006/relationships" xmlns:p="http://schemas.openxmlformats.org/presentationml/2006/main">
-  <p:cSld>
-    <p:bg>
-      <p:bgPr>
-        <a:solidFill>
-          <a:srgbClr val="7030A0"/>
-        </a:solidFill>
-        <a:effectLst/>
-      </p:bgPr>
-    </p:bg>
-    <p:spTree>
-      <p:nvGrpSpPr>
-        <p:cNvPr id="1" name="">
-          <a:extLst>
-            <a:ext uri="{FF2B5EF4-FFF2-40B4-BE49-F238E27FC236}">
-              <a16:creationId xmlns:a16="http://schemas.microsoft.com/office/drawing/2014/main" id="{1AD597FF-D28F-5D03-23C3-487A5055B276}"/>
-            </a:ext>
-          </a:extLst>
-        </p:cNvPr>
-        <p:cNvGrpSpPr/>
-        <p:nvPr/>
-      </p:nvGrpSpPr>
-      <p:grpSpPr>
-        <a:xfrm>
-          <a:off x="0" y="0"/>
-          <a:ext cx="0" cy="0"/>
-          <a:chOff x="0" y="0"/>
-          <a:chExt cx="0" cy="0"/>
-        </a:xfrm>
-      </p:grpSpPr>
-      <p:sp>
-        <p:nvSpPr>
-          <p:cNvPr id="2" name="TextBox 1">
-            <a:extLst>
-              <a:ext uri="{FF2B5EF4-FFF2-40B4-BE49-F238E27FC236}">
-                <a16:creationId xmlns:a16="http://schemas.microsoft.com/office/drawing/2014/main" id="{EF399C73-254D-2680-85FF-BA641B75BD19}"/>
-              </a:ext>
-            </a:extLst>
-          </p:cNvPr>
-          <p:cNvSpPr txBox="1"/>
-          <p:nvPr/>
-        </p:nvSpPr>
-        <p:spPr>
-          <a:xfrm>
-            <a:off x="0" y="358254"/>
-            <a:ext cx="12191999" cy="4082208"/>
-          </a:xfrm>
-          <a:prstGeom prst="rect">
-            <a:avLst/>
-          </a:prstGeom>
-          <a:noFill/>
-        </p:spPr>
-        <p:txBody>
-          <a:bodyPr wrap="square" rtlCol="0">
-            <a:spAutoFit/>
-          </a:bodyPr>
-          <a:lstStyle/>
-          <a:p>
-            <a:pPr marL="0" marR="0" lvl="0" indent="0" algn="ctr" defTabSz="914400" rtl="0" eaLnBrk="1" fontAlgn="auto" latinLnBrk="0" hangingPunct="1">
-              <a:lnSpc>
-                <a:spcPts val="11000"/>
-              </a:lnSpc>
-              <a:spcBef>
-                <a:spcPts val="0"/>
-              </a:spcBef>
-              <a:spcAft>
-                <a:spcPts val="0"/>
-              </a:spcAft>
-              <a:buClrTx/>
-              <a:buSzTx/>
-              <a:buFontTx/>
-              <a:buNone/>
-              <a:tabLst/>
-              <a:defRPr/>
-            </a:pPr>
-            <a:r>
-              <a:rPr kumimoji="0" lang="en-US" sz="11500" b="0" i="0" u="none" strike="noStrike" kern="1200" cap="none" spc="0" normalizeH="0" baseline="0" noProof="0" dirty="0">
-                <a:ln>
-                  <a:noFill/>
-                </a:ln>
-                <a:solidFill>
-                  <a:prstClr val="white"/>
-                </a:solidFill>
-                <a:effectLst/>
-                <a:uLnTx/>
-                <a:uFillTx/>
-                <a:latin typeface="Helvetica Neue UltraLight" panose="02000206000000020004" pitchFamily="2" charset="0"/>
-                <a:ea typeface="Helvetica Neue UltraLight" panose="02000206000000020004" pitchFamily="2" charset="0"/>
-                <a:cs typeface="Helvetica Neue" panose="02000503000000020004" pitchFamily="2" charset="0"/>
-              </a:rPr>
-              <a:t>neoclassical.ai</a:t>
-            </a:r>
-          </a:p>
-          <a:p>
-            <a:pPr algn="ctr">
-              <a:lnSpc>
-                <a:spcPts val="10000"/>
-              </a:lnSpc>
-              <a:defRPr/>
-            </a:pPr>
-            <a:r>
-              <a:rPr kumimoji="0" lang="en-US" sz="11500" b="1" i="0" u="none" strike="noStrike" kern="1200" cap="none" spc="0" normalizeH="0" baseline="0" noProof="0" dirty="0" err="1">
-                <a:ln>
-                  <a:noFill/>
-                </a:ln>
-                <a:solidFill>
-                  <a:srgbClr val="FFC000"/>
-                </a:solidFill>
-                <a:effectLst/>
-                <a:uLnTx/>
-                <a:uFillTx/>
-                <a:latin typeface="Helvetica Neue Condensed Black" panose="02000503000000020004" pitchFamily="2" charset="0"/>
-                <a:ea typeface="Helvetica Neue Condensed Black" panose="02000503000000020004" pitchFamily="2" charset="0"/>
-                <a:cs typeface="Helvetica Neue Condensed Black" panose="02000503000000020004" pitchFamily="2" charset="0"/>
-              </a:rPr>
-              <a:t>Nanoarchaeum</a:t>
-            </a:r>
-            <a:r>
-              <a:rPr kumimoji="0" lang="en-US" sz="11500" b="1" i="0" u="none" strike="noStrike" kern="1200" cap="none" spc="0" normalizeH="0" baseline="0" noProof="0" dirty="0">
-                <a:ln>
-                  <a:noFill/>
-                </a:ln>
-                <a:solidFill>
-                  <a:srgbClr val="FFC000"/>
-                </a:solidFill>
-                <a:effectLst/>
-                <a:uLnTx/>
-                <a:uFillTx/>
-                <a:latin typeface="Helvetica Neue Condensed Black" panose="02000503000000020004" pitchFamily="2" charset="0"/>
-                <a:ea typeface="Helvetica Neue Condensed Black" panose="02000503000000020004" pitchFamily="2" charset="0"/>
-                <a:cs typeface="Helvetica Neue Condensed Black" panose="02000503000000020004" pitchFamily="2" charset="0"/>
-              </a:rPr>
-              <a:t> </a:t>
-            </a:r>
-            <a:r>
-              <a:rPr kumimoji="0" lang="en-US" sz="11500" b="1" i="0" u="none" strike="noStrike" kern="1200" cap="none" spc="0" normalizeH="0" baseline="0" noProof="0" dirty="0" err="1">
-                <a:ln>
-                  <a:noFill/>
-                </a:ln>
-                <a:solidFill>
-                  <a:srgbClr val="FFC000"/>
-                </a:solidFill>
-                <a:effectLst/>
-                <a:uLnTx/>
-                <a:uFillTx/>
-                <a:latin typeface="Helvetica Neue Condensed Black" panose="02000503000000020004" pitchFamily="2" charset="0"/>
-                <a:ea typeface="Helvetica Neue Condensed Black" panose="02000503000000020004" pitchFamily="2" charset="0"/>
-                <a:cs typeface="Helvetica Neue Condensed Black" panose="02000503000000020004" pitchFamily="2" charset="0"/>
-              </a:rPr>
-              <a:t>equitans</a:t>
-            </a:r>
-            <a:endParaRPr kumimoji="0" lang="en-US" sz="11500" b="1" i="0" u="none" strike="noStrike" kern="1200" cap="none" spc="0" normalizeH="0" baseline="0" noProof="0" dirty="0">
-              <a:ln>
-                <a:noFill/>
-              </a:ln>
-              <a:solidFill>
-                <a:srgbClr val="FFC000"/>
-              </a:solidFill>
-              <a:effectLst/>
-              <a:uLnTx/>
-              <a:uFillTx/>
-              <a:latin typeface="Helvetica Neue Condensed Black" panose="02000503000000020004" pitchFamily="2" charset="0"/>
-              <a:ea typeface="Helvetica Neue Condensed Black" panose="02000503000000020004" pitchFamily="2" charset="0"/>
-              <a:cs typeface="Helvetica Neue Condensed Black" panose="02000503000000020004" pitchFamily="2" charset="0"/>
-            </a:endParaRPr>
-          </a:p>
-        </p:txBody>
-      </p:sp>
-    </p:spTree>
-    <p:extLst>
-      <p:ext uri="{BB962C8B-B14F-4D97-AF65-F5344CB8AC3E}">
-        <p14:creationId xmlns:p14="http://schemas.microsoft.com/office/powerpoint/2010/main" val="2701580067"/>
-      </p:ext>
-    </p:extLst>
-  </p:cSld>
-  <p:clrMapOvr>
-    <a:masterClrMapping/>
-  </p:clrMapOvr>
-</p:sld>
-</file>
-
-<file path=ppt/slides/slide8.xml><?xml version="1.0" encoding="utf-8"?>
-<p:sld xmlns:a="http://schemas.openxmlformats.org/drawingml/2006/main" xmlns:r="http://schemas.openxmlformats.org/officeDocument/2006/relationships" xmlns:p="http://schemas.openxmlformats.org/presentationml/2006/main">
-  <p:cSld>
-    <p:bg>
-      <p:bgPr>
-        <a:solidFill>
-          <a:srgbClr val="7030A0"/>
-        </a:solidFill>
-        <a:effectLst/>
-      </p:bgPr>
-    </p:bg>
-    <p:spTree>
-      <p:nvGrpSpPr>
-        <p:cNvPr id="1" name="">
-          <a:extLst>
-            <a:ext uri="{FF2B5EF4-FFF2-40B4-BE49-F238E27FC236}">
-              <a16:creationId xmlns:a16="http://schemas.microsoft.com/office/drawing/2014/main" id="{365CF149-638E-D4FE-A688-5F738F294DCE}"/>
-            </a:ext>
-          </a:extLst>
-        </p:cNvPr>
-        <p:cNvGrpSpPr/>
-        <p:nvPr/>
-      </p:nvGrpSpPr>
-      <p:grpSpPr>
-        <a:xfrm>
-          <a:off x="0" y="0"/>
-          <a:ext cx="0" cy="0"/>
-          <a:chOff x="0" y="0"/>
-          <a:chExt cx="0" cy="0"/>
-        </a:xfrm>
-      </p:grpSpPr>
-      <p:sp>
-        <p:nvSpPr>
-          <p:cNvPr id="2" name="TextBox 1">
-            <a:extLst>
-              <a:ext uri="{FF2B5EF4-FFF2-40B4-BE49-F238E27FC236}">
-                <a16:creationId xmlns:a16="http://schemas.microsoft.com/office/drawing/2014/main" id="{CA22E71C-3B43-3887-6804-C1009A7A1619}"/>
-              </a:ext>
-            </a:extLst>
-          </p:cNvPr>
-          <p:cNvSpPr txBox="1"/>
-          <p:nvPr/>
-        </p:nvSpPr>
-        <p:spPr>
-          <a:xfrm>
-            <a:off x="0" y="186247"/>
-            <a:ext cx="12191999" cy="1374735"/>
-          </a:xfrm>
-          <a:prstGeom prst="rect">
-            <a:avLst/>
-          </a:prstGeom>
-          <a:noFill/>
-        </p:spPr>
-        <p:txBody>
-          <a:bodyPr wrap="square" rtlCol="0">
-            <a:spAutoFit/>
-          </a:bodyPr>
-          <a:lstStyle/>
-          <a:p>
-            <a:pPr algn="ctr">
-              <a:lnSpc>
-                <a:spcPts val="10000"/>
-              </a:lnSpc>
-              <a:defRPr/>
-            </a:pPr>
-            <a:r>
-              <a:rPr kumimoji="0" lang="en-US" sz="8800" b="1" i="0" u="none" strike="noStrike" kern="1200" cap="none" spc="0" normalizeH="0" baseline="0" noProof="0" dirty="0" err="1">
-                <a:ln>
-                  <a:noFill/>
-                </a:ln>
-                <a:solidFill>
-                  <a:srgbClr val="FFC000"/>
-                </a:solidFill>
-                <a:effectLst/>
-                <a:uLnTx/>
-                <a:uFillTx/>
-                <a:latin typeface="Helvetica Neue Condensed Black" panose="02000503000000020004" pitchFamily="2" charset="0"/>
-                <a:ea typeface="Helvetica Neue Condensed Black" panose="02000503000000020004" pitchFamily="2" charset="0"/>
-                <a:cs typeface="Helvetica Neue Condensed Black" panose="02000503000000020004" pitchFamily="2" charset="0"/>
-              </a:rPr>
-              <a:t>Nanoarchaeum</a:t>
-            </a:r>
-            <a:r>
-              <a:rPr kumimoji="0" lang="en-US" sz="8800" b="1" i="0" u="none" strike="noStrike" kern="1200" cap="none" spc="0" normalizeH="0" baseline="0" noProof="0" dirty="0">
-                <a:ln>
-                  <a:noFill/>
-                </a:ln>
-                <a:solidFill>
-                  <a:srgbClr val="FFC000"/>
-                </a:solidFill>
-                <a:effectLst/>
-                <a:uLnTx/>
-                <a:uFillTx/>
-                <a:latin typeface="Helvetica Neue Condensed Black" panose="02000503000000020004" pitchFamily="2" charset="0"/>
-                <a:ea typeface="Helvetica Neue Condensed Black" panose="02000503000000020004" pitchFamily="2" charset="0"/>
-                <a:cs typeface="Helvetica Neue Condensed Black" panose="02000503000000020004" pitchFamily="2" charset="0"/>
-              </a:rPr>
-              <a:t> </a:t>
-            </a:r>
-            <a:r>
-              <a:rPr kumimoji="0" lang="en-US" sz="8800" b="1" i="0" u="none" strike="noStrike" kern="1200" cap="none" spc="0" normalizeH="0" baseline="0" noProof="0" dirty="0" err="1">
-                <a:ln>
-                  <a:noFill/>
-                </a:ln>
-                <a:solidFill>
-                  <a:srgbClr val="FFC000"/>
-                </a:solidFill>
-                <a:effectLst/>
-                <a:uLnTx/>
-                <a:uFillTx/>
-                <a:latin typeface="Helvetica Neue Condensed Black" panose="02000503000000020004" pitchFamily="2" charset="0"/>
-                <a:ea typeface="Helvetica Neue Condensed Black" panose="02000503000000020004" pitchFamily="2" charset="0"/>
-                <a:cs typeface="Helvetica Neue Condensed Black" panose="02000503000000020004" pitchFamily="2" charset="0"/>
-              </a:rPr>
-              <a:t>equitans</a:t>
-            </a:r>
-            <a:endParaRPr kumimoji="0" lang="en-US" sz="8800" b="1" i="0" u="none" strike="noStrike" kern="1200" cap="none" spc="0" normalizeH="0" baseline="0" noProof="0" dirty="0">
-              <a:ln>
-                <a:noFill/>
-              </a:ln>
-              <a:solidFill>
-                <a:srgbClr val="FFC000"/>
-              </a:solidFill>
-              <a:effectLst/>
-              <a:uLnTx/>
-              <a:uFillTx/>
-              <a:latin typeface="Helvetica Neue Condensed Black" panose="02000503000000020004" pitchFamily="2" charset="0"/>
-              <a:ea typeface="Helvetica Neue Condensed Black" panose="02000503000000020004" pitchFamily="2" charset="0"/>
-              <a:cs typeface="Helvetica Neue Condensed Black" panose="02000503000000020004" pitchFamily="2" charset="0"/>
-            </a:endParaRPr>
-          </a:p>
-        </p:txBody>
-      </p:sp>
-      <p:sp>
-        <p:nvSpPr>
-          <p:cNvPr id="5" name="TextBox 4">
-            <a:extLst>
-              <a:ext uri="{FF2B5EF4-FFF2-40B4-BE49-F238E27FC236}">
-                <a16:creationId xmlns:a16="http://schemas.microsoft.com/office/drawing/2014/main" id="{9FD60923-3051-E75C-EBA1-5F01B55BA37A}"/>
-              </a:ext>
-            </a:extLst>
-          </p:cNvPr>
-          <p:cNvSpPr txBox="1"/>
-          <p:nvPr/>
-        </p:nvSpPr>
-        <p:spPr>
-          <a:xfrm>
-            <a:off x="0" y="1568935"/>
-            <a:ext cx="12191999" cy="4816234"/>
-          </a:xfrm>
-          <a:prstGeom prst="rect">
-            <a:avLst/>
-          </a:prstGeom>
-          <a:noFill/>
-        </p:spPr>
-        <p:txBody>
-          <a:bodyPr wrap="square" rtlCol="0">
-            <a:noAutofit/>
-          </a:bodyPr>
-          <a:lstStyle/>
-          <a:p>
-            <a:pPr marL="285750" indent="-285750">
-              <a:buFont typeface="Arial" panose="020B0604020202020204" pitchFamily="34" charset="0"/>
-              <a:buChar char="•"/>
-              <a:defRPr/>
-            </a:pPr>
-            <a:endParaRPr kumimoji="0" lang="en-US" sz="2000" b="0" u="none" strike="noStrike" kern="1200" cap="none" spc="0" normalizeH="0" baseline="0" noProof="0" dirty="0">
-              <a:ln>
-                <a:noFill/>
-              </a:ln>
-              <a:solidFill>
-                <a:schemeClr val="bg1"/>
-              </a:solidFill>
-              <a:effectLst/>
-              <a:uLnTx/>
-              <a:uFillTx/>
-              <a:latin typeface="Helvetica Neue" panose="02000503000000020004" pitchFamily="2" charset="0"/>
-              <a:ea typeface="Helvetica Neue" panose="02000503000000020004" pitchFamily="2" charset="0"/>
-              <a:cs typeface="Helvetica Neue" panose="02000503000000020004" pitchFamily="2" charset="0"/>
-            </a:endParaRPr>
-          </a:p>
-          <a:p>
-            <a:pPr marL="742950" lvl="1" indent="-285750">
-              <a:buFont typeface="Arial" panose="020B0604020202020204" pitchFamily="34" charset="0"/>
-              <a:buChar char="•"/>
-              <a:defRPr/>
-            </a:pPr>
-            <a:r>
-              <a:rPr lang="en-US" sz="2000" b="1" dirty="0">
-                <a:solidFill>
-                  <a:schemeClr val="bg1"/>
-                </a:solidFill>
-                <a:latin typeface="Helvetica Neue" panose="02000503000000020004" pitchFamily="2" charset="0"/>
-                <a:ea typeface="Helvetica Neue" panose="02000503000000020004" pitchFamily="2" charset="0"/>
-                <a:cs typeface="Helvetica Neue" panose="02000503000000020004" pitchFamily="2" charset="0"/>
-              </a:rPr>
-              <a:t>The smallest living organism recognized by scientists is </a:t>
-            </a:r>
-            <a:r>
-              <a:rPr lang="en-US" sz="2000" b="1" dirty="0" err="1">
-                <a:solidFill>
-                  <a:schemeClr val="bg1"/>
-                </a:solidFill>
-                <a:latin typeface="Helvetica Neue" panose="02000503000000020004" pitchFamily="2" charset="0"/>
-                <a:ea typeface="Helvetica Neue" panose="02000503000000020004" pitchFamily="2" charset="0"/>
-                <a:cs typeface="Helvetica Neue" panose="02000503000000020004" pitchFamily="2" charset="0"/>
-              </a:rPr>
-              <a:t>Nanoarchaeum</a:t>
-            </a:r>
-            <a:r>
-              <a:rPr lang="en-US" sz="2000" b="1" dirty="0">
-                <a:solidFill>
-                  <a:schemeClr val="bg1"/>
-                </a:solidFill>
-                <a:latin typeface="Helvetica Neue" panose="02000503000000020004" pitchFamily="2" charset="0"/>
-                <a:ea typeface="Helvetica Neue" panose="02000503000000020004" pitchFamily="2" charset="0"/>
-                <a:cs typeface="Helvetica Neue" panose="02000503000000020004" pitchFamily="2" charset="0"/>
-              </a:rPr>
-              <a:t> </a:t>
-            </a:r>
-            <a:r>
-              <a:rPr lang="en-US" sz="2000" b="1" dirty="0" err="1">
-                <a:solidFill>
-                  <a:schemeClr val="bg1"/>
-                </a:solidFill>
-                <a:latin typeface="Helvetica Neue" panose="02000503000000020004" pitchFamily="2" charset="0"/>
-                <a:ea typeface="Helvetica Neue" panose="02000503000000020004" pitchFamily="2" charset="0"/>
-                <a:cs typeface="Helvetica Neue" panose="02000503000000020004" pitchFamily="2" charset="0"/>
-              </a:rPr>
-              <a:t>equitans</a:t>
-            </a:r>
-            <a:r>
-              <a:rPr lang="en-US" sz="2000" b="1" dirty="0">
-                <a:solidFill>
-                  <a:schemeClr val="bg1"/>
-                </a:solidFill>
-                <a:latin typeface="Helvetica Neue" panose="02000503000000020004" pitchFamily="2" charset="0"/>
-                <a:ea typeface="Helvetica Neue" panose="02000503000000020004" pitchFamily="2" charset="0"/>
-                <a:cs typeface="Helvetica Neue" panose="02000503000000020004" pitchFamily="2" charset="0"/>
-              </a:rPr>
-              <a:t>. </a:t>
-            </a:r>
-          </a:p>
-          <a:p>
-            <a:pPr marL="742950" lvl="1" indent="-285750">
-              <a:buFont typeface="Arial" panose="020B0604020202020204" pitchFamily="34" charset="0"/>
-              <a:buChar char="•"/>
-              <a:defRPr/>
-            </a:pPr>
-            <a:r>
-              <a:rPr lang="en-US" sz="2000" b="1" dirty="0">
-                <a:solidFill>
-                  <a:schemeClr val="bg1"/>
-                </a:solidFill>
-                <a:latin typeface="Helvetica Neue" panose="02000503000000020004" pitchFamily="2" charset="0"/>
-                <a:ea typeface="Helvetica Neue" panose="02000503000000020004" pitchFamily="2" charset="0"/>
-                <a:cs typeface="Helvetica Neue" panose="02000503000000020004" pitchFamily="2" charset="0"/>
-              </a:rPr>
-              <a:t>This microbe was discovered in 2002 in a hydrothermal vent off the coast of Iceland. </a:t>
-            </a:r>
-          </a:p>
-          <a:p>
-            <a:pPr marL="742950" lvl="1" indent="-285750">
-              <a:buFont typeface="Arial" panose="020B0604020202020204" pitchFamily="34" charset="0"/>
-              <a:buChar char="•"/>
-              <a:defRPr/>
-            </a:pPr>
-            <a:r>
-              <a:rPr lang="en-US" sz="2000" b="1" dirty="0">
-                <a:solidFill>
-                  <a:schemeClr val="bg1"/>
-                </a:solidFill>
-                <a:latin typeface="Helvetica Neue" panose="02000503000000020004" pitchFamily="2" charset="0"/>
-                <a:ea typeface="Helvetica Neue" panose="02000503000000020004" pitchFamily="2" charset="0"/>
-                <a:cs typeface="Helvetica Neue" panose="02000503000000020004" pitchFamily="2" charset="0"/>
-              </a:rPr>
-              <a:t>Its cells are only about 400 nanometers in diameter.</a:t>
-            </a:r>
-          </a:p>
-          <a:p>
-            <a:pPr marL="742950" lvl="1" indent="-285750">
-              <a:buFont typeface="Arial" panose="020B0604020202020204" pitchFamily="34" charset="0"/>
-              <a:buChar char="•"/>
-              <a:defRPr/>
-            </a:pPr>
-            <a:r>
-              <a:rPr lang="en-US" sz="2000" b="1" dirty="0">
-                <a:solidFill>
-                  <a:schemeClr val="bg1"/>
-                </a:solidFill>
-                <a:latin typeface="Helvetica Neue" panose="02000503000000020004" pitchFamily="2" charset="0"/>
-                <a:ea typeface="Helvetica Neue" panose="02000503000000020004" pitchFamily="2" charset="0"/>
-                <a:cs typeface="Helvetica Neue" panose="02000503000000020004" pitchFamily="2" charset="0"/>
-              </a:rPr>
-              <a:t>It has one of the smallest genomes of any sequenced microbe, with only 490,885 base pairs.</a:t>
-            </a:r>
-          </a:p>
-          <a:p>
-            <a:pPr marL="742950" lvl="1" indent="-285750">
-              <a:buFont typeface="Arial" panose="020B0604020202020204" pitchFamily="34" charset="0"/>
-              <a:buChar char="•"/>
-              <a:defRPr/>
-            </a:pPr>
-            <a:r>
-              <a:rPr lang="en-US" sz="2000" b="1" dirty="0">
-                <a:solidFill>
-                  <a:schemeClr val="bg1"/>
-                </a:solidFill>
-                <a:latin typeface="Helvetica Neue" panose="02000503000000020004" pitchFamily="2" charset="0"/>
-                <a:ea typeface="Helvetica Neue" panose="02000503000000020004" pitchFamily="2" charset="0"/>
-                <a:cs typeface="Helvetica Neue" panose="02000503000000020004" pitchFamily="2" charset="0"/>
-              </a:rPr>
-              <a:t>Its small size and minimal genome suggest it contains a relatively low number of atoms compared to larger organisms.</a:t>
-            </a:r>
-          </a:p>
-          <a:p>
-            <a:pPr marL="742950" lvl="1" indent="-285750">
-              <a:buFont typeface="Arial" panose="020B0604020202020204" pitchFamily="34" charset="0"/>
-              <a:buChar char="•"/>
-              <a:defRPr/>
-            </a:pPr>
-            <a:r>
-              <a:rPr lang="en-US" sz="2000" b="1" dirty="0">
-                <a:solidFill>
-                  <a:schemeClr val="bg1"/>
-                </a:solidFill>
-                <a:latin typeface="Helvetica Neue" panose="02000503000000020004" pitchFamily="2" charset="0"/>
-                <a:ea typeface="Helvetica Neue" panose="02000503000000020004" pitchFamily="2" charset="0"/>
-                <a:cs typeface="Helvetica Neue" panose="02000503000000020004" pitchFamily="2" charset="0"/>
-              </a:rPr>
-              <a:t>We know that RNA molecules </a:t>
-            </a:r>
-            <a:r>
-              <a:rPr lang="en-US" sz="2000" b="1" dirty="0" err="1">
-                <a:solidFill>
-                  <a:schemeClr val="bg1"/>
-                </a:solidFill>
-                <a:latin typeface="Helvetica Neue" panose="02000503000000020004" pitchFamily="2" charset="0"/>
-                <a:ea typeface="Helvetica Neue" panose="02000503000000020004" pitchFamily="2" charset="0"/>
-                <a:cs typeface="Helvetica Neue" panose="02000503000000020004" pitchFamily="2" charset="0"/>
-              </a:rPr>
-              <a:t>cantain</a:t>
-            </a:r>
-            <a:r>
-              <a:rPr lang="en-US" sz="2000" b="1" dirty="0">
-                <a:solidFill>
-                  <a:schemeClr val="bg1"/>
-                </a:solidFill>
-                <a:latin typeface="Helvetica Neue" panose="02000503000000020004" pitchFamily="2" charset="0"/>
-                <a:ea typeface="Helvetica Neue" panose="02000503000000020004" pitchFamily="2" charset="0"/>
-                <a:cs typeface="Helvetica Neue" panose="02000503000000020004" pitchFamily="2" charset="0"/>
-              </a:rPr>
-              <a:t> 4K-6K point potentials.</a:t>
-            </a:r>
-          </a:p>
-          <a:p>
-            <a:pPr marL="742950" lvl="1" indent="-285750">
-              <a:buFont typeface="Arial" panose="020B0604020202020204" pitchFamily="34" charset="0"/>
-              <a:buChar char="•"/>
-              <a:defRPr/>
-            </a:pPr>
-            <a:r>
-              <a:rPr lang="en-US" sz="2000" b="1" dirty="0">
-                <a:solidFill>
-                  <a:schemeClr val="bg1"/>
-                </a:solidFill>
-                <a:latin typeface="Helvetica Neue" panose="02000503000000020004" pitchFamily="2" charset="0"/>
-                <a:ea typeface="Helvetica Neue" panose="02000503000000020004" pitchFamily="2" charset="0"/>
-                <a:cs typeface="Helvetica Neue" panose="02000503000000020004" pitchFamily="2" charset="0"/>
-              </a:rPr>
-              <a:t>The genome therefore contains 500K x 10K ~= 5B point potentials.</a:t>
-            </a:r>
-          </a:p>
-          <a:p>
-            <a:pPr marL="742950" lvl="1" indent="-285750">
-              <a:buFont typeface="Arial" panose="020B0604020202020204" pitchFamily="34" charset="0"/>
-              <a:buChar char="•"/>
-              <a:defRPr/>
-            </a:pPr>
-            <a:endParaRPr lang="en-US" sz="2000" dirty="0">
-              <a:solidFill>
-                <a:schemeClr val="bg1"/>
-              </a:solidFill>
-              <a:latin typeface="Helvetica Neue" panose="02000503000000020004" pitchFamily="2" charset="0"/>
-              <a:ea typeface="Helvetica Neue" panose="02000503000000020004" pitchFamily="2" charset="0"/>
-              <a:cs typeface="Helvetica Neue" panose="02000503000000020004" pitchFamily="2" charset="0"/>
-            </a:endParaRPr>
-          </a:p>
-          <a:p>
-            <a:pPr marL="742950" lvl="1" indent="-285750">
-              <a:buFont typeface="Arial" panose="020B0604020202020204" pitchFamily="34" charset="0"/>
-              <a:buChar char="•"/>
-              <a:defRPr/>
-            </a:pPr>
-            <a:r>
-              <a:rPr kumimoji="0" lang="en-US" sz="2000" i="1" u="none" strike="noStrike" kern="1200" cap="none" spc="0" normalizeH="0" baseline="0" noProof="0" dirty="0">
-                <a:ln>
-                  <a:noFill/>
-                </a:ln>
-                <a:solidFill>
-                  <a:schemeClr val="bg1"/>
-                </a:solidFill>
-                <a:effectLst/>
-                <a:uLnTx/>
-                <a:uFillTx/>
-                <a:latin typeface="Helvetica Neue" panose="02000503000000020004" pitchFamily="2" charset="0"/>
-                <a:ea typeface="Helvetica Neue" panose="02000503000000020004" pitchFamily="2" charset="0"/>
-                <a:cs typeface="Helvetica Neue" panose="02000503000000020004" pitchFamily="2" charset="0"/>
-              </a:rPr>
-              <a:t>h/t CoPilot and Wikipedia</a:t>
-            </a:r>
-          </a:p>
-          <a:p>
-            <a:pPr marL="742950" lvl="1" indent="-285750">
-              <a:buFont typeface="Arial" panose="020B0604020202020204" pitchFamily="34" charset="0"/>
-              <a:buChar char="•"/>
-              <a:defRPr/>
-            </a:pPr>
-            <a:endParaRPr kumimoji="0" lang="en-US" sz="2000" b="0" u="none" strike="noStrike" kern="1200" cap="none" spc="0" normalizeH="0" baseline="0" noProof="0" dirty="0">
-              <a:ln>
-                <a:noFill/>
-              </a:ln>
-              <a:solidFill>
-                <a:schemeClr val="bg1"/>
-              </a:solidFill>
-              <a:effectLst/>
-              <a:uLnTx/>
-              <a:uFillTx/>
-              <a:latin typeface="Helvetica Neue" panose="02000503000000020004" pitchFamily="2" charset="0"/>
-              <a:ea typeface="Helvetica Neue" panose="02000503000000020004" pitchFamily="2" charset="0"/>
-              <a:cs typeface="Helvetica Neue" panose="02000503000000020004" pitchFamily="2" charset="0"/>
-            </a:endParaRPr>
-          </a:p>
-          <a:p>
-            <a:pPr marL="285750" marR="0" lvl="0" indent="-285750" algn="l" defTabSz="914400" rtl="0" eaLnBrk="1" fontAlgn="auto" latinLnBrk="0" hangingPunct="1">
-              <a:lnSpc>
-                <a:spcPct val="100000"/>
-              </a:lnSpc>
-              <a:spcBef>
-                <a:spcPts val="0"/>
-              </a:spcBef>
-              <a:spcAft>
-                <a:spcPts val="0"/>
-              </a:spcAft>
-              <a:buClrTx/>
-              <a:buSzTx/>
-              <a:buFont typeface="Arial" panose="020B0604020202020204" pitchFamily="34" charset="0"/>
-              <a:buChar char="•"/>
-              <a:tabLst/>
-              <a:defRPr/>
-            </a:pPr>
-            <a:endParaRPr kumimoji="0" lang="en-US" sz="2000" b="0" u="none" strike="noStrike" kern="1200" cap="none" spc="0" normalizeH="0" baseline="0" noProof="0" dirty="0">
-              <a:ln>
-                <a:noFill/>
-              </a:ln>
-              <a:solidFill>
-                <a:schemeClr val="bg1"/>
-              </a:solidFill>
-              <a:effectLst/>
-              <a:uLnTx/>
-              <a:uFillTx/>
-              <a:latin typeface="Helvetica Neue" panose="02000503000000020004" pitchFamily="2" charset="0"/>
-              <a:ea typeface="Helvetica Neue" panose="02000503000000020004" pitchFamily="2" charset="0"/>
-              <a:cs typeface="Helvetica Neue" panose="02000503000000020004" pitchFamily="2" charset="0"/>
-            </a:endParaRPr>
-          </a:p>
-          <a:p>
-            <a:pPr marL="0" marR="0" lvl="0" indent="0" algn="l" defTabSz="914400" rtl="0" eaLnBrk="1" fontAlgn="auto" latinLnBrk="0" hangingPunct="1">
-              <a:lnSpc>
-                <a:spcPct val="100000"/>
-              </a:lnSpc>
-              <a:spcBef>
-                <a:spcPts val="0"/>
-              </a:spcBef>
-              <a:spcAft>
-                <a:spcPts val="0"/>
-              </a:spcAft>
-              <a:buClrTx/>
-              <a:buSzTx/>
-              <a:buFontTx/>
-              <a:buNone/>
-              <a:tabLst/>
-              <a:defRPr/>
-            </a:pPr>
-            <a:endParaRPr kumimoji="0" lang="en-US" sz="2000" b="0" u="none" strike="noStrike" kern="1200" cap="none" spc="0" normalizeH="0" baseline="0" noProof="0" dirty="0">
-              <a:ln>
-                <a:noFill/>
-              </a:ln>
-              <a:solidFill>
-                <a:schemeClr val="bg1"/>
-              </a:solidFill>
-              <a:effectLst/>
-              <a:uLnTx/>
-              <a:uFillTx/>
-              <a:latin typeface="Helvetica Neue" panose="02000503000000020004" pitchFamily="2" charset="0"/>
-              <a:ea typeface="Helvetica Neue" panose="02000503000000020004" pitchFamily="2" charset="0"/>
-              <a:cs typeface="Helvetica Neue" panose="02000503000000020004" pitchFamily="2" charset="0"/>
-            </a:endParaRPr>
-          </a:p>
-          <a:p>
-            <a:pPr marL="285750" marR="0" lvl="0" indent="-285750" algn="l" defTabSz="914400" rtl="0" eaLnBrk="1" fontAlgn="auto" latinLnBrk="0" hangingPunct="1">
-              <a:lnSpc>
-                <a:spcPct val="100000"/>
-              </a:lnSpc>
-              <a:spcBef>
-                <a:spcPts val="0"/>
-              </a:spcBef>
-              <a:spcAft>
-                <a:spcPts val="0"/>
-              </a:spcAft>
-              <a:buClrTx/>
-              <a:buSzTx/>
-              <a:buFont typeface="Arial" panose="020B0604020202020204" pitchFamily="34" charset="0"/>
-              <a:buChar char="•"/>
-              <a:tabLst/>
-              <a:defRPr/>
-            </a:pPr>
-            <a:endParaRPr kumimoji="0" lang="en-US" sz="2000" b="0" u="none" strike="noStrike" kern="1200" cap="none" spc="0" normalizeH="0" baseline="0" noProof="0" dirty="0">
-              <a:ln>
-                <a:noFill/>
-              </a:ln>
-              <a:solidFill>
-                <a:schemeClr val="bg1"/>
-              </a:solidFill>
-              <a:effectLst/>
-              <a:uLnTx/>
-              <a:uFillTx/>
-              <a:latin typeface="Helvetica Neue" panose="02000503000000020004" pitchFamily="2" charset="0"/>
-              <a:ea typeface="Helvetica Neue" panose="02000503000000020004" pitchFamily="2" charset="0"/>
-              <a:cs typeface="Helvetica Neue" panose="02000503000000020004" pitchFamily="2" charset="0"/>
-            </a:endParaRPr>
-          </a:p>
-          <a:p>
-            <a:pPr marL="285750" marR="0" lvl="0" indent="-285750" algn="l" defTabSz="914400" rtl="0" eaLnBrk="1" fontAlgn="auto" latinLnBrk="0" hangingPunct="1">
-              <a:lnSpc>
-                <a:spcPct val="100000"/>
-              </a:lnSpc>
-              <a:spcBef>
-                <a:spcPts val="0"/>
-              </a:spcBef>
-              <a:spcAft>
-                <a:spcPts val="0"/>
-              </a:spcAft>
-              <a:buClrTx/>
-              <a:buSzTx/>
-              <a:buFont typeface="Arial" panose="020B0604020202020204" pitchFamily="34" charset="0"/>
-              <a:buChar char="•"/>
-              <a:tabLst/>
-              <a:defRPr/>
-            </a:pPr>
-            <a:endParaRPr kumimoji="0" lang="en-US" sz="2000" b="0" u="none" strike="noStrike" kern="1200" cap="none" spc="0" normalizeH="0" baseline="0" noProof="0" dirty="0">
-              <a:ln>
-                <a:noFill/>
-              </a:ln>
-              <a:solidFill>
-                <a:schemeClr val="bg1"/>
-              </a:solidFill>
-              <a:effectLst/>
-              <a:uLnTx/>
-              <a:uFillTx/>
-              <a:latin typeface="Helvetica Neue" panose="02000503000000020004" pitchFamily="2" charset="0"/>
-              <a:ea typeface="Helvetica Neue" panose="02000503000000020004" pitchFamily="2" charset="0"/>
-              <a:cs typeface="Helvetica Neue" panose="02000503000000020004" pitchFamily="2" charset="0"/>
-            </a:endParaRPr>
-          </a:p>
-          <a:p>
-            <a:pPr marL="285750" marR="0" lvl="0" indent="-285750" algn="l" defTabSz="914400" rtl="0" eaLnBrk="1" fontAlgn="auto" latinLnBrk="0" hangingPunct="1">
-              <a:lnSpc>
-                <a:spcPct val="100000"/>
-              </a:lnSpc>
-              <a:spcBef>
-                <a:spcPts val="0"/>
-              </a:spcBef>
-              <a:spcAft>
-                <a:spcPts val="0"/>
-              </a:spcAft>
-              <a:buClrTx/>
-              <a:buSzTx/>
-              <a:buFont typeface="Arial" panose="020B0604020202020204" pitchFamily="34" charset="0"/>
-              <a:buChar char="•"/>
-              <a:tabLst/>
-              <a:defRPr/>
-            </a:pPr>
-            <a:endParaRPr kumimoji="0" lang="en-US" sz="2000" b="0" u="none" strike="noStrike" kern="1200" cap="none" spc="0" normalizeH="0" baseline="0" noProof="0" dirty="0">
-              <a:ln>
-                <a:noFill/>
-              </a:ln>
-              <a:solidFill>
-                <a:schemeClr val="bg1"/>
-              </a:solidFill>
-              <a:effectLst/>
-              <a:uLnTx/>
-              <a:uFillTx/>
-              <a:latin typeface="Helvetica Neue" panose="02000503000000020004" pitchFamily="2" charset="0"/>
-              <a:ea typeface="Helvetica Neue" panose="02000503000000020004" pitchFamily="2" charset="0"/>
-              <a:cs typeface="Helvetica Neue" panose="02000503000000020004" pitchFamily="2" charset="0"/>
-            </a:endParaRPr>
-          </a:p>
-          <a:p>
-            <a:pPr marL="0" marR="0" lvl="0" indent="0" algn="l" defTabSz="914400" rtl="0" eaLnBrk="1" fontAlgn="auto" latinLnBrk="0" hangingPunct="1">
-              <a:lnSpc>
-                <a:spcPct val="100000"/>
-              </a:lnSpc>
-              <a:spcBef>
-                <a:spcPts val="0"/>
-              </a:spcBef>
-              <a:spcAft>
-                <a:spcPts val="0"/>
-              </a:spcAft>
-              <a:buClrTx/>
-              <a:buSzTx/>
-              <a:buFontTx/>
-              <a:buNone/>
-              <a:tabLst/>
-              <a:defRPr/>
-            </a:pPr>
-            <a:endParaRPr kumimoji="0" lang="en-US" sz="1400" b="0" u="none" strike="noStrike" kern="1200" cap="none" spc="0" normalizeH="0" baseline="0" noProof="0" dirty="0">
-              <a:ln>
-                <a:noFill/>
-              </a:ln>
-              <a:solidFill>
-                <a:schemeClr val="bg1"/>
-              </a:solidFill>
-              <a:effectLst/>
-              <a:uLnTx/>
-              <a:uFillTx/>
-              <a:latin typeface="Helvetica Neue" panose="02000503000000020004" pitchFamily="2" charset="0"/>
-              <a:ea typeface="Helvetica Neue" panose="02000503000000020004" pitchFamily="2" charset="0"/>
-              <a:cs typeface="Helvetica Neue" panose="02000503000000020004" pitchFamily="2" charset="0"/>
-            </a:endParaRPr>
-          </a:p>
-        </p:txBody>
-      </p:sp>
-      <p:pic>
-        <p:nvPicPr>
-          <p:cNvPr id="3074" name="Picture 2" descr="undefined">
-            <a:extLst>
-              <a:ext uri="{FF2B5EF4-FFF2-40B4-BE49-F238E27FC236}">
-                <a16:creationId xmlns:a16="http://schemas.microsoft.com/office/drawing/2014/main" id="{446818C8-F552-491F-947A-ACEDA4EBAFB1}"/>
-              </a:ext>
-            </a:extLst>
-          </p:cNvPr>
-          <p:cNvPicPr>
-            <a:picLocks noChangeAspect="1" noChangeArrowheads="1"/>
-          </p:cNvPicPr>
-          <p:nvPr/>
-        </p:nvPicPr>
-        <p:blipFill>
-          <a:blip r:embed="rId3">
-            <a:extLst>
-              <a:ext uri="{28A0092B-C50C-407E-A947-70E740481C1C}">
-                <a14:useLocalDpi xmlns:a14="http://schemas.microsoft.com/office/drawing/2010/main" val="0"/>
-              </a:ext>
-            </a:extLst>
-          </a:blip>
-          <a:srcRect/>
-          <a:stretch>
-            <a:fillRect/>
-          </a:stretch>
-        </p:blipFill>
-        <p:spPr bwMode="auto">
-          <a:xfrm>
-            <a:off x="8924158" y="3977052"/>
-            <a:ext cx="2794000" cy="2336800"/>
-          </a:xfrm>
-          <a:prstGeom prst="rect">
-            <a:avLst/>
-          </a:prstGeom>
-          <a:noFill/>
-          <a:extLst>
-            <a:ext uri="{909E8E84-426E-40DD-AFC4-6F175D3DCCD1}">
-              <a14:hiddenFill xmlns:a14="http://schemas.microsoft.com/office/drawing/2010/main">
-                <a:solidFill>
-                  <a:srgbClr val="FFFFFF"/>
-                </a:solidFill>
-              </a14:hiddenFill>
-            </a:ext>
-          </a:extLst>
-        </p:spPr>
-      </p:pic>
-    </p:spTree>
-    <p:extLst>
-      <p:ext uri="{BB962C8B-B14F-4D97-AF65-F5344CB8AC3E}">
-        <p14:creationId xmlns:p14="http://schemas.microsoft.com/office/powerpoint/2010/main" val="3325331473"/>
-      </p:ext>
-    </p:extLst>
-  </p:cSld>
-  <p:clrMapOvr>
-    <a:masterClrMapping/>
-  </p:clrMapOvr>
-</p:sld>
-</file>
-
-<file path=ppt/slides/slide9.xml><?xml version="1.0" encoding="utf-8"?>
-<p:sld xmlns:a="http://schemas.openxmlformats.org/drawingml/2006/main" xmlns:r="http://schemas.openxmlformats.org/officeDocument/2006/relationships" xmlns:p="http://schemas.openxmlformats.org/presentationml/2006/main">
-  <p:cSld>
-    <p:bg>
-      <p:bgPr>
-        <a:solidFill>
-          <a:srgbClr val="7030A0"/>
-        </a:solidFill>
-        <a:effectLst/>
-      </p:bgPr>
-    </p:bg>
-    <p:spTree>
-      <p:nvGrpSpPr>
-        <p:cNvPr id="1" name="">
-          <a:extLst>
-            <a:ext uri="{FF2B5EF4-FFF2-40B4-BE49-F238E27FC236}">
-              <a16:creationId xmlns:a16="http://schemas.microsoft.com/office/drawing/2014/main" id="{5DF61E34-494B-53B8-B8DB-F565811FCE27}"/>
-            </a:ext>
-          </a:extLst>
-        </p:cNvPr>
-        <p:cNvGrpSpPr/>
-        <p:nvPr/>
-      </p:nvGrpSpPr>
-      <p:grpSpPr>
-        <a:xfrm>
-          <a:off x="0" y="0"/>
-          <a:ext cx="0" cy="0"/>
-          <a:chOff x="0" y="0"/>
-          <a:chExt cx="0" cy="0"/>
-        </a:xfrm>
-      </p:grpSpPr>
-      <p:sp>
-        <p:nvSpPr>
-          <p:cNvPr id="2" name="TextBox 1">
-            <a:extLst>
-              <a:ext uri="{FF2B5EF4-FFF2-40B4-BE49-F238E27FC236}">
-                <a16:creationId xmlns:a16="http://schemas.microsoft.com/office/drawing/2014/main" id="{1AB4DA62-B82D-2B15-A49B-171CFC36B367}"/>
-              </a:ext>
-            </a:extLst>
-          </p:cNvPr>
-          <p:cNvSpPr txBox="1"/>
-          <p:nvPr/>
-        </p:nvSpPr>
-        <p:spPr>
-          <a:xfrm>
-            <a:off x="0" y="358254"/>
-            <a:ext cx="12191999" cy="4082208"/>
-          </a:xfrm>
-          <a:prstGeom prst="rect">
-            <a:avLst/>
-          </a:prstGeom>
-          <a:noFill/>
-        </p:spPr>
-        <p:txBody>
-          <a:bodyPr wrap="square" rtlCol="0">
-            <a:spAutoFit/>
-          </a:bodyPr>
-          <a:lstStyle/>
-          <a:p>
-            <a:pPr marL="0" marR="0" lvl="0" indent="0" algn="ctr" defTabSz="914400" rtl="0" eaLnBrk="1" fontAlgn="auto" latinLnBrk="0" hangingPunct="1">
-              <a:lnSpc>
-                <a:spcPts val="11000"/>
-              </a:lnSpc>
-              <a:spcBef>
-                <a:spcPts val="0"/>
-              </a:spcBef>
-              <a:spcAft>
-                <a:spcPts val="0"/>
-              </a:spcAft>
-              <a:buClrTx/>
-              <a:buSzTx/>
-              <a:buFontTx/>
-              <a:buNone/>
-              <a:tabLst/>
-              <a:defRPr/>
-            </a:pPr>
-            <a:r>
-              <a:rPr kumimoji="0" lang="en-US" sz="11500" b="0" i="0" u="none" strike="noStrike" kern="1200" cap="none" spc="0" normalizeH="0" baseline="0" noProof="0" dirty="0">
-                <a:ln>
-                  <a:noFill/>
-                </a:ln>
-                <a:solidFill>
-                  <a:prstClr val="white"/>
-                </a:solidFill>
-                <a:effectLst/>
-                <a:uLnTx/>
-                <a:uFillTx/>
-                <a:latin typeface="Helvetica Neue UltraLight" panose="02000206000000020004" pitchFamily="2" charset="0"/>
-                <a:ea typeface="Helvetica Neue UltraLight" panose="02000206000000020004" pitchFamily="2" charset="0"/>
-                <a:cs typeface="Helvetica Neue" panose="02000503000000020004" pitchFamily="2" charset="0"/>
-              </a:rPr>
-              <a:t>neoclassical.ai</a:t>
-            </a:r>
-          </a:p>
-          <a:p>
-            <a:pPr algn="ctr">
-              <a:lnSpc>
-                <a:spcPts val="10000"/>
-              </a:lnSpc>
-              <a:defRPr/>
-            </a:pPr>
-            <a:r>
-              <a:rPr kumimoji="0" lang="en-US" sz="11500" b="1" i="0" u="none" strike="noStrike" kern="1200" cap="none" spc="0" normalizeH="0" baseline="0" noProof="0" dirty="0" err="1">
-                <a:ln>
-                  <a:noFill/>
-                </a:ln>
-                <a:solidFill>
-                  <a:srgbClr val="FFC000"/>
-                </a:solidFill>
-                <a:effectLst/>
-                <a:uLnTx/>
-                <a:uFillTx/>
-                <a:latin typeface="Helvetica Neue Condensed Black" panose="02000503000000020004" pitchFamily="2" charset="0"/>
-                <a:ea typeface="Helvetica Neue Condensed Black" panose="02000503000000020004" pitchFamily="2" charset="0"/>
-                <a:cs typeface="Helvetica Neue Condensed Black" panose="02000503000000020004" pitchFamily="2" charset="0"/>
-              </a:rPr>
-              <a:t>Deinococcus</a:t>
-            </a:r>
-            <a:r>
-              <a:rPr kumimoji="0" lang="en-US" sz="11500" b="1" i="0" u="none" strike="noStrike" kern="1200" cap="none" spc="0" normalizeH="0" baseline="0" noProof="0" dirty="0">
-                <a:ln>
-                  <a:noFill/>
-                </a:ln>
-                <a:solidFill>
-                  <a:srgbClr val="FFC000"/>
-                </a:solidFill>
-                <a:effectLst/>
-                <a:uLnTx/>
-                <a:uFillTx/>
-                <a:latin typeface="Helvetica Neue Condensed Black" panose="02000503000000020004" pitchFamily="2" charset="0"/>
-                <a:ea typeface="Helvetica Neue Condensed Black" panose="02000503000000020004" pitchFamily="2" charset="0"/>
-                <a:cs typeface="Helvetica Neue Condensed Black" panose="02000503000000020004" pitchFamily="2" charset="0"/>
-              </a:rPr>
-              <a:t> </a:t>
-            </a:r>
-            <a:r>
-              <a:rPr kumimoji="0" lang="en-US" sz="11500" b="1" i="0" u="none" strike="noStrike" kern="1200" cap="none" spc="0" normalizeH="0" baseline="0" noProof="0" dirty="0" err="1">
-                <a:ln>
-                  <a:noFill/>
-                </a:ln>
-                <a:solidFill>
-                  <a:srgbClr val="FFC000"/>
-                </a:solidFill>
-                <a:effectLst/>
-                <a:uLnTx/>
-                <a:uFillTx/>
-                <a:latin typeface="Helvetica Neue Condensed Black" panose="02000503000000020004" pitchFamily="2" charset="0"/>
-                <a:ea typeface="Helvetica Neue Condensed Black" panose="02000503000000020004" pitchFamily="2" charset="0"/>
-                <a:cs typeface="Helvetica Neue Condensed Black" panose="02000503000000020004" pitchFamily="2" charset="0"/>
-              </a:rPr>
-              <a:t>Radiodurans</a:t>
-            </a:r>
-            <a:endParaRPr kumimoji="0" lang="en-US" sz="11500" b="1" i="0" u="none" strike="noStrike" kern="1200" cap="none" spc="0" normalizeH="0" baseline="0" noProof="0" dirty="0">
-              <a:ln>
-                <a:noFill/>
-              </a:ln>
-              <a:solidFill>
-                <a:srgbClr val="FFC000"/>
-              </a:solidFill>
-              <a:effectLst/>
-              <a:uLnTx/>
-              <a:uFillTx/>
-              <a:latin typeface="Helvetica Neue Condensed Black" panose="02000503000000020004" pitchFamily="2" charset="0"/>
-              <a:ea typeface="Helvetica Neue Condensed Black" panose="02000503000000020004" pitchFamily="2" charset="0"/>
-              <a:cs typeface="Helvetica Neue Condensed Black" panose="02000503000000020004" pitchFamily="2" charset="0"/>
-            </a:endParaRPr>
-          </a:p>
-        </p:txBody>
-      </p:sp>
-    </p:spTree>
-    <p:extLst>
-      <p:ext uri="{BB962C8B-B14F-4D97-AF65-F5344CB8AC3E}">
-        <p14:creationId xmlns:p14="http://schemas.microsoft.com/office/powerpoint/2010/main" val="3014659976"/>
       </p:ext>
     </p:extLst>
   </p:cSld>
@@ -16872,334 +11551,6 @@
 </file>
 
 <file path=ppt/theme/theme2.xml><?xml version="1.0" encoding="utf-8"?>
-<a:theme xmlns:a="http://schemas.openxmlformats.org/drawingml/2006/main" name="2_Office Theme">
-  <a:themeElements>
-    <a:clrScheme name="Office">
-      <a:dk1>
-        <a:sysClr val="windowText" lastClr="000000"/>
-      </a:dk1>
-      <a:lt1>
-        <a:sysClr val="window" lastClr="FFFFFF"/>
-      </a:lt1>
-      <a:dk2>
-        <a:srgbClr val="44546A"/>
-      </a:dk2>
-      <a:lt2>
-        <a:srgbClr val="E7E6E6"/>
-      </a:lt2>
-      <a:accent1>
-        <a:srgbClr val="4472C4"/>
-      </a:accent1>
-      <a:accent2>
-        <a:srgbClr val="ED7D31"/>
-      </a:accent2>
-      <a:accent3>
-        <a:srgbClr val="A5A5A5"/>
-      </a:accent3>
-      <a:accent4>
-        <a:srgbClr val="FFC000"/>
-      </a:accent4>
-      <a:accent5>
-        <a:srgbClr val="5B9BD5"/>
-      </a:accent5>
-      <a:accent6>
-        <a:srgbClr val="70AD47"/>
-      </a:accent6>
-      <a:hlink>
-        <a:srgbClr val="0563C1"/>
-      </a:hlink>
-      <a:folHlink>
-        <a:srgbClr val="954F72"/>
-      </a:folHlink>
-    </a:clrScheme>
-    <a:fontScheme name="Office">
-      <a:majorFont>
-        <a:latin typeface="Calibri Light" panose="020F0302020204030204"/>
-        <a:ea typeface=""/>
-        <a:cs typeface=""/>
-        <a:font script="Jpan" typeface="游ゴシック Light"/>
-        <a:font script="Hang" typeface="맑은 고딕"/>
-        <a:font script="Hans" typeface="等线 Light"/>
-        <a:font script="Hant" typeface="新細明體"/>
-        <a:font script="Arab" typeface="Times New Roman"/>
-        <a:font script="Hebr" typeface="Times New Roman"/>
-        <a:font script="Thai" typeface="Angsana New"/>
-        <a:font script="Ethi" typeface="Nyala"/>
-        <a:font script="Beng" typeface="Vrinda"/>
-        <a:font script="Gujr" typeface="Shruti"/>
-        <a:font script="Khmr" typeface="MoolBoran"/>
-        <a:font script="Knda" typeface="Tunga"/>
-        <a:font script="Guru" typeface="Raavi"/>
-        <a:font script="Cans" typeface="Euphemia"/>
-        <a:font script="Cher" typeface="Plantagenet Cherokee"/>
-        <a:font script="Yiii" typeface="Microsoft Yi Baiti"/>
-        <a:font script="Tibt" typeface="Microsoft Himalaya"/>
-        <a:font script="Thaa" typeface="MV Boli"/>
-        <a:font script="Deva" typeface="Mangal"/>
-        <a:font script="Telu" typeface="Gautami"/>
-        <a:font script="Taml" typeface="Latha"/>
-        <a:font script="Syrc" typeface="Estrangelo Edessa"/>
-        <a:font script="Orya" typeface="Kalinga"/>
-        <a:font script="Mlym" typeface="Kartika"/>
-        <a:font script="Laoo" typeface="DokChampa"/>
-        <a:font script="Sinh" typeface="Iskoola Pota"/>
-        <a:font script="Mong" typeface="Mongolian Baiti"/>
-        <a:font script="Viet" typeface="Times New Roman"/>
-        <a:font script="Uigh" typeface="Microsoft Uighur"/>
-        <a:font script="Geor" typeface="Sylfaen"/>
-        <a:font script="Armn" typeface="Arial"/>
-        <a:font script="Bugi" typeface="Leelawadee UI"/>
-        <a:font script="Bopo" typeface="Microsoft JhengHei"/>
-        <a:font script="Java" typeface="Javanese Text"/>
-        <a:font script="Lisu" typeface="Segoe UI"/>
-        <a:font script="Mymr" typeface="Myanmar Text"/>
-        <a:font script="Nkoo" typeface="Ebrima"/>
-        <a:font script="Olck" typeface="Nirmala UI"/>
-        <a:font script="Osma" typeface="Ebrima"/>
-        <a:font script="Phag" typeface="Phagspa"/>
-        <a:font script="Syrn" typeface="Estrangelo Edessa"/>
-        <a:font script="Syrj" typeface="Estrangelo Edessa"/>
-        <a:font script="Syre" typeface="Estrangelo Edessa"/>
-        <a:font script="Sora" typeface="Nirmala UI"/>
-        <a:font script="Tale" typeface="Microsoft Tai Le"/>
-        <a:font script="Talu" typeface="Microsoft New Tai Lue"/>
-        <a:font script="Tfng" typeface="Ebrima"/>
-      </a:majorFont>
-      <a:minorFont>
-        <a:latin typeface="Calibri" panose="020F0502020204030204"/>
-        <a:ea typeface=""/>
-        <a:cs typeface=""/>
-        <a:font script="Jpan" typeface="游ゴシック"/>
-        <a:font script="Hang" typeface="맑은 고딕"/>
-        <a:font script="Hans" typeface="等线"/>
-        <a:font script="Hant" typeface="新細明體"/>
-        <a:font script="Arab" typeface="Arial"/>
-        <a:font script="Hebr" typeface="Arial"/>
-        <a:font script="Thai" typeface="Cordia New"/>
-        <a:font script="Ethi" typeface="Nyala"/>
-        <a:font script="Beng" typeface="Vrinda"/>
-        <a:font script="Gujr" typeface="Shruti"/>
-        <a:font script="Khmr" typeface="DaunPenh"/>
-        <a:font script="Knda" typeface="Tunga"/>
-        <a:font script="Guru" typeface="Raavi"/>
-        <a:font script="Cans" typeface="Euphemia"/>
-        <a:font script="Cher" typeface="Plantagenet Cherokee"/>
-        <a:font script="Yiii" typeface="Microsoft Yi Baiti"/>
-        <a:font script="Tibt" typeface="Microsoft Himalaya"/>
-        <a:font script="Thaa" typeface="MV Boli"/>
-        <a:font script="Deva" typeface="Mangal"/>
-        <a:font script="Telu" typeface="Gautami"/>
-        <a:font script="Taml" typeface="Latha"/>
-        <a:font script="Syrc" typeface="Estrangelo Edessa"/>
-        <a:font script="Orya" typeface="Kalinga"/>
-        <a:font script="Mlym" typeface="Kartika"/>
-        <a:font script="Laoo" typeface="DokChampa"/>
-        <a:font script="Sinh" typeface="Iskoola Pota"/>
-        <a:font script="Mong" typeface="Mongolian Baiti"/>
-        <a:font script="Viet" typeface="Arial"/>
-        <a:font script="Uigh" typeface="Microsoft Uighur"/>
-        <a:font script="Geor" typeface="Sylfaen"/>
-        <a:font script="Armn" typeface="Arial"/>
-        <a:font script="Bugi" typeface="Leelawadee UI"/>
-        <a:font script="Bopo" typeface="Microsoft JhengHei"/>
-        <a:font script="Java" typeface="Javanese Text"/>
-        <a:font script="Lisu" typeface="Segoe UI"/>
-        <a:font script="Mymr" typeface="Myanmar Text"/>
-        <a:font script="Nkoo" typeface="Ebrima"/>
-        <a:font script="Olck" typeface="Nirmala UI"/>
-        <a:font script="Osma" typeface="Ebrima"/>
-        <a:font script="Phag" typeface="Phagspa"/>
-        <a:font script="Syrn" typeface="Estrangelo Edessa"/>
-        <a:font script="Syrj" typeface="Estrangelo Edessa"/>
-        <a:font script="Syre" typeface="Estrangelo Edessa"/>
-        <a:font script="Sora" typeface="Nirmala UI"/>
-        <a:font script="Tale" typeface="Microsoft Tai Le"/>
-        <a:font script="Talu" typeface="Microsoft New Tai Lue"/>
-        <a:font script="Tfng" typeface="Ebrima"/>
-      </a:minorFont>
-    </a:fontScheme>
-    <a:fmtScheme name="Office">
-      <a:fillStyleLst>
-        <a:solidFill>
-          <a:schemeClr val="phClr"/>
-        </a:solidFill>
-        <a:gradFill rotWithShape="1">
-          <a:gsLst>
-            <a:gs pos="0">
-              <a:schemeClr val="phClr">
-                <a:lumMod val="110000"/>
-                <a:satMod val="105000"/>
-                <a:tint val="67000"/>
-              </a:schemeClr>
-            </a:gs>
-            <a:gs pos="50000">
-              <a:schemeClr val="phClr">
-                <a:lumMod val="105000"/>
-                <a:satMod val="103000"/>
-                <a:tint val="73000"/>
-              </a:schemeClr>
-            </a:gs>
-            <a:gs pos="100000">
-              <a:schemeClr val="phClr">
-                <a:lumMod val="105000"/>
-                <a:satMod val="109000"/>
-                <a:tint val="81000"/>
-              </a:schemeClr>
-            </a:gs>
-          </a:gsLst>
-          <a:lin ang="5400000" scaled="0"/>
-        </a:gradFill>
-        <a:gradFill rotWithShape="1">
-          <a:gsLst>
-            <a:gs pos="0">
-              <a:schemeClr val="phClr">
-                <a:satMod val="103000"/>
-                <a:lumMod val="102000"/>
-                <a:tint val="94000"/>
-              </a:schemeClr>
-            </a:gs>
-            <a:gs pos="50000">
-              <a:schemeClr val="phClr">
-                <a:satMod val="110000"/>
-                <a:lumMod val="100000"/>
-                <a:shade val="100000"/>
-              </a:schemeClr>
-            </a:gs>
-            <a:gs pos="100000">
-              <a:schemeClr val="phClr">
-                <a:lumMod val="99000"/>
-                <a:satMod val="120000"/>
-                <a:shade val="78000"/>
-              </a:schemeClr>
-            </a:gs>
-          </a:gsLst>
-          <a:lin ang="5400000" scaled="0"/>
-        </a:gradFill>
-      </a:fillStyleLst>
-      <a:lnStyleLst>
-        <a:ln w="6350" cap="flat" cmpd="sng" algn="ctr">
-          <a:solidFill>
-            <a:schemeClr val="phClr"/>
-          </a:solidFill>
-          <a:prstDash val="solid"/>
-          <a:miter lim="800000"/>
-        </a:ln>
-        <a:ln w="12700" cap="flat" cmpd="sng" algn="ctr">
-          <a:solidFill>
-            <a:schemeClr val="phClr"/>
-          </a:solidFill>
-          <a:prstDash val="solid"/>
-          <a:miter lim="800000"/>
-        </a:ln>
-        <a:ln w="19050" cap="flat" cmpd="sng" algn="ctr">
-          <a:solidFill>
-            <a:schemeClr val="phClr"/>
-          </a:solidFill>
-          <a:prstDash val="solid"/>
-          <a:miter lim="800000"/>
-        </a:ln>
-      </a:lnStyleLst>
-      <a:effectStyleLst>
-        <a:effectStyle>
-          <a:effectLst/>
-        </a:effectStyle>
-        <a:effectStyle>
-          <a:effectLst/>
-        </a:effectStyle>
-        <a:effectStyle>
-          <a:effectLst>
-            <a:outerShdw blurRad="57150" dist="19050" dir="5400000" algn="ctr" rotWithShape="0">
-              <a:srgbClr val="000000">
-                <a:alpha val="63000"/>
-              </a:srgbClr>
-            </a:outerShdw>
-          </a:effectLst>
-        </a:effectStyle>
-      </a:effectStyleLst>
-      <a:bgFillStyleLst>
-        <a:solidFill>
-          <a:schemeClr val="phClr"/>
-        </a:solidFill>
-        <a:solidFill>
-          <a:schemeClr val="phClr">
-            <a:tint val="95000"/>
-            <a:satMod val="170000"/>
-          </a:schemeClr>
-        </a:solidFill>
-        <a:gradFill rotWithShape="1">
-          <a:gsLst>
-            <a:gs pos="0">
-              <a:schemeClr val="phClr">
-                <a:tint val="93000"/>
-                <a:satMod val="150000"/>
-                <a:shade val="98000"/>
-                <a:lumMod val="102000"/>
-              </a:schemeClr>
-            </a:gs>
-            <a:gs pos="50000">
-              <a:schemeClr val="phClr">
-                <a:tint val="98000"/>
-                <a:satMod val="130000"/>
-                <a:shade val="90000"/>
-                <a:lumMod val="103000"/>
-              </a:schemeClr>
-            </a:gs>
-            <a:gs pos="100000">
-              <a:schemeClr val="phClr">
-                <a:shade val="63000"/>
-                <a:satMod val="120000"/>
-              </a:schemeClr>
-            </a:gs>
-          </a:gsLst>
-          <a:lin ang="5400000" scaled="0"/>
-        </a:gradFill>
-      </a:bgFillStyleLst>
-    </a:fmtScheme>
-  </a:themeElements>
-  <a:objectDefaults>
-    <a:spDef>
-      <a:spPr/>
-      <a:bodyPr wrap="none">
-        <a:spAutoFit/>
-      </a:bodyPr>
-      <a:lstStyle>
-        <a:defPPr algn="l">
-          <a:defRPr sz="2400" dirty="0" smtClean="0">
-            <a:latin typeface="Helvetica Neue" panose="02000503000000020004" pitchFamily="2" charset="0"/>
-            <a:ea typeface="Helvetica Neue" panose="02000503000000020004" pitchFamily="2" charset="0"/>
-            <a:cs typeface="Helvetica Neue" panose="02000503000000020004" pitchFamily="2" charset="0"/>
-          </a:defRPr>
-        </a:defPPr>
-      </a:lstStyle>
-    </a:spDef>
-    <a:txDef>
-      <a:spPr>
-        <a:noFill/>
-      </a:spPr>
-      <a:bodyPr wrap="none" rtlCol="0">
-        <a:spAutoFit/>
-      </a:bodyPr>
-      <a:lstStyle>
-        <a:defPPr algn="l">
-          <a:defRPr dirty="0" smtClean="0">
-            <a:latin typeface="Helvetica Neue" panose="02000503000000020004" pitchFamily="2" charset="0"/>
-            <a:ea typeface="Helvetica Neue" panose="02000503000000020004" pitchFamily="2" charset="0"/>
-            <a:cs typeface="Helvetica Neue" panose="02000503000000020004" pitchFamily="2" charset="0"/>
-          </a:defRPr>
-        </a:defPPr>
-      </a:lstStyle>
-    </a:txDef>
-  </a:objectDefaults>
-  <a:extraClrSchemeLst/>
-  <a:extLst>
-    <a:ext uri="{05A4C25C-085E-4340-85A3-A5531E510DB2}">
-      <thm15:themeFamily xmlns:thm15="http://schemas.microsoft.com/office/thememl/2012/main" name="Office Theme" id="{62F939B6-93AF-4DB8-9C6B-D6C7DFDC589F}" vid="{4A3C46E8-61CC-4603-A589-7422A47A8E4A}"/>
-    </a:ext>
-  </a:extLst>
-</a:theme>
-</file>
-
-<file path=ppt/theme/theme3.xml><?xml version="1.0" encoding="utf-8"?>
 <a:theme xmlns:a="http://schemas.openxmlformats.org/drawingml/2006/main" name="Office Theme">
   <a:themeElements>
     <a:clrScheme name="Office">

--- a/reference/archie/presentations/NPQG Assemblies - Early Life.pptx
+++ b/reference/archie/presentations/NPQG Assemblies - Early Life.pptx
@@ -8073,7 +8073,7 @@
 </file>
 
 <file path=ppt/slides/slide1.xml><?xml version="1.0" encoding="utf-8"?>
-<p:sld xmlns:a="http://schemas.openxmlformats.org/drawingml/2006/main" xmlns:r="http://schemas.openxmlformats.org/officeDocument/2006/relationships" xmlns:p="http://schemas.openxmlformats.org/presentationml/2006/main">
+<p:sld xmlns:a="http://schemas.openxmlformats.org/drawingml/2006/main" xmlns:a16="http://schemas.microsoft.com/office/drawing/2014/main" xmlns:ns3="http://schemas.microsoft.com/office/powerpoint/2010/main" xmlns:p="http://schemas.openxmlformats.org/presentationml/2006/main">
   <p:cSld>
     <p:bg>
       <p:bgPr>
@@ -8088,7 +8088,7 @@
         <p:cNvPr id="1" name="">
           <a:extLst>
             <a:ext uri="{FF2B5EF4-FFF2-40B4-BE49-F238E27FC236}">
-              <a16:creationId xmlns:a16="http://schemas.microsoft.com/office/drawing/2014/main" id="{A95AD505-148F-7C13-EC73-22518E14F4FC}"/>
+              <a16:creationId id="{A95AD505-148F-7C13-EC73-22518E14F4FC}"/>
             </a:ext>
           </a:extLst>
         </p:cNvPr>
@@ -8108,7 +8108,7 @@
           <p:cNvPr id="2" name="TextBox 1">
             <a:extLst>
               <a:ext uri="{FF2B5EF4-FFF2-40B4-BE49-F238E27FC236}">
-                <a16:creationId xmlns:a16="http://schemas.microsoft.com/office/drawing/2014/main" id="{B3C53938-22FE-22BD-E59A-97F76192783B}"/>
+                <a16:creationId id="{B3C53938-22FE-22BD-E59A-97F76192783B}"/>
               </a:ext>
             </a:extLst>
           </p:cNvPr>
@@ -8232,7 +8232,7 @@
                 <a:ea typeface="Helvetica Neue Condensed Black" panose="02000503000000020004" pitchFamily="2" charset="0"/>
                 <a:cs typeface="Helvetica Neue Condensed Black" panose="02000503000000020004" pitchFamily="2" charset="0"/>
               </a:rPr>
-              <a:t>Point Potentials?</a:t>
+              <a:t>Architrinos?</a:t>
             </a:r>
             <a:endParaRPr kumimoji="0" lang="en-US" sz="11500" b="1" i="0" u="none" strike="noStrike" kern="1200" cap="none" spc="0" normalizeH="0" baseline="0" noProof="0" dirty="0">
               <a:ln>
@@ -8251,10 +8251,166 @@
           </a:p>
         </p:txBody>
       </p:sp>
+      <p:sp>
+        <p:nvSpPr>
+          <p:cNvPr id="3" name="Footer Placeholder 3"/>
+          <p:cNvSpPr txBox="1">
+            <a:spLocks/>
+          </p:cNvSpPr>
+          <p:nvPr/>
+        </p:nvSpPr>
+        <p:spPr>
+          <a:xfrm>
+            <a:off x="10942204" y="6481737"/>
+            <a:ext cx="1217443" cy="365125"/>
+          </a:xfrm>
+          <a:prstGeom prst="rect">
+            <a:avLst/>
+          </a:prstGeom>
+        </p:spPr>
+        <p:txBody>
+          <a:bodyPr vert="horz" lIns="91440" tIns="45720" rIns="91440" bIns="45720" rtlCol="0" anchor="ctr"/>
+          <a:lstStyle>
+            <a:defPPr>
+              <a:defRPr lang="en-US"/>
+            </a:defPPr>
+            <a:lvl1pPr marL="0" algn="ctr" defTabSz="914400" rtl="0" eaLnBrk="1" latinLnBrk="0" hangingPunct="1">
+              <a:defRPr sz="1200" kern="1200">
+                <a:solidFill>
+                  <a:schemeClr val="tx1">
+                    <a:tint val="75000"/>
+                  </a:schemeClr>
+                </a:solidFill>
+                <a:latin typeface="+mn-lt"/>
+                <a:ea typeface="+mn-ea"/>
+                <a:cs typeface="+mn-cs"/>
+              </a:defRPr>
+            </a:lvl1pPr>
+            <a:lvl2pPr marL="457200" algn="l" defTabSz="914400" rtl="0" eaLnBrk="1" latinLnBrk="0" hangingPunct="1">
+              <a:defRPr sz="1800" kern="1200">
+                <a:solidFill>
+                  <a:schemeClr val="tx1"/>
+                </a:solidFill>
+                <a:latin typeface="+mn-lt"/>
+                <a:ea typeface="+mn-ea"/>
+                <a:cs typeface="+mn-cs"/>
+              </a:defRPr>
+            </a:lvl2pPr>
+            <a:lvl3pPr marL="914400" algn="l" defTabSz="914400" rtl="0" eaLnBrk="1" latinLnBrk="0" hangingPunct="1">
+              <a:defRPr sz="1800" kern="1200">
+                <a:solidFill>
+                  <a:schemeClr val="tx1"/>
+                </a:solidFill>
+                <a:latin typeface="+mn-lt"/>
+                <a:ea typeface="+mn-ea"/>
+                <a:cs typeface="+mn-cs"/>
+              </a:defRPr>
+            </a:lvl3pPr>
+            <a:lvl4pPr marL="1371600" algn="l" defTabSz="914400" rtl="0" eaLnBrk="1" latinLnBrk="0" hangingPunct="1">
+              <a:defRPr sz="1800" kern="1200">
+                <a:solidFill>
+                  <a:schemeClr val="tx1"/>
+                </a:solidFill>
+                <a:latin typeface="+mn-lt"/>
+                <a:ea typeface="+mn-ea"/>
+                <a:cs typeface="+mn-cs"/>
+              </a:defRPr>
+            </a:lvl4pPr>
+            <a:lvl5pPr marL="1828800" algn="l" defTabSz="914400" rtl="0" eaLnBrk="1" latinLnBrk="0" hangingPunct="1">
+              <a:defRPr sz="1800" kern="1200">
+                <a:solidFill>
+                  <a:schemeClr val="tx1"/>
+                </a:solidFill>
+                <a:latin typeface="+mn-lt"/>
+                <a:ea typeface="+mn-ea"/>
+                <a:cs typeface="+mn-cs"/>
+              </a:defRPr>
+            </a:lvl5pPr>
+            <a:lvl6pPr marL="2286000" algn="l" defTabSz="914400" rtl="0" eaLnBrk="1" latinLnBrk="0" hangingPunct="1">
+              <a:defRPr sz="1800" kern="1200">
+                <a:solidFill>
+                  <a:schemeClr val="tx1"/>
+                </a:solidFill>
+                <a:latin typeface="+mn-lt"/>
+                <a:ea typeface="+mn-ea"/>
+                <a:cs typeface="+mn-cs"/>
+              </a:defRPr>
+            </a:lvl6pPr>
+            <a:lvl7pPr marL="2743200" algn="l" defTabSz="914400" rtl="0" eaLnBrk="1" latinLnBrk="0" hangingPunct="1">
+              <a:defRPr sz="1800" kern="1200">
+                <a:solidFill>
+                  <a:schemeClr val="tx1"/>
+                </a:solidFill>
+                <a:latin typeface="+mn-lt"/>
+                <a:ea typeface="+mn-ea"/>
+                <a:cs typeface="+mn-cs"/>
+              </a:defRPr>
+            </a:lvl7pPr>
+            <a:lvl8pPr marL="3200400" algn="l" defTabSz="914400" rtl="0" eaLnBrk="1" latinLnBrk="0" hangingPunct="1">
+              <a:defRPr sz="1800" kern="1200">
+                <a:solidFill>
+                  <a:schemeClr val="tx1"/>
+                </a:solidFill>
+                <a:latin typeface="+mn-lt"/>
+                <a:ea typeface="+mn-ea"/>
+                <a:cs typeface="+mn-cs"/>
+              </a:defRPr>
+            </a:lvl8pPr>
+            <a:lvl9pPr marL="3657600" algn="l" defTabSz="914400" rtl="0" eaLnBrk="1" latinLnBrk="0" hangingPunct="1">
+              <a:defRPr sz="1800" kern="1200">
+                <a:solidFill>
+                  <a:schemeClr val="tx1"/>
+                </a:solidFill>
+                <a:latin typeface="+mn-lt"/>
+                <a:ea typeface="+mn-ea"/>
+                <a:cs typeface="+mn-cs"/>
+              </a:defRPr>
+            </a:lvl9pPr>
+          </a:lstStyle>
+          <a:p>
+            <a:pPr marL="0" marR="0" lvl="0" indent="0" algn="ctr" defTabSz="914400" rtl="0" eaLnBrk="1" fontAlgn="auto" latinLnBrk="0" hangingPunct="1">
+              <a:lnSpc>
+                <a:spcPct val="100000"/>
+              </a:lnSpc>
+              <a:spcBef>
+                <a:spcPts val="0"/>
+              </a:spcBef>
+              <a:spcAft>
+                <a:spcPts val="0"/>
+              </a:spcAft>
+              <a:buClrTx/>
+              <a:buSzTx/>
+              <a:buFontTx/>
+              <a:buNone/>
+              <a:tabLst/>
+              <a:defRPr/>
+            </a:pPr>
+            <a:r>
+              <a:rPr kumimoji="0" lang="en-US" sz="1200" b="0" i="0" u="none" strike="noStrike" kern="1200" cap="none" spc="0" normalizeH="0" baseline="0" noProof="0" dirty="0">
+                <a:ln>
+                  <a:noFill/>
+                </a:ln>
+                <a:solidFill>
+                  <a:prstClr val="black">
+                    <a:tint val="75000"/>
+                  </a:prstClr>
+                </a:solidFill>
+                <a:effectLst/>
+                <a:uLnTx/>
+                <a:uFillTx/>
+                <a:latin typeface="Helvetica Neue" panose="02000503000000020004" pitchFamily="2" charset="0"/>
+                <a:ea typeface="Helvetica Neue" panose="02000503000000020004" pitchFamily="2" charset="0"/>
+                <a:cs typeface="Helvetica Neue" panose="02000503000000020004" pitchFamily="2" charset="0"/>
+              </a:rPr>
+              <a:t>architrino.com</a:t>
+            </a:r>
+          </a:p>
+        </p:txBody>
+      </p:sp>
     </p:spTree>
     <p:extLst>
       <p:ext uri="{BB962C8B-B14F-4D97-AF65-F5344CB8AC3E}">
-        <p14:creationId xmlns:p14="http://schemas.microsoft.com/office/powerpoint/2010/main" val="3311713244"/>
+        <ns3:creationId val="3311713244"/>
       </p:ext>
     </p:extLst>
   </p:cSld>
@@ -8265,7 +8421,7 @@
 </file>
 
 <file path=ppt/slides/slide2.xml><?xml version="1.0" encoding="utf-8"?>
-<p:sld xmlns:a="http://schemas.openxmlformats.org/drawingml/2006/main" xmlns:r="http://schemas.openxmlformats.org/officeDocument/2006/relationships" xmlns:p="http://schemas.openxmlformats.org/presentationml/2006/main">
+<p:sld xmlns:a="http://schemas.openxmlformats.org/drawingml/2006/main" xmlns:a16="http://schemas.microsoft.com/office/drawing/2014/main" xmlns:ns4="http://schemas.microsoft.com/office/drawing/2010/main" xmlns:ns5="http://schemas.microsoft.com/office/powerpoint/2010/main" xmlns:p="http://schemas.openxmlformats.org/presentationml/2006/main" xmlns:r="http://schemas.openxmlformats.org/officeDocument/2006/relationships">
   <p:cSld>
     <p:bg>
       <p:bgPr>
@@ -8280,7 +8436,7 @@
         <p:cNvPr id="1" name="">
           <a:extLst>
             <a:ext uri="{FF2B5EF4-FFF2-40B4-BE49-F238E27FC236}">
-              <a16:creationId xmlns:a16="http://schemas.microsoft.com/office/drawing/2014/main" id="{365CF149-638E-D4FE-A688-5F738F294DCE}"/>
+              <a16:creationId id="{365CF149-638E-D4FE-A688-5F738F294DCE}"/>
             </a:ext>
           </a:extLst>
         </p:cNvPr>
@@ -8300,7 +8456,7 @@
           <p:cNvPr id="2" name="TextBox 1">
             <a:extLst>
               <a:ext uri="{FF2B5EF4-FFF2-40B4-BE49-F238E27FC236}">
-                <a16:creationId xmlns:a16="http://schemas.microsoft.com/office/drawing/2014/main" id="{CA22E71C-3B43-3887-6804-C1009A7A1619}"/>
+                <a16:creationId id="{CA22E71C-3B43-3887-6804-C1009A7A1619}"/>
               </a:ext>
             </a:extLst>
           </p:cNvPr>
@@ -8402,7 +8558,7 @@
           <p:cNvPr id="5" name="TextBox 4">
             <a:extLst>
               <a:ext uri="{FF2B5EF4-FFF2-40B4-BE49-F238E27FC236}">
-                <a16:creationId xmlns:a16="http://schemas.microsoft.com/office/drawing/2014/main" id="{9FD60923-3051-E75C-EBA1-5F01B55BA37A}"/>
+                <a16:creationId id="{9FD60923-3051-E75C-EBA1-5F01B55BA37A}"/>
               </a:ext>
             </a:extLst>
           </p:cNvPr>
@@ -8616,7 +8772,7 @@
                 <a:ea typeface="Helvetica Neue" panose="02000503000000020004" pitchFamily="2" charset="0"/>
                 <a:cs typeface="Helvetica Neue" panose="02000503000000020004" pitchFamily="2" charset="0"/>
               </a:rPr>
-              <a:t> 4K-6K point potentials.</a:t>
+              <a:t> 4K-6K architrinos.</a:t>
             </a:r>
           </a:p>
           <a:p>
@@ -8634,7 +8790,7 @@
                 <a:ea typeface="Helvetica Neue" panose="02000503000000020004" pitchFamily="2" charset="0"/>
                 <a:cs typeface="Helvetica Neue" panose="02000503000000020004" pitchFamily="2" charset="0"/>
               </a:rPr>
-              <a:t>The genome therefore contains 500K x 10K ~= 5B point potentials.</a:t>
+              <a:t>The genome therefore contains 500K x 10K ~= 5B architrinos.</a:t>
             </a:r>
           </a:p>
           <a:p>
@@ -8902,7 +9058,7 @@
           <p:cNvPr id="3074" name="Picture 2" descr="undefined">
             <a:extLst>
               <a:ext uri="{FF2B5EF4-FFF2-40B4-BE49-F238E27FC236}">
-                <a16:creationId xmlns:a16="http://schemas.microsoft.com/office/drawing/2014/main" id="{446818C8-F552-491F-947A-ACEDA4EBAFB1}"/>
+                <a16:creationId id="{446818C8-F552-491F-947A-ACEDA4EBAFB1}"/>
               </a:ext>
             </a:extLst>
           </p:cNvPr>
@@ -8915,7 +9071,7 @@
           <a:blip r:embed="rId3">
             <a:extLst>
               <a:ext uri="{28A0092B-C50C-407E-A947-70E740481C1C}">
-                <a14:useLocalDpi xmlns:a14="http://schemas.microsoft.com/office/drawing/2010/main" val="0"/>
+                <ns4:useLocalDpi val="0"/>
               </a:ext>
             </a:extLst>
           </a:blip>
@@ -8935,19 +9091,175 @@
           <a:noFill/>
           <a:extLst>
             <a:ext uri="{909E8E84-426E-40DD-AFC4-6F175D3DCCD1}">
-              <a14:hiddenFill xmlns:a14="http://schemas.microsoft.com/office/drawing/2010/main">
+              <ns4:hiddenFill>
                 <a:solidFill>
                   <a:srgbClr val="FFFFFF"/>
                 </a:solidFill>
-              </a14:hiddenFill>
+              </ns4:hiddenFill>
             </a:ext>
           </a:extLst>
         </p:spPr>
       </p:pic>
+      <p:sp>
+        <p:nvSpPr>
+          <p:cNvPr id="3" name="Footer Placeholder 3"/>
+          <p:cNvSpPr txBox="1">
+            <a:spLocks/>
+          </p:cNvSpPr>
+          <p:nvPr/>
+        </p:nvSpPr>
+        <p:spPr>
+          <a:xfrm>
+            <a:off x="10942204" y="6481737"/>
+            <a:ext cx="1217443" cy="365125"/>
+          </a:xfrm>
+          <a:prstGeom prst="rect">
+            <a:avLst/>
+          </a:prstGeom>
+        </p:spPr>
+        <p:txBody>
+          <a:bodyPr vert="horz" lIns="91440" tIns="45720" rIns="91440" bIns="45720" rtlCol="0" anchor="ctr"/>
+          <a:lstStyle>
+            <a:defPPr>
+              <a:defRPr lang="en-US"/>
+            </a:defPPr>
+            <a:lvl1pPr marL="0" algn="ctr" defTabSz="914400" rtl="0" eaLnBrk="1" latinLnBrk="0" hangingPunct="1">
+              <a:defRPr sz="1200" kern="1200">
+                <a:solidFill>
+                  <a:schemeClr val="tx1">
+                    <a:tint val="75000"/>
+                  </a:schemeClr>
+                </a:solidFill>
+                <a:latin typeface="+mn-lt"/>
+                <a:ea typeface="+mn-ea"/>
+                <a:cs typeface="+mn-cs"/>
+              </a:defRPr>
+            </a:lvl1pPr>
+            <a:lvl2pPr marL="457200" algn="l" defTabSz="914400" rtl="0" eaLnBrk="1" latinLnBrk="0" hangingPunct="1">
+              <a:defRPr sz="1800" kern="1200">
+                <a:solidFill>
+                  <a:schemeClr val="tx1"/>
+                </a:solidFill>
+                <a:latin typeface="+mn-lt"/>
+                <a:ea typeface="+mn-ea"/>
+                <a:cs typeface="+mn-cs"/>
+              </a:defRPr>
+            </a:lvl2pPr>
+            <a:lvl3pPr marL="914400" algn="l" defTabSz="914400" rtl="0" eaLnBrk="1" latinLnBrk="0" hangingPunct="1">
+              <a:defRPr sz="1800" kern="1200">
+                <a:solidFill>
+                  <a:schemeClr val="tx1"/>
+                </a:solidFill>
+                <a:latin typeface="+mn-lt"/>
+                <a:ea typeface="+mn-ea"/>
+                <a:cs typeface="+mn-cs"/>
+              </a:defRPr>
+            </a:lvl3pPr>
+            <a:lvl4pPr marL="1371600" algn="l" defTabSz="914400" rtl="0" eaLnBrk="1" latinLnBrk="0" hangingPunct="1">
+              <a:defRPr sz="1800" kern="1200">
+                <a:solidFill>
+                  <a:schemeClr val="tx1"/>
+                </a:solidFill>
+                <a:latin typeface="+mn-lt"/>
+                <a:ea typeface="+mn-ea"/>
+                <a:cs typeface="+mn-cs"/>
+              </a:defRPr>
+            </a:lvl4pPr>
+            <a:lvl5pPr marL="1828800" algn="l" defTabSz="914400" rtl="0" eaLnBrk="1" latinLnBrk="0" hangingPunct="1">
+              <a:defRPr sz="1800" kern="1200">
+                <a:solidFill>
+                  <a:schemeClr val="tx1"/>
+                </a:solidFill>
+                <a:latin typeface="+mn-lt"/>
+                <a:ea typeface="+mn-ea"/>
+                <a:cs typeface="+mn-cs"/>
+              </a:defRPr>
+            </a:lvl5pPr>
+            <a:lvl6pPr marL="2286000" algn="l" defTabSz="914400" rtl="0" eaLnBrk="1" latinLnBrk="0" hangingPunct="1">
+              <a:defRPr sz="1800" kern="1200">
+                <a:solidFill>
+                  <a:schemeClr val="tx1"/>
+                </a:solidFill>
+                <a:latin typeface="+mn-lt"/>
+                <a:ea typeface="+mn-ea"/>
+                <a:cs typeface="+mn-cs"/>
+              </a:defRPr>
+            </a:lvl6pPr>
+            <a:lvl7pPr marL="2743200" algn="l" defTabSz="914400" rtl="0" eaLnBrk="1" latinLnBrk="0" hangingPunct="1">
+              <a:defRPr sz="1800" kern="1200">
+                <a:solidFill>
+                  <a:schemeClr val="tx1"/>
+                </a:solidFill>
+                <a:latin typeface="+mn-lt"/>
+                <a:ea typeface="+mn-ea"/>
+                <a:cs typeface="+mn-cs"/>
+              </a:defRPr>
+            </a:lvl7pPr>
+            <a:lvl8pPr marL="3200400" algn="l" defTabSz="914400" rtl="0" eaLnBrk="1" latinLnBrk="0" hangingPunct="1">
+              <a:defRPr sz="1800" kern="1200">
+                <a:solidFill>
+                  <a:schemeClr val="tx1"/>
+                </a:solidFill>
+                <a:latin typeface="+mn-lt"/>
+                <a:ea typeface="+mn-ea"/>
+                <a:cs typeface="+mn-cs"/>
+              </a:defRPr>
+            </a:lvl8pPr>
+            <a:lvl9pPr marL="3657600" algn="l" defTabSz="914400" rtl="0" eaLnBrk="1" latinLnBrk="0" hangingPunct="1">
+              <a:defRPr sz="1800" kern="1200">
+                <a:solidFill>
+                  <a:schemeClr val="tx1"/>
+                </a:solidFill>
+                <a:latin typeface="+mn-lt"/>
+                <a:ea typeface="+mn-ea"/>
+                <a:cs typeface="+mn-cs"/>
+              </a:defRPr>
+            </a:lvl9pPr>
+          </a:lstStyle>
+          <a:p>
+            <a:pPr marL="0" marR="0" lvl="0" indent="0" algn="ctr" defTabSz="914400" rtl="0" eaLnBrk="1" fontAlgn="auto" latinLnBrk="0" hangingPunct="1">
+              <a:lnSpc>
+                <a:spcPct val="100000"/>
+              </a:lnSpc>
+              <a:spcBef>
+                <a:spcPts val="0"/>
+              </a:spcBef>
+              <a:spcAft>
+                <a:spcPts val="0"/>
+              </a:spcAft>
+              <a:buClrTx/>
+              <a:buSzTx/>
+              <a:buFontTx/>
+              <a:buNone/>
+              <a:tabLst/>
+              <a:defRPr/>
+            </a:pPr>
+            <a:r>
+              <a:rPr kumimoji="0" lang="en-US" sz="1200" b="0" i="0" u="none" strike="noStrike" kern="1200" cap="none" spc="0" normalizeH="0" baseline="0" noProof="0" dirty="0">
+                <a:ln>
+                  <a:noFill/>
+                </a:ln>
+                <a:solidFill>
+                  <a:prstClr val="black">
+                    <a:tint val="75000"/>
+                  </a:prstClr>
+                </a:solidFill>
+                <a:effectLst/>
+                <a:uLnTx/>
+                <a:uFillTx/>
+                <a:latin typeface="Helvetica Neue" panose="02000503000000020004" pitchFamily="2" charset="0"/>
+                <a:ea typeface="Helvetica Neue" panose="02000503000000020004" pitchFamily="2" charset="0"/>
+                <a:cs typeface="Helvetica Neue" panose="02000503000000020004" pitchFamily="2" charset="0"/>
+              </a:rPr>
+              <a:t>architrino.com</a:t>
+            </a:r>
+          </a:p>
+        </p:txBody>
+      </p:sp>
     </p:spTree>
     <p:extLst>
       <p:ext uri="{BB962C8B-B14F-4D97-AF65-F5344CB8AC3E}">
-        <p14:creationId xmlns:p14="http://schemas.microsoft.com/office/powerpoint/2010/main" val="3325331473"/>
+        <ns5:creationId val="3325331473"/>
       </p:ext>
     </p:extLst>
   </p:cSld>
@@ -8958,7 +9270,7 @@
 </file>
 
 <file path=ppt/slides/slide3.xml><?xml version="1.0" encoding="utf-8"?>
-<p:sld xmlns:a="http://schemas.openxmlformats.org/drawingml/2006/main" xmlns:r="http://schemas.openxmlformats.org/officeDocument/2006/relationships" xmlns:p="http://schemas.openxmlformats.org/presentationml/2006/main">
+<p:sld xmlns:a="http://schemas.openxmlformats.org/drawingml/2006/main" xmlns:a16="http://schemas.microsoft.com/office/drawing/2014/main" xmlns:ns4="http://schemas.microsoft.com/office/drawing/2010/main" xmlns:ns5="http://schemas.microsoft.com/office/powerpoint/2010/main" xmlns:p="http://schemas.openxmlformats.org/presentationml/2006/main" xmlns:r="http://schemas.openxmlformats.org/officeDocument/2006/relationships">
   <p:cSld>
     <p:bg>
       <p:bgPr>
@@ -8973,7 +9285,7 @@
         <p:cNvPr id="1" name="">
           <a:extLst>
             <a:ext uri="{FF2B5EF4-FFF2-40B4-BE49-F238E27FC236}">
-              <a16:creationId xmlns:a16="http://schemas.microsoft.com/office/drawing/2014/main" id="{A711A77B-062A-BD38-03C1-60CB4990FB5B}"/>
+              <a16:creationId id="{A711A77B-062A-BD38-03C1-60CB4990FB5B}"/>
             </a:ext>
           </a:extLst>
         </p:cNvPr>
@@ -8993,7 +9305,7 @@
           <p:cNvPr id="2" name="TextBox 1">
             <a:extLst>
               <a:ext uri="{FF2B5EF4-FFF2-40B4-BE49-F238E27FC236}">
-                <a16:creationId xmlns:a16="http://schemas.microsoft.com/office/drawing/2014/main" id="{50904127-1953-FD93-0848-CFD145C7CE67}"/>
+                <a16:creationId id="{50904127-1953-FD93-0848-CFD145C7CE67}"/>
               </a:ext>
             </a:extLst>
           </p:cNvPr>
@@ -9089,7 +9401,7 @@
           <p:cNvPr id="5" name="TextBox 4">
             <a:extLst>
               <a:ext uri="{FF2B5EF4-FFF2-40B4-BE49-F238E27FC236}">
-                <a16:creationId xmlns:a16="http://schemas.microsoft.com/office/drawing/2014/main" id="{5A4BFBEF-ACE4-2284-D65B-A6DB0D04FC01}"/>
+                <a16:creationId id="{5A4BFBEF-ACE4-2284-D65B-A6DB0D04FC01}"/>
               </a:ext>
             </a:extLst>
           </p:cNvPr>
@@ -9847,7 +10159,7 @@
           <p:cNvPr id="9" name="Picture 2">
             <a:extLst>
               <a:ext uri="{FF2B5EF4-FFF2-40B4-BE49-F238E27FC236}">
-                <a16:creationId xmlns:a16="http://schemas.microsoft.com/office/drawing/2014/main" id="{9E983575-73C1-C2AA-EAB2-22F5A2F20397}"/>
+                <a16:creationId id="{9E983575-73C1-C2AA-EAB2-22F5A2F20397}"/>
               </a:ext>
             </a:extLst>
           </p:cNvPr>
@@ -9860,7 +10172,7 @@
           <a:blip r:embed="rId3">
             <a:extLst>
               <a:ext uri="{28A0092B-C50C-407E-A947-70E740481C1C}">
-                <a14:useLocalDpi xmlns:a14="http://schemas.microsoft.com/office/drawing/2010/main" val="0"/>
+                <ns4:useLocalDpi val="0"/>
               </a:ext>
             </a:extLst>
           </a:blip>
@@ -9880,19 +10192,175 @@
           <a:noFill/>
           <a:extLst>
             <a:ext uri="{909E8E84-426E-40DD-AFC4-6F175D3DCCD1}">
-              <a14:hiddenFill xmlns:a14="http://schemas.microsoft.com/office/drawing/2010/main">
+              <ns4:hiddenFill>
                 <a:solidFill>
                   <a:srgbClr val="FFFFFF"/>
                 </a:solidFill>
-              </a14:hiddenFill>
+              </ns4:hiddenFill>
             </a:ext>
           </a:extLst>
         </p:spPr>
       </p:pic>
+      <p:sp>
+        <p:nvSpPr>
+          <p:cNvPr id="3" name="Footer Placeholder 3"/>
+          <p:cNvSpPr txBox="1">
+            <a:spLocks/>
+          </p:cNvSpPr>
+          <p:nvPr/>
+        </p:nvSpPr>
+        <p:spPr>
+          <a:xfrm>
+            <a:off x="10942204" y="6481737"/>
+            <a:ext cx="1217443" cy="365125"/>
+          </a:xfrm>
+          <a:prstGeom prst="rect">
+            <a:avLst/>
+          </a:prstGeom>
+        </p:spPr>
+        <p:txBody>
+          <a:bodyPr vert="horz" lIns="91440" tIns="45720" rIns="91440" bIns="45720" rtlCol="0" anchor="ctr"/>
+          <a:lstStyle>
+            <a:defPPr>
+              <a:defRPr lang="en-US"/>
+            </a:defPPr>
+            <a:lvl1pPr marL="0" algn="ctr" defTabSz="914400" rtl="0" eaLnBrk="1" latinLnBrk="0" hangingPunct="1">
+              <a:defRPr sz="1200" kern="1200">
+                <a:solidFill>
+                  <a:schemeClr val="tx1">
+                    <a:tint val="75000"/>
+                  </a:schemeClr>
+                </a:solidFill>
+                <a:latin typeface="+mn-lt"/>
+                <a:ea typeface="+mn-ea"/>
+                <a:cs typeface="+mn-cs"/>
+              </a:defRPr>
+            </a:lvl1pPr>
+            <a:lvl2pPr marL="457200" algn="l" defTabSz="914400" rtl="0" eaLnBrk="1" latinLnBrk="0" hangingPunct="1">
+              <a:defRPr sz="1800" kern="1200">
+                <a:solidFill>
+                  <a:schemeClr val="tx1"/>
+                </a:solidFill>
+                <a:latin typeface="+mn-lt"/>
+                <a:ea typeface="+mn-ea"/>
+                <a:cs typeface="+mn-cs"/>
+              </a:defRPr>
+            </a:lvl2pPr>
+            <a:lvl3pPr marL="914400" algn="l" defTabSz="914400" rtl="0" eaLnBrk="1" latinLnBrk="0" hangingPunct="1">
+              <a:defRPr sz="1800" kern="1200">
+                <a:solidFill>
+                  <a:schemeClr val="tx1"/>
+                </a:solidFill>
+                <a:latin typeface="+mn-lt"/>
+                <a:ea typeface="+mn-ea"/>
+                <a:cs typeface="+mn-cs"/>
+              </a:defRPr>
+            </a:lvl3pPr>
+            <a:lvl4pPr marL="1371600" algn="l" defTabSz="914400" rtl="0" eaLnBrk="1" latinLnBrk="0" hangingPunct="1">
+              <a:defRPr sz="1800" kern="1200">
+                <a:solidFill>
+                  <a:schemeClr val="tx1"/>
+                </a:solidFill>
+                <a:latin typeface="+mn-lt"/>
+                <a:ea typeface="+mn-ea"/>
+                <a:cs typeface="+mn-cs"/>
+              </a:defRPr>
+            </a:lvl4pPr>
+            <a:lvl5pPr marL="1828800" algn="l" defTabSz="914400" rtl="0" eaLnBrk="1" latinLnBrk="0" hangingPunct="1">
+              <a:defRPr sz="1800" kern="1200">
+                <a:solidFill>
+                  <a:schemeClr val="tx1"/>
+                </a:solidFill>
+                <a:latin typeface="+mn-lt"/>
+                <a:ea typeface="+mn-ea"/>
+                <a:cs typeface="+mn-cs"/>
+              </a:defRPr>
+            </a:lvl5pPr>
+            <a:lvl6pPr marL="2286000" algn="l" defTabSz="914400" rtl="0" eaLnBrk="1" latinLnBrk="0" hangingPunct="1">
+              <a:defRPr sz="1800" kern="1200">
+                <a:solidFill>
+                  <a:schemeClr val="tx1"/>
+                </a:solidFill>
+                <a:latin typeface="+mn-lt"/>
+                <a:ea typeface="+mn-ea"/>
+                <a:cs typeface="+mn-cs"/>
+              </a:defRPr>
+            </a:lvl6pPr>
+            <a:lvl7pPr marL="2743200" algn="l" defTabSz="914400" rtl="0" eaLnBrk="1" latinLnBrk="0" hangingPunct="1">
+              <a:defRPr sz="1800" kern="1200">
+                <a:solidFill>
+                  <a:schemeClr val="tx1"/>
+                </a:solidFill>
+                <a:latin typeface="+mn-lt"/>
+                <a:ea typeface="+mn-ea"/>
+                <a:cs typeface="+mn-cs"/>
+              </a:defRPr>
+            </a:lvl7pPr>
+            <a:lvl8pPr marL="3200400" algn="l" defTabSz="914400" rtl="0" eaLnBrk="1" latinLnBrk="0" hangingPunct="1">
+              <a:defRPr sz="1800" kern="1200">
+                <a:solidFill>
+                  <a:schemeClr val="tx1"/>
+                </a:solidFill>
+                <a:latin typeface="+mn-lt"/>
+                <a:ea typeface="+mn-ea"/>
+                <a:cs typeface="+mn-cs"/>
+              </a:defRPr>
+            </a:lvl8pPr>
+            <a:lvl9pPr marL="3657600" algn="l" defTabSz="914400" rtl="0" eaLnBrk="1" latinLnBrk="0" hangingPunct="1">
+              <a:defRPr sz="1800" kern="1200">
+                <a:solidFill>
+                  <a:schemeClr val="tx1"/>
+                </a:solidFill>
+                <a:latin typeface="+mn-lt"/>
+                <a:ea typeface="+mn-ea"/>
+                <a:cs typeface="+mn-cs"/>
+              </a:defRPr>
+            </a:lvl9pPr>
+          </a:lstStyle>
+          <a:p>
+            <a:pPr marL="0" marR="0" lvl="0" indent="0" algn="ctr" defTabSz="914400" rtl="0" eaLnBrk="1" fontAlgn="auto" latinLnBrk="0" hangingPunct="1">
+              <a:lnSpc>
+                <a:spcPct val="100000"/>
+              </a:lnSpc>
+              <a:spcBef>
+                <a:spcPts val="0"/>
+              </a:spcBef>
+              <a:spcAft>
+                <a:spcPts val="0"/>
+              </a:spcAft>
+              <a:buClrTx/>
+              <a:buSzTx/>
+              <a:buFontTx/>
+              <a:buNone/>
+              <a:tabLst/>
+              <a:defRPr/>
+            </a:pPr>
+            <a:r>
+              <a:rPr kumimoji="0" lang="en-US" sz="1200" b="0" i="0" u="none" strike="noStrike" kern="1200" cap="none" spc="0" normalizeH="0" baseline="0" noProof="0" dirty="0">
+                <a:ln>
+                  <a:noFill/>
+                </a:ln>
+                <a:solidFill>
+                  <a:prstClr val="black">
+                    <a:tint val="75000"/>
+                  </a:prstClr>
+                </a:solidFill>
+                <a:effectLst/>
+                <a:uLnTx/>
+                <a:uFillTx/>
+                <a:latin typeface="Helvetica Neue" panose="02000503000000020004" pitchFamily="2" charset="0"/>
+                <a:ea typeface="Helvetica Neue" panose="02000503000000020004" pitchFamily="2" charset="0"/>
+                <a:cs typeface="Helvetica Neue" panose="02000503000000020004" pitchFamily="2" charset="0"/>
+              </a:rPr>
+              <a:t>architrino.com</a:t>
+            </a:r>
+          </a:p>
+        </p:txBody>
+      </p:sp>
     </p:spTree>
     <p:extLst>
       <p:ext uri="{BB962C8B-B14F-4D97-AF65-F5344CB8AC3E}">
-        <p14:creationId xmlns:p14="http://schemas.microsoft.com/office/powerpoint/2010/main" val="2649105293"/>
+        <ns5:creationId val="2649105293"/>
       </p:ext>
     </p:extLst>
   </p:cSld>
@@ -9903,7 +10371,7 @@
 </file>
 
 <file path=ppt/slides/slide4.xml><?xml version="1.0" encoding="utf-8"?>
-<p:sld xmlns:a="http://schemas.openxmlformats.org/drawingml/2006/main" xmlns:r="http://schemas.openxmlformats.org/officeDocument/2006/relationships" xmlns:p="http://schemas.openxmlformats.org/presentationml/2006/main">
+<p:sld xmlns:a="http://schemas.openxmlformats.org/drawingml/2006/main" xmlns:a16="http://schemas.microsoft.com/office/drawing/2014/main" xmlns:ns3="http://schemas.microsoft.com/office/powerpoint/2010/main" xmlns:p="http://schemas.openxmlformats.org/presentationml/2006/main">
   <p:cSld>
     <p:bg>
       <p:bgPr>
@@ -9918,7 +10386,7 @@
         <p:cNvPr id="1" name="">
           <a:extLst>
             <a:ext uri="{FF2B5EF4-FFF2-40B4-BE49-F238E27FC236}">
-              <a16:creationId xmlns:a16="http://schemas.microsoft.com/office/drawing/2014/main" id="{BBFBF43E-80A4-D013-5C64-AD16BBE309A9}"/>
+              <a16:creationId id="{BBFBF43E-80A4-D013-5C64-AD16BBE309A9}"/>
             </a:ext>
           </a:extLst>
         </p:cNvPr>
@@ -9938,7 +10406,7 @@
           <p:cNvPr id="2" name="TextBox 1">
             <a:extLst>
               <a:ext uri="{FF2B5EF4-FFF2-40B4-BE49-F238E27FC236}">
-                <a16:creationId xmlns:a16="http://schemas.microsoft.com/office/drawing/2014/main" id="{DF4E743A-E740-B9E8-D400-EA3F32FF1D55}"/>
+                <a16:creationId id="{DF4E743A-E740-B9E8-D400-EA3F32FF1D55}"/>
               </a:ext>
             </a:extLst>
           </p:cNvPr>
@@ -10034,7 +10502,7 @@
           <p:cNvPr id="5" name="TextBox 4">
             <a:extLst>
               <a:ext uri="{FF2B5EF4-FFF2-40B4-BE49-F238E27FC236}">
-                <a16:creationId xmlns:a16="http://schemas.microsoft.com/office/drawing/2014/main" id="{42082ECC-CEEB-D2B8-60C0-FAF5A1857737}"/>
+                <a16:creationId id="{42082ECC-CEEB-D2B8-60C0-FAF5A1857737}"/>
               </a:ext>
             </a:extLst>
           </p:cNvPr>
@@ -10949,10 +11417,166 @@
           </a:p>
         </p:txBody>
       </p:sp>
+      <p:sp>
+        <p:nvSpPr>
+          <p:cNvPr id="3" name="Footer Placeholder 3"/>
+          <p:cNvSpPr txBox="1">
+            <a:spLocks/>
+          </p:cNvSpPr>
+          <p:nvPr/>
+        </p:nvSpPr>
+        <p:spPr>
+          <a:xfrm>
+            <a:off x="10942204" y="6481737"/>
+            <a:ext cx="1217443" cy="365125"/>
+          </a:xfrm>
+          <a:prstGeom prst="rect">
+            <a:avLst/>
+          </a:prstGeom>
+        </p:spPr>
+        <p:txBody>
+          <a:bodyPr vert="horz" lIns="91440" tIns="45720" rIns="91440" bIns="45720" rtlCol="0" anchor="ctr"/>
+          <a:lstStyle>
+            <a:defPPr>
+              <a:defRPr lang="en-US"/>
+            </a:defPPr>
+            <a:lvl1pPr marL="0" algn="ctr" defTabSz="914400" rtl="0" eaLnBrk="1" latinLnBrk="0" hangingPunct="1">
+              <a:defRPr sz="1200" kern="1200">
+                <a:solidFill>
+                  <a:schemeClr val="tx1">
+                    <a:tint val="75000"/>
+                  </a:schemeClr>
+                </a:solidFill>
+                <a:latin typeface="+mn-lt"/>
+                <a:ea typeface="+mn-ea"/>
+                <a:cs typeface="+mn-cs"/>
+              </a:defRPr>
+            </a:lvl1pPr>
+            <a:lvl2pPr marL="457200" algn="l" defTabSz="914400" rtl="0" eaLnBrk="1" latinLnBrk="0" hangingPunct="1">
+              <a:defRPr sz="1800" kern="1200">
+                <a:solidFill>
+                  <a:schemeClr val="tx1"/>
+                </a:solidFill>
+                <a:latin typeface="+mn-lt"/>
+                <a:ea typeface="+mn-ea"/>
+                <a:cs typeface="+mn-cs"/>
+              </a:defRPr>
+            </a:lvl2pPr>
+            <a:lvl3pPr marL="914400" algn="l" defTabSz="914400" rtl="0" eaLnBrk="1" latinLnBrk="0" hangingPunct="1">
+              <a:defRPr sz="1800" kern="1200">
+                <a:solidFill>
+                  <a:schemeClr val="tx1"/>
+                </a:solidFill>
+                <a:latin typeface="+mn-lt"/>
+                <a:ea typeface="+mn-ea"/>
+                <a:cs typeface="+mn-cs"/>
+              </a:defRPr>
+            </a:lvl3pPr>
+            <a:lvl4pPr marL="1371600" algn="l" defTabSz="914400" rtl="0" eaLnBrk="1" latinLnBrk="0" hangingPunct="1">
+              <a:defRPr sz="1800" kern="1200">
+                <a:solidFill>
+                  <a:schemeClr val="tx1"/>
+                </a:solidFill>
+                <a:latin typeface="+mn-lt"/>
+                <a:ea typeface="+mn-ea"/>
+                <a:cs typeface="+mn-cs"/>
+              </a:defRPr>
+            </a:lvl4pPr>
+            <a:lvl5pPr marL="1828800" algn="l" defTabSz="914400" rtl="0" eaLnBrk="1" latinLnBrk="0" hangingPunct="1">
+              <a:defRPr sz="1800" kern="1200">
+                <a:solidFill>
+                  <a:schemeClr val="tx1"/>
+                </a:solidFill>
+                <a:latin typeface="+mn-lt"/>
+                <a:ea typeface="+mn-ea"/>
+                <a:cs typeface="+mn-cs"/>
+              </a:defRPr>
+            </a:lvl5pPr>
+            <a:lvl6pPr marL="2286000" algn="l" defTabSz="914400" rtl="0" eaLnBrk="1" latinLnBrk="0" hangingPunct="1">
+              <a:defRPr sz="1800" kern="1200">
+                <a:solidFill>
+                  <a:schemeClr val="tx1"/>
+                </a:solidFill>
+                <a:latin typeface="+mn-lt"/>
+                <a:ea typeface="+mn-ea"/>
+                <a:cs typeface="+mn-cs"/>
+              </a:defRPr>
+            </a:lvl6pPr>
+            <a:lvl7pPr marL="2743200" algn="l" defTabSz="914400" rtl="0" eaLnBrk="1" latinLnBrk="0" hangingPunct="1">
+              <a:defRPr sz="1800" kern="1200">
+                <a:solidFill>
+                  <a:schemeClr val="tx1"/>
+                </a:solidFill>
+                <a:latin typeface="+mn-lt"/>
+                <a:ea typeface="+mn-ea"/>
+                <a:cs typeface="+mn-cs"/>
+              </a:defRPr>
+            </a:lvl7pPr>
+            <a:lvl8pPr marL="3200400" algn="l" defTabSz="914400" rtl="0" eaLnBrk="1" latinLnBrk="0" hangingPunct="1">
+              <a:defRPr sz="1800" kern="1200">
+                <a:solidFill>
+                  <a:schemeClr val="tx1"/>
+                </a:solidFill>
+                <a:latin typeface="+mn-lt"/>
+                <a:ea typeface="+mn-ea"/>
+                <a:cs typeface="+mn-cs"/>
+              </a:defRPr>
+            </a:lvl8pPr>
+            <a:lvl9pPr marL="3657600" algn="l" defTabSz="914400" rtl="0" eaLnBrk="1" latinLnBrk="0" hangingPunct="1">
+              <a:defRPr sz="1800" kern="1200">
+                <a:solidFill>
+                  <a:schemeClr val="tx1"/>
+                </a:solidFill>
+                <a:latin typeface="+mn-lt"/>
+                <a:ea typeface="+mn-ea"/>
+                <a:cs typeface="+mn-cs"/>
+              </a:defRPr>
+            </a:lvl9pPr>
+          </a:lstStyle>
+          <a:p>
+            <a:pPr marL="0" marR="0" lvl="0" indent="0" algn="ctr" defTabSz="914400" rtl="0" eaLnBrk="1" fontAlgn="auto" latinLnBrk="0" hangingPunct="1">
+              <a:lnSpc>
+                <a:spcPct val="100000"/>
+              </a:lnSpc>
+              <a:spcBef>
+                <a:spcPts val="0"/>
+              </a:spcBef>
+              <a:spcAft>
+                <a:spcPts val="0"/>
+              </a:spcAft>
+              <a:buClrTx/>
+              <a:buSzTx/>
+              <a:buFontTx/>
+              <a:buNone/>
+              <a:tabLst/>
+              <a:defRPr/>
+            </a:pPr>
+            <a:r>
+              <a:rPr kumimoji="0" lang="en-US" sz="1200" b="0" i="0" u="none" strike="noStrike" kern="1200" cap="none" spc="0" normalizeH="0" baseline="0" noProof="0" dirty="0">
+                <a:ln>
+                  <a:noFill/>
+                </a:ln>
+                <a:solidFill>
+                  <a:prstClr val="black">
+                    <a:tint val="75000"/>
+                  </a:prstClr>
+                </a:solidFill>
+                <a:effectLst/>
+                <a:uLnTx/>
+                <a:uFillTx/>
+                <a:latin typeface="Helvetica Neue" panose="02000503000000020004" pitchFamily="2" charset="0"/>
+                <a:ea typeface="Helvetica Neue" panose="02000503000000020004" pitchFamily="2" charset="0"/>
+                <a:cs typeface="Helvetica Neue" panose="02000503000000020004" pitchFamily="2" charset="0"/>
+              </a:rPr>
+              <a:t>architrino.com</a:t>
+            </a:r>
+          </a:p>
+        </p:txBody>
+      </p:sp>
     </p:spTree>
     <p:extLst>
       <p:ext uri="{BB962C8B-B14F-4D97-AF65-F5344CB8AC3E}">
-        <p14:creationId xmlns:p14="http://schemas.microsoft.com/office/powerpoint/2010/main" val="3863008067"/>
+        <ns3:creationId val="3863008067"/>
       </p:ext>
     </p:extLst>
   </p:cSld>
@@ -10963,7 +11587,7 @@
 </file>
 
 <file path=ppt/slides/slide5.xml><?xml version="1.0" encoding="utf-8"?>
-<p:sld xmlns:a="http://schemas.openxmlformats.org/drawingml/2006/main" xmlns:r="http://schemas.openxmlformats.org/officeDocument/2006/relationships" xmlns:p="http://schemas.openxmlformats.org/presentationml/2006/main">
+<p:sld xmlns:a="http://schemas.openxmlformats.org/drawingml/2006/main" xmlns:a16="http://schemas.microsoft.com/office/drawing/2014/main" xmlns:ns3="http://schemas.microsoft.com/office/powerpoint/2010/main" xmlns:ns4="http://schemas.openxmlformats.org/drawingml/2006/diagram" xmlns:p="http://schemas.openxmlformats.org/presentationml/2006/main" xmlns:r="http://schemas.openxmlformats.org/officeDocument/2006/relationships">
   <p:cSld>
     <p:bg>
       <p:bgPr>
@@ -10978,7 +11602,7 @@
         <p:cNvPr id="1" name="">
           <a:extLst>
             <a:ext uri="{FF2B5EF4-FFF2-40B4-BE49-F238E27FC236}">
-              <a16:creationId xmlns:a16="http://schemas.microsoft.com/office/drawing/2014/main" id="{1453722B-3781-0E08-25A9-7EDF71C96246}"/>
+              <a16:creationId id="{1453722B-3781-0E08-25A9-7EDF71C96246}"/>
             </a:ext>
           </a:extLst>
         </p:cNvPr>
@@ -10998,7 +11622,7 @@
           <p:cNvPr id="3" name="Diagram 2">
             <a:extLst>
               <a:ext uri="{FF2B5EF4-FFF2-40B4-BE49-F238E27FC236}">
-                <a16:creationId xmlns:a16="http://schemas.microsoft.com/office/drawing/2014/main" id="{64AD777F-D0D7-80D3-EA3B-8A560D8BC354}"/>
+                <a16:creationId id="{64AD777F-D0D7-80D3-EA3B-8A560D8BC354}"/>
               </a:ext>
             </a:extLst>
           </p:cNvPr>
@@ -11006,7 +11630,7 @@
           <p:nvPr>
             <p:extLst>
               <p:ext uri="{D42A27DB-BD31-4B8C-83A1-F6EECF244321}">
-                <p14:modId xmlns:p14="http://schemas.microsoft.com/office/powerpoint/2010/main" val="4232438656"/>
+                <ns3:modId val="4232438656"/>
               </p:ext>
             </p:extLst>
           </p:nvPr>
@@ -11017,7 +11641,7 @@
         </p:xfrm>
         <a:graphic>
           <a:graphicData uri="http://schemas.openxmlformats.org/drawingml/2006/diagram">
-            <dgm:relIds xmlns:dgm="http://schemas.openxmlformats.org/drawingml/2006/diagram" xmlns:r="http://schemas.openxmlformats.org/officeDocument/2006/relationships" r:dm="rId3" r:lo="rId4" r:qs="rId5" r:cs="rId6"/>
+            <ns4:relIds r:dm="rId3" r:lo="rId4" r:qs="rId5" r:cs="rId6"/>
           </a:graphicData>
         </a:graphic>
       </p:graphicFrame>
@@ -11026,7 +11650,7 @@
           <p:cNvPr id="4" name="TextBox 3">
             <a:extLst>
               <a:ext uri="{FF2B5EF4-FFF2-40B4-BE49-F238E27FC236}">
-                <a16:creationId xmlns:a16="http://schemas.microsoft.com/office/drawing/2014/main" id="{8B0D959F-1F8C-C85F-60B5-2379D17C87E3}"/>
+                <a16:creationId id="{8B0D959F-1F8C-C85F-60B5-2379D17C87E3}"/>
               </a:ext>
             </a:extLst>
           </p:cNvPr>
@@ -11237,7 +11861,163 @@
                 <a:ea typeface="Helvetica Neue" panose="02000503000000020004" pitchFamily="2" charset="0"/>
                 <a:cs typeface="Helvetica Neue" panose="02000503000000020004" pitchFamily="2" charset="0"/>
               </a:rPr>
-              <a:t> point potentials</a:t>
+              <a:t> architrinos</a:t>
+            </a:r>
+          </a:p>
+        </p:txBody>
+      </p:sp>
+      <p:sp>
+        <p:nvSpPr>
+          <p:cNvPr id="5" name="Footer Placeholder 3"/>
+          <p:cNvSpPr txBox="1">
+            <a:spLocks/>
+          </p:cNvSpPr>
+          <p:nvPr/>
+        </p:nvSpPr>
+        <p:spPr>
+          <a:xfrm>
+            <a:off x="10942204" y="6481737"/>
+            <a:ext cx="1217443" cy="365125"/>
+          </a:xfrm>
+          <a:prstGeom prst="rect">
+            <a:avLst/>
+          </a:prstGeom>
+        </p:spPr>
+        <p:txBody>
+          <a:bodyPr vert="horz" lIns="91440" tIns="45720" rIns="91440" bIns="45720" rtlCol="0" anchor="ctr"/>
+          <a:lstStyle>
+            <a:defPPr>
+              <a:defRPr lang="en-US"/>
+            </a:defPPr>
+            <a:lvl1pPr marL="0" algn="ctr" defTabSz="914400" rtl="0" eaLnBrk="1" latinLnBrk="0" hangingPunct="1">
+              <a:defRPr sz="1200" kern="1200">
+                <a:solidFill>
+                  <a:schemeClr val="tx1">
+                    <a:tint val="75000"/>
+                  </a:schemeClr>
+                </a:solidFill>
+                <a:latin typeface="+mn-lt"/>
+                <a:ea typeface="+mn-ea"/>
+                <a:cs typeface="+mn-cs"/>
+              </a:defRPr>
+            </a:lvl1pPr>
+            <a:lvl2pPr marL="457200" algn="l" defTabSz="914400" rtl="0" eaLnBrk="1" latinLnBrk="0" hangingPunct="1">
+              <a:defRPr sz="1800" kern="1200">
+                <a:solidFill>
+                  <a:schemeClr val="tx1"/>
+                </a:solidFill>
+                <a:latin typeface="+mn-lt"/>
+                <a:ea typeface="+mn-ea"/>
+                <a:cs typeface="+mn-cs"/>
+              </a:defRPr>
+            </a:lvl2pPr>
+            <a:lvl3pPr marL="914400" algn="l" defTabSz="914400" rtl="0" eaLnBrk="1" latinLnBrk="0" hangingPunct="1">
+              <a:defRPr sz="1800" kern="1200">
+                <a:solidFill>
+                  <a:schemeClr val="tx1"/>
+                </a:solidFill>
+                <a:latin typeface="+mn-lt"/>
+                <a:ea typeface="+mn-ea"/>
+                <a:cs typeface="+mn-cs"/>
+              </a:defRPr>
+            </a:lvl3pPr>
+            <a:lvl4pPr marL="1371600" algn="l" defTabSz="914400" rtl="0" eaLnBrk="1" latinLnBrk="0" hangingPunct="1">
+              <a:defRPr sz="1800" kern="1200">
+                <a:solidFill>
+                  <a:schemeClr val="tx1"/>
+                </a:solidFill>
+                <a:latin typeface="+mn-lt"/>
+                <a:ea typeface="+mn-ea"/>
+                <a:cs typeface="+mn-cs"/>
+              </a:defRPr>
+            </a:lvl4pPr>
+            <a:lvl5pPr marL="1828800" algn="l" defTabSz="914400" rtl="0" eaLnBrk="1" latinLnBrk="0" hangingPunct="1">
+              <a:defRPr sz="1800" kern="1200">
+                <a:solidFill>
+                  <a:schemeClr val="tx1"/>
+                </a:solidFill>
+                <a:latin typeface="+mn-lt"/>
+                <a:ea typeface="+mn-ea"/>
+                <a:cs typeface="+mn-cs"/>
+              </a:defRPr>
+            </a:lvl5pPr>
+            <a:lvl6pPr marL="2286000" algn="l" defTabSz="914400" rtl="0" eaLnBrk="1" latinLnBrk="0" hangingPunct="1">
+              <a:defRPr sz="1800" kern="1200">
+                <a:solidFill>
+                  <a:schemeClr val="tx1"/>
+                </a:solidFill>
+                <a:latin typeface="+mn-lt"/>
+                <a:ea typeface="+mn-ea"/>
+                <a:cs typeface="+mn-cs"/>
+              </a:defRPr>
+            </a:lvl6pPr>
+            <a:lvl7pPr marL="2743200" algn="l" defTabSz="914400" rtl="0" eaLnBrk="1" latinLnBrk="0" hangingPunct="1">
+              <a:defRPr sz="1800" kern="1200">
+                <a:solidFill>
+                  <a:schemeClr val="tx1"/>
+                </a:solidFill>
+                <a:latin typeface="+mn-lt"/>
+                <a:ea typeface="+mn-ea"/>
+                <a:cs typeface="+mn-cs"/>
+              </a:defRPr>
+            </a:lvl7pPr>
+            <a:lvl8pPr marL="3200400" algn="l" defTabSz="914400" rtl="0" eaLnBrk="1" latinLnBrk="0" hangingPunct="1">
+              <a:defRPr sz="1800" kern="1200">
+                <a:solidFill>
+                  <a:schemeClr val="tx1"/>
+                </a:solidFill>
+                <a:latin typeface="+mn-lt"/>
+                <a:ea typeface="+mn-ea"/>
+                <a:cs typeface="+mn-cs"/>
+              </a:defRPr>
+            </a:lvl8pPr>
+            <a:lvl9pPr marL="3657600" algn="l" defTabSz="914400" rtl="0" eaLnBrk="1" latinLnBrk="0" hangingPunct="1">
+              <a:defRPr sz="1800" kern="1200">
+                <a:solidFill>
+                  <a:schemeClr val="tx1"/>
+                </a:solidFill>
+                <a:latin typeface="+mn-lt"/>
+                <a:ea typeface="+mn-ea"/>
+                <a:cs typeface="+mn-cs"/>
+              </a:defRPr>
+            </a:lvl9pPr>
+          </a:lstStyle>
+          <a:p>
+            <a:pPr marL="0" marR="0" lvl="0" indent="0" algn="ctr" defTabSz="914400" rtl="0" eaLnBrk="1" fontAlgn="auto" latinLnBrk="0" hangingPunct="1">
+              <a:lnSpc>
+                <a:spcPct val="100000"/>
+              </a:lnSpc>
+              <a:spcBef>
+                <a:spcPts val="0"/>
+              </a:spcBef>
+              <a:spcAft>
+                <a:spcPts val="0"/>
+              </a:spcAft>
+              <a:buClrTx/>
+              <a:buSzTx/>
+              <a:buFontTx/>
+              <a:buNone/>
+              <a:tabLst/>
+              <a:defRPr/>
+            </a:pPr>
+            <a:r>
+              <a:rPr kumimoji="0" lang="en-US" sz="1200" b="0" i="0" u="none" strike="noStrike" kern="1200" cap="none" spc="0" normalizeH="0" baseline="0" noProof="0" dirty="0">
+                <a:ln>
+                  <a:noFill/>
+                </a:ln>
+                <a:solidFill>
+                  <a:prstClr val="black">
+                    <a:tint val="75000"/>
+                  </a:prstClr>
+                </a:solidFill>
+                <a:effectLst/>
+                <a:uLnTx/>
+                <a:uFillTx/>
+                <a:latin typeface="Helvetica Neue" panose="02000503000000020004" pitchFamily="2" charset="0"/>
+                <a:ea typeface="Helvetica Neue" panose="02000503000000020004" pitchFamily="2" charset="0"/>
+                <a:cs typeface="Helvetica Neue" panose="02000503000000020004" pitchFamily="2" charset="0"/>
+              </a:rPr>
+              <a:t>architrino.com</a:t>
             </a:r>
           </a:p>
         </p:txBody>
@@ -11245,7 +12025,7 @@
     </p:spTree>
     <p:extLst>
       <p:ext uri="{BB962C8B-B14F-4D97-AF65-F5344CB8AC3E}">
-        <p14:creationId xmlns:p14="http://schemas.microsoft.com/office/powerpoint/2010/main" val="213017330"/>
+        <ns3:creationId val="213017330"/>
       </p:ext>
     </p:extLst>
   </p:cSld>

--- a/reference/archie/presentations/NPQG Assemblies - Early Life.pptx
+++ b/reference/archie/presentations/NPQG Assemblies - Early Life.pptx
@@ -8073,7 +8073,7 @@
 </file>
 
 <file path=ppt/slides/slide1.xml><?xml version="1.0" encoding="utf-8"?>
-<p:sld xmlns:a="http://schemas.openxmlformats.org/drawingml/2006/main" xmlns:a16="http://schemas.microsoft.com/office/drawing/2014/main" xmlns:ns3="http://schemas.microsoft.com/office/powerpoint/2010/main" xmlns:p="http://schemas.openxmlformats.org/presentationml/2006/main">
+<p:sld xmlns:a="http://schemas.openxmlformats.org/drawingml/2006/main" xmlns:r="http://schemas.openxmlformats.org/officeDocument/2006/relationships" xmlns:p="http://schemas.openxmlformats.org/presentationml/2006/main">
   <p:cSld>
     <p:bg>
       <p:bgPr>
@@ -8088,7 +8088,7 @@
         <p:cNvPr id="1" name="">
           <a:extLst>
             <a:ext uri="{FF2B5EF4-FFF2-40B4-BE49-F238E27FC236}">
-              <a16:creationId id="{A95AD505-148F-7C13-EC73-22518E14F4FC}"/>
+              <a16:creationId xmlns:a16="http://schemas.microsoft.com/office/drawing/2014/main" id="{A95AD505-148F-7C13-EC73-22518E14F4FC}"/>
             </a:ext>
           </a:extLst>
         </p:cNvPr>
@@ -8108,7 +8108,7 @@
           <p:cNvPr id="2" name="TextBox 1">
             <a:extLst>
               <a:ext uri="{FF2B5EF4-FFF2-40B4-BE49-F238E27FC236}">
-                <a16:creationId id="{B3C53938-22FE-22BD-E59A-97F76192783B}"/>
+                <a16:creationId xmlns:a16="http://schemas.microsoft.com/office/drawing/2014/main" id="{B3C53938-22FE-22BD-E59A-97F76192783B}"/>
               </a:ext>
             </a:extLst>
           </p:cNvPr>
@@ -8117,7 +8117,7 @@
         </p:nvSpPr>
         <p:spPr>
           <a:xfrm>
-            <a:off x="0" y="186247"/>
+            <a:off x="0" y="858908"/>
             <a:ext cx="12191999" cy="3953968"/>
           </a:xfrm>
           <a:prstGeom prst="rect">
@@ -8410,7 +8410,7 @@
     </p:spTree>
     <p:extLst>
       <p:ext uri="{BB962C8B-B14F-4D97-AF65-F5344CB8AC3E}">
-        <ns3:creationId val="3311713244"/>
+        <p14:creationId xmlns:p14="http://schemas.microsoft.com/office/powerpoint/2010/main" val="3311713244"/>
       </p:ext>
     </p:extLst>
   </p:cSld>
@@ -8421,7 +8421,7 @@
 </file>
 
 <file path=ppt/slides/slide2.xml><?xml version="1.0" encoding="utf-8"?>
-<p:sld xmlns:a="http://schemas.openxmlformats.org/drawingml/2006/main" xmlns:a16="http://schemas.microsoft.com/office/drawing/2014/main" xmlns:ns4="http://schemas.microsoft.com/office/drawing/2010/main" xmlns:ns5="http://schemas.microsoft.com/office/powerpoint/2010/main" xmlns:p="http://schemas.openxmlformats.org/presentationml/2006/main" xmlns:r="http://schemas.openxmlformats.org/officeDocument/2006/relationships">
+<p:sld xmlns:a="http://schemas.openxmlformats.org/drawingml/2006/main" xmlns:r="http://schemas.openxmlformats.org/officeDocument/2006/relationships" xmlns:p="http://schemas.openxmlformats.org/presentationml/2006/main">
   <p:cSld>
     <p:bg>
       <p:bgPr>
@@ -8436,7 +8436,7 @@
         <p:cNvPr id="1" name="">
           <a:extLst>
             <a:ext uri="{FF2B5EF4-FFF2-40B4-BE49-F238E27FC236}">
-              <a16:creationId id="{365CF149-638E-D4FE-A688-5F738F294DCE}"/>
+              <a16:creationId xmlns:a16="http://schemas.microsoft.com/office/drawing/2014/main" id="{365CF149-638E-D4FE-A688-5F738F294DCE}"/>
             </a:ext>
           </a:extLst>
         </p:cNvPr>
@@ -8456,7 +8456,7 @@
           <p:cNvPr id="2" name="TextBox 1">
             <a:extLst>
               <a:ext uri="{FF2B5EF4-FFF2-40B4-BE49-F238E27FC236}">
-                <a16:creationId id="{CA22E71C-3B43-3887-6804-C1009A7A1619}"/>
+                <a16:creationId xmlns:a16="http://schemas.microsoft.com/office/drawing/2014/main" id="{CA22E71C-3B43-3887-6804-C1009A7A1619}"/>
               </a:ext>
             </a:extLst>
           </p:cNvPr>
@@ -8558,7 +8558,7 @@
           <p:cNvPr id="5" name="TextBox 4">
             <a:extLst>
               <a:ext uri="{FF2B5EF4-FFF2-40B4-BE49-F238E27FC236}">
-                <a16:creationId id="{9FD60923-3051-E75C-EBA1-5F01B55BA37A}"/>
+                <a16:creationId xmlns:a16="http://schemas.microsoft.com/office/drawing/2014/main" id="{9FD60923-3051-E75C-EBA1-5F01B55BA37A}"/>
               </a:ext>
             </a:extLst>
           </p:cNvPr>
@@ -9058,7 +9058,7 @@
           <p:cNvPr id="3074" name="Picture 2" descr="undefined">
             <a:extLst>
               <a:ext uri="{FF2B5EF4-FFF2-40B4-BE49-F238E27FC236}">
-                <a16:creationId id="{446818C8-F552-491F-947A-ACEDA4EBAFB1}"/>
+                <a16:creationId xmlns:a16="http://schemas.microsoft.com/office/drawing/2014/main" id="{446818C8-F552-491F-947A-ACEDA4EBAFB1}"/>
               </a:ext>
             </a:extLst>
           </p:cNvPr>
@@ -9071,7 +9071,7 @@
           <a:blip r:embed="rId3">
             <a:extLst>
               <a:ext uri="{28A0092B-C50C-407E-A947-70E740481C1C}">
-                <ns4:useLocalDpi val="0"/>
+                <a14:useLocalDpi xmlns:a14="http://schemas.microsoft.com/office/drawing/2010/main" val="0"/>
               </a:ext>
             </a:extLst>
           </a:blip>
@@ -9091,11 +9091,11 @@
           <a:noFill/>
           <a:extLst>
             <a:ext uri="{909E8E84-426E-40DD-AFC4-6F175D3DCCD1}">
-              <ns4:hiddenFill>
+              <a14:hiddenFill xmlns:a14="http://schemas.microsoft.com/office/drawing/2010/main">
                 <a:solidFill>
                   <a:srgbClr val="FFFFFF"/>
                 </a:solidFill>
-              </ns4:hiddenFill>
+              </a14:hiddenFill>
             </a:ext>
           </a:extLst>
         </p:spPr>
@@ -9259,7 +9259,7 @@
     </p:spTree>
     <p:extLst>
       <p:ext uri="{BB962C8B-B14F-4D97-AF65-F5344CB8AC3E}">
-        <ns5:creationId val="3325331473"/>
+        <p14:creationId xmlns:p14="http://schemas.microsoft.com/office/powerpoint/2010/main" val="3325331473"/>
       </p:ext>
     </p:extLst>
   </p:cSld>
@@ -9270,7 +9270,7 @@
 </file>
 
 <file path=ppt/slides/slide3.xml><?xml version="1.0" encoding="utf-8"?>
-<p:sld xmlns:a="http://schemas.openxmlformats.org/drawingml/2006/main" xmlns:a16="http://schemas.microsoft.com/office/drawing/2014/main" xmlns:ns4="http://schemas.microsoft.com/office/drawing/2010/main" xmlns:ns5="http://schemas.microsoft.com/office/powerpoint/2010/main" xmlns:p="http://schemas.openxmlformats.org/presentationml/2006/main" xmlns:r="http://schemas.openxmlformats.org/officeDocument/2006/relationships">
+<p:sld xmlns:a="http://schemas.openxmlformats.org/drawingml/2006/main" xmlns:r="http://schemas.openxmlformats.org/officeDocument/2006/relationships" xmlns:p="http://schemas.openxmlformats.org/presentationml/2006/main">
   <p:cSld>
     <p:bg>
       <p:bgPr>
@@ -9285,7 +9285,7 @@
         <p:cNvPr id="1" name="">
           <a:extLst>
             <a:ext uri="{FF2B5EF4-FFF2-40B4-BE49-F238E27FC236}">
-              <a16:creationId id="{A711A77B-062A-BD38-03C1-60CB4990FB5B}"/>
+              <a16:creationId xmlns:a16="http://schemas.microsoft.com/office/drawing/2014/main" id="{A711A77B-062A-BD38-03C1-60CB4990FB5B}"/>
             </a:ext>
           </a:extLst>
         </p:cNvPr>
@@ -9305,7 +9305,7 @@
           <p:cNvPr id="2" name="TextBox 1">
             <a:extLst>
               <a:ext uri="{FF2B5EF4-FFF2-40B4-BE49-F238E27FC236}">
-                <a16:creationId id="{50904127-1953-FD93-0848-CFD145C7CE67}"/>
+                <a16:creationId xmlns:a16="http://schemas.microsoft.com/office/drawing/2014/main" id="{50904127-1953-FD93-0848-CFD145C7CE67}"/>
               </a:ext>
             </a:extLst>
           </p:cNvPr>
@@ -9401,7 +9401,7 @@
           <p:cNvPr id="5" name="TextBox 4">
             <a:extLst>
               <a:ext uri="{FF2B5EF4-FFF2-40B4-BE49-F238E27FC236}">
-                <a16:creationId id="{5A4BFBEF-ACE4-2284-D65B-A6DB0D04FC01}"/>
+                <a16:creationId xmlns:a16="http://schemas.microsoft.com/office/drawing/2014/main" id="{5A4BFBEF-ACE4-2284-D65B-A6DB0D04FC01}"/>
               </a:ext>
             </a:extLst>
           </p:cNvPr>
@@ -10159,7 +10159,7 @@
           <p:cNvPr id="9" name="Picture 2">
             <a:extLst>
               <a:ext uri="{FF2B5EF4-FFF2-40B4-BE49-F238E27FC236}">
-                <a16:creationId id="{9E983575-73C1-C2AA-EAB2-22F5A2F20397}"/>
+                <a16:creationId xmlns:a16="http://schemas.microsoft.com/office/drawing/2014/main" id="{9E983575-73C1-C2AA-EAB2-22F5A2F20397}"/>
               </a:ext>
             </a:extLst>
           </p:cNvPr>
@@ -10172,7 +10172,7 @@
           <a:blip r:embed="rId3">
             <a:extLst>
               <a:ext uri="{28A0092B-C50C-407E-A947-70E740481C1C}">
-                <ns4:useLocalDpi val="0"/>
+                <a14:useLocalDpi xmlns:a14="http://schemas.microsoft.com/office/drawing/2010/main" val="0"/>
               </a:ext>
             </a:extLst>
           </a:blip>
@@ -10192,11 +10192,11 @@
           <a:noFill/>
           <a:extLst>
             <a:ext uri="{909E8E84-426E-40DD-AFC4-6F175D3DCCD1}">
-              <ns4:hiddenFill>
+              <a14:hiddenFill xmlns:a14="http://schemas.microsoft.com/office/drawing/2010/main">
                 <a:solidFill>
                   <a:srgbClr val="FFFFFF"/>
                 </a:solidFill>
-              </ns4:hiddenFill>
+              </a14:hiddenFill>
             </a:ext>
           </a:extLst>
         </p:spPr>
@@ -10360,7 +10360,7 @@
     </p:spTree>
     <p:extLst>
       <p:ext uri="{BB962C8B-B14F-4D97-AF65-F5344CB8AC3E}">
-        <ns5:creationId val="2649105293"/>
+        <p14:creationId xmlns:p14="http://schemas.microsoft.com/office/powerpoint/2010/main" val="2649105293"/>
       </p:ext>
     </p:extLst>
   </p:cSld>
@@ -10371,7 +10371,7 @@
 </file>
 
 <file path=ppt/slides/slide4.xml><?xml version="1.0" encoding="utf-8"?>
-<p:sld xmlns:a="http://schemas.openxmlformats.org/drawingml/2006/main" xmlns:a16="http://schemas.microsoft.com/office/drawing/2014/main" xmlns:ns3="http://schemas.microsoft.com/office/powerpoint/2010/main" xmlns:p="http://schemas.openxmlformats.org/presentationml/2006/main">
+<p:sld xmlns:a="http://schemas.openxmlformats.org/drawingml/2006/main" xmlns:r="http://schemas.openxmlformats.org/officeDocument/2006/relationships" xmlns:p="http://schemas.openxmlformats.org/presentationml/2006/main">
   <p:cSld>
     <p:bg>
       <p:bgPr>
@@ -10386,7 +10386,7 @@
         <p:cNvPr id="1" name="">
           <a:extLst>
             <a:ext uri="{FF2B5EF4-FFF2-40B4-BE49-F238E27FC236}">
-              <a16:creationId id="{BBFBF43E-80A4-D013-5C64-AD16BBE309A9}"/>
+              <a16:creationId xmlns:a16="http://schemas.microsoft.com/office/drawing/2014/main" id="{BBFBF43E-80A4-D013-5C64-AD16BBE309A9}"/>
             </a:ext>
           </a:extLst>
         </p:cNvPr>
@@ -10406,7 +10406,7 @@
           <p:cNvPr id="2" name="TextBox 1">
             <a:extLst>
               <a:ext uri="{FF2B5EF4-FFF2-40B4-BE49-F238E27FC236}">
-                <a16:creationId id="{DF4E743A-E740-B9E8-D400-EA3F32FF1D55}"/>
+                <a16:creationId xmlns:a16="http://schemas.microsoft.com/office/drawing/2014/main" id="{DF4E743A-E740-B9E8-D400-EA3F32FF1D55}"/>
               </a:ext>
             </a:extLst>
           </p:cNvPr>
@@ -10502,7 +10502,7 @@
           <p:cNvPr id="5" name="TextBox 4">
             <a:extLst>
               <a:ext uri="{FF2B5EF4-FFF2-40B4-BE49-F238E27FC236}">
-                <a16:creationId id="{42082ECC-CEEB-D2B8-60C0-FAF5A1857737}"/>
+                <a16:creationId xmlns:a16="http://schemas.microsoft.com/office/drawing/2014/main" id="{42082ECC-CEEB-D2B8-60C0-FAF5A1857737}"/>
               </a:ext>
             </a:extLst>
           </p:cNvPr>
@@ -11576,7 +11576,7 @@
     </p:spTree>
     <p:extLst>
       <p:ext uri="{BB962C8B-B14F-4D97-AF65-F5344CB8AC3E}">
-        <ns3:creationId val="3863008067"/>
+        <p14:creationId xmlns:p14="http://schemas.microsoft.com/office/powerpoint/2010/main" val="3863008067"/>
       </p:ext>
     </p:extLst>
   </p:cSld>
@@ -11587,7 +11587,7 @@
 </file>
 
 <file path=ppt/slides/slide5.xml><?xml version="1.0" encoding="utf-8"?>
-<p:sld xmlns:a="http://schemas.openxmlformats.org/drawingml/2006/main" xmlns:a16="http://schemas.microsoft.com/office/drawing/2014/main" xmlns:ns3="http://schemas.microsoft.com/office/powerpoint/2010/main" xmlns:ns4="http://schemas.openxmlformats.org/drawingml/2006/diagram" xmlns:p="http://schemas.openxmlformats.org/presentationml/2006/main" xmlns:r="http://schemas.openxmlformats.org/officeDocument/2006/relationships">
+<p:sld xmlns:a="http://schemas.openxmlformats.org/drawingml/2006/main" xmlns:r="http://schemas.openxmlformats.org/officeDocument/2006/relationships" xmlns:p="http://schemas.openxmlformats.org/presentationml/2006/main">
   <p:cSld>
     <p:bg>
       <p:bgPr>
@@ -11602,7 +11602,7 @@
         <p:cNvPr id="1" name="">
           <a:extLst>
             <a:ext uri="{FF2B5EF4-FFF2-40B4-BE49-F238E27FC236}">
-              <a16:creationId id="{1453722B-3781-0E08-25A9-7EDF71C96246}"/>
+              <a16:creationId xmlns:a16="http://schemas.microsoft.com/office/drawing/2014/main" id="{1453722B-3781-0E08-25A9-7EDF71C96246}"/>
             </a:ext>
           </a:extLst>
         </p:cNvPr>
@@ -11622,7 +11622,7 @@
           <p:cNvPr id="3" name="Diagram 2">
             <a:extLst>
               <a:ext uri="{FF2B5EF4-FFF2-40B4-BE49-F238E27FC236}">
-                <a16:creationId id="{64AD777F-D0D7-80D3-EA3B-8A560D8BC354}"/>
+                <a16:creationId xmlns:a16="http://schemas.microsoft.com/office/drawing/2014/main" id="{64AD777F-D0D7-80D3-EA3B-8A560D8BC354}"/>
               </a:ext>
             </a:extLst>
           </p:cNvPr>
@@ -11630,7 +11630,7 @@
           <p:nvPr>
             <p:extLst>
               <p:ext uri="{D42A27DB-BD31-4B8C-83A1-F6EECF244321}">
-                <ns3:modId val="4232438656"/>
+                <p14:modId xmlns:p14="http://schemas.microsoft.com/office/powerpoint/2010/main" val="4232438656"/>
               </p:ext>
             </p:extLst>
           </p:nvPr>
@@ -11641,7 +11641,7 @@
         </p:xfrm>
         <a:graphic>
           <a:graphicData uri="http://schemas.openxmlformats.org/drawingml/2006/diagram">
-            <ns4:relIds r:dm="rId3" r:lo="rId4" r:qs="rId5" r:cs="rId6"/>
+            <dgm:relIds xmlns:dgm="http://schemas.openxmlformats.org/drawingml/2006/diagram" xmlns:r="http://schemas.openxmlformats.org/officeDocument/2006/relationships" r:dm="rId3" r:lo="rId4" r:qs="rId5" r:cs="rId6"/>
           </a:graphicData>
         </a:graphic>
       </p:graphicFrame>
@@ -11650,7 +11650,7 @@
           <p:cNvPr id="4" name="TextBox 3">
             <a:extLst>
               <a:ext uri="{FF2B5EF4-FFF2-40B4-BE49-F238E27FC236}">
-                <a16:creationId id="{8B0D959F-1F8C-C85F-60B5-2379D17C87E3}"/>
+                <a16:creationId xmlns:a16="http://schemas.microsoft.com/office/drawing/2014/main" id="{8B0D959F-1F8C-C85F-60B5-2379D17C87E3}"/>
               </a:ext>
             </a:extLst>
           </p:cNvPr>
@@ -12025,7 +12025,7 @@
     </p:spTree>
     <p:extLst>
       <p:ext uri="{BB962C8B-B14F-4D97-AF65-F5344CB8AC3E}">
-        <ns3:creationId val="213017330"/>
+        <p14:creationId xmlns:p14="http://schemas.microsoft.com/office/powerpoint/2010/main" val="213017330"/>
       </p:ext>
     </p:extLst>
   </p:cSld>

--- a/reference/archie/presentations/NPQG Assemblies - Early Life.pptx
+++ b/reference/archie/presentations/NPQG Assemblies - Early Life.pptx
@@ -3,25 +3,16 @@
 <p:presentation xmlns:a="http://schemas.openxmlformats.org/drawingml/2006/main" xmlns:r="http://schemas.openxmlformats.org/officeDocument/2006/relationships" xmlns:p="http://schemas.openxmlformats.org/presentationml/2006/main" saveSubsetFonts="1" autoCompressPictures="0">
   <p:sldMasterIdLst>
     <p:sldMasterId id="2147483655" r:id="rId1"/>
-    <p:sldMasterId id="2147483667" r:id="rId2"/>
   </p:sldMasterIdLst>
   <p:notesMasterIdLst>
-    <p:notesMasterId r:id="rId16"/>
+    <p:notesMasterId r:id="rId7"/>
   </p:notesMasterIdLst>
   <p:sldIdLst>
-    <p:sldId id="807" r:id="rId3"/>
-    <p:sldId id="853" r:id="rId4"/>
-    <p:sldId id="812" r:id="rId5"/>
-    <p:sldId id="851" r:id="rId6"/>
-    <p:sldId id="852" r:id="rId7"/>
-    <p:sldId id="856" r:id="rId8"/>
-    <p:sldId id="854" r:id="rId9"/>
-    <p:sldId id="808" r:id="rId10"/>
-    <p:sldId id="814" r:id="rId11"/>
-    <p:sldId id="855" r:id="rId12"/>
-    <p:sldId id="809" r:id="rId13"/>
-    <p:sldId id="815" r:id="rId14"/>
-    <p:sldId id="382" r:id="rId15"/>
+    <p:sldId id="856" r:id="rId2"/>
+    <p:sldId id="808" r:id="rId3"/>
+    <p:sldId id="855" r:id="rId4"/>
+    <p:sldId id="809" r:id="rId5"/>
+    <p:sldId id="815" r:id="rId6"/>
   </p:sldIdLst>
   <p:sldSz cx="12192000" cy="6858000"/>
   <p:notesSz cx="6858000" cy="9144000"/>
@@ -3507,7 +3498,7 @@
           <a:p>
             <a:fld id="{37505754-C48E-DF4E-9B84-E7B6A3B19E2D}" type="datetimeFigureOut">
               <a:rPr lang="en-US" smtClean="0"/>
-              <a:t>10/14/24</a:t>
+              <a:t>7/3/26</a:t>
             </a:fld>
             <a:endParaRPr lang="en-US"/>
           </a:p>
@@ -3779,204 +3770,6 @@
   <p:cSld>
     <p:spTree>
       <p:nvGrpSpPr>
-        <p:cNvPr id="1" name=""/>
-        <p:cNvGrpSpPr/>
-        <p:nvPr/>
-      </p:nvGrpSpPr>
-      <p:grpSpPr>
-        <a:xfrm>
-          <a:off x="0" y="0"/>
-          <a:ext cx="0" cy="0"/>
-          <a:chOff x="0" y="0"/>
-          <a:chExt cx="0" cy="0"/>
-        </a:xfrm>
-      </p:grpSpPr>
-      <p:sp>
-        <p:nvSpPr>
-          <p:cNvPr id="2" name="Slide Image Placeholder 1"/>
-          <p:cNvSpPr>
-            <a:spLocks noGrp="1" noRot="1" noChangeAspect="1"/>
-          </p:cNvSpPr>
-          <p:nvPr>
-            <p:ph type="sldImg"/>
-          </p:nvPr>
-        </p:nvSpPr>
-        <p:spPr/>
-      </p:sp>
-      <p:sp>
-        <p:nvSpPr>
-          <p:cNvPr id="3" name="Notes Placeholder 2"/>
-          <p:cNvSpPr>
-            <a:spLocks noGrp="1"/>
-          </p:cNvSpPr>
-          <p:nvPr>
-            <p:ph type="body" idx="1"/>
-          </p:nvPr>
-        </p:nvSpPr>
-        <p:spPr/>
-        <p:txBody>
-          <a:bodyPr/>
-          <a:lstStyle/>
-          <a:p>
-            <a:r>
-              <a:rPr lang="en-US" dirty="0"/>
-              <a:t>Hi. Welcome to this episode of Emergent Nature. </a:t>
-            </a:r>
-          </a:p>
-          <a:p>
-            <a:endParaRPr lang="en-US" dirty="0"/>
-          </a:p>
-          <a:p>
-            <a:r>
-              <a:rPr lang="en-US" dirty="0"/>
-              <a:t>My name is J Mark Morris. I go by Mark.</a:t>
-            </a:r>
-          </a:p>
-          <a:p>
-            <a:endParaRPr lang="en-US" dirty="0"/>
-          </a:p>
-          <a:p>
-            <a:r>
-              <a:rPr lang="en-US" dirty="0"/>
-              <a:t>In this episode I’ll discuss the error that caused science to go off track into general relativity and quantum mechanics.</a:t>
-            </a:r>
-          </a:p>
-          <a:p>
-            <a:endParaRPr lang="en-US" dirty="0"/>
-          </a:p>
-          <a:p>
-            <a:r>
-              <a:rPr lang="en-US" dirty="0"/>
-              <a:t>That may seem like an unusual thing to say, since general relativity and quantum theory are generally considered to be successful effective theories.</a:t>
-            </a:r>
-          </a:p>
-          <a:p>
-            <a:endParaRPr lang="en-US" dirty="0"/>
-          </a:p>
-          <a:p>
-            <a:r>
-              <a:rPr lang="en-US" dirty="0"/>
-              <a:t>However, as we will see, an error circa 1900 threw science off track.</a:t>
-            </a:r>
-          </a:p>
-          <a:p>
-            <a:endParaRPr lang="en-US" dirty="0"/>
-          </a:p>
-          <a:p>
-            <a:r>
-              <a:rPr lang="en-US" dirty="0"/>
-              <a:t>There is a parsimonious solution to nature.</a:t>
-            </a:r>
-          </a:p>
-          <a:p>
-            <a:endParaRPr lang="en-US" dirty="0"/>
-          </a:p>
-          <a:p>
-            <a:endParaRPr lang="en-US" dirty="0"/>
-          </a:p>
-        </p:txBody>
-      </p:sp>
-      <p:sp>
-        <p:nvSpPr>
-          <p:cNvPr id="4" name="Slide Number Placeholder 3"/>
-          <p:cNvSpPr>
-            <a:spLocks noGrp="1"/>
-          </p:cNvSpPr>
-          <p:nvPr>
-            <p:ph type="sldNum" sz="quarter" idx="5"/>
-          </p:nvPr>
-        </p:nvSpPr>
-        <p:spPr/>
-        <p:txBody>
-          <a:bodyPr/>
-          <a:lstStyle/>
-          <a:p>
-            <a:pPr marL="0" marR="0" lvl="0" indent="0" algn="r" defTabSz="914400" rtl="0" eaLnBrk="1" fontAlgn="auto" latinLnBrk="0" hangingPunct="1">
-              <a:lnSpc>
-                <a:spcPct val="100000"/>
-              </a:lnSpc>
-              <a:spcBef>
-                <a:spcPts val="0"/>
-              </a:spcBef>
-              <a:spcAft>
-                <a:spcPts val="0"/>
-              </a:spcAft>
-              <a:buClrTx/>
-              <a:buSzTx/>
-              <a:buFontTx/>
-              <a:buNone/>
-              <a:tabLst/>
-              <a:defRPr/>
-            </a:pPr>
-            <a:fld id="{4DC398A3-AF21-A342-B6A8-6929C36BB1BF}" type="slidenum">
-              <a:rPr kumimoji="0" lang="en-US" sz="1200" b="0" i="0" u="none" strike="noStrike" kern="1200" cap="none" spc="0" normalizeH="0" baseline="0" noProof="0" smtClean="0">
-                <a:ln>
-                  <a:noFill/>
-                </a:ln>
-                <a:solidFill>
-                  <a:prstClr val="black"/>
-                </a:solidFill>
-                <a:effectLst/>
-                <a:uLnTx/>
-                <a:uFillTx/>
-                <a:latin typeface="Calibri" panose="020F0502020204030204"/>
-                <a:ea typeface="+mn-ea"/>
-                <a:cs typeface="+mn-cs"/>
-              </a:rPr>
-              <a:pPr marL="0" marR="0" lvl="0" indent="0" algn="r" defTabSz="914400" rtl="0" eaLnBrk="1" fontAlgn="auto" latinLnBrk="0" hangingPunct="1">
-                <a:lnSpc>
-                  <a:spcPct val="100000"/>
-                </a:lnSpc>
-                <a:spcBef>
-                  <a:spcPts val="0"/>
-                </a:spcBef>
-                <a:spcAft>
-                  <a:spcPts val="0"/>
-                </a:spcAft>
-                <a:buClrTx/>
-                <a:buSzTx/>
-                <a:buFontTx/>
-                <a:buNone/>
-                <a:tabLst/>
-                <a:defRPr/>
-              </a:pPr>
-              <a:t>1</a:t>
-            </a:fld>
-            <a:endParaRPr kumimoji="0" lang="en-US" sz="1200" b="0" i="0" u="none" strike="noStrike" kern="1200" cap="none" spc="0" normalizeH="0" baseline="0" noProof="0">
-              <a:ln>
-                <a:noFill/>
-              </a:ln>
-              <a:solidFill>
-                <a:prstClr val="black"/>
-              </a:solidFill>
-              <a:effectLst/>
-              <a:uLnTx/>
-              <a:uFillTx/>
-              <a:latin typeface="Calibri" panose="020F0502020204030204"/>
-              <a:ea typeface="+mn-ea"/>
-              <a:cs typeface="+mn-cs"/>
-            </a:endParaRPr>
-          </a:p>
-        </p:txBody>
-      </p:sp>
-    </p:spTree>
-    <p:extLst>
-      <p:ext uri="{BB962C8B-B14F-4D97-AF65-F5344CB8AC3E}">
-        <p14:creationId xmlns:p14="http://schemas.microsoft.com/office/powerpoint/2010/main" val="11801368"/>
-      </p:ext>
-    </p:extLst>
-  </p:cSld>
-  <p:clrMapOvr>
-    <a:masterClrMapping/>
-  </p:clrMapOvr>
-</p:notes>
-</file>
-
-<file path=ppt/notesSlides/notesSlide2.xml><?xml version="1.0" encoding="utf-8"?>
-<p:notes xmlns:a="http://schemas.openxmlformats.org/drawingml/2006/main" xmlns:r="http://schemas.openxmlformats.org/officeDocument/2006/relationships" xmlns:p="http://schemas.openxmlformats.org/presentationml/2006/main">
-  <p:cSld>
-    <p:spTree>
-      <p:nvGrpSpPr>
         <p:cNvPr id="1" name="">
           <a:extLst>
             <a:ext uri="{FF2B5EF4-FFF2-40B4-BE49-F238E27FC236}">
@@ -4162,7 +3955,7 @@
                 <a:tabLst/>
                 <a:defRPr/>
               </a:pPr>
-              <a:t>6</a:t>
+              <a:t>1</a:t>
             </a:fld>
             <a:endParaRPr kumimoji="0" lang="en-US" sz="1200" b="0" i="0" u="none" strike="noStrike" kern="1200" cap="none" spc="0" normalizeH="0" baseline="0" noProof="0">
               <a:ln>
@@ -4194,229 +3987,7 @@
 </p:notes>
 </file>
 
-<file path=ppt/notesSlides/notesSlide3.xml><?xml version="1.0" encoding="utf-8"?>
-<p:notes xmlns:a="http://schemas.openxmlformats.org/drawingml/2006/main" xmlns:r="http://schemas.openxmlformats.org/officeDocument/2006/relationships" xmlns:p="http://schemas.openxmlformats.org/presentationml/2006/main">
-  <p:cSld>
-    <p:spTree>
-      <p:nvGrpSpPr>
-        <p:cNvPr id="1" name="">
-          <a:extLst>
-            <a:ext uri="{FF2B5EF4-FFF2-40B4-BE49-F238E27FC236}">
-              <a16:creationId xmlns:a16="http://schemas.microsoft.com/office/drawing/2014/main" id="{2C26A51F-C473-BEB1-7F16-0CD4AECE5CF2}"/>
-            </a:ext>
-          </a:extLst>
-        </p:cNvPr>
-        <p:cNvGrpSpPr/>
-        <p:nvPr/>
-      </p:nvGrpSpPr>
-      <p:grpSpPr>
-        <a:xfrm>
-          <a:off x="0" y="0"/>
-          <a:ext cx="0" cy="0"/>
-          <a:chOff x="0" y="0"/>
-          <a:chExt cx="0" cy="0"/>
-        </a:xfrm>
-      </p:grpSpPr>
-      <p:sp>
-        <p:nvSpPr>
-          <p:cNvPr id="2" name="Slide Image Placeholder 1">
-            <a:extLst>
-              <a:ext uri="{FF2B5EF4-FFF2-40B4-BE49-F238E27FC236}">
-                <a16:creationId xmlns:a16="http://schemas.microsoft.com/office/drawing/2014/main" id="{F3878337-2DEA-70F6-EBA6-80E966CEE408}"/>
-              </a:ext>
-            </a:extLst>
-          </p:cNvPr>
-          <p:cNvSpPr>
-            <a:spLocks noGrp="1" noRot="1" noChangeAspect="1"/>
-          </p:cNvSpPr>
-          <p:nvPr>
-            <p:ph type="sldImg"/>
-          </p:nvPr>
-        </p:nvSpPr>
-        <p:spPr/>
-      </p:sp>
-      <p:sp>
-        <p:nvSpPr>
-          <p:cNvPr id="3" name="Notes Placeholder 2">
-            <a:extLst>
-              <a:ext uri="{FF2B5EF4-FFF2-40B4-BE49-F238E27FC236}">
-                <a16:creationId xmlns:a16="http://schemas.microsoft.com/office/drawing/2014/main" id="{FA644BCC-ECDA-D95F-9830-46F4F2EC7872}"/>
-              </a:ext>
-            </a:extLst>
-          </p:cNvPr>
-          <p:cNvSpPr>
-            <a:spLocks noGrp="1"/>
-          </p:cNvSpPr>
-          <p:nvPr>
-            <p:ph type="body" idx="1"/>
-          </p:nvPr>
-        </p:nvSpPr>
-        <p:spPr/>
-        <p:txBody>
-          <a:bodyPr/>
-          <a:lstStyle/>
-          <a:p>
-            <a:r>
-              <a:rPr lang="en-US" dirty="0"/>
-              <a:t>Hi. Welcome to this episode of Emergent Nature. </a:t>
-            </a:r>
-          </a:p>
-          <a:p>
-            <a:endParaRPr lang="en-US" dirty="0"/>
-          </a:p>
-          <a:p>
-            <a:r>
-              <a:rPr lang="en-US" dirty="0"/>
-              <a:t>My name is J Mark Morris. I go by Mark.</a:t>
-            </a:r>
-          </a:p>
-          <a:p>
-            <a:endParaRPr lang="en-US" dirty="0"/>
-          </a:p>
-          <a:p>
-            <a:r>
-              <a:rPr lang="en-US" dirty="0"/>
-              <a:t>In this episode I’ll discuss the error that caused science to go off track into general relativity and quantum mechanics.</a:t>
-            </a:r>
-          </a:p>
-          <a:p>
-            <a:endParaRPr lang="en-US" dirty="0"/>
-          </a:p>
-          <a:p>
-            <a:r>
-              <a:rPr lang="en-US" dirty="0"/>
-              <a:t>That may seem like an unusual thing to say, since general relativity and quantum theory are generally considered to be successful effective theories.</a:t>
-            </a:r>
-          </a:p>
-          <a:p>
-            <a:endParaRPr lang="en-US" dirty="0"/>
-          </a:p>
-          <a:p>
-            <a:r>
-              <a:rPr lang="en-US" dirty="0"/>
-              <a:t>However, as we will see, an error circa 1900 threw science off track.</a:t>
-            </a:r>
-          </a:p>
-          <a:p>
-            <a:endParaRPr lang="en-US" dirty="0"/>
-          </a:p>
-          <a:p>
-            <a:r>
-              <a:rPr lang="en-US" dirty="0"/>
-              <a:t>There is a parsimonious solution to nature.</a:t>
-            </a:r>
-          </a:p>
-          <a:p>
-            <a:endParaRPr lang="en-US" dirty="0"/>
-          </a:p>
-          <a:p>
-            <a:endParaRPr lang="en-US" dirty="0"/>
-          </a:p>
-        </p:txBody>
-      </p:sp>
-      <p:sp>
-        <p:nvSpPr>
-          <p:cNvPr id="4" name="Slide Number Placeholder 3">
-            <a:extLst>
-              <a:ext uri="{FF2B5EF4-FFF2-40B4-BE49-F238E27FC236}">
-                <a16:creationId xmlns:a16="http://schemas.microsoft.com/office/drawing/2014/main" id="{AEC3111B-1A98-632A-1261-807AD674565C}"/>
-              </a:ext>
-            </a:extLst>
-          </p:cNvPr>
-          <p:cNvSpPr>
-            <a:spLocks noGrp="1"/>
-          </p:cNvSpPr>
-          <p:nvPr>
-            <p:ph type="sldNum" sz="quarter" idx="5"/>
-          </p:nvPr>
-        </p:nvSpPr>
-        <p:spPr/>
-        <p:txBody>
-          <a:bodyPr/>
-          <a:lstStyle/>
-          <a:p>
-            <a:pPr marL="0" marR="0" lvl="0" indent="0" algn="r" defTabSz="914400" rtl="0" eaLnBrk="1" fontAlgn="auto" latinLnBrk="0" hangingPunct="1">
-              <a:lnSpc>
-                <a:spcPct val="100000"/>
-              </a:lnSpc>
-              <a:spcBef>
-                <a:spcPts val="0"/>
-              </a:spcBef>
-              <a:spcAft>
-                <a:spcPts val="0"/>
-              </a:spcAft>
-              <a:buClrTx/>
-              <a:buSzTx/>
-              <a:buFontTx/>
-              <a:buNone/>
-              <a:tabLst/>
-              <a:defRPr/>
-            </a:pPr>
-            <a:fld id="{4DC398A3-AF21-A342-B6A8-6929C36BB1BF}" type="slidenum">
-              <a:rPr kumimoji="0" lang="en-US" sz="1200" b="0" i="0" u="none" strike="noStrike" kern="1200" cap="none" spc="0" normalizeH="0" baseline="0" noProof="0" smtClean="0">
-                <a:ln>
-                  <a:noFill/>
-                </a:ln>
-                <a:solidFill>
-                  <a:prstClr val="black"/>
-                </a:solidFill>
-                <a:effectLst/>
-                <a:uLnTx/>
-                <a:uFillTx/>
-                <a:latin typeface="Calibri" panose="020F0502020204030204"/>
-                <a:ea typeface="+mn-ea"/>
-                <a:cs typeface="+mn-cs"/>
-              </a:rPr>
-              <a:pPr marL="0" marR="0" lvl="0" indent="0" algn="r" defTabSz="914400" rtl="0" eaLnBrk="1" fontAlgn="auto" latinLnBrk="0" hangingPunct="1">
-                <a:lnSpc>
-                  <a:spcPct val="100000"/>
-                </a:lnSpc>
-                <a:spcBef>
-                  <a:spcPts val="0"/>
-                </a:spcBef>
-                <a:spcAft>
-                  <a:spcPts val="0"/>
-                </a:spcAft>
-                <a:buClrTx/>
-                <a:buSzTx/>
-                <a:buFontTx/>
-                <a:buNone/>
-                <a:tabLst/>
-                <a:defRPr/>
-              </a:pPr>
-              <a:t>7</a:t>
-            </a:fld>
-            <a:endParaRPr kumimoji="0" lang="en-US" sz="1200" b="0" i="0" u="none" strike="noStrike" kern="1200" cap="none" spc="0" normalizeH="0" baseline="0" noProof="0">
-              <a:ln>
-                <a:noFill/>
-              </a:ln>
-              <a:solidFill>
-                <a:prstClr val="black"/>
-              </a:solidFill>
-              <a:effectLst/>
-              <a:uLnTx/>
-              <a:uFillTx/>
-              <a:latin typeface="Calibri" panose="020F0502020204030204"/>
-              <a:ea typeface="+mn-ea"/>
-              <a:cs typeface="+mn-cs"/>
-            </a:endParaRPr>
-          </a:p>
-        </p:txBody>
-      </p:sp>
-    </p:spTree>
-    <p:extLst>
-      <p:ext uri="{BB962C8B-B14F-4D97-AF65-F5344CB8AC3E}">
-        <p14:creationId xmlns:p14="http://schemas.microsoft.com/office/powerpoint/2010/main" val="3303015494"/>
-      </p:ext>
-    </p:extLst>
-  </p:cSld>
-  <p:clrMapOvr>
-    <a:masterClrMapping/>
-  </p:clrMapOvr>
-</p:notes>
-</file>
-
-<file path=ppt/notesSlides/notesSlide4.xml><?xml version="1.0" encoding="utf-8"?>
+<file path=ppt/notesSlides/notesSlide2.xml><?xml version="1.0" encoding="utf-8"?>
 <p:notes xmlns:a="http://schemas.openxmlformats.org/drawingml/2006/main" xmlns:r="http://schemas.openxmlformats.org/officeDocument/2006/relationships" xmlns:p="http://schemas.openxmlformats.org/presentationml/2006/main">
   <p:cSld>
     <p:spTree>
@@ -4606,7 +4177,7 @@
                 <a:tabLst/>
                 <a:defRPr/>
               </a:pPr>
-              <a:t>8</a:t>
+              <a:t>2</a:t>
             </a:fld>
             <a:endParaRPr kumimoji="0" lang="en-US" sz="1200" b="0" i="0" u="none" strike="noStrike" kern="1200" cap="none" spc="0" normalizeH="0" baseline="0" noProof="0">
               <a:ln>
@@ -4638,229 +4209,7 @@
 </p:notes>
 </file>
 
-<file path=ppt/notesSlides/notesSlide5.xml><?xml version="1.0" encoding="utf-8"?>
-<p:notes xmlns:a="http://schemas.openxmlformats.org/drawingml/2006/main" xmlns:r="http://schemas.openxmlformats.org/officeDocument/2006/relationships" xmlns:p="http://schemas.openxmlformats.org/presentationml/2006/main">
-  <p:cSld>
-    <p:spTree>
-      <p:nvGrpSpPr>
-        <p:cNvPr id="1" name="">
-          <a:extLst>
-            <a:ext uri="{FF2B5EF4-FFF2-40B4-BE49-F238E27FC236}">
-              <a16:creationId xmlns:a16="http://schemas.microsoft.com/office/drawing/2014/main" id="{A111E76E-E5AE-CC4A-F87E-612828AF379C}"/>
-            </a:ext>
-          </a:extLst>
-        </p:cNvPr>
-        <p:cNvGrpSpPr/>
-        <p:nvPr/>
-      </p:nvGrpSpPr>
-      <p:grpSpPr>
-        <a:xfrm>
-          <a:off x="0" y="0"/>
-          <a:ext cx="0" cy="0"/>
-          <a:chOff x="0" y="0"/>
-          <a:chExt cx="0" cy="0"/>
-        </a:xfrm>
-      </p:grpSpPr>
-      <p:sp>
-        <p:nvSpPr>
-          <p:cNvPr id="2" name="Slide Image Placeholder 1">
-            <a:extLst>
-              <a:ext uri="{FF2B5EF4-FFF2-40B4-BE49-F238E27FC236}">
-                <a16:creationId xmlns:a16="http://schemas.microsoft.com/office/drawing/2014/main" id="{9BC42B81-8D6E-575C-1D87-DFAF8B5748E9}"/>
-              </a:ext>
-            </a:extLst>
-          </p:cNvPr>
-          <p:cNvSpPr>
-            <a:spLocks noGrp="1" noRot="1" noChangeAspect="1"/>
-          </p:cNvSpPr>
-          <p:nvPr>
-            <p:ph type="sldImg"/>
-          </p:nvPr>
-        </p:nvSpPr>
-        <p:spPr/>
-      </p:sp>
-      <p:sp>
-        <p:nvSpPr>
-          <p:cNvPr id="3" name="Notes Placeholder 2">
-            <a:extLst>
-              <a:ext uri="{FF2B5EF4-FFF2-40B4-BE49-F238E27FC236}">
-                <a16:creationId xmlns:a16="http://schemas.microsoft.com/office/drawing/2014/main" id="{58133B77-2A2C-FF41-F3FF-B20248E2DD2F}"/>
-              </a:ext>
-            </a:extLst>
-          </p:cNvPr>
-          <p:cNvSpPr>
-            <a:spLocks noGrp="1"/>
-          </p:cNvSpPr>
-          <p:nvPr>
-            <p:ph type="body" idx="1"/>
-          </p:nvPr>
-        </p:nvSpPr>
-        <p:spPr/>
-        <p:txBody>
-          <a:bodyPr/>
-          <a:lstStyle/>
-          <a:p>
-            <a:r>
-              <a:rPr lang="en-US" dirty="0"/>
-              <a:t>Hi. Welcome to this episode of Emergent Nature. </a:t>
-            </a:r>
-          </a:p>
-          <a:p>
-            <a:endParaRPr lang="en-US" dirty="0"/>
-          </a:p>
-          <a:p>
-            <a:r>
-              <a:rPr lang="en-US" dirty="0"/>
-              <a:t>My name is J Mark Morris. I go by Mark.</a:t>
-            </a:r>
-          </a:p>
-          <a:p>
-            <a:endParaRPr lang="en-US" dirty="0"/>
-          </a:p>
-          <a:p>
-            <a:r>
-              <a:rPr lang="en-US" dirty="0"/>
-              <a:t>In this episode I’ll discuss the error that caused science to go off track into general relativity and quantum mechanics.</a:t>
-            </a:r>
-          </a:p>
-          <a:p>
-            <a:endParaRPr lang="en-US" dirty="0"/>
-          </a:p>
-          <a:p>
-            <a:r>
-              <a:rPr lang="en-US" dirty="0"/>
-              <a:t>That may seem like an unusual thing to say, since general relativity and quantum theory are generally considered to be successful effective theories.</a:t>
-            </a:r>
-          </a:p>
-          <a:p>
-            <a:endParaRPr lang="en-US" dirty="0"/>
-          </a:p>
-          <a:p>
-            <a:r>
-              <a:rPr lang="en-US" dirty="0"/>
-              <a:t>However, as we will see, an error circa 1900 threw science off track.</a:t>
-            </a:r>
-          </a:p>
-          <a:p>
-            <a:endParaRPr lang="en-US" dirty="0"/>
-          </a:p>
-          <a:p>
-            <a:r>
-              <a:rPr lang="en-US" dirty="0"/>
-              <a:t>There is a parsimonious solution to nature.</a:t>
-            </a:r>
-          </a:p>
-          <a:p>
-            <a:endParaRPr lang="en-US" dirty="0"/>
-          </a:p>
-          <a:p>
-            <a:endParaRPr lang="en-US" dirty="0"/>
-          </a:p>
-        </p:txBody>
-      </p:sp>
-      <p:sp>
-        <p:nvSpPr>
-          <p:cNvPr id="4" name="Slide Number Placeholder 3">
-            <a:extLst>
-              <a:ext uri="{FF2B5EF4-FFF2-40B4-BE49-F238E27FC236}">
-                <a16:creationId xmlns:a16="http://schemas.microsoft.com/office/drawing/2014/main" id="{8070CC9A-C03C-43E5-C3EB-4D265667CB30}"/>
-              </a:ext>
-            </a:extLst>
-          </p:cNvPr>
-          <p:cNvSpPr>
-            <a:spLocks noGrp="1"/>
-          </p:cNvSpPr>
-          <p:nvPr>
-            <p:ph type="sldNum" sz="quarter" idx="5"/>
-          </p:nvPr>
-        </p:nvSpPr>
-        <p:spPr/>
-        <p:txBody>
-          <a:bodyPr/>
-          <a:lstStyle/>
-          <a:p>
-            <a:pPr marL="0" marR="0" lvl="0" indent="0" algn="r" defTabSz="914400" rtl="0" eaLnBrk="1" fontAlgn="auto" latinLnBrk="0" hangingPunct="1">
-              <a:lnSpc>
-                <a:spcPct val="100000"/>
-              </a:lnSpc>
-              <a:spcBef>
-                <a:spcPts val="0"/>
-              </a:spcBef>
-              <a:spcAft>
-                <a:spcPts val="0"/>
-              </a:spcAft>
-              <a:buClrTx/>
-              <a:buSzTx/>
-              <a:buFontTx/>
-              <a:buNone/>
-              <a:tabLst/>
-              <a:defRPr/>
-            </a:pPr>
-            <a:fld id="{4DC398A3-AF21-A342-B6A8-6929C36BB1BF}" type="slidenum">
-              <a:rPr kumimoji="0" lang="en-US" sz="1200" b="0" i="0" u="none" strike="noStrike" kern="1200" cap="none" spc="0" normalizeH="0" baseline="0" noProof="0" smtClean="0">
-                <a:ln>
-                  <a:noFill/>
-                </a:ln>
-                <a:solidFill>
-                  <a:prstClr val="black"/>
-                </a:solidFill>
-                <a:effectLst/>
-                <a:uLnTx/>
-                <a:uFillTx/>
-                <a:latin typeface="Calibri" panose="020F0502020204030204"/>
-                <a:ea typeface="+mn-ea"/>
-                <a:cs typeface="+mn-cs"/>
-              </a:rPr>
-              <a:pPr marL="0" marR="0" lvl="0" indent="0" algn="r" defTabSz="914400" rtl="0" eaLnBrk="1" fontAlgn="auto" latinLnBrk="0" hangingPunct="1">
-                <a:lnSpc>
-                  <a:spcPct val="100000"/>
-                </a:lnSpc>
-                <a:spcBef>
-                  <a:spcPts val="0"/>
-                </a:spcBef>
-                <a:spcAft>
-                  <a:spcPts val="0"/>
-                </a:spcAft>
-                <a:buClrTx/>
-                <a:buSzTx/>
-                <a:buFontTx/>
-                <a:buNone/>
-                <a:tabLst/>
-                <a:defRPr/>
-              </a:pPr>
-              <a:t>9</a:t>
-            </a:fld>
-            <a:endParaRPr kumimoji="0" lang="en-US" sz="1200" b="0" i="0" u="none" strike="noStrike" kern="1200" cap="none" spc="0" normalizeH="0" baseline="0" noProof="0">
-              <a:ln>
-                <a:noFill/>
-              </a:ln>
-              <a:solidFill>
-                <a:prstClr val="black"/>
-              </a:solidFill>
-              <a:effectLst/>
-              <a:uLnTx/>
-              <a:uFillTx/>
-              <a:latin typeface="Calibri" panose="020F0502020204030204"/>
-              <a:ea typeface="+mn-ea"/>
-              <a:cs typeface="+mn-cs"/>
-            </a:endParaRPr>
-          </a:p>
-        </p:txBody>
-      </p:sp>
-    </p:spTree>
-    <p:extLst>
-      <p:ext uri="{BB962C8B-B14F-4D97-AF65-F5344CB8AC3E}">
-        <p14:creationId xmlns:p14="http://schemas.microsoft.com/office/powerpoint/2010/main" val="661989735"/>
-      </p:ext>
-    </p:extLst>
-  </p:cSld>
-  <p:clrMapOvr>
-    <a:masterClrMapping/>
-  </p:clrMapOvr>
-</p:notes>
-</file>
-
-<file path=ppt/notesSlides/notesSlide6.xml><?xml version="1.0" encoding="utf-8"?>
+<file path=ppt/notesSlides/notesSlide3.xml><?xml version="1.0" encoding="utf-8"?>
 <p:notes xmlns:a="http://schemas.openxmlformats.org/drawingml/2006/main" xmlns:r="http://schemas.openxmlformats.org/officeDocument/2006/relationships" xmlns:p="http://schemas.openxmlformats.org/presentationml/2006/main">
   <p:cSld>
     <p:spTree>
@@ -5050,7 +4399,7 @@
                 <a:tabLst/>
                 <a:defRPr/>
               </a:pPr>
-              <a:t>10</a:t>
+              <a:t>3</a:t>
             </a:fld>
             <a:endParaRPr kumimoji="0" lang="en-US" sz="1200" b="0" i="0" u="none" strike="noStrike" kern="1200" cap="none" spc="0" normalizeH="0" baseline="0" noProof="0">
               <a:ln>
@@ -5082,7 +4431,7 @@
 </p:notes>
 </file>
 
-<file path=ppt/notesSlides/notesSlide7.xml><?xml version="1.0" encoding="utf-8"?>
+<file path=ppt/notesSlides/notesSlide4.xml><?xml version="1.0" encoding="utf-8"?>
 <p:notes xmlns:a="http://schemas.openxmlformats.org/drawingml/2006/main" xmlns:r="http://schemas.openxmlformats.org/officeDocument/2006/relationships" xmlns:p="http://schemas.openxmlformats.org/presentationml/2006/main">
   <p:cSld>
     <p:spTree>
@@ -5272,7 +4621,7 @@
                 <a:tabLst/>
                 <a:defRPr/>
               </a:pPr>
-              <a:t>11</a:t>
+              <a:t>4</a:t>
             </a:fld>
             <a:endParaRPr kumimoji="0" lang="en-US" sz="1200" b="0" i="0" u="none" strike="noStrike" kern="1200" cap="none" spc="0" normalizeH="0" baseline="0" noProof="0">
               <a:ln>
@@ -5304,7 +4653,7 @@
 </p:notes>
 </file>
 
-<file path=ppt/notesSlides/notesSlide8.xml><?xml version="1.0" encoding="utf-8"?>
+<file path=ppt/notesSlides/notesSlide5.xml><?xml version="1.0" encoding="utf-8"?>
 <p:notes xmlns:a="http://schemas.openxmlformats.org/drawingml/2006/main" xmlns:r="http://schemas.openxmlformats.org/officeDocument/2006/relationships" xmlns:p="http://schemas.openxmlformats.org/presentationml/2006/main">
   <p:cSld>
     <p:spTree>
@@ -5494,7 +4843,7 @@
                 <a:tabLst/>
                 <a:defRPr/>
               </a:pPr>
-              <a:t>12</a:t>
+              <a:t>5</a:t>
             </a:fld>
             <a:endParaRPr kumimoji="0" lang="en-US" sz="1200" b="0" i="0" u="none" strike="noStrike" kern="1200" cap="none" spc="0" normalizeH="0" baseline="0" noProof="0">
               <a:ln>
@@ -5673,7 +5022,7 @@
           <a:p>
             <a:fld id="{E3E42ED2-DF18-DB41-BB39-D7AA7F2F2082}" type="datetimeFigureOut">
               <a:rPr lang="en-US" smtClean="0"/>
-              <a:t>10/14/24</a:t>
+              <a:t>7/3/26</a:t>
             </a:fld>
             <a:endParaRPr lang="en-US"/>
           </a:p>
@@ -5871,7 +5220,7 @@
           <a:p>
             <a:fld id="{E3E42ED2-DF18-DB41-BB39-D7AA7F2F2082}" type="datetimeFigureOut">
               <a:rPr lang="en-US" smtClean="0"/>
-              <a:t>10/14/24</a:t>
+              <a:t>7/3/26</a:t>
             </a:fld>
             <a:endParaRPr lang="en-US"/>
           </a:p>
@@ -6079,7 +5428,7 @@
           <a:p>
             <a:fld id="{E3E42ED2-DF18-DB41-BB39-D7AA7F2F2082}" type="datetimeFigureOut">
               <a:rPr lang="en-US" smtClean="0"/>
-              <a:t>10/14/24</a:t>
+              <a:t>7/3/26</a:t>
             </a:fld>
             <a:endParaRPr lang="en-US"/>
           </a:p>
@@ -6143,597 +5492,6 @@
     <p:extLst>
       <p:ext uri="{BB962C8B-B14F-4D97-AF65-F5344CB8AC3E}">
         <p14:creationId xmlns:p14="http://schemas.microsoft.com/office/powerpoint/2010/main" val="2806732090"/>
-      </p:ext>
-    </p:extLst>
-  </p:cSld>
-  <p:clrMapOvr>
-    <a:masterClrMapping/>
-  </p:clrMapOvr>
-</p:sldLayout>
-</file>
-
-<file path=ppt/slideLayouts/slideLayout12.xml><?xml version="1.0" encoding="utf-8"?>
-<p:sldLayout xmlns:a="http://schemas.openxmlformats.org/drawingml/2006/main" xmlns:r="http://schemas.openxmlformats.org/officeDocument/2006/relationships" xmlns:p="http://schemas.openxmlformats.org/presentationml/2006/main" type="title" preserve="1">
-  <p:cSld name="Title Slide">
-    <p:spTree>
-      <p:nvGrpSpPr>
-        <p:cNvPr id="1" name=""/>
-        <p:cNvGrpSpPr/>
-        <p:nvPr/>
-      </p:nvGrpSpPr>
-      <p:grpSpPr>
-        <a:xfrm>
-          <a:off x="0" y="0"/>
-          <a:ext cx="0" cy="0"/>
-          <a:chOff x="0" y="0"/>
-          <a:chExt cx="0" cy="0"/>
-        </a:xfrm>
-      </p:grpSpPr>
-      <p:sp>
-        <p:nvSpPr>
-          <p:cNvPr id="2" name="Title 1">
-            <a:extLst>
-              <a:ext uri="{FF2B5EF4-FFF2-40B4-BE49-F238E27FC236}">
-                <a16:creationId xmlns:a16="http://schemas.microsoft.com/office/drawing/2014/main" id="{08FC2668-EBEB-AE41-BF76-89062B014B13}"/>
-              </a:ext>
-            </a:extLst>
-          </p:cNvPr>
-          <p:cNvSpPr>
-            <a:spLocks noGrp="1"/>
-          </p:cNvSpPr>
-          <p:nvPr>
-            <p:ph type="ctrTitle"/>
-          </p:nvPr>
-        </p:nvSpPr>
-        <p:spPr>
-          <a:xfrm>
-            <a:off x="1524000" y="1122363"/>
-            <a:ext cx="9144000" cy="2387600"/>
-          </a:xfrm>
-        </p:spPr>
-        <p:txBody>
-          <a:bodyPr anchor="b"/>
-          <a:lstStyle>
-            <a:lvl1pPr algn="ctr">
-              <a:defRPr sz="6000"/>
-            </a:lvl1pPr>
-          </a:lstStyle>
-          <a:p>
-            <a:r>
-              <a:rPr lang="en-US" dirty="0"/>
-              <a:t>Click to edit Master title style</a:t>
-            </a:r>
-          </a:p>
-        </p:txBody>
-      </p:sp>
-      <p:sp>
-        <p:nvSpPr>
-          <p:cNvPr id="3" name="Subtitle 2">
-            <a:extLst>
-              <a:ext uri="{FF2B5EF4-FFF2-40B4-BE49-F238E27FC236}">
-                <a16:creationId xmlns:a16="http://schemas.microsoft.com/office/drawing/2014/main" id="{C8C28A4C-0805-8E44-B54E-3B6F671F8D01}"/>
-              </a:ext>
-            </a:extLst>
-          </p:cNvPr>
-          <p:cNvSpPr>
-            <a:spLocks noGrp="1"/>
-          </p:cNvSpPr>
-          <p:nvPr>
-            <p:ph type="subTitle" idx="1"/>
-          </p:nvPr>
-        </p:nvSpPr>
-        <p:spPr>
-          <a:xfrm>
-            <a:off x="1524000" y="3602038"/>
-            <a:ext cx="9144000" cy="1655762"/>
-          </a:xfrm>
-        </p:spPr>
-        <p:txBody>
-          <a:bodyPr/>
-          <a:lstStyle>
-            <a:lvl1pPr marL="0" indent="0" algn="ctr">
-              <a:buNone/>
-              <a:defRPr sz="2400"/>
-            </a:lvl1pPr>
-            <a:lvl2pPr marL="457200" indent="0" algn="ctr">
-              <a:buNone/>
-              <a:defRPr sz="2000"/>
-            </a:lvl2pPr>
-            <a:lvl3pPr marL="914400" indent="0" algn="ctr">
-              <a:buNone/>
-              <a:defRPr sz="1800"/>
-            </a:lvl3pPr>
-            <a:lvl4pPr marL="1371600" indent="0" algn="ctr">
-              <a:buNone/>
-              <a:defRPr sz="1600"/>
-            </a:lvl4pPr>
-            <a:lvl5pPr marL="1828800" indent="0" algn="ctr">
-              <a:buNone/>
-              <a:defRPr sz="1600"/>
-            </a:lvl5pPr>
-            <a:lvl6pPr marL="2286000" indent="0" algn="ctr">
-              <a:buNone/>
-              <a:defRPr sz="1600"/>
-            </a:lvl6pPr>
-            <a:lvl7pPr marL="2743200" indent="0" algn="ctr">
-              <a:buNone/>
-              <a:defRPr sz="1600"/>
-            </a:lvl7pPr>
-            <a:lvl8pPr marL="3200400" indent="0" algn="ctr">
-              <a:buNone/>
-              <a:defRPr sz="1600"/>
-            </a:lvl8pPr>
-            <a:lvl9pPr marL="3657600" indent="0" algn="ctr">
-              <a:buNone/>
-              <a:defRPr sz="1600"/>
-            </a:lvl9pPr>
-          </a:lstStyle>
-          <a:p>
-            <a:r>
-              <a:rPr lang="en-US"/>
-              <a:t>Click to edit Master subtitle style</a:t>
-            </a:r>
-          </a:p>
-        </p:txBody>
-      </p:sp>
-      <p:sp>
-        <p:nvSpPr>
-          <p:cNvPr id="4" name="Date Placeholder 3">
-            <a:extLst>
-              <a:ext uri="{FF2B5EF4-FFF2-40B4-BE49-F238E27FC236}">
-                <a16:creationId xmlns:a16="http://schemas.microsoft.com/office/drawing/2014/main" id="{293B74C2-6265-7F41-BB8F-D8A0A0C89A63}"/>
-              </a:ext>
-            </a:extLst>
-          </p:cNvPr>
-          <p:cNvSpPr>
-            <a:spLocks noGrp="1"/>
-          </p:cNvSpPr>
-          <p:nvPr>
-            <p:ph type="dt" sz="half" idx="10"/>
-          </p:nvPr>
-        </p:nvSpPr>
-        <p:spPr/>
-        <p:txBody>
-          <a:bodyPr/>
-          <a:lstStyle/>
-          <a:p>
-            <a:fld id="{B1CFC895-F8E0-4049-8BEE-E5499394E46C}" type="datetime1">
-              <a:rPr lang="en-US" smtClean="0"/>
-              <a:t>10/14/24</a:t>
-            </a:fld>
-            <a:endParaRPr lang="en-US"/>
-          </a:p>
-        </p:txBody>
-      </p:sp>
-      <p:sp>
-        <p:nvSpPr>
-          <p:cNvPr id="5" name="Footer Placeholder 4">
-            <a:extLst>
-              <a:ext uri="{FF2B5EF4-FFF2-40B4-BE49-F238E27FC236}">
-                <a16:creationId xmlns:a16="http://schemas.microsoft.com/office/drawing/2014/main" id="{74C53590-4180-6C42-A6BF-707655C15A1D}"/>
-              </a:ext>
-            </a:extLst>
-          </p:cNvPr>
-          <p:cNvSpPr>
-            <a:spLocks noGrp="1"/>
-          </p:cNvSpPr>
-          <p:nvPr>
-            <p:ph type="ftr" sz="quarter" idx="11"/>
-          </p:nvPr>
-        </p:nvSpPr>
-        <p:spPr/>
-        <p:txBody>
-          <a:bodyPr/>
-          <a:lstStyle>
-            <a:lvl1pPr>
-              <a:defRPr/>
-            </a:lvl1pPr>
-          </a:lstStyle>
-          <a:p>
-            <a:r>
-              <a:rPr lang="en-US"/>
-              <a:t>J Mark Morris - Model of Nature - April 2019</a:t>
-            </a:r>
-          </a:p>
-        </p:txBody>
-      </p:sp>
-      <p:sp>
-        <p:nvSpPr>
-          <p:cNvPr id="6" name="Slide Number Placeholder 5">
-            <a:extLst>
-              <a:ext uri="{FF2B5EF4-FFF2-40B4-BE49-F238E27FC236}">
-                <a16:creationId xmlns:a16="http://schemas.microsoft.com/office/drawing/2014/main" id="{93A81401-8545-2D4E-A7FB-31AFC7A8DB71}"/>
-              </a:ext>
-            </a:extLst>
-          </p:cNvPr>
-          <p:cNvSpPr>
-            <a:spLocks noGrp="1"/>
-          </p:cNvSpPr>
-          <p:nvPr>
-            <p:ph type="sldNum" sz="quarter" idx="12"/>
-          </p:nvPr>
-        </p:nvSpPr>
-        <p:spPr/>
-        <p:txBody>
-          <a:bodyPr/>
-          <a:lstStyle/>
-          <a:p>
-            <a:fld id="{D73D4D4B-2FF7-BE46-958C-B004BD45EF6F}" type="slidenum">
-              <a:rPr lang="en-US" smtClean="0"/>
-              <a:t>‹#›</a:t>
-            </a:fld>
-            <a:endParaRPr lang="en-US"/>
-          </a:p>
-        </p:txBody>
-      </p:sp>
-    </p:spTree>
-    <p:extLst>
-      <p:ext uri="{BB962C8B-B14F-4D97-AF65-F5344CB8AC3E}">
-        <p14:creationId xmlns:p14="http://schemas.microsoft.com/office/powerpoint/2010/main" val="250131866"/>
-      </p:ext>
-    </p:extLst>
-  </p:cSld>
-  <p:clrMapOvr>
-    <a:masterClrMapping/>
-  </p:clrMapOvr>
-</p:sldLayout>
-</file>
-
-<file path=ppt/slideLayouts/slideLayout13.xml><?xml version="1.0" encoding="utf-8"?>
-<p:sldLayout xmlns:a="http://schemas.openxmlformats.org/drawingml/2006/main" xmlns:r="http://schemas.openxmlformats.org/officeDocument/2006/relationships" xmlns:p="http://schemas.openxmlformats.org/presentationml/2006/main" type="obj" preserve="1">
-  <p:cSld name="Title and Content">
-    <p:spTree>
-      <p:nvGrpSpPr>
-        <p:cNvPr id="1" name=""/>
-        <p:cNvGrpSpPr/>
-        <p:nvPr/>
-      </p:nvGrpSpPr>
-      <p:grpSpPr>
-        <a:xfrm>
-          <a:off x="0" y="0"/>
-          <a:ext cx="0" cy="0"/>
-          <a:chOff x="0" y="0"/>
-          <a:chExt cx="0" cy="0"/>
-        </a:xfrm>
-      </p:grpSpPr>
-      <p:sp>
-        <p:nvSpPr>
-          <p:cNvPr id="2" name="Title 1">
-            <a:extLst>
-              <a:ext uri="{FF2B5EF4-FFF2-40B4-BE49-F238E27FC236}">
-                <a16:creationId xmlns:a16="http://schemas.microsoft.com/office/drawing/2014/main" id="{EDF560F9-C770-5C4C-9C93-102EC332DBA4}"/>
-              </a:ext>
-            </a:extLst>
-          </p:cNvPr>
-          <p:cNvSpPr>
-            <a:spLocks noGrp="1"/>
-          </p:cNvSpPr>
-          <p:nvPr>
-            <p:ph type="title"/>
-          </p:nvPr>
-        </p:nvSpPr>
-        <p:spPr>
-          <a:xfrm>
-            <a:off x="838200" y="365125"/>
-            <a:ext cx="10515600" cy="777875"/>
-          </a:xfrm>
-        </p:spPr>
-        <p:txBody>
-          <a:bodyPr/>
-          <a:lstStyle/>
-          <a:p>
-            <a:r>
-              <a:rPr lang="en-US" dirty="0"/>
-              <a:t>Click to edit Master title style</a:t>
-            </a:r>
-          </a:p>
-        </p:txBody>
-      </p:sp>
-      <p:sp>
-        <p:nvSpPr>
-          <p:cNvPr id="3" name="Content Placeholder 2">
-            <a:extLst>
-              <a:ext uri="{FF2B5EF4-FFF2-40B4-BE49-F238E27FC236}">
-                <a16:creationId xmlns:a16="http://schemas.microsoft.com/office/drawing/2014/main" id="{80D38EDA-56F1-1C40-B81E-28B921C4E99F}"/>
-              </a:ext>
-            </a:extLst>
-          </p:cNvPr>
-          <p:cNvSpPr>
-            <a:spLocks noGrp="1"/>
-          </p:cNvSpPr>
-          <p:nvPr>
-            <p:ph idx="1"/>
-          </p:nvPr>
-        </p:nvSpPr>
-        <p:spPr>
-          <a:xfrm>
-            <a:off x="838200" y="1295400"/>
-            <a:ext cx="10515600" cy="4881563"/>
-          </a:xfrm>
-        </p:spPr>
-        <p:txBody>
-          <a:bodyPr/>
-          <a:lstStyle/>
-          <a:p>
-            <a:pPr lvl="0"/>
-            <a:r>
-              <a:rPr lang="en-US" dirty="0"/>
-              <a:t>Edit Master text styles</a:t>
-            </a:r>
-          </a:p>
-          <a:p>
-            <a:pPr lvl="1"/>
-            <a:r>
-              <a:rPr lang="en-US" dirty="0"/>
-              <a:t>Second level</a:t>
-            </a:r>
-          </a:p>
-          <a:p>
-            <a:pPr lvl="2"/>
-            <a:r>
-              <a:rPr lang="en-US" dirty="0"/>
-              <a:t>Third level</a:t>
-            </a:r>
-          </a:p>
-          <a:p>
-            <a:pPr lvl="3"/>
-            <a:r>
-              <a:rPr lang="en-US" dirty="0"/>
-              <a:t>Fourth level</a:t>
-            </a:r>
-          </a:p>
-          <a:p>
-            <a:pPr lvl="4"/>
-            <a:r>
-              <a:rPr lang="en-US" dirty="0"/>
-              <a:t>Fifth level</a:t>
-            </a:r>
-          </a:p>
-        </p:txBody>
-      </p:sp>
-      <p:sp>
-        <p:nvSpPr>
-          <p:cNvPr id="4" name="Date Placeholder 3">
-            <a:extLst>
-              <a:ext uri="{FF2B5EF4-FFF2-40B4-BE49-F238E27FC236}">
-                <a16:creationId xmlns:a16="http://schemas.microsoft.com/office/drawing/2014/main" id="{0AD42772-5D80-F641-A1BB-6048573C4E88}"/>
-              </a:ext>
-            </a:extLst>
-          </p:cNvPr>
-          <p:cNvSpPr>
-            <a:spLocks noGrp="1"/>
-          </p:cNvSpPr>
-          <p:nvPr>
-            <p:ph type="dt" sz="half" idx="10"/>
-          </p:nvPr>
-        </p:nvSpPr>
-        <p:spPr/>
-        <p:txBody>
-          <a:bodyPr/>
-          <a:lstStyle/>
-          <a:p>
-            <a:fld id="{A91F55E2-A889-F24B-B1FE-1E878178F308}" type="datetime1">
-              <a:rPr lang="en-US" smtClean="0"/>
-              <a:t>10/14/24</a:t>
-            </a:fld>
-            <a:endParaRPr lang="en-US"/>
-          </a:p>
-        </p:txBody>
-      </p:sp>
-      <p:sp>
-        <p:nvSpPr>
-          <p:cNvPr id="5" name="Footer Placeholder 4">
-            <a:extLst>
-              <a:ext uri="{FF2B5EF4-FFF2-40B4-BE49-F238E27FC236}">
-                <a16:creationId xmlns:a16="http://schemas.microsoft.com/office/drawing/2014/main" id="{C68FC4AF-90CF-484C-B6C7-5CE1A016FB49}"/>
-              </a:ext>
-            </a:extLst>
-          </p:cNvPr>
-          <p:cNvSpPr>
-            <a:spLocks noGrp="1"/>
-          </p:cNvSpPr>
-          <p:nvPr>
-            <p:ph type="ftr" sz="quarter" idx="11"/>
-          </p:nvPr>
-        </p:nvSpPr>
-        <p:spPr/>
-        <p:txBody>
-          <a:bodyPr/>
-          <a:lstStyle/>
-          <a:p>
-            <a:r>
-              <a:rPr lang="en-US"/>
-              <a:t>J Mark Morris - Model of Nature - April 2019</a:t>
-            </a:r>
-          </a:p>
-        </p:txBody>
-      </p:sp>
-      <p:sp>
-        <p:nvSpPr>
-          <p:cNvPr id="6" name="Slide Number Placeholder 5">
-            <a:extLst>
-              <a:ext uri="{FF2B5EF4-FFF2-40B4-BE49-F238E27FC236}">
-                <a16:creationId xmlns:a16="http://schemas.microsoft.com/office/drawing/2014/main" id="{8169AF1E-33D8-3041-A601-1384C718A8B5}"/>
-              </a:ext>
-            </a:extLst>
-          </p:cNvPr>
-          <p:cNvSpPr>
-            <a:spLocks noGrp="1"/>
-          </p:cNvSpPr>
-          <p:nvPr>
-            <p:ph type="sldNum" sz="quarter" idx="12"/>
-          </p:nvPr>
-        </p:nvSpPr>
-        <p:spPr/>
-        <p:txBody>
-          <a:bodyPr/>
-          <a:lstStyle/>
-          <a:p>
-            <a:fld id="{D73D4D4B-2FF7-BE46-958C-B004BD45EF6F}" type="slidenum">
-              <a:rPr lang="en-US" smtClean="0"/>
-              <a:t>‹#›</a:t>
-            </a:fld>
-            <a:endParaRPr lang="en-US"/>
-          </a:p>
-        </p:txBody>
-      </p:sp>
-    </p:spTree>
-    <p:extLst>
-      <p:ext uri="{BB962C8B-B14F-4D97-AF65-F5344CB8AC3E}">
-        <p14:creationId xmlns:p14="http://schemas.microsoft.com/office/powerpoint/2010/main" val="3112984417"/>
-      </p:ext>
-    </p:extLst>
-  </p:cSld>
-  <p:clrMapOvr>
-    <a:masterClrMapping/>
-  </p:clrMapOvr>
-</p:sldLayout>
-</file>
-
-<file path=ppt/slideLayouts/slideLayout14.xml><?xml version="1.0" encoding="utf-8"?>
-<p:sldLayout xmlns:a="http://schemas.openxmlformats.org/drawingml/2006/main" xmlns:r="http://schemas.openxmlformats.org/officeDocument/2006/relationships" xmlns:p="http://schemas.openxmlformats.org/presentationml/2006/main" type="titleOnly" preserve="1">
-  <p:cSld name="Title Only">
-    <p:spTree>
-      <p:nvGrpSpPr>
-        <p:cNvPr id="1" name=""/>
-        <p:cNvGrpSpPr/>
-        <p:nvPr/>
-      </p:nvGrpSpPr>
-      <p:grpSpPr>
-        <a:xfrm>
-          <a:off x="0" y="0"/>
-          <a:ext cx="0" cy="0"/>
-          <a:chOff x="0" y="0"/>
-          <a:chExt cx="0" cy="0"/>
-        </a:xfrm>
-      </p:grpSpPr>
-      <p:sp>
-        <p:nvSpPr>
-          <p:cNvPr id="2" name="Title 1">
-            <a:extLst>
-              <a:ext uri="{FF2B5EF4-FFF2-40B4-BE49-F238E27FC236}">
-                <a16:creationId xmlns:a16="http://schemas.microsoft.com/office/drawing/2014/main" id="{5821822D-6D7A-1342-98EF-890C6F2DA174}"/>
-              </a:ext>
-            </a:extLst>
-          </p:cNvPr>
-          <p:cNvSpPr>
-            <a:spLocks noGrp="1"/>
-          </p:cNvSpPr>
-          <p:nvPr>
-            <p:ph type="title"/>
-          </p:nvPr>
-        </p:nvSpPr>
-        <p:spPr>
-          <a:xfrm>
-            <a:off x="838200" y="365125"/>
-            <a:ext cx="10515600" cy="777875"/>
-          </a:xfrm>
-        </p:spPr>
-        <p:txBody>
-          <a:bodyPr/>
-          <a:lstStyle/>
-          <a:p>
-            <a:r>
-              <a:rPr lang="en-US"/>
-              <a:t>Click to edit Master title style</a:t>
-            </a:r>
-          </a:p>
-        </p:txBody>
-      </p:sp>
-      <p:sp>
-        <p:nvSpPr>
-          <p:cNvPr id="3" name="Date Placeholder 2">
-            <a:extLst>
-              <a:ext uri="{FF2B5EF4-FFF2-40B4-BE49-F238E27FC236}">
-                <a16:creationId xmlns:a16="http://schemas.microsoft.com/office/drawing/2014/main" id="{74CF19EA-9170-5B4B-814F-7425C8E22823}"/>
-              </a:ext>
-            </a:extLst>
-          </p:cNvPr>
-          <p:cNvSpPr>
-            <a:spLocks noGrp="1"/>
-          </p:cNvSpPr>
-          <p:nvPr>
-            <p:ph type="dt" sz="half" idx="10"/>
-          </p:nvPr>
-        </p:nvSpPr>
-        <p:spPr/>
-        <p:txBody>
-          <a:bodyPr/>
-          <a:lstStyle/>
-          <a:p>
-            <a:fld id="{C6E8461C-3391-334C-9885-001B32D724C4}" type="datetime1">
-              <a:rPr lang="en-US" smtClean="0"/>
-              <a:t>10/14/24</a:t>
-            </a:fld>
-            <a:endParaRPr lang="en-US"/>
-          </a:p>
-        </p:txBody>
-      </p:sp>
-      <p:sp>
-        <p:nvSpPr>
-          <p:cNvPr id="4" name="Footer Placeholder 3">
-            <a:extLst>
-              <a:ext uri="{FF2B5EF4-FFF2-40B4-BE49-F238E27FC236}">
-                <a16:creationId xmlns:a16="http://schemas.microsoft.com/office/drawing/2014/main" id="{5882B1FB-ECDF-AD43-9020-0267ED91C04E}"/>
-              </a:ext>
-            </a:extLst>
-          </p:cNvPr>
-          <p:cNvSpPr>
-            <a:spLocks noGrp="1"/>
-          </p:cNvSpPr>
-          <p:nvPr>
-            <p:ph type="ftr" sz="quarter" idx="11"/>
-          </p:nvPr>
-        </p:nvSpPr>
-        <p:spPr/>
-        <p:txBody>
-          <a:bodyPr/>
-          <a:lstStyle>
-            <a:lvl1pPr>
-              <a:defRPr/>
-            </a:lvl1pPr>
-          </a:lstStyle>
-          <a:p>
-            <a:r>
-              <a:rPr lang="en-US"/>
-              <a:t>J Mark Morris - Model of Nature - April 2019</a:t>
-            </a:r>
-          </a:p>
-        </p:txBody>
-      </p:sp>
-      <p:sp>
-        <p:nvSpPr>
-          <p:cNvPr id="5" name="Slide Number Placeholder 4">
-            <a:extLst>
-              <a:ext uri="{FF2B5EF4-FFF2-40B4-BE49-F238E27FC236}">
-                <a16:creationId xmlns:a16="http://schemas.microsoft.com/office/drawing/2014/main" id="{D949C470-5AF0-5246-81E7-95EAEE5639EF}"/>
-              </a:ext>
-            </a:extLst>
-          </p:cNvPr>
-          <p:cNvSpPr>
-            <a:spLocks noGrp="1"/>
-          </p:cNvSpPr>
-          <p:nvPr>
-            <p:ph type="sldNum" sz="quarter" idx="12"/>
-          </p:nvPr>
-        </p:nvSpPr>
-        <p:spPr/>
-        <p:txBody>
-          <a:bodyPr/>
-          <a:lstStyle/>
-          <a:p>
-            <a:fld id="{D73D4D4B-2FF7-BE46-958C-B004BD45EF6F}" type="slidenum">
-              <a:rPr lang="en-US" smtClean="0"/>
-              <a:t>‹#›</a:t>
-            </a:fld>
-            <a:endParaRPr lang="en-US"/>
-          </a:p>
-        </p:txBody>
-      </p:sp>
-    </p:spTree>
-    <p:extLst>
-      <p:ext uri="{BB962C8B-B14F-4D97-AF65-F5344CB8AC3E}">
-        <p14:creationId xmlns:p14="http://schemas.microsoft.com/office/powerpoint/2010/main" val="825638112"/>
       </p:ext>
     </p:extLst>
   </p:cSld>
@@ -6868,7 +5626,7 @@
           <a:p>
             <a:fld id="{E3E42ED2-DF18-DB41-BB39-D7AA7F2F2082}" type="datetimeFigureOut">
               <a:rPr lang="en-US" smtClean="0"/>
-              <a:t>10/14/24</a:t>
+              <a:t>7/3/26</a:t>
             </a:fld>
             <a:endParaRPr lang="en-US"/>
           </a:p>
@@ -7143,7 +5901,7 @@
           <a:p>
             <a:fld id="{E3E42ED2-DF18-DB41-BB39-D7AA7F2F2082}" type="datetimeFigureOut">
               <a:rPr lang="en-US" smtClean="0"/>
-              <a:t>10/14/24</a:t>
+              <a:t>7/3/26</a:t>
             </a:fld>
             <a:endParaRPr lang="en-US"/>
           </a:p>
@@ -7408,7 +6166,7 @@
           <a:p>
             <a:fld id="{E3E42ED2-DF18-DB41-BB39-D7AA7F2F2082}" type="datetimeFigureOut">
               <a:rPr lang="en-US" smtClean="0"/>
-              <a:t>10/14/24</a:t>
+              <a:t>7/3/26</a:t>
             </a:fld>
             <a:endParaRPr lang="en-US"/>
           </a:p>
@@ -7820,7 +6578,7 @@
           <a:p>
             <a:fld id="{E3E42ED2-DF18-DB41-BB39-D7AA7F2F2082}" type="datetimeFigureOut">
               <a:rPr lang="en-US" smtClean="0"/>
-              <a:t>10/14/24</a:t>
+              <a:t>7/3/26</a:t>
             </a:fld>
             <a:endParaRPr lang="en-US"/>
           </a:p>
@@ -7961,7 +6719,7 @@
           <a:p>
             <a:fld id="{E3E42ED2-DF18-DB41-BB39-D7AA7F2F2082}" type="datetimeFigureOut">
               <a:rPr lang="en-US" smtClean="0"/>
-              <a:t>10/14/24</a:t>
+              <a:t>7/3/26</a:t>
             </a:fld>
             <a:endParaRPr lang="en-US"/>
           </a:p>
@@ -8074,7 +6832,7 @@
           <a:p>
             <a:fld id="{E3E42ED2-DF18-DB41-BB39-D7AA7F2F2082}" type="datetimeFigureOut">
               <a:rPr lang="en-US" smtClean="0"/>
-              <a:t>10/14/24</a:t>
+              <a:t>7/3/26</a:t>
             </a:fld>
             <a:endParaRPr lang="en-US"/>
           </a:p>
@@ -8385,7 +7143,7 @@
           <a:p>
             <a:fld id="{E3E42ED2-DF18-DB41-BB39-D7AA7F2F2082}" type="datetimeFigureOut">
               <a:rPr lang="en-US" smtClean="0"/>
-              <a:t>10/14/24</a:t>
+              <a:t>7/3/26</a:t>
             </a:fld>
             <a:endParaRPr lang="en-US"/>
           </a:p>
@@ -8673,7 +7431,7 @@
           <a:p>
             <a:fld id="{E3E42ED2-DF18-DB41-BB39-D7AA7F2F2082}" type="datetimeFigureOut">
               <a:rPr lang="en-US" smtClean="0"/>
-              <a:t>10/14/24</a:t>
+              <a:t>7/3/26</a:t>
             </a:fld>
             <a:endParaRPr lang="en-US"/>
           </a:p>
@@ -8914,7 +7672,7 @@
           <a:p>
             <a:fld id="{E3E42ED2-DF18-DB41-BB39-D7AA7F2F2082}" type="datetimeFigureOut">
               <a:rPr lang="en-US" smtClean="0"/>
-              <a:t>10/14/24</a:t>
+              <a:t>7/3/26</a:t>
             </a:fld>
             <a:endParaRPr lang="en-US"/>
           </a:p>
@@ -9314,580 +8072,6 @@
 </p:sldMaster>
 </file>
 
-<file path=ppt/slideMasters/slideMaster2.xml><?xml version="1.0" encoding="utf-8"?>
-<p:sldMaster xmlns:a="http://schemas.openxmlformats.org/drawingml/2006/main" xmlns:r="http://schemas.openxmlformats.org/officeDocument/2006/relationships" xmlns:p="http://schemas.openxmlformats.org/presentationml/2006/main">
-  <p:cSld>
-    <p:bg>
-      <p:bgRef idx="1001">
-        <a:schemeClr val="bg1"/>
-      </p:bgRef>
-    </p:bg>
-    <p:spTree>
-      <p:nvGrpSpPr>
-        <p:cNvPr id="1" name=""/>
-        <p:cNvGrpSpPr/>
-        <p:nvPr/>
-      </p:nvGrpSpPr>
-      <p:grpSpPr>
-        <a:xfrm>
-          <a:off x="0" y="0"/>
-          <a:ext cx="0" cy="0"/>
-          <a:chOff x="0" y="0"/>
-          <a:chExt cx="0" cy="0"/>
-        </a:xfrm>
-      </p:grpSpPr>
-      <p:sp>
-        <p:nvSpPr>
-          <p:cNvPr id="2" name="Title Placeholder 1">
-            <a:extLst>
-              <a:ext uri="{FF2B5EF4-FFF2-40B4-BE49-F238E27FC236}">
-                <a16:creationId xmlns:a16="http://schemas.microsoft.com/office/drawing/2014/main" id="{4C79A1DB-155B-0846-9CED-8B75F56E0E58}"/>
-              </a:ext>
-            </a:extLst>
-          </p:cNvPr>
-          <p:cNvSpPr>
-            <a:spLocks noGrp="1"/>
-          </p:cNvSpPr>
-          <p:nvPr>
-            <p:ph type="title"/>
-          </p:nvPr>
-        </p:nvSpPr>
-        <p:spPr>
-          <a:xfrm>
-            <a:off x="838200" y="365125"/>
-            <a:ext cx="10515600" cy="1325563"/>
-          </a:xfrm>
-          <a:prstGeom prst="rect">
-            <a:avLst/>
-          </a:prstGeom>
-        </p:spPr>
-        <p:txBody>
-          <a:bodyPr vert="horz" lIns="91440" tIns="45720" rIns="91440" bIns="45720" rtlCol="0" anchor="ctr">
-            <a:normAutofit/>
-          </a:bodyPr>
-          <a:lstStyle/>
-          <a:p>
-            <a:r>
-              <a:rPr lang="en-US" dirty="0"/>
-              <a:t>Click to edit Master title style</a:t>
-            </a:r>
-          </a:p>
-        </p:txBody>
-      </p:sp>
-      <p:sp>
-        <p:nvSpPr>
-          <p:cNvPr id="3" name="Text Placeholder 2">
-            <a:extLst>
-              <a:ext uri="{FF2B5EF4-FFF2-40B4-BE49-F238E27FC236}">
-                <a16:creationId xmlns:a16="http://schemas.microsoft.com/office/drawing/2014/main" id="{FD69736F-08D5-7643-A656-ABAEB9457A7A}"/>
-              </a:ext>
-            </a:extLst>
-          </p:cNvPr>
-          <p:cNvSpPr>
-            <a:spLocks noGrp="1"/>
-          </p:cNvSpPr>
-          <p:nvPr>
-            <p:ph type="body" idx="1"/>
-          </p:nvPr>
-        </p:nvSpPr>
-        <p:spPr>
-          <a:xfrm>
-            <a:off x="838200" y="1825625"/>
-            <a:ext cx="10515600" cy="4351338"/>
-          </a:xfrm>
-          <a:prstGeom prst="rect">
-            <a:avLst/>
-          </a:prstGeom>
-        </p:spPr>
-        <p:txBody>
-          <a:bodyPr vert="horz" lIns="91440" tIns="45720" rIns="91440" bIns="45720" rtlCol="0">
-            <a:normAutofit/>
-          </a:bodyPr>
-          <a:lstStyle/>
-          <a:p>
-            <a:pPr lvl="0"/>
-            <a:r>
-              <a:rPr lang="en-US"/>
-              <a:t>Edit Master text styles</a:t>
-            </a:r>
-          </a:p>
-          <a:p>
-            <a:pPr lvl="1"/>
-            <a:r>
-              <a:rPr lang="en-US"/>
-              <a:t>Second level</a:t>
-            </a:r>
-          </a:p>
-          <a:p>
-            <a:pPr lvl="2"/>
-            <a:r>
-              <a:rPr lang="en-US"/>
-              <a:t>Third level</a:t>
-            </a:r>
-          </a:p>
-          <a:p>
-            <a:pPr lvl="3"/>
-            <a:r>
-              <a:rPr lang="en-US"/>
-              <a:t>Fourth level</a:t>
-            </a:r>
-          </a:p>
-          <a:p>
-            <a:pPr lvl="4"/>
-            <a:r>
-              <a:rPr lang="en-US"/>
-              <a:t>Fifth level</a:t>
-            </a:r>
-          </a:p>
-        </p:txBody>
-      </p:sp>
-      <p:sp>
-        <p:nvSpPr>
-          <p:cNvPr id="4" name="Date Placeholder 3">
-            <a:extLst>
-              <a:ext uri="{FF2B5EF4-FFF2-40B4-BE49-F238E27FC236}">
-                <a16:creationId xmlns:a16="http://schemas.microsoft.com/office/drawing/2014/main" id="{C0433D04-66F5-D74B-8EEA-459FDC00D1E4}"/>
-              </a:ext>
-            </a:extLst>
-          </p:cNvPr>
-          <p:cNvSpPr>
-            <a:spLocks noGrp="1"/>
-          </p:cNvSpPr>
-          <p:nvPr>
-            <p:ph type="dt" sz="half" idx="2"/>
-          </p:nvPr>
-        </p:nvSpPr>
-        <p:spPr>
-          <a:xfrm>
-            <a:off x="838200" y="6356350"/>
-            <a:ext cx="2743200" cy="365125"/>
-          </a:xfrm>
-          <a:prstGeom prst="rect">
-            <a:avLst/>
-          </a:prstGeom>
-        </p:spPr>
-        <p:txBody>
-          <a:bodyPr vert="horz" lIns="91440" tIns="45720" rIns="91440" bIns="45720" rtlCol="0" anchor="ctr"/>
-          <a:lstStyle>
-            <a:lvl1pPr algn="l">
-              <a:defRPr sz="1200">
-                <a:solidFill>
-                  <a:schemeClr val="tx1">
-                    <a:tint val="75000"/>
-                  </a:schemeClr>
-                </a:solidFill>
-                <a:latin typeface="Helvetica Neue" panose="02000503000000020004" pitchFamily="2" charset="0"/>
-                <a:ea typeface="Helvetica Neue" panose="02000503000000020004" pitchFamily="2" charset="0"/>
-                <a:cs typeface="Helvetica Neue" panose="02000503000000020004" pitchFamily="2" charset="0"/>
-              </a:defRPr>
-            </a:lvl1pPr>
-          </a:lstStyle>
-          <a:p>
-            <a:fld id="{2005EE61-3907-C44D-8624-D47E09E871DB}" type="datetime1">
-              <a:rPr lang="en-US" smtClean="0"/>
-              <a:t>10/14/24</a:t>
-            </a:fld>
-            <a:endParaRPr lang="en-US"/>
-          </a:p>
-        </p:txBody>
-      </p:sp>
-      <p:sp>
-        <p:nvSpPr>
-          <p:cNvPr id="5" name="Footer Placeholder 4">
-            <a:extLst>
-              <a:ext uri="{FF2B5EF4-FFF2-40B4-BE49-F238E27FC236}">
-                <a16:creationId xmlns:a16="http://schemas.microsoft.com/office/drawing/2014/main" id="{9FDE6E67-6F97-E149-8437-635D11E7ED43}"/>
-              </a:ext>
-            </a:extLst>
-          </p:cNvPr>
-          <p:cNvSpPr>
-            <a:spLocks noGrp="1"/>
-          </p:cNvSpPr>
-          <p:nvPr>
-            <p:ph type="ftr" sz="quarter" idx="3"/>
-          </p:nvPr>
-        </p:nvSpPr>
-        <p:spPr>
-          <a:xfrm>
-            <a:off x="4038600" y="6356350"/>
-            <a:ext cx="4114800" cy="365125"/>
-          </a:xfrm>
-          <a:prstGeom prst="rect">
-            <a:avLst/>
-          </a:prstGeom>
-        </p:spPr>
-        <p:txBody>
-          <a:bodyPr vert="horz" lIns="91440" tIns="45720" rIns="91440" bIns="45720" rtlCol="0" anchor="ctr"/>
-          <a:lstStyle>
-            <a:lvl1pPr algn="ctr">
-              <a:defRPr sz="1200">
-                <a:solidFill>
-                  <a:schemeClr val="tx1">
-                    <a:tint val="75000"/>
-                  </a:schemeClr>
-                </a:solidFill>
-                <a:latin typeface="Helvetica Neue" panose="02000503000000020004" pitchFamily="2" charset="0"/>
-                <a:ea typeface="Helvetica Neue" panose="02000503000000020004" pitchFamily="2" charset="0"/>
-                <a:cs typeface="Helvetica Neue" panose="02000503000000020004" pitchFamily="2" charset="0"/>
-              </a:defRPr>
-            </a:lvl1pPr>
-          </a:lstStyle>
-          <a:p>
-            <a:r>
-              <a:rPr lang="en-US"/>
-              <a:t>J Mark Morris - Model of Nature - April 2019</a:t>
-            </a:r>
-          </a:p>
-        </p:txBody>
-      </p:sp>
-      <p:sp>
-        <p:nvSpPr>
-          <p:cNvPr id="6" name="Slide Number Placeholder 5">
-            <a:extLst>
-              <a:ext uri="{FF2B5EF4-FFF2-40B4-BE49-F238E27FC236}">
-                <a16:creationId xmlns:a16="http://schemas.microsoft.com/office/drawing/2014/main" id="{D585CC1E-0AB1-F34A-83C6-0956BF9B4AF3}"/>
-              </a:ext>
-            </a:extLst>
-          </p:cNvPr>
-          <p:cNvSpPr>
-            <a:spLocks noGrp="1"/>
-          </p:cNvSpPr>
-          <p:nvPr>
-            <p:ph type="sldNum" sz="quarter" idx="4"/>
-          </p:nvPr>
-        </p:nvSpPr>
-        <p:spPr>
-          <a:xfrm>
-            <a:off x="8610600" y="6356350"/>
-            <a:ext cx="2743200" cy="365125"/>
-          </a:xfrm>
-          <a:prstGeom prst="rect">
-            <a:avLst/>
-          </a:prstGeom>
-        </p:spPr>
-        <p:txBody>
-          <a:bodyPr vert="horz" lIns="91440" tIns="45720" rIns="91440" bIns="45720" rtlCol="0" anchor="ctr"/>
-          <a:lstStyle>
-            <a:lvl1pPr algn="r">
-              <a:defRPr sz="1200">
-                <a:solidFill>
-                  <a:schemeClr val="tx1">
-                    <a:tint val="75000"/>
-                  </a:schemeClr>
-                </a:solidFill>
-                <a:latin typeface="Helvetica Neue" panose="02000503000000020004" pitchFamily="2" charset="0"/>
-                <a:ea typeface="Helvetica Neue" panose="02000503000000020004" pitchFamily="2" charset="0"/>
-                <a:cs typeface="Helvetica Neue" panose="02000503000000020004" pitchFamily="2" charset="0"/>
-              </a:defRPr>
-            </a:lvl1pPr>
-          </a:lstStyle>
-          <a:p>
-            <a:fld id="{D73D4D4B-2FF7-BE46-958C-B004BD45EF6F}" type="slidenum">
-              <a:rPr lang="en-US" smtClean="0"/>
-              <a:pPr/>
-              <a:t>‹#›</a:t>
-            </a:fld>
-            <a:endParaRPr lang="en-US"/>
-          </a:p>
-        </p:txBody>
-      </p:sp>
-    </p:spTree>
-    <p:extLst>
-      <p:ext uri="{BB962C8B-B14F-4D97-AF65-F5344CB8AC3E}">
-        <p14:creationId xmlns:p14="http://schemas.microsoft.com/office/powerpoint/2010/main" val="3141916996"/>
-      </p:ext>
-    </p:extLst>
-  </p:cSld>
-  <p:clrMap bg1="lt1" tx1="dk1" bg2="lt2" tx2="dk2" accent1="accent1" accent2="accent2" accent3="accent3" accent4="accent4" accent5="accent5" accent6="accent6" hlink="hlink" folHlink="folHlink"/>
-  <p:sldLayoutIdLst>
-    <p:sldLayoutId id="2147483668" r:id="rId1"/>
-    <p:sldLayoutId id="2147483669" r:id="rId2"/>
-    <p:sldLayoutId id="2147483670" r:id="rId3"/>
-  </p:sldLayoutIdLst>
-  <p:hf sldNum="0" hdr="0" dt="0"/>
-  <p:txStyles>
-    <p:titleStyle>
-      <a:lvl1pPr algn="l" defTabSz="914400" rtl="0" eaLnBrk="1" latinLnBrk="0" hangingPunct="1">
-        <a:lnSpc>
-          <a:spcPct val="90000"/>
-        </a:lnSpc>
-        <a:spcBef>
-          <a:spcPct val="0"/>
-        </a:spcBef>
-        <a:buNone/>
-        <a:defRPr sz="4400" kern="1200">
-          <a:solidFill>
-            <a:schemeClr val="tx1"/>
-          </a:solidFill>
-          <a:latin typeface="Helvetica Neue" panose="02000503000000020004" pitchFamily="2" charset="0"/>
-          <a:ea typeface="Helvetica Neue" panose="02000503000000020004" pitchFamily="2" charset="0"/>
-          <a:cs typeface="Helvetica Neue" panose="02000503000000020004" pitchFamily="2" charset="0"/>
-        </a:defRPr>
-      </a:lvl1pPr>
-    </p:titleStyle>
-    <p:bodyStyle>
-      <a:lvl1pPr marL="228600" indent="-228600" algn="l" defTabSz="914400" rtl="0" eaLnBrk="1" latinLnBrk="0" hangingPunct="1">
-        <a:lnSpc>
-          <a:spcPct val="90000"/>
-        </a:lnSpc>
-        <a:spcBef>
-          <a:spcPts val="1000"/>
-        </a:spcBef>
-        <a:buFont typeface="Arial" panose="020B0604020202020204" pitchFamily="34" charset="0"/>
-        <a:buChar char="•"/>
-        <a:defRPr sz="2800" kern="1200">
-          <a:solidFill>
-            <a:schemeClr val="tx1"/>
-          </a:solidFill>
-          <a:latin typeface="Helvetica Neue" panose="02000503000000020004" pitchFamily="2" charset="0"/>
-          <a:ea typeface="Helvetica Neue" panose="02000503000000020004" pitchFamily="2" charset="0"/>
-          <a:cs typeface="Helvetica Neue" panose="02000503000000020004" pitchFamily="2" charset="0"/>
-        </a:defRPr>
-      </a:lvl1pPr>
-      <a:lvl2pPr marL="685800" indent="-228600" algn="l" defTabSz="914400" rtl="0" eaLnBrk="1" latinLnBrk="0" hangingPunct="1">
-        <a:lnSpc>
-          <a:spcPct val="90000"/>
-        </a:lnSpc>
-        <a:spcBef>
-          <a:spcPts val="500"/>
-        </a:spcBef>
-        <a:buFont typeface="Arial" panose="020B0604020202020204" pitchFamily="34" charset="0"/>
-        <a:buChar char="•"/>
-        <a:defRPr sz="2400" kern="1200">
-          <a:solidFill>
-            <a:schemeClr val="tx1"/>
-          </a:solidFill>
-          <a:latin typeface="Helvetica Neue" panose="02000503000000020004" pitchFamily="2" charset="0"/>
-          <a:ea typeface="Helvetica Neue" panose="02000503000000020004" pitchFamily="2" charset="0"/>
-          <a:cs typeface="Helvetica Neue" panose="02000503000000020004" pitchFamily="2" charset="0"/>
-        </a:defRPr>
-      </a:lvl2pPr>
-      <a:lvl3pPr marL="1143000" indent="-228600" algn="l" defTabSz="914400" rtl="0" eaLnBrk="1" latinLnBrk="0" hangingPunct="1">
-        <a:lnSpc>
-          <a:spcPct val="90000"/>
-        </a:lnSpc>
-        <a:spcBef>
-          <a:spcPts val="500"/>
-        </a:spcBef>
-        <a:buFont typeface="Arial" panose="020B0604020202020204" pitchFamily="34" charset="0"/>
-        <a:buChar char="•"/>
-        <a:defRPr sz="2000" kern="1200">
-          <a:solidFill>
-            <a:schemeClr val="tx1"/>
-          </a:solidFill>
-          <a:latin typeface="Helvetica Neue" panose="02000503000000020004" pitchFamily="2" charset="0"/>
-          <a:ea typeface="Helvetica Neue" panose="02000503000000020004" pitchFamily="2" charset="0"/>
-          <a:cs typeface="Helvetica Neue" panose="02000503000000020004" pitchFamily="2" charset="0"/>
-        </a:defRPr>
-      </a:lvl3pPr>
-      <a:lvl4pPr marL="1600200" indent="-228600" algn="l" defTabSz="914400" rtl="0" eaLnBrk="1" latinLnBrk="0" hangingPunct="1">
-        <a:lnSpc>
-          <a:spcPct val="90000"/>
-        </a:lnSpc>
-        <a:spcBef>
-          <a:spcPts val="500"/>
-        </a:spcBef>
-        <a:buFont typeface="Arial" panose="020B0604020202020204" pitchFamily="34" charset="0"/>
-        <a:buChar char="•"/>
-        <a:defRPr sz="1800" kern="1200">
-          <a:solidFill>
-            <a:schemeClr val="tx1"/>
-          </a:solidFill>
-          <a:latin typeface="Helvetica Neue" panose="02000503000000020004" pitchFamily="2" charset="0"/>
-          <a:ea typeface="Helvetica Neue" panose="02000503000000020004" pitchFamily="2" charset="0"/>
-          <a:cs typeface="Helvetica Neue" panose="02000503000000020004" pitchFamily="2" charset="0"/>
-        </a:defRPr>
-      </a:lvl4pPr>
-      <a:lvl5pPr marL="2057400" indent="-228600" algn="l" defTabSz="914400" rtl="0" eaLnBrk="1" latinLnBrk="0" hangingPunct="1">
-        <a:lnSpc>
-          <a:spcPct val="90000"/>
-        </a:lnSpc>
-        <a:spcBef>
-          <a:spcPts val="500"/>
-        </a:spcBef>
-        <a:buFont typeface="Arial" panose="020B0604020202020204" pitchFamily="34" charset="0"/>
-        <a:buChar char="•"/>
-        <a:defRPr sz="1800" kern="1200">
-          <a:solidFill>
-            <a:schemeClr val="tx1"/>
-          </a:solidFill>
-          <a:latin typeface="Helvetica Neue" panose="02000503000000020004" pitchFamily="2" charset="0"/>
-          <a:ea typeface="Helvetica Neue" panose="02000503000000020004" pitchFamily="2" charset="0"/>
-          <a:cs typeface="Helvetica Neue" panose="02000503000000020004" pitchFamily="2" charset="0"/>
-        </a:defRPr>
-      </a:lvl5pPr>
-      <a:lvl6pPr marL="2514600" indent="-228600" algn="l" defTabSz="914400" rtl="0" eaLnBrk="1" latinLnBrk="0" hangingPunct="1">
-        <a:lnSpc>
-          <a:spcPct val="90000"/>
-        </a:lnSpc>
-        <a:spcBef>
-          <a:spcPts val="500"/>
-        </a:spcBef>
-        <a:buFont typeface="Arial" panose="020B0604020202020204" pitchFamily="34" charset="0"/>
-        <a:buChar char="•"/>
-        <a:defRPr sz="1800" kern="1200">
-          <a:solidFill>
-            <a:schemeClr val="tx1"/>
-          </a:solidFill>
-          <a:latin typeface="+mn-lt"/>
-          <a:ea typeface="+mn-ea"/>
-          <a:cs typeface="+mn-cs"/>
-        </a:defRPr>
-      </a:lvl6pPr>
-      <a:lvl7pPr marL="2971800" indent="-228600" algn="l" defTabSz="914400" rtl="0" eaLnBrk="1" latinLnBrk="0" hangingPunct="1">
-        <a:lnSpc>
-          <a:spcPct val="90000"/>
-        </a:lnSpc>
-        <a:spcBef>
-          <a:spcPts val="500"/>
-        </a:spcBef>
-        <a:buFont typeface="Arial" panose="020B0604020202020204" pitchFamily="34" charset="0"/>
-        <a:buChar char="•"/>
-        <a:defRPr sz="1800" kern="1200">
-          <a:solidFill>
-            <a:schemeClr val="tx1"/>
-          </a:solidFill>
-          <a:latin typeface="+mn-lt"/>
-          <a:ea typeface="+mn-ea"/>
-          <a:cs typeface="+mn-cs"/>
-        </a:defRPr>
-      </a:lvl7pPr>
-      <a:lvl8pPr marL="3429000" indent="-228600" algn="l" defTabSz="914400" rtl="0" eaLnBrk="1" latinLnBrk="0" hangingPunct="1">
-        <a:lnSpc>
-          <a:spcPct val="90000"/>
-        </a:lnSpc>
-        <a:spcBef>
-          <a:spcPts val="500"/>
-        </a:spcBef>
-        <a:buFont typeface="Arial" panose="020B0604020202020204" pitchFamily="34" charset="0"/>
-        <a:buChar char="•"/>
-        <a:defRPr sz="1800" kern="1200">
-          <a:solidFill>
-            <a:schemeClr val="tx1"/>
-          </a:solidFill>
-          <a:latin typeface="+mn-lt"/>
-          <a:ea typeface="+mn-ea"/>
-          <a:cs typeface="+mn-cs"/>
-        </a:defRPr>
-      </a:lvl8pPr>
-      <a:lvl9pPr marL="3886200" indent="-228600" algn="l" defTabSz="914400" rtl="0" eaLnBrk="1" latinLnBrk="0" hangingPunct="1">
-        <a:lnSpc>
-          <a:spcPct val="90000"/>
-        </a:lnSpc>
-        <a:spcBef>
-          <a:spcPts val="500"/>
-        </a:spcBef>
-        <a:buFont typeface="Arial" panose="020B0604020202020204" pitchFamily="34" charset="0"/>
-        <a:buChar char="•"/>
-        <a:defRPr sz="1800" kern="1200">
-          <a:solidFill>
-            <a:schemeClr val="tx1"/>
-          </a:solidFill>
-          <a:latin typeface="+mn-lt"/>
-          <a:ea typeface="+mn-ea"/>
-          <a:cs typeface="+mn-cs"/>
-        </a:defRPr>
-      </a:lvl9pPr>
-    </p:bodyStyle>
-    <p:otherStyle>
-      <a:defPPr>
-        <a:defRPr lang="en-US"/>
-      </a:defPPr>
-      <a:lvl1pPr marL="0" algn="l" defTabSz="914400" rtl="0" eaLnBrk="1" latinLnBrk="0" hangingPunct="1">
-        <a:defRPr sz="1800" kern="1200">
-          <a:solidFill>
-            <a:schemeClr val="tx1"/>
-          </a:solidFill>
-          <a:latin typeface="+mn-lt"/>
-          <a:ea typeface="+mn-ea"/>
-          <a:cs typeface="+mn-cs"/>
-        </a:defRPr>
-      </a:lvl1pPr>
-      <a:lvl2pPr marL="457200" algn="l" defTabSz="914400" rtl="0" eaLnBrk="1" latinLnBrk="0" hangingPunct="1">
-        <a:defRPr sz="1800" kern="1200">
-          <a:solidFill>
-            <a:schemeClr val="tx1"/>
-          </a:solidFill>
-          <a:latin typeface="+mn-lt"/>
-          <a:ea typeface="+mn-ea"/>
-          <a:cs typeface="+mn-cs"/>
-        </a:defRPr>
-      </a:lvl2pPr>
-      <a:lvl3pPr marL="914400" algn="l" defTabSz="914400" rtl="0" eaLnBrk="1" latinLnBrk="0" hangingPunct="1">
-        <a:defRPr sz="1800" kern="1200">
-          <a:solidFill>
-            <a:schemeClr val="tx1"/>
-          </a:solidFill>
-          <a:latin typeface="+mn-lt"/>
-          <a:ea typeface="+mn-ea"/>
-          <a:cs typeface="+mn-cs"/>
-        </a:defRPr>
-      </a:lvl3pPr>
-      <a:lvl4pPr marL="1371600" algn="l" defTabSz="914400" rtl="0" eaLnBrk="1" latinLnBrk="0" hangingPunct="1">
-        <a:defRPr sz="1800" kern="1200">
-          <a:solidFill>
-            <a:schemeClr val="tx1"/>
-          </a:solidFill>
-          <a:latin typeface="+mn-lt"/>
-          <a:ea typeface="+mn-ea"/>
-          <a:cs typeface="+mn-cs"/>
-        </a:defRPr>
-      </a:lvl4pPr>
-      <a:lvl5pPr marL="1828800" algn="l" defTabSz="914400" rtl="0" eaLnBrk="1" latinLnBrk="0" hangingPunct="1">
-        <a:defRPr sz="1800" kern="1200">
-          <a:solidFill>
-            <a:schemeClr val="tx1"/>
-          </a:solidFill>
-          <a:latin typeface="+mn-lt"/>
-          <a:ea typeface="+mn-ea"/>
-          <a:cs typeface="+mn-cs"/>
-        </a:defRPr>
-      </a:lvl5pPr>
-      <a:lvl6pPr marL="2286000" algn="l" defTabSz="914400" rtl="0" eaLnBrk="1" latinLnBrk="0" hangingPunct="1">
-        <a:defRPr sz="1800" kern="1200">
-          <a:solidFill>
-            <a:schemeClr val="tx1"/>
-          </a:solidFill>
-          <a:latin typeface="+mn-lt"/>
-          <a:ea typeface="+mn-ea"/>
-          <a:cs typeface="+mn-cs"/>
-        </a:defRPr>
-      </a:lvl6pPr>
-      <a:lvl7pPr marL="2743200" algn="l" defTabSz="914400" rtl="0" eaLnBrk="1" latinLnBrk="0" hangingPunct="1">
-        <a:defRPr sz="1800" kern="1200">
-          <a:solidFill>
-            <a:schemeClr val="tx1"/>
-          </a:solidFill>
-          <a:latin typeface="+mn-lt"/>
-          <a:ea typeface="+mn-ea"/>
-          <a:cs typeface="+mn-cs"/>
-        </a:defRPr>
-      </a:lvl7pPr>
-      <a:lvl8pPr marL="3200400" algn="l" defTabSz="914400" rtl="0" eaLnBrk="1" latinLnBrk="0" hangingPunct="1">
-        <a:defRPr sz="1800" kern="1200">
-          <a:solidFill>
-            <a:schemeClr val="tx1"/>
-          </a:solidFill>
-          <a:latin typeface="+mn-lt"/>
-          <a:ea typeface="+mn-ea"/>
-          <a:cs typeface="+mn-cs"/>
-        </a:defRPr>
-      </a:lvl8pPr>
-      <a:lvl9pPr marL="3657600" algn="l" defTabSz="914400" rtl="0" eaLnBrk="1" latinLnBrk="0" hangingPunct="1">
-        <a:defRPr sz="1800" kern="1200">
-          <a:solidFill>
-            <a:schemeClr val="tx1"/>
-          </a:solidFill>
-          <a:latin typeface="+mn-lt"/>
-          <a:ea typeface="+mn-ea"/>
-          <a:cs typeface="+mn-cs"/>
-        </a:defRPr>
-      </a:lvl9pPr>
-    </p:otherStyle>
-  </p:txStyles>
-</p:sldMaster>
-</file>
-
 <file path=ppt/slides/slide1.xml><?xml version="1.0" encoding="utf-8"?>
 <p:sld xmlns:a="http://schemas.openxmlformats.org/drawingml/2006/main" xmlns:r="http://schemas.openxmlformats.org/officeDocument/2006/relationships" xmlns:p="http://schemas.openxmlformats.org/presentationml/2006/main">
   <p:cSld>
@@ -9901,7 +8085,13 @@
     </p:bg>
     <p:spTree>
       <p:nvGrpSpPr>
-        <p:cNvPr id="1" name=""/>
+        <p:cNvPr id="1" name="">
+          <a:extLst>
+            <a:ext uri="{FF2B5EF4-FFF2-40B4-BE49-F238E27FC236}">
+              <a16:creationId xmlns:a16="http://schemas.microsoft.com/office/drawing/2014/main" id="{A95AD505-148F-7C13-EC73-22518E14F4FC}"/>
+            </a:ext>
+          </a:extLst>
+        </p:cNvPr>
         <p:cNvGrpSpPr/>
         <p:nvPr/>
       </p:nvGrpSpPr>
@@ -9918,7 +8108,7 @@
           <p:cNvPr id="2" name="TextBox 1">
             <a:extLst>
               <a:ext uri="{FF2B5EF4-FFF2-40B4-BE49-F238E27FC236}">
-                <a16:creationId xmlns:a16="http://schemas.microsoft.com/office/drawing/2014/main" id="{1D77ACA5-3691-8FEB-0266-8D47BBCCF4C6}"/>
+                <a16:creationId xmlns:a16="http://schemas.microsoft.com/office/drawing/2014/main" id="{B3C53938-22FE-22BD-E59A-97F76192783B}"/>
               </a:ext>
             </a:extLst>
           </p:cNvPr>
@@ -9927,8 +8117,8 @@
         </p:nvSpPr>
         <p:spPr>
           <a:xfrm>
-            <a:off x="0" y="186247"/>
-            <a:ext cx="12191999" cy="4067780"/>
+            <a:off x="0" y="858908"/>
+            <a:ext cx="12191999" cy="3953968"/>
           </a:xfrm>
           <a:prstGeom prst="rect">
             <a:avLst/>
@@ -9940,42 +8130,6 @@
             <a:spAutoFit/>
           </a:bodyPr>
           <a:lstStyle/>
-          <a:p>
-            <a:pPr marL="0" marR="0" lvl="0" indent="0" algn="ctr" defTabSz="914400" rtl="0" eaLnBrk="1" fontAlgn="auto" latinLnBrk="0" hangingPunct="1">
-              <a:lnSpc>
-                <a:spcPts val="11000"/>
-              </a:lnSpc>
-              <a:spcBef>
-                <a:spcPts val="0"/>
-              </a:spcBef>
-              <a:spcAft>
-                <a:spcPts val="0"/>
-              </a:spcAft>
-              <a:buClrTx/>
-              <a:buSzTx/>
-              <a:buFontTx/>
-              <a:buNone/>
-              <a:tabLst/>
-              <a:defRPr/>
-            </a:pPr>
-            <a:r>
-              <a:rPr kumimoji="0" lang="en-US" sz="11500" b="0" i="0" u="none" strike="noStrike" kern="1200" cap="none" spc="0" normalizeH="0" baseline="0" noProof="0" dirty="0">
-                <a:ln>
-                  <a:noFill/>
-                </a:ln>
-                <a:solidFill>
-                  <a:prstClr val="white"/>
-                </a:solidFill>
-                <a:effectLst/>
-                <a:uLnTx/>
-                <a:uFillTx/>
-                <a:latin typeface="Helvetica Neue UltraLight" panose="02000206000000020004" pitchFamily="2" charset="0"/>
-                <a:ea typeface="Helvetica Neue UltraLight" panose="02000206000000020004" pitchFamily="2" charset="0"/>
-                <a:cs typeface="Helvetica Neue" panose="02000503000000020004" pitchFamily="2" charset="0"/>
-              </a:rPr>
-              <a:t>neoclassical.ai</a:t>
-            </a:r>
-          </a:p>
           <a:p>
             <a:pPr marL="0" marR="0" lvl="0" indent="0" algn="ctr" defTabSz="914400" rtl="0" eaLnBrk="1" fontAlgn="auto" latinLnBrk="0" hangingPunct="1">
               <a:lnSpc>
@@ -10009,7 +8163,76 @@
                 <a:ea typeface="Helvetica Neue Condensed Black" panose="02000503000000020004" pitchFamily="2" charset="0"/>
                 <a:cs typeface="Helvetica Neue Condensed Black" panose="02000503000000020004" pitchFamily="2" charset="0"/>
               </a:rPr>
-              <a:t>Life Related Assemblies</a:t>
+              <a:t>What Life Form </a:t>
+            </a:r>
+            <a:br>
+              <a:rPr kumimoji="0" lang="en-US" sz="11500" b="1" i="0" u="none" strike="noStrike" kern="1200" cap="none" spc="0" normalizeH="0" baseline="0" noProof="0" dirty="0">
+                <a:ln>
+                  <a:noFill/>
+                </a:ln>
+                <a:solidFill>
+                  <a:srgbClr val="FFC000"/>
+                </a:solidFill>
+                <a:effectLst/>
+                <a:uLnTx/>
+                <a:uFillTx/>
+                <a:latin typeface="Helvetica Neue Condensed Black" panose="02000503000000020004" pitchFamily="2" charset="0"/>
+                <a:ea typeface="Helvetica Neue Condensed Black" panose="02000503000000020004" pitchFamily="2" charset="0"/>
+                <a:cs typeface="Helvetica Neue Condensed Black" panose="02000503000000020004" pitchFamily="2" charset="0"/>
+              </a:rPr>
+            </a:br>
+            <a:r>
+              <a:rPr kumimoji="0" lang="en-US" sz="11500" b="1" i="0" u="none" strike="noStrike" kern="1200" cap="none" spc="0" normalizeH="0" baseline="0" noProof="0" dirty="0">
+                <a:ln>
+                  <a:noFill/>
+                </a:ln>
+                <a:solidFill>
+                  <a:srgbClr val="FFC000"/>
+                </a:solidFill>
+                <a:effectLst/>
+                <a:uLnTx/>
+                <a:uFillTx/>
+                <a:latin typeface="Helvetica Neue Condensed Black" panose="02000503000000020004" pitchFamily="2" charset="0"/>
+                <a:ea typeface="Helvetica Neue Condensed Black" panose="02000503000000020004" pitchFamily="2" charset="0"/>
+                <a:cs typeface="Helvetica Neue Condensed Black" panose="02000503000000020004" pitchFamily="2" charset="0"/>
+              </a:rPr>
+              <a:t>has the Fewest </a:t>
+            </a:r>
+          </a:p>
+          <a:p>
+            <a:pPr marL="0" marR="0" lvl="0" indent="0" algn="ctr" defTabSz="914400" rtl="0" eaLnBrk="1" fontAlgn="auto" latinLnBrk="0" hangingPunct="1">
+              <a:lnSpc>
+                <a:spcPts val="10000"/>
+              </a:lnSpc>
+              <a:spcBef>
+                <a:spcPts val="0"/>
+              </a:spcBef>
+              <a:spcAft>
+                <a:spcPts val="0"/>
+              </a:spcAft>
+              <a:buClrTx/>
+              <a:buSzTx/>
+              <a:buFontTx/>
+              <a:buNone/>
+              <a:tabLst/>
+              <a:defRPr/>
+            </a:pPr>
+            <a:r>
+              <a:rPr kumimoji="0" lang="en-US" sz="11500" b="1" i="0" u="none" strike="noStrike" kern="1200" cap="none" spc="0" normalizeH="0" baseline="0" noProof="0" dirty="0">
+                <a:ln>
+                  <a:noFill/>
+                </a:ln>
+                <a:solidFill>
+                  <a:srgbClr val="FFC000"/>
+                </a:solidFill>
+                <a:effectLst/>
+                <a:uLnTx/>
+                <a:uFillTx/>
+                <a:latin typeface="Helvetica Neue Condensed Black" panose="02000503000000020004" pitchFamily="2" charset="0"/>
+                <a:ea typeface="Helvetica Neue Condensed Black" panose="02000503000000020004" pitchFamily="2" charset="0"/>
+                <a:cs typeface="Helvetica Neue Condensed Black" panose="02000503000000020004" pitchFamily="2" charset="0"/>
+              </a:rPr>
+              <a:t>Architrinos?</a:t>
             </a:r>
             <a:endParaRPr kumimoji="0" lang="en-US" sz="11500" b="1" i="0" u="none" strike="noStrike" kern="1200" cap="none" spc="0" normalizeH="0" baseline="0" noProof="0" dirty="0">
               <a:ln>
@@ -10028,10 +8251,166 @@
           </a:p>
         </p:txBody>
       </p:sp>
+      <p:sp>
+        <p:nvSpPr>
+          <p:cNvPr id="3" name="Footer Placeholder 3"/>
+          <p:cNvSpPr txBox="1">
+            <a:spLocks/>
+          </p:cNvSpPr>
+          <p:nvPr/>
+        </p:nvSpPr>
+        <p:spPr>
+          <a:xfrm>
+            <a:off x="10942204" y="6481737"/>
+            <a:ext cx="1217443" cy="365125"/>
+          </a:xfrm>
+          <a:prstGeom prst="rect">
+            <a:avLst/>
+          </a:prstGeom>
+        </p:spPr>
+        <p:txBody>
+          <a:bodyPr vert="horz" lIns="91440" tIns="45720" rIns="91440" bIns="45720" rtlCol="0" anchor="ctr"/>
+          <a:lstStyle>
+            <a:defPPr>
+              <a:defRPr lang="en-US"/>
+            </a:defPPr>
+            <a:lvl1pPr marL="0" algn="ctr" defTabSz="914400" rtl="0" eaLnBrk="1" latinLnBrk="0" hangingPunct="1">
+              <a:defRPr sz="1200" kern="1200">
+                <a:solidFill>
+                  <a:schemeClr val="tx1">
+                    <a:tint val="75000"/>
+                  </a:schemeClr>
+                </a:solidFill>
+                <a:latin typeface="+mn-lt"/>
+                <a:ea typeface="+mn-ea"/>
+                <a:cs typeface="+mn-cs"/>
+              </a:defRPr>
+            </a:lvl1pPr>
+            <a:lvl2pPr marL="457200" algn="l" defTabSz="914400" rtl="0" eaLnBrk="1" latinLnBrk="0" hangingPunct="1">
+              <a:defRPr sz="1800" kern="1200">
+                <a:solidFill>
+                  <a:schemeClr val="tx1"/>
+                </a:solidFill>
+                <a:latin typeface="+mn-lt"/>
+                <a:ea typeface="+mn-ea"/>
+                <a:cs typeface="+mn-cs"/>
+              </a:defRPr>
+            </a:lvl2pPr>
+            <a:lvl3pPr marL="914400" algn="l" defTabSz="914400" rtl="0" eaLnBrk="1" latinLnBrk="0" hangingPunct="1">
+              <a:defRPr sz="1800" kern="1200">
+                <a:solidFill>
+                  <a:schemeClr val="tx1"/>
+                </a:solidFill>
+                <a:latin typeface="+mn-lt"/>
+                <a:ea typeface="+mn-ea"/>
+                <a:cs typeface="+mn-cs"/>
+              </a:defRPr>
+            </a:lvl3pPr>
+            <a:lvl4pPr marL="1371600" algn="l" defTabSz="914400" rtl="0" eaLnBrk="1" latinLnBrk="0" hangingPunct="1">
+              <a:defRPr sz="1800" kern="1200">
+                <a:solidFill>
+                  <a:schemeClr val="tx1"/>
+                </a:solidFill>
+                <a:latin typeface="+mn-lt"/>
+                <a:ea typeface="+mn-ea"/>
+                <a:cs typeface="+mn-cs"/>
+              </a:defRPr>
+            </a:lvl4pPr>
+            <a:lvl5pPr marL="1828800" algn="l" defTabSz="914400" rtl="0" eaLnBrk="1" latinLnBrk="0" hangingPunct="1">
+              <a:defRPr sz="1800" kern="1200">
+                <a:solidFill>
+                  <a:schemeClr val="tx1"/>
+                </a:solidFill>
+                <a:latin typeface="+mn-lt"/>
+                <a:ea typeface="+mn-ea"/>
+                <a:cs typeface="+mn-cs"/>
+              </a:defRPr>
+            </a:lvl5pPr>
+            <a:lvl6pPr marL="2286000" algn="l" defTabSz="914400" rtl="0" eaLnBrk="1" latinLnBrk="0" hangingPunct="1">
+              <a:defRPr sz="1800" kern="1200">
+                <a:solidFill>
+                  <a:schemeClr val="tx1"/>
+                </a:solidFill>
+                <a:latin typeface="+mn-lt"/>
+                <a:ea typeface="+mn-ea"/>
+                <a:cs typeface="+mn-cs"/>
+              </a:defRPr>
+            </a:lvl6pPr>
+            <a:lvl7pPr marL="2743200" algn="l" defTabSz="914400" rtl="0" eaLnBrk="1" latinLnBrk="0" hangingPunct="1">
+              <a:defRPr sz="1800" kern="1200">
+                <a:solidFill>
+                  <a:schemeClr val="tx1"/>
+                </a:solidFill>
+                <a:latin typeface="+mn-lt"/>
+                <a:ea typeface="+mn-ea"/>
+                <a:cs typeface="+mn-cs"/>
+              </a:defRPr>
+            </a:lvl7pPr>
+            <a:lvl8pPr marL="3200400" algn="l" defTabSz="914400" rtl="0" eaLnBrk="1" latinLnBrk="0" hangingPunct="1">
+              <a:defRPr sz="1800" kern="1200">
+                <a:solidFill>
+                  <a:schemeClr val="tx1"/>
+                </a:solidFill>
+                <a:latin typeface="+mn-lt"/>
+                <a:ea typeface="+mn-ea"/>
+                <a:cs typeface="+mn-cs"/>
+              </a:defRPr>
+            </a:lvl8pPr>
+            <a:lvl9pPr marL="3657600" algn="l" defTabSz="914400" rtl="0" eaLnBrk="1" latinLnBrk="0" hangingPunct="1">
+              <a:defRPr sz="1800" kern="1200">
+                <a:solidFill>
+                  <a:schemeClr val="tx1"/>
+                </a:solidFill>
+                <a:latin typeface="+mn-lt"/>
+                <a:ea typeface="+mn-ea"/>
+                <a:cs typeface="+mn-cs"/>
+              </a:defRPr>
+            </a:lvl9pPr>
+          </a:lstStyle>
+          <a:p>
+            <a:pPr marL="0" marR="0" lvl="0" indent="0" algn="ctr" defTabSz="914400" rtl="0" eaLnBrk="1" fontAlgn="auto" latinLnBrk="0" hangingPunct="1">
+              <a:lnSpc>
+                <a:spcPct val="100000"/>
+              </a:lnSpc>
+              <a:spcBef>
+                <a:spcPts val="0"/>
+              </a:spcBef>
+              <a:spcAft>
+                <a:spcPts val="0"/>
+              </a:spcAft>
+              <a:buClrTx/>
+              <a:buSzTx/>
+              <a:buFontTx/>
+              <a:buNone/>
+              <a:tabLst/>
+              <a:defRPr/>
+            </a:pPr>
+            <a:r>
+              <a:rPr kumimoji="0" lang="en-US" sz="1200" b="0" i="0" u="none" strike="noStrike" kern="1200" cap="none" spc="0" normalizeH="0" baseline="0" noProof="0" dirty="0">
+                <a:ln>
+                  <a:noFill/>
+                </a:ln>
+                <a:solidFill>
+                  <a:prstClr val="black">
+                    <a:tint val="75000"/>
+                  </a:prstClr>
+                </a:solidFill>
+                <a:effectLst/>
+                <a:uLnTx/>
+                <a:uFillTx/>
+                <a:latin typeface="Helvetica Neue" panose="02000503000000020004" pitchFamily="2" charset="0"/>
+                <a:ea typeface="Helvetica Neue" panose="02000503000000020004" pitchFamily="2" charset="0"/>
+                <a:cs typeface="Helvetica Neue" panose="02000503000000020004" pitchFamily="2" charset="0"/>
+              </a:rPr>
+              <a:t>architrino.com</a:t>
+            </a:r>
+          </a:p>
+        </p:txBody>
+      </p:sp>
     </p:spTree>
     <p:extLst>
       <p:ext uri="{BB962C8B-B14F-4D97-AF65-F5344CB8AC3E}">
-        <p14:creationId xmlns:p14="http://schemas.microsoft.com/office/powerpoint/2010/main" val="2348934641"/>
+        <p14:creationId xmlns:p14="http://schemas.microsoft.com/office/powerpoint/2010/main" val="3311713244"/>
       </p:ext>
     </p:extLst>
   </p:cSld>
@@ -10041,7 +8420,856 @@
 </p:sld>
 </file>
 
-<file path=ppt/slides/slide10.xml><?xml version="1.0" encoding="utf-8"?>
+<file path=ppt/slides/slide2.xml><?xml version="1.0" encoding="utf-8"?>
+<p:sld xmlns:a="http://schemas.openxmlformats.org/drawingml/2006/main" xmlns:r="http://schemas.openxmlformats.org/officeDocument/2006/relationships" xmlns:p="http://schemas.openxmlformats.org/presentationml/2006/main">
+  <p:cSld>
+    <p:bg>
+      <p:bgPr>
+        <a:solidFill>
+          <a:srgbClr val="7030A0"/>
+        </a:solidFill>
+        <a:effectLst/>
+      </p:bgPr>
+    </p:bg>
+    <p:spTree>
+      <p:nvGrpSpPr>
+        <p:cNvPr id="1" name="">
+          <a:extLst>
+            <a:ext uri="{FF2B5EF4-FFF2-40B4-BE49-F238E27FC236}">
+              <a16:creationId xmlns:a16="http://schemas.microsoft.com/office/drawing/2014/main" id="{365CF149-638E-D4FE-A688-5F738F294DCE}"/>
+            </a:ext>
+          </a:extLst>
+        </p:cNvPr>
+        <p:cNvGrpSpPr/>
+        <p:nvPr/>
+      </p:nvGrpSpPr>
+      <p:grpSpPr>
+        <a:xfrm>
+          <a:off x="0" y="0"/>
+          <a:ext cx="0" cy="0"/>
+          <a:chOff x="0" y="0"/>
+          <a:chExt cx="0" cy="0"/>
+        </a:xfrm>
+      </p:grpSpPr>
+      <p:sp>
+        <p:nvSpPr>
+          <p:cNvPr id="2" name="TextBox 1">
+            <a:extLst>
+              <a:ext uri="{FF2B5EF4-FFF2-40B4-BE49-F238E27FC236}">
+                <a16:creationId xmlns:a16="http://schemas.microsoft.com/office/drawing/2014/main" id="{CA22E71C-3B43-3887-6804-C1009A7A1619}"/>
+              </a:ext>
+            </a:extLst>
+          </p:cNvPr>
+          <p:cNvSpPr txBox="1"/>
+          <p:nvPr/>
+        </p:nvSpPr>
+        <p:spPr>
+          <a:xfrm>
+            <a:off x="0" y="186247"/>
+            <a:ext cx="12191999" cy="1374735"/>
+          </a:xfrm>
+          <a:prstGeom prst="rect">
+            <a:avLst/>
+          </a:prstGeom>
+          <a:noFill/>
+        </p:spPr>
+        <p:txBody>
+          <a:bodyPr wrap="square" rtlCol="0">
+            <a:spAutoFit/>
+          </a:bodyPr>
+          <a:lstStyle/>
+          <a:p>
+            <a:pPr algn="ctr">
+              <a:lnSpc>
+                <a:spcPts val="10000"/>
+              </a:lnSpc>
+              <a:defRPr/>
+            </a:pPr>
+            <a:r>
+              <a:rPr kumimoji="0" lang="en-US" sz="8800" b="1" i="0" u="none" strike="noStrike" kern="1200" cap="none" spc="0" normalizeH="0" baseline="0" noProof="0" dirty="0" err="1">
+                <a:ln>
+                  <a:noFill/>
+                </a:ln>
+                <a:solidFill>
+                  <a:srgbClr val="FFC000"/>
+                </a:solidFill>
+                <a:effectLst/>
+                <a:uLnTx/>
+                <a:uFillTx/>
+                <a:latin typeface="Helvetica Neue Condensed Black" panose="02000503000000020004" pitchFamily="2" charset="0"/>
+                <a:ea typeface="Helvetica Neue Condensed Black" panose="02000503000000020004" pitchFamily="2" charset="0"/>
+                <a:cs typeface="Helvetica Neue Condensed Black" panose="02000503000000020004" pitchFamily="2" charset="0"/>
+              </a:rPr>
+              <a:t>Nanoarchaeum</a:t>
+            </a:r>
+            <a:r>
+              <a:rPr kumimoji="0" lang="en-US" sz="8800" b="1" i="0" u="none" strike="noStrike" kern="1200" cap="none" spc="0" normalizeH="0" baseline="0" noProof="0" dirty="0">
+                <a:ln>
+                  <a:noFill/>
+                </a:ln>
+                <a:solidFill>
+                  <a:srgbClr val="FFC000"/>
+                </a:solidFill>
+                <a:effectLst/>
+                <a:uLnTx/>
+                <a:uFillTx/>
+                <a:latin typeface="Helvetica Neue Condensed Black" panose="02000503000000020004" pitchFamily="2" charset="0"/>
+                <a:ea typeface="Helvetica Neue Condensed Black" panose="02000503000000020004" pitchFamily="2" charset="0"/>
+                <a:cs typeface="Helvetica Neue Condensed Black" panose="02000503000000020004" pitchFamily="2" charset="0"/>
+              </a:rPr>
+              <a:t> </a:t>
+            </a:r>
+            <a:r>
+              <a:rPr kumimoji="0" lang="en-US" sz="8800" b="1" i="0" u="none" strike="noStrike" kern="1200" cap="none" spc="0" normalizeH="0" baseline="0" noProof="0" dirty="0" err="1">
+                <a:ln>
+                  <a:noFill/>
+                </a:ln>
+                <a:solidFill>
+                  <a:srgbClr val="FFC000"/>
+                </a:solidFill>
+                <a:effectLst/>
+                <a:uLnTx/>
+                <a:uFillTx/>
+                <a:latin typeface="Helvetica Neue Condensed Black" panose="02000503000000020004" pitchFamily="2" charset="0"/>
+                <a:ea typeface="Helvetica Neue Condensed Black" panose="02000503000000020004" pitchFamily="2" charset="0"/>
+                <a:cs typeface="Helvetica Neue Condensed Black" panose="02000503000000020004" pitchFamily="2" charset="0"/>
+              </a:rPr>
+              <a:t>equitans</a:t>
+            </a:r>
+            <a:endParaRPr kumimoji="0" lang="en-US" sz="8800" b="1" i="0" u="none" strike="noStrike" kern="1200" cap="none" spc="0" normalizeH="0" baseline="0" noProof="0" dirty="0">
+              <a:ln>
+                <a:noFill/>
+              </a:ln>
+              <a:solidFill>
+                <a:srgbClr val="FFC000"/>
+              </a:solidFill>
+              <a:effectLst/>
+              <a:uLnTx/>
+              <a:uFillTx/>
+              <a:latin typeface="Helvetica Neue Condensed Black" panose="02000503000000020004" pitchFamily="2" charset="0"/>
+              <a:ea typeface="Helvetica Neue Condensed Black" panose="02000503000000020004" pitchFamily="2" charset="0"/>
+              <a:cs typeface="Helvetica Neue Condensed Black" panose="02000503000000020004" pitchFamily="2" charset="0"/>
+            </a:endParaRPr>
+          </a:p>
+        </p:txBody>
+      </p:sp>
+      <p:sp>
+        <p:nvSpPr>
+          <p:cNvPr id="5" name="TextBox 4">
+            <a:extLst>
+              <a:ext uri="{FF2B5EF4-FFF2-40B4-BE49-F238E27FC236}">
+                <a16:creationId xmlns:a16="http://schemas.microsoft.com/office/drawing/2014/main" id="{9FD60923-3051-E75C-EBA1-5F01B55BA37A}"/>
+              </a:ext>
+            </a:extLst>
+          </p:cNvPr>
+          <p:cNvSpPr txBox="1"/>
+          <p:nvPr/>
+        </p:nvSpPr>
+        <p:spPr>
+          <a:xfrm>
+            <a:off x="0" y="1568935"/>
+            <a:ext cx="12191999" cy="4816234"/>
+          </a:xfrm>
+          <a:prstGeom prst="rect">
+            <a:avLst/>
+          </a:prstGeom>
+          <a:noFill/>
+        </p:spPr>
+        <p:txBody>
+          <a:bodyPr wrap="square" rtlCol="0">
+            <a:noAutofit/>
+          </a:bodyPr>
+          <a:lstStyle/>
+          <a:p>
+            <a:pPr marL="285750" indent="-285750">
+              <a:buFont typeface="Arial" panose="020B0604020202020204" pitchFamily="34" charset="0"/>
+              <a:buChar char="•"/>
+              <a:defRPr/>
+            </a:pPr>
+            <a:endParaRPr kumimoji="0" lang="en-US" sz="2000" b="0" u="none" strike="noStrike" kern="1200" cap="none" spc="0" normalizeH="0" baseline="0" noProof="0" dirty="0">
+              <a:ln>
+                <a:noFill/>
+              </a:ln>
+              <a:solidFill>
+                <a:schemeClr val="bg1"/>
+              </a:solidFill>
+              <a:effectLst/>
+              <a:uLnTx/>
+              <a:uFillTx/>
+              <a:latin typeface="Helvetica Neue" panose="02000503000000020004" pitchFamily="2" charset="0"/>
+              <a:ea typeface="Helvetica Neue" panose="02000503000000020004" pitchFamily="2" charset="0"/>
+              <a:cs typeface="Helvetica Neue" panose="02000503000000020004" pitchFamily="2" charset="0"/>
+            </a:endParaRPr>
+          </a:p>
+          <a:p>
+            <a:pPr marL="742950" lvl="1" indent="-285750">
+              <a:buFont typeface="Arial" panose="020B0604020202020204" pitchFamily="34" charset="0"/>
+              <a:buChar char="•"/>
+              <a:defRPr/>
+            </a:pPr>
+            <a:r>
+              <a:rPr lang="en-US" sz="2000" b="1" dirty="0">
+                <a:solidFill>
+                  <a:schemeClr val="bg1"/>
+                </a:solidFill>
+                <a:latin typeface="Helvetica Neue" panose="02000503000000020004" pitchFamily="2" charset="0"/>
+                <a:ea typeface="Helvetica Neue" panose="02000503000000020004" pitchFamily="2" charset="0"/>
+                <a:cs typeface="Helvetica Neue" panose="02000503000000020004" pitchFamily="2" charset="0"/>
+              </a:rPr>
+              <a:t>The smallest living organism recognized by scientists is </a:t>
+            </a:r>
+            <a:r>
+              <a:rPr lang="en-US" sz="2000" b="1" dirty="0" err="1">
+                <a:solidFill>
+                  <a:schemeClr val="bg1"/>
+                </a:solidFill>
+                <a:latin typeface="Helvetica Neue" panose="02000503000000020004" pitchFamily="2" charset="0"/>
+                <a:ea typeface="Helvetica Neue" panose="02000503000000020004" pitchFamily="2" charset="0"/>
+                <a:cs typeface="Helvetica Neue" panose="02000503000000020004" pitchFamily="2" charset="0"/>
+              </a:rPr>
+              <a:t>Nanoarchaeum</a:t>
+            </a:r>
+            <a:r>
+              <a:rPr lang="en-US" sz="2000" b="1" dirty="0">
+                <a:solidFill>
+                  <a:schemeClr val="bg1"/>
+                </a:solidFill>
+                <a:latin typeface="Helvetica Neue" panose="02000503000000020004" pitchFamily="2" charset="0"/>
+                <a:ea typeface="Helvetica Neue" panose="02000503000000020004" pitchFamily="2" charset="0"/>
+                <a:cs typeface="Helvetica Neue" panose="02000503000000020004" pitchFamily="2" charset="0"/>
+              </a:rPr>
+              <a:t> </a:t>
+            </a:r>
+            <a:r>
+              <a:rPr lang="en-US" sz="2000" b="1" dirty="0" err="1">
+                <a:solidFill>
+                  <a:schemeClr val="bg1"/>
+                </a:solidFill>
+                <a:latin typeface="Helvetica Neue" panose="02000503000000020004" pitchFamily="2" charset="0"/>
+                <a:ea typeface="Helvetica Neue" panose="02000503000000020004" pitchFamily="2" charset="0"/>
+                <a:cs typeface="Helvetica Neue" panose="02000503000000020004" pitchFamily="2" charset="0"/>
+              </a:rPr>
+              <a:t>equitans</a:t>
+            </a:r>
+            <a:r>
+              <a:rPr lang="en-US" sz="2000" b="1" dirty="0">
+                <a:solidFill>
+                  <a:schemeClr val="bg1"/>
+                </a:solidFill>
+                <a:latin typeface="Helvetica Neue" panose="02000503000000020004" pitchFamily="2" charset="0"/>
+                <a:ea typeface="Helvetica Neue" panose="02000503000000020004" pitchFamily="2" charset="0"/>
+                <a:cs typeface="Helvetica Neue" panose="02000503000000020004" pitchFamily="2" charset="0"/>
+              </a:rPr>
+              <a:t>. </a:t>
+            </a:r>
+          </a:p>
+          <a:p>
+            <a:pPr marL="742950" lvl="1" indent="-285750">
+              <a:buFont typeface="Arial" panose="020B0604020202020204" pitchFamily="34" charset="0"/>
+              <a:buChar char="•"/>
+              <a:defRPr/>
+            </a:pPr>
+            <a:r>
+              <a:rPr lang="en-US" sz="2000" b="1" dirty="0">
+                <a:solidFill>
+                  <a:schemeClr val="bg1"/>
+                </a:solidFill>
+                <a:latin typeface="Helvetica Neue" panose="02000503000000020004" pitchFamily="2" charset="0"/>
+                <a:ea typeface="Helvetica Neue" panose="02000503000000020004" pitchFamily="2" charset="0"/>
+                <a:cs typeface="Helvetica Neue" panose="02000503000000020004" pitchFamily="2" charset="0"/>
+              </a:rPr>
+              <a:t>This microbe was discovered in 2002 in a hydrothermal vent off the coast of Iceland. </a:t>
+            </a:r>
+          </a:p>
+          <a:p>
+            <a:pPr marL="742950" lvl="1" indent="-285750">
+              <a:buFont typeface="Arial" panose="020B0604020202020204" pitchFamily="34" charset="0"/>
+              <a:buChar char="•"/>
+              <a:defRPr/>
+            </a:pPr>
+            <a:r>
+              <a:rPr lang="en-US" sz="2000" b="1" dirty="0">
+                <a:solidFill>
+                  <a:schemeClr val="bg1"/>
+                </a:solidFill>
+                <a:latin typeface="Helvetica Neue" panose="02000503000000020004" pitchFamily="2" charset="0"/>
+                <a:ea typeface="Helvetica Neue" panose="02000503000000020004" pitchFamily="2" charset="0"/>
+                <a:cs typeface="Helvetica Neue" panose="02000503000000020004" pitchFamily="2" charset="0"/>
+              </a:rPr>
+              <a:t>Its cells are only about 400 nanometers in diameter.</a:t>
+            </a:r>
+          </a:p>
+          <a:p>
+            <a:pPr marL="742950" lvl="1" indent="-285750">
+              <a:buFont typeface="Arial" panose="020B0604020202020204" pitchFamily="34" charset="0"/>
+              <a:buChar char="•"/>
+              <a:defRPr/>
+            </a:pPr>
+            <a:r>
+              <a:rPr lang="en-US" sz="2000" b="1" dirty="0">
+                <a:solidFill>
+                  <a:schemeClr val="bg1"/>
+                </a:solidFill>
+                <a:latin typeface="Helvetica Neue" panose="02000503000000020004" pitchFamily="2" charset="0"/>
+                <a:ea typeface="Helvetica Neue" panose="02000503000000020004" pitchFamily="2" charset="0"/>
+                <a:cs typeface="Helvetica Neue" panose="02000503000000020004" pitchFamily="2" charset="0"/>
+              </a:rPr>
+              <a:t>It has one of the smallest genomes of any sequenced microbe, with only 490,885 base pairs.</a:t>
+            </a:r>
+          </a:p>
+          <a:p>
+            <a:pPr marL="742950" lvl="1" indent="-285750">
+              <a:buFont typeface="Arial" panose="020B0604020202020204" pitchFamily="34" charset="0"/>
+              <a:buChar char="•"/>
+              <a:defRPr/>
+            </a:pPr>
+            <a:r>
+              <a:rPr lang="en-US" sz="2000" b="1" dirty="0">
+                <a:solidFill>
+                  <a:schemeClr val="bg1"/>
+                </a:solidFill>
+                <a:latin typeface="Helvetica Neue" panose="02000503000000020004" pitchFamily="2" charset="0"/>
+                <a:ea typeface="Helvetica Neue" panose="02000503000000020004" pitchFamily="2" charset="0"/>
+                <a:cs typeface="Helvetica Neue" panose="02000503000000020004" pitchFamily="2" charset="0"/>
+              </a:rPr>
+              <a:t>Its small size and minimal genome suggest it contains a relatively low number of atoms compared to larger organisms.</a:t>
+            </a:r>
+          </a:p>
+          <a:p>
+            <a:pPr marL="742950" lvl="1" indent="-285750">
+              <a:buFont typeface="Arial" panose="020B0604020202020204" pitchFamily="34" charset="0"/>
+              <a:buChar char="•"/>
+              <a:defRPr/>
+            </a:pPr>
+            <a:r>
+              <a:rPr lang="en-US" sz="2000" b="1" dirty="0">
+                <a:solidFill>
+                  <a:schemeClr val="bg1"/>
+                </a:solidFill>
+                <a:latin typeface="Helvetica Neue" panose="02000503000000020004" pitchFamily="2" charset="0"/>
+                <a:ea typeface="Helvetica Neue" panose="02000503000000020004" pitchFamily="2" charset="0"/>
+                <a:cs typeface="Helvetica Neue" panose="02000503000000020004" pitchFamily="2" charset="0"/>
+              </a:rPr>
+              <a:t>We know that RNA molecules </a:t>
+            </a:r>
+            <a:r>
+              <a:rPr lang="en-US" sz="2000" b="1" dirty="0" err="1">
+                <a:solidFill>
+                  <a:schemeClr val="bg1"/>
+                </a:solidFill>
+                <a:latin typeface="Helvetica Neue" panose="02000503000000020004" pitchFamily="2" charset="0"/>
+                <a:ea typeface="Helvetica Neue" panose="02000503000000020004" pitchFamily="2" charset="0"/>
+                <a:cs typeface="Helvetica Neue" panose="02000503000000020004" pitchFamily="2" charset="0"/>
+              </a:rPr>
+              <a:t>cantain</a:t>
+            </a:r>
+            <a:r>
+              <a:rPr lang="en-US" sz="2000" b="1" dirty="0">
+                <a:solidFill>
+                  <a:schemeClr val="bg1"/>
+                </a:solidFill>
+                <a:latin typeface="Helvetica Neue" panose="02000503000000020004" pitchFamily="2" charset="0"/>
+                <a:ea typeface="Helvetica Neue" panose="02000503000000020004" pitchFamily="2" charset="0"/>
+                <a:cs typeface="Helvetica Neue" panose="02000503000000020004" pitchFamily="2" charset="0"/>
+              </a:rPr>
+              <a:t> 4K-6K architrinos.</a:t>
+            </a:r>
+          </a:p>
+          <a:p>
+            <a:pPr marL="742950" lvl="1" indent="-285750">
+              <a:buFont typeface="Arial" panose="020B0604020202020204" pitchFamily="34" charset="0"/>
+              <a:buChar char="•"/>
+              <a:defRPr/>
+            </a:pPr>
+            <a:r>
+              <a:rPr lang="en-US" sz="2000" b="1" dirty="0">
+                <a:solidFill>
+                  <a:schemeClr val="bg1"/>
+                </a:solidFill>
+                <a:latin typeface="Helvetica Neue" panose="02000503000000020004" pitchFamily="2" charset="0"/>
+                <a:ea typeface="Helvetica Neue" panose="02000503000000020004" pitchFamily="2" charset="0"/>
+                <a:cs typeface="Helvetica Neue" panose="02000503000000020004" pitchFamily="2" charset="0"/>
+              </a:rPr>
+              <a:t>The genome therefore contains 500K x 10K ~= 5B architrinos.</a:t>
+            </a:r>
+          </a:p>
+          <a:p>
+            <a:pPr marL="742950" lvl="1" indent="-285750">
+              <a:buFont typeface="Arial" panose="020B0604020202020204" pitchFamily="34" charset="0"/>
+              <a:buChar char="•"/>
+              <a:defRPr/>
+            </a:pPr>
+            <a:endParaRPr lang="en-US" sz="2000" dirty="0">
+              <a:solidFill>
+                <a:schemeClr val="bg1"/>
+              </a:solidFill>
+              <a:latin typeface="Helvetica Neue" panose="02000503000000020004" pitchFamily="2" charset="0"/>
+              <a:ea typeface="Helvetica Neue" panose="02000503000000020004" pitchFamily="2" charset="0"/>
+              <a:cs typeface="Helvetica Neue" panose="02000503000000020004" pitchFamily="2" charset="0"/>
+            </a:endParaRPr>
+          </a:p>
+          <a:p>
+            <a:pPr marL="742950" lvl="1" indent="-285750">
+              <a:buFont typeface="Arial" panose="020B0604020202020204" pitchFamily="34" charset="0"/>
+              <a:buChar char="•"/>
+              <a:defRPr/>
+            </a:pPr>
+            <a:r>
+              <a:rPr kumimoji="0" lang="en-US" sz="2000" i="1" u="none" strike="noStrike" kern="1200" cap="none" spc="0" normalizeH="0" baseline="0" noProof="0" dirty="0">
+                <a:ln>
+                  <a:noFill/>
+                </a:ln>
+                <a:solidFill>
+                  <a:schemeClr val="bg1"/>
+                </a:solidFill>
+                <a:effectLst/>
+                <a:uLnTx/>
+                <a:uFillTx/>
+                <a:latin typeface="Helvetica Neue" panose="02000503000000020004" pitchFamily="2" charset="0"/>
+                <a:ea typeface="Helvetica Neue" panose="02000503000000020004" pitchFamily="2" charset="0"/>
+                <a:cs typeface="Helvetica Neue" panose="02000503000000020004" pitchFamily="2" charset="0"/>
+              </a:rPr>
+              <a:t>h/t CoPilot and Wikipedia</a:t>
+            </a:r>
+          </a:p>
+          <a:p>
+            <a:pPr marL="742950" lvl="1" indent="-285750">
+              <a:buFont typeface="Arial" panose="020B0604020202020204" pitchFamily="34" charset="0"/>
+              <a:buChar char="•"/>
+              <a:defRPr/>
+            </a:pPr>
+            <a:endParaRPr kumimoji="0" lang="en-US" sz="2000" b="0" u="none" strike="noStrike" kern="1200" cap="none" spc="0" normalizeH="0" baseline="0" noProof="0" dirty="0">
+              <a:ln>
+                <a:noFill/>
+              </a:ln>
+              <a:solidFill>
+                <a:schemeClr val="bg1"/>
+              </a:solidFill>
+              <a:effectLst/>
+              <a:uLnTx/>
+              <a:uFillTx/>
+              <a:latin typeface="Helvetica Neue" panose="02000503000000020004" pitchFamily="2" charset="0"/>
+              <a:ea typeface="Helvetica Neue" panose="02000503000000020004" pitchFamily="2" charset="0"/>
+              <a:cs typeface="Helvetica Neue" panose="02000503000000020004" pitchFamily="2" charset="0"/>
+            </a:endParaRPr>
+          </a:p>
+          <a:p>
+            <a:pPr marL="285750" marR="0" lvl="0" indent="-285750" algn="l" defTabSz="914400" rtl="0" eaLnBrk="1" fontAlgn="auto" latinLnBrk="0" hangingPunct="1">
+              <a:lnSpc>
+                <a:spcPct val="100000"/>
+              </a:lnSpc>
+              <a:spcBef>
+                <a:spcPts val="0"/>
+              </a:spcBef>
+              <a:spcAft>
+                <a:spcPts val="0"/>
+              </a:spcAft>
+              <a:buClrTx/>
+              <a:buSzTx/>
+              <a:buFont typeface="Arial" panose="020B0604020202020204" pitchFamily="34" charset="0"/>
+              <a:buChar char="•"/>
+              <a:tabLst/>
+              <a:defRPr/>
+            </a:pPr>
+            <a:endParaRPr kumimoji="0" lang="en-US" sz="2000" b="0" u="none" strike="noStrike" kern="1200" cap="none" spc="0" normalizeH="0" baseline="0" noProof="0" dirty="0">
+              <a:ln>
+                <a:noFill/>
+              </a:ln>
+              <a:solidFill>
+                <a:schemeClr val="bg1"/>
+              </a:solidFill>
+              <a:effectLst/>
+              <a:uLnTx/>
+              <a:uFillTx/>
+              <a:latin typeface="Helvetica Neue" panose="02000503000000020004" pitchFamily="2" charset="0"/>
+              <a:ea typeface="Helvetica Neue" panose="02000503000000020004" pitchFamily="2" charset="0"/>
+              <a:cs typeface="Helvetica Neue" panose="02000503000000020004" pitchFamily="2" charset="0"/>
+            </a:endParaRPr>
+          </a:p>
+          <a:p>
+            <a:pPr marL="0" marR="0" lvl="0" indent="0" algn="l" defTabSz="914400" rtl="0" eaLnBrk="1" fontAlgn="auto" latinLnBrk="0" hangingPunct="1">
+              <a:lnSpc>
+                <a:spcPct val="100000"/>
+              </a:lnSpc>
+              <a:spcBef>
+                <a:spcPts val="0"/>
+              </a:spcBef>
+              <a:spcAft>
+                <a:spcPts val="0"/>
+              </a:spcAft>
+              <a:buClrTx/>
+              <a:buSzTx/>
+              <a:buFontTx/>
+              <a:buNone/>
+              <a:tabLst/>
+              <a:defRPr/>
+            </a:pPr>
+            <a:endParaRPr kumimoji="0" lang="en-US" sz="2000" b="0" u="none" strike="noStrike" kern="1200" cap="none" spc="0" normalizeH="0" baseline="0" noProof="0" dirty="0">
+              <a:ln>
+                <a:noFill/>
+              </a:ln>
+              <a:solidFill>
+                <a:schemeClr val="bg1"/>
+              </a:solidFill>
+              <a:effectLst/>
+              <a:uLnTx/>
+              <a:uFillTx/>
+              <a:latin typeface="Helvetica Neue" panose="02000503000000020004" pitchFamily="2" charset="0"/>
+              <a:ea typeface="Helvetica Neue" panose="02000503000000020004" pitchFamily="2" charset="0"/>
+              <a:cs typeface="Helvetica Neue" panose="02000503000000020004" pitchFamily="2" charset="0"/>
+            </a:endParaRPr>
+          </a:p>
+          <a:p>
+            <a:pPr marL="285750" marR="0" lvl="0" indent="-285750" algn="l" defTabSz="914400" rtl="0" eaLnBrk="1" fontAlgn="auto" latinLnBrk="0" hangingPunct="1">
+              <a:lnSpc>
+                <a:spcPct val="100000"/>
+              </a:lnSpc>
+              <a:spcBef>
+                <a:spcPts val="0"/>
+              </a:spcBef>
+              <a:spcAft>
+                <a:spcPts val="0"/>
+              </a:spcAft>
+              <a:buClrTx/>
+              <a:buSzTx/>
+              <a:buFont typeface="Arial" panose="020B0604020202020204" pitchFamily="34" charset="0"/>
+              <a:buChar char="•"/>
+              <a:tabLst/>
+              <a:defRPr/>
+            </a:pPr>
+            <a:endParaRPr kumimoji="0" lang="en-US" sz="2000" b="0" u="none" strike="noStrike" kern="1200" cap="none" spc="0" normalizeH="0" baseline="0" noProof="0" dirty="0">
+              <a:ln>
+                <a:noFill/>
+              </a:ln>
+              <a:solidFill>
+                <a:schemeClr val="bg1"/>
+              </a:solidFill>
+              <a:effectLst/>
+              <a:uLnTx/>
+              <a:uFillTx/>
+              <a:latin typeface="Helvetica Neue" panose="02000503000000020004" pitchFamily="2" charset="0"/>
+              <a:ea typeface="Helvetica Neue" panose="02000503000000020004" pitchFamily="2" charset="0"/>
+              <a:cs typeface="Helvetica Neue" panose="02000503000000020004" pitchFamily="2" charset="0"/>
+            </a:endParaRPr>
+          </a:p>
+          <a:p>
+            <a:pPr marL="285750" marR="0" lvl="0" indent="-285750" algn="l" defTabSz="914400" rtl="0" eaLnBrk="1" fontAlgn="auto" latinLnBrk="0" hangingPunct="1">
+              <a:lnSpc>
+                <a:spcPct val="100000"/>
+              </a:lnSpc>
+              <a:spcBef>
+                <a:spcPts val="0"/>
+              </a:spcBef>
+              <a:spcAft>
+                <a:spcPts val="0"/>
+              </a:spcAft>
+              <a:buClrTx/>
+              <a:buSzTx/>
+              <a:buFont typeface="Arial" panose="020B0604020202020204" pitchFamily="34" charset="0"/>
+              <a:buChar char="•"/>
+              <a:tabLst/>
+              <a:defRPr/>
+            </a:pPr>
+            <a:endParaRPr kumimoji="0" lang="en-US" sz="2000" b="0" u="none" strike="noStrike" kern="1200" cap="none" spc="0" normalizeH="0" baseline="0" noProof="0" dirty="0">
+              <a:ln>
+                <a:noFill/>
+              </a:ln>
+              <a:solidFill>
+                <a:schemeClr val="bg1"/>
+              </a:solidFill>
+              <a:effectLst/>
+              <a:uLnTx/>
+              <a:uFillTx/>
+              <a:latin typeface="Helvetica Neue" panose="02000503000000020004" pitchFamily="2" charset="0"/>
+              <a:ea typeface="Helvetica Neue" panose="02000503000000020004" pitchFamily="2" charset="0"/>
+              <a:cs typeface="Helvetica Neue" panose="02000503000000020004" pitchFamily="2" charset="0"/>
+            </a:endParaRPr>
+          </a:p>
+          <a:p>
+            <a:pPr marL="285750" marR="0" lvl="0" indent="-285750" algn="l" defTabSz="914400" rtl="0" eaLnBrk="1" fontAlgn="auto" latinLnBrk="0" hangingPunct="1">
+              <a:lnSpc>
+                <a:spcPct val="100000"/>
+              </a:lnSpc>
+              <a:spcBef>
+                <a:spcPts val="0"/>
+              </a:spcBef>
+              <a:spcAft>
+                <a:spcPts val="0"/>
+              </a:spcAft>
+              <a:buClrTx/>
+              <a:buSzTx/>
+              <a:buFont typeface="Arial" panose="020B0604020202020204" pitchFamily="34" charset="0"/>
+              <a:buChar char="•"/>
+              <a:tabLst/>
+              <a:defRPr/>
+            </a:pPr>
+            <a:endParaRPr kumimoji="0" lang="en-US" sz="2000" b="0" u="none" strike="noStrike" kern="1200" cap="none" spc="0" normalizeH="0" baseline="0" noProof="0" dirty="0">
+              <a:ln>
+                <a:noFill/>
+              </a:ln>
+              <a:solidFill>
+                <a:schemeClr val="bg1"/>
+              </a:solidFill>
+              <a:effectLst/>
+              <a:uLnTx/>
+              <a:uFillTx/>
+              <a:latin typeface="Helvetica Neue" panose="02000503000000020004" pitchFamily="2" charset="0"/>
+              <a:ea typeface="Helvetica Neue" panose="02000503000000020004" pitchFamily="2" charset="0"/>
+              <a:cs typeface="Helvetica Neue" panose="02000503000000020004" pitchFamily="2" charset="0"/>
+            </a:endParaRPr>
+          </a:p>
+          <a:p>
+            <a:pPr marL="0" marR="0" lvl="0" indent="0" algn="l" defTabSz="914400" rtl="0" eaLnBrk="1" fontAlgn="auto" latinLnBrk="0" hangingPunct="1">
+              <a:lnSpc>
+                <a:spcPct val="100000"/>
+              </a:lnSpc>
+              <a:spcBef>
+                <a:spcPts val="0"/>
+              </a:spcBef>
+              <a:spcAft>
+                <a:spcPts val="0"/>
+              </a:spcAft>
+              <a:buClrTx/>
+              <a:buSzTx/>
+              <a:buFontTx/>
+              <a:buNone/>
+              <a:tabLst/>
+              <a:defRPr/>
+            </a:pPr>
+            <a:endParaRPr kumimoji="0" lang="en-US" sz="1400" b="0" u="none" strike="noStrike" kern="1200" cap="none" spc="0" normalizeH="0" baseline="0" noProof="0" dirty="0">
+              <a:ln>
+                <a:noFill/>
+              </a:ln>
+              <a:solidFill>
+                <a:schemeClr val="bg1"/>
+              </a:solidFill>
+              <a:effectLst/>
+              <a:uLnTx/>
+              <a:uFillTx/>
+              <a:latin typeface="Helvetica Neue" panose="02000503000000020004" pitchFamily="2" charset="0"/>
+              <a:ea typeface="Helvetica Neue" panose="02000503000000020004" pitchFamily="2" charset="0"/>
+              <a:cs typeface="Helvetica Neue" panose="02000503000000020004" pitchFamily="2" charset="0"/>
+            </a:endParaRPr>
+          </a:p>
+        </p:txBody>
+      </p:sp>
+      <p:pic>
+        <p:nvPicPr>
+          <p:cNvPr id="3074" name="Picture 2" descr="undefined">
+            <a:extLst>
+              <a:ext uri="{FF2B5EF4-FFF2-40B4-BE49-F238E27FC236}">
+                <a16:creationId xmlns:a16="http://schemas.microsoft.com/office/drawing/2014/main" id="{446818C8-F552-491F-947A-ACEDA4EBAFB1}"/>
+              </a:ext>
+            </a:extLst>
+          </p:cNvPr>
+          <p:cNvPicPr>
+            <a:picLocks noChangeAspect="1" noChangeArrowheads="1"/>
+          </p:cNvPicPr>
+          <p:nvPr/>
+        </p:nvPicPr>
+        <p:blipFill>
+          <a:blip r:embed="rId3">
+            <a:extLst>
+              <a:ext uri="{28A0092B-C50C-407E-A947-70E740481C1C}">
+                <a14:useLocalDpi xmlns:a14="http://schemas.microsoft.com/office/drawing/2010/main" val="0"/>
+              </a:ext>
+            </a:extLst>
+          </a:blip>
+          <a:srcRect/>
+          <a:stretch>
+            <a:fillRect/>
+          </a:stretch>
+        </p:blipFill>
+        <p:spPr bwMode="auto">
+          <a:xfrm>
+            <a:off x="8924158" y="3977052"/>
+            <a:ext cx="2794000" cy="2336800"/>
+          </a:xfrm>
+          <a:prstGeom prst="rect">
+            <a:avLst/>
+          </a:prstGeom>
+          <a:noFill/>
+          <a:extLst>
+            <a:ext uri="{909E8E84-426E-40DD-AFC4-6F175D3DCCD1}">
+              <a14:hiddenFill xmlns:a14="http://schemas.microsoft.com/office/drawing/2010/main">
+                <a:solidFill>
+                  <a:srgbClr val="FFFFFF"/>
+                </a:solidFill>
+              </a14:hiddenFill>
+            </a:ext>
+          </a:extLst>
+        </p:spPr>
+      </p:pic>
+      <p:sp>
+        <p:nvSpPr>
+          <p:cNvPr id="3" name="Footer Placeholder 3"/>
+          <p:cNvSpPr txBox="1">
+            <a:spLocks/>
+          </p:cNvSpPr>
+          <p:nvPr/>
+        </p:nvSpPr>
+        <p:spPr>
+          <a:xfrm>
+            <a:off x="10942204" y="6481737"/>
+            <a:ext cx="1217443" cy="365125"/>
+          </a:xfrm>
+          <a:prstGeom prst="rect">
+            <a:avLst/>
+          </a:prstGeom>
+        </p:spPr>
+        <p:txBody>
+          <a:bodyPr vert="horz" lIns="91440" tIns="45720" rIns="91440" bIns="45720" rtlCol="0" anchor="ctr"/>
+          <a:lstStyle>
+            <a:defPPr>
+              <a:defRPr lang="en-US"/>
+            </a:defPPr>
+            <a:lvl1pPr marL="0" algn="ctr" defTabSz="914400" rtl="0" eaLnBrk="1" latinLnBrk="0" hangingPunct="1">
+              <a:defRPr sz="1200" kern="1200">
+                <a:solidFill>
+                  <a:schemeClr val="tx1">
+                    <a:tint val="75000"/>
+                  </a:schemeClr>
+                </a:solidFill>
+                <a:latin typeface="+mn-lt"/>
+                <a:ea typeface="+mn-ea"/>
+                <a:cs typeface="+mn-cs"/>
+              </a:defRPr>
+            </a:lvl1pPr>
+            <a:lvl2pPr marL="457200" algn="l" defTabSz="914400" rtl="0" eaLnBrk="1" latinLnBrk="0" hangingPunct="1">
+              <a:defRPr sz="1800" kern="1200">
+                <a:solidFill>
+                  <a:schemeClr val="tx1"/>
+                </a:solidFill>
+                <a:latin typeface="+mn-lt"/>
+                <a:ea typeface="+mn-ea"/>
+                <a:cs typeface="+mn-cs"/>
+              </a:defRPr>
+            </a:lvl2pPr>
+            <a:lvl3pPr marL="914400" algn="l" defTabSz="914400" rtl="0" eaLnBrk="1" latinLnBrk="0" hangingPunct="1">
+              <a:defRPr sz="1800" kern="1200">
+                <a:solidFill>
+                  <a:schemeClr val="tx1"/>
+                </a:solidFill>
+                <a:latin typeface="+mn-lt"/>
+                <a:ea typeface="+mn-ea"/>
+                <a:cs typeface="+mn-cs"/>
+              </a:defRPr>
+            </a:lvl3pPr>
+            <a:lvl4pPr marL="1371600" algn="l" defTabSz="914400" rtl="0" eaLnBrk="1" latinLnBrk="0" hangingPunct="1">
+              <a:defRPr sz="1800" kern="1200">
+                <a:solidFill>
+                  <a:schemeClr val="tx1"/>
+                </a:solidFill>
+                <a:latin typeface="+mn-lt"/>
+                <a:ea typeface="+mn-ea"/>
+                <a:cs typeface="+mn-cs"/>
+              </a:defRPr>
+            </a:lvl4pPr>
+            <a:lvl5pPr marL="1828800" algn="l" defTabSz="914400" rtl="0" eaLnBrk="1" latinLnBrk="0" hangingPunct="1">
+              <a:defRPr sz="1800" kern="1200">
+                <a:solidFill>
+                  <a:schemeClr val="tx1"/>
+                </a:solidFill>
+                <a:latin typeface="+mn-lt"/>
+                <a:ea typeface="+mn-ea"/>
+                <a:cs typeface="+mn-cs"/>
+              </a:defRPr>
+            </a:lvl5pPr>
+            <a:lvl6pPr marL="2286000" algn="l" defTabSz="914400" rtl="0" eaLnBrk="1" latinLnBrk="0" hangingPunct="1">
+              <a:defRPr sz="1800" kern="1200">
+                <a:solidFill>
+                  <a:schemeClr val="tx1"/>
+                </a:solidFill>
+                <a:latin typeface="+mn-lt"/>
+                <a:ea typeface="+mn-ea"/>
+                <a:cs typeface="+mn-cs"/>
+              </a:defRPr>
+            </a:lvl6pPr>
+            <a:lvl7pPr marL="2743200" algn="l" defTabSz="914400" rtl="0" eaLnBrk="1" latinLnBrk="0" hangingPunct="1">
+              <a:defRPr sz="1800" kern="1200">
+                <a:solidFill>
+                  <a:schemeClr val="tx1"/>
+                </a:solidFill>
+                <a:latin typeface="+mn-lt"/>
+                <a:ea typeface="+mn-ea"/>
+                <a:cs typeface="+mn-cs"/>
+              </a:defRPr>
+            </a:lvl7pPr>
+            <a:lvl8pPr marL="3200400" algn="l" defTabSz="914400" rtl="0" eaLnBrk="1" latinLnBrk="0" hangingPunct="1">
+              <a:defRPr sz="1800" kern="1200">
+                <a:solidFill>
+                  <a:schemeClr val="tx1"/>
+                </a:solidFill>
+                <a:latin typeface="+mn-lt"/>
+                <a:ea typeface="+mn-ea"/>
+                <a:cs typeface="+mn-cs"/>
+              </a:defRPr>
+            </a:lvl8pPr>
+            <a:lvl9pPr marL="3657600" algn="l" defTabSz="914400" rtl="0" eaLnBrk="1" latinLnBrk="0" hangingPunct="1">
+              <a:defRPr sz="1800" kern="1200">
+                <a:solidFill>
+                  <a:schemeClr val="tx1"/>
+                </a:solidFill>
+                <a:latin typeface="+mn-lt"/>
+                <a:ea typeface="+mn-ea"/>
+                <a:cs typeface="+mn-cs"/>
+              </a:defRPr>
+            </a:lvl9pPr>
+          </a:lstStyle>
+          <a:p>
+            <a:pPr marL="0" marR="0" lvl="0" indent="0" algn="ctr" defTabSz="914400" rtl="0" eaLnBrk="1" fontAlgn="auto" latinLnBrk="0" hangingPunct="1">
+              <a:lnSpc>
+                <a:spcPct val="100000"/>
+              </a:lnSpc>
+              <a:spcBef>
+                <a:spcPts val="0"/>
+              </a:spcBef>
+              <a:spcAft>
+                <a:spcPts val="0"/>
+              </a:spcAft>
+              <a:buClrTx/>
+              <a:buSzTx/>
+              <a:buFontTx/>
+              <a:buNone/>
+              <a:tabLst/>
+              <a:defRPr/>
+            </a:pPr>
+            <a:r>
+              <a:rPr kumimoji="0" lang="en-US" sz="1200" b="0" i="0" u="none" strike="noStrike" kern="1200" cap="none" spc="0" normalizeH="0" baseline="0" noProof="0" dirty="0">
+                <a:ln>
+                  <a:noFill/>
+                </a:ln>
+                <a:solidFill>
+                  <a:prstClr val="black">
+                    <a:tint val="75000"/>
+                  </a:prstClr>
+                </a:solidFill>
+                <a:effectLst/>
+                <a:uLnTx/>
+                <a:uFillTx/>
+                <a:latin typeface="Helvetica Neue" panose="02000503000000020004" pitchFamily="2" charset="0"/>
+                <a:ea typeface="Helvetica Neue" panose="02000503000000020004" pitchFamily="2" charset="0"/>
+                <a:cs typeface="Helvetica Neue" panose="02000503000000020004" pitchFamily="2" charset="0"/>
+              </a:rPr>
+              <a:t>architrino.com</a:t>
+            </a:r>
+          </a:p>
+        </p:txBody>
+      </p:sp>
+    </p:spTree>
+    <p:extLst>
+      <p:ext uri="{BB962C8B-B14F-4D97-AF65-F5344CB8AC3E}">
+        <p14:creationId xmlns:p14="http://schemas.microsoft.com/office/powerpoint/2010/main" val="3325331473"/>
+      </p:ext>
+    </p:extLst>
+  </p:cSld>
+  <p:clrMapOvr>
+    <a:masterClrMapping/>
+  </p:clrMapOvr>
+</p:sld>
+</file>
+
+<file path=ppt/slides/slide3.xml><?xml version="1.0" encoding="utf-8"?>
 <p:sld xmlns:a="http://schemas.openxmlformats.org/drawingml/2006/main" xmlns:r="http://schemas.openxmlformats.org/officeDocument/2006/relationships" xmlns:p="http://schemas.openxmlformats.org/presentationml/2006/main">
   <p:cSld>
     <p:bg>
@@ -10973,6 +10201,162 @@
           </a:extLst>
         </p:spPr>
       </p:pic>
+      <p:sp>
+        <p:nvSpPr>
+          <p:cNvPr id="3" name="Footer Placeholder 3"/>
+          <p:cNvSpPr txBox="1">
+            <a:spLocks/>
+          </p:cNvSpPr>
+          <p:nvPr/>
+        </p:nvSpPr>
+        <p:spPr>
+          <a:xfrm>
+            <a:off x="10942204" y="6481737"/>
+            <a:ext cx="1217443" cy="365125"/>
+          </a:xfrm>
+          <a:prstGeom prst="rect">
+            <a:avLst/>
+          </a:prstGeom>
+        </p:spPr>
+        <p:txBody>
+          <a:bodyPr vert="horz" lIns="91440" tIns="45720" rIns="91440" bIns="45720" rtlCol="0" anchor="ctr"/>
+          <a:lstStyle>
+            <a:defPPr>
+              <a:defRPr lang="en-US"/>
+            </a:defPPr>
+            <a:lvl1pPr marL="0" algn="ctr" defTabSz="914400" rtl="0" eaLnBrk="1" latinLnBrk="0" hangingPunct="1">
+              <a:defRPr sz="1200" kern="1200">
+                <a:solidFill>
+                  <a:schemeClr val="tx1">
+                    <a:tint val="75000"/>
+                  </a:schemeClr>
+                </a:solidFill>
+                <a:latin typeface="+mn-lt"/>
+                <a:ea typeface="+mn-ea"/>
+                <a:cs typeface="+mn-cs"/>
+              </a:defRPr>
+            </a:lvl1pPr>
+            <a:lvl2pPr marL="457200" algn="l" defTabSz="914400" rtl="0" eaLnBrk="1" latinLnBrk="0" hangingPunct="1">
+              <a:defRPr sz="1800" kern="1200">
+                <a:solidFill>
+                  <a:schemeClr val="tx1"/>
+                </a:solidFill>
+                <a:latin typeface="+mn-lt"/>
+                <a:ea typeface="+mn-ea"/>
+                <a:cs typeface="+mn-cs"/>
+              </a:defRPr>
+            </a:lvl2pPr>
+            <a:lvl3pPr marL="914400" algn="l" defTabSz="914400" rtl="0" eaLnBrk="1" latinLnBrk="0" hangingPunct="1">
+              <a:defRPr sz="1800" kern="1200">
+                <a:solidFill>
+                  <a:schemeClr val="tx1"/>
+                </a:solidFill>
+                <a:latin typeface="+mn-lt"/>
+                <a:ea typeface="+mn-ea"/>
+                <a:cs typeface="+mn-cs"/>
+              </a:defRPr>
+            </a:lvl3pPr>
+            <a:lvl4pPr marL="1371600" algn="l" defTabSz="914400" rtl="0" eaLnBrk="1" latinLnBrk="0" hangingPunct="1">
+              <a:defRPr sz="1800" kern="1200">
+                <a:solidFill>
+                  <a:schemeClr val="tx1"/>
+                </a:solidFill>
+                <a:latin typeface="+mn-lt"/>
+                <a:ea typeface="+mn-ea"/>
+                <a:cs typeface="+mn-cs"/>
+              </a:defRPr>
+            </a:lvl4pPr>
+            <a:lvl5pPr marL="1828800" algn="l" defTabSz="914400" rtl="0" eaLnBrk="1" latinLnBrk="0" hangingPunct="1">
+              <a:defRPr sz="1800" kern="1200">
+                <a:solidFill>
+                  <a:schemeClr val="tx1"/>
+                </a:solidFill>
+                <a:latin typeface="+mn-lt"/>
+                <a:ea typeface="+mn-ea"/>
+                <a:cs typeface="+mn-cs"/>
+              </a:defRPr>
+            </a:lvl5pPr>
+            <a:lvl6pPr marL="2286000" algn="l" defTabSz="914400" rtl="0" eaLnBrk="1" latinLnBrk="0" hangingPunct="1">
+              <a:defRPr sz="1800" kern="1200">
+                <a:solidFill>
+                  <a:schemeClr val="tx1"/>
+                </a:solidFill>
+                <a:latin typeface="+mn-lt"/>
+                <a:ea typeface="+mn-ea"/>
+                <a:cs typeface="+mn-cs"/>
+              </a:defRPr>
+            </a:lvl6pPr>
+            <a:lvl7pPr marL="2743200" algn="l" defTabSz="914400" rtl="0" eaLnBrk="1" latinLnBrk="0" hangingPunct="1">
+              <a:defRPr sz="1800" kern="1200">
+                <a:solidFill>
+                  <a:schemeClr val="tx1"/>
+                </a:solidFill>
+                <a:latin typeface="+mn-lt"/>
+                <a:ea typeface="+mn-ea"/>
+                <a:cs typeface="+mn-cs"/>
+              </a:defRPr>
+            </a:lvl7pPr>
+            <a:lvl8pPr marL="3200400" algn="l" defTabSz="914400" rtl="0" eaLnBrk="1" latinLnBrk="0" hangingPunct="1">
+              <a:defRPr sz="1800" kern="1200">
+                <a:solidFill>
+                  <a:schemeClr val="tx1"/>
+                </a:solidFill>
+                <a:latin typeface="+mn-lt"/>
+                <a:ea typeface="+mn-ea"/>
+                <a:cs typeface="+mn-cs"/>
+              </a:defRPr>
+            </a:lvl8pPr>
+            <a:lvl9pPr marL="3657600" algn="l" defTabSz="914400" rtl="0" eaLnBrk="1" latinLnBrk="0" hangingPunct="1">
+              <a:defRPr sz="1800" kern="1200">
+                <a:solidFill>
+                  <a:schemeClr val="tx1"/>
+                </a:solidFill>
+                <a:latin typeface="+mn-lt"/>
+                <a:ea typeface="+mn-ea"/>
+                <a:cs typeface="+mn-cs"/>
+              </a:defRPr>
+            </a:lvl9pPr>
+          </a:lstStyle>
+          <a:p>
+            <a:pPr marL="0" marR="0" lvl="0" indent="0" algn="ctr" defTabSz="914400" rtl="0" eaLnBrk="1" fontAlgn="auto" latinLnBrk="0" hangingPunct="1">
+              <a:lnSpc>
+                <a:spcPct val="100000"/>
+              </a:lnSpc>
+              <a:spcBef>
+                <a:spcPts val="0"/>
+              </a:spcBef>
+              <a:spcAft>
+                <a:spcPts val="0"/>
+              </a:spcAft>
+              <a:buClrTx/>
+              <a:buSzTx/>
+              <a:buFontTx/>
+              <a:buNone/>
+              <a:tabLst/>
+              <a:defRPr/>
+            </a:pPr>
+            <a:r>
+              <a:rPr kumimoji="0" lang="en-US" sz="1200" b="0" i="0" u="none" strike="noStrike" kern="1200" cap="none" spc="0" normalizeH="0" baseline="0" noProof="0" dirty="0">
+                <a:ln>
+                  <a:noFill/>
+                </a:ln>
+                <a:solidFill>
+                  <a:prstClr val="black">
+                    <a:tint val="75000"/>
+                  </a:prstClr>
+                </a:solidFill>
+                <a:effectLst/>
+                <a:uLnTx/>
+                <a:uFillTx/>
+                <a:latin typeface="Helvetica Neue" panose="02000503000000020004" pitchFamily="2" charset="0"/>
+                <a:ea typeface="Helvetica Neue" panose="02000503000000020004" pitchFamily="2" charset="0"/>
+                <a:cs typeface="Helvetica Neue" panose="02000503000000020004" pitchFamily="2" charset="0"/>
+              </a:rPr>
+              <a:t>architrino.com</a:t>
+            </a:r>
+          </a:p>
+        </p:txBody>
+      </p:sp>
     </p:spTree>
     <p:extLst>
       <p:ext uri="{BB962C8B-B14F-4D97-AF65-F5344CB8AC3E}">
@@ -10986,7 +10370,7 @@
 </p:sld>
 </file>
 
-<file path=ppt/slides/slide11.xml><?xml version="1.0" encoding="utf-8"?>
+<file path=ppt/slides/slide4.xml><?xml version="1.0" encoding="utf-8"?>
 <p:sld xmlns:a="http://schemas.openxmlformats.org/drawingml/2006/main" xmlns:r="http://schemas.openxmlformats.org/officeDocument/2006/relationships" xmlns:p="http://schemas.openxmlformats.org/presentationml/2006/main">
   <p:cSld>
     <p:bg>
@@ -12033,6 +11417,162 @@
           </a:p>
         </p:txBody>
       </p:sp>
+      <p:sp>
+        <p:nvSpPr>
+          <p:cNvPr id="3" name="Footer Placeholder 3"/>
+          <p:cNvSpPr txBox="1">
+            <a:spLocks/>
+          </p:cNvSpPr>
+          <p:nvPr/>
+        </p:nvSpPr>
+        <p:spPr>
+          <a:xfrm>
+            <a:off x="10942204" y="6481737"/>
+            <a:ext cx="1217443" cy="365125"/>
+          </a:xfrm>
+          <a:prstGeom prst="rect">
+            <a:avLst/>
+          </a:prstGeom>
+        </p:spPr>
+        <p:txBody>
+          <a:bodyPr vert="horz" lIns="91440" tIns="45720" rIns="91440" bIns="45720" rtlCol="0" anchor="ctr"/>
+          <a:lstStyle>
+            <a:defPPr>
+              <a:defRPr lang="en-US"/>
+            </a:defPPr>
+            <a:lvl1pPr marL="0" algn="ctr" defTabSz="914400" rtl="0" eaLnBrk="1" latinLnBrk="0" hangingPunct="1">
+              <a:defRPr sz="1200" kern="1200">
+                <a:solidFill>
+                  <a:schemeClr val="tx1">
+                    <a:tint val="75000"/>
+                  </a:schemeClr>
+                </a:solidFill>
+                <a:latin typeface="+mn-lt"/>
+                <a:ea typeface="+mn-ea"/>
+                <a:cs typeface="+mn-cs"/>
+              </a:defRPr>
+            </a:lvl1pPr>
+            <a:lvl2pPr marL="457200" algn="l" defTabSz="914400" rtl="0" eaLnBrk="1" latinLnBrk="0" hangingPunct="1">
+              <a:defRPr sz="1800" kern="1200">
+                <a:solidFill>
+                  <a:schemeClr val="tx1"/>
+                </a:solidFill>
+                <a:latin typeface="+mn-lt"/>
+                <a:ea typeface="+mn-ea"/>
+                <a:cs typeface="+mn-cs"/>
+              </a:defRPr>
+            </a:lvl2pPr>
+            <a:lvl3pPr marL="914400" algn="l" defTabSz="914400" rtl="0" eaLnBrk="1" latinLnBrk="0" hangingPunct="1">
+              <a:defRPr sz="1800" kern="1200">
+                <a:solidFill>
+                  <a:schemeClr val="tx1"/>
+                </a:solidFill>
+                <a:latin typeface="+mn-lt"/>
+                <a:ea typeface="+mn-ea"/>
+                <a:cs typeface="+mn-cs"/>
+              </a:defRPr>
+            </a:lvl3pPr>
+            <a:lvl4pPr marL="1371600" algn="l" defTabSz="914400" rtl="0" eaLnBrk="1" latinLnBrk="0" hangingPunct="1">
+              <a:defRPr sz="1800" kern="1200">
+                <a:solidFill>
+                  <a:schemeClr val="tx1"/>
+                </a:solidFill>
+                <a:latin typeface="+mn-lt"/>
+                <a:ea typeface="+mn-ea"/>
+                <a:cs typeface="+mn-cs"/>
+              </a:defRPr>
+            </a:lvl4pPr>
+            <a:lvl5pPr marL="1828800" algn="l" defTabSz="914400" rtl="0" eaLnBrk="1" latinLnBrk="0" hangingPunct="1">
+              <a:defRPr sz="1800" kern="1200">
+                <a:solidFill>
+                  <a:schemeClr val="tx1"/>
+                </a:solidFill>
+                <a:latin typeface="+mn-lt"/>
+                <a:ea typeface="+mn-ea"/>
+                <a:cs typeface="+mn-cs"/>
+              </a:defRPr>
+            </a:lvl5pPr>
+            <a:lvl6pPr marL="2286000" algn="l" defTabSz="914400" rtl="0" eaLnBrk="1" latinLnBrk="0" hangingPunct="1">
+              <a:defRPr sz="1800" kern="1200">
+                <a:solidFill>
+                  <a:schemeClr val="tx1"/>
+                </a:solidFill>
+                <a:latin typeface="+mn-lt"/>
+                <a:ea typeface="+mn-ea"/>
+                <a:cs typeface="+mn-cs"/>
+              </a:defRPr>
+            </a:lvl6pPr>
+            <a:lvl7pPr marL="2743200" algn="l" defTabSz="914400" rtl="0" eaLnBrk="1" latinLnBrk="0" hangingPunct="1">
+              <a:defRPr sz="1800" kern="1200">
+                <a:solidFill>
+                  <a:schemeClr val="tx1"/>
+                </a:solidFill>
+                <a:latin typeface="+mn-lt"/>
+                <a:ea typeface="+mn-ea"/>
+                <a:cs typeface="+mn-cs"/>
+              </a:defRPr>
+            </a:lvl7pPr>
+            <a:lvl8pPr marL="3200400" algn="l" defTabSz="914400" rtl="0" eaLnBrk="1" latinLnBrk="0" hangingPunct="1">
+              <a:defRPr sz="1800" kern="1200">
+                <a:solidFill>
+                  <a:schemeClr val="tx1"/>
+                </a:solidFill>
+                <a:latin typeface="+mn-lt"/>
+                <a:ea typeface="+mn-ea"/>
+                <a:cs typeface="+mn-cs"/>
+              </a:defRPr>
+            </a:lvl8pPr>
+            <a:lvl9pPr marL="3657600" algn="l" defTabSz="914400" rtl="0" eaLnBrk="1" latinLnBrk="0" hangingPunct="1">
+              <a:defRPr sz="1800" kern="1200">
+                <a:solidFill>
+                  <a:schemeClr val="tx1"/>
+                </a:solidFill>
+                <a:latin typeface="+mn-lt"/>
+                <a:ea typeface="+mn-ea"/>
+                <a:cs typeface="+mn-cs"/>
+              </a:defRPr>
+            </a:lvl9pPr>
+          </a:lstStyle>
+          <a:p>
+            <a:pPr marL="0" marR="0" lvl="0" indent="0" algn="ctr" defTabSz="914400" rtl="0" eaLnBrk="1" fontAlgn="auto" latinLnBrk="0" hangingPunct="1">
+              <a:lnSpc>
+                <a:spcPct val="100000"/>
+              </a:lnSpc>
+              <a:spcBef>
+                <a:spcPts val="0"/>
+              </a:spcBef>
+              <a:spcAft>
+                <a:spcPts val="0"/>
+              </a:spcAft>
+              <a:buClrTx/>
+              <a:buSzTx/>
+              <a:buFontTx/>
+              <a:buNone/>
+              <a:tabLst/>
+              <a:defRPr/>
+            </a:pPr>
+            <a:r>
+              <a:rPr kumimoji="0" lang="en-US" sz="1200" b="0" i="0" u="none" strike="noStrike" kern="1200" cap="none" spc="0" normalizeH="0" baseline="0" noProof="0" dirty="0">
+                <a:ln>
+                  <a:noFill/>
+                </a:ln>
+                <a:solidFill>
+                  <a:prstClr val="black">
+                    <a:tint val="75000"/>
+                  </a:prstClr>
+                </a:solidFill>
+                <a:effectLst/>
+                <a:uLnTx/>
+                <a:uFillTx/>
+                <a:latin typeface="Helvetica Neue" panose="02000503000000020004" pitchFamily="2" charset="0"/>
+                <a:ea typeface="Helvetica Neue" panose="02000503000000020004" pitchFamily="2" charset="0"/>
+                <a:cs typeface="Helvetica Neue" panose="02000503000000020004" pitchFamily="2" charset="0"/>
+              </a:rPr>
+              <a:t>architrino.com</a:t>
+            </a:r>
+          </a:p>
+        </p:txBody>
+      </p:sp>
     </p:spTree>
     <p:extLst>
       <p:ext uri="{BB962C8B-B14F-4D97-AF65-F5344CB8AC3E}">
@@ -12046,7 +11586,7 @@
 </p:sld>
 </file>
 
-<file path=ppt/slides/slide12.xml><?xml version="1.0" encoding="utf-8"?>
+<file path=ppt/slides/slide5.xml><?xml version="1.0" encoding="utf-8"?>
 <p:sld xmlns:a="http://schemas.openxmlformats.org/drawingml/2006/main" xmlns:r="http://schemas.openxmlformats.org/officeDocument/2006/relationships" xmlns:p="http://schemas.openxmlformats.org/presentationml/2006/main">
   <p:cSld>
     <p:bg>
@@ -12321,106 +11861,127 @@
                 <a:ea typeface="Helvetica Neue" panose="02000503000000020004" pitchFamily="2" charset="0"/>
                 <a:cs typeface="Helvetica Neue" panose="02000503000000020004" pitchFamily="2" charset="0"/>
               </a:rPr>
-              <a:t> point potentials</a:t>
+              <a:t> architrinos</a:t>
             </a:r>
           </a:p>
         </p:txBody>
       </p:sp>
-    </p:spTree>
-    <p:extLst>
-      <p:ext uri="{BB962C8B-B14F-4D97-AF65-F5344CB8AC3E}">
-        <p14:creationId xmlns:p14="http://schemas.microsoft.com/office/powerpoint/2010/main" val="213017330"/>
-      </p:ext>
-    </p:extLst>
-  </p:cSld>
-  <p:clrMapOvr>
-    <a:masterClrMapping/>
-  </p:clrMapOvr>
-</p:sld>
-</file>
-
-<file path=ppt/slides/slide13.xml><?xml version="1.0" encoding="utf-8"?>
-<p:sld xmlns:a="http://schemas.openxmlformats.org/drawingml/2006/main" xmlns:r="http://schemas.openxmlformats.org/officeDocument/2006/relationships" xmlns:p="http://schemas.openxmlformats.org/presentationml/2006/main">
-  <p:cSld>
-    <p:bg>
-      <p:bgPr>
-        <a:solidFill>
-          <a:schemeClr val="tx1"/>
-        </a:solidFill>
-        <a:effectLst/>
-      </p:bgPr>
-    </p:bg>
-    <p:spTree>
-      <p:nvGrpSpPr>
-        <p:cNvPr id="1" name=""/>
-        <p:cNvGrpSpPr/>
-        <p:nvPr/>
-      </p:nvGrpSpPr>
-      <p:grpSpPr>
-        <a:xfrm>
-          <a:off x="0" y="0"/>
-          <a:ext cx="0" cy="0"/>
-          <a:chOff x="0" y="0"/>
-          <a:chExt cx="0" cy="0"/>
-        </a:xfrm>
-      </p:grpSpPr>
       <p:sp>
         <p:nvSpPr>
-          <p:cNvPr id="9" name="Rectangle 8">
-            <a:extLst>
-              <a:ext uri="{FF2B5EF4-FFF2-40B4-BE49-F238E27FC236}">
-                <a16:creationId xmlns:a16="http://schemas.microsoft.com/office/drawing/2014/main" id="{2A8AA5BC-4F7A-4226-8F99-6D824B226A97}"/>
-              </a:ext>
-              <a:ext uri="{C183D7F6-B498-43B3-948B-1728B52AA6E4}">
-                <adec:decorative xmlns:adec="http://schemas.microsoft.com/office/drawing/2017/decorative" val="1"/>
-              </a:ext>
-            </a:extLst>
-          </p:cNvPr>
-          <p:cNvSpPr>
-            <a:spLocks noGrp="1" noRot="1" noChangeAspect="1" noMove="1" noResize="1" noEditPoints="1" noAdjustHandles="1" noChangeArrowheads="1" noChangeShapeType="1" noTextEdit="1"/>
+          <p:cNvPr id="5" name="Footer Placeholder 3"/>
+          <p:cNvSpPr txBox="1">
+            <a:spLocks/>
           </p:cNvSpPr>
-          <p:nvPr>
-            <p:extLst>
-              <p:ext uri="{386F3935-93C4-4BCD-93E2-E3B085C9AB24}">
-                <p16:designElem xmlns:p16="http://schemas.microsoft.com/office/powerpoint/2015/main" val="1"/>
-              </p:ext>
-            </p:extLst>
-          </p:nvPr>
+          <p:nvPr/>
         </p:nvSpPr>
         <p:spPr>
           <a:xfrm>
-            <a:off x="0" y="-3324"/>
-            <a:ext cx="12192000" cy="6861324"/>
+            <a:off x="10942204" y="6481737"/>
+            <a:ext cx="1217443" cy="365125"/>
           </a:xfrm>
           <a:prstGeom prst="rect">
             <a:avLst/>
           </a:prstGeom>
-          <a:solidFill>
-            <a:schemeClr val="tx1"/>
-          </a:solidFill>
-          <a:ln>
-            <a:noFill/>
-          </a:ln>
         </p:spPr>
-        <p:style>
-          <a:lnRef idx="2">
-            <a:schemeClr val="accent1">
-              <a:shade val="50000"/>
-            </a:schemeClr>
-          </a:lnRef>
-          <a:fillRef idx="1">
-            <a:schemeClr val="accent1"/>
-          </a:fillRef>
-          <a:effectRef idx="0">
-            <a:schemeClr val="accent1"/>
-          </a:effectRef>
-          <a:fontRef idx="minor">
-            <a:schemeClr val="lt1"/>
-          </a:fontRef>
-        </p:style>
         <p:txBody>
-          <a:bodyPr rtlCol="0" anchor="ctr"/>
-          <a:lstStyle/>
+          <a:bodyPr vert="horz" lIns="91440" tIns="45720" rIns="91440" bIns="45720" rtlCol="0" anchor="ctr"/>
+          <a:lstStyle>
+            <a:defPPr>
+              <a:defRPr lang="en-US"/>
+            </a:defPPr>
+            <a:lvl1pPr marL="0" algn="ctr" defTabSz="914400" rtl="0" eaLnBrk="1" latinLnBrk="0" hangingPunct="1">
+              <a:defRPr sz="1200" kern="1200">
+                <a:solidFill>
+                  <a:schemeClr val="tx1">
+                    <a:tint val="75000"/>
+                  </a:schemeClr>
+                </a:solidFill>
+                <a:latin typeface="+mn-lt"/>
+                <a:ea typeface="+mn-ea"/>
+                <a:cs typeface="+mn-cs"/>
+              </a:defRPr>
+            </a:lvl1pPr>
+            <a:lvl2pPr marL="457200" algn="l" defTabSz="914400" rtl="0" eaLnBrk="1" latinLnBrk="0" hangingPunct="1">
+              <a:defRPr sz="1800" kern="1200">
+                <a:solidFill>
+                  <a:schemeClr val="tx1"/>
+                </a:solidFill>
+                <a:latin typeface="+mn-lt"/>
+                <a:ea typeface="+mn-ea"/>
+                <a:cs typeface="+mn-cs"/>
+              </a:defRPr>
+            </a:lvl2pPr>
+            <a:lvl3pPr marL="914400" algn="l" defTabSz="914400" rtl="0" eaLnBrk="1" latinLnBrk="0" hangingPunct="1">
+              <a:defRPr sz="1800" kern="1200">
+                <a:solidFill>
+                  <a:schemeClr val="tx1"/>
+                </a:solidFill>
+                <a:latin typeface="+mn-lt"/>
+                <a:ea typeface="+mn-ea"/>
+                <a:cs typeface="+mn-cs"/>
+              </a:defRPr>
+            </a:lvl3pPr>
+            <a:lvl4pPr marL="1371600" algn="l" defTabSz="914400" rtl="0" eaLnBrk="1" latinLnBrk="0" hangingPunct="1">
+              <a:defRPr sz="1800" kern="1200">
+                <a:solidFill>
+                  <a:schemeClr val="tx1"/>
+                </a:solidFill>
+                <a:latin typeface="+mn-lt"/>
+                <a:ea typeface="+mn-ea"/>
+                <a:cs typeface="+mn-cs"/>
+              </a:defRPr>
+            </a:lvl4pPr>
+            <a:lvl5pPr marL="1828800" algn="l" defTabSz="914400" rtl="0" eaLnBrk="1" latinLnBrk="0" hangingPunct="1">
+              <a:defRPr sz="1800" kern="1200">
+                <a:solidFill>
+                  <a:schemeClr val="tx1"/>
+                </a:solidFill>
+                <a:latin typeface="+mn-lt"/>
+                <a:ea typeface="+mn-ea"/>
+                <a:cs typeface="+mn-cs"/>
+              </a:defRPr>
+            </a:lvl5pPr>
+            <a:lvl6pPr marL="2286000" algn="l" defTabSz="914400" rtl="0" eaLnBrk="1" latinLnBrk="0" hangingPunct="1">
+              <a:defRPr sz="1800" kern="1200">
+                <a:solidFill>
+                  <a:schemeClr val="tx1"/>
+                </a:solidFill>
+                <a:latin typeface="+mn-lt"/>
+                <a:ea typeface="+mn-ea"/>
+                <a:cs typeface="+mn-cs"/>
+              </a:defRPr>
+            </a:lvl6pPr>
+            <a:lvl7pPr marL="2743200" algn="l" defTabSz="914400" rtl="0" eaLnBrk="1" latinLnBrk="0" hangingPunct="1">
+              <a:defRPr sz="1800" kern="1200">
+                <a:solidFill>
+                  <a:schemeClr val="tx1"/>
+                </a:solidFill>
+                <a:latin typeface="+mn-lt"/>
+                <a:ea typeface="+mn-ea"/>
+                <a:cs typeface="+mn-cs"/>
+              </a:defRPr>
+            </a:lvl7pPr>
+            <a:lvl8pPr marL="3200400" algn="l" defTabSz="914400" rtl="0" eaLnBrk="1" latinLnBrk="0" hangingPunct="1">
+              <a:defRPr sz="1800" kern="1200">
+                <a:solidFill>
+                  <a:schemeClr val="tx1"/>
+                </a:solidFill>
+                <a:latin typeface="+mn-lt"/>
+                <a:ea typeface="+mn-ea"/>
+                <a:cs typeface="+mn-cs"/>
+              </a:defRPr>
+            </a:lvl8pPr>
+            <a:lvl9pPr marL="3657600" algn="l" defTabSz="914400" rtl="0" eaLnBrk="1" latinLnBrk="0" hangingPunct="1">
+              <a:defRPr sz="1800" kern="1200">
+                <a:solidFill>
+                  <a:schemeClr val="tx1"/>
+                </a:solidFill>
+                <a:latin typeface="+mn-lt"/>
+                <a:ea typeface="+mn-ea"/>
+                <a:cs typeface="+mn-cs"/>
+              </a:defRPr>
+            </a:lvl9pPr>
+          </a:lstStyle>
           <a:p>
             <a:pPr marL="0" marR="0" lvl="0" indent="0" algn="ctr" defTabSz="914400" rtl="0" eaLnBrk="1" fontAlgn="auto" latinLnBrk="0" hangingPunct="1">
               <a:lnSpc>
@@ -12439,299 +12000,13 @@
               <a:tabLst/>
               <a:defRPr/>
             </a:pPr>
-            <a:endParaRPr kumimoji="0" lang="en-US" sz="1800" b="0" i="0" u="none" strike="noStrike" kern="1200" cap="none" spc="0" normalizeH="0" baseline="0" noProof="0">
-              <a:ln>
-                <a:noFill/>
-              </a:ln>
-              <a:solidFill>
-                <a:prstClr val="white"/>
-              </a:solidFill>
-              <a:effectLst/>
-              <a:uLnTx/>
-              <a:uFillTx/>
-              <a:latin typeface="Calibri" panose="020F0502020204030204"/>
-              <a:ea typeface="+mn-ea"/>
-              <a:cs typeface="+mn-cs"/>
-            </a:endParaRPr>
-          </a:p>
-        </p:txBody>
-      </p:sp>
-      <p:sp>
-        <p:nvSpPr>
-          <p:cNvPr id="11" name="Rectangle 10">
-            <a:extLst>
-              <a:ext uri="{FF2B5EF4-FFF2-40B4-BE49-F238E27FC236}">
-                <a16:creationId xmlns:a16="http://schemas.microsoft.com/office/drawing/2014/main" id="{3E5445C6-DD42-4979-86FF-03730E8C6DB0}"/>
-              </a:ext>
-              <a:ext uri="{C183D7F6-B498-43B3-948B-1728B52AA6E4}">
-                <adec:decorative xmlns:adec="http://schemas.microsoft.com/office/drawing/2017/decorative" val="1"/>
-              </a:ext>
-            </a:extLst>
-          </p:cNvPr>
-          <p:cNvSpPr>
-            <a:spLocks noGrp="1" noRot="1" noChangeAspect="1" noMove="1" noResize="1" noEditPoints="1" noAdjustHandles="1" noChangeArrowheads="1" noChangeShapeType="1" noTextEdit="1"/>
-          </p:cNvSpPr>
-          <p:nvPr>
-            <p:extLst>
-              <p:ext uri="{386F3935-93C4-4BCD-93E2-E3B085C9AB24}">
-                <p16:designElem xmlns:p16="http://schemas.microsoft.com/office/powerpoint/2015/main" val="1"/>
-              </p:ext>
-            </p:extLst>
-          </p:nvPr>
-        </p:nvSpPr>
-        <p:spPr bwMode="ltGray">
-          <a:xfrm>
-            <a:off x="321734" y="321733"/>
-            <a:ext cx="11573488" cy="6214534"/>
-          </a:xfrm>
-          <a:prstGeom prst="rect">
-            <a:avLst/>
-          </a:prstGeom>
-          <a:solidFill>
-            <a:schemeClr val="bg1">
-              <a:lumMod val="75000"/>
-              <a:lumOff val="25000"/>
-            </a:schemeClr>
-          </a:solidFill>
-          <a:ln w="127000" cap="sq" cmpd="thinThick">
-            <a:solidFill>
-              <a:schemeClr val="bg1">
-                <a:lumMod val="75000"/>
-                <a:lumOff val="25000"/>
-              </a:schemeClr>
-            </a:solidFill>
-          </a:ln>
-        </p:spPr>
-        <p:style>
-          <a:lnRef idx="2">
-            <a:schemeClr val="accent1">
-              <a:shade val="50000"/>
-            </a:schemeClr>
-          </a:lnRef>
-          <a:fillRef idx="1">
-            <a:schemeClr val="accent1"/>
-          </a:fillRef>
-          <a:effectRef idx="0">
-            <a:schemeClr val="accent1"/>
-          </a:effectRef>
-          <a:fontRef idx="minor">
-            <a:schemeClr val="lt1"/>
-          </a:fontRef>
-        </p:style>
-        <p:txBody>
-          <a:bodyPr rtlCol="0" anchor="ctr"/>
-          <a:lstStyle/>
-          <a:p>
-            <a:pPr marL="0" marR="0" lvl="0" indent="0" algn="ctr" defTabSz="914400" rtl="0" eaLnBrk="1" fontAlgn="auto" latinLnBrk="0" hangingPunct="1">
-              <a:lnSpc>
-                <a:spcPct val="100000"/>
-              </a:lnSpc>
-              <a:spcBef>
-                <a:spcPts val="0"/>
-              </a:spcBef>
-              <a:spcAft>
-                <a:spcPts val="0"/>
-              </a:spcAft>
-              <a:buClrTx/>
-              <a:buSzTx/>
-              <a:buFontTx/>
-              <a:buNone/>
-              <a:tabLst/>
-              <a:defRPr/>
-            </a:pPr>
-            <a:endParaRPr kumimoji="0" lang="en-US" sz="1800" b="0" i="0" u="none" strike="noStrike" kern="1200" cap="none" spc="0" normalizeH="0" baseline="0" noProof="0">
-              <a:ln>
-                <a:noFill/>
-              </a:ln>
-              <a:solidFill>
-                <a:prstClr val="white"/>
-              </a:solidFill>
-              <a:effectLst/>
-              <a:uLnTx/>
-              <a:uFillTx/>
-              <a:latin typeface="Calibri" panose="020F0502020204030204"/>
-              <a:ea typeface="+mn-ea"/>
-              <a:cs typeface="+mn-cs"/>
-            </a:endParaRPr>
-          </a:p>
-        </p:txBody>
-      </p:sp>
-      <p:sp>
-        <p:nvSpPr>
-          <p:cNvPr id="2" name="Title 1">
-            <a:extLst>
-              <a:ext uri="{FF2B5EF4-FFF2-40B4-BE49-F238E27FC236}">
-                <a16:creationId xmlns:a16="http://schemas.microsoft.com/office/drawing/2014/main" id="{7710B119-EC53-BA46-BAA3-CB758CDEDAF5}"/>
-              </a:ext>
-            </a:extLst>
-          </p:cNvPr>
-          <p:cNvSpPr>
-            <a:spLocks noGrp="1"/>
-          </p:cNvSpPr>
-          <p:nvPr>
-            <p:ph type="ctrTitle"/>
-          </p:nvPr>
-        </p:nvSpPr>
-        <p:spPr>
-          <a:xfrm>
-            <a:off x="1524000" y="1122362"/>
-            <a:ext cx="9144000" cy="2840037"/>
-          </a:xfrm>
-        </p:spPr>
-        <p:txBody>
-          <a:bodyPr>
-            <a:normAutofit/>
-          </a:bodyPr>
-          <a:lstStyle/>
-          <a:p>
-            <a:r>
-              <a:rPr lang="en-US" sz="5800" dirty="0"/>
-              <a:t>Thank You</a:t>
-            </a:r>
-          </a:p>
-        </p:txBody>
-      </p:sp>
-      <p:sp>
-        <p:nvSpPr>
-          <p:cNvPr id="3" name="Subtitle 2">
-            <a:extLst>
-              <a:ext uri="{FF2B5EF4-FFF2-40B4-BE49-F238E27FC236}">
-                <a16:creationId xmlns:a16="http://schemas.microsoft.com/office/drawing/2014/main" id="{44E6BC0E-0DB7-C346-A0CC-E3CB36C29A54}"/>
-              </a:ext>
-            </a:extLst>
-          </p:cNvPr>
-          <p:cNvSpPr>
-            <a:spLocks noGrp="1"/>
-          </p:cNvSpPr>
-          <p:nvPr>
-            <p:ph type="subTitle" idx="1"/>
-          </p:nvPr>
-        </p:nvSpPr>
-        <p:spPr>
-          <a:xfrm>
-            <a:off x="1524000" y="4256436"/>
-            <a:ext cx="9144000" cy="1600818"/>
-          </a:xfrm>
-        </p:spPr>
-        <p:txBody>
-          <a:bodyPr>
-            <a:normAutofit/>
-          </a:bodyPr>
-          <a:lstStyle/>
-          <a:p>
-            <a:r>
-              <a:rPr lang="en-US" dirty="0"/>
-              <a:t>Questions?</a:t>
-            </a:r>
-          </a:p>
-        </p:txBody>
-      </p:sp>
-      <p:cxnSp>
-        <p:nvCxnSpPr>
-          <p:cNvPr id="13" name="Straight Connector 12">
-            <a:extLst>
-              <a:ext uri="{FF2B5EF4-FFF2-40B4-BE49-F238E27FC236}">
-                <a16:creationId xmlns:a16="http://schemas.microsoft.com/office/drawing/2014/main" id="{45000665-DFC7-417E-8FD7-516A0F15C975}"/>
-              </a:ext>
-              <a:ext uri="{C183D7F6-B498-43B3-948B-1728B52AA6E4}">
-                <adec:decorative xmlns:adec="http://schemas.microsoft.com/office/drawing/2017/decorative" val="1"/>
-              </a:ext>
-            </a:extLst>
-          </p:cNvPr>
-          <p:cNvCxnSpPr>
-            <a:cxnSpLocks noGrp="1" noRot="1" noChangeAspect="1" noMove="1" noResize="1" noEditPoints="1" noAdjustHandles="1" noChangeArrowheads="1" noChangeShapeType="1"/>
-          </p:cNvCxnSpPr>
-          <p:nvPr>
-            <p:extLst>
-              <p:ext uri="{386F3935-93C4-4BCD-93E2-E3B085C9AB24}">
-                <p16:designElem xmlns:p16="http://schemas.microsoft.com/office/powerpoint/2015/main" val="1"/>
-              </p:ext>
-            </p:extLst>
-          </p:nvPr>
-        </p:nvCxnSpPr>
-        <p:spPr>
-          <a:xfrm>
-            <a:off x="4724400" y="4109417"/>
-            <a:ext cx="2743200" cy="0"/>
-          </a:xfrm>
-          <a:prstGeom prst="line">
-            <a:avLst/>
-          </a:prstGeom>
-          <a:ln w="12700">
-            <a:solidFill>
-              <a:schemeClr val="tx1">
-                <a:lumMod val="85000"/>
-              </a:schemeClr>
-            </a:solidFill>
-          </a:ln>
-        </p:spPr>
-        <p:style>
-          <a:lnRef idx="1">
-            <a:schemeClr val="accent1"/>
-          </a:lnRef>
-          <a:fillRef idx="0">
-            <a:schemeClr val="accent1"/>
-          </a:fillRef>
-          <a:effectRef idx="0">
-            <a:schemeClr val="accent1"/>
-          </a:effectRef>
-          <a:fontRef idx="minor">
-            <a:schemeClr val="tx1"/>
-          </a:fontRef>
-        </p:style>
-      </p:cxnSp>
-      <p:sp>
-        <p:nvSpPr>
-          <p:cNvPr id="4" name="Footer Placeholder 3">
-            <a:extLst>
-              <a:ext uri="{FF2B5EF4-FFF2-40B4-BE49-F238E27FC236}">
-                <a16:creationId xmlns:a16="http://schemas.microsoft.com/office/drawing/2014/main" id="{9E726E67-7B90-B642-8D26-6DDF890C4785}"/>
-              </a:ext>
-            </a:extLst>
-          </p:cNvPr>
-          <p:cNvSpPr>
-            <a:spLocks noGrp="1"/>
-          </p:cNvSpPr>
-          <p:nvPr>
-            <p:ph type="ftr" sz="quarter" idx="11"/>
-          </p:nvPr>
-        </p:nvSpPr>
-        <p:spPr>
-          <a:xfrm>
-            <a:off x="4038600" y="6159710"/>
-            <a:ext cx="4114800" cy="365125"/>
-          </a:xfrm>
-        </p:spPr>
-        <p:txBody>
-          <a:bodyPr>
-            <a:normAutofit/>
-          </a:bodyPr>
-          <a:lstStyle/>
-          <a:p>
-            <a:pPr marL="0" marR="0" lvl="0" indent="0" algn="ctr" defTabSz="914400" rtl="0" eaLnBrk="1" fontAlgn="auto" latinLnBrk="0" hangingPunct="1">
-              <a:lnSpc>
-                <a:spcPct val="100000"/>
-              </a:lnSpc>
-              <a:spcBef>
-                <a:spcPts val="0"/>
-              </a:spcBef>
-              <a:spcAft>
-                <a:spcPts val="600"/>
-              </a:spcAft>
-              <a:buClrTx/>
-              <a:buSzTx/>
-              <a:buFontTx/>
-              <a:buNone/>
-              <a:tabLst/>
-              <a:defRPr/>
-            </a:pPr>
             <a:r>
               <a:rPr kumimoji="0" lang="en-US" sz="1200" b="0" i="0" u="none" strike="noStrike" kern="1200" cap="none" spc="0" normalizeH="0" baseline="0" noProof="0" dirty="0">
                 <a:ln>
                   <a:noFill/>
                 </a:ln>
                 <a:solidFill>
-                  <a:prstClr val="white">
+                  <a:prstClr val="black">
                     <a:tint val="75000"/>
                   </a:prstClr>
                 </a:solidFill>
@@ -12742,7 +12017,7 @@
                 <a:ea typeface="Helvetica Neue" panose="02000503000000020004" pitchFamily="2" charset="0"/>
                 <a:cs typeface="Helvetica Neue" panose="02000503000000020004" pitchFamily="2" charset="0"/>
               </a:rPr>
-              <a:t>J Mark Morris - Model of Nature</a:t>
+              <a:t>architrino.com</a:t>
             </a:r>
           </a:p>
         </p:txBody>
@@ -12750,3823 +12025,7 @@
     </p:spTree>
     <p:extLst>
       <p:ext uri="{BB962C8B-B14F-4D97-AF65-F5344CB8AC3E}">
-        <p14:creationId xmlns:p14="http://schemas.microsoft.com/office/powerpoint/2010/main" val="3747833275"/>
-      </p:ext>
-    </p:extLst>
-  </p:cSld>
-  <p:clrMapOvr>
-    <a:overrideClrMapping bg1="dk1" tx1="lt1" bg2="dk2" tx2="lt2" accent1="accent1" accent2="accent2" accent3="accent3" accent4="accent4" accent5="accent5" accent6="accent6" hlink="hlink" folHlink="folHlink"/>
-  </p:clrMapOvr>
-</p:sld>
-</file>
-
-<file path=ppt/slides/slide2.xml><?xml version="1.0" encoding="utf-8"?>
-<p:sld xmlns:a="http://schemas.openxmlformats.org/drawingml/2006/main" xmlns:r="http://schemas.openxmlformats.org/officeDocument/2006/relationships" xmlns:p="http://schemas.openxmlformats.org/presentationml/2006/main">
-  <p:cSld>
-    <p:bg>
-      <p:bgPr>
-        <a:solidFill>
-          <a:srgbClr val="7030A0"/>
-        </a:solidFill>
-        <a:effectLst/>
-      </p:bgPr>
-    </p:bg>
-    <p:spTree>
-      <p:nvGrpSpPr>
-        <p:cNvPr id="1" name="">
-          <a:extLst>
-            <a:ext uri="{FF2B5EF4-FFF2-40B4-BE49-F238E27FC236}">
-              <a16:creationId xmlns:a16="http://schemas.microsoft.com/office/drawing/2014/main" id="{3175AA51-29DC-6620-9669-F7FDE0E9674D}"/>
-            </a:ext>
-          </a:extLst>
-        </p:cNvPr>
-        <p:cNvGrpSpPr/>
-        <p:nvPr/>
-      </p:nvGrpSpPr>
-      <p:grpSpPr>
-        <a:xfrm>
-          <a:off x="0" y="0"/>
-          <a:ext cx="0" cy="0"/>
-          <a:chOff x="0" y="0"/>
-          <a:chExt cx="0" cy="0"/>
-        </a:xfrm>
-      </p:grpSpPr>
-      <p:sp>
-        <p:nvSpPr>
-          <p:cNvPr id="5" name="Footer Placeholder 3">
-            <a:extLst>
-              <a:ext uri="{FF2B5EF4-FFF2-40B4-BE49-F238E27FC236}">
-                <a16:creationId xmlns:a16="http://schemas.microsoft.com/office/drawing/2014/main" id="{30FF862E-5EBD-95F6-4785-4B3E43867223}"/>
-              </a:ext>
-            </a:extLst>
-          </p:cNvPr>
-          <p:cNvSpPr txBox="1">
-            <a:spLocks/>
-          </p:cNvSpPr>
-          <p:nvPr/>
-        </p:nvSpPr>
-        <p:spPr>
-          <a:xfrm>
-            <a:off x="10924248" y="6388602"/>
-            <a:ext cx="1142262" cy="365125"/>
-          </a:xfrm>
-          <a:prstGeom prst="rect">
-            <a:avLst/>
-          </a:prstGeom>
-        </p:spPr>
-        <p:txBody>
-          <a:bodyPr vert="horz" lIns="91440" tIns="45720" rIns="91440" bIns="45720" rtlCol="0" anchor="ctr"/>
-          <a:lstStyle>
-            <a:defPPr>
-              <a:defRPr lang="en-US"/>
-            </a:defPPr>
-            <a:lvl1pPr marL="0" algn="ctr" defTabSz="914400" rtl="0" eaLnBrk="1" latinLnBrk="0" hangingPunct="1">
-              <a:defRPr sz="1200" kern="1200">
-                <a:solidFill>
-                  <a:schemeClr val="tx1">
-                    <a:tint val="75000"/>
-                  </a:schemeClr>
-                </a:solidFill>
-                <a:latin typeface="+mn-lt"/>
-                <a:ea typeface="+mn-ea"/>
-                <a:cs typeface="+mn-cs"/>
-              </a:defRPr>
-            </a:lvl1pPr>
-            <a:lvl2pPr marL="457200" algn="l" defTabSz="914400" rtl="0" eaLnBrk="1" latinLnBrk="0" hangingPunct="1">
-              <a:defRPr sz="1800" kern="1200">
-                <a:solidFill>
-                  <a:schemeClr val="tx1"/>
-                </a:solidFill>
-                <a:latin typeface="+mn-lt"/>
-                <a:ea typeface="+mn-ea"/>
-                <a:cs typeface="+mn-cs"/>
-              </a:defRPr>
-            </a:lvl2pPr>
-            <a:lvl3pPr marL="914400" algn="l" defTabSz="914400" rtl="0" eaLnBrk="1" latinLnBrk="0" hangingPunct="1">
-              <a:defRPr sz="1800" kern="1200">
-                <a:solidFill>
-                  <a:schemeClr val="tx1"/>
-                </a:solidFill>
-                <a:latin typeface="+mn-lt"/>
-                <a:ea typeface="+mn-ea"/>
-                <a:cs typeface="+mn-cs"/>
-              </a:defRPr>
-            </a:lvl3pPr>
-            <a:lvl4pPr marL="1371600" algn="l" defTabSz="914400" rtl="0" eaLnBrk="1" latinLnBrk="0" hangingPunct="1">
-              <a:defRPr sz="1800" kern="1200">
-                <a:solidFill>
-                  <a:schemeClr val="tx1"/>
-                </a:solidFill>
-                <a:latin typeface="+mn-lt"/>
-                <a:ea typeface="+mn-ea"/>
-                <a:cs typeface="+mn-cs"/>
-              </a:defRPr>
-            </a:lvl4pPr>
-            <a:lvl5pPr marL="1828800" algn="l" defTabSz="914400" rtl="0" eaLnBrk="1" latinLnBrk="0" hangingPunct="1">
-              <a:defRPr sz="1800" kern="1200">
-                <a:solidFill>
-                  <a:schemeClr val="tx1"/>
-                </a:solidFill>
-                <a:latin typeface="+mn-lt"/>
-                <a:ea typeface="+mn-ea"/>
-                <a:cs typeface="+mn-cs"/>
-              </a:defRPr>
-            </a:lvl5pPr>
-            <a:lvl6pPr marL="2286000" algn="l" defTabSz="914400" rtl="0" eaLnBrk="1" latinLnBrk="0" hangingPunct="1">
-              <a:defRPr sz="1800" kern="1200">
-                <a:solidFill>
-                  <a:schemeClr val="tx1"/>
-                </a:solidFill>
-                <a:latin typeface="+mn-lt"/>
-                <a:ea typeface="+mn-ea"/>
-                <a:cs typeface="+mn-cs"/>
-              </a:defRPr>
-            </a:lvl6pPr>
-            <a:lvl7pPr marL="2743200" algn="l" defTabSz="914400" rtl="0" eaLnBrk="1" latinLnBrk="0" hangingPunct="1">
-              <a:defRPr sz="1800" kern="1200">
-                <a:solidFill>
-                  <a:schemeClr val="tx1"/>
-                </a:solidFill>
-                <a:latin typeface="+mn-lt"/>
-                <a:ea typeface="+mn-ea"/>
-                <a:cs typeface="+mn-cs"/>
-              </a:defRPr>
-            </a:lvl7pPr>
-            <a:lvl8pPr marL="3200400" algn="l" defTabSz="914400" rtl="0" eaLnBrk="1" latinLnBrk="0" hangingPunct="1">
-              <a:defRPr sz="1800" kern="1200">
-                <a:solidFill>
-                  <a:schemeClr val="tx1"/>
-                </a:solidFill>
-                <a:latin typeface="+mn-lt"/>
-                <a:ea typeface="+mn-ea"/>
-                <a:cs typeface="+mn-cs"/>
-              </a:defRPr>
-            </a:lvl8pPr>
-            <a:lvl9pPr marL="3657600" algn="l" defTabSz="914400" rtl="0" eaLnBrk="1" latinLnBrk="0" hangingPunct="1">
-              <a:defRPr sz="1800" kern="1200">
-                <a:solidFill>
-                  <a:schemeClr val="tx1"/>
-                </a:solidFill>
-                <a:latin typeface="+mn-lt"/>
-                <a:ea typeface="+mn-ea"/>
-                <a:cs typeface="+mn-cs"/>
-              </a:defRPr>
-            </a:lvl9pPr>
-          </a:lstStyle>
-          <a:p>
-            <a:pPr marL="0" marR="0" lvl="0" indent="0" algn="ctr" defTabSz="914400" rtl="0" eaLnBrk="1" fontAlgn="auto" latinLnBrk="0" hangingPunct="1">
-              <a:lnSpc>
-                <a:spcPct val="100000"/>
-              </a:lnSpc>
-              <a:spcBef>
-                <a:spcPts val="0"/>
-              </a:spcBef>
-              <a:spcAft>
-                <a:spcPts val="0"/>
-              </a:spcAft>
-              <a:buClrTx/>
-              <a:buSzTx/>
-              <a:buFontTx/>
-              <a:buNone/>
-              <a:tabLst/>
-              <a:defRPr/>
-            </a:pPr>
-            <a:r>
-              <a:rPr kumimoji="0" lang="en-US" sz="1200" b="0" i="0" u="none" strike="noStrike" kern="1200" cap="none" spc="0" normalizeH="0" baseline="0" noProof="0" dirty="0">
-                <a:ln>
-                  <a:noFill/>
-                </a:ln>
-                <a:solidFill>
-                  <a:prstClr val="black">
-                    <a:tint val="75000"/>
-                  </a:prstClr>
-                </a:solidFill>
-                <a:effectLst/>
-                <a:uLnTx/>
-                <a:uFillTx/>
-                <a:latin typeface="Helvetica Neue" panose="02000503000000020004" pitchFamily="2" charset="0"/>
-                <a:ea typeface="Helvetica Neue" panose="02000503000000020004" pitchFamily="2" charset="0"/>
-                <a:cs typeface="Helvetica Neue" panose="02000503000000020004" pitchFamily="2" charset="0"/>
-              </a:rPr>
-              <a:t>J Mark Morris</a:t>
-            </a:r>
-          </a:p>
-        </p:txBody>
-      </p:sp>
-      <p:sp>
-        <p:nvSpPr>
-          <p:cNvPr id="19" name="Rectangle 18">
-            <a:extLst>
-              <a:ext uri="{FF2B5EF4-FFF2-40B4-BE49-F238E27FC236}">
-                <a16:creationId xmlns:a16="http://schemas.microsoft.com/office/drawing/2014/main" id="{408FA82E-49B5-9997-5FAA-AA23B523E07F}"/>
-              </a:ext>
-            </a:extLst>
-          </p:cNvPr>
-          <p:cNvSpPr/>
-          <p:nvPr/>
-        </p:nvSpPr>
-        <p:spPr>
-          <a:xfrm>
-            <a:off x="567833" y="207788"/>
-            <a:ext cx="11056360" cy="523220"/>
-          </a:xfrm>
-          <a:prstGeom prst="rect">
-            <a:avLst/>
-          </a:prstGeom>
-          <a:noFill/>
-        </p:spPr>
-        <p:txBody>
-          <a:bodyPr wrap="none">
-            <a:spAutoFit/>
-          </a:bodyPr>
-          <a:lstStyle/>
-          <a:p>
-            <a:pPr marL="0" marR="0" lvl="0" indent="0" algn="ctr" defTabSz="914400" rtl="0" eaLnBrk="1" fontAlgn="auto" latinLnBrk="0" hangingPunct="1">
-              <a:lnSpc>
-                <a:spcPct val="100000"/>
-              </a:lnSpc>
-              <a:spcBef>
-                <a:spcPts val="0"/>
-              </a:spcBef>
-              <a:spcAft>
-                <a:spcPts val="0"/>
-              </a:spcAft>
-              <a:buClrTx/>
-              <a:buSzTx/>
-              <a:buFontTx/>
-              <a:buNone/>
-              <a:tabLst/>
-              <a:defRPr/>
-            </a:pPr>
-            <a:r>
-              <a:rPr kumimoji="0" lang="en-US" sz="2800" b="1" i="0" u="none" strike="noStrike" kern="1200" cap="none" spc="0" normalizeH="0" baseline="0" noProof="0" dirty="0">
-                <a:ln>
-                  <a:noFill/>
-                </a:ln>
-                <a:solidFill>
-                  <a:prstClr val="white"/>
-                </a:solidFill>
-                <a:effectLst/>
-                <a:uLnTx/>
-                <a:uFillTx/>
-                <a:latin typeface="Helvetica Neue" panose="02000503000000020004" pitchFamily="2" charset="0"/>
-                <a:ea typeface="Helvetica Neue" panose="02000503000000020004" pitchFamily="2" charset="0"/>
-                <a:cs typeface="Helvetica Neue" panose="02000503000000020004" pitchFamily="2" charset="0"/>
-              </a:rPr>
-              <a:t>Testosterone C</a:t>
-            </a:r>
-            <a:r>
-              <a:rPr kumimoji="0" lang="en-US" sz="2800" b="1" i="0" u="none" strike="noStrike" kern="1200" cap="none" spc="0" normalizeH="0" baseline="-25000" noProof="0" dirty="0">
-                <a:ln>
-                  <a:noFill/>
-                </a:ln>
-                <a:solidFill>
-                  <a:prstClr val="white"/>
-                </a:solidFill>
-                <a:effectLst/>
-                <a:uLnTx/>
-                <a:uFillTx/>
-                <a:latin typeface="Helvetica Neue" panose="02000503000000020004" pitchFamily="2" charset="0"/>
-                <a:ea typeface="Helvetica Neue" panose="02000503000000020004" pitchFamily="2" charset="0"/>
-                <a:cs typeface="Helvetica Neue" panose="02000503000000020004" pitchFamily="2" charset="0"/>
-              </a:rPr>
-              <a:t>19</a:t>
-            </a:r>
-            <a:r>
-              <a:rPr kumimoji="0" lang="en-US" sz="2800" b="1" i="0" u="none" strike="noStrike" kern="1200" cap="none" spc="0" normalizeH="0" baseline="0" noProof="0" dirty="0">
-                <a:ln>
-                  <a:noFill/>
-                </a:ln>
-                <a:solidFill>
-                  <a:prstClr val="white"/>
-                </a:solidFill>
-                <a:effectLst/>
-                <a:uLnTx/>
-                <a:uFillTx/>
-                <a:latin typeface="Helvetica Neue" panose="02000503000000020004" pitchFamily="2" charset="0"/>
-                <a:ea typeface="Helvetica Neue" panose="02000503000000020004" pitchFamily="2" charset="0"/>
-                <a:cs typeface="Helvetica Neue" panose="02000503000000020004" pitchFamily="2" charset="0"/>
-              </a:rPr>
-              <a:t>H</a:t>
-            </a:r>
-            <a:r>
-              <a:rPr kumimoji="0" lang="en-US" sz="2800" b="1" i="0" u="none" strike="noStrike" kern="1200" cap="none" spc="0" normalizeH="0" baseline="-25000" noProof="0" dirty="0">
-                <a:ln>
-                  <a:noFill/>
-                </a:ln>
-                <a:solidFill>
-                  <a:prstClr val="white"/>
-                </a:solidFill>
-                <a:effectLst/>
-                <a:uLnTx/>
-                <a:uFillTx/>
-                <a:latin typeface="Helvetica Neue" panose="02000503000000020004" pitchFamily="2" charset="0"/>
-                <a:ea typeface="Helvetica Neue" panose="02000503000000020004" pitchFamily="2" charset="0"/>
-                <a:cs typeface="Helvetica Neue" panose="02000503000000020004" pitchFamily="2" charset="0"/>
-              </a:rPr>
-              <a:t>28</a:t>
-            </a:r>
-            <a:r>
-              <a:rPr kumimoji="0" lang="en-US" sz="2800" b="1" i="0" u="none" strike="noStrike" kern="1200" cap="none" spc="0" normalizeH="0" baseline="0" noProof="0" dirty="0">
-                <a:ln>
-                  <a:noFill/>
-                </a:ln>
-                <a:solidFill>
-                  <a:prstClr val="white"/>
-                </a:solidFill>
-                <a:effectLst/>
-                <a:uLnTx/>
-                <a:uFillTx/>
-                <a:latin typeface="Helvetica Neue" panose="02000503000000020004" pitchFamily="2" charset="0"/>
-                <a:ea typeface="Helvetica Neue" panose="02000503000000020004" pitchFamily="2" charset="0"/>
-                <a:cs typeface="Helvetica Neue" panose="02000503000000020004" pitchFamily="2" charset="0"/>
-              </a:rPr>
-              <a:t>O</a:t>
-            </a:r>
-            <a:r>
-              <a:rPr kumimoji="0" lang="en-US" sz="2800" b="1" i="0" u="none" strike="noStrike" kern="1200" cap="none" spc="0" normalizeH="0" baseline="-25000" noProof="0" dirty="0">
-                <a:ln>
-                  <a:noFill/>
-                </a:ln>
-                <a:solidFill>
-                  <a:prstClr val="white"/>
-                </a:solidFill>
-                <a:effectLst/>
-                <a:uLnTx/>
-                <a:uFillTx/>
-                <a:latin typeface="Helvetica Neue" panose="02000503000000020004" pitchFamily="2" charset="0"/>
-                <a:ea typeface="Helvetica Neue" panose="02000503000000020004" pitchFamily="2" charset="0"/>
-                <a:cs typeface="Helvetica Neue" panose="02000503000000020004" pitchFamily="2" charset="0"/>
-              </a:rPr>
-              <a:t>2</a:t>
-            </a:r>
-            <a:r>
-              <a:rPr kumimoji="0" lang="en-US" sz="2800" b="1" i="0" u="none" strike="noStrike" kern="1200" cap="none" spc="0" normalizeH="0" baseline="0" noProof="0" dirty="0">
-                <a:ln>
-                  <a:noFill/>
-                </a:ln>
-                <a:solidFill>
-                  <a:prstClr val="white"/>
-                </a:solidFill>
-                <a:effectLst/>
-                <a:uLnTx/>
-                <a:uFillTx/>
-                <a:latin typeface="Helvetica Neue" panose="02000503000000020004" pitchFamily="2" charset="0"/>
-                <a:ea typeface="Helvetica Neue" panose="02000503000000020004" pitchFamily="2" charset="0"/>
-                <a:cs typeface="Helvetica Neue" panose="02000503000000020004" pitchFamily="2" charset="0"/>
-              </a:rPr>
-              <a:t> is an assembly of 12264 Point Potentials </a:t>
-            </a:r>
-          </a:p>
-        </p:txBody>
-      </p:sp>
-      <p:sp>
-        <p:nvSpPr>
-          <p:cNvPr id="2" name="TextBox 1">
-            <a:extLst>
-              <a:ext uri="{FF2B5EF4-FFF2-40B4-BE49-F238E27FC236}">
-                <a16:creationId xmlns:a16="http://schemas.microsoft.com/office/drawing/2014/main" id="{FC3DF262-4725-E728-70B8-D423FB0711CD}"/>
-              </a:ext>
-            </a:extLst>
-          </p:cNvPr>
-          <p:cNvSpPr txBox="1"/>
-          <p:nvPr/>
-        </p:nvSpPr>
-        <p:spPr>
-          <a:xfrm>
-            <a:off x="412586" y="922975"/>
-            <a:ext cx="11874641" cy="1200329"/>
-          </a:xfrm>
-          <a:prstGeom prst="rect">
-            <a:avLst/>
-          </a:prstGeom>
-          <a:noFill/>
-        </p:spPr>
-        <p:txBody>
-          <a:bodyPr wrap="square" rtlCol="0">
-            <a:spAutoFit/>
-          </a:bodyPr>
-          <a:lstStyle/>
-          <a:p>
-            <a:pPr marL="457200" marR="0" lvl="0" indent="-457200" algn="l" defTabSz="914400" rtl="0" eaLnBrk="1" fontAlgn="auto" latinLnBrk="0" hangingPunct="1">
-              <a:lnSpc>
-                <a:spcPct val="100000"/>
-              </a:lnSpc>
-              <a:spcBef>
-                <a:spcPts val="0"/>
-              </a:spcBef>
-              <a:spcAft>
-                <a:spcPts val="0"/>
-              </a:spcAft>
-              <a:buClrTx/>
-              <a:buSzTx/>
-              <a:buFont typeface="Arial" panose="020B0604020202020204" pitchFamily="34" charset="0"/>
-              <a:buChar char="•"/>
-              <a:tabLst/>
-              <a:defRPr/>
-            </a:pPr>
-            <a:endParaRPr kumimoji="0" lang="en-US" sz="2400" b="0" i="0" u="none" strike="noStrike" kern="1200" cap="none" spc="0" normalizeH="0" baseline="0" noProof="0" dirty="0">
-              <a:ln>
-                <a:noFill/>
-              </a:ln>
-              <a:solidFill>
-                <a:prstClr val="white"/>
-              </a:solidFill>
-              <a:effectLst/>
-              <a:uLnTx/>
-              <a:uFillTx/>
-              <a:latin typeface="Helvetica Neue" panose="02000503000000020004" pitchFamily="2" charset="0"/>
-              <a:ea typeface="Helvetica Neue" panose="02000503000000020004" pitchFamily="2" charset="0"/>
-              <a:cs typeface="Helvetica Neue" panose="02000503000000020004" pitchFamily="2" charset="0"/>
-            </a:endParaRPr>
-          </a:p>
-          <a:p>
-            <a:pPr marL="457200" marR="0" lvl="0" indent="-457200" algn="l" defTabSz="914400" rtl="0" eaLnBrk="1" fontAlgn="auto" latinLnBrk="0" hangingPunct="1">
-              <a:lnSpc>
-                <a:spcPct val="100000"/>
-              </a:lnSpc>
-              <a:spcBef>
-                <a:spcPts val="0"/>
-              </a:spcBef>
-              <a:spcAft>
-                <a:spcPts val="0"/>
-              </a:spcAft>
-              <a:buClrTx/>
-              <a:buSzTx/>
-              <a:buFont typeface="Arial" panose="020B0604020202020204" pitchFamily="34" charset="0"/>
-              <a:buChar char="•"/>
-              <a:tabLst/>
-              <a:defRPr/>
-            </a:pPr>
-            <a:endParaRPr kumimoji="0" lang="en-US" sz="2400" b="0" i="0" u="none" strike="noStrike" kern="1200" cap="none" spc="0" normalizeH="0" baseline="0" noProof="0" dirty="0">
-              <a:ln>
-                <a:noFill/>
-              </a:ln>
-              <a:solidFill>
-                <a:prstClr val="white"/>
-              </a:solidFill>
-              <a:effectLst/>
-              <a:uLnTx/>
-              <a:uFillTx/>
-              <a:latin typeface="Helvetica Neue" panose="02000503000000020004" pitchFamily="2" charset="0"/>
-              <a:ea typeface="Helvetica Neue" panose="02000503000000020004" pitchFamily="2" charset="0"/>
-              <a:cs typeface="Helvetica Neue" panose="02000503000000020004" pitchFamily="2" charset="0"/>
-            </a:endParaRPr>
-          </a:p>
-          <a:p>
-            <a:pPr marL="457200" marR="0" lvl="0" indent="-457200" algn="l" defTabSz="914400" rtl="0" eaLnBrk="1" fontAlgn="auto" latinLnBrk="0" hangingPunct="1">
-              <a:lnSpc>
-                <a:spcPct val="100000"/>
-              </a:lnSpc>
-              <a:spcBef>
-                <a:spcPts val="0"/>
-              </a:spcBef>
-              <a:spcAft>
-                <a:spcPts val="0"/>
-              </a:spcAft>
-              <a:buClrTx/>
-              <a:buSzTx/>
-              <a:buFont typeface="Arial" panose="020B0604020202020204" pitchFamily="34" charset="0"/>
-              <a:buChar char="•"/>
-              <a:tabLst/>
-              <a:defRPr/>
-            </a:pPr>
-            <a:endParaRPr kumimoji="0" lang="en-US" sz="2400" b="0" i="0" u="none" strike="noStrike" kern="1200" cap="none" spc="0" normalizeH="0" baseline="0" noProof="0" dirty="0">
-              <a:ln>
-                <a:noFill/>
-              </a:ln>
-              <a:solidFill>
-                <a:prstClr val="white"/>
-              </a:solidFill>
-              <a:effectLst/>
-              <a:uLnTx/>
-              <a:uFillTx/>
-              <a:latin typeface="Helvetica Neue" panose="02000503000000020004" pitchFamily="2" charset="0"/>
-              <a:ea typeface="Helvetica Neue" panose="02000503000000020004" pitchFamily="2" charset="0"/>
-              <a:cs typeface="Helvetica Neue" panose="02000503000000020004" pitchFamily="2" charset="0"/>
-            </a:endParaRPr>
-          </a:p>
-        </p:txBody>
-      </p:sp>
-      <p:pic>
-        <p:nvPicPr>
-          <p:cNvPr id="3" name="Picture 2">
-            <a:extLst>
-              <a:ext uri="{FF2B5EF4-FFF2-40B4-BE49-F238E27FC236}">
-                <a16:creationId xmlns:a16="http://schemas.microsoft.com/office/drawing/2014/main" id="{A3332769-C6F5-DFEB-8CDA-03D4CB57B63A}"/>
-              </a:ext>
-            </a:extLst>
-          </p:cNvPr>
-          <p:cNvPicPr>
-            <a:picLocks noChangeAspect="1"/>
-          </p:cNvPicPr>
-          <p:nvPr/>
-        </p:nvPicPr>
-        <p:blipFill>
-          <a:blip r:embed="rId2"/>
-          <a:stretch>
-            <a:fillRect/>
-          </a:stretch>
-        </p:blipFill>
-        <p:spPr>
-          <a:xfrm>
-            <a:off x="1999593" y="3028790"/>
-            <a:ext cx="8100848" cy="3501792"/>
-          </a:xfrm>
-          <a:prstGeom prst="rect">
-            <a:avLst/>
-          </a:prstGeom>
-        </p:spPr>
-      </p:pic>
-      <p:sp>
-        <p:nvSpPr>
-          <p:cNvPr id="4" name="Content Placeholder 2">
-            <a:extLst>
-              <a:ext uri="{FF2B5EF4-FFF2-40B4-BE49-F238E27FC236}">
-                <a16:creationId xmlns:a16="http://schemas.microsoft.com/office/drawing/2014/main" id="{D619C85F-5F5A-871C-0155-028F272E159A}"/>
-              </a:ext>
-            </a:extLst>
-          </p:cNvPr>
-          <p:cNvSpPr txBox="1">
-            <a:spLocks/>
-          </p:cNvSpPr>
-          <p:nvPr/>
-        </p:nvSpPr>
-        <p:spPr>
-          <a:xfrm>
-            <a:off x="365554" y="922975"/>
-            <a:ext cx="11700956" cy="4552316"/>
-          </a:xfrm>
-          <a:prstGeom prst="rect">
-            <a:avLst/>
-          </a:prstGeom>
-        </p:spPr>
-        <p:txBody>
-          <a:bodyPr>
-            <a:noAutofit/>
-          </a:bodyPr>
-          <a:lstStyle>
-            <a:lvl1pPr marL="228600" indent="-228600" algn="l" defTabSz="914400" rtl="0" eaLnBrk="1" latinLnBrk="0" hangingPunct="1">
-              <a:lnSpc>
-                <a:spcPct val="90000"/>
-              </a:lnSpc>
-              <a:spcBef>
-                <a:spcPts val="1000"/>
-              </a:spcBef>
-              <a:buFont typeface="Arial" panose="020B0604020202020204" pitchFamily="34" charset="0"/>
-              <a:buChar char="•"/>
-              <a:defRPr sz="2800" kern="1200">
-                <a:solidFill>
-                  <a:schemeClr val="tx1"/>
-                </a:solidFill>
-                <a:latin typeface="+mn-lt"/>
-                <a:ea typeface="+mn-ea"/>
-                <a:cs typeface="+mn-cs"/>
-              </a:defRPr>
-            </a:lvl1pPr>
-            <a:lvl2pPr marL="685800" indent="-228600" algn="l" defTabSz="914400" rtl="0" eaLnBrk="1" latinLnBrk="0" hangingPunct="1">
-              <a:lnSpc>
-                <a:spcPct val="90000"/>
-              </a:lnSpc>
-              <a:spcBef>
-                <a:spcPts val="500"/>
-              </a:spcBef>
-              <a:buFont typeface="Arial" panose="020B0604020202020204" pitchFamily="34" charset="0"/>
-              <a:buChar char="•"/>
-              <a:defRPr sz="2400" kern="1200">
-                <a:solidFill>
-                  <a:schemeClr val="tx1"/>
-                </a:solidFill>
-                <a:latin typeface="+mn-lt"/>
-                <a:ea typeface="+mn-ea"/>
-                <a:cs typeface="+mn-cs"/>
-              </a:defRPr>
-            </a:lvl2pPr>
-            <a:lvl3pPr marL="1143000" indent="-228600" algn="l" defTabSz="914400" rtl="0" eaLnBrk="1" latinLnBrk="0" hangingPunct="1">
-              <a:lnSpc>
-                <a:spcPct val="90000"/>
-              </a:lnSpc>
-              <a:spcBef>
-                <a:spcPts val="500"/>
-              </a:spcBef>
-              <a:buFont typeface="Arial" panose="020B0604020202020204" pitchFamily="34" charset="0"/>
-              <a:buChar char="•"/>
-              <a:defRPr sz="2000" kern="1200">
-                <a:solidFill>
-                  <a:schemeClr val="tx1"/>
-                </a:solidFill>
-                <a:latin typeface="+mn-lt"/>
-                <a:ea typeface="+mn-ea"/>
-                <a:cs typeface="+mn-cs"/>
-              </a:defRPr>
-            </a:lvl3pPr>
-            <a:lvl4pPr marL="1600200" indent="-228600" algn="l" defTabSz="914400" rtl="0" eaLnBrk="1" latinLnBrk="0" hangingPunct="1">
-              <a:lnSpc>
-                <a:spcPct val="90000"/>
-              </a:lnSpc>
-              <a:spcBef>
-                <a:spcPts val="500"/>
-              </a:spcBef>
-              <a:buFont typeface="Arial" panose="020B0604020202020204" pitchFamily="34" charset="0"/>
-              <a:buChar char="•"/>
-              <a:defRPr sz="1800" kern="1200">
-                <a:solidFill>
-                  <a:schemeClr val="tx1"/>
-                </a:solidFill>
-                <a:latin typeface="+mn-lt"/>
-                <a:ea typeface="+mn-ea"/>
-                <a:cs typeface="+mn-cs"/>
-              </a:defRPr>
-            </a:lvl4pPr>
-            <a:lvl5pPr marL="2057400" indent="-228600" algn="l" defTabSz="914400" rtl="0" eaLnBrk="1" latinLnBrk="0" hangingPunct="1">
-              <a:lnSpc>
-                <a:spcPct val="90000"/>
-              </a:lnSpc>
-              <a:spcBef>
-                <a:spcPts val="500"/>
-              </a:spcBef>
-              <a:buFont typeface="Arial" panose="020B0604020202020204" pitchFamily="34" charset="0"/>
-              <a:buChar char="•"/>
-              <a:defRPr sz="1800" kern="1200">
-                <a:solidFill>
-                  <a:schemeClr val="tx1"/>
-                </a:solidFill>
-                <a:latin typeface="+mn-lt"/>
-                <a:ea typeface="+mn-ea"/>
-                <a:cs typeface="+mn-cs"/>
-              </a:defRPr>
-            </a:lvl5pPr>
-            <a:lvl6pPr marL="2514600" indent="-228600" algn="l" defTabSz="914400" rtl="0" eaLnBrk="1" latinLnBrk="0" hangingPunct="1">
-              <a:lnSpc>
-                <a:spcPct val="90000"/>
-              </a:lnSpc>
-              <a:spcBef>
-                <a:spcPts val="500"/>
-              </a:spcBef>
-              <a:buFont typeface="Arial" panose="020B0604020202020204" pitchFamily="34" charset="0"/>
-              <a:buChar char="•"/>
-              <a:defRPr sz="1800" kern="1200">
-                <a:solidFill>
-                  <a:schemeClr val="tx1"/>
-                </a:solidFill>
-                <a:latin typeface="+mn-lt"/>
-                <a:ea typeface="+mn-ea"/>
-                <a:cs typeface="+mn-cs"/>
-              </a:defRPr>
-            </a:lvl6pPr>
-            <a:lvl7pPr marL="2971800" indent="-228600" algn="l" defTabSz="914400" rtl="0" eaLnBrk="1" latinLnBrk="0" hangingPunct="1">
-              <a:lnSpc>
-                <a:spcPct val="90000"/>
-              </a:lnSpc>
-              <a:spcBef>
-                <a:spcPts val="500"/>
-              </a:spcBef>
-              <a:buFont typeface="Arial" panose="020B0604020202020204" pitchFamily="34" charset="0"/>
-              <a:buChar char="•"/>
-              <a:defRPr sz="1800" kern="1200">
-                <a:solidFill>
-                  <a:schemeClr val="tx1"/>
-                </a:solidFill>
-                <a:latin typeface="+mn-lt"/>
-                <a:ea typeface="+mn-ea"/>
-                <a:cs typeface="+mn-cs"/>
-              </a:defRPr>
-            </a:lvl7pPr>
-            <a:lvl8pPr marL="3429000" indent="-228600" algn="l" defTabSz="914400" rtl="0" eaLnBrk="1" latinLnBrk="0" hangingPunct="1">
-              <a:lnSpc>
-                <a:spcPct val="90000"/>
-              </a:lnSpc>
-              <a:spcBef>
-                <a:spcPts val="500"/>
-              </a:spcBef>
-              <a:buFont typeface="Arial" panose="020B0604020202020204" pitchFamily="34" charset="0"/>
-              <a:buChar char="•"/>
-              <a:defRPr sz="1800" kern="1200">
-                <a:solidFill>
-                  <a:schemeClr val="tx1"/>
-                </a:solidFill>
-                <a:latin typeface="+mn-lt"/>
-                <a:ea typeface="+mn-ea"/>
-                <a:cs typeface="+mn-cs"/>
-              </a:defRPr>
-            </a:lvl8pPr>
-            <a:lvl9pPr marL="3886200" indent="-228600" algn="l" defTabSz="914400" rtl="0" eaLnBrk="1" latinLnBrk="0" hangingPunct="1">
-              <a:lnSpc>
-                <a:spcPct val="90000"/>
-              </a:lnSpc>
-              <a:spcBef>
-                <a:spcPts val="500"/>
-              </a:spcBef>
-              <a:buFont typeface="Arial" panose="020B0604020202020204" pitchFamily="34" charset="0"/>
-              <a:buChar char="•"/>
-              <a:defRPr sz="1800" kern="1200">
-                <a:solidFill>
-                  <a:schemeClr val="tx1"/>
-                </a:solidFill>
-                <a:latin typeface="+mn-lt"/>
-                <a:ea typeface="+mn-ea"/>
-                <a:cs typeface="+mn-cs"/>
-              </a:defRPr>
-            </a:lvl9pPr>
-          </a:lstStyle>
-          <a:p>
-            <a:pPr>
-              <a:lnSpc>
-                <a:spcPct val="80000"/>
-              </a:lnSpc>
-            </a:pPr>
-            <a:r>
-              <a:rPr lang="en-US" dirty="0">
-                <a:solidFill>
-                  <a:schemeClr val="bg1"/>
-                </a:solidFill>
-                <a:latin typeface="Helvetica Neue" panose="02000503000000020004" pitchFamily="2" charset="0"/>
-                <a:ea typeface="Helvetica Neue" panose="02000503000000020004" pitchFamily="2" charset="0"/>
-                <a:cs typeface="Helvetica Neue" panose="02000503000000020004" pitchFamily="2" charset="0"/>
-              </a:rPr>
-              <a:t>Consider this testosterone molecule assembly. C</a:t>
-            </a:r>
-            <a:r>
-              <a:rPr lang="en-US" baseline="-25000" dirty="0">
-                <a:solidFill>
-                  <a:schemeClr val="bg1"/>
-                </a:solidFill>
-                <a:latin typeface="Helvetica Neue" panose="02000503000000020004" pitchFamily="2" charset="0"/>
-                <a:ea typeface="Helvetica Neue" panose="02000503000000020004" pitchFamily="2" charset="0"/>
-                <a:cs typeface="Helvetica Neue" panose="02000503000000020004" pitchFamily="2" charset="0"/>
-              </a:rPr>
-              <a:t>19</a:t>
-            </a:r>
-            <a:r>
-              <a:rPr lang="en-US" dirty="0">
-                <a:solidFill>
-                  <a:schemeClr val="bg1"/>
-                </a:solidFill>
-                <a:latin typeface="Helvetica Neue" panose="02000503000000020004" pitchFamily="2" charset="0"/>
-                <a:ea typeface="Helvetica Neue" panose="02000503000000020004" pitchFamily="2" charset="0"/>
-                <a:cs typeface="Helvetica Neue" panose="02000503000000020004" pitchFamily="2" charset="0"/>
-              </a:rPr>
-              <a:t>H</a:t>
-            </a:r>
-            <a:r>
-              <a:rPr lang="en-US" baseline="-25000" dirty="0">
-                <a:solidFill>
-                  <a:schemeClr val="bg1"/>
-                </a:solidFill>
-                <a:latin typeface="Helvetica Neue" panose="02000503000000020004" pitchFamily="2" charset="0"/>
-                <a:ea typeface="Helvetica Neue" panose="02000503000000020004" pitchFamily="2" charset="0"/>
-                <a:cs typeface="Helvetica Neue" panose="02000503000000020004" pitchFamily="2" charset="0"/>
-              </a:rPr>
-              <a:t>28</a:t>
-            </a:r>
-            <a:r>
-              <a:rPr lang="en-US" dirty="0">
-                <a:solidFill>
-                  <a:schemeClr val="bg1"/>
-                </a:solidFill>
-                <a:latin typeface="Helvetica Neue" panose="02000503000000020004" pitchFamily="2" charset="0"/>
-                <a:ea typeface="Helvetica Neue" panose="02000503000000020004" pitchFamily="2" charset="0"/>
-                <a:cs typeface="Helvetica Neue" panose="02000503000000020004" pitchFamily="2" charset="0"/>
-              </a:rPr>
-              <a:t>0</a:t>
-            </a:r>
-            <a:r>
-              <a:rPr lang="en-US" baseline="-25000" dirty="0">
-                <a:solidFill>
-                  <a:schemeClr val="bg1"/>
-                </a:solidFill>
-                <a:latin typeface="Helvetica Neue" panose="02000503000000020004" pitchFamily="2" charset="0"/>
-                <a:ea typeface="Helvetica Neue" panose="02000503000000020004" pitchFamily="2" charset="0"/>
-                <a:cs typeface="Helvetica Neue" panose="02000503000000020004" pitchFamily="2" charset="0"/>
-              </a:rPr>
-              <a:t>2</a:t>
-            </a:r>
-          </a:p>
-          <a:p>
-            <a:pPr>
-              <a:lnSpc>
-                <a:spcPct val="80000"/>
-              </a:lnSpc>
-            </a:pPr>
-            <a:r>
-              <a:rPr lang="en-US" dirty="0">
-                <a:solidFill>
-                  <a:schemeClr val="bg1"/>
-                </a:solidFill>
-                <a:latin typeface="Helvetica Neue" panose="02000503000000020004" pitchFamily="2" charset="0"/>
-                <a:ea typeface="Helvetica Neue" panose="02000503000000020004" pitchFamily="2" charset="0"/>
-                <a:cs typeface="Helvetica Neue" panose="02000503000000020004" pitchFamily="2" charset="0"/>
-              </a:rPr>
-              <a:t>Each atom contains many protons, neutrons, and electrons.</a:t>
-            </a:r>
-          </a:p>
-          <a:p>
-            <a:pPr>
-              <a:lnSpc>
-                <a:spcPct val="80000"/>
-              </a:lnSpc>
-            </a:pPr>
-            <a:r>
-              <a:rPr lang="en-US" dirty="0">
-                <a:solidFill>
-                  <a:schemeClr val="bg1"/>
-                </a:solidFill>
-                <a:latin typeface="Helvetica Neue" panose="02000503000000020004" pitchFamily="2" charset="0"/>
-                <a:ea typeface="Helvetica Neue" panose="02000503000000020004" pitchFamily="2" charset="0"/>
-                <a:cs typeface="Helvetica Neue" panose="02000503000000020004" pitchFamily="2" charset="0"/>
-              </a:rPr>
-              <a:t>Protons and neutrons consist of quarks.</a:t>
-            </a:r>
-          </a:p>
-          <a:p>
-            <a:pPr>
-              <a:lnSpc>
-                <a:spcPct val="80000"/>
-              </a:lnSpc>
-            </a:pPr>
-            <a:r>
-              <a:rPr lang="en-US" dirty="0">
-                <a:solidFill>
-                  <a:schemeClr val="bg1"/>
-                </a:solidFill>
-                <a:latin typeface="Helvetica Neue" panose="02000503000000020004" pitchFamily="2" charset="0"/>
-                <a:ea typeface="Helvetica Neue" panose="02000503000000020004" pitchFamily="2" charset="0"/>
-                <a:cs typeface="Helvetica Neue" panose="02000503000000020004" pitchFamily="2" charset="0"/>
-              </a:rPr>
-              <a:t>All of the above are sub-assemblies of point potentials</a:t>
-            </a:r>
-          </a:p>
-          <a:p>
-            <a:pPr>
-              <a:lnSpc>
-                <a:spcPct val="80000"/>
-              </a:lnSpc>
-            </a:pPr>
-            <a:endParaRPr lang="en-US" sz="2400" dirty="0">
-              <a:solidFill>
-                <a:schemeClr val="bg1"/>
-              </a:solidFill>
-            </a:endParaRPr>
-          </a:p>
-          <a:p>
-            <a:pPr>
-              <a:lnSpc>
-                <a:spcPct val="80000"/>
-              </a:lnSpc>
-            </a:pPr>
-            <a:endParaRPr lang="en-US" sz="2400" dirty="0">
-              <a:solidFill>
-                <a:schemeClr val="bg1"/>
-              </a:solidFill>
-              <a:latin typeface="Helvetica Neue" panose="02000503000000020004" pitchFamily="2" charset="0"/>
-              <a:ea typeface="Helvetica Neue" panose="02000503000000020004" pitchFamily="2" charset="0"/>
-              <a:cs typeface="Helvetica Neue" panose="02000503000000020004" pitchFamily="2" charset="0"/>
-            </a:endParaRPr>
-          </a:p>
-          <a:p>
-            <a:endParaRPr lang="en-US" sz="2400" dirty="0"/>
-          </a:p>
-        </p:txBody>
-      </p:sp>
-    </p:spTree>
-    <p:extLst>
-      <p:ext uri="{BB962C8B-B14F-4D97-AF65-F5344CB8AC3E}">
-        <p14:creationId xmlns:p14="http://schemas.microsoft.com/office/powerpoint/2010/main" val="4023428361"/>
-      </p:ext>
-    </p:extLst>
-  </p:cSld>
-  <p:clrMapOvr>
-    <a:masterClrMapping/>
-  </p:clrMapOvr>
-</p:sld>
-</file>
-
-<file path=ppt/slides/slide3.xml><?xml version="1.0" encoding="utf-8"?>
-<p:sld xmlns:a="http://schemas.openxmlformats.org/drawingml/2006/main" xmlns:r="http://schemas.openxmlformats.org/officeDocument/2006/relationships" xmlns:p="http://schemas.openxmlformats.org/presentationml/2006/main">
-  <p:cSld>
-    <p:bg>
-      <p:bgPr>
-        <a:solidFill>
-          <a:srgbClr val="7030A0"/>
-        </a:solidFill>
-        <a:effectLst/>
-      </p:bgPr>
-    </p:bg>
-    <p:spTree>
-      <p:nvGrpSpPr>
-        <p:cNvPr id="1" name=""/>
-        <p:cNvGrpSpPr/>
-        <p:nvPr/>
-      </p:nvGrpSpPr>
-      <p:grpSpPr>
-        <a:xfrm>
-          <a:off x="0" y="0"/>
-          <a:ext cx="0" cy="0"/>
-          <a:chOff x="0" y="0"/>
-          <a:chExt cx="0" cy="0"/>
-        </a:xfrm>
-      </p:grpSpPr>
-      <p:pic>
-        <p:nvPicPr>
-          <p:cNvPr id="1026" name="Picture 2">
-            <a:extLst>
-              <a:ext uri="{FF2B5EF4-FFF2-40B4-BE49-F238E27FC236}">
-                <a16:creationId xmlns:a16="http://schemas.microsoft.com/office/drawing/2014/main" id="{619E8318-451A-0369-0F28-7B2A1C47FEF5}"/>
-              </a:ext>
-            </a:extLst>
-          </p:cNvPr>
-          <p:cNvPicPr>
-            <a:picLocks noChangeAspect="1" noChangeArrowheads="1"/>
-          </p:cNvPicPr>
-          <p:nvPr/>
-        </p:nvPicPr>
-        <p:blipFill>
-          <a:blip r:embed="rId2">
-            <a:extLst>
-              <a:ext uri="{28A0092B-C50C-407E-A947-70E740481C1C}">
-                <a14:useLocalDpi xmlns:a14="http://schemas.microsoft.com/office/drawing/2010/main" val="0"/>
-              </a:ext>
-            </a:extLst>
-          </a:blip>
-          <a:srcRect/>
-          <a:stretch>
-            <a:fillRect/>
-          </a:stretch>
-        </p:blipFill>
-        <p:spPr bwMode="auto">
-          <a:xfrm flipV="1">
-            <a:off x="5843671" y="985536"/>
-            <a:ext cx="6472822" cy="4440621"/>
-          </a:xfrm>
-          <a:prstGeom prst="rect">
-            <a:avLst/>
-          </a:prstGeom>
-          <a:noFill/>
-          <a:extLst>
-            <a:ext uri="{909E8E84-426E-40DD-AFC4-6F175D3DCCD1}">
-              <a14:hiddenFill xmlns:a14="http://schemas.microsoft.com/office/drawing/2010/main">
-                <a:solidFill>
-                  <a:srgbClr val="FFFFFF"/>
-                </a:solidFill>
-              </a14:hiddenFill>
-            </a:ext>
-          </a:extLst>
-        </p:spPr>
-      </p:pic>
-      <p:sp>
-        <p:nvSpPr>
-          <p:cNvPr id="4" name="Footer Placeholder 3">
-            <a:extLst>
-              <a:ext uri="{FF2B5EF4-FFF2-40B4-BE49-F238E27FC236}">
-                <a16:creationId xmlns:a16="http://schemas.microsoft.com/office/drawing/2014/main" id="{C805A60C-6AD8-E010-19DC-69929BDAF83E}"/>
-              </a:ext>
-            </a:extLst>
-          </p:cNvPr>
-          <p:cNvSpPr>
-            <a:spLocks noGrp="1"/>
-          </p:cNvSpPr>
-          <p:nvPr>
-            <p:ph type="ftr" sz="quarter" idx="11"/>
-          </p:nvPr>
-        </p:nvSpPr>
-        <p:spPr>
-          <a:xfrm>
-            <a:off x="-1192427" y="6356350"/>
-            <a:ext cx="4114800" cy="365125"/>
-          </a:xfrm>
-        </p:spPr>
-        <p:txBody>
-          <a:bodyPr/>
-          <a:lstStyle/>
-          <a:p>
-            <a:pPr marL="0" marR="0" lvl="0" indent="0" algn="ctr" defTabSz="914400" rtl="0" eaLnBrk="1" fontAlgn="auto" latinLnBrk="0" hangingPunct="1">
-              <a:lnSpc>
-                <a:spcPct val="100000"/>
-              </a:lnSpc>
-              <a:spcBef>
-                <a:spcPts val="0"/>
-              </a:spcBef>
-              <a:spcAft>
-                <a:spcPts val="0"/>
-              </a:spcAft>
-              <a:buClrTx/>
-              <a:buSzTx/>
-              <a:buFontTx/>
-              <a:buNone/>
-              <a:tabLst/>
-              <a:defRPr/>
-            </a:pPr>
-            <a:r>
-              <a:rPr kumimoji="0" lang="en-US" sz="1200" b="0" i="0" u="none" strike="noStrike" kern="1200" cap="none" spc="0" normalizeH="0" baseline="0" noProof="0" dirty="0">
-                <a:ln>
-                  <a:noFill/>
-                </a:ln>
-                <a:solidFill>
-                  <a:prstClr val="black">
-                    <a:tint val="75000"/>
-                  </a:prstClr>
-                </a:solidFill>
-                <a:effectLst/>
-                <a:uLnTx/>
-                <a:uFillTx/>
-                <a:latin typeface="Helvetica Neue" panose="02000503000000020004" pitchFamily="2" charset="0"/>
-                <a:ea typeface="Helvetica Neue" panose="02000503000000020004" pitchFamily="2" charset="0"/>
-                <a:cs typeface="Helvetica Neue" panose="02000503000000020004" pitchFamily="2" charset="0"/>
-              </a:rPr>
-              <a:t>J Mark Morris</a:t>
-            </a:r>
-          </a:p>
-        </p:txBody>
-      </p:sp>
-      <p:cxnSp>
-        <p:nvCxnSpPr>
-          <p:cNvPr id="15" name="Straight Arrow Connector 14">
-            <a:extLst>
-              <a:ext uri="{FF2B5EF4-FFF2-40B4-BE49-F238E27FC236}">
-                <a16:creationId xmlns:a16="http://schemas.microsoft.com/office/drawing/2014/main" id="{D674725B-5E1E-77B0-62B5-B838B04E3C41}"/>
-              </a:ext>
-            </a:extLst>
-          </p:cNvPr>
-          <p:cNvCxnSpPr>
-            <a:cxnSpLocks/>
-          </p:cNvCxnSpPr>
-          <p:nvPr/>
-        </p:nvCxnSpPr>
-        <p:spPr>
-          <a:xfrm flipV="1">
-            <a:off x="7816383" y="4374292"/>
-            <a:ext cx="100179" cy="821033"/>
-          </a:xfrm>
-          <a:prstGeom prst="straightConnector1">
-            <a:avLst/>
-          </a:prstGeom>
-          <a:ln w="76200">
-            <a:solidFill>
-              <a:schemeClr val="bg1"/>
-            </a:solidFill>
-            <a:tailEnd type="triangle"/>
-          </a:ln>
-        </p:spPr>
-        <p:style>
-          <a:lnRef idx="1">
-            <a:schemeClr val="accent1"/>
-          </a:lnRef>
-          <a:fillRef idx="0">
-            <a:schemeClr val="accent1"/>
-          </a:fillRef>
-          <a:effectRef idx="0">
-            <a:schemeClr val="accent1"/>
-          </a:effectRef>
-          <a:fontRef idx="minor">
-            <a:schemeClr val="tx1"/>
-          </a:fontRef>
-        </p:style>
-      </p:cxnSp>
-      <p:sp>
-        <p:nvSpPr>
-          <p:cNvPr id="23" name="Rectangle 22">
-            <a:extLst>
-              <a:ext uri="{FF2B5EF4-FFF2-40B4-BE49-F238E27FC236}">
-                <a16:creationId xmlns:a16="http://schemas.microsoft.com/office/drawing/2014/main" id="{DA1AFF6B-BF9C-8366-1528-7ABB14140F85}"/>
-              </a:ext>
-            </a:extLst>
-          </p:cNvPr>
-          <p:cNvSpPr/>
-          <p:nvPr/>
-        </p:nvSpPr>
-        <p:spPr>
-          <a:xfrm>
-            <a:off x="6096000" y="5205360"/>
-            <a:ext cx="2929905" cy="461665"/>
-          </a:xfrm>
-          <a:prstGeom prst="rect">
-            <a:avLst/>
-          </a:prstGeom>
-          <a:ln w="63500">
-            <a:solidFill>
-              <a:schemeClr val="bg1"/>
-            </a:solidFill>
-          </a:ln>
-        </p:spPr>
-        <p:txBody>
-          <a:bodyPr wrap="none" rtlCol="0" anchor="ctr">
-            <a:spAutoFit/>
-          </a:bodyPr>
-          <a:lstStyle/>
-          <a:p>
-            <a:pPr marL="0" marR="0" lvl="0" indent="0" algn="l" defTabSz="914400" rtl="0" eaLnBrk="1" fontAlgn="auto" latinLnBrk="0" hangingPunct="1">
-              <a:lnSpc>
-                <a:spcPct val="100000"/>
-              </a:lnSpc>
-              <a:spcBef>
-                <a:spcPts val="0"/>
-              </a:spcBef>
-              <a:spcAft>
-                <a:spcPts val="0"/>
-              </a:spcAft>
-              <a:buClrTx/>
-              <a:buSzTx/>
-              <a:buFontTx/>
-              <a:buNone/>
-              <a:tabLst/>
-              <a:defRPr/>
-            </a:pPr>
-            <a:r>
-              <a:rPr kumimoji="0" lang="en-US" sz="2400" b="1" i="0" u="none" strike="noStrike" kern="1200" cap="none" spc="0" normalizeH="0" baseline="0" noProof="0" dirty="0">
-                <a:ln>
-                  <a:noFill/>
-                </a:ln>
-                <a:solidFill>
-                  <a:prstClr val="white"/>
-                </a:solidFill>
-                <a:effectLst/>
-                <a:uLnTx/>
-                <a:uFillTx/>
-                <a:latin typeface="Helvetica Neue" panose="02000503000000020004" pitchFamily="2" charset="0"/>
-                <a:ea typeface="Helvetica Neue" panose="02000503000000020004" pitchFamily="2" charset="0"/>
-                <a:cs typeface="Helvetica Neue" panose="02000503000000020004" pitchFamily="2" charset="0"/>
-              </a:rPr>
-              <a:t>Hydrogen H, White</a:t>
-            </a:r>
-          </a:p>
-        </p:txBody>
-      </p:sp>
-      <p:sp>
-        <p:nvSpPr>
-          <p:cNvPr id="24" name="Rectangle 23">
-            <a:extLst>
-              <a:ext uri="{FF2B5EF4-FFF2-40B4-BE49-F238E27FC236}">
-                <a16:creationId xmlns:a16="http://schemas.microsoft.com/office/drawing/2014/main" id="{0493695D-D94C-B9F8-ECFF-EECE8BEC1C0A}"/>
-              </a:ext>
-            </a:extLst>
-          </p:cNvPr>
-          <p:cNvSpPr/>
-          <p:nvPr/>
-        </p:nvSpPr>
-        <p:spPr>
-          <a:xfrm>
-            <a:off x="9609712" y="5667025"/>
-            <a:ext cx="2460930" cy="387798"/>
-          </a:xfrm>
-          <a:prstGeom prst="rect">
-            <a:avLst/>
-          </a:prstGeom>
-          <a:solidFill>
-            <a:schemeClr val="bg1"/>
-          </a:solidFill>
-          <a:ln w="63500">
-            <a:solidFill>
-              <a:srgbClr val="FF0000"/>
-            </a:solidFill>
-          </a:ln>
-        </p:spPr>
-        <p:txBody>
-          <a:bodyPr wrap="none" rtlCol="0" anchor="ctr">
-            <a:spAutoFit/>
-          </a:bodyPr>
-          <a:lstStyle/>
-          <a:p>
-            <a:pPr marL="0" marR="0" lvl="0" indent="0" algn="l" defTabSz="914400" rtl="0" eaLnBrk="1" fontAlgn="auto" latinLnBrk="0" hangingPunct="1">
-              <a:lnSpc>
-                <a:spcPct val="80000"/>
-              </a:lnSpc>
-              <a:spcBef>
-                <a:spcPts val="0"/>
-              </a:spcBef>
-              <a:spcAft>
-                <a:spcPts val="0"/>
-              </a:spcAft>
-              <a:buClrTx/>
-              <a:buSzTx/>
-              <a:buFontTx/>
-              <a:buNone/>
-              <a:tabLst/>
-              <a:defRPr/>
-            </a:pPr>
-            <a:r>
-              <a:rPr kumimoji="0" lang="en-US" sz="2400" b="1" i="0" u="none" strike="noStrike" kern="1200" cap="none" spc="0" normalizeH="0" baseline="0" noProof="0" dirty="0">
-                <a:ln>
-                  <a:noFill/>
-                </a:ln>
-                <a:solidFill>
-                  <a:srgbClr val="FF0000"/>
-                </a:solidFill>
-                <a:effectLst/>
-                <a:uLnTx/>
-                <a:uFillTx/>
-                <a:latin typeface="Helvetica Neue" panose="02000503000000020004" pitchFamily="2" charset="0"/>
-                <a:ea typeface="Helvetica Neue" panose="02000503000000020004" pitchFamily="2" charset="0"/>
-                <a:cs typeface="Helvetica Neue" panose="02000503000000020004" pitchFamily="2" charset="0"/>
-              </a:rPr>
-              <a:t>Oxygen, O: Red</a:t>
-            </a:r>
-          </a:p>
-        </p:txBody>
-      </p:sp>
-      <p:sp>
-        <p:nvSpPr>
-          <p:cNvPr id="25" name="Rectangle 24">
-            <a:extLst>
-              <a:ext uri="{FF2B5EF4-FFF2-40B4-BE49-F238E27FC236}">
-                <a16:creationId xmlns:a16="http://schemas.microsoft.com/office/drawing/2014/main" id="{DA84227C-7E63-0A67-E314-66FE77F9E1B6}"/>
-              </a:ext>
-            </a:extLst>
-          </p:cNvPr>
-          <p:cNvSpPr/>
-          <p:nvPr/>
-        </p:nvSpPr>
-        <p:spPr>
-          <a:xfrm>
-            <a:off x="9495898" y="814677"/>
-            <a:ext cx="2574744" cy="461665"/>
-          </a:xfrm>
-          <a:prstGeom prst="rect">
-            <a:avLst/>
-          </a:prstGeom>
-          <a:solidFill>
-            <a:schemeClr val="bg1"/>
-          </a:solidFill>
-          <a:ln w="63500">
-            <a:solidFill>
-              <a:schemeClr val="tx1"/>
-            </a:solidFill>
-          </a:ln>
-        </p:spPr>
-        <p:txBody>
-          <a:bodyPr wrap="none" rtlCol="0" anchor="ctr">
-            <a:spAutoFit/>
-          </a:bodyPr>
-          <a:lstStyle/>
-          <a:p>
-            <a:pPr marL="0" marR="0" lvl="0" indent="0" algn="l" defTabSz="914400" rtl="0" eaLnBrk="1" fontAlgn="auto" latinLnBrk="0" hangingPunct="1">
-              <a:lnSpc>
-                <a:spcPct val="100000"/>
-              </a:lnSpc>
-              <a:spcBef>
-                <a:spcPts val="0"/>
-              </a:spcBef>
-              <a:spcAft>
-                <a:spcPts val="0"/>
-              </a:spcAft>
-              <a:buClrTx/>
-              <a:buSzTx/>
-              <a:buFontTx/>
-              <a:buNone/>
-              <a:tabLst/>
-              <a:defRPr/>
-            </a:pPr>
-            <a:r>
-              <a:rPr kumimoji="0" lang="en-US" sz="2400" b="1" i="0" u="none" strike="noStrike" kern="1200" cap="none" spc="0" normalizeH="0" baseline="0" noProof="0" dirty="0">
-                <a:ln>
-                  <a:solidFill>
-                    <a:prstClr val="black"/>
-                  </a:solidFill>
-                </a:ln>
-                <a:solidFill>
-                  <a:prstClr val="black"/>
-                </a:solidFill>
-                <a:effectLst/>
-                <a:uLnTx/>
-                <a:uFillTx/>
-                <a:latin typeface="Helvetica Neue" panose="02000503000000020004" pitchFamily="2" charset="0"/>
-                <a:ea typeface="Helvetica Neue" panose="02000503000000020004" pitchFamily="2" charset="0"/>
-                <a:cs typeface="Helvetica Neue" panose="02000503000000020004" pitchFamily="2" charset="0"/>
-              </a:rPr>
-              <a:t>Carbon C, Black</a:t>
-            </a:r>
-          </a:p>
-        </p:txBody>
-      </p:sp>
-      <p:cxnSp>
-        <p:nvCxnSpPr>
-          <p:cNvPr id="12" name="Straight Arrow Connector 11">
-            <a:extLst>
-              <a:ext uri="{FF2B5EF4-FFF2-40B4-BE49-F238E27FC236}">
-                <a16:creationId xmlns:a16="http://schemas.microsoft.com/office/drawing/2014/main" id="{98F35A25-A480-BDA6-8936-F9B7C514F1B6}"/>
-              </a:ext>
-            </a:extLst>
-          </p:cNvPr>
-          <p:cNvCxnSpPr>
-            <a:cxnSpLocks/>
-          </p:cNvCxnSpPr>
-          <p:nvPr/>
-        </p:nvCxnSpPr>
-        <p:spPr>
-          <a:xfrm flipH="1">
-            <a:off x="9721183" y="1185333"/>
-            <a:ext cx="977297" cy="1613708"/>
-          </a:xfrm>
-          <a:prstGeom prst="straightConnector1">
-            <a:avLst/>
-          </a:prstGeom>
-          <a:ln w="76200">
-            <a:solidFill>
-              <a:schemeClr val="bg1"/>
-            </a:solidFill>
-            <a:tailEnd type="triangle"/>
-          </a:ln>
-        </p:spPr>
-        <p:style>
-          <a:lnRef idx="1">
-            <a:schemeClr val="accent1"/>
-          </a:lnRef>
-          <a:fillRef idx="0">
-            <a:schemeClr val="accent1"/>
-          </a:fillRef>
-          <a:effectRef idx="0">
-            <a:schemeClr val="accent1"/>
-          </a:effectRef>
-          <a:fontRef idx="minor">
-            <a:schemeClr val="tx1"/>
-          </a:fontRef>
-        </p:style>
-      </p:cxnSp>
-      <p:cxnSp>
-        <p:nvCxnSpPr>
-          <p:cNvPr id="30" name="Straight Arrow Connector 29">
-            <a:extLst>
-              <a:ext uri="{FF2B5EF4-FFF2-40B4-BE49-F238E27FC236}">
-                <a16:creationId xmlns:a16="http://schemas.microsoft.com/office/drawing/2014/main" id="{AC1A8B37-E523-D796-E99C-C5982ED35A8A}"/>
-              </a:ext>
-            </a:extLst>
-          </p:cNvPr>
-          <p:cNvCxnSpPr>
-            <a:cxnSpLocks/>
-          </p:cNvCxnSpPr>
-          <p:nvPr/>
-        </p:nvCxnSpPr>
-        <p:spPr>
-          <a:xfrm flipV="1">
-            <a:off x="11080750" y="4918075"/>
-            <a:ext cx="142875" cy="748950"/>
-          </a:xfrm>
-          <a:prstGeom prst="straightConnector1">
-            <a:avLst/>
-          </a:prstGeom>
-          <a:ln w="76200">
-            <a:solidFill>
-              <a:srgbClr val="FF0000"/>
-            </a:solidFill>
-            <a:tailEnd type="triangle"/>
-          </a:ln>
-        </p:spPr>
-        <p:style>
-          <a:lnRef idx="1">
-            <a:schemeClr val="accent1"/>
-          </a:lnRef>
-          <a:fillRef idx="0">
-            <a:schemeClr val="accent1"/>
-          </a:fillRef>
-          <a:effectRef idx="0">
-            <a:schemeClr val="accent1"/>
-          </a:effectRef>
-          <a:fontRef idx="minor">
-            <a:schemeClr val="tx1"/>
-          </a:fontRef>
-        </p:style>
-      </p:cxnSp>
-      <p:pic>
-        <p:nvPicPr>
-          <p:cNvPr id="3" name="Picture 4" descr="Testosterone and Diabetes - Role, Diabetes Link in Men &amp; Women">
-            <a:extLst>
-              <a:ext uri="{FF2B5EF4-FFF2-40B4-BE49-F238E27FC236}">
-                <a16:creationId xmlns:a16="http://schemas.microsoft.com/office/drawing/2014/main" id="{5866CE16-B018-B13A-69C5-20FDCBB8E663}"/>
-              </a:ext>
-            </a:extLst>
-          </p:cNvPr>
-          <p:cNvPicPr>
-            <a:picLocks noChangeAspect="1" noChangeArrowheads="1"/>
-          </p:cNvPicPr>
-          <p:nvPr/>
-        </p:nvPicPr>
-        <p:blipFill>
-          <a:blip r:embed="rId3">
-            <a:extLst>
-              <a:ext uri="{28A0092B-C50C-407E-A947-70E740481C1C}">
-                <a14:useLocalDpi xmlns:a14="http://schemas.microsoft.com/office/drawing/2010/main" val="0"/>
-              </a:ext>
-            </a:extLst>
-          </a:blip>
-          <a:srcRect/>
-          <a:stretch>
-            <a:fillRect/>
-          </a:stretch>
-        </p:blipFill>
-        <p:spPr bwMode="auto">
-          <a:xfrm>
-            <a:off x="201811" y="761574"/>
-            <a:ext cx="5682505" cy="3612718"/>
-          </a:xfrm>
-          <a:prstGeom prst="rect">
-            <a:avLst/>
-          </a:prstGeom>
-          <a:noFill/>
-          <a:extLst>
-            <a:ext uri="{909E8E84-426E-40DD-AFC4-6F175D3DCCD1}">
-              <a14:hiddenFill xmlns:a14="http://schemas.microsoft.com/office/drawing/2010/main">
-                <a:solidFill>
-                  <a:srgbClr val="FFFFFF"/>
-                </a:solidFill>
-              </a14:hiddenFill>
-            </a:ext>
-          </a:extLst>
-        </p:spPr>
-      </p:pic>
-    </p:spTree>
-    <p:extLst>
-      <p:ext uri="{BB962C8B-B14F-4D97-AF65-F5344CB8AC3E}">
-        <p14:creationId xmlns:p14="http://schemas.microsoft.com/office/powerpoint/2010/main" val="2593301601"/>
-      </p:ext>
-    </p:extLst>
-  </p:cSld>
-  <p:clrMapOvr>
-    <a:masterClrMapping/>
-  </p:clrMapOvr>
-</p:sld>
-</file>
-
-<file path=ppt/slides/slide4.xml><?xml version="1.0" encoding="utf-8"?>
-<p:sld xmlns:a="http://schemas.openxmlformats.org/drawingml/2006/main" xmlns:r="http://schemas.openxmlformats.org/officeDocument/2006/relationships" xmlns:p="http://schemas.openxmlformats.org/presentationml/2006/main">
-  <p:cSld>
-    <p:bg>
-      <p:bgPr>
-        <a:solidFill>
-          <a:srgbClr val="7030A0"/>
-        </a:solidFill>
-        <a:effectLst/>
-      </p:bgPr>
-    </p:bg>
-    <p:spTree>
-      <p:nvGrpSpPr>
-        <p:cNvPr id="1" name="">
-          <a:extLst>
-            <a:ext uri="{FF2B5EF4-FFF2-40B4-BE49-F238E27FC236}">
-              <a16:creationId xmlns:a16="http://schemas.microsoft.com/office/drawing/2014/main" id="{2E9A1F71-C5BD-4F4C-E241-BD8756E4CC68}"/>
-            </a:ext>
-          </a:extLst>
-        </p:cNvPr>
-        <p:cNvGrpSpPr/>
-        <p:nvPr/>
-      </p:nvGrpSpPr>
-      <p:grpSpPr>
-        <a:xfrm>
-          <a:off x="0" y="0"/>
-          <a:ext cx="0" cy="0"/>
-          <a:chOff x="0" y="0"/>
-          <a:chExt cx="0" cy="0"/>
-        </a:xfrm>
-      </p:grpSpPr>
-      <p:sp>
-        <p:nvSpPr>
-          <p:cNvPr id="5" name="Footer Placeholder 3">
-            <a:extLst>
-              <a:ext uri="{FF2B5EF4-FFF2-40B4-BE49-F238E27FC236}">
-                <a16:creationId xmlns:a16="http://schemas.microsoft.com/office/drawing/2014/main" id="{AFD16751-BDC1-80A5-167A-4E70B590830B}"/>
-              </a:ext>
-            </a:extLst>
-          </p:cNvPr>
-          <p:cNvSpPr txBox="1">
-            <a:spLocks/>
-          </p:cNvSpPr>
-          <p:nvPr/>
-        </p:nvSpPr>
-        <p:spPr>
-          <a:xfrm>
-            <a:off x="10924248" y="6388602"/>
-            <a:ext cx="1142262" cy="365125"/>
-          </a:xfrm>
-          <a:prstGeom prst="rect">
-            <a:avLst/>
-          </a:prstGeom>
-        </p:spPr>
-        <p:txBody>
-          <a:bodyPr vert="horz" lIns="91440" tIns="45720" rIns="91440" bIns="45720" rtlCol="0" anchor="ctr"/>
-          <a:lstStyle>
-            <a:defPPr>
-              <a:defRPr lang="en-US"/>
-            </a:defPPr>
-            <a:lvl1pPr marL="0" algn="ctr" defTabSz="914400" rtl="0" eaLnBrk="1" latinLnBrk="0" hangingPunct="1">
-              <a:defRPr sz="1200" kern="1200">
-                <a:solidFill>
-                  <a:schemeClr val="tx1">
-                    <a:tint val="75000"/>
-                  </a:schemeClr>
-                </a:solidFill>
-                <a:latin typeface="+mn-lt"/>
-                <a:ea typeface="+mn-ea"/>
-                <a:cs typeface="+mn-cs"/>
-              </a:defRPr>
-            </a:lvl1pPr>
-            <a:lvl2pPr marL="457200" algn="l" defTabSz="914400" rtl="0" eaLnBrk="1" latinLnBrk="0" hangingPunct="1">
-              <a:defRPr sz="1800" kern="1200">
-                <a:solidFill>
-                  <a:schemeClr val="tx1"/>
-                </a:solidFill>
-                <a:latin typeface="+mn-lt"/>
-                <a:ea typeface="+mn-ea"/>
-                <a:cs typeface="+mn-cs"/>
-              </a:defRPr>
-            </a:lvl2pPr>
-            <a:lvl3pPr marL="914400" algn="l" defTabSz="914400" rtl="0" eaLnBrk="1" latinLnBrk="0" hangingPunct="1">
-              <a:defRPr sz="1800" kern="1200">
-                <a:solidFill>
-                  <a:schemeClr val="tx1"/>
-                </a:solidFill>
-                <a:latin typeface="+mn-lt"/>
-                <a:ea typeface="+mn-ea"/>
-                <a:cs typeface="+mn-cs"/>
-              </a:defRPr>
-            </a:lvl3pPr>
-            <a:lvl4pPr marL="1371600" algn="l" defTabSz="914400" rtl="0" eaLnBrk="1" latinLnBrk="0" hangingPunct="1">
-              <a:defRPr sz="1800" kern="1200">
-                <a:solidFill>
-                  <a:schemeClr val="tx1"/>
-                </a:solidFill>
-                <a:latin typeface="+mn-lt"/>
-                <a:ea typeface="+mn-ea"/>
-                <a:cs typeface="+mn-cs"/>
-              </a:defRPr>
-            </a:lvl4pPr>
-            <a:lvl5pPr marL="1828800" algn="l" defTabSz="914400" rtl="0" eaLnBrk="1" latinLnBrk="0" hangingPunct="1">
-              <a:defRPr sz="1800" kern="1200">
-                <a:solidFill>
-                  <a:schemeClr val="tx1"/>
-                </a:solidFill>
-                <a:latin typeface="+mn-lt"/>
-                <a:ea typeface="+mn-ea"/>
-                <a:cs typeface="+mn-cs"/>
-              </a:defRPr>
-            </a:lvl5pPr>
-            <a:lvl6pPr marL="2286000" algn="l" defTabSz="914400" rtl="0" eaLnBrk="1" latinLnBrk="0" hangingPunct="1">
-              <a:defRPr sz="1800" kern="1200">
-                <a:solidFill>
-                  <a:schemeClr val="tx1"/>
-                </a:solidFill>
-                <a:latin typeface="+mn-lt"/>
-                <a:ea typeface="+mn-ea"/>
-                <a:cs typeface="+mn-cs"/>
-              </a:defRPr>
-            </a:lvl6pPr>
-            <a:lvl7pPr marL="2743200" algn="l" defTabSz="914400" rtl="0" eaLnBrk="1" latinLnBrk="0" hangingPunct="1">
-              <a:defRPr sz="1800" kern="1200">
-                <a:solidFill>
-                  <a:schemeClr val="tx1"/>
-                </a:solidFill>
-                <a:latin typeface="+mn-lt"/>
-                <a:ea typeface="+mn-ea"/>
-                <a:cs typeface="+mn-cs"/>
-              </a:defRPr>
-            </a:lvl7pPr>
-            <a:lvl8pPr marL="3200400" algn="l" defTabSz="914400" rtl="0" eaLnBrk="1" latinLnBrk="0" hangingPunct="1">
-              <a:defRPr sz="1800" kern="1200">
-                <a:solidFill>
-                  <a:schemeClr val="tx1"/>
-                </a:solidFill>
-                <a:latin typeface="+mn-lt"/>
-                <a:ea typeface="+mn-ea"/>
-                <a:cs typeface="+mn-cs"/>
-              </a:defRPr>
-            </a:lvl8pPr>
-            <a:lvl9pPr marL="3657600" algn="l" defTabSz="914400" rtl="0" eaLnBrk="1" latinLnBrk="0" hangingPunct="1">
-              <a:defRPr sz="1800" kern="1200">
-                <a:solidFill>
-                  <a:schemeClr val="tx1"/>
-                </a:solidFill>
-                <a:latin typeface="+mn-lt"/>
-                <a:ea typeface="+mn-ea"/>
-                <a:cs typeface="+mn-cs"/>
-              </a:defRPr>
-            </a:lvl9pPr>
-          </a:lstStyle>
-          <a:p>
-            <a:pPr marL="0" marR="0" lvl="0" indent="0" algn="ctr" defTabSz="914400" rtl="0" eaLnBrk="1" fontAlgn="auto" latinLnBrk="0" hangingPunct="1">
-              <a:lnSpc>
-                <a:spcPct val="100000"/>
-              </a:lnSpc>
-              <a:spcBef>
-                <a:spcPts val="0"/>
-              </a:spcBef>
-              <a:spcAft>
-                <a:spcPts val="0"/>
-              </a:spcAft>
-              <a:buClrTx/>
-              <a:buSzTx/>
-              <a:buFontTx/>
-              <a:buNone/>
-              <a:tabLst/>
-              <a:defRPr/>
-            </a:pPr>
-            <a:r>
-              <a:rPr kumimoji="0" lang="en-US" sz="1200" b="0" i="0" u="none" strike="noStrike" kern="1200" cap="none" spc="0" normalizeH="0" baseline="0" noProof="0" dirty="0">
-                <a:ln>
-                  <a:noFill/>
-                </a:ln>
-                <a:solidFill>
-                  <a:prstClr val="black">
-                    <a:tint val="75000"/>
-                  </a:prstClr>
-                </a:solidFill>
-                <a:effectLst/>
-                <a:uLnTx/>
-                <a:uFillTx/>
-                <a:latin typeface="Helvetica Neue" panose="02000503000000020004" pitchFamily="2" charset="0"/>
-                <a:ea typeface="Helvetica Neue" panose="02000503000000020004" pitchFamily="2" charset="0"/>
-                <a:cs typeface="Helvetica Neue" panose="02000503000000020004" pitchFamily="2" charset="0"/>
-              </a:rPr>
-              <a:t>J Mark Morris</a:t>
-            </a:r>
-          </a:p>
-        </p:txBody>
-      </p:sp>
-      <p:sp>
-        <p:nvSpPr>
-          <p:cNvPr id="19" name="Rectangle 18">
-            <a:extLst>
-              <a:ext uri="{FF2B5EF4-FFF2-40B4-BE49-F238E27FC236}">
-                <a16:creationId xmlns:a16="http://schemas.microsoft.com/office/drawing/2014/main" id="{16FB1C8D-3967-327A-9D97-FA6A9120452F}"/>
-              </a:ext>
-            </a:extLst>
-          </p:cNvPr>
-          <p:cNvSpPr/>
-          <p:nvPr/>
-        </p:nvSpPr>
-        <p:spPr>
-          <a:xfrm>
-            <a:off x="1290848" y="207788"/>
-            <a:ext cx="9610323" cy="523220"/>
-          </a:xfrm>
-          <a:prstGeom prst="rect">
-            <a:avLst/>
-          </a:prstGeom>
-          <a:noFill/>
-        </p:spPr>
-        <p:txBody>
-          <a:bodyPr wrap="none">
-            <a:spAutoFit/>
-          </a:bodyPr>
-          <a:lstStyle/>
-          <a:p>
-            <a:pPr marL="0" marR="0" lvl="0" indent="0" algn="ctr" defTabSz="914400" rtl="0" eaLnBrk="1" fontAlgn="auto" latinLnBrk="0" hangingPunct="1">
-              <a:lnSpc>
-                <a:spcPct val="100000"/>
-              </a:lnSpc>
-              <a:spcBef>
-                <a:spcPts val="0"/>
-              </a:spcBef>
-              <a:spcAft>
-                <a:spcPts val="0"/>
-              </a:spcAft>
-              <a:buClrTx/>
-              <a:buSzTx/>
-              <a:buFontTx/>
-              <a:buNone/>
-              <a:tabLst/>
-              <a:defRPr/>
-            </a:pPr>
-            <a:r>
-              <a:rPr kumimoji="0" lang="en-US" sz="2800" b="1" i="0" u="none" strike="noStrike" kern="1200" cap="none" spc="0" normalizeH="0" baseline="0" noProof="0" dirty="0">
-                <a:ln>
-                  <a:noFill/>
-                </a:ln>
-                <a:solidFill>
-                  <a:prstClr val="white"/>
-                </a:solidFill>
-                <a:effectLst/>
-                <a:uLnTx/>
-                <a:uFillTx/>
-                <a:latin typeface="Helvetica Neue" panose="02000503000000020004" pitchFamily="2" charset="0"/>
-                <a:ea typeface="Helvetica Neue" panose="02000503000000020004" pitchFamily="2" charset="0"/>
-                <a:cs typeface="Helvetica Neue" panose="02000503000000020004" pitchFamily="2" charset="0"/>
-              </a:rPr>
-              <a:t>Pyridine C</a:t>
-            </a:r>
-            <a:r>
-              <a:rPr kumimoji="0" lang="en-US" sz="2800" b="1" i="0" u="none" strike="noStrike" kern="1200" cap="none" spc="0" normalizeH="0" baseline="-25000" noProof="0" dirty="0">
-                <a:ln>
-                  <a:noFill/>
-                </a:ln>
-                <a:solidFill>
-                  <a:prstClr val="white"/>
-                </a:solidFill>
-                <a:effectLst/>
-                <a:uLnTx/>
-                <a:uFillTx/>
-                <a:latin typeface="Helvetica Neue" panose="02000503000000020004" pitchFamily="2" charset="0"/>
-                <a:ea typeface="Helvetica Neue" panose="02000503000000020004" pitchFamily="2" charset="0"/>
-                <a:cs typeface="Helvetica Neue" panose="02000503000000020004" pitchFamily="2" charset="0"/>
-              </a:rPr>
-              <a:t>5</a:t>
-            </a:r>
-            <a:r>
-              <a:rPr kumimoji="0" lang="en-US" sz="2800" b="1" i="0" u="none" strike="noStrike" kern="1200" cap="none" spc="0" normalizeH="0" baseline="0" noProof="0" dirty="0">
-                <a:ln>
-                  <a:noFill/>
-                </a:ln>
-                <a:solidFill>
-                  <a:prstClr val="white"/>
-                </a:solidFill>
-                <a:effectLst/>
-                <a:uLnTx/>
-                <a:uFillTx/>
-                <a:latin typeface="Helvetica Neue" panose="02000503000000020004" pitchFamily="2" charset="0"/>
-                <a:ea typeface="Helvetica Neue" panose="02000503000000020004" pitchFamily="2" charset="0"/>
-                <a:cs typeface="Helvetica Neue" panose="02000503000000020004" pitchFamily="2" charset="0"/>
-              </a:rPr>
-              <a:t>H</a:t>
-            </a:r>
-            <a:r>
-              <a:rPr kumimoji="0" lang="en-US" sz="2800" b="1" i="0" u="none" strike="noStrike" kern="1200" cap="none" spc="0" normalizeH="0" baseline="-25000" noProof="0" dirty="0">
-                <a:ln>
-                  <a:noFill/>
-                </a:ln>
-                <a:solidFill>
-                  <a:prstClr val="white"/>
-                </a:solidFill>
-                <a:effectLst/>
-                <a:uLnTx/>
-                <a:uFillTx/>
-                <a:latin typeface="Helvetica Neue" panose="02000503000000020004" pitchFamily="2" charset="0"/>
-                <a:ea typeface="Helvetica Neue" panose="02000503000000020004" pitchFamily="2" charset="0"/>
-                <a:cs typeface="Helvetica Neue" panose="02000503000000020004" pitchFamily="2" charset="0"/>
-              </a:rPr>
-              <a:t>5</a:t>
-            </a:r>
-            <a:r>
-              <a:rPr kumimoji="0" lang="en-US" sz="2800" b="1" i="0" u="none" strike="noStrike" kern="1200" cap="none" spc="0" normalizeH="0" baseline="0" noProof="0" dirty="0">
-                <a:ln>
-                  <a:noFill/>
-                </a:ln>
-                <a:solidFill>
-                  <a:prstClr val="white"/>
-                </a:solidFill>
-                <a:effectLst/>
-                <a:uLnTx/>
-                <a:uFillTx/>
-                <a:latin typeface="Helvetica Neue" panose="02000503000000020004" pitchFamily="2" charset="0"/>
-                <a:ea typeface="Helvetica Neue" panose="02000503000000020004" pitchFamily="2" charset="0"/>
-                <a:cs typeface="Helvetica Neue" panose="02000503000000020004" pitchFamily="2" charset="0"/>
-              </a:rPr>
-              <a:t>N is an assembly of 3348 Point Potentials </a:t>
-            </a:r>
-          </a:p>
-        </p:txBody>
-      </p:sp>
-      <p:sp>
-        <p:nvSpPr>
-          <p:cNvPr id="2" name="TextBox 1">
-            <a:extLst>
-              <a:ext uri="{FF2B5EF4-FFF2-40B4-BE49-F238E27FC236}">
-                <a16:creationId xmlns:a16="http://schemas.microsoft.com/office/drawing/2014/main" id="{1AFD95C8-FD16-1D5D-3B0F-CF12891B65E8}"/>
-              </a:ext>
-            </a:extLst>
-          </p:cNvPr>
-          <p:cNvSpPr txBox="1"/>
-          <p:nvPr/>
-        </p:nvSpPr>
-        <p:spPr>
-          <a:xfrm>
-            <a:off x="412586" y="922975"/>
-            <a:ext cx="11874641" cy="1938992"/>
-          </a:xfrm>
-          <a:prstGeom prst="rect">
-            <a:avLst/>
-          </a:prstGeom>
-          <a:noFill/>
-        </p:spPr>
-        <p:txBody>
-          <a:bodyPr wrap="square" rtlCol="0">
-            <a:spAutoFit/>
-          </a:bodyPr>
-          <a:lstStyle/>
-          <a:p>
-            <a:pPr marL="457200" marR="0" lvl="0" indent="-457200" algn="l" defTabSz="914400" rtl="0" eaLnBrk="1" fontAlgn="auto" latinLnBrk="0" hangingPunct="1">
-              <a:lnSpc>
-                <a:spcPct val="100000"/>
-              </a:lnSpc>
-              <a:spcBef>
-                <a:spcPts val="0"/>
-              </a:spcBef>
-              <a:spcAft>
-                <a:spcPts val="0"/>
-              </a:spcAft>
-              <a:buClrTx/>
-              <a:buSzTx/>
-              <a:buFont typeface="Arial" panose="020B0604020202020204" pitchFamily="34" charset="0"/>
-              <a:buChar char="•"/>
-              <a:tabLst/>
-              <a:defRPr/>
-            </a:pPr>
-            <a:r>
-              <a:rPr kumimoji="0" lang="en-US" sz="2400" b="0" i="0" u="none" strike="noStrike" kern="1200" cap="none" spc="0" normalizeH="0" baseline="0" noProof="0" dirty="0">
-                <a:ln>
-                  <a:noFill/>
-                </a:ln>
-                <a:solidFill>
-                  <a:prstClr val="white"/>
-                </a:solidFill>
-                <a:effectLst/>
-                <a:uLnTx/>
-                <a:uFillTx/>
-                <a:latin typeface="Helvetica Neue" panose="02000503000000020004" pitchFamily="2" charset="0"/>
-                <a:ea typeface="Helvetica Neue" panose="02000503000000020004" pitchFamily="2" charset="0"/>
-                <a:cs typeface="Helvetica Neue" panose="02000503000000020004" pitchFamily="2" charset="0"/>
-              </a:rPr>
-              <a:t>Pyridine is a basic heterocyclic organic compound with the formula C₅H₅N. </a:t>
-            </a:r>
-          </a:p>
-          <a:p>
-            <a:pPr marL="457200" marR="0" lvl="0" indent="-457200" algn="l" defTabSz="914400" rtl="0" eaLnBrk="1" fontAlgn="auto" latinLnBrk="0" hangingPunct="1">
-              <a:lnSpc>
-                <a:spcPct val="100000"/>
-              </a:lnSpc>
-              <a:spcBef>
-                <a:spcPts val="0"/>
-              </a:spcBef>
-              <a:spcAft>
-                <a:spcPts val="0"/>
-              </a:spcAft>
-              <a:buClrTx/>
-              <a:buSzTx/>
-              <a:buFont typeface="Arial" panose="020B0604020202020204" pitchFamily="34" charset="0"/>
-              <a:buChar char="•"/>
-              <a:tabLst/>
-              <a:defRPr/>
-            </a:pPr>
-            <a:r>
-              <a:rPr kumimoji="0" lang="en-US" sz="2400" b="0" i="0" u="none" strike="noStrike" kern="1200" cap="none" spc="0" normalizeH="0" baseline="0" noProof="0" dirty="0">
-                <a:ln>
-                  <a:noFill/>
-                </a:ln>
-                <a:solidFill>
-                  <a:prstClr val="white"/>
-                </a:solidFill>
-                <a:effectLst/>
-                <a:uLnTx/>
-                <a:uFillTx/>
-                <a:latin typeface="Helvetica Neue" panose="02000503000000020004" pitchFamily="2" charset="0"/>
-                <a:ea typeface="Helvetica Neue" panose="02000503000000020004" pitchFamily="2" charset="0"/>
-                <a:cs typeface="Helvetica Neue" panose="02000503000000020004" pitchFamily="2" charset="0"/>
-              </a:rPr>
-              <a:t>Pyridine forms the basis for the amino acids tryptophan and niacin. </a:t>
-            </a:r>
-          </a:p>
-          <a:p>
-            <a:pPr marL="457200" marR="0" lvl="0" indent="-457200" algn="l" defTabSz="914400" rtl="0" eaLnBrk="1" fontAlgn="auto" latinLnBrk="0" hangingPunct="1">
-              <a:lnSpc>
-                <a:spcPct val="100000"/>
-              </a:lnSpc>
-              <a:spcBef>
-                <a:spcPts val="0"/>
-              </a:spcBef>
-              <a:spcAft>
-                <a:spcPts val="0"/>
-              </a:spcAft>
-              <a:buClrTx/>
-              <a:buSzTx/>
-              <a:buFont typeface="Arial" panose="020B0604020202020204" pitchFamily="34" charset="0"/>
-              <a:buChar char="•"/>
-              <a:tabLst/>
-              <a:defRPr/>
-            </a:pPr>
-            <a:endParaRPr kumimoji="0" lang="en-US" sz="2400" b="0" i="0" u="none" strike="noStrike" kern="1200" cap="none" spc="0" normalizeH="0" baseline="0" noProof="0" dirty="0">
-              <a:ln>
-                <a:noFill/>
-              </a:ln>
-              <a:solidFill>
-                <a:prstClr val="white"/>
-              </a:solidFill>
-              <a:effectLst/>
-              <a:uLnTx/>
-              <a:uFillTx/>
-              <a:latin typeface="Helvetica Neue" panose="02000503000000020004" pitchFamily="2" charset="0"/>
-              <a:ea typeface="Helvetica Neue" panose="02000503000000020004" pitchFamily="2" charset="0"/>
-              <a:cs typeface="Helvetica Neue" panose="02000503000000020004" pitchFamily="2" charset="0"/>
-            </a:endParaRPr>
-          </a:p>
-          <a:p>
-            <a:pPr marL="457200" marR="0" lvl="0" indent="-457200" algn="l" defTabSz="914400" rtl="0" eaLnBrk="1" fontAlgn="auto" latinLnBrk="0" hangingPunct="1">
-              <a:lnSpc>
-                <a:spcPct val="100000"/>
-              </a:lnSpc>
-              <a:spcBef>
-                <a:spcPts val="0"/>
-              </a:spcBef>
-              <a:spcAft>
-                <a:spcPts val="0"/>
-              </a:spcAft>
-              <a:buClrTx/>
-              <a:buSzTx/>
-              <a:buFont typeface="Arial" panose="020B0604020202020204" pitchFamily="34" charset="0"/>
-              <a:buChar char="•"/>
-              <a:tabLst/>
-              <a:defRPr/>
-            </a:pPr>
-            <a:endParaRPr kumimoji="0" lang="en-US" sz="2400" b="0" i="0" u="none" strike="noStrike" kern="1200" cap="none" spc="0" normalizeH="0" baseline="0" noProof="0" dirty="0">
-              <a:ln>
-                <a:noFill/>
-              </a:ln>
-              <a:solidFill>
-                <a:prstClr val="white"/>
-              </a:solidFill>
-              <a:effectLst/>
-              <a:uLnTx/>
-              <a:uFillTx/>
-              <a:latin typeface="Helvetica Neue" panose="02000503000000020004" pitchFamily="2" charset="0"/>
-              <a:ea typeface="Helvetica Neue" panose="02000503000000020004" pitchFamily="2" charset="0"/>
-              <a:cs typeface="Helvetica Neue" panose="02000503000000020004" pitchFamily="2" charset="0"/>
-            </a:endParaRPr>
-          </a:p>
-          <a:p>
-            <a:pPr marL="457200" marR="0" lvl="0" indent="-457200" algn="l" defTabSz="914400" rtl="0" eaLnBrk="1" fontAlgn="auto" latinLnBrk="0" hangingPunct="1">
-              <a:lnSpc>
-                <a:spcPct val="100000"/>
-              </a:lnSpc>
-              <a:spcBef>
-                <a:spcPts val="0"/>
-              </a:spcBef>
-              <a:spcAft>
-                <a:spcPts val="0"/>
-              </a:spcAft>
-              <a:buClrTx/>
-              <a:buSzTx/>
-              <a:buFont typeface="Arial" panose="020B0604020202020204" pitchFamily="34" charset="0"/>
-              <a:buChar char="•"/>
-              <a:tabLst/>
-              <a:defRPr/>
-            </a:pPr>
-            <a:endParaRPr kumimoji="0" lang="en-US" sz="2400" b="0" i="0" u="none" strike="noStrike" kern="1200" cap="none" spc="0" normalizeH="0" baseline="0" noProof="0" dirty="0">
-              <a:ln>
-                <a:noFill/>
-              </a:ln>
-              <a:solidFill>
-                <a:prstClr val="white"/>
-              </a:solidFill>
-              <a:effectLst/>
-              <a:uLnTx/>
-              <a:uFillTx/>
-              <a:latin typeface="Helvetica Neue" panose="02000503000000020004" pitchFamily="2" charset="0"/>
-              <a:ea typeface="Helvetica Neue" panose="02000503000000020004" pitchFamily="2" charset="0"/>
-              <a:cs typeface="Helvetica Neue" panose="02000503000000020004" pitchFamily="2" charset="0"/>
-            </a:endParaRPr>
-          </a:p>
-        </p:txBody>
-      </p:sp>
-      <p:pic>
-        <p:nvPicPr>
-          <p:cNvPr id="4" name="Picture 3">
-            <a:extLst>
-              <a:ext uri="{FF2B5EF4-FFF2-40B4-BE49-F238E27FC236}">
-                <a16:creationId xmlns:a16="http://schemas.microsoft.com/office/drawing/2014/main" id="{2CEA214A-CCEB-32C9-6F9B-73E5CE1FE8D3}"/>
-              </a:ext>
-            </a:extLst>
-          </p:cNvPr>
-          <p:cNvPicPr>
-            <a:picLocks noChangeAspect="1"/>
-          </p:cNvPicPr>
-          <p:nvPr/>
-        </p:nvPicPr>
-        <p:blipFill>
-          <a:blip r:embed="rId2"/>
-          <a:stretch>
-            <a:fillRect/>
-          </a:stretch>
-        </p:blipFill>
-        <p:spPr>
-          <a:xfrm>
-            <a:off x="1164724" y="2154620"/>
-            <a:ext cx="10153024" cy="4149899"/>
-          </a:xfrm>
-          <a:prstGeom prst="rect">
-            <a:avLst/>
-          </a:prstGeom>
-        </p:spPr>
-      </p:pic>
-    </p:spTree>
-    <p:extLst>
-      <p:ext uri="{BB962C8B-B14F-4D97-AF65-F5344CB8AC3E}">
-        <p14:creationId xmlns:p14="http://schemas.microsoft.com/office/powerpoint/2010/main" val="1783847399"/>
-      </p:ext>
-    </p:extLst>
-  </p:cSld>
-  <p:clrMapOvr>
-    <a:masterClrMapping/>
-  </p:clrMapOvr>
-</p:sld>
-</file>
-
-<file path=ppt/slides/slide5.xml><?xml version="1.0" encoding="utf-8"?>
-<p:sld xmlns:a="http://schemas.openxmlformats.org/drawingml/2006/main" xmlns:r="http://schemas.openxmlformats.org/officeDocument/2006/relationships" xmlns:p="http://schemas.openxmlformats.org/presentationml/2006/main">
-  <p:cSld>
-    <p:bg>
-      <p:bgPr>
-        <a:solidFill>
-          <a:srgbClr val="7030A0"/>
-        </a:solidFill>
-        <a:effectLst/>
-      </p:bgPr>
-    </p:bg>
-    <p:spTree>
-      <p:nvGrpSpPr>
-        <p:cNvPr id="1" name="">
-          <a:extLst>
-            <a:ext uri="{FF2B5EF4-FFF2-40B4-BE49-F238E27FC236}">
-              <a16:creationId xmlns:a16="http://schemas.microsoft.com/office/drawing/2014/main" id="{BCDA3861-4FE9-86FE-F0C3-063365F389FD}"/>
-            </a:ext>
-          </a:extLst>
-        </p:cNvPr>
-        <p:cNvGrpSpPr/>
-        <p:nvPr/>
-      </p:nvGrpSpPr>
-      <p:grpSpPr>
-        <a:xfrm>
-          <a:off x="0" y="0"/>
-          <a:ext cx="0" cy="0"/>
-          <a:chOff x="0" y="0"/>
-          <a:chExt cx="0" cy="0"/>
-        </a:xfrm>
-      </p:grpSpPr>
-      <p:sp>
-        <p:nvSpPr>
-          <p:cNvPr id="5" name="Footer Placeholder 3">
-            <a:extLst>
-              <a:ext uri="{FF2B5EF4-FFF2-40B4-BE49-F238E27FC236}">
-                <a16:creationId xmlns:a16="http://schemas.microsoft.com/office/drawing/2014/main" id="{A5E4DEEF-0EFF-52E2-B792-26216E48BC3B}"/>
-              </a:ext>
-            </a:extLst>
-          </p:cNvPr>
-          <p:cNvSpPr txBox="1">
-            <a:spLocks/>
-          </p:cNvSpPr>
-          <p:nvPr/>
-        </p:nvSpPr>
-        <p:spPr>
-          <a:xfrm>
-            <a:off x="10864049" y="6492875"/>
-            <a:ext cx="1142262" cy="365125"/>
-          </a:xfrm>
-          <a:prstGeom prst="rect">
-            <a:avLst/>
-          </a:prstGeom>
-        </p:spPr>
-        <p:txBody>
-          <a:bodyPr vert="horz" lIns="91440" tIns="45720" rIns="91440" bIns="45720" rtlCol="0" anchor="ctr"/>
-          <a:lstStyle>
-            <a:defPPr>
-              <a:defRPr lang="en-US"/>
-            </a:defPPr>
-            <a:lvl1pPr marL="0" algn="ctr" defTabSz="914400" rtl="0" eaLnBrk="1" latinLnBrk="0" hangingPunct="1">
-              <a:defRPr sz="1200" kern="1200">
-                <a:solidFill>
-                  <a:schemeClr val="tx1">
-                    <a:tint val="75000"/>
-                  </a:schemeClr>
-                </a:solidFill>
-                <a:latin typeface="+mn-lt"/>
-                <a:ea typeface="+mn-ea"/>
-                <a:cs typeface="+mn-cs"/>
-              </a:defRPr>
-            </a:lvl1pPr>
-            <a:lvl2pPr marL="457200" algn="l" defTabSz="914400" rtl="0" eaLnBrk="1" latinLnBrk="0" hangingPunct="1">
-              <a:defRPr sz="1800" kern="1200">
-                <a:solidFill>
-                  <a:schemeClr val="tx1"/>
-                </a:solidFill>
-                <a:latin typeface="+mn-lt"/>
-                <a:ea typeface="+mn-ea"/>
-                <a:cs typeface="+mn-cs"/>
-              </a:defRPr>
-            </a:lvl2pPr>
-            <a:lvl3pPr marL="914400" algn="l" defTabSz="914400" rtl="0" eaLnBrk="1" latinLnBrk="0" hangingPunct="1">
-              <a:defRPr sz="1800" kern="1200">
-                <a:solidFill>
-                  <a:schemeClr val="tx1"/>
-                </a:solidFill>
-                <a:latin typeface="+mn-lt"/>
-                <a:ea typeface="+mn-ea"/>
-                <a:cs typeface="+mn-cs"/>
-              </a:defRPr>
-            </a:lvl3pPr>
-            <a:lvl4pPr marL="1371600" algn="l" defTabSz="914400" rtl="0" eaLnBrk="1" latinLnBrk="0" hangingPunct="1">
-              <a:defRPr sz="1800" kern="1200">
-                <a:solidFill>
-                  <a:schemeClr val="tx1"/>
-                </a:solidFill>
-                <a:latin typeface="+mn-lt"/>
-                <a:ea typeface="+mn-ea"/>
-                <a:cs typeface="+mn-cs"/>
-              </a:defRPr>
-            </a:lvl4pPr>
-            <a:lvl5pPr marL="1828800" algn="l" defTabSz="914400" rtl="0" eaLnBrk="1" latinLnBrk="0" hangingPunct="1">
-              <a:defRPr sz="1800" kern="1200">
-                <a:solidFill>
-                  <a:schemeClr val="tx1"/>
-                </a:solidFill>
-                <a:latin typeface="+mn-lt"/>
-                <a:ea typeface="+mn-ea"/>
-                <a:cs typeface="+mn-cs"/>
-              </a:defRPr>
-            </a:lvl5pPr>
-            <a:lvl6pPr marL="2286000" algn="l" defTabSz="914400" rtl="0" eaLnBrk="1" latinLnBrk="0" hangingPunct="1">
-              <a:defRPr sz="1800" kern="1200">
-                <a:solidFill>
-                  <a:schemeClr val="tx1"/>
-                </a:solidFill>
-                <a:latin typeface="+mn-lt"/>
-                <a:ea typeface="+mn-ea"/>
-                <a:cs typeface="+mn-cs"/>
-              </a:defRPr>
-            </a:lvl6pPr>
-            <a:lvl7pPr marL="2743200" algn="l" defTabSz="914400" rtl="0" eaLnBrk="1" latinLnBrk="0" hangingPunct="1">
-              <a:defRPr sz="1800" kern="1200">
-                <a:solidFill>
-                  <a:schemeClr val="tx1"/>
-                </a:solidFill>
-                <a:latin typeface="+mn-lt"/>
-                <a:ea typeface="+mn-ea"/>
-                <a:cs typeface="+mn-cs"/>
-              </a:defRPr>
-            </a:lvl7pPr>
-            <a:lvl8pPr marL="3200400" algn="l" defTabSz="914400" rtl="0" eaLnBrk="1" latinLnBrk="0" hangingPunct="1">
-              <a:defRPr sz="1800" kern="1200">
-                <a:solidFill>
-                  <a:schemeClr val="tx1"/>
-                </a:solidFill>
-                <a:latin typeface="+mn-lt"/>
-                <a:ea typeface="+mn-ea"/>
-                <a:cs typeface="+mn-cs"/>
-              </a:defRPr>
-            </a:lvl8pPr>
-            <a:lvl9pPr marL="3657600" algn="l" defTabSz="914400" rtl="0" eaLnBrk="1" latinLnBrk="0" hangingPunct="1">
-              <a:defRPr sz="1800" kern="1200">
-                <a:solidFill>
-                  <a:schemeClr val="tx1"/>
-                </a:solidFill>
-                <a:latin typeface="+mn-lt"/>
-                <a:ea typeface="+mn-ea"/>
-                <a:cs typeface="+mn-cs"/>
-              </a:defRPr>
-            </a:lvl9pPr>
-          </a:lstStyle>
-          <a:p>
-            <a:pPr marL="0" marR="0" lvl="0" indent="0" algn="ctr" defTabSz="914400" rtl="0" eaLnBrk="1" fontAlgn="auto" latinLnBrk="0" hangingPunct="1">
-              <a:lnSpc>
-                <a:spcPct val="100000"/>
-              </a:lnSpc>
-              <a:spcBef>
-                <a:spcPts val="0"/>
-              </a:spcBef>
-              <a:spcAft>
-                <a:spcPts val="0"/>
-              </a:spcAft>
-              <a:buClrTx/>
-              <a:buSzTx/>
-              <a:buFontTx/>
-              <a:buNone/>
-              <a:tabLst/>
-              <a:defRPr/>
-            </a:pPr>
-            <a:r>
-              <a:rPr kumimoji="0" lang="en-US" sz="1200" b="0" i="0" u="none" strike="noStrike" kern="1200" cap="none" spc="0" normalizeH="0" baseline="0" noProof="0" dirty="0">
-                <a:ln>
-                  <a:noFill/>
-                </a:ln>
-                <a:solidFill>
-                  <a:prstClr val="black">
-                    <a:tint val="75000"/>
-                  </a:prstClr>
-                </a:solidFill>
-                <a:effectLst/>
-                <a:uLnTx/>
-                <a:uFillTx/>
-                <a:latin typeface="Helvetica Neue" panose="02000503000000020004" pitchFamily="2" charset="0"/>
-                <a:ea typeface="Helvetica Neue" panose="02000503000000020004" pitchFamily="2" charset="0"/>
-                <a:cs typeface="Helvetica Neue" panose="02000503000000020004" pitchFamily="2" charset="0"/>
-              </a:rPr>
-              <a:t>J Mark Morris</a:t>
-            </a:r>
-          </a:p>
-        </p:txBody>
-      </p:sp>
-      <p:sp>
-        <p:nvSpPr>
-          <p:cNvPr id="19" name="Rectangle 18">
-            <a:extLst>
-              <a:ext uri="{FF2B5EF4-FFF2-40B4-BE49-F238E27FC236}">
-                <a16:creationId xmlns:a16="http://schemas.microsoft.com/office/drawing/2014/main" id="{0211C0BE-6F40-CD61-1A26-331851C6FBC0}"/>
-              </a:ext>
-            </a:extLst>
-          </p:cNvPr>
-          <p:cNvSpPr/>
-          <p:nvPr/>
-        </p:nvSpPr>
-        <p:spPr>
-          <a:xfrm>
-            <a:off x="18117" y="207788"/>
-            <a:ext cx="12155828" cy="523220"/>
-          </a:xfrm>
-          <a:prstGeom prst="rect">
-            <a:avLst/>
-          </a:prstGeom>
-          <a:noFill/>
-        </p:spPr>
-        <p:txBody>
-          <a:bodyPr wrap="none">
-            <a:spAutoFit/>
-          </a:bodyPr>
-          <a:lstStyle/>
-          <a:p>
-            <a:pPr marL="0" marR="0" lvl="0" indent="0" algn="ctr" defTabSz="914400" rtl="0" eaLnBrk="1" fontAlgn="auto" latinLnBrk="0" hangingPunct="1">
-              <a:lnSpc>
-                <a:spcPct val="100000"/>
-              </a:lnSpc>
-              <a:spcBef>
-                <a:spcPts val="0"/>
-              </a:spcBef>
-              <a:spcAft>
-                <a:spcPts val="0"/>
-              </a:spcAft>
-              <a:buClrTx/>
-              <a:buSzTx/>
-              <a:buFontTx/>
-              <a:buNone/>
-              <a:tabLst/>
-              <a:defRPr/>
-            </a:pPr>
-            <a:r>
-              <a:rPr kumimoji="0" lang="en-US" sz="2800" b="1" i="0" u="none" strike="noStrike" kern="1200" cap="none" spc="0" normalizeH="0" baseline="0" noProof="0" dirty="0">
-                <a:ln>
-                  <a:noFill/>
-                </a:ln>
-                <a:solidFill>
-                  <a:prstClr val="white"/>
-                </a:solidFill>
-                <a:effectLst/>
-                <a:uLnTx/>
-                <a:uFillTx/>
-                <a:latin typeface="Helvetica Neue" panose="02000503000000020004" pitchFamily="2" charset="0"/>
-                <a:ea typeface="Helvetica Neue" panose="02000503000000020004" pitchFamily="2" charset="0"/>
-                <a:cs typeface="Helvetica Neue" panose="02000503000000020004" pitchFamily="2" charset="0"/>
-              </a:rPr>
-              <a:t>RNA Molecular Assemblies Range from 4728 to 6372 Point Potentials </a:t>
-            </a:r>
-          </a:p>
-        </p:txBody>
-      </p:sp>
-      <p:sp>
-        <p:nvSpPr>
-          <p:cNvPr id="2" name="TextBox 1">
-            <a:extLst>
-              <a:ext uri="{FF2B5EF4-FFF2-40B4-BE49-F238E27FC236}">
-                <a16:creationId xmlns:a16="http://schemas.microsoft.com/office/drawing/2014/main" id="{FBB0DF08-2107-122C-3F4F-9D80D91823FB}"/>
-              </a:ext>
-            </a:extLst>
-          </p:cNvPr>
-          <p:cNvSpPr txBox="1"/>
-          <p:nvPr/>
-        </p:nvSpPr>
-        <p:spPr>
-          <a:xfrm>
-            <a:off x="496669" y="751344"/>
-            <a:ext cx="11569841" cy="2677656"/>
-          </a:xfrm>
-          <a:prstGeom prst="rect">
-            <a:avLst/>
-          </a:prstGeom>
-          <a:noFill/>
-        </p:spPr>
-        <p:txBody>
-          <a:bodyPr wrap="square" rtlCol="0">
-            <a:spAutoFit/>
-          </a:bodyPr>
-          <a:lstStyle/>
-          <a:p>
-            <a:pPr marL="457200" marR="0" lvl="0" indent="-457200" algn="l" defTabSz="914400" rtl="0" eaLnBrk="1" fontAlgn="auto" latinLnBrk="0" hangingPunct="1">
-              <a:lnSpc>
-                <a:spcPct val="100000"/>
-              </a:lnSpc>
-              <a:spcBef>
-                <a:spcPts val="0"/>
-              </a:spcBef>
-              <a:spcAft>
-                <a:spcPts val="0"/>
-              </a:spcAft>
-              <a:buClrTx/>
-              <a:buSzTx/>
-              <a:buFont typeface="Arial" panose="020B0604020202020204" pitchFamily="34" charset="0"/>
-              <a:buChar char="•"/>
-              <a:tabLst/>
-              <a:defRPr/>
-            </a:pPr>
-            <a:r>
-              <a:rPr kumimoji="0" lang="en-US" sz="2400" b="0" i="0" u="none" strike="noStrike" kern="1200" cap="none" spc="0" normalizeH="0" baseline="0" noProof="0" dirty="0">
-                <a:ln>
-                  <a:noFill/>
-                </a:ln>
-                <a:solidFill>
-                  <a:prstClr val="white"/>
-                </a:solidFill>
-                <a:effectLst/>
-                <a:uLnTx/>
-                <a:uFillTx/>
-                <a:latin typeface="Helvetica Neue" panose="02000503000000020004" pitchFamily="2" charset="0"/>
-                <a:ea typeface="Helvetica Neue" panose="02000503000000020004" pitchFamily="2" charset="0"/>
-                <a:cs typeface="Helvetica Neue" panose="02000503000000020004" pitchFamily="2" charset="0"/>
-              </a:rPr>
-              <a:t>RNA (ribonucleic acid) molecules are essential for various biological functions, including the processes of protein synthesis and gene regulation. </a:t>
-            </a:r>
-          </a:p>
-          <a:p>
-            <a:pPr marL="457200" marR="0" lvl="0" indent="-457200" algn="l" defTabSz="914400" rtl="0" eaLnBrk="1" fontAlgn="auto" latinLnBrk="0" hangingPunct="1">
-              <a:lnSpc>
-                <a:spcPct val="100000"/>
-              </a:lnSpc>
-              <a:spcBef>
-                <a:spcPts val="0"/>
-              </a:spcBef>
-              <a:spcAft>
-                <a:spcPts val="0"/>
-              </a:spcAft>
-              <a:buClrTx/>
-              <a:buSzTx/>
-              <a:buFont typeface="Arial" panose="020B0604020202020204" pitchFamily="34" charset="0"/>
-              <a:buChar char="•"/>
-              <a:tabLst/>
-              <a:defRPr/>
-            </a:pPr>
-            <a:r>
-              <a:rPr kumimoji="0" lang="en-US" sz="2400" b="0" i="0" u="none" strike="noStrike" kern="1200" cap="none" spc="0" normalizeH="0" baseline="0" noProof="0" dirty="0">
-                <a:ln>
-                  <a:noFill/>
-                </a:ln>
-                <a:solidFill>
-                  <a:prstClr val="white"/>
-                </a:solidFill>
-                <a:effectLst/>
-                <a:uLnTx/>
-                <a:uFillTx/>
-                <a:latin typeface="Helvetica Neue" panose="02000503000000020004" pitchFamily="2" charset="0"/>
-                <a:ea typeface="Helvetica Neue" panose="02000503000000020004" pitchFamily="2" charset="0"/>
-                <a:cs typeface="Helvetica Neue" panose="02000503000000020004" pitchFamily="2" charset="0"/>
-              </a:rPr>
-              <a:t>Structure: RNA is typically single-stranded, whereas DNA is double-stranded. </a:t>
-            </a:r>
-          </a:p>
-          <a:p>
-            <a:pPr marL="457200" marR="0" lvl="0" indent="-457200" algn="l" defTabSz="914400" rtl="0" eaLnBrk="1" fontAlgn="auto" latinLnBrk="0" hangingPunct="1">
-              <a:lnSpc>
-                <a:spcPct val="100000"/>
-              </a:lnSpc>
-              <a:spcBef>
-                <a:spcPts val="0"/>
-              </a:spcBef>
-              <a:spcAft>
-                <a:spcPts val="0"/>
-              </a:spcAft>
-              <a:buClrTx/>
-              <a:buSzTx/>
-              <a:buFont typeface="Arial" panose="020B0604020202020204" pitchFamily="34" charset="0"/>
-              <a:buChar char="•"/>
-              <a:tabLst/>
-              <a:defRPr/>
-            </a:pPr>
-            <a:r>
-              <a:rPr kumimoji="0" lang="en-US" sz="2400" b="0" i="0" u="none" strike="noStrike" kern="1200" cap="none" spc="0" normalizeH="0" baseline="0" noProof="0" dirty="0">
-                <a:ln>
-                  <a:noFill/>
-                </a:ln>
-                <a:solidFill>
-                  <a:prstClr val="white"/>
-                </a:solidFill>
-                <a:effectLst/>
-                <a:uLnTx/>
-                <a:uFillTx/>
-                <a:latin typeface="Helvetica Neue" panose="02000503000000020004" pitchFamily="2" charset="0"/>
-                <a:ea typeface="Helvetica Neue" panose="02000503000000020004" pitchFamily="2" charset="0"/>
-                <a:cs typeface="Helvetica Neue" panose="02000503000000020004" pitchFamily="2" charset="0"/>
-              </a:rPr>
-              <a:t>RNA has a backbone made of ribose sugar, while DNA has deoxyribose.</a:t>
-            </a:r>
-          </a:p>
-          <a:p>
-            <a:pPr marL="0" marR="0" lvl="0" indent="0" algn="l" defTabSz="914400" rtl="0" eaLnBrk="1" fontAlgn="auto" latinLnBrk="0" hangingPunct="1">
-              <a:lnSpc>
-                <a:spcPct val="100000"/>
-              </a:lnSpc>
-              <a:spcBef>
-                <a:spcPts val="0"/>
-              </a:spcBef>
-              <a:spcAft>
-                <a:spcPts val="0"/>
-              </a:spcAft>
-              <a:buClrTx/>
-              <a:buSzTx/>
-              <a:buFontTx/>
-              <a:buNone/>
-              <a:tabLst/>
-              <a:defRPr/>
-            </a:pPr>
-            <a:endParaRPr kumimoji="0" lang="en-US" sz="2400" b="0" i="0" u="none" strike="noStrike" kern="1200" cap="none" spc="0" normalizeH="0" baseline="0" noProof="0" dirty="0">
-              <a:ln>
-                <a:noFill/>
-              </a:ln>
-              <a:solidFill>
-                <a:prstClr val="white"/>
-              </a:solidFill>
-              <a:effectLst/>
-              <a:uLnTx/>
-              <a:uFillTx/>
-              <a:latin typeface="Helvetica Neue" panose="02000503000000020004" pitchFamily="2" charset="0"/>
-              <a:ea typeface="Helvetica Neue" panose="02000503000000020004" pitchFamily="2" charset="0"/>
-              <a:cs typeface="Helvetica Neue" panose="02000503000000020004" pitchFamily="2" charset="0"/>
-            </a:endParaRPr>
-          </a:p>
-          <a:p>
-            <a:pPr marL="457200" marR="0" lvl="0" indent="-457200" algn="l" defTabSz="914400" rtl="0" eaLnBrk="1" fontAlgn="auto" latinLnBrk="0" hangingPunct="1">
-              <a:lnSpc>
-                <a:spcPct val="100000"/>
-              </a:lnSpc>
-              <a:spcBef>
-                <a:spcPts val="0"/>
-              </a:spcBef>
-              <a:spcAft>
-                <a:spcPts val="0"/>
-              </a:spcAft>
-              <a:buClrTx/>
-              <a:buSzTx/>
-              <a:buFont typeface="Arial" panose="020B0604020202020204" pitchFamily="34" charset="0"/>
-              <a:buChar char="•"/>
-              <a:tabLst/>
-              <a:defRPr/>
-            </a:pPr>
-            <a:endParaRPr kumimoji="0" lang="en-US" sz="2400" b="0" i="0" u="none" strike="noStrike" kern="1200" cap="none" spc="0" normalizeH="0" baseline="0" noProof="0" dirty="0">
-              <a:ln>
-                <a:noFill/>
-              </a:ln>
-              <a:solidFill>
-                <a:prstClr val="white"/>
-              </a:solidFill>
-              <a:effectLst/>
-              <a:uLnTx/>
-              <a:uFillTx/>
-              <a:latin typeface="Helvetica Neue" panose="02000503000000020004" pitchFamily="2" charset="0"/>
-              <a:ea typeface="Helvetica Neue" panose="02000503000000020004" pitchFamily="2" charset="0"/>
-              <a:cs typeface="Helvetica Neue" panose="02000503000000020004" pitchFamily="2" charset="0"/>
-            </a:endParaRPr>
-          </a:p>
-          <a:p>
-            <a:pPr marL="457200" marR="0" lvl="0" indent="-457200" algn="l" defTabSz="914400" rtl="0" eaLnBrk="1" fontAlgn="auto" latinLnBrk="0" hangingPunct="1">
-              <a:lnSpc>
-                <a:spcPct val="100000"/>
-              </a:lnSpc>
-              <a:spcBef>
-                <a:spcPts val="0"/>
-              </a:spcBef>
-              <a:spcAft>
-                <a:spcPts val="0"/>
-              </a:spcAft>
-              <a:buClrTx/>
-              <a:buSzTx/>
-              <a:buFont typeface="Arial" panose="020B0604020202020204" pitchFamily="34" charset="0"/>
-              <a:buChar char="•"/>
-              <a:tabLst/>
-              <a:defRPr/>
-            </a:pPr>
-            <a:endParaRPr kumimoji="0" lang="en-US" sz="2400" b="0" i="0" u="none" strike="noStrike" kern="1200" cap="none" spc="0" normalizeH="0" baseline="0" noProof="0" dirty="0">
-              <a:ln>
-                <a:noFill/>
-              </a:ln>
-              <a:solidFill>
-                <a:prstClr val="white"/>
-              </a:solidFill>
-              <a:effectLst/>
-              <a:uLnTx/>
-              <a:uFillTx/>
-              <a:latin typeface="Helvetica Neue" panose="02000503000000020004" pitchFamily="2" charset="0"/>
-              <a:ea typeface="Helvetica Neue" panose="02000503000000020004" pitchFamily="2" charset="0"/>
-              <a:cs typeface="Helvetica Neue" panose="02000503000000020004" pitchFamily="2" charset="0"/>
-            </a:endParaRPr>
-          </a:p>
-        </p:txBody>
-      </p:sp>
-      <p:pic>
-        <p:nvPicPr>
-          <p:cNvPr id="6" name="Picture 5">
-            <a:extLst>
-              <a:ext uri="{FF2B5EF4-FFF2-40B4-BE49-F238E27FC236}">
-                <a16:creationId xmlns:a16="http://schemas.microsoft.com/office/drawing/2014/main" id="{0C8B13EF-A2CF-EB1F-6D45-ABABB115EAF9}"/>
-              </a:ext>
-            </a:extLst>
-          </p:cNvPr>
-          <p:cNvPicPr>
-            <a:picLocks noChangeAspect="1"/>
-          </p:cNvPicPr>
-          <p:nvPr/>
-        </p:nvPicPr>
-        <p:blipFill>
-          <a:blip r:embed="rId2"/>
-          <a:stretch>
-            <a:fillRect/>
-          </a:stretch>
-        </p:blipFill>
-        <p:spPr>
-          <a:xfrm>
-            <a:off x="811923" y="2470249"/>
-            <a:ext cx="10623257" cy="4022626"/>
-          </a:xfrm>
-          <a:prstGeom prst="rect">
-            <a:avLst/>
-          </a:prstGeom>
-        </p:spPr>
-      </p:pic>
-    </p:spTree>
-    <p:extLst>
-      <p:ext uri="{BB962C8B-B14F-4D97-AF65-F5344CB8AC3E}">
-        <p14:creationId xmlns:p14="http://schemas.microsoft.com/office/powerpoint/2010/main" val="2951717672"/>
-      </p:ext>
-    </p:extLst>
-  </p:cSld>
-  <p:clrMapOvr>
-    <a:masterClrMapping/>
-  </p:clrMapOvr>
-</p:sld>
-</file>
-
-<file path=ppt/slides/slide6.xml><?xml version="1.0" encoding="utf-8"?>
-<p:sld xmlns:a="http://schemas.openxmlformats.org/drawingml/2006/main" xmlns:r="http://schemas.openxmlformats.org/officeDocument/2006/relationships" xmlns:p="http://schemas.openxmlformats.org/presentationml/2006/main">
-  <p:cSld>
-    <p:bg>
-      <p:bgPr>
-        <a:solidFill>
-          <a:srgbClr val="7030A0"/>
-        </a:solidFill>
-        <a:effectLst/>
-      </p:bgPr>
-    </p:bg>
-    <p:spTree>
-      <p:nvGrpSpPr>
-        <p:cNvPr id="1" name="">
-          <a:extLst>
-            <a:ext uri="{FF2B5EF4-FFF2-40B4-BE49-F238E27FC236}">
-              <a16:creationId xmlns:a16="http://schemas.microsoft.com/office/drawing/2014/main" id="{A95AD505-148F-7C13-EC73-22518E14F4FC}"/>
-            </a:ext>
-          </a:extLst>
-        </p:cNvPr>
-        <p:cNvGrpSpPr/>
-        <p:nvPr/>
-      </p:nvGrpSpPr>
-      <p:grpSpPr>
-        <a:xfrm>
-          <a:off x="0" y="0"/>
-          <a:ext cx="0" cy="0"/>
-          <a:chOff x="0" y="0"/>
-          <a:chExt cx="0" cy="0"/>
-        </a:xfrm>
-      </p:grpSpPr>
-      <p:sp>
-        <p:nvSpPr>
-          <p:cNvPr id="2" name="TextBox 1">
-            <a:extLst>
-              <a:ext uri="{FF2B5EF4-FFF2-40B4-BE49-F238E27FC236}">
-                <a16:creationId xmlns:a16="http://schemas.microsoft.com/office/drawing/2014/main" id="{B3C53938-22FE-22BD-E59A-97F76192783B}"/>
-              </a:ext>
-            </a:extLst>
-          </p:cNvPr>
-          <p:cNvSpPr txBox="1"/>
-          <p:nvPr/>
-        </p:nvSpPr>
-        <p:spPr>
-          <a:xfrm>
-            <a:off x="0" y="186247"/>
-            <a:ext cx="12191999" cy="5364610"/>
-          </a:xfrm>
-          <a:prstGeom prst="rect">
-            <a:avLst/>
-          </a:prstGeom>
-          <a:noFill/>
-        </p:spPr>
-        <p:txBody>
-          <a:bodyPr wrap="square" rtlCol="0">
-            <a:spAutoFit/>
-          </a:bodyPr>
-          <a:lstStyle/>
-          <a:p>
-            <a:pPr marL="0" marR="0" lvl="0" indent="0" algn="ctr" defTabSz="914400" rtl="0" eaLnBrk="1" fontAlgn="auto" latinLnBrk="0" hangingPunct="1">
-              <a:lnSpc>
-                <a:spcPts val="11000"/>
-              </a:lnSpc>
-              <a:spcBef>
-                <a:spcPts val="0"/>
-              </a:spcBef>
-              <a:spcAft>
-                <a:spcPts val="0"/>
-              </a:spcAft>
-              <a:buClrTx/>
-              <a:buSzTx/>
-              <a:buFontTx/>
-              <a:buNone/>
-              <a:tabLst/>
-              <a:defRPr/>
-            </a:pPr>
-            <a:r>
-              <a:rPr kumimoji="0" lang="en-US" sz="11500" b="0" i="0" u="none" strike="noStrike" kern="1200" cap="none" spc="0" normalizeH="0" baseline="0" noProof="0" dirty="0">
-                <a:ln>
-                  <a:noFill/>
-                </a:ln>
-                <a:solidFill>
-                  <a:prstClr val="white"/>
-                </a:solidFill>
-                <a:effectLst/>
-                <a:uLnTx/>
-                <a:uFillTx/>
-                <a:latin typeface="Helvetica Neue UltraLight" panose="02000206000000020004" pitchFamily="2" charset="0"/>
-                <a:ea typeface="Helvetica Neue UltraLight" panose="02000206000000020004" pitchFamily="2" charset="0"/>
-                <a:cs typeface="Helvetica Neue" panose="02000503000000020004" pitchFamily="2" charset="0"/>
-              </a:rPr>
-              <a:t>neoclassical.ai</a:t>
-            </a:r>
-          </a:p>
-          <a:p>
-            <a:pPr marL="0" marR="0" lvl="0" indent="0" algn="ctr" defTabSz="914400" rtl="0" eaLnBrk="1" fontAlgn="auto" latinLnBrk="0" hangingPunct="1">
-              <a:lnSpc>
-                <a:spcPts val="10000"/>
-              </a:lnSpc>
-              <a:spcBef>
-                <a:spcPts val="0"/>
-              </a:spcBef>
-              <a:spcAft>
-                <a:spcPts val="0"/>
-              </a:spcAft>
-              <a:buClrTx/>
-              <a:buSzTx/>
-              <a:buFontTx/>
-              <a:buNone/>
-              <a:tabLst/>
-              <a:defRPr/>
-            </a:pPr>
-            <a:r>
-              <a:rPr kumimoji="0" lang="en-US" sz="11500" b="1" i="0" u="none" strike="noStrike" kern="1200" cap="none" spc="0" normalizeH="0" baseline="0" noProof="0" dirty="0">
-                <a:ln>
-                  <a:noFill/>
-                </a:ln>
-                <a:solidFill>
-                  <a:srgbClr val="FFC000"/>
-                </a:solidFill>
-                <a:effectLst/>
-                <a:uLnTx/>
-                <a:uFillTx/>
-                <a:latin typeface="Helvetica Neue Condensed Black" panose="02000503000000020004" pitchFamily="2" charset="0"/>
-                <a:ea typeface="Helvetica Neue Condensed Black" panose="02000503000000020004" pitchFamily="2" charset="0"/>
-                <a:cs typeface="Helvetica Neue Condensed Black" panose="02000503000000020004" pitchFamily="2" charset="0"/>
-              </a:rPr>
-              <a:t>What Life Form </a:t>
-            </a:r>
-            <a:br>
-              <a:rPr kumimoji="0" lang="en-US" sz="11500" b="1" i="0" u="none" strike="noStrike" kern="1200" cap="none" spc="0" normalizeH="0" baseline="0" noProof="0" dirty="0">
-                <a:ln>
-                  <a:noFill/>
-                </a:ln>
-                <a:solidFill>
-                  <a:srgbClr val="FFC000"/>
-                </a:solidFill>
-                <a:effectLst/>
-                <a:uLnTx/>
-                <a:uFillTx/>
-                <a:latin typeface="Helvetica Neue Condensed Black" panose="02000503000000020004" pitchFamily="2" charset="0"/>
-                <a:ea typeface="Helvetica Neue Condensed Black" panose="02000503000000020004" pitchFamily="2" charset="0"/>
-                <a:cs typeface="Helvetica Neue Condensed Black" panose="02000503000000020004" pitchFamily="2" charset="0"/>
-              </a:rPr>
-            </a:br>
-            <a:r>
-              <a:rPr kumimoji="0" lang="en-US" sz="11500" b="1" i="0" u="none" strike="noStrike" kern="1200" cap="none" spc="0" normalizeH="0" baseline="0" noProof="0" dirty="0">
-                <a:ln>
-                  <a:noFill/>
-                </a:ln>
-                <a:solidFill>
-                  <a:srgbClr val="FFC000"/>
-                </a:solidFill>
-                <a:effectLst/>
-                <a:uLnTx/>
-                <a:uFillTx/>
-                <a:latin typeface="Helvetica Neue Condensed Black" panose="02000503000000020004" pitchFamily="2" charset="0"/>
-                <a:ea typeface="Helvetica Neue Condensed Black" panose="02000503000000020004" pitchFamily="2" charset="0"/>
-                <a:cs typeface="Helvetica Neue Condensed Black" panose="02000503000000020004" pitchFamily="2" charset="0"/>
-              </a:rPr>
-              <a:t>has the Fewest </a:t>
-            </a:r>
-          </a:p>
-          <a:p>
-            <a:pPr marL="0" marR="0" lvl="0" indent="0" algn="ctr" defTabSz="914400" rtl="0" eaLnBrk="1" fontAlgn="auto" latinLnBrk="0" hangingPunct="1">
-              <a:lnSpc>
-                <a:spcPts val="10000"/>
-              </a:lnSpc>
-              <a:spcBef>
-                <a:spcPts val="0"/>
-              </a:spcBef>
-              <a:spcAft>
-                <a:spcPts val="0"/>
-              </a:spcAft>
-              <a:buClrTx/>
-              <a:buSzTx/>
-              <a:buFontTx/>
-              <a:buNone/>
-              <a:tabLst/>
-              <a:defRPr/>
-            </a:pPr>
-            <a:r>
-              <a:rPr kumimoji="0" lang="en-US" sz="11500" b="1" i="0" u="none" strike="noStrike" kern="1200" cap="none" spc="0" normalizeH="0" baseline="0" noProof="0" dirty="0">
-                <a:ln>
-                  <a:noFill/>
-                </a:ln>
-                <a:solidFill>
-                  <a:srgbClr val="FFC000"/>
-                </a:solidFill>
-                <a:effectLst/>
-                <a:uLnTx/>
-                <a:uFillTx/>
-                <a:latin typeface="Helvetica Neue Condensed Black" panose="02000503000000020004" pitchFamily="2" charset="0"/>
-                <a:ea typeface="Helvetica Neue Condensed Black" panose="02000503000000020004" pitchFamily="2" charset="0"/>
-                <a:cs typeface="Helvetica Neue Condensed Black" panose="02000503000000020004" pitchFamily="2" charset="0"/>
-              </a:rPr>
-              <a:t>Point Potentials?</a:t>
-            </a:r>
-            <a:endParaRPr kumimoji="0" lang="en-US" sz="11500" b="1" i="0" u="none" strike="noStrike" kern="1200" cap="none" spc="0" normalizeH="0" baseline="0" noProof="0" dirty="0">
-              <a:ln>
-                <a:noFill/>
-              </a:ln>
-              <a:solidFill>
-                <a:srgbClr val="FF8AD8"/>
-              </a:solidFill>
-              <a:effectLst/>
-              <a:uLnTx/>
-              <a:uFillTx/>
-              <a:latin typeface="Helvetica Neue Condensed Black" panose="02000503000000020004" pitchFamily="2" charset="0"/>
-              <a:ea typeface="Helvetica Neue Condensed Black" panose="02000503000000020004" pitchFamily="2" charset="0"/>
-              <a:cs typeface="Helvetica Neue Condensed Black" panose="02000503000000020004" pitchFamily="2" charset="0"/>
-            </a:endParaRPr>
-          </a:p>
-        </p:txBody>
-      </p:sp>
-    </p:spTree>
-    <p:extLst>
-      <p:ext uri="{BB962C8B-B14F-4D97-AF65-F5344CB8AC3E}">
-        <p14:creationId xmlns:p14="http://schemas.microsoft.com/office/powerpoint/2010/main" val="3311713244"/>
-      </p:ext>
-    </p:extLst>
-  </p:cSld>
-  <p:clrMapOvr>
-    <a:masterClrMapping/>
-  </p:clrMapOvr>
-</p:sld>
-</file>
-
-<file path=ppt/slides/slide7.xml><?xml version="1.0" encoding="utf-8"?>
-<p:sld xmlns:a="http://schemas.openxmlformats.org/drawingml/2006/main" xmlns:r="http://schemas.openxmlformats.org/officeDocument/2006/relationships" xmlns:p="http://schemas.openxmlformats.org/presentationml/2006/main">
-  <p:cSld>
-    <p:bg>
-      <p:bgPr>
-        <a:solidFill>
-          <a:srgbClr val="7030A0"/>
-        </a:solidFill>
-        <a:effectLst/>
-      </p:bgPr>
-    </p:bg>
-    <p:spTree>
-      <p:nvGrpSpPr>
-        <p:cNvPr id="1" name="">
-          <a:extLst>
-            <a:ext uri="{FF2B5EF4-FFF2-40B4-BE49-F238E27FC236}">
-              <a16:creationId xmlns:a16="http://schemas.microsoft.com/office/drawing/2014/main" id="{1AD597FF-D28F-5D03-23C3-487A5055B276}"/>
-            </a:ext>
-          </a:extLst>
-        </p:cNvPr>
-        <p:cNvGrpSpPr/>
-        <p:nvPr/>
-      </p:nvGrpSpPr>
-      <p:grpSpPr>
-        <a:xfrm>
-          <a:off x="0" y="0"/>
-          <a:ext cx="0" cy="0"/>
-          <a:chOff x="0" y="0"/>
-          <a:chExt cx="0" cy="0"/>
-        </a:xfrm>
-      </p:grpSpPr>
-      <p:sp>
-        <p:nvSpPr>
-          <p:cNvPr id="2" name="TextBox 1">
-            <a:extLst>
-              <a:ext uri="{FF2B5EF4-FFF2-40B4-BE49-F238E27FC236}">
-                <a16:creationId xmlns:a16="http://schemas.microsoft.com/office/drawing/2014/main" id="{EF399C73-254D-2680-85FF-BA641B75BD19}"/>
-              </a:ext>
-            </a:extLst>
-          </p:cNvPr>
-          <p:cNvSpPr txBox="1"/>
-          <p:nvPr/>
-        </p:nvSpPr>
-        <p:spPr>
-          <a:xfrm>
-            <a:off x="0" y="358254"/>
-            <a:ext cx="12191999" cy="4082208"/>
-          </a:xfrm>
-          <a:prstGeom prst="rect">
-            <a:avLst/>
-          </a:prstGeom>
-          <a:noFill/>
-        </p:spPr>
-        <p:txBody>
-          <a:bodyPr wrap="square" rtlCol="0">
-            <a:spAutoFit/>
-          </a:bodyPr>
-          <a:lstStyle/>
-          <a:p>
-            <a:pPr marL="0" marR="0" lvl="0" indent="0" algn="ctr" defTabSz="914400" rtl="0" eaLnBrk="1" fontAlgn="auto" latinLnBrk="0" hangingPunct="1">
-              <a:lnSpc>
-                <a:spcPts val="11000"/>
-              </a:lnSpc>
-              <a:spcBef>
-                <a:spcPts val="0"/>
-              </a:spcBef>
-              <a:spcAft>
-                <a:spcPts val="0"/>
-              </a:spcAft>
-              <a:buClrTx/>
-              <a:buSzTx/>
-              <a:buFontTx/>
-              <a:buNone/>
-              <a:tabLst/>
-              <a:defRPr/>
-            </a:pPr>
-            <a:r>
-              <a:rPr kumimoji="0" lang="en-US" sz="11500" b="0" i="0" u="none" strike="noStrike" kern="1200" cap="none" spc="0" normalizeH="0" baseline="0" noProof="0" dirty="0">
-                <a:ln>
-                  <a:noFill/>
-                </a:ln>
-                <a:solidFill>
-                  <a:prstClr val="white"/>
-                </a:solidFill>
-                <a:effectLst/>
-                <a:uLnTx/>
-                <a:uFillTx/>
-                <a:latin typeface="Helvetica Neue UltraLight" panose="02000206000000020004" pitchFamily="2" charset="0"/>
-                <a:ea typeface="Helvetica Neue UltraLight" panose="02000206000000020004" pitchFamily="2" charset="0"/>
-                <a:cs typeface="Helvetica Neue" panose="02000503000000020004" pitchFamily="2" charset="0"/>
-              </a:rPr>
-              <a:t>neoclassical.ai</a:t>
-            </a:r>
-          </a:p>
-          <a:p>
-            <a:pPr algn="ctr">
-              <a:lnSpc>
-                <a:spcPts val="10000"/>
-              </a:lnSpc>
-              <a:defRPr/>
-            </a:pPr>
-            <a:r>
-              <a:rPr kumimoji="0" lang="en-US" sz="11500" b="1" i="0" u="none" strike="noStrike" kern="1200" cap="none" spc="0" normalizeH="0" baseline="0" noProof="0" dirty="0" err="1">
-                <a:ln>
-                  <a:noFill/>
-                </a:ln>
-                <a:solidFill>
-                  <a:srgbClr val="FFC000"/>
-                </a:solidFill>
-                <a:effectLst/>
-                <a:uLnTx/>
-                <a:uFillTx/>
-                <a:latin typeface="Helvetica Neue Condensed Black" panose="02000503000000020004" pitchFamily="2" charset="0"/>
-                <a:ea typeface="Helvetica Neue Condensed Black" panose="02000503000000020004" pitchFamily="2" charset="0"/>
-                <a:cs typeface="Helvetica Neue Condensed Black" panose="02000503000000020004" pitchFamily="2" charset="0"/>
-              </a:rPr>
-              <a:t>Nanoarchaeum</a:t>
-            </a:r>
-            <a:r>
-              <a:rPr kumimoji="0" lang="en-US" sz="11500" b="1" i="0" u="none" strike="noStrike" kern="1200" cap="none" spc="0" normalizeH="0" baseline="0" noProof="0" dirty="0">
-                <a:ln>
-                  <a:noFill/>
-                </a:ln>
-                <a:solidFill>
-                  <a:srgbClr val="FFC000"/>
-                </a:solidFill>
-                <a:effectLst/>
-                <a:uLnTx/>
-                <a:uFillTx/>
-                <a:latin typeface="Helvetica Neue Condensed Black" panose="02000503000000020004" pitchFamily="2" charset="0"/>
-                <a:ea typeface="Helvetica Neue Condensed Black" panose="02000503000000020004" pitchFamily="2" charset="0"/>
-                <a:cs typeface="Helvetica Neue Condensed Black" panose="02000503000000020004" pitchFamily="2" charset="0"/>
-              </a:rPr>
-              <a:t> </a:t>
-            </a:r>
-            <a:r>
-              <a:rPr kumimoji="0" lang="en-US" sz="11500" b="1" i="0" u="none" strike="noStrike" kern="1200" cap="none" spc="0" normalizeH="0" baseline="0" noProof="0" dirty="0" err="1">
-                <a:ln>
-                  <a:noFill/>
-                </a:ln>
-                <a:solidFill>
-                  <a:srgbClr val="FFC000"/>
-                </a:solidFill>
-                <a:effectLst/>
-                <a:uLnTx/>
-                <a:uFillTx/>
-                <a:latin typeface="Helvetica Neue Condensed Black" panose="02000503000000020004" pitchFamily="2" charset="0"/>
-                <a:ea typeface="Helvetica Neue Condensed Black" panose="02000503000000020004" pitchFamily="2" charset="0"/>
-                <a:cs typeface="Helvetica Neue Condensed Black" panose="02000503000000020004" pitchFamily="2" charset="0"/>
-              </a:rPr>
-              <a:t>equitans</a:t>
-            </a:r>
-            <a:endParaRPr kumimoji="0" lang="en-US" sz="11500" b="1" i="0" u="none" strike="noStrike" kern="1200" cap="none" spc="0" normalizeH="0" baseline="0" noProof="0" dirty="0">
-              <a:ln>
-                <a:noFill/>
-              </a:ln>
-              <a:solidFill>
-                <a:srgbClr val="FFC000"/>
-              </a:solidFill>
-              <a:effectLst/>
-              <a:uLnTx/>
-              <a:uFillTx/>
-              <a:latin typeface="Helvetica Neue Condensed Black" panose="02000503000000020004" pitchFamily="2" charset="0"/>
-              <a:ea typeface="Helvetica Neue Condensed Black" panose="02000503000000020004" pitchFamily="2" charset="0"/>
-              <a:cs typeface="Helvetica Neue Condensed Black" panose="02000503000000020004" pitchFamily="2" charset="0"/>
-            </a:endParaRPr>
-          </a:p>
-        </p:txBody>
-      </p:sp>
-    </p:spTree>
-    <p:extLst>
-      <p:ext uri="{BB962C8B-B14F-4D97-AF65-F5344CB8AC3E}">
-        <p14:creationId xmlns:p14="http://schemas.microsoft.com/office/powerpoint/2010/main" val="2701580067"/>
-      </p:ext>
-    </p:extLst>
-  </p:cSld>
-  <p:clrMapOvr>
-    <a:masterClrMapping/>
-  </p:clrMapOvr>
-</p:sld>
-</file>
-
-<file path=ppt/slides/slide8.xml><?xml version="1.0" encoding="utf-8"?>
-<p:sld xmlns:a="http://schemas.openxmlformats.org/drawingml/2006/main" xmlns:r="http://schemas.openxmlformats.org/officeDocument/2006/relationships" xmlns:p="http://schemas.openxmlformats.org/presentationml/2006/main">
-  <p:cSld>
-    <p:bg>
-      <p:bgPr>
-        <a:solidFill>
-          <a:srgbClr val="7030A0"/>
-        </a:solidFill>
-        <a:effectLst/>
-      </p:bgPr>
-    </p:bg>
-    <p:spTree>
-      <p:nvGrpSpPr>
-        <p:cNvPr id="1" name="">
-          <a:extLst>
-            <a:ext uri="{FF2B5EF4-FFF2-40B4-BE49-F238E27FC236}">
-              <a16:creationId xmlns:a16="http://schemas.microsoft.com/office/drawing/2014/main" id="{365CF149-638E-D4FE-A688-5F738F294DCE}"/>
-            </a:ext>
-          </a:extLst>
-        </p:cNvPr>
-        <p:cNvGrpSpPr/>
-        <p:nvPr/>
-      </p:nvGrpSpPr>
-      <p:grpSpPr>
-        <a:xfrm>
-          <a:off x="0" y="0"/>
-          <a:ext cx="0" cy="0"/>
-          <a:chOff x="0" y="0"/>
-          <a:chExt cx="0" cy="0"/>
-        </a:xfrm>
-      </p:grpSpPr>
-      <p:sp>
-        <p:nvSpPr>
-          <p:cNvPr id="2" name="TextBox 1">
-            <a:extLst>
-              <a:ext uri="{FF2B5EF4-FFF2-40B4-BE49-F238E27FC236}">
-                <a16:creationId xmlns:a16="http://schemas.microsoft.com/office/drawing/2014/main" id="{CA22E71C-3B43-3887-6804-C1009A7A1619}"/>
-              </a:ext>
-            </a:extLst>
-          </p:cNvPr>
-          <p:cNvSpPr txBox="1"/>
-          <p:nvPr/>
-        </p:nvSpPr>
-        <p:spPr>
-          <a:xfrm>
-            <a:off x="0" y="186247"/>
-            <a:ext cx="12191999" cy="1374735"/>
-          </a:xfrm>
-          <a:prstGeom prst="rect">
-            <a:avLst/>
-          </a:prstGeom>
-          <a:noFill/>
-        </p:spPr>
-        <p:txBody>
-          <a:bodyPr wrap="square" rtlCol="0">
-            <a:spAutoFit/>
-          </a:bodyPr>
-          <a:lstStyle/>
-          <a:p>
-            <a:pPr algn="ctr">
-              <a:lnSpc>
-                <a:spcPts val="10000"/>
-              </a:lnSpc>
-              <a:defRPr/>
-            </a:pPr>
-            <a:r>
-              <a:rPr kumimoji="0" lang="en-US" sz="8800" b="1" i="0" u="none" strike="noStrike" kern="1200" cap="none" spc="0" normalizeH="0" baseline="0" noProof="0" dirty="0" err="1">
-                <a:ln>
-                  <a:noFill/>
-                </a:ln>
-                <a:solidFill>
-                  <a:srgbClr val="FFC000"/>
-                </a:solidFill>
-                <a:effectLst/>
-                <a:uLnTx/>
-                <a:uFillTx/>
-                <a:latin typeface="Helvetica Neue Condensed Black" panose="02000503000000020004" pitchFamily="2" charset="0"/>
-                <a:ea typeface="Helvetica Neue Condensed Black" panose="02000503000000020004" pitchFamily="2" charset="0"/>
-                <a:cs typeface="Helvetica Neue Condensed Black" panose="02000503000000020004" pitchFamily="2" charset="0"/>
-              </a:rPr>
-              <a:t>Nanoarchaeum</a:t>
-            </a:r>
-            <a:r>
-              <a:rPr kumimoji="0" lang="en-US" sz="8800" b="1" i="0" u="none" strike="noStrike" kern="1200" cap="none" spc="0" normalizeH="0" baseline="0" noProof="0" dirty="0">
-                <a:ln>
-                  <a:noFill/>
-                </a:ln>
-                <a:solidFill>
-                  <a:srgbClr val="FFC000"/>
-                </a:solidFill>
-                <a:effectLst/>
-                <a:uLnTx/>
-                <a:uFillTx/>
-                <a:latin typeface="Helvetica Neue Condensed Black" panose="02000503000000020004" pitchFamily="2" charset="0"/>
-                <a:ea typeface="Helvetica Neue Condensed Black" panose="02000503000000020004" pitchFamily="2" charset="0"/>
-                <a:cs typeface="Helvetica Neue Condensed Black" panose="02000503000000020004" pitchFamily="2" charset="0"/>
-              </a:rPr>
-              <a:t> </a:t>
-            </a:r>
-            <a:r>
-              <a:rPr kumimoji="0" lang="en-US" sz="8800" b="1" i="0" u="none" strike="noStrike" kern="1200" cap="none" spc="0" normalizeH="0" baseline="0" noProof="0" dirty="0" err="1">
-                <a:ln>
-                  <a:noFill/>
-                </a:ln>
-                <a:solidFill>
-                  <a:srgbClr val="FFC000"/>
-                </a:solidFill>
-                <a:effectLst/>
-                <a:uLnTx/>
-                <a:uFillTx/>
-                <a:latin typeface="Helvetica Neue Condensed Black" panose="02000503000000020004" pitchFamily="2" charset="0"/>
-                <a:ea typeface="Helvetica Neue Condensed Black" panose="02000503000000020004" pitchFamily="2" charset="0"/>
-                <a:cs typeface="Helvetica Neue Condensed Black" panose="02000503000000020004" pitchFamily="2" charset="0"/>
-              </a:rPr>
-              <a:t>equitans</a:t>
-            </a:r>
-            <a:endParaRPr kumimoji="0" lang="en-US" sz="8800" b="1" i="0" u="none" strike="noStrike" kern="1200" cap="none" spc="0" normalizeH="0" baseline="0" noProof="0" dirty="0">
-              <a:ln>
-                <a:noFill/>
-              </a:ln>
-              <a:solidFill>
-                <a:srgbClr val="FFC000"/>
-              </a:solidFill>
-              <a:effectLst/>
-              <a:uLnTx/>
-              <a:uFillTx/>
-              <a:latin typeface="Helvetica Neue Condensed Black" panose="02000503000000020004" pitchFamily="2" charset="0"/>
-              <a:ea typeface="Helvetica Neue Condensed Black" panose="02000503000000020004" pitchFamily="2" charset="0"/>
-              <a:cs typeface="Helvetica Neue Condensed Black" panose="02000503000000020004" pitchFamily="2" charset="0"/>
-            </a:endParaRPr>
-          </a:p>
-        </p:txBody>
-      </p:sp>
-      <p:sp>
-        <p:nvSpPr>
-          <p:cNvPr id="5" name="TextBox 4">
-            <a:extLst>
-              <a:ext uri="{FF2B5EF4-FFF2-40B4-BE49-F238E27FC236}">
-                <a16:creationId xmlns:a16="http://schemas.microsoft.com/office/drawing/2014/main" id="{9FD60923-3051-E75C-EBA1-5F01B55BA37A}"/>
-              </a:ext>
-            </a:extLst>
-          </p:cNvPr>
-          <p:cNvSpPr txBox="1"/>
-          <p:nvPr/>
-        </p:nvSpPr>
-        <p:spPr>
-          <a:xfrm>
-            <a:off x="0" y="1568935"/>
-            <a:ext cx="12191999" cy="4816234"/>
-          </a:xfrm>
-          <a:prstGeom prst="rect">
-            <a:avLst/>
-          </a:prstGeom>
-          <a:noFill/>
-        </p:spPr>
-        <p:txBody>
-          <a:bodyPr wrap="square" rtlCol="0">
-            <a:noAutofit/>
-          </a:bodyPr>
-          <a:lstStyle/>
-          <a:p>
-            <a:pPr marL="285750" indent="-285750">
-              <a:buFont typeface="Arial" panose="020B0604020202020204" pitchFamily="34" charset="0"/>
-              <a:buChar char="•"/>
-              <a:defRPr/>
-            </a:pPr>
-            <a:endParaRPr kumimoji="0" lang="en-US" sz="2000" b="0" u="none" strike="noStrike" kern="1200" cap="none" spc="0" normalizeH="0" baseline="0" noProof="0" dirty="0">
-              <a:ln>
-                <a:noFill/>
-              </a:ln>
-              <a:solidFill>
-                <a:schemeClr val="bg1"/>
-              </a:solidFill>
-              <a:effectLst/>
-              <a:uLnTx/>
-              <a:uFillTx/>
-              <a:latin typeface="Helvetica Neue" panose="02000503000000020004" pitchFamily="2" charset="0"/>
-              <a:ea typeface="Helvetica Neue" panose="02000503000000020004" pitchFamily="2" charset="0"/>
-              <a:cs typeface="Helvetica Neue" panose="02000503000000020004" pitchFamily="2" charset="0"/>
-            </a:endParaRPr>
-          </a:p>
-          <a:p>
-            <a:pPr marL="742950" lvl="1" indent="-285750">
-              <a:buFont typeface="Arial" panose="020B0604020202020204" pitchFamily="34" charset="0"/>
-              <a:buChar char="•"/>
-              <a:defRPr/>
-            </a:pPr>
-            <a:r>
-              <a:rPr lang="en-US" sz="2000" b="1" dirty="0">
-                <a:solidFill>
-                  <a:schemeClr val="bg1"/>
-                </a:solidFill>
-                <a:latin typeface="Helvetica Neue" panose="02000503000000020004" pitchFamily="2" charset="0"/>
-                <a:ea typeface="Helvetica Neue" panose="02000503000000020004" pitchFamily="2" charset="0"/>
-                <a:cs typeface="Helvetica Neue" panose="02000503000000020004" pitchFamily="2" charset="0"/>
-              </a:rPr>
-              <a:t>The smallest living organism recognized by scientists is </a:t>
-            </a:r>
-            <a:r>
-              <a:rPr lang="en-US" sz="2000" b="1" dirty="0" err="1">
-                <a:solidFill>
-                  <a:schemeClr val="bg1"/>
-                </a:solidFill>
-                <a:latin typeface="Helvetica Neue" panose="02000503000000020004" pitchFamily="2" charset="0"/>
-                <a:ea typeface="Helvetica Neue" panose="02000503000000020004" pitchFamily="2" charset="0"/>
-                <a:cs typeface="Helvetica Neue" panose="02000503000000020004" pitchFamily="2" charset="0"/>
-              </a:rPr>
-              <a:t>Nanoarchaeum</a:t>
-            </a:r>
-            <a:r>
-              <a:rPr lang="en-US" sz="2000" b="1" dirty="0">
-                <a:solidFill>
-                  <a:schemeClr val="bg1"/>
-                </a:solidFill>
-                <a:latin typeface="Helvetica Neue" panose="02000503000000020004" pitchFamily="2" charset="0"/>
-                <a:ea typeface="Helvetica Neue" panose="02000503000000020004" pitchFamily="2" charset="0"/>
-                <a:cs typeface="Helvetica Neue" panose="02000503000000020004" pitchFamily="2" charset="0"/>
-              </a:rPr>
-              <a:t> </a:t>
-            </a:r>
-            <a:r>
-              <a:rPr lang="en-US" sz="2000" b="1" dirty="0" err="1">
-                <a:solidFill>
-                  <a:schemeClr val="bg1"/>
-                </a:solidFill>
-                <a:latin typeface="Helvetica Neue" panose="02000503000000020004" pitchFamily="2" charset="0"/>
-                <a:ea typeface="Helvetica Neue" panose="02000503000000020004" pitchFamily="2" charset="0"/>
-                <a:cs typeface="Helvetica Neue" panose="02000503000000020004" pitchFamily="2" charset="0"/>
-              </a:rPr>
-              <a:t>equitans</a:t>
-            </a:r>
-            <a:r>
-              <a:rPr lang="en-US" sz="2000" b="1" dirty="0">
-                <a:solidFill>
-                  <a:schemeClr val="bg1"/>
-                </a:solidFill>
-                <a:latin typeface="Helvetica Neue" panose="02000503000000020004" pitchFamily="2" charset="0"/>
-                <a:ea typeface="Helvetica Neue" panose="02000503000000020004" pitchFamily="2" charset="0"/>
-                <a:cs typeface="Helvetica Neue" panose="02000503000000020004" pitchFamily="2" charset="0"/>
-              </a:rPr>
-              <a:t>. </a:t>
-            </a:r>
-          </a:p>
-          <a:p>
-            <a:pPr marL="742950" lvl="1" indent="-285750">
-              <a:buFont typeface="Arial" panose="020B0604020202020204" pitchFamily="34" charset="0"/>
-              <a:buChar char="•"/>
-              <a:defRPr/>
-            </a:pPr>
-            <a:r>
-              <a:rPr lang="en-US" sz="2000" b="1" dirty="0">
-                <a:solidFill>
-                  <a:schemeClr val="bg1"/>
-                </a:solidFill>
-                <a:latin typeface="Helvetica Neue" panose="02000503000000020004" pitchFamily="2" charset="0"/>
-                <a:ea typeface="Helvetica Neue" panose="02000503000000020004" pitchFamily="2" charset="0"/>
-                <a:cs typeface="Helvetica Neue" panose="02000503000000020004" pitchFamily="2" charset="0"/>
-              </a:rPr>
-              <a:t>This microbe was discovered in 2002 in a hydrothermal vent off the coast of Iceland. </a:t>
-            </a:r>
-          </a:p>
-          <a:p>
-            <a:pPr marL="742950" lvl="1" indent="-285750">
-              <a:buFont typeface="Arial" panose="020B0604020202020204" pitchFamily="34" charset="0"/>
-              <a:buChar char="•"/>
-              <a:defRPr/>
-            </a:pPr>
-            <a:r>
-              <a:rPr lang="en-US" sz="2000" b="1" dirty="0">
-                <a:solidFill>
-                  <a:schemeClr val="bg1"/>
-                </a:solidFill>
-                <a:latin typeface="Helvetica Neue" panose="02000503000000020004" pitchFamily="2" charset="0"/>
-                <a:ea typeface="Helvetica Neue" panose="02000503000000020004" pitchFamily="2" charset="0"/>
-                <a:cs typeface="Helvetica Neue" panose="02000503000000020004" pitchFamily="2" charset="0"/>
-              </a:rPr>
-              <a:t>Its cells are only about 400 nanometers in diameter.</a:t>
-            </a:r>
-          </a:p>
-          <a:p>
-            <a:pPr marL="742950" lvl="1" indent="-285750">
-              <a:buFont typeface="Arial" panose="020B0604020202020204" pitchFamily="34" charset="0"/>
-              <a:buChar char="•"/>
-              <a:defRPr/>
-            </a:pPr>
-            <a:r>
-              <a:rPr lang="en-US" sz="2000" b="1" dirty="0">
-                <a:solidFill>
-                  <a:schemeClr val="bg1"/>
-                </a:solidFill>
-                <a:latin typeface="Helvetica Neue" panose="02000503000000020004" pitchFamily="2" charset="0"/>
-                <a:ea typeface="Helvetica Neue" panose="02000503000000020004" pitchFamily="2" charset="0"/>
-                <a:cs typeface="Helvetica Neue" panose="02000503000000020004" pitchFamily="2" charset="0"/>
-              </a:rPr>
-              <a:t>It has one of the smallest genomes of any sequenced microbe, with only 490,885 base pairs.</a:t>
-            </a:r>
-          </a:p>
-          <a:p>
-            <a:pPr marL="742950" lvl="1" indent="-285750">
-              <a:buFont typeface="Arial" panose="020B0604020202020204" pitchFamily="34" charset="0"/>
-              <a:buChar char="•"/>
-              <a:defRPr/>
-            </a:pPr>
-            <a:r>
-              <a:rPr lang="en-US" sz="2000" b="1" dirty="0">
-                <a:solidFill>
-                  <a:schemeClr val="bg1"/>
-                </a:solidFill>
-                <a:latin typeface="Helvetica Neue" panose="02000503000000020004" pitchFamily="2" charset="0"/>
-                <a:ea typeface="Helvetica Neue" panose="02000503000000020004" pitchFamily="2" charset="0"/>
-                <a:cs typeface="Helvetica Neue" panose="02000503000000020004" pitchFamily="2" charset="0"/>
-              </a:rPr>
-              <a:t>Its small size and minimal genome suggest it contains a relatively low number of atoms compared to larger organisms.</a:t>
-            </a:r>
-          </a:p>
-          <a:p>
-            <a:pPr marL="742950" lvl="1" indent="-285750">
-              <a:buFont typeface="Arial" panose="020B0604020202020204" pitchFamily="34" charset="0"/>
-              <a:buChar char="•"/>
-              <a:defRPr/>
-            </a:pPr>
-            <a:r>
-              <a:rPr lang="en-US" sz="2000" b="1" dirty="0">
-                <a:solidFill>
-                  <a:schemeClr val="bg1"/>
-                </a:solidFill>
-                <a:latin typeface="Helvetica Neue" panose="02000503000000020004" pitchFamily="2" charset="0"/>
-                <a:ea typeface="Helvetica Neue" panose="02000503000000020004" pitchFamily="2" charset="0"/>
-                <a:cs typeface="Helvetica Neue" panose="02000503000000020004" pitchFamily="2" charset="0"/>
-              </a:rPr>
-              <a:t>We know that RNA molecules </a:t>
-            </a:r>
-            <a:r>
-              <a:rPr lang="en-US" sz="2000" b="1" dirty="0" err="1">
-                <a:solidFill>
-                  <a:schemeClr val="bg1"/>
-                </a:solidFill>
-                <a:latin typeface="Helvetica Neue" panose="02000503000000020004" pitchFamily="2" charset="0"/>
-                <a:ea typeface="Helvetica Neue" panose="02000503000000020004" pitchFamily="2" charset="0"/>
-                <a:cs typeface="Helvetica Neue" panose="02000503000000020004" pitchFamily="2" charset="0"/>
-              </a:rPr>
-              <a:t>cantain</a:t>
-            </a:r>
-            <a:r>
-              <a:rPr lang="en-US" sz="2000" b="1" dirty="0">
-                <a:solidFill>
-                  <a:schemeClr val="bg1"/>
-                </a:solidFill>
-                <a:latin typeface="Helvetica Neue" panose="02000503000000020004" pitchFamily="2" charset="0"/>
-                <a:ea typeface="Helvetica Neue" panose="02000503000000020004" pitchFamily="2" charset="0"/>
-                <a:cs typeface="Helvetica Neue" panose="02000503000000020004" pitchFamily="2" charset="0"/>
-              </a:rPr>
-              <a:t> 4K-6K point potentials.</a:t>
-            </a:r>
-          </a:p>
-          <a:p>
-            <a:pPr marL="742950" lvl="1" indent="-285750">
-              <a:buFont typeface="Arial" panose="020B0604020202020204" pitchFamily="34" charset="0"/>
-              <a:buChar char="•"/>
-              <a:defRPr/>
-            </a:pPr>
-            <a:r>
-              <a:rPr lang="en-US" sz="2000" b="1" dirty="0">
-                <a:solidFill>
-                  <a:schemeClr val="bg1"/>
-                </a:solidFill>
-                <a:latin typeface="Helvetica Neue" panose="02000503000000020004" pitchFamily="2" charset="0"/>
-                <a:ea typeface="Helvetica Neue" panose="02000503000000020004" pitchFamily="2" charset="0"/>
-                <a:cs typeface="Helvetica Neue" panose="02000503000000020004" pitchFamily="2" charset="0"/>
-              </a:rPr>
-              <a:t>The genome therefore contains 500K x 10K ~= 5B point potentials.</a:t>
-            </a:r>
-          </a:p>
-          <a:p>
-            <a:pPr marL="742950" lvl="1" indent="-285750">
-              <a:buFont typeface="Arial" panose="020B0604020202020204" pitchFamily="34" charset="0"/>
-              <a:buChar char="•"/>
-              <a:defRPr/>
-            </a:pPr>
-            <a:endParaRPr lang="en-US" sz="2000" dirty="0">
-              <a:solidFill>
-                <a:schemeClr val="bg1"/>
-              </a:solidFill>
-              <a:latin typeface="Helvetica Neue" panose="02000503000000020004" pitchFamily="2" charset="0"/>
-              <a:ea typeface="Helvetica Neue" panose="02000503000000020004" pitchFamily="2" charset="0"/>
-              <a:cs typeface="Helvetica Neue" panose="02000503000000020004" pitchFamily="2" charset="0"/>
-            </a:endParaRPr>
-          </a:p>
-          <a:p>
-            <a:pPr marL="742950" lvl="1" indent="-285750">
-              <a:buFont typeface="Arial" panose="020B0604020202020204" pitchFamily="34" charset="0"/>
-              <a:buChar char="•"/>
-              <a:defRPr/>
-            </a:pPr>
-            <a:r>
-              <a:rPr kumimoji="0" lang="en-US" sz="2000" i="1" u="none" strike="noStrike" kern="1200" cap="none" spc="0" normalizeH="0" baseline="0" noProof="0" dirty="0">
-                <a:ln>
-                  <a:noFill/>
-                </a:ln>
-                <a:solidFill>
-                  <a:schemeClr val="bg1"/>
-                </a:solidFill>
-                <a:effectLst/>
-                <a:uLnTx/>
-                <a:uFillTx/>
-                <a:latin typeface="Helvetica Neue" panose="02000503000000020004" pitchFamily="2" charset="0"/>
-                <a:ea typeface="Helvetica Neue" panose="02000503000000020004" pitchFamily="2" charset="0"/>
-                <a:cs typeface="Helvetica Neue" panose="02000503000000020004" pitchFamily="2" charset="0"/>
-              </a:rPr>
-              <a:t>h/t CoPilot and Wikipedia</a:t>
-            </a:r>
-          </a:p>
-          <a:p>
-            <a:pPr marL="742950" lvl="1" indent="-285750">
-              <a:buFont typeface="Arial" panose="020B0604020202020204" pitchFamily="34" charset="0"/>
-              <a:buChar char="•"/>
-              <a:defRPr/>
-            </a:pPr>
-            <a:endParaRPr kumimoji="0" lang="en-US" sz="2000" b="0" u="none" strike="noStrike" kern="1200" cap="none" spc="0" normalizeH="0" baseline="0" noProof="0" dirty="0">
-              <a:ln>
-                <a:noFill/>
-              </a:ln>
-              <a:solidFill>
-                <a:schemeClr val="bg1"/>
-              </a:solidFill>
-              <a:effectLst/>
-              <a:uLnTx/>
-              <a:uFillTx/>
-              <a:latin typeface="Helvetica Neue" panose="02000503000000020004" pitchFamily="2" charset="0"/>
-              <a:ea typeface="Helvetica Neue" panose="02000503000000020004" pitchFamily="2" charset="0"/>
-              <a:cs typeface="Helvetica Neue" panose="02000503000000020004" pitchFamily="2" charset="0"/>
-            </a:endParaRPr>
-          </a:p>
-          <a:p>
-            <a:pPr marL="285750" marR="0" lvl="0" indent="-285750" algn="l" defTabSz="914400" rtl="0" eaLnBrk="1" fontAlgn="auto" latinLnBrk="0" hangingPunct="1">
-              <a:lnSpc>
-                <a:spcPct val="100000"/>
-              </a:lnSpc>
-              <a:spcBef>
-                <a:spcPts val="0"/>
-              </a:spcBef>
-              <a:spcAft>
-                <a:spcPts val="0"/>
-              </a:spcAft>
-              <a:buClrTx/>
-              <a:buSzTx/>
-              <a:buFont typeface="Arial" panose="020B0604020202020204" pitchFamily="34" charset="0"/>
-              <a:buChar char="•"/>
-              <a:tabLst/>
-              <a:defRPr/>
-            </a:pPr>
-            <a:endParaRPr kumimoji="0" lang="en-US" sz="2000" b="0" u="none" strike="noStrike" kern="1200" cap="none" spc="0" normalizeH="0" baseline="0" noProof="0" dirty="0">
-              <a:ln>
-                <a:noFill/>
-              </a:ln>
-              <a:solidFill>
-                <a:schemeClr val="bg1"/>
-              </a:solidFill>
-              <a:effectLst/>
-              <a:uLnTx/>
-              <a:uFillTx/>
-              <a:latin typeface="Helvetica Neue" panose="02000503000000020004" pitchFamily="2" charset="0"/>
-              <a:ea typeface="Helvetica Neue" panose="02000503000000020004" pitchFamily="2" charset="0"/>
-              <a:cs typeface="Helvetica Neue" panose="02000503000000020004" pitchFamily="2" charset="0"/>
-            </a:endParaRPr>
-          </a:p>
-          <a:p>
-            <a:pPr marL="0" marR="0" lvl="0" indent="0" algn="l" defTabSz="914400" rtl="0" eaLnBrk="1" fontAlgn="auto" latinLnBrk="0" hangingPunct="1">
-              <a:lnSpc>
-                <a:spcPct val="100000"/>
-              </a:lnSpc>
-              <a:spcBef>
-                <a:spcPts val="0"/>
-              </a:spcBef>
-              <a:spcAft>
-                <a:spcPts val="0"/>
-              </a:spcAft>
-              <a:buClrTx/>
-              <a:buSzTx/>
-              <a:buFontTx/>
-              <a:buNone/>
-              <a:tabLst/>
-              <a:defRPr/>
-            </a:pPr>
-            <a:endParaRPr kumimoji="0" lang="en-US" sz="2000" b="0" u="none" strike="noStrike" kern="1200" cap="none" spc="0" normalizeH="0" baseline="0" noProof="0" dirty="0">
-              <a:ln>
-                <a:noFill/>
-              </a:ln>
-              <a:solidFill>
-                <a:schemeClr val="bg1"/>
-              </a:solidFill>
-              <a:effectLst/>
-              <a:uLnTx/>
-              <a:uFillTx/>
-              <a:latin typeface="Helvetica Neue" panose="02000503000000020004" pitchFamily="2" charset="0"/>
-              <a:ea typeface="Helvetica Neue" panose="02000503000000020004" pitchFamily="2" charset="0"/>
-              <a:cs typeface="Helvetica Neue" panose="02000503000000020004" pitchFamily="2" charset="0"/>
-            </a:endParaRPr>
-          </a:p>
-          <a:p>
-            <a:pPr marL="285750" marR="0" lvl="0" indent="-285750" algn="l" defTabSz="914400" rtl="0" eaLnBrk="1" fontAlgn="auto" latinLnBrk="0" hangingPunct="1">
-              <a:lnSpc>
-                <a:spcPct val="100000"/>
-              </a:lnSpc>
-              <a:spcBef>
-                <a:spcPts val="0"/>
-              </a:spcBef>
-              <a:spcAft>
-                <a:spcPts val="0"/>
-              </a:spcAft>
-              <a:buClrTx/>
-              <a:buSzTx/>
-              <a:buFont typeface="Arial" panose="020B0604020202020204" pitchFamily="34" charset="0"/>
-              <a:buChar char="•"/>
-              <a:tabLst/>
-              <a:defRPr/>
-            </a:pPr>
-            <a:endParaRPr kumimoji="0" lang="en-US" sz="2000" b="0" u="none" strike="noStrike" kern="1200" cap="none" spc="0" normalizeH="0" baseline="0" noProof="0" dirty="0">
-              <a:ln>
-                <a:noFill/>
-              </a:ln>
-              <a:solidFill>
-                <a:schemeClr val="bg1"/>
-              </a:solidFill>
-              <a:effectLst/>
-              <a:uLnTx/>
-              <a:uFillTx/>
-              <a:latin typeface="Helvetica Neue" panose="02000503000000020004" pitchFamily="2" charset="0"/>
-              <a:ea typeface="Helvetica Neue" panose="02000503000000020004" pitchFamily="2" charset="0"/>
-              <a:cs typeface="Helvetica Neue" panose="02000503000000020004" pitchFamily="2" charset="0"/>
-            </a:endParaRPr>
-          </a:p>
-          <a:p>
-            <a:pPr marL="285750" marR="0" lvl="0" indent="-285750" algn="l" defTabSz="914400" rtl="0" eaLnBrk="1" fontAlgn="auto" latinLnBrk="0" hangingPunct="1">
-              <a:lnSpc>
-                <a:spcPct val="100000"/>
-              </a:lnSpc>
-              <a:spcBef>
-                <a:spcPts val="0"/>
-              </a:spcBef>
-              <a:spcAft>
-                <a:spcPts val="0"/>
-              </a:spcAft>
-              <a:buClrTx/>
-              <a:buSzTx/>
-              <a:buFont typeface="Arial" panose="020B0604020202020204" pitchFamily="34" charset="0"/>
-              <a:buChar char="•"/>
-              <a:tabLst/>
-              <a:defRPr/>
-            </a:pPr>
-            <a:endParaRPr kumimoji="0" lang="en-US" sz="2000" b="0" u="none" strike="noStrike" kern="1200" cap="none" spc="0" normalizeH="0" baseline="0" noProof="0" dirty="0">
-              <a:ln>
-                <a:noFill/>
-              </a:ln>
-              <a:solidFill>
-                <a:schemeClr val="bg1"/>
-              </a:solidFill>
-              <a:effectLst/>
-              <a:uLnTx/>
-              <a:uFillTx/>
-              <a:latin typeface="Helvetica Neue" panose="02000503000000020004" pitchFamily="2" charset="0"/>
-              <a:ea typeface="Helvetica Neue" panose="02000503000000020004" pitchFamily="2" charset="0"/>
-              <a:cs typeface="Helvetica Neue" panose="02000503000000020004" pitchFamily="2" charset="0"/>
-            </a:endParaRPr>
-          </a:p>
-          <a:p>
-            <a:pPr marL="285750" marR="0" lvl="0" indent="-285750" algn="l" defTabSz="914400" rtl="0" eaLnBrk="1" fontAlgn="auto" latinLnBrk="0" hangingPunct="1">
-              <a:lnSpc>
-                <a:spcPct val="100000"/>
-              </a:lnSpc>
-              <a:spcBef>
-                <a:spcPts val="0"/>
-              </a:spcBef>
-              <a:spcAft>
-                <a:spcPts val="0"/>
-              </a:spcAft>
-              <a:buClrTx/>
-              <a:buSzTx/>
-              <a:buFont typeface="Arial" panose="020B0604020202020204" pitchFamily="34" charset="0"/>
-              <a:buChar char="•"/>
-              <a:tabLst/>
-              <a:defRPr/>
-            </a:pPr>
-            <a:endParaRPr kumimoji="0" lang="en-US" sz="2000" b="0" u="none" strike="noStrike" kern="1200" cap="none" spc="0" normalizeH="0" baseline="0" noProof="0" dirty="0">
-              <a:ln>
-                <a:noFill/>
-              </a:ln>
-              <a:solidFill>
-                <a:schemeClr val="bg1"/>
-              </a:solidFill>
-              <a:effectLst/>
-              <a:uLnTx/>
-              <a:uFillTx/>
-              <a:latin typeface="Helvetica Neue" panose="02000503000000020004" pitchFamily="2" charset="0"/>
-              <a:ea typeface="Helvetica Neue" panose="02000503000000020004" pitchFamily="2" charset="0"/>
-              <a:cs typeface="Helvetica Neue" panose="02000503000000020004" pitchFamily="2" charset="0"/>
-            </a:endParaRPr>
-          </a:p>
-          <a:p>
-            <a:pPr marL="0" marR="0" lvl="0" indent="0" algn="l" defTabSz="914400" rtl="0" eaLnBrk="1" fontAlgn="auto" latinLnBrk="0" hangingPunct="1">
-              <a:lnSpc>
-                <a:spcPct val="100000"/>
-              </a:lnSpc>
-              <a:spcBef>
-                <a:spcPts val="0"/>
-              </a:spcBef>
-              <a:spcAft>
-                <a:spcPts val="0"/>
-              </a:spcAft>
-              <a:buClrTx/>
-              <a:buSzTx/>
-              <a:buFontTx/>
-              <a:buNone/>
-              <a:tabLst/>
-              <a:defRPr/>
-            </a:pPr>
-            <a:endParaRPr kumimoji="0" lang="en-US" sz="1400" b="0" u="none" strike="noStrike" kern="1200" cap="none" spc="0" normalizeH="0" baseline="0" noProof="0" dirty="0">
-              <a:ln>
-                <a:noFill/>
-              </a:ln>
-              <a:solidFill>
-                <a:schemeClr val="bg1"/>
-              </a:solidFill>
-              <a:effectLst/>
-              <a:uLnTx/>
-              <a:uFillTx/>
-              <a:latin typeface="Helvetica Neue" panose="02000503000000020004" pitchFamily="2" charset="0"/>
-              <a:ea typeface="Helvetica Neue" panose="02000503000000020004" pitchFamily="2" charset="0"/>
-              <a:cs typeface="Helvetica Neue" panose="02000503000000020004" pitchFamily="2" charset="0"/>
-            </a:endParaRPr>
-          </a:p>
-        </p:txBody>
-      </p:sp>
-      <p:pic>
-        <p:nvPicPr>
-          <p:cNvPr id="3074" name="Picture 2" descr="undefined">
-            <a:extLst>
-              <a:ext uri="{FF2B5EF4-FFF2-40B4-BE49-F238E27FC236}">
-                <a16:creationId xmlns:a16="http://schemas.microsoft.com/office/drawing/2014/main" id="{446818C8-F552-491F-947A-ACEDA4EBAFB1}"/>
-              </a:ext>
-            </a:extLst>
-          </p:cNvPr>
-          <p:cNvPicPr>
-            <a:picLocks noChangeAspect="1" noChangeArrowheads="1"/>
-          </p:cNvPicPr>
-          <p:nvPr/>
-        </p:nvPicPr>
-        <p:blipFill>
-          <a:blip r:embed="rId3">
-            <a:extLst>
-              <a:ext uri="{28A0092B-C50C-407E-A947-70E740481C1C}">
-                <a14:useLocalDpi xmlns:a14="http://schemas.microsoft.com/office/drawing/2010/main" val="0"/>
-              </a:ext>
-            </a:extLst>
-          </a:blip>
-          <a:srcRect/>
-          <a:stretch>
-            <a:fillRect/>
-          </a:stretch>
-        </p:blipFill>
-        <p:spPr bwMode="auto">
-          <a:xfrm>
-            <a:off x="8924158" y="3977052"/>
-            <a:ext cx="2794000" cy="2336800"/>
-          </a:xfrm>
-          <a:prstGeom prst="rect">
-            <a:avLst/>
-          </a:prstGeom>
-          <a:noFill/>
-          <a:extLst>
-            <a:ext uri="{909E8E84-426E-40DD-AFC4-6F175D3DCCD1}">
-              <a14:hiddenFill xmlns:a14="http://schemas.microsoft.com/office/drawing/2010/main">
-                <a:solidFill>
-                  <a:srgbClr val="FFFFFF"/>
-                </a:solidFill>
-              </a14:hiddenFill>
-            </a:ext>
-          </a:extLst>
-        </p:spPr>
-      </p:pic>
-    </p:spTree>
-    <p:extLst>
-      <p:ext uri="{BB962C8B-B14F-4D97-AF65-F5344CB8AC3E}">
-        <p14:creationId xmlns:p14="http://schemas.microsoft.com/office/powerpoint/2010/main" val="3325331473"/>
-      </p:ext>
-    </p:extLst>
-  </p:cSld>
-  <p:clrMapOvr>
-    <a:masterClrMapping/>
-  </p:clrMapOvr>
-</p:sld>
-</file>
-
-<file path=ppt/slides/slide9.xml><?xml version="1.0" encoding="utf-8"?>
-<p:sld xmlns:a="http://schemas.openxmlformats.org/drawingml/2006/main" xmlns:r="http://schemas.openxmlformats.org/officeDocument/2006/relationships" xmlns:p="http://schemas.openxmlformats.org/presentationml/2006/main">
-  <p:cSld>
-    <p:bg>
-      <p:bgPr>
-        <a:solidFill>
-          <a:srgbClr val="7030A0"/>
-        </a:solidFill>
-        <a:effectLst/>
-      </p:bgPr>
-    </p:bg>
-    <p:spTree>
-      <p:nvGrpSpPr>
-        <p:cNvPr id="1" name="">
-          <a:extLst>
-            <a:ext uri="{FF2B5EF4-FFF2-40B4-BE49-F238E27FC236}">
-              <a16:creationId xmlns:a16="http://schemas.microsoft.com/office/drawing/2014/main" id="{5DF61E34-494B-53B8-B8DB-F565811FCE27}"/>
-            </a:ext>
-          </a:extLst>
-        </p:cNvPr>
-        <p:cNvGrpSpPr/>
-        <p:nvPr/>
-      </p:nvGrpSpPr>
-      <p:grpSpPr>
-        <a:xfrm>
-          <a:off x="0" y="0"/>
-          <a:ext cx="0" cy="0"/>
-          <a:chOff x="0" y="0"/>
-          <a:chExt cx="0" cy="0"/>
-        </a:xfrm>
-      </p:grpSpPr>
-      <p:sp>
-        <p:nvSpPr>
-          <p:cNvPr id="2" name="TextBox 1">
-            <a:extLst>
-              <a:ext uri="{FF2B5EF4-FFF2-40B4-BE49-F238E27FC236}">
-                <a16:creationId xmlns:a16="http://schemas.microsoft.com/office/drawing/2014/main" id="{1AB4DA62-B82D-2B15-A49B-171CFC36B367}"/>
-              </a:ext>
-            </a:extLst>
-          </p:cNvPr>
-          <p:cNvSpPr txBox="1"/>
-          <p:nvPr/>
-        </p:nvSpPr>
-        <p:spPr>
-          <a:xfrm>
-            <a:off x="0" y="358254"/>
-            <a:ext cx="12191999" cy="4082208"/>
-          </a:xfrm>
-          <a:prstGeom prst="rect">
-            <a:avLst/>
-          </a:prstGeom>
-          <a:noFill/>
-        </p:spPr>
-        <p:txBody>
-          <a:bodyPr wrap="square" rtlCol="0">
-            <a:spAutoFit/>
-          </a:bodyPr>
-          <a:lstStyle/>
-          <a:p>
-            <a:pPr marL="0" marR="0" lvl="0" indent="0" algn="ctr" defTabSz="914400" rtl="0" eaLnBrk="1" fontAlgn="auto" latinLnBrk="0" hangingPunct="1">
-              <a:lnSpc>
-                <a:spcPts val="11000"/>
-              </a:lnSpc>
-              <a:spcBef>
-                <a:spcPts val="0"/>
-              </a:spcBef>
-              <a:spcAft>
-                <a:spcPts val="0"/>
-              </a:spcAft>
-              <a:buClrTx/>
-              <a:buSzTx/>
-              <a:buFontTx/>
-              <a:buNone/>
-              <a:tabLst/>
-              <a:defRPr/>
-            </a:pPr>
-            <a:r>
-              <a:rPr kumimoji="0" lang="en-US" sz="11500" b="0" i="0" u="none" strike="noStrike" kern="1200" cap="none" spc="0" normalizeH="0" baseline="0" noProof="0" dirty="0">
-                <a:ln>
-                  <a:noFill/>
-                </a:ln>
-                <a:solidFill>
-                  <a:prstClr val="white"/>
-                </a:solidFill>
-                <a:effectLst/>
-                <a:uLnTx/>
-                <a:uFillTx/>
-                <a:latin typeface="Helvetica Neue UltraLight" panose="02000206000000020004" pitchFamily="2" charset="0"/>
-                <a:ea typeface="Helvetica Neue UltraLight" panose="02000206000000020004" pitchFamily="2" charset="0"/>
-                <a:cs typeface="Helvetica Neue" panose="02000503000000020004" pitchFamily="2" charset="0"/>
-              </a:rPr>
-              <a:t>neoclassical.ai</a:t>
-            </a:r>
-          </a:p>
-          <a:p>
-            <a:pPr algn="ctr">
-              <a:lnSpc>
-                <a:spcPts val="10000"/>
-              </a:lnSpc>
-              <a:defRPr/>
-            </a:pPr>
-            <a:r>
-              <a:rPr kumimoji="0" lang="en-US" sz="11500" b="1" i="0" u="none" strike="noStrike" kern="1200" cap="none" spc="0" normalizeH="0" baseline="0" noProof="0" dirty="0" err="1">
-                <a:ln>
-                  <a:noFill/>
-                </a:ln>
-                <a:solidFill>
-                  <a:srgbClr val="FFC000"/>
-                </a:solidFill>
-                <a:effectLst/>
-                <a:uLnTx/>
-                <a:uFillTx/>
-                <a:latin typeface="Helvetica Neue Condensed Black" panose="02000503000000020004" pitchFamily="2" charset="0"/>
-                <a:ea typeface="Helvetica Neue Condensed Black" panose="02000503000000020004" pitchFamily="2" charset="0"/>
-                <a:cs typeface="Helvetica Neue Condensed Black" panose="02000503000000020004" pitchFamily="2" charset="0"/>
-              </a:rPr>
-              <a:t>Deinococcus</a:t>
-            </a:r>
-            <a:r>
-              <a:rPr kumimoji="0" lang="en-US" sz="11500" b="1" i="0" u="none" strike="noStrike" kern="1200" cap="none" spc="0" normalizeH="0" baseline="0" noProof="0" dirty="0">
-                <a:ln>
-                  <a:noFill/>
-                </a:ln>
-                <a:solidFill>
-                  <a:srgbClr val="FFC000"/>
-                </a:solidFill>
-                <a:effectLst/>
-                <a:uLnTx/>
-                <a:uFillTx/>
-                <a:latin typeface="Helvetica Neue Condensed Black" panose="02000503000000020004" pitchFamily="2" charset="0"/>
-                <a:ea typeface="Helvetica Neue Condensed Black" panose="02000503000000020004" pitchFamily="2" charset="0"/>
-                <a:cs typeface="Helvetica Neue Condensed Black" panose="02000503000000020004" pitchFamily="2" charset="0"/>
-              </a:rPr>
-              <a:t> </a:t>
-            </a:r>
-            <a:r>
-              <a:rPr kumimoji="0" lang="en-US" sz="11500" b="1" i="0" u="none" strike="noStrike" kern="1200" cap="none" spc="0" normalizeH="0" baseline="0" noProof="0" dirty="0" err="1">
-                <a:ln>
-                  <a:noFill/>
-                </a:ln>
-                <a:solidFill>
-                  <a:srgbClr val="FFC000"/>
-                </a:solidFill>
-                <a:effectLst/>
-                <a:uLnTx/>
-                <a:uFillTx/>
-                <a:latin typeface="Helvetica Neue Condensed Black" panose="02000503000000020004" pitchFamily="2" charset="0"/>
-                <a:ea typeface="Helvetica Neue Condensed Black" panose="02000503000000020004" pitchFamily="2" charset="0"/>
-                <a:cs typeface="Helvetica Neue Condensed Black" panose="02000503000000020004" pitchFamily="2" charset="0"/>
-              </a:rPr>
-              <a:t>Radiodurans</a:t>
-            </a:r>
-            <a:endParaRPr kumimoji="0" lang="en-US" sz="11500" b="1" i="0" u="none" strike="noStrike" kern="1200" cap="none" spc="0" normalizeH="0" baseline="0" noProof="0" dirty="0">
-              <a:ln>
-                <a:noFill/>
-              </a:ln>
-              <a:solidFill>
-                <a:srgbClr val="FFC000"/>
-              </a:solidFill>
-              <a:effectLst/>
-              <a:uLnTx/>
-              <a:uFillTx/>
-              <a:latin typeface="Helvetica Neue Condensed Black" panose="02000503000000020004" pitchFamily="2" charset="0"/>
-              <a:ea typeface="Helvetica Neue Condensed Black" panose="02000503000000020004" pitchFamily="2" charset="0"/>
-              <a:cs typeface="Helvetica Neue Condensed Black" panose="02000503000000020004" pitchFamily="2" charset="0"/>
-            </a:endParaRPr>
-          </a:p>
-        </p:txBody>
-      </p:sp>
-    </p:spTree>
-    <p:extLst>
-      <p:ext uri="{BB962C8B-B14F-4D97-AF65-F5344CB8AC3E}">
-        <p14:creationId xmlns:p14="http://schemas.microsoft.com/office/powerpoint/2010/main" val="3014659976"/>
+        <p14:creationId xmlns:p14="http://schemas.microsoft.com/office/powerpoint/2010/main" val="213017330"/>
       </p:ext>
     </p:extLst>
   </p:cSld>
@@ -16872,334 +12331,6 @@
 </file>
 
 <file path=ppt/theme/theme2.xml><?xml version="1.0" encoding="utf-8"?>
-<a:theme xmlns:a="http://schemas.openxmlformats.org/drawingml/2006/main" name="2_Office Theme">
-  <a:themeElements>
-    <a:clrScheme name="Office">
-      <a:dk1>
-        <a:sysClr val="windowText" lastClr="000000"/>
-      </a:dk1>
-      <a:lt1>
-        <a:sysClr val="window" lastClr="FFFFFF"/>
-      </a:lt1>
-      <a:dk2>
-        <a:srgbClr val="44546A"/>
-      </a:dk2>
-      <a:lt2>
-        <a:srgbClr val="E7E6E6"/>
-      </a:lt2>
-      <a:accent1>
-        <a:srgbClr val="4472C4"/>
-      </a:accent1>
-      <a:accent2>
-        <a:srgbClr val="ED7D31"/>
-      </a:accent2>
-      <a:accent3>
-        <a:srgbClr val="A5A5A5"/>
-      </a:accent3>
-      <a:accent4>
-        <a:srgbClr val="FFC000"/>
-      </a:accent4>
-      <a:accent5>
-        <a:srgbClr val="5B9BD5"/>
-      </a:accent5>
-      <a:accent6>
-        <a:srgbClr val="70AD47"/>
-      </a:accent6>
-      <a:hlink>
-        <a:srgbClr val="0563C1"/>
-      </a:hlink>
-      <a:folHlink>
-        <a:srgbClr val="954F72"/>
-      </a:folHlink>
-    </a:clrScheme>
-    <a:fontScheme name="Office">
-      <a:majorFont>
-        <a:latin typeface="Calibri Light" panose="020F0302020204030204"/>
-        <a:ea typeface=""/>
-        <a:cs typeface=""/>
-        <a:font script="Jpan" typeface="游ゴシック Light"/>
-        <a:font script="Hang" typeface="맑은 고딕"/>
-        <a:font script="Hans" typeface="等线 Light"/>
-        <a:font script="Hant" typeface="新細明體"/>
-        <a:font script="Arab" typeface="Times New Roman"/>
-        <a:font script="Hebr" typeface="Times New Roman"/>
-        <a:font script="Thai" typeface="Angsana New"/>
-        <a:font script="Ethi" typeface="Nyala"/>
-        <a:font script="Beng" typeface="Vrinda"/>
-        <a:font script="Gujr" typeface="Shruti"/>
-        <a:font script="Khmr" typeface="MoolBoran"/>
-        <a:font script="Knda" typeface="Tunga"/>
-        <a:font script="Guru" typeface="Raavi"/>
-        <a:font script="Cans" typeface="Euphemia"/>
-        <a:font script="Cher" typeface="Plantagenet Cherokee"/>
-        <a:font script="Yiii" typeface="Microsoft Yi Baiti"/>
-        <a:font script="Tibt" typeface="Microsoft Himalaya"/>
-        <a:font script="Thaa" typeface="MV Boli"/>
-        <a:font script="Deva" typeface="Mangal"/>
-        <a:font script="Telu" typeface="Gautami"/>
-        <a:font script="Taml" typeface="Latha"/>
-        <a:font script="Syrc" typeface="Estrangelo Edessa"/>
-        <a:font script="Orya" typeface="Kalinga"/>
-        <a:font script="Mlym" typeface="Kartika"/>
-        <a:font script="Laoo" typeface="DokChampa"/>
-        <a:font script="Sinh" typeface="Iskoola Pota"/>
-        <a:font script="Mong" typeface="Mongolian Baiti"/>
-        <a:font script="Viet" typeface="Times New Roman"/>
-        <a:font script="Uigh" typeface="Microsoft Uighur"/>
-        <a:font script="Geor" typeface="Sylfaen"/>
-        <a:font script="Armn" typeface="Arial"/>
-        <a:font script="Bugi" typeface="Leelawadee UI"/>
-        <a:font script="Bopo" typeface="Microsoft JhengHei"/>
-        <a:font script="Java" typeface="Javanese Text"/>
-        <a:font script="Lisu" typeface="Segoe UI"/>
-        <a:font script="Mymr" typeface="Myanmar Text"/>
-        <a:font script="Nkoo" typeface="Ebrima"/>
-        <a:font script="Olck" typeface="Nirmala UI"/>
-        <a:font script="Osma" typeface="Ebrima"/>
-        <a:font script="Phag" typeface="Phagspa"/>
-        <a:font script="Syrn" typeface="Estrangelo Edessa"/>
-        <a:font script="Syrj" typeface="Estrangelo Edessa"/>
-        <a:font script="Syre" typeface="Estrangelo Edessa"/>
-        <a:font script="Sora" typeface="Nirmala UI"/>
-        <a:font script="Tale" typeface="Microsoft Tai Le"/>
-        <a:font script="Talu" typeface="Microsoft New Tai Lue"/>
-        <a:font script="Tfng" typeface="Ebrima"/>
-      </a:majorFont>
-      <a:minorFont>
-        <a:latin typeface="Calibri" panose="020F0502020204030204"/>
-        <a:ea typeface=""/>
-        <a:cs typeface=""/>
-        <a:font script="Jpan" typeface="游ゴシック"/>
-        <a:font script="Hang" typeface="맑은 고딕"/>
-        <a:font script="Hans" typeface="等线"/>
-        <a:font script="Hant" typeface="新細明體"/>
-        <a:font script="Arab" typeface="Arial"/>
-        <a:font script="Hebr" typeface="Arial"/>
-        <a:font script="Thai" typeface="Cordia New"/>
-        <a:font script="Ethi" typeface="Nyala"/>
-        <a:font script="Beng" typeface="Vrinda"/>
-        <a:font script="Gujr" typeface="Shruti"/>
-        <a:font script="Khmr" typeface="DaunPenh"/>
-        <a:font script="Knda" typeface="Tunga"/>
-        <a:font script="Guru" typeface="Raavi"/>
-        <a:font script="Cans" typeface="Euphemia"/>
-        <a:font script="Cher" typeface="Plantagenet Cherokee"/>
-        <a:font script="Yiii" typeface="Microsoft Yi Baiti"/>
-        <a:font script="Tibt" typeface="Microsoft Himalaya"/>
-        <a:font script="Thaa" typeface="MV Boli"/>
-        <a:font script="Deva" typeface="Mangal"/>
-        <a:font script="Telu" typeface="Gautami"/>
-        <a:font script="Taml" typeface="Latha"/>
-        <a:font script="Syrc" typeface="Estrangelo Edessa"/>
-        <a:font script="Orya" typeface="Kalinga"/>
-        <a:font script="Mlym" typeface="Kartika"/>
-        <a:font script="Laoo" typeface="DokChampa"/>
-        <a:font script="Sinh" typeface="Iskoola Pota"/>
-        <a:font script="Mong" typeface="Mongolian Baiti"/>
-        <a:font script="Viet" typeface="Arial"/>
-        <a:font script="Uigh" typeface="Microsoft Uighur"/>
-        <a:font script="Geor" typeface="Sylfaen"/>
-        <a:font script="Armn" typeface="Arial"/>
-        <a:font script="Bugi" typeface="Leelawadee UI"/>
-        <a:font script="Bopo" typeface="Microsoft JhengHei"/>
-        <a:font script="Java" typeface="Javanese Text"/>
-        <a:font script="Lisu" typeface="Segoe UI"/>
-        <a:font script="Mymr" typeface="Myanmar Text"/>
-        <a:font script="Nkoo" typeface="Ebrima"/>
-        <a:font script="Olck" typeface="Nirmala UI"/>
-        <a:font script="Osma" typeface="Ebrima"/>
-        <a:font script="Phag" typeface="Phagspa"/>
-        <a:font script="Syrn" typeface="Estrangelo Edessa"/>
-        <a:font script="Syrj" typeface="Estrangelo Edessa"/>
-        <a:font script="Syre" typeface="Estrangelo Edessa"/>
-        <a:font script="Sora" typeface="Nirmala UI"/>
-        <a:font script="Tale" typeface="Microsoft Tai Le"/>
-        <a:font script="Talu" typeface="Microsoft New Tai Lue"/>
-        <a:font script="Tfng" typeface="Ebrima"/>
-      </a:minorFont>
-    </a:fontScheme>
-    <a:fmtScheme name="Office">
-      <a:fillStyleLst>
-        <a:solidFill>
-          <a:schemeClr val="phClr"/>
-        </a:solidFill>
-        <a:gradFill rotWithShape="1">
-          <a:gsLst>
-            <a:gs pos="0">
-              <a:schemeClr val="phClr">
-                <a:lumMod val="110000"/>
-                <a:satMod val="105000"/>
-                <a:tint val="67000"/>
-              </a:schemeClr>
-            </a:gs>
-            <a:gs pos="50000">
-              <a:schemeClr val="phClr">
-                <a:lumMod val="105000"/>
-                <a:satMod val="103000"/>
-                <a:tint val="73000"/>
-              </a:schemeClr>
-            </a:gs>
-            <a:gs pos="100000">
-              <a:schemeClr val="phClr">
-                <a:lumMod val="105000"/>
-                <a:satMod val="109000"/>
-                <a:tint val="81000"/>
-              </a:schemeClr>
-            </a:gs>
-          </a:gsLst>
-          <a:lin ang="5400000" scaled="0"/>
-        </a:gradFill>
-        <a:gradFill rotWithShape="1">
-          <a:gsLst>
-            <a:gs pos="0">
-              <a:schemeClr val="phClr">
-                <a:satMod val="103000"/>
-                <a:lumMod val="102000"/>
-                <a:tint val="94000"/>
-              </a:schemeClr>
-            </a:gs>
-            <a:gs pos="50000">
-              <a:schemeClr val="phClr">
-                <a:satMod val="110000"/>
-                <a:lumMod val="100000"/>
-                <a:shade val="100000"/>
-              </a:schemeClr>
-            </a:gs>
-            <a:gs pos="100000">
-              <a:schemeClr val="phClr">
-                <a:lumMod val="99000"/>
-                <a:satMod val="120000"/>
-                <a:shade val="78000"/>
-              </a:schemeClr>
-            </a:gs>
-          </a:gsLst>
-          <a:lin ang="5400000" scaled="0"/>
-        </a:gradFill>
-      </a:fillStyleLst>
-      <a:lnStyleLst>
-        <a:ln w="6350" cap="flat" cmpd="sng" algn="ctr">
-          <a:solidFill>
-            <a:schemeClr val="phClr"/>
-          </a:solidFill>
-          <a:prstDash val="solid"/>
-          <a:miter lim="800000"/>
-        </a:ln>
-        <a:ln w="12700" cap="flat" cmpd="sng" algn="ctr">
-          <a:solidFill>
-            <a:schemeClr val="phClr"/>
-          </a:solidFill>
-          <a:prstDash val="solid"/>
-          <a:miter lim="800000"/>
-        </a:ln>
-        <a:ln w="19050" cap="flat" cmpd="sng" algn="ctr">
-          <a:solidFill>
-            <a:schemeClr val="phClr"/>
-          </a:solidFill>
-          <a:prstDash val="solid"/>
-          <a:miter lim="800000"/>
-        </a:ln>
-      </a:lnStyleLst>
-      <a:effectStyleLst>
-        <a:effectStyle>
-          <a:effectLst/>
-        </a:effectStyle>
-        <a:effectStyle>
-          <a:effectLst/>
-        </a:effectStyle>
-        <a:effectStyle>
-          <a:effectLst>
-            <a:outerShdw blurRad="57150" dist="19050" dir="5400000" algn="ctr" rotWithShape="0">
-              <a:srgbClr val="000000">
-                <a:alpha val="63000"/>
-              </a:srgbClr>
-            </a:outerShdw>
-          </a:effectLst>
-        </a:effectStyle>
-      </a:effectStyleLst>
-      <a:bgFillStyleLst>
-        <a:solidFill>
-          <a:schemeClr val="phClr"/>
-        </a:solidFill>
-        <a:solidFill>
-          <a:schemeClr val="phClr">
-            <a:tint val="95000"/>
-            <a:satMod val="170000"/>
-          </a:schemeClr>
-        </a:solidFill>
-        <a:gradFill rotWithShape="1">
-          <a:gsLst>
-            <a:gs pos="0">
-              <a:schemeClr val="phClr">
-                <a:tint val="93000"/>
-                <a:satMod val="150000"/>
-                <a:shade val="98000"/>
-                <a:lumMod val="102000"/>
-              </a:schemeClr>
-            </a:gs>
-            <a:gs pos="50000">
-              <a:schemeClr val="phClr">
-                <a:tint val="98000"/>
-                <a:satMod val="130000"/>
-                <a:shade val="90000"/>
-                <a:lumMod val="103000"/>
-              </a:schemeClr>
-            </a:gs>
-            <a:gs pos="100000">
-              <a:schemeClr val="phClr">
-                <a:shade val="63000"/>
-                <a:satMod val="120000"/>
-              </a:schemeClr>
-            </a:gs>
-          </a:gsLst>
-          <a:lin ang="5400000" scaled="0"/>
-        </a:gradFill>
-      </a:bgFillStyleLst>
-    </a:fmtScheme>
-  </a:themeElements>
-  <a:objectDefaults>
-    <a:spDef>
-      <a:spPr/>
-      <a:bodyPr wrap="none">
-        <a:spAutoFit/>
-      </a:bodyPr>
-      <a:lstStyle>
-        <a:defPPr algn="l">
-          <a:defRPr sz="2400" dirty="0" smtClean="0">
-            <a:latin typeface="Helvetica Neue" panose="02000503000000020004" pitchFamily="2" charset="0"/>
-            <a:ea typeface="Helvetica Neue" panose="02000503000000020004" pitchFamily="2" charset="0"/>
-            <a:cs typeface="Helvetica Neue" panose="02000503000000020004" pitchFamily="2" charset="0"/>
-          </a:defRPr>
-        </a:defPPr>
-      </a:lstStyle>
-    </a:spDef>
-    <a:txDef>
-      <a:spPr>
-        <a:noFill/>
-      </a:spPr>
-      <a:bodyPr wrap="none" rtlCol="0">
-        <a:spAutoFit/>
-      </a:bodyPr>
-      <a:lstStyle>
-        <a:defPPr algn="l">
-          <a:defRPr dirty="0" smtClean="0">
-            <a:latin typeface="Helvetica Neue" panose="02000503000000020004" pitchFamily="2" charset="0"/>
-            <a:ea typeface="Helvetica Neue" panose="02000503000000020004" pitchFamily="2" charset="0"/>
-            <a:cs typeface="Helvetica Neue" panose="02000503000000020004" pitchFamily="2" charset="0"/>
-          </a:defRPr>
-        </a:defPPr>
-      </a:lstStyle>
-    </a:txDef>
-  </a:objectDefaults>
-  <a:extraClrSchemeLst/>
-  <a:extLst>
-    <a:ext uri="{05A4C25C-085E-4340-85A3-A5531E510DB2}">
-      <thm15:themeFamily xmlns:thm15="http://schemas.microsoft.com/office/thememl/2012/main" name="Office Theme" id="{62F939B6-93AF-4DB8-9C6B-D6C7DFDC589F}" vid="{4A3C46E8-61CC-4603-A589-7422A47A8E4A}"/>
-    </a:ext>
-  </a:extLst>
-</a:theme>
-</file>
-
-<file path=ppt/theme/theme3.xml><?xml version="1.0" encoding="utf-8"?>
 <a:theme xmlns:a="http://schemas.openxmlformats.org/drawingml/2006/main" name="Office Theme">
   <a:themeElements>
     <a:clrScheme name="Office">
